--- a/Arquitectura de Sistemas Computacionales/Clases/Clase 2 - Modelos de servicio IaaS PaaS SaaS/Presentacion.pptx
+++ b/Arquitectura de Sistemas Computacionales/Clases/Clase 2 - Modelos de servicio IaaS PaaS SaaS/Presentacion.pptx
@@ -19,6 +19,19 @@
     <p:sldId id="267" r:id="rId18"/>
     <p:sldId id="268" r:id="rId19"/>
     <p:sldId id="269" r:id="rId20"/>
+    <p:sldId id="270" r:id="rId21"/>
+    <p:sldId id="271" r:id="rId22"/>
+    <p:sldId id="272" r:id="rId23"/>
+    <p:sldId id="273" r:id="rId24"/>
+    <p:sldId id="274" r:id="rId25"/>
+    <p:sldId id="275" r:id="rId26"/>
+    <p:sldId id="276" r:id="rId27"/>
+    <p:sldId id="277" r:id="rId28"/>
+    <p:sldId id="278" r:id="rId29"/>
+    <p:sldId id="279" r:id="rId30"/>
+    <p:sldId id="280" r:id="rId31"/>
+    <p:sldId id="281" r:id="rId32"/>
+    <p:sldId id="282" r:id="rId33"/>
   </p:sldIdLst>
   <p:sldSz cx="12191695" cy="6858000" type="screen4x3"/>
   <p:notesSz cx="6858000" cy="9144000"/>
@@ -3471,7 +3484,7 @@
         <p:spPr>
           <a:xfrm>
             <a:off x="0" y="0"/>
-            <a:ext cx="12191695" cy="1170432"/>
+            <a:ext cx="12191695" cy="960120"/>
           </a:xfrm>
           <a:prstGeom prst="rect">
             <a:avLst/>
@@ -3513,7 +3526,7 @@
         </p:nvSpPr>
         <p:spPr>
           <a:xfrm>
-            <a:off x="0" y="1170432"/>
+            <a:off x="0" y="960120"/>
             <a:ext cx="12191695" cy="41148"/>
           </a:xfrm>
           <a:prstGeom prst="rect">
@@ -3557,7 +3570,7 @@
         <p:spPr>
           <a:xfrm>
             <a:off x="457200" y="164592"/>
-            <a:ext cx="11277295" cy="384048"/>
+            <a:ext cx="11277295" cy="502920"/>
           </a:xfrm>
           <a:prstGeom prst="rect">
             <a:avLst/>
@@ -3577,7 +3590,7 @@
                 </a:solidFill>
                 <a:latin typeface="Calibri"/>
               </a:rPr>
-              <a:t>Herramientas de hoy</a:t>
+              <a:t>IaaS, PaaS y SaaS: los tres cortes, uno por uno (1/3)</a:t>
             </a:r>
           </a:p>
         </p:txBody>
@@ -3590,8 +3603,8 @@
         </p:nvSpPr>
         <p:spPr>
           <a:xfrm>
-            <a:off x="457200" y="566928"/>
-            <a:ext cx="11277295" cy="411480"/>
+            <a:off x="457200" y="1170432"/>
+            <a:ext cx="11277295" cy="5230368"/>
           </a:xfrm>
           <a:prstGeom prst="rect">
             <a:avLst/>
@@ -3604,633 +3617,122 @@
           </a:bodyPr>
           <a:lstStyle/>
           <a:p>
-            <a:r>
-              <a:rPr sz="1400" b="0" i="0">
-                <a:solidFill>
-                  <a:srgbClr val="B8D8EE"/>
-                </a:solidFill>
-                <a:latin typeface="Calibri"/>
-              </a:rPr>
-              <a:t>Gratis · navegador o free tier · sin cuenta de pago</a:t>
-            </a:r>
-          </a:p>
-        </p:txBody>
-      </p:sp>
-      <p:sp>
-        <p:nvSpPr>
-          <p:cNvPr id="6" name="Rounded Rectangle 5"/>
-          <p:cNvSpPr/>
-          <p:nvPr/>
-        </p:nvSpPr>
-        <p:spPr>
-          <a:xfrm>
-            <a:off x="457200" y="1591056"/>
-            <a:ext cx="3624986" cy="2331720"/>
-          </a:xfrm>
-          <a:prstGeom prst="roundRect">
-            <a:avLst>
-              <a:gd name="adj" fmla="val 12000"/>
-            </a:avLst>
-          </a:prstGeom>
-          <a:solidFill>
-            <a:srgbClr val="F2F2F2"/>
-          </a:solidFill>
-          <a:ln>
-            <a:noFill/>
-          </a:ln>
-        </p:spPr>
-        <p:style>
-          <a:lnRef idx="1">
-            <a:schemeClr val="accent1"/>
-          </a:lnRef>
-          <a:fillRef idx="3">
-            <a:schemeClr val="accent1"/>
-          </a:fillRef>
-          <a:effectRef idx="2">
-            <a:schemeClr val="accent1"/>
-          </a:effectRef>
-          <a:fontRef idx="minor">
-            <a:schemeClr val="lt1"/>
-          </a:fontRef>
-        </p:style>
-        <p:txBody>
-          <a:bodyPr rtlCol="0" anchor="ctr"/>
-          <a:lstStyle/>
-          <a:p>
-            <a:pPr algn="ctr"/>
-          </a:p>
-        </p:txBody>
-      </p:sp>
-      <p:sp>
-        <p:nvSpPr>
-          <p:cNvPr id="7" name="Rectangle 6"/>
-          <p:cNvSpPr/>
-          <p:nvPr/>
-        </p:nvSpPr>
-        <p:spPr>
-          <a:xfrm>
-            <a:off x="457200" y="1591056"/>
-            <a:ext cx="3624986" cy="64008"/>
-          </a:xfrm>
-          <a:prstGeom prst="rect">
-            <a:avLst/>
-          </a:prstGeom>
-          <a:solidFill>
-            <a:srgbClr val="095292"/>
-          </a:solidFill>
-          <a:ln>
-            <a:noFill/>
-          </a:ln>
-        </p:spPr>
-        <p:style>
-          <a:lnRef idx="1">
-            <a:schemeClr val="accent1"/>
-          </a:lnRef>
-          <a:fillRef idx="3">
-            <a:schemeClr val="accent1"/>
-          </a:fillRef>
-          <a:effectRef idx="2">
-            <a:schemeClr val="accent1"/>
-          </a:effectRef>
-          <a:fontRef idx="minor">
-            <a:schemeClr val="lt1"/>
-          </a:fontRef>
-        </p:style>
-        <p:txBody>
-          <a:bodyPr rtlCol="0" anchor="ctr"/>
-          <a:lstStyle/>
-          <a:p>
-            <a:pPr algn="ctr"/>
-          </a:p>
-        </p:txBody>
-      </p:sp>
-      <p:sp>
-        <p:nvSpPr>
-          <p:cNvPr id="8" name="Rectangle 7"/>
-          <p:cNvSpPr/>
-          <p:nvPr/>
-        </p:nvSpPr>
-        <p:spPr>
-          <a:xfrm>
-            <a:off x="457200" y="1655064"/>
-            <a:ext cx="3624986" cy="27432"/>
-          </a:xfrm>
-          <a:prstGeom prst="rect">
-            <a:avLst/>
-          </a:prstGeom>
-          <a:solidFill>
-            <a:srgbClr val="FFD000"/>
-          </a:solidFill>
-          <a:ln>
-            <a:noFill/>
-          </a:ln>
-        </p:spPr>
-        <p:style>
-          <a:lnRef idx="1">
-            <a:schemeClr val="accent1"/>
-          </a:lnRef>
-          <a:fillRef idx="3">
-            <a:schemeClr val="accent1"/>
-          </a:fillRef>
-          <a:effectRef idx="2">
-            <a:schemeClr val="accent1"/>
-          </a:effectRef>
-          <a:fontRef idx="minor">
-            <a:schemeClr val="lt1"/>
-          </a:fontRef>
-        </p:style>
-        <p:txBody>
-          <a:bodyPr rtlCol="0" anchor="ctr"/>
-          <a:lstStyle/>
-          <a:p>
-            <a:pPr algn="ctr"/>
-          </a:p>
-        </p:txBody>
-      </p:sp>
-      <p:pic>
-        <p:nvPicPr>
-          <p:cNvPr id="9" name="Picture 8" descr="google_docs.png"/>
-          <p:cNvPicPr>
-            <a:picLocks noChangeAspect="1"/>
-          </p:cNvPicPr>
-          <p:nvPr/>
-        </p:nvPicPr>
-        <p:blipFill>
-          <a:blip r:embed="rId2"/>
-          <a:stretch>
-            <a:fillRect/>
-          </a:stretch>
-        </p:blipFill>
-        <p:spPr>
-          <a:xfrm>
-            <a:off x="1643329" y="1847087"/>
-            <a:ext cx="1252728" cy="1252728"/>
-          </a:xfrm>
-          <a:prstGeom prst="rect">
-            <a:avLst/>
-          </a:prstGeom>
-        </p:spPr>
-      </p:pic>
-      <p:sp>
-        <p:nvSpPr>
-          <p:cNvPr id="10" name="TextBox 9"/>
-          <p:cNvSpPr txBox="1"/>
-          <p:nvPr/>
-        </p:nvSpPr>
-        <p:spPr>
-          <a:xfrm>
-            <a:off x="530352" y="3191256"/>
-            <a:ext cx="3478682" cy="621792"/>
-          </a:xfrm>
-          <a:prstGeom prst="rect">
-            <a:avLst/>
-          </a:prstGeom>
-          <a:noFill/>
-        </p:spPr>
-        <p:txBody>
-          <a:bodyPr wrap="square" anchor="t"/>
-          <a:lstStyle/>
-          <a:p>
-            <a:pPr algn="ctr"/>
-            <a:r>
-              <a:rPr sz="1300" b="1" i="0">
-                <a:solidFill>
-                  <a:srgbClr val="095292"/>
-                </a:solidFill>
-                <a:latin typeface="Calibri"/>
-              </a:rPr>
-              <a:t>Google Docs</a:t>
-            </a:r>
-          </a:p>
-          <a:p>
-            <a:pPr algn="ctr">
-              <a:spcBef>
-                <a:spcPts val="200"/>
-              </a:spcBef>
-            </a:pPr>
-            <a:r>
-              <a:rPr sz="1000" b="0" i="0">
-                <a:solidFill>
-                  <a:srgbClr val="666666"/>
-                </a:solidFill>
-                <a:latin typeface="Calibri"/>
-              </a:rPr>
-              <a:t>ADR-001</a:t>
-            </a:r>
-          </a:p>
-        </p:txBody>
-      </p:sp>
-      <p:sp>
-        <p:nvSpPr>
-          <p:cNvPr id="11" name="Rounded Rectangle 10"/>
-          <p:cNvSpPr/>
-          <p:nvPr/>
-        </p:nvSpPr>
-        <p:spPr>
-          <a:xfrm>
-            <a:off x="4283354" y="1591056"/>
-            <a:ext cx="3624986" cy="2331720"/>
-          </a:xfrm>
-          <a:prstGeom prst="roundRect">
-            <a:avLst>
-              <a:gd name="adj" fmla="val 12000"/>
-            </a:avLst>
-          </a:prstGeom>
-          <a:solidFill>
-            <a:srgbClr val="F2F2F2"/>
-          </a:solidFill>
-          <a:ln>
-            <a:noFill/>
-          </a:ln>
-        </p:spPr>
-        <p:style>
-          <a:lnRef idx="1">
-            <a:schemeClr val="accent1"/>
-          </a:lnRef>
-          <a:fillRef idx="3">
-            <a:schemeClr val="accent1"/>
-          </a:fillRef>
-          <a:effectRef idx="2">
-            <a:schemeClr val="accent1"/>
-          </a:effectRef>
-          <a:fontRef idx="minor">
-            <a:schemeClr val="lt1"/>
-          </a:fontRef>
-        </p:style>
-        <p:txBody>
-          <a:bodyPr rtlCol="0" anchor="ctr"/>
-          <a:lstStyle/>
-          <a:p>
-            <a:pPr algn="ctr"/>
-          </a:p>
-        </p:txBody>
-      </p:sp>
-      <p:sp>
-        <p:nvSpPr>
-          <p:cNvPr id="12" name="Rectangle 11"/>
-          <p:cNvSpPr/>
-          <p:nvPr/>
-        </p:nvSpPr>
-        <p:spPr>
-          <a:xfrm>
-            <a:off x="4283354" y="1591056"/>
-            <a:ext cx="3624986" cy="64008"/>
-          </a:xfrm>
-          <a:prstGeom prst="rect">
-            <a:avLst/>
-          </a:prstGeom>
-          <a:solidFill>
-            <a:srgbClr val="095292"/>
-          </a:solidFill>
-          <a:ln>
-            <a:noFill/>
-          </a:ln>
-        </p:spPr>
-        <p:style>
-          <a:lnRef idx="1">
-            <a:schemeClr val="accent1"/>
-          </a:lnRef>
-          <a:fillRef idx="3">
-            <a:schemeClr val="accent1"/>
-          </a:fillRef>
-          <a:effectRef idx="2">
-            <a:schemeClr val="accent1"/>
-          </a:effectRef>
-          <a:fontRef idx="minor">
-            <a:schemeClr val="lt1"/>
-          </a:fontRef>
-        </p:style>
-        <p:txBody>
-          <a:bodyPr rtlCol="0" anchor="ctr"/>
-          <a:lstStyle/>
-          <a:p>
-            <a:pPr algn="ctr"/>
-          </a:p>
-        </p:txBody>
-      </p:sp>
-      <p:sp>
-        <p:nvSpPr>
-          <p:cNvPr id="13" name="Rectangle 12"/>
-          <p:cNvSpPr/>
-          <p:nvPr/>
-        </p:nvSpPr>
-        <p:spPr>
-          <a:xfrm>
-            <a:off x="4283354" y="1655064"/>
-            <a:ext cx="3624986" cy="27432"/>
-          </a:xfrm>
-          <a:prstGeom prst="rect">
-            <a:avLst/>
-          </a:prstGeom>
-          <a:solidFill>
-            <a:srgbClr val="FFD000"/>
-          </a:solidFill>
-          <a:ln>
-            <a:noFill/>
-          </a:ln>
-        </p:spPr>
-        <p:style>
-          <a:lnRef idx="1">
-            <a:schemeClr val="accent1"/>
-          </a:lnRef>
-          <a:fillRef idx="3">
-            <a:schemeClr val="accent1"/>
-          </a:fillRef>
-          <a:effectRef idx="2">
-            <a:schemeClr val="accent1"/>
-          </a:effectRef>
-          <a:fontRef idx="minor">
-            <a:schemeClr val="lt1"/>
-          </a:fontRef>
-        </p:style>
-        <p:txBody>
-          <a:bodyPr rtlCol="0" anchor="ctr"/>
-          <a:lstStyle/>
-          <a:p>
-            <a:pPr algn="ctr"/>
-          </a:p>
-        </p:txBody>
-      </p:sp>
-      <p:pic>
-        <p:nvPicPr>
-          <p:cNvPr id="14" name="Picture 13" descr="drawio.png"/>
-          <p:cNvPicPr>
-            <a:picLocks noChangeAspect="1"/>
-          </p:cNvPicPr>
-          <p:nvPr/>
-        </p:nvPicPr>
-        <p:blipFill>
-          <a:blip r:embed="rId3"/>
-          <a:stretch>
-            <a:fillRect/>
-          </a:stretch>
-        </p:blipFill>
-        <p:spPr>
-          <a:xfrm>
-            <a:off x="5469483" y="1847087"/>
-            <a:ext cx="1252728" cy="1252728"/>
-          </a:xfrm>
-          <a:prstGeom prst="rect">
-            <a:avLst/>
-          </a:prstGeom>
-        </p:spPr>
-      </p:pic>
-      <p:sp>
-        <p:nvSpPr>
-          <p:cNvPr id="15" name="TextBox 14"/>
-          <p:cNvSpPr txBox="1"/>
-          <p:nvPr/>
-        </p:nvSpPr>
-        <p:spPr>
-          <a:xfrm>
-            <a:off x="4356506" y="3191256"/>
-            <a:ext cx="3478682" cy="621792"/>
-          </a:xfrm>
-          <a:prstGeom prst="rect">
-            <a:avLst/>
-          </a:prstGeom>
-          <a:noFill/>
-        </p:spPr>
-        <p:txBody>
-          <a:bodyPr wrap="square" anchor="t"/>
-          <a:lstStyle/>
-          <a:p>
-            <a:pPr algn="ctr"/>
-            <a:r>
-              <a:rPr sz="1300" b="1" i="0">
-                <a:solidFill>
-                  <a:srgbClr val="095292"/>
-                </a:solidFill>
-                <a:latin typeface="Calibri"/>
-              </a:rPr>
-              <a:t>draw.io</a:t>
-            </a:r>
-          </a:p>
-          <a:p>
-            <a:pPr algn="ctr">
-              <a:spcBef>
-                <a:spcPts val="200"/>
-              </a:spcBef>
-            </a:pPr>
-            <a:r>
-              <a:rPr sz="1000" b="0" i="0">
-                <a:solidFill>
-                  <a:srgbClr val="666666"/>
-                </a:solidFill>
-                <a:latin typeface="Calibri"/>
-              </a:rPr>
-              <a:t>Matriz de modelos</a:t>
-            </a:r>
-          </a:p>
-        </p:txBody>
-      </p:sp>
-      <p:sp>
-        <p:nvSpPr>
-          <p:cNvPr id="16" name="Rounded Rectangle 15"/>
-          <p:cNvSpPr/>
-          <p:nvPr/>
-        </p:nvSpPr>
-        <p:spPr>
-          <a:xfrm>
-            <a:off x="8109508" y="1591056"/>
-            <a:ext cx="3624986" cy="2331720"/>
-          </a:xfrm>
-          <a:prstGeom prst="roundRect">
-            <a:avLst>
-              <a:gd name="adj" fmla="val 12000"/>
-            </a:avLst>
-          </a:prstGeom>
-          <a:solidFill>
-            <a:srgbClr val="F2F2F2"/>
-          </a:solidFill>
-          <a:ln>
-            <a:noFill/>
-          </a:ln>
-        </p:spPr>
-        <p:style>
-          <a:lnRef idx="1">
-            <a:schemeClr val="accent1"/>
-          </a:lnRef>
-          <a:fillRef idx="3">
-            <a:schemeClr val="accent1"/>
-          </a:fillRef>
-          <a:effectRef idx="2">
-            <a:schemeClr val="accent1"/>
-          </a:effectRef>
-          <a:fontRef idx="minor">
-            <a:schemeClr val="lt1"/>
-          </a:fontRef>
-        </p:style>
-        <p:txBody>
-          <a:bodyPr rtlCol="0" anchor="ctr"/>
-          <a:lstStyle/>
-          <a:p>
-            <a:pPr algn="ctr"/>
-          </a:p>
-        </p:txBody>
-      </p:sp>
-      <p:sp>
-        <p:nvSpPr>
-          <p:cNvPr id="17" name="Rectangle 16"/>
-          <p:cNvSpPr/>
-          <p:nvPr/>
-        </p:nvSpPr>
-        <p:spPr>
-          <a:xfrm>
-            <a:off x="8109508" y="1591056"/>
-            <a:ext cx="3624986" cy="64008"/>
-          </a:xfrm>
-          <a:prstGeom prst="rect">
-            <a:avLst/>
-          </a:prstGeom>
-          <a:solidFill>
-            <a:srgbClr val="095292"/>
-          </a:solidFill>
-          <a:ln>
-            <a:noFill/>
-          </a:ln>
-        </p:spPr>
-        <p:style>
-          <a:lnRef idx="1">
-            <a:schemeClr val="accent1"/>
-          </a:lnRef>
-          <a:fillRef idx="3">
-            <a:schemeClr val="accent1"/>
-          </a:fillRef>
-          <a:effectRef idx="2">
-            <a:schemeClr val="accent1"/>
-          </a:effectRef>
-          <a:fontRef idx="minor">
-            <a:schemeClr val="lt1"/>
-          </a:fontRef>
-        </p:style>
-        <p:txBody>
-          <a:bodyPr rtlCol="0" anchor="ctr"/>
-          <a:lstStyle/>
-          <a:p>
-            <a:pPr algn="ctr"/>
-          </a:p>
-        </p:txBody>
-      </p:sp>
-      <p:sp>
-        <p:nvSpPr>
-          <p:cNvPr id="18" name="Rectangle 17"/>
-          <p:cNvSpPr/>
-          <p:nvPr/>
-        </p:nvSpPr>
-        <p:spPr>
-          <a:xfrm>
-            <a:off x="8109508" y="1655064"/>
-            <a:ext cx="3624986" cy="27432"/>
-          </a:xfrm>
-          <a:prstGeom prst="rect">
-            <a:avLst/>
-          </a:prstGeom>
-          <a:solidFill>
-            <a:srgbClr val="FFD000"/>
-          </a:solidFill>
-          <a:ln>
-            <a:noFill/>
-          </a:ln>
-        </p:spPr>
-        <p:style>
-          <a:lnRef idx="1">
-            <a:schemeClr val="accent1"/>
-          </a:lnRef>
-          <a:fillRef idx="3">
-            <a:schemeClr val="accent1"/>
-          </a:fillRef>
-          <a:effectRef idx="2">
-            <a:schemeClr val="accent1"/>
-          </a:effectRef>
-          <a:fontRef idx="minor">
-            <a:schemeClr val="lt1"/>
-          </a:fontRef>
-        </p:style>
-        <p:txBody>
-          <a:bodyPr rtlCol="0" anchor="ctr"/>
-          <a:lstStyle/>
-          <a:p>
-            <a:pPr algn="ctr"/>
-          </a:p>
-        </p:txBody>
-      </p:sp>
-      <p:pic>
-        <p:nvPicPr>
-          <p:cNvPr id="19" name="Picture 18" descr="examlab.png"/>
-          <p:cNvPicPr>
-            <a:picLocks noChangeAspect="1"/>
-          </p:cNvPicPr>
-          <p:nvPr/>
-        </p:nvPicPr>
-        <p:blipFill>
-          <a:blip r:embed="rId4"/>
-          <a:stretch>
-            <a:fillRect/>
-          </a:stretch>
-        </p:blipFill>
-        <p:spPr>
-          <a:xfrm>
-            <a:off x="9295638" y="1847087"/>
-            <a:ext cx="1252728" cy="1252728"/>
-          </a:xfrm>
-          <a:prstGeom prst="rect">
-            <a:avLst/>
-          </a:prstGeom>
-        </p:spPr>
-      </p:pic>
-      <p:sp>
-        <p:nvSpPr>
-          <p:cNvPr id="20" name="TextBox 19"/>
-          <p:cNvSpPr txBox="1"/>
-          <p:nvPr/>
-        </p:nvSpPr>
-        <p:spPr>
-          <a:xfrm>
-            <a:off x="8182660" y="3191256"/>
-            <a:ext cx="3478682" cy="621792"/>
-          </a:xfrm>
-          <a:prstGeom prst="rect">
-            <a:avLst/>
-          </a:prstGeom>
-          <a:noFill/>
-        </p:spPr>
-        <p:txBody>
-          <a:bodyPr wrap="square" anchor="t"/>
-          <a:lstStyle/>
-          <a:p>
-            <a:pPr algn="ctr"/>
-            <a:r>
-              <a:rPr sz="1300" b="1" i="0">
-                <a:solidFill>
-                  <a:srgbClr val="095292"/>
-                </a:solidFill>
-                <a:latin typeface="Calibri"/>
-              </a:rPr>
-              <a:t>la plataforma del curso</a:t>
-            </a:r>
-          </a:p>
-          <a:p>
-            <a:pPr algn="ctr">
-              <a:spcBef>
-                <a:spcPts val="200"/>
-              </a:spcBef>
-            </a:pPr>
-            <a:r>
-              <a:rPr sz="1000" b="0" i="0">
-                <a:solidFill>
-                  <a:srgbClr val="666666"/>
-                </a:solidFill>
-                <a:latin typeface="Calibri"/>
-              </a:rPr>
-              <a:t>Donde se entrega</a:t>
-            </a:r>
-          </a:p>
-        </p:txBody>
-      </p:sp>
-      <p:sp>
-        <p:nvSpPr>
-          <p:cNvPr id="21" name="TextBox 20"/>
+            <a:pPr>
+              <a:spcAft>
+                <a:spcPts val="800"/>
+              </a:spcAft>
+            </a:pPr>
+            <a:r>
+              <a:rPr sz="1800" b="0" i="0">
+                <a:solidFill>
+                  <a:srgbClr val="333333"/>
+                </a:solidFill>
+                <a:latin typeface="Calibri"/>
+              </a:rPr>
+              <a:t>–   IaaS, infraestructura como servicio, corta la linea justo encima de la virtualizacion: el proveedor entrega maquinas virtuales, redes y discos</a:t>
+            </a:r>
+          </a:p>
+          <a:p>
+            <a:pPr>
+              <a:spcAft>
+                <a:spcPts val="800"/>
+              </a:spcAft>
+            </a:pPr>
+            <a:r>
+              <a:rPr sz="1800" b="0" i="0">
+                <a:solidFill>
+                  <a:srgbClr val="333333"/>
+                </a:solidFill>
+                <a:latin typeface="Calibri"/>
+              </a:rPr>
+              <a:t>–   Y el cliente recibe una maquina practicamente vacia con un sistema operativo que debe actualizar, endurecer, monitorear y respaldar el mismo.</a:t>
+            </a:r>
+          </a:p>
+          <a:p>
+            <a:pPr>
+              <a:spcAft>
+                <a:spcPts val="800"/>
+              </a:spcAft>
+            </a:pPr>
+            <a:r>
+              <a:rPr sz="1800" b="0" i="0">
+                <a:solidFill>
+                  <a:srgbClr val="333333"/>
+                </a:solidFill>
+                <a:latin typeface="Calibri"/>
+              </a:rPr>
+              <a:t>–   Lo que gana es control total, porque puede instalar cualquier version de cualquier cosa, abrir los puertos que quiera y afinar el sistema.</a:t>
+            </a:r>
+          </a:p>
+          <a:p>
+            <a:pPr>
+              <a:spcAft>
+                <a:spcPts val="800"/>
+              </a:spcAft>
+            </a:pPr>
+            <a:r>
+              <a:rPr sz="1800" b="0" i="0">
+                <a:solidFill>
+                  <a:srgbClr val="333333"/>
+                </a:solidFill>
+                <a:latin typeface="Calibri"/>
+              </a:rPr>
+              <a:t>–   Lo que paga es trabajo operativo permanente, que en la practica se mide en horas de persona por semana dedicadas a aplicar parches de seguridad, rotar certificados y vigilar el espacio en disco.</a:t>
+            </a:r>
+          </a:p>
+          <a:p>
+            <a:pPr>
+              <a:spcAft>
+                <a:spcPts val="800"/>
+              </a:spcAft>
+            </a:pPr>
+            <a:r>
+              <a:rPr sz="1800" b="0" i="0">
+                <a:solidFill>
+                  <a:srgbClr val="333333"/>
+                </a:solidFill>
+                <a:latin typeface="Calibri"/>
+              </a:rPr>
+              <a:t>–   Para CloudLite Turnos, el ejemplo de la barberia con agendamiento de citas, elegir IaaS significaria que el estudiante se compromete a administrar el sistema operativo donde corren la API y la base de datos; en un curso de doce semanas</a:t>
+            </a:r>
+          </a:p>
+          <a:p>
+            <a:pPr>
+              <a:spcAft>
+                <a:spcPts val="800"/>
+              </a:spcAft>
+            </a:pPr>
+            <a:r>
+              <a:rPr sz="1800" b="0" i="0">
+                <a:solidFill>
+                  <a:srgbClr val="333333"/>
+                </a:solidFill>
+                <a:latin typeface="Calibri"/>
+              </a:rPr>
+              <a:t>–   Y trabajando solo o con dos companeros, eso consume justamente el tiempo que deberia dedicarse a disenar la arquitectura y a sustentarla.</a:t>
+            </a:r>
+          </a:p>
+          <a:p>
+            <a:pPr>
+              <a:spcAft>
+                <a:spcPts val="800"/>
+              </a:spcAft>
+            </a:pPr>
+            <a:r>
+              <a:rPr sz="1800" b="0" i="0">
+                <a:solidFill>
+                  <a:srgbClr val="333333"/>
+                </a:solidFill>
+                <a:latin typeface="Calibri"/>
+              </a:rPr>
+              <a:t>–   PaaS, plataforma como servicio, sube la linea dos escalones: el proveedor administra tambien el sistema operativo y el runtime, y el cliente entrega su codigo mas un archivo de configuracion; la plataforma lo construye, lo empaqueta y lo pone a correr.</a:t>
+            </a:r>
+          </a:p>
+        </p:txBody>
+      </p:sp>
+      <p:sp>
+        <p:nvSpPr>
+          <p:cNvPr id="6" name="TextBox 5"/>
           <p:cNvSpPr txBox="1"/>
           <p:nvPr/>
         </p:nvSpPr>
@@ -4404,7 +3906,7 @@
                 </a:solidFill>
                 <a:latin typeface="Calibri"/>
               </a:rPr>
-              <a:t>PI CloudLite — entregable de hoy</a:t>
+              <a:t>IaaS, PaaS y SaaS: los tres cortes, uno por uno (2/3)</a:t>
             </a:r>
           </a:p>
         </p:txBody>
@@ -4443,25 +3945,7 @@
                 </a:solidFill>
                 <a:latin typeface="Calibri"/>
               </a:rPr>
-              <a:t>–   </a:t>
-            </a:r>
-            <a:r>
-              <a:rPr sz="2000" b="1" i="0">
-                <a:solidFill>
-                  <a:srgbClr val="333333"/>
-                </a:solidFill>
-                <a:latin typeface="Calibri"/>
-              </a:rPr>
-              <a:t>Entregable:</a:t>
-            </a:r>
-            <a:r>
-              <a:rPr sz="2000" b="0" i="0">
-                <a:solidFill>
-                  <a:srgbClr val="333333"/>
-                </a:solidFill>
-                <a:latin typeface="Calibri"/>
-              </a:rPr>
-              <a:t> ADR-001: decisión de modelo de servicio + matriz de comparación aplicada al dominio</a:t>
+              <a:t>–   El cliente pierde el acceso a la maquina, porque ya no hay un servidor donde entrar por consola</a:t>
             </a:r>
           </a:p>
           <a:p>
@@ -4477,16 +3961,7 @@
                 </a:solidFill>
                 <a:latin typeface="Calibri"/>
               </a:rPr>
-              <a:t>–   Herramienta: </a:t>
-            </a:r>
-            <a:r>
-              <a:rPr sz="2000" b="1" i="0">
-                <a:solidFill>
-                  <a:srgbClr val="333333"/>
-                </a:solidFill>
-                <a:latin typeface="Calibri"/>
-              </a:rPr>
-              <a:t>Google Docs · draw.io (opcional)</a:t>
+              <a:t>–   Y gana velocidad: un despliegue que en IaaS implica preparar una imagen, configurar el servicio y probar la red, en PaaS se reduce a subir el codigo al repositorio.</a:t>
             </a:r>
           </a:p>
           <a:p>
@@ -4502,25 +3977,7 @@
                 </a:solidFill>
                 <a:latin typeface="Calibri"/>
               </a:rPr>
-              <a:t>–   Todo lo que construyan hoy entra al </a:t>
-            </a:r>
-            <a:r>
-              <a:rPr sz="2000" b="1" i="0">
-                <a:solidFill>
-                  <a:srgbClr val="333333"/>
-                </a:solidFill>
-                <a:latin typeface="Calibri"/>
-              </a:rPr>
-              <a:t>informe/repo del PI</a:t>
-            </a:r>
-            <a:r>
-              <a:rPr sz="2000" b="0" i="0">
-                <a:solidFill>
-                  <a:srgbClr val="333333"/>
-                </a:solidFill>
-                <a:latin typeface="Calibri"/>
-              </a:rPr>
-              <a:t> (no es lab suelto).</a:t>
+              <a:t>–   Los niveles gratuitos tipicos de este modelo ofrecen del orden de 512 MB de memoria por instancia, una cantidad limitada de horas de ejecucion al mes y suspension automatica del servicio tras unos 15 minutos sin trafico</a:t>
             </a:r>
           </a:p>
           <a:p>
@@ -4536,7 +3993,55 @@
                 </a:solidFill>
                 <a:latin typeface="Calibri"/>
               </a:rPr>
-              <a:t>–   Individual por defecto · el docente puede autorizar equipos de 2–3; la entrega en la plataforma del curso siempre es individual.</a:t>
+              <a:t>–   Lo que produce el efecto conocido como arranque en frio: la primera peticion despues de la inactividad puede tardar varios segundos en lugar de milisegundos.</a:t>
+            </a:r>
+          </a:p>
+          <a:p>
+            <a:pPr>
+              <a:spcAft>
+                <a:spcPts val="800"/>
+              </a:spcAft>
+            </a:pPr>
+            <a:r>
+              <a:rPr sz="2000" b="0" i="0">
+                <a:solidFill>
+                  <a:srgbClr val="333333"/>
+                </a:solidFill>
+                <a:latin typeface="Calibri"/>
+              </a:rPr>
+              <a:t>–   Esos numeros son ordenes de magnitud tipicos que varian entre proveedores, no constantes; lo estructural es el patron, porque gratis siempre implica limites de memoria, de horas y de latencia en frio</a:t>
+            </a:r>
+          </a:p>
+          <a:p>
+            <a:pPr>
+              <a:spcAft>
+                <a:spcPts val="800"/>
+              </a:spcAft>
+            </a:pPr>
+            <a:r>
+              <a:rPr sz="2000" b="0" i="0">
+                <a:solidFill>
+                  <a:srgbClr val="333333"/>
+                </a:solidFill>
+                <a:latin typeface="Calibri"/>
+              </a:rPr>
+              <a:t>–   Y el estudiante debe anticiparlo en su diseno en vez de descubrirlo la noche antes de la sustentacion.</a:t>
+            </a:r>
+          </a:p>
+          <a:p>
+            <a:pPr>
+              <a:spcAft>
+                <a:spcPts val="800"/>
+              </a:spcAft>
+            </a:pPr>
+            <a:r>
+              <a:rPr sz="2000" b="0" i="0">
+                <a:solidFill>
+                  <a:srgbClr val="333333"/>
+                </a:solidFill>
+                <a:latin typeface="Calibri"/>
+              </a:rPr>
+              <a:t>–   SaaS, software como servicio, lleva la linea hasta arriba: el proveedor administra la aplicacion completa y el cliente solo la configura y la usa, sin desplegar nada.</a:t>
             </a:r>
           </a:p>
         </p:txBody>
@@ -4717,7 +4222,7 @@
                 </a:solidFill>
                 <a:latin typeface="Calibri"/>
               </a:rPr>
-              <a:t>Manos a la obra (paso a paso)</a:t>
+              <a:t>IaaS, PaaS y SaaS: los tres cortes, uno por uno (3/3)</a:t>
             </a:r>
           </a:p>
         </p:txBody>
@@ -4750,22 +4255,13 @@
               </a:spcAft>
             </a:pPr>
             <a:r>
-              <a:rPr sz="2000" b="1" i="0">
-                <a:solidFill>
-                  <a:srgbClr val="333333"/>
-                </a:solidFill>
-                <a:latin typeface="Calibri"/>
-              </a:rPr>
-              <a:t>1.</a:t>
-            </a:r>
-            <a:r>
               <a:rPr sz="2000" b="0" i="0">
                 <a:solidFill>
                   <a:srgbClr val="333333"/>
                 </a:solidFill>
                 <a:latin typeface="Calibri"/>
               </a:rPr>
-              <a:t> Paso 1: relea su ficha y su C4 Context de la Clase 1. No cambie de dominio: las preguntas 5 a 7 se califican sobre el mismo sistema, y el ADR que redacte hoy se reutiliza en el informe del PI y en la sustentacion de la Clase 15.</a:t>
+              <a:t>–   El correo corporativo, un servicio de envio de mensajes transaccionales, un proveedor de identidad que resuelve el inicio de sesion o un servicio de almacenamiento y transformacion de imagenes son SaaS desde la perspectiva de quien construye CloudLite.</a:t>
             </a:r>
           </a:p>
           <a:p>
@@ -4781,25 +4277,7 @@
                 </a:solidFill>
                 <a:latin typeface="Calibri"/>
               </a:rPr>
-              <a:t>–   </a:t>
-            </a:r>
-            <a:r>
-              <a:rPr sz="2000" b="1" i="0">
-                <a:solidFill>
-                  <a:srgbClr val="333333"/>
-                </a:solidFill>
-                <a:latin typeface="Calibri"/>
-              </a:rPr>
-              <a:t>2.</a:t>
-            </a:r>
-            <a:r>
-              <a:rPr sz="2000" b="0" i="0">
-                <a:solidFill>
-                  <a:srgbClr val="333333"/>
-                </a:solidFill>
-                <a:latin typeface="Calibri"/>
-              </a:rPr>
-              <a:t> Paso 2: construya en la pregunta 5 la matriz «Criterio | IaaS | PaaS | SaaS» con las cuatro filas en orden (control, costo cualitativo, operacion, time-to-demo) y maximo 2 lineas por celda; verifique que cada celda nombre una capacidad o una restriccion de SU dominio, y que la fila de operacion no afirme que en PaaS o SaaS usted deja de responder por su propia aplicacion.</a:t>
+              <a:t>–   Y aqui esta el punto que casi siempre se pierde: los tres modelos no son excluyentes y un sistema real los combina.</a:t>
             </a:r>
           </a:p>
           <a:p>
@@ -4815,25 +4293,7 @@
                 </a:solidFill>
                 <a:latin typeface="Calibri"/>
               </a:rPr>
-              <a:t>–   </a:t>
-            </a:r>
-            <a:r>
-              <a:rPr sz="2000" b="1" i="0">
-                <a:solidFill>
-                  <a:srgbClr val="333333"/>
-                </a:solidFill>
-                <a:latin typeface="Calibri"/>
-              </a:rPr>
-              <a:t>3.</a:t>
-            </a:r>
-            <a:r>
-              <a:rPr sz="2000" b="0" i="0">
-                <a:solidFill>
-                  <a:srgbClr val="333333"/>
-                </a:solidFill>
-                <a:latin typeface="Calibri"/>
-              </a:rPr>
-              <a:t> Paso 3: redacte en la pregunta 6 el ADR-001 con las cinco secciones rotuladas —titulo, estado con fecha, contexto con sus restricciones reales, la decision en UNA sola frase con UN modelo dominante, y exactamente 2 alternativas descartadas con el motivo atado a su dominio—; verifique que la seccion de decision no nombre dos modelos, porque en ese caso vale cero.</a:t>
+              <a:t>–   La arquitectura probable de CloudLite Turnos es hibrida: la API desplegada como PaaS, la base de datos como servicio gestionado (que es PaaS en su variante de datos)</a:t>
             </a:r>
           </a:p>
           <a:p>
@@ -4849,17 +4309,15 @@
                 </a:solidFill>
                 <a:latin typeface="Calibri"/>
               </a:rPr>
-              <a:t>–   </a:t>
-            </a:r>
-            <a:r>
-              <a:rPr sz="2000" b="1" i="0">
-                <a:solidFill>
-                  <a:srgbClr val="333333"/>
-                </a:solidFill>
-                <a:latin typeface="Calibri"/>
-              </a:rPr>
-              <a:t>4.</a:t>
-            </a:r>
+              <a:t>–   El envio de recordatorios delegado a un SaaS de correo y el almacenamiento de fotos de perfil a un SaaS de archivos.</a:t>
+            </a:r>
+          </a:p>
+          <a:p>
+            <a:pPr>
+              <a:spcAft>
+                <a:spcPts val="800"/>
+              </a:spcAft>
+            </a:pPr>
             <a:r>
               <a:rPr sz="2000" b="0" i="0">
                 <a:solidFill>
@@ -4867,7 +4325,7 @@
                 </a:solidFill>
                 <a:latin typeface="Calibri"/>
               </a:rPr>
-              <a:t> Paso 4: escriba en la pregunta 7 la seccion 6 del mismo ADR, las consecuencias en los tres ejes (operacion, costo y aprendizaje), con al menos una positiva y una negativa por eje marcadas con + y -, y verifique que al menos una negativa hable de amarre al proveedor o de perdida de control; guarde y continue, que la actividad se entrega completa al cierre del corte.</a:t>
+              <a:t>–   El entregable de hoy no pide elegir un modelo unico para todo el sistema; pide elegir por componente y justificar cada eleccion, que es exactamente como se decide en la industria.</a:t>
             </a:r>
           </a:p>
         </p:txBody>
@@ -5048,109 +4506,21 @@
                 </a:solidFill>
                 <a:latin typeface="Calibri"/>
               </a:rPr>
-              <a:t>Para continuar (PI)</a:t>
-            </a:r>
-          </a:p>
-        </p:txBody>
-      </p:sp>
-      <p:sp>
-        <p:nvSpPr>
-          <p:cNvPr id="5" name="Rounded Rectangle 4"/>
-          <p:cNvSpPr/>
-          <p:nvPr/>
-        </p:nvSpPr>
-        <p:spPr>
-          <a:xfrm>
-            <a:off x="457200" y="1261872"/>
-            <a:ext cx="11277295" cy="1051560"/>
-          </a:xfrm>
-          <a:prstGeom prst="roundRect">
-            <a:avLst>
-              <a:gd name="adj" fmla="val 12000"/>
-            </a:avLst>
-          </a:prstGeom>
-          <a:solidFill>
-            <a:srgbClr val="E8F4FA"/>
-          </a:solidFill>
-          <a:ln>
-            <a:noFill/>
-          </a:ln>
-        </p:spPr>
-        <p:style>
-          <a:lnRef idx="1">
-            <a:schemeClr val="accent1"/>
-          </a:lnRef>
-          <a:fillRef idx="3">
-            <a:schemeClr val="accent1"/>
-          </a:fillRef>
-          <a:effectRef idx="2">
-            <a:schemeClr val="accent1"/>
-          </a:effectRef>
-          <a:fontRef idx="minor">
-            <a:schemeClr val="lt1"/>
-          </a:fontRef>
-        </p:style>
-        <p:txBody>
-          <a:bodyPr rtlCol="0" anchor="ctr"/>
-          <a:lstStyle/>
-          <a:p>
-            <a:pPr algn="ctr"/>
-          </a:p>
-        </p:txBody>
-      </p:sp>
-      <p:sp>
-        <p:nvSpPr>
-          <p:cNvPr id="6" name="Rectangle 5"/>
-          <p:cNvSpPr/>
-          <p:nvPr/>
-        </p:nvSpPr>
-        <p:spPr>
-          <a:xfrm>
-            <a:off x="457200" y="1261872"/>
-            <a:ext cx="128016" cy="1051560"/>
-          </a:xfrm>
-          <a:prstGeom prst="rect">
-            <a:avLst/>
-          </a:prstGeom>
-          <a:solidFill>
-            <a:srgbClr val="269CCB"/>
-          </a:solidFill>
-          <a:ln>
-            <a:noFill/>
-          </a:ln>
-        </p:spPr>
-        <p:style>
-          <a:lnRef idx="1">
-            <a:schemeClr val="accent1"/>
-          </a:lnRef>
-          <a:fillRef idx="3">
-            <a:schemeClr val="accent1"/>
-          </a:fillRef>
-          <a:effectRef idx="2">
-            <a:schemeClr val="accent1"/>
-          </a:effectRef>
-          <a:fontRef idx="minor">
-            <a:schemeClr val="lt1"/>
-          </a:fontRef>
-        </p:style>
-        <p:txBody>
-          <a:bodyPr rtlCol="0" anchor="ctr"/>
-          <a:lstStyle/>
-          <a:p>
-            <a:pPr algn="ctr"/>
-          </a:p>
-        </p:txBody>
-      </p:sp>
-      <p:sp>
-        <p:nvSpPr>
-          <p:cNvPr id="7" name="TextBox 6"/>
+              <a:t>Responsabilidad compartida: quien responde por que (1/2)</a:t>
+            </a:r>
+          </a:p>
+        </p:txBody>
+      </p:sp>
+      <p:sp>
+        <p:nvSpPr>
+          <p:cNvPr id="5" name="TextBox 4"/>
           <p:cNvSpPr txBox="1"/>
           <p:nvPr/>
         </p:nvSpPr>
         <p:spPr>
           <a:xfrm>
-            <a:off x="777240" y="1399031"/>
-            <a:ext cx="10774375" cy="822959"/>
+            <a:off x="457200" y="1170432"/>
+            <a:ext cx="11277295" cy="5230368"/>
           </a:xfrm>
           <a:prstGeom prst="rect">
             <a:avLst/>
@@ -5163,313 +4533,90 @@
           </a:bodyPr>
           <a:lstStyle/>
           <a:p>
-            <a:r>
-              <a:rPr sz="1200" b="1" i="0">
-                <a:solidFill>
-                  <a:srgbClr val="269CCB"/>
-                </a:solidFill>
-                <a:latin typeface="Calibri"/>
-              </a:rPr>
-              <a:t>Info</a:t>
-            </a:r>
-          </a:p>
-          <a:p>
             <a:pPr>
-              <a:spcBef>
-                <a:spcPts val="400"/>
-              </a:spcBef>
-            </a:pPr>
-            <a:r>
-              <a:rPr sz="1400" b="0" i="0">
-                <a:solidFill>
-                  <a:srgbClr val="333333"/>
-                </a:solidFill>
-                <a:latin typeface="Calibri"/>
-              </a:rPr>
-              <a:t>Entregable: ADR-001: decisión de modelo de servicio + matriz de comparación aplicada al dominio</a:t>
-            </a:r>
-          </a:p>
-        </p:txBody>
-      </p:sp>
-      <p:sp>
-        <p:nvSpPr>
-          <p:cNvPr id="8" name="Rounded Rectangle 7"/>
-          <p:cNvSpPr/>
-          <p:nvPr/>
-        </p:nvSpPr>
-        <p:spPr>
-          <a:xfrm>
-            <a:off x="457200" y="2478024"/>
-            <a:ext cx="11277295" cy="1051560"/>
-          </a:xfrm>
-          <a:prstGeom prst="roundRect">
-            <a:avLst>
-              <a:gd name="adj" fmla="val 12000"/>
-            </a:avLst>
-          </a:prstGeom>
-          <a:solidFill>
-            <a:srgbClr val="FFF8E1"/>
-          </a:solidFill>
-          <a:ln>
-            <a:noFill/>
-          </a:ln>
-        </p:spPr>
-        <p:style>
-          <a:lnRef idx="1">
-            <a:schemeClr val="accent1"/>
-          </a:lnRef>
-          <a:fillRef idx="3">
-            <a:schemeClr val="accent1"/>
-          </a:fillRef>
-          <a:effectRef idx="2">
-            <a:schemeClr val="accent1"/>
-          </a:effectRef>
-          <a:fontRef idx="minor">
-            <a:schemeClr val="lt1"/>
-          </a:fontRef>
-        </p:style>
-        <p:txBody>
-          <a:bodyPr rtlCol="0" anchor="ctr"/>
-          <a:lstStyle/>
-          <a:p>
-            <a:pPr algn="ctr"/>
-          </a:p>
-        </p:txBody>
-      </p:sp>
-      <p:sp>
-        <p:nvSpPr>
-          <p:cNvPr id="9" name="Rectangle 8"/>
-          <p:cNvSpPr/>
-          <p:nvPr/>
-        </p:nvSpPr>
-        <p:spPr>
-          <a:xfrm>
-            <a:off x="457200" y="2478024"/>
-            <a:ext cx="128016" cy="1051560"/>
-          </a:xfrm>
-          <a:prstGeom prst="rect">
-            <a:avLst/>
-          </a:prstGeom>
-          <a:solidFill>
-            <a:srgbClr val="FFD000"/>
-          </a:solidFill>
-          <a:ln>
-            <a:noFill/>
-          </a:ln>
-        </p:spPr>
-        <p:style>
-          <a:lnRef idx="1">
-            <a:schemeClr val="accent1"/>
-          </a:lnRef>
-          <a:fillRef idx="3">
-            <a:schemeClr val="accent1"/>
-          </a:fillRef>
-          <a:effectRef idx="2">
-            <a:schemeClr val="accent1"/>
-          </a:effectRef>
-          <a:fontRef idx="minor">
-            <a:schemeClr val="lt1"/>
-          </a:fontRef>
-        </p:style>
-        <p:txBody>
-          <a:bodyPr rtlCol="0" anchor="ctr"/>
-          <a:lstStyle/>
-          <a:p>
-            <a:pPr algn="ctr"/>
-          </a:p>
-        </p:txBody>
-      </p:sp>
-      <p:sp>
-        <p:nvSpPr>
-          <p:cNvPr id="10" name="TextBox 9"/>
-          <p:cNvSpPr txBox="1"/>
-          <p:nvPr/>
-        </p:nvSpPr>
-        <p:spPr>
-          <a:xfrm>
-            <a:off x="777240" y="2615184"/>
-            <a:ext cx="10774375" cy="822959"/>
-          </a:xfrm>
-          <a:prstGeom prst="rect">
-            <a:avLst/>
-          </a:prstGeom>
-          <a:noFill/>
-        </p:spPr>
-        <p:txBody>
-          <a:bodyPr wrap="square">
-            <a:spAutoFit/>
-          </a:bodyPr>
-          <a:lstStyle/>
-          <a:p>
-            <a:r>
-              <a:rPr sz="1200" b="1" i="0">
-                <a:solidFill>
-                  <a:srgbClr val="FFD000"/>
-                </a:solidFill>
-                <a:latin typeface="Calibri"/>
-              </a:rPr>
-              <a:t>Aclaración</a:t>
+              <a:spcAft>
+                <a:spcPts val="800"/>
+              </a:spcAft>
+            </a:pPr>
+            <a:r>
+              <a:rPr sz="2000" b="0" i="0">
+                <a:solidFill>
+                  <a:srgbClr val="333333"/>
+                </a:solidFill>
+                <a:latin typeface="Calibri"/>
+              </a:rPr>
+              <a:t>–   El concepto que unifica todo esto se llama modelo de responsabilidad compartida y se resume en una frase que conviene memorizar: el proveedor es responsable de la seguridad DE la nube y el cliente de la seguridad EN la nube.</a:t>
             </a:r>
           </a:p>
           <a:p>
             <a:pPr>
-              <a:spcBef>
-                <a:spcPts val="400"/>
-              </a:spcBef>
-            </a:pPr>
-            <a:r>
-              <a:rPr sz="1400" b="0" i="0">
-                <a:solidFill>
-                  <a:srgbClr val="333333"/>
-                </a:solidFill>
-                <a:latin typeface="Calibri"/>
-              </a:rPr>
-              <a:t>Subir evidencias al paquete CloudLite (Drive/repo) y a la plataforma del curso en la fecha que indique el docente.</a:t>
-            </a:r>
-          </a:p>
-        </p:txBody>
-      </p:sp>
-      <p:sp>
-        <p:nvSpPr>
-          <p:cNvPr id="11" name="Rounded Rectangle 10"/>
-          <p:cNvSpPr/>
-          <p:nvPr/>
-        </p:nvSpPr>
-        <p:spPr>
-          <a:xfrm>
-            <a:off x="457200" y="3694176"/>
-            <a:ext cx="11277295" cy="1051560"/>
-          </a:xfrm>
-          <a:prstGeom prst="roundRect">
-            <a:avLst>
-              <a:gd name="adj" fmla="val 12000"/>
-            </a:avLst>
-          </a:prstGeom>
-          <a:solidFill>
-            <a:srgbClr val="FBE4E4"/>
-          </a:solidFill>
-          <a:ln>
-            <a:noFill/>
-          </a:ln>
-        </p:spPr>
-        <p:style>
-          <a:lnRef idx="1">
-            <a:schemeClr val="accent1"/>
-          </a:lnRef>
-          <a:fillRef idx="3">
-            <a:schemeClr val="accent1"/>
-          </a:fillRef>
-          <a:effectRef idx="2">
-            <a:schemeClr val="accent1"/>
-          </a:effectRef>
-          <a:fontRef idx="minor">
-            <a:schemeClr val="lt1"/>
-          </a:fontRef>
-        </p:style>
-        <p:txBody>
-          <a:bodyPr rtlCol="0" anchor="ctr"/>
-          <a:lstStyle/>
-          <a:p>
-            <a:pPr algn="ctr"/>
-          </a:p>
-        </p:txBody>
-      </p:sp>
-      <p:sp>
-        <p:nvSpPr>
-          <p:cNvPr id="12" name="Rectangle 11"/>
-          <p:cNvSpPr/>
-          <p:nvPr/>
-        </p:nvSpPr>
-        <p:spPr>
-          <a:xfrm>
-            <a:off x="457200" y="3694176"/>
-            <a:ext cx="128016" cy="1051560"/>
-          </a:xfrm>
-          <a:prstGeom prst="rect">
-            <a:avLst/>
-          </a:prstGeom>
-          <a:solidFill>
-            <a:srgbClr val="A02030"/>
-          </a:solidFill>
-          <a:ln>
-            <a:noFill/>
-          </a:ln>
-        </p:spPr>
-        <p:style>
-          <a:lnRef idx="1">
-            <a:schemeClr val="accent1"/>
-          </a:lnRef>
-          <a:fillRef idx="3">
-            <a:schemeClr val="accent1"/>
-          </a:fillRef>
-          <a:effectRef idx="2">
-            <a:schemeClr val="accent1"/>
-          </a:effectRef>
-          <a:fontRef idx="minor">
-            <a:schemeClr val="lt1"/>
-          </a:fontRef>
-        </p:style>
-        <p:txBody>
-          <a:bodyPr rtlCol="0" anchor="ctr"/>
-          <a:lstStyle/>
-          <a:p>
-            <a:pPr algn="ctr"/>
-          </a:p>
-        </p:txBody>
-      </p:sp>
-      <p:sp>
-        <p:nvSpPr>
-          <p:cNvPr id="13" name="TextBox 12"/>
-          <p:cNvSpPr txBox="1"/>
-          <p:nvPr/>
-        </p:nvSpPr>
-        <p:spPr>
-          <a:xfrm>
-            <a:off x="777240" y="3831336"/>
-            <a:ext cx="10774375" cy="822959"/>
-          </a:xfrm>
-          <a:prstGeom prst="rect">
-            <a:avLst/>
-          </a:prstGeom>
-          <a:noFill/>
-        </p:spPr>
-        <p:txBody>
-          <a:bodyPr wrap="square">
-            <a:spAutoFit/>
-          </a:bodyPr>
-          <a:lstStyle/>
-          <a:p>
-            <a:r>
-              <a:rPr sz="1200" b="1" i="0">
-                <a:solidFill>
-                  <a:srgbClr val="A02030"/>
-                </a:solidFill>
-                <a:latin typeface="Calibri"/>
-              </a:rPr>
-              <a:t>Atención</a:t>
+              <a:spcAft>
+                <a:spcPts val="800"/>
+              </a:spcAft>
+            </a:pPr>
+            <a:r>
+              <a:rPr sz="2000" b="0" i="0">
+                <a:solidFill>
+                  <a:srgbClr val="333333"/>
+                </a:solidFill>
+                <a:latin typeface="Calibri"/>
+              </a:rPr>
+              <a:t>–   El proveedor garantiza que el centro de datos no se incendie, que la capa de virtualizacion este parcheada y que los discos esten cifrados en reposo; el cliente sigue siendo responsable de sus contrasenas, sus permisos, sus datos y su configuracion.</a:t>
             </a:r>
           </a:p>
           <a:p>
             <a:pPr>
-              <a:spcBef>
-                <a:spcPts val="400"/>
-              </a:spcBef>
-            </a:pPr>
-            <a:r>
-              <a:rPr sz="1400" b="0" i="0">
-                <a:solidFill>
-                  <a:srgbClr val="333333"/>
-                </a:solidFill>
-                <a:latin typeface="Calibri"/>
-              </a:rPr>
-              <a:t>Sin cloud de pago ni instalaciones obligatorias de hipervisores/Docker Desktop.</a:t>
-            </a:r>
-          </a:p>
-        </p:txBody>
-      </p:sp>
-      <p:sp>
-        <p:nvSpPr>
-          <p:cNvPr id="14" name="TextBox 13"/>
+              <a:spcAft>
+                <a:spcPts val="800"/>
+              </a:spcAft>
+            </a:pPr>
+            <a:r>
+              <a:rPr sz="2000" b="0" i="0">
+                <a:solidFill>
+                  <a:srgbClr val="333333"/>
+                </a:solidFill>
+                <a:latin typeface="Calibri"/>
+              </a:rPr>
+              <a:t>–   Importa porque la causa dominante de los incidentes de seguridad en la nube no son fallas del proveedor sino configuraciones erradas del cliente: un almacenamiento de archivos dejado publico</a:t>
+            </a:r>
+          </a:p>
+          <a:p>
+            <a:pPr>
+              <a:spcAft>
+                <a:spcPts val="800"/>
+              </a:spcAft>
+            </a:pPr>
+            <a:r>
+              <a:rPr sz="2000" b="0" i="0">
+                <a:solidFill>
+                  <a:srgbClr val="333333"/>
+                </a:solidFill>
+                <a:latin typeface="Calibri"/>
+              </a:rPr>
+              <a:t>–   Una credencial subida al repositorio en texto plano, un puerto de base de datos expuesto a internet.</a:t>
+            </a:r>
+          </a:p>
+          <a:p>
+            <a:pPr>
+              <a:spcAft>
+                <a:spcPts val="800"/>
+              </a:spcAft>
+            </a:pPr>
+            <a:r>
+              <a:rPr sz="2000" b="0" i="0">
+                <a:solidFill>
+                  <a:srgbClr val="333333"/>
+                </a:solidFill>
+                <a:latin typeface="Calibri"/>
+              </a:rPr>
+              <a:t>–   Subir de IaaS a PaaS reduce la superficie de responsabilidad del cliente, pero nunca la elimina, y esa idea es el punto de partida literal de la Clase 6.</a:t>
+            </a:r>
+          </a:p>
+        </p:txBody>
+      </p:sp>
+      <p:sp>
+        <p:nvSpPr>
+          <p:cNvPr id="6" name="TextBox 5"/>
           <p:cNvSpPr txBox="1"/>
           <p:nvPr/>
         </p:nvSpPr>
@@ -5537,13 +4684,13 @@
         <p:spPr>
           <a:xfrm>
             <a:off x="0" y="0"/>
-            <a:ext cx="12191695" cy="164592"/>
+            <a:ext cx="12191695" cy="960120"/>
           </a:xfrm>
           <a:prstGeom prst="rect">
             <a:avLst/>
           </a:prstGeom>
           <a:solidFill>
-            <a:srgbClr val="269CCB"/>
+            <a:srgbClr val="095292"/>
           </a:solidFill>
           <a:ln>
             <a:noFill/>
@@ -5571,30 +4718,49 @@
           </a:p>
         </p:txBody>
       </p:sp>
-      <p:pic>
-        <p:nvPicPr>
-          <p:cNvPr id="3" name="Picture 2" descr="logo_uniajc_color.png"/>
-          <p:cNvPicPr>
-            <a:picLocks noChangeAspect="1"/>
-          </p:cNvPicPr>
-          <p:nvPr/>
-        </p:nvPicPr>
-        <p:blipFill>
-          <a:blip r:embed="rId2"/>
-          <a:stretch>
-            <a:fillRect/>
-          </a:stretch>
-        </p:blipFill>
-        <p:spPr>
-          <a:xfrm>
-            <a:off x="10271455" y="5998464"/>
-            <a:ext cx="1463040" cy="643233"/>
-          </a:xfrm>
-          <a:prstGeom prst="rect">
-            <a:avLst/>
-          </a:prstGeom>
-        </p:spPr>
-      </p:pic>
+      <p:sp>
+        <p:nvSpPr>
+          <p:cNvPr id="3" name="Rectangle 2"/>
+          <p:cNvSpPr/>
+          <p:nvPr/>
+        </p:nvSpPr>
+        <p:spPr>
+          <a:xfrm>
+            <a:off x="0" y="960120"/>
+            <a:ext cx="12191695" cy="41148"/>
+          </a:xfrm>
+          <a:prstGeom prst="rect">
+            <a:avLst/>
+          </a:prstGeom>
+          <a:solidFill>
+            <a:srgbClr val="FFD000"/>
+          </a:solidFill>
+          <a:ln>
+            <a:noFill/>
+          </a:ln>
+        </p:spPr>
+        <p:style>
+          <a:lnRef idx="1">
+            <a:schemeClr val="accent1"/>
+          </a:lnRef>
+          <a:fillRef idx="3">
+            <a:schemeClr val="accent1"/>
+          </a:fillRef>
+          <a:effectRef idx="2">
+            <a:schemeClr val="accent1"/>
+          </a:effectRef>
+          <a:fontRef idx="minor">
+            <a:schemeClr val="lt1"/>
+          </a:fontRef>
+        </p:style>
+        <p:txBody>
+          <a:bodyPr rtlCol="0" anchor="ctr"/>
+          <a:lstStyle/>
+          <a:p>
+            <a:pPr algn="ctr"/>
+          </a:p>
+        </p:txBody>
+      </p:sp>
       <p:sp>
         <p:nvSpPr>
           <p:cNvPr id="4" name="TextBox 3"/>
@@ -5603,41 +4769,8 @@
         </p:nvSpPr>
         <p:spPr>
           <a:xfrm>
-            <a:off x="457200" y="1737360"/>
-            <a:ext cx="11277295" cy="1097280"/>
-          </a:xfrm>
-          <a:prstGeom prst="rect">
-            <a:avLst/>
-          </a:prstGeom>
-          <a:noFill/>
-        </p:spPr>
-        <p:txBody>
-          <a:bodyPr wrap="square" anchor="ctr"/>
-          <a:lstStyle/>
-          <a:p>
-            <a:pPr algn="ctr"/>
-            <a:r>
-              <a:rPr sz="3400" b="1" i="0">
-                <a:solidFill>
-                  <a:srgbClr val="095292"/>
-                </a:solidFill>
-                <a:latin typeface="Calibri"/>
-              </a:rPr>
-              <a:t>Clase 2 · PI en movimiento</a:t>
-            </a:r>
-          </a:p>
-        </p:txBody>
-      </p:sp>
-      <p:sp>
-        <p:nvSpPr>
-          <p:cNvPr id="5" name="TextBox 4"/>
-          <p:cNvSpPr txBox="1"/>
-          <p:nvPr/>
-        </p:nvSpPr>
-        <p:spPr>
-          <a:xfrm>
-            <a:off x="457200" y="3017520"/>
-            <a:ext cx="11277295" cy="1645920"/>
+            <a:off x="457200" y="164592"/>
+            <a:ext cx="11277295" cy="502920"/>
           </a:xfrm>
           <a:prstGeom prst="rect">
             <a:avLst/>
@@ -5650,65 +4783,28 @@
           </a:bodyPr>
           <a:lstStyle/>
           <a:p>
-            <a:pPr algn="ctr">
-              <a:spcAft>
-                <a:spcPts val="600"/>
-              </a:spcAft>
-            </a:pPr>
-            <a:r>
-              <a:rPr sz="1600" b="0" i="0">
-                <a:solidFill>
-                  <a:srgbClr val="333333"/>
-                </a:solidFill>
-                <a:latin typeface="Calibri"/>
-              </a:rPr>
-              <a:t>Decidir modelo dominante (IaaS/PaaS/SaaS) para CloudLite + ADR breve</a:t>
-            </a:r>
-          </a:p>
-          <a:p>
-            <a:pPr algn="ctr">
-              <a:spcAft>
-                <a:spcPts val="600"/>
-              </a:spcAft>
-            </a:pPr>
-            <a:r>
-              <a:rPr sz="1600" b="0" i="0">
-                <a:solidFill>
-                  <a:srgbClr val="333333"/>
-                </a:solidFill>
-                <a:latin typeface="Calibri"/>
-              </a:rPr>
-              <a:t>Evidencia: ADR-001: decisión de modelo de servicio + matriz de comparación aplicada al dominio</a:t>
-            </a:r>
-          </a:p>
-          <a:p>
-            <a:pPr algn="ctr">
-              <a:spcAft>
-                <a:spcPts val="600"/>
-              </a:spcAft>
-            </a:pPr>
-            <a:r>
-              <a:rPr sz="1600" b="0" i="0">
-                <a:solidFill>
-                  <a:srgbClr val="333333"/>
-                </a:solidFill>
-                <a:latin typeface="Calibri"/>
-              </a:rPr>
-              <a:t>Siguiente paso = siguiente hito del PI CloudLite</a:t>
-            </a:r>
-          </a:p>
-        </p:txBody>
-      </p:sp>
-      <p:sp>
-        <p:nvSpPr>
-          <p:cNvPr id="6" name="TextBox 5"/>
+            <a:r>
+              <a:rPr sz="2600" b="1" i="0">
+                <a:solidFill>
+                  <a:srgbClr val="FFFFFF"/>
+                </a:solidFill>
+                <a:latin typeface="Calibri"/>
+              </a:rPr>
+              <a:t>Responsabilidad compartida: quien responde por que (2/2)</a:t>
+            </a:r>
+          </a:p>
+        </p:txBody>
+      </p:sp>
+      <p:sp>
+        <p:nvSpPr>
+          <p:cNvPr id="5" name="TextBox 4"/>
           <p:cNvSpPr txBox="1"/>
           <p:nvPr/>
         </p:nvSpPr>
         <p:spPr>
           <a:xfrm>
-            <a:off x="457200" y="4754880"/>
-            <a:ext cx="11277295" cy="640080"/>
+            <a:off x="457200" y="1170432"/>
+            <a:ext cx="11277295" cy="5230368"/>
           </a:xfrm>
           <a:prstGeom prst="rect">
             <a:avLst/>
@@ -5721,15 +4817,1634 @@
           </a:bodyPr>
           <a:lstStyle/>
           <a:p>
+            <a:pPr>
+              <a:spcAft>
+                <a:spcPts val="800"/>
+              </a:spcAft>
+            </a:pPr>
+            <a:r>
+              <a:rPr sz="2000" b="0" i="0">
+                <a:solidFill>
+                  <a:srgbClr val="333333"/>
+                </a:solidFill>
+                <a:latin typeface="Calibri"/>
+              </a:rPr>
+              <a:t>–   De ahi sale el trade-off central, que se escribe como regla practica: a mas abstraccion, menos control y menos trabajo operativo.</a:t>
+            </a:r>
+          </a:p>
+          <a:p>
+            <a:pPr>
+              <a:spcAft>
+                <a:spcPts val="800"/>
+              </a:spcAft>
+            </a:pPr>
+            <a:r>
+              <a:rPr sz="2000" b="0" i="0">
+                <a:solidFill>
+                  <a:srgbClr val="333333"/>
+                </a:solidFill>
+                <a:latin typeface="Calibri"/>
+              </a:rPr>
+              <a:t>–   Pero hay un tercer eje que el estudiante no ve solo, el amarre al proveedor o vendor lock-in, que es el costo de mudarse a otro proveedor mas adelante: bajo en IaaS, porque una maquina virtual con Linux se parece a cualquier otra; medio en PaaS</a:t>
+            </a:r>
+          </a:p>
+          <a:p>
+            <a:pPr>
+              <a:spcAft>
+                <a:spcPts val="800"/>
+              </a:spcAft>
+            </a:pPr>
+            <a:r>
+              <a:rPr sz="2000" b="0" i="0">
+                <a:solidFill>
+                  <a:srgbClr val="333333"/>
+                </a:solidFill>
+                <a:latin typeface="Calibri"/>
+              </a:rPr>
+              <a:t>–   Porque el archivo de configuracion y algunos servicios son propietarios; potencialmente alto en SaaS, porque los datos y parte de la logica viven dentro de un producto ajeno.</a:t>
+            </a:r>
+          </a:p>
+          <a:p>
+            <a:pPr>
+              <a:spcAft>
+                <a:spcPts val="800"/>
+              </a:spcAft>
+            </a:pPr>
+            <a:r>
+              <a:rPr sz="2000" b="0" i="0">
+                <a:solidFill>
+                  <a:srgbClr val="333333"/>
+                </a:solidFill>
+                <a:latin typeface="Calibri"/>
+              </a:rPr>
+              <a:t>–   Para CloudLite la mitigacion no es evitar SaaS sino acotarlo: si el envio de correos se encapsula detras de una interfaz propia, por ejemplo un modulo Notificador con un solo metodo enviar, cambiar de proveedor toca un archivo y no cuarenta.</a:t>
+            </a:r>
+          </a:p>
+        </p:txBody>
+      </p:sp>
+      <p:sp>
+        <p:nvSpPr>
+          <p:cNvPr id="6" name="TextBox 5"/>
+          <p:cNvSpPr txBox="1"/>
+          <p:nvPr/>
+        </p:nvSpPr>
+        <p:spPr>
+          <a:xfrm>
+            <a:off x="11185855" y="6473952"/>
+            <a:ext cx="640080" cy="274320"/>
+          </a:xfrm>
+          <a:prstGeom prst="rect">
+            <a:avLst/>
+          </a:prstGeom>
+          <a:noFill/>
+        </p:spPr>
+        <p:txBody>
+          <a:bodyPr wrap="square">
+            <a:spAutoFit/>
+          </a:bodyPr>
+          <a:lstStyle/>
+          <a:p>
+            <a:pPr algn="r"/>
+            <a:r>
+              <a:rPr sz="1100" b="0" i="0">
+                <a:solidFill>
+                  <a:srgbClr val="666666"/>
+                </a:solidFill>
+                <a:latin typeface="Calibri"/>
+              </a:rPr>
+              <a:t>14</a:t>
+            </a:r>
+          </a:p>
+        </p:txBody>
+      </p:sp>
+    </p:spTree>
+  </p:cSld>
+  <p:clrMapOvr>
+    <a:masterClrMapping/>
+  </p:clrMapOvr>
+</p:sld>
+</file>
+
+<file path=ppt/slides/slide15.xml><?xml version="1.0" encoding="utf-8"?>
+<p:sld xmlns:a="http://schemas.openxmlformats.org/drawingml/2006/main" xmlns:p="http://schemas.openxmlformats.org/presentationml/2006/main" xmlns:r="http://schemas.openxmlformats.org/officeDocument/2006/relationships">
+  <p:cSld>
+    <p:bg>
+      <p:bgPr>
+        <a:solidFill>
+          <a:srgbClr val="FFFFFF"/>
+        </a:solidFill>
+        <a:effectLst/>
+      </p:bgPr>
+    </p:bg>
+    <p:spTree>
+      <p:nvGrpSpPr>
+        <p:cNvPr id="1" name=""/>
+        <p:cNvGrpSpPr/>
+        <p:nvPr/>
+      </p:nvGrpSpPr>
+      <p:grpSpPr/>
+      <p:sp>
+        <p:nvSpPr>
+          <p:cNvPr id="2" name="Rectangle 1"/>
+          <p:cNvSpPr/>
+          <p:nvPr/>
+        </p:nvSpPr>
+        <p:spPr>
+          <a:xfrm>
+            <a:off x="0" y="0"/>
+            <a:ext cx="12191695" cy="960120"/>
+          </a:xfrm>
+          <a:prstGeom prst="rect">
+            <a:avLst/>
+          </a:prstGeom>
+          <a:solidFill>
+            <a:srgbClr val="095292"/>
+          </a:solidFill>
+          <a:ln>
+            <a:noFill/>
+          </a:ln>
+        </p:spPr>
+        <p:style>
+          <a:lnRef idx="1">
+            <a:schemeClr val="accent1"/>
+          </a:lnRef>
+          <a:fillRef idx="3">
+            <a:schemeClr val="accent1"/>
+          </a:fillRef>
+          <a:effectRef idx="2">
+            <a:schemeClr val="accent1"/>
+          </a:effectRef>
+          <a:fontRef idx="minor">
+            <a:schemeClr val="lt1"/>
+          </a:fontRef>
+        </p:style>
+        <p:txBody>
+          <a:bodyPr rtlCol="0" anchor="ctr"/>
+          <a:lstStyle/>
+          <a:p>
             <a:pPr algn="ctr"/>
-            <a:r>
-              <a:rPr sz="2000" b="1" i="0">
-                <a:solidFill>
-                  <a:srgbClr val="269CCB"/>
-                </a:solidFill>
-                <a:latin typeface="Calibri"/>
-              </a:rPr>
-              <a:t>Teoría al servicio del proyecto</a:t>
+          </a:p>
+        </p:txBody>
+      </p:sp>
+      <p:sp>
+        <p:nvSpPr>
+          <p:cNvPr id="3" name="Rectangle 2"/>
+          <p:cNvSpPr/>
+          <p:nvPr/>
+        </p:nvSpPr>
+        <p:spPr>
+          <a:xfrm>
+            <a:off x="0" y="960120"/>
+            <a:ext cx="12191695" cy="41148"/>
+          </a:xfrm>
+          <a:prstGeom prst="rect">
+            <a:avLst/>
+          </a:prstGeom>
+          <a:solidFill>
+            <a:srgbClr val="FFD000"/>
+          </a:solidFill>
+          <a:ln>
+            <a:noFill/>
+          </a:ln>
+        </p:spPr>
+        <p:style>
+          <a:lnRef idx="1">
+            <a:schemeClr val="accent1"/>
+          </a:lnRef>
+          <a:fillRef idx="3">
+            <a:schemeClr val="accent1"/>
+          </a:fillRef>
+          <a:effectRef idx="2">
+            <a:schemeClr val="accent1"/>
+          </a:effectRef>
+          <a:fontRef idx="minor">
+            <a:schemeClr val="lt1"/>
+          </a:fontRef>
+        </p:style>
+        <p:txBody>
+          <a:bodyPr rtlCol="0" anchor="ctr"/>
+          <a:lstStyle/>
+          <a:p>
+            <a:pPr algn="ctr"/>
+          </a:p>
+        </p:txBody>
+      </p:sp>
+      <p:sp>
+        <p:nvSpPr>
+          <p:cNvPr id="4" name="TextBox 3"/>
+          <p:cNvSpPr txBox="1"/>
+          <p:nvPr/>
+        </p:nvSpPr>
+        <p:spPr>
+          <a:xfrm>
+            <a:off x="457200" y="164592"/>
+            <a:ext cx="11277295" cy="502920"/>
+          </a:xfrm>
+          <a:prstGeom prst="rect">
+            <a:avLst/>
+          </a:prstGeom>
+          <a:noFill/>
+        </p:spPr>
+        <p:txBody>
+          <a:bodyPr wrap="square">
+            <a:spAutoFit/>
+          </a:bodyPr>
+          <a:lstStyle/>
+          <a:p>
+            <a:r>
+              <a:rPr sz="2600" b="1" i="0">
+                <a:solidFill>
+                  <a:srgbClr val="FFFFFF"/>
+                </a:solidFill>
+                <a:latin typeface="Calibri"/>
+              </a:rPr>
+              <a:t>El ADR-001: seis secciones rotuladas y una sola decision (1/3)</a:t>
+            </a:r>
+          </a:p>
+        </p:txBody>
+      </p:sp>
+      <p:sp>
+        <p:nvSpPr>
+          <p:cNvPr id="5" name="TextBox 4"/>
+          <p:cNvSpPr txBox="1"/>
+          <p:nvPr/>
+        </p:nvSpPr>
+        <p:spPr>
+          <a:xfrm>
+            <a:off x="457200" y="1170432"/>
+            <a:ext cx="11277295" cy="5230368"/>
+          </a:xfrm>
+          <a:prstGeom prst="rect">
+            <a:avLst/>
+          </a:prstGeom>
+          <a:noFill/>
+        </p:spPr>
+        <p:txBody>
+          <a:bodyPr wrap="square">
+            <a:spAutoFit/>
+          </a:bodyPr>
+          <a:lstStyle/>
+          <a:p>
+            <a:pPr>
+              <a:spcAft>
+                <a:spcPts val="800"/>
+              </a:spcAft>
+            </a:pPr>
+            <a:r>
+              <a:rPr sz="2000" b="0" i="0">
+                <a:solidFill>
+                  <a:srgbClr val="333333"/>
+                </a:solidFill>
+                <a:latin typeface="Calibri"/>
+              </a:rPr>
+              <a:t>–   El entregable concreto es el ADR-001.</a:t>
+            </a:r>
+          </a:p>
+          <a:p>
+            <a:pPr>
+              <a:spcAft>
+                <a:spcPts val="800"/>
+              </a:spcAft>
+            </a:pPr>
+            <a:r>
+              <a:rPr sz="2000" b="0" i="0">
+                <a:solidFill>
+                  <a:srgbClr val="333333"/>
+                </a:solidFill>
+                <a:latin typeface="Calibri"/>
+              </a:rPr>
+              <a:t>–   Un ADR (Architecture Decision Record, registro de decision arquitectonica) es un documento corto, de media pagina a una pagina, que registra UNA sola decision.</a:t>
+            </a:r>
+          </a:p>
+          <a:p>
+            <a:pPr>
+              <a:spcAft>
+                <a:spcPts val="800"/>
+              </a:spcAft>
+            </a:pPr>
+            <a:r>
+              <a:rPr sz="2000" b="0" i="0">
+                <a:solidFill>
+                  <a:srgbClr val="333333"/>
+                </a:solidFill>
+                <a:latin typeface="Calibri"/>
+              </a:rPr>
+              <a:t>–   En este curso tiene SEIS secciones rotuladas, siempre las mismas y en este orden, y hay que dictarlas tal cual porque son las que la actividad califica: 1) Titulo, con el numero consecutivo del ADR; 2) Estado</a:t>
+            </a:r>
+          </a:p>
+          <a:p>
+            <a:pPr>
+              <a:spcAft>
+                <a:spcPts val="800"/>
+              </a:spcAft>
+            </a:pPr>
+            <a:r>
+              <a:rPr sz="2000" b="0" i="0">
+                <a:solidFill>
+                  <a:srgbClr val="333333"/>
+                </a:solidFill>
+                <a:latin typeface="Calibri"/>
+              </a:rPr>
+              <a:t>–   Que hoy es «Aceptado» mas la fecha de la sesion; 3) Contexto, o sea las restricciones bajo las que se decide; 4) Decision, en una sola frase y con un unico modelo dominante</a:t>
+            </a:r>
+          </a:p>
+          <a:p>
+            <a:pPr>
+              <a:spcAft>
+                <a:spcPts val="800"/>
+              </a:spcAft>
+            </a:pPr>
+            <a:r>
+              <a:rPr sz="2000" b="0" i="0">
+                <a:solidFill>
+                  <a:srgbClr val="333333"/>
+                </a:solidFill>
+                <a:latin typeface="Calibri"/>
+              </a:rPr>
+              <a:t>–   5) Alternativas descartadas, exactamente dos y con el motivo atado al dominio; 6) Consecuencias, con lo bueno y lo malo que se acepta.</a:t>
+            </a:r>
+          </a:p>
+          <a:p>
+            <a:pPr>
+              <a:spcAft>
+                <a:spcPts val="800"/>
+              </a:spcAft>
+            </a:pPr>
+            <a:r>
+              <a:rPr sz="2000" b="0" i="0">
+                <a:solidFill>
+                  <a:srgbClr val="333333"/>
+                </a:solidFill>
+                <a:latin typeface="Calibri"/>
+              </a:rPr>
+              <a:t>–   El reparto en la plataforma es que las cinco primeras van en la pregunta 6 y la sexta en la pregunta 7, pero es UN solo documento</a:t>
+            </a:r>
+          </a:p>
+          <a:p>
+            <a:pPr>
+              <a:spcAft>
+                <a:spcPts val="800"/>
+              </a:spcAft>
+            </a:pPr>
+            <a:r>
+              <a:rPr sz="2000" b="0" i="0">
+                <a:solidFill>
+                  <a:srgbClr val="333333"/>
+                </a:solidFill>
+                <a:latin typeface="Calibri"/>
+              </a:rPr>
+              <a:t>–   Y conviene decirlo en voz alta porque el estudiante que lo entienda como dos ejercicios sueltos repite la decision en las consecuencias y pierde puntos.</a:t>
+            </a:r>
+          </a:p>
+        </p:txBody>
+      </p:sp>
+      <p:sp>
+        <p:nvSpPr>
+          <p:cNvPr id="6" name="TextBox 5"/>
+          <p:cNvSpPr txBox="1"/>
+          <p:nvPr/>
+        </p:nvSpPr>
+        <p:spPr>
+          <a:xfrm>
+            <a:off x="11185855" y="6473952"/>
+            <a:ext cx="640080" cy="274320"/>
+          </a:xfrm>
+          <a:prstGeom prst="rect">
+            <a:avLst/>
+          </a:prstGeom>
+          <a:noFill/>
+        </p:spPr>
+        <p:txBody>
+          <a:bodyPr wrap="square">
+            <a:spAutoFit/>
+          </a:bodyPr>
+          <a:lstStyle/>
+          <a:p>
+            <a:pPr algn="r"/>
+            <a:r>
+              <a:rPr sz="1100" b="0" i="0">
+                <a:solidFill>
+                  <a:srgbClr val="666666"/>
+                </a:solidFill>
+                <a:latin typeface="Calibri"/>
+              </a:rPr>
+              <a:t>15</a:t>
+            </a:r>
+          </a:p>
+        </p:txBody>
+      </p:sp>
+    </p:spTree>
+  </p:cSld>
+  <p:clrMapOvr>
+    <a:masterClrMapping/>
+  </p:clrMapOvr>
+</p:sld>
+</file>
+
+<file path=ppt/slides/slide16.xml><?xml version="1.0" encoding="utf-8"?>
+<p:sld xmlns:a="http://schemas.openxmlformats.org/drawingml/2006/main" xmlns:p="http://schemas.openxmlformats.org/presentationml/2006/main" xmlns:r="http://schemas.openxmlformats.org/officeDocument/2006/relationships">
+  <p:cSld>
+    <p:bg>
+      <p:bgPr>
+        <a:solidFill>
+          <a:srgbClr val="FFFFFF"/>
+        </a:solidFill>
+        <a:effectLst/>
+      </p:bgPr>
+    </p:bg>
+    <p:spTree>
+      <p:nvGrpSpPr>
+        <p:cNvPr id="1" name=""/>
+        <p:cNvGrpSpPr/>
+        <p:nvPr/>
+      </p:nvGrpSpPr>
+      <p:grpSpPr/>
+      <p:sp>
+        <p:nvSpPr>
+          <p:cNvPr id="2" name="Rectangle 1"/>
+          <p:cNvSpPr/>
+          <p:nvPr/>
+        </p:nvSpPr>
+        <p:spPr>
+          <a:xfrm>
+            <a:off x="0" y="0"/>
+            <a:ext cx="12191695" cy="960120"/>
+          </a:xfrm>
+          <a:prstGeom prst="rect">
+            <a:avLst/>
+          </a:prstGeom>
+          <a:solidFill>
+            <a:srgbClr val="095292"/>
+          </a:solidFill>
+          <a:ln>
+            <a:noFill/>
+          </a:ln>
+        </p:spPr>
+        <p:style>
+          <a:lnRef idx="1">
+            <a:schemeClr val="accent1"/>
+          </a:lnRef>
+          <a:fillRef idx="3">
+            <a:schemeClr val="accent1"/>
+          </a:fillRef>
+          <a:effectRef idx="2">
+            <a:schemeClr val="accent1"/>
+          </a:effectRef>
+          <a:fontRef idx="minor">
+            <a:schemeClr val="lt1"/>
+          </a:fontRef>
+        </p:style>
+        <p:txBody>
+          <a:bodyPr rtlCol="0" anchor="ctr"/>
+          <a:lstStyle/>
+          <a:p>
+            <a:pPr algn="ctr"/>
+          </a:p>
+        </p:txBody>
+      </p:sp>
+      <p:sp>
+        <p:nvSpPr>
+          <p:cNvPr id="3" name="Rectangle 2"/>
+          <p:cNvSpPr/>
+          <p:nvPr/>
+        </p:nvSpPr>
+        <p:spPr>
+          <a:xfrm>
+            <a:off x="0" y="960120"/>
+            <a:ext cx="12191695" cy="41148"/>
+          </a:xfrm>
+          <a:prstGeom prst="rect">
+            <a:avLst/>
+          </a:prstGeom>
+          <a:solidFill>
+            <a:srgbClr val="FFD000"/>
+          </a:solidFill>
+          <a:ln>
+            <a:noFill/>
+          </a:ln>
+        </p:spPr>
+        <p:style>
+          <a:lnRef idx="1">
+            <a:schemeClr val="accent1"/>
+          </a:lnRef>
+          <a:fillRef idx="3">
+            <a:schemeClr val="accent1"/>
+          </a:fillRef>
+          <a:effectRef idx="2">
+            <a:schemeClr val="accent1"/>
+          </a:effectRef>
+          <a:fontRef idx="minor">
+            <a:schemeClr val="lt1"/>
+          </a:fontRef>
+        </p:style>
+        <p:txBody>
+          <a:bodyPr rtlCol="0" anchor="ctr"/>
+          <a:lstStyle/>
+          <a:p>
+            <a:pPr algn="ctr"/>
+          </a:p>
+        </p:txBody>
+      </p:sp>
+      <p:sp>
+        <p:nvSpPr>
+          <p:cNvPr id="4" name="TextBox 3"/>
+          <p:cNvSpPr txBox="1"/>
+          <p:nvPr/>
+        </p:nvSpPr>
+        <p:spPr>
+          <a:xfrm>
+            <a:off x="457200" y="164592"/>
+            <a:ext cx="11277295" cy="502920"/>
+          </a:xfrm>
+          <a:prstGeom prst="rect">
+            <a:avLst/>
+          </a:prstGeom>
+          <a:noFill/>
+        </p:spPr>
+        <p:txBody>
+          <a:bodyPr wrap="square">
+            <a:spAutoFit/>
+          </a:bodyPr>
+          <a:lstStyle/>
+          <a:p>
+            <a:r>
+              <a:rPr sz="2600" b="1" i="0">
+                <a:solidFill>
+                  <a:srgbClr val="FFFFFF"/>
+                </a:solidFill>
+                <a:latin typeface="Calibri"/>
+              </a:rPr>
+              <a:t>El ADR-001: seis secciones rotuladas y una sola decision (2/3)</a:t>
+            </a:r>
+          </a:p>
+        </p:txBody>
+      </p:sp>
+      <p:sp>
+        <p:nvSpPr>
+          <p:cNvPr id="5" name="TextBox 4"/>
+          <p:cNvSpPr txBox="1"/>
+          <p:nvPr/>
+        </p:nvSpPr>
+        <p:spPr>
+          <a:xfrm>
+            <a:off x="457200" y="1170432"/>
+            <a:ext cx="11277295" cy="5230368"/>
+          </a:xfrm>
+          <a:prstGeom prst="rect">
+            <a:avLst/>
+          </a:prstGeom>
+          <a:noFill/>
+        </p:spPr>
+        <p:txBody>
+          <a:bodyPr wrap="square">
+            <a:spAutoFit/>
+          </a:bodyPr>
+          <a:lstStyle/>
+          <a:p>
+            <a:pPr>
+              <a:spcAft>
+                <a:spcPts val="800"/>
+              </a:spcAft>
+            </a:pPr>
+            <a:r>
+              <a:rPr sz="2000" b="0" i="0">
+                <a:solidFill>
+                  <a:srgbClr val="333333"/>
+                </a:solidFill>
+                <a:latin typeface="Calibri"/>
+              </a:rPr>
+              <a:t>–   No hay seccion de «opciones consideradas»: ese analisis es la matriz de la pregunta 5, y en el ADR solo quedan las dos alternativas que se descartaron.</a:t>
+            </a:r>
+          </a:p>
+          <a:p>
+            <a:pPr>
+              <a:spcAft>
+                <a:spcPts val="800"/>
+              </a:spcAft>
+            </a:pPr>
+            <a:r>
+              <a:rPr sz="2000" b="0" i="0">
+                <a:solidFill>
+                  <a:srgbClr val="333333"/>
+                </a:solidFill>
+                <a:latin typeface="Calibri"/>
+              </a:rPr>
+              <a:t>–   La regla de una decision por documento no es burocracia: es lo que permite que meses despues alguien lea por que se eligio algo sin depender de la memoria de nadie.</a:t>
+            </a:r>
+          </a:p>
+          <a:p>
+            <a:pPr>
+              <a:spcAft>
+                <a:spcPts val="800"/>
+              </a:spcAft>
+            </a:pPr>
+            <a:r>
+              <a:rPr sz="2000" b="0" i="0">
+                <a:solidFill>
+                  <a:srgbClr val="333333"/>
+                </a:solidFill>
+                <a:latin typeface="Calibri"/>
+              </a:rPr>
+              <a:t>–   Un ADR-001 aceptable para CloudLite Turnos diria en CONTEXTO: la barberia agenda por mensajeria y pierde alrededor de tres turnos diarios por doble reserva</a:t>
+            </a:r>
+          </a:p>
+          <a:p>
+            <a:pPr>
+              <a:spcAft>
+                <a:spcPts val="800"/>
+              </a:spcAft>
+            </a:pPr>
+            <a:r>
+              <a:rPr sz="2000" b="0" i="0">
+                <a:solidFill>
+                  <a:srgbClr val="333333"/>
+                </a:solidFill>
+                <a:latin typeface="Calibri"/>
+              </a:rPr>
+              <a:t>–   El proyecto lo sostiene un desarrollador (o un equipo de dos o tres, si el docente lo autorizo) durante doce semanas, sin presupuesto ni tarjeta de credito, y el sistema tiene que estar disponible el dia de la sustentacion.</a:t>
+            </a:r>
+          </a:p>
+          <a:p>
+            <a:pPr>
+              <a:spcAft>
+                <a:spcPts val="800"/>
+              </a:spcAft>
+            </a:pPr>
+            <a:r>
+              <a:rPr sz="2000" b="0" i="0">
+                <a:solidFill>
+                  <a:srgbClr val="333333"/>
+                </a:solidFill>
+                <a:latin typeface="Calibri"/>
+              </a:rPr>
+              <a:t>–   Eso es contexto: son restricciones, no teoria.</a:t>
+            </a:r>
+          </a:p>
+          <a:p>
+            <a:pPr>
+              <a:spcAft>
+                <a:spcPts val="800"/>
+              </a:spcAft>
+            </a:pPr>
+            <a:r>
+              <a:rPr sz="2000" b="0" i="0">
+                <a:solidFill>
+                  <a:srgbClr val="333333"/>
+                </a:solidFill>
+                <a:latin typeface="Calibri"/>
+              </a:rPr>
+              <a:t>–   «Existen tres modelos de servicio y hay que elegir uno» NO es contexto, es el apunte de clase, y esa confusion es el error dominante de la pregunta 6.</a:t>
+            </a:r>
+          </a:p>
+          <a:p>
+            <a:pPr>
+              <a:spcAft>
+                <a:spcPts val="800"/>
+              </a:spcAft>
+            </a:pPr>
+            <a:r>
+              <a:rPr sz="2000" b="0" i="0">
+                <a:solidFill>
+                  <a:srgbClr val="333333"/>
+                </a:solidFill>
+                <a:latin typeface="Calibri"/>
+              </a:rPr>
+              <a:t>–   En DECISION va una frase: la aplicacion de CloudLite Turnos se despliega sobre PaaS.</a:t>
+            </a:r>
+          </a:p>
+        </p:txBody>
+      </p:sp>
+      <p:sp>
+        <p:nvSpPr>
+          <p:cNvPr id="6" name="TextBox 5"/>
+          <p:cNvSpPr txBox="1"/>
+          <p:nvPr/>
+        </p:nvSpPr>
+        <p:spPr>
+          <a:xfrm>
+            <a:off x="11185855" y="6473952"/>
+            <a:ext cx="640080" cy="274320"/>
+          </a:xfrm>
+          <a:prstGeom prst="rect">
+            <a:avLst/>
+          </a:prstGeom>
+          <a:noFill/>
+        </p:spPr>
+        <p:txBody>
+          <a:bodyPr wrap="square">
+            <a:spAutoFit/>
+          </a:bodyPr>
+          <a:lstStyle/>
+          <a:p>
+            <a:pPr algn="r"/>
+            <a:r>
+              <a:rPr sz="1100" b="0" i="0">
+                <a:solidFill>
+                  <a:srgbClr val="666666"/>
+                </a:solidFill>
+                <a:latin typeface="Calibri"/>
+              </a:rPr>
+              <a:t>16</a:t>
+            </a:r>
+          </a:p>
+        </p:txBody>
+      </p:sp>
+    </p:spTree>
+  </p:cSld>
+  <p:clrMapOvr>
+    <a:masterClrMapping/>
+  </p:clrMapOvr>
+</p:sld>
+</file>
+
+<file path=ppt/slides/slide17.xml><?xml version="1.0" encoding="utf-8"?>
+<p:sld xmlns:a="http://schemas.openxmlformats.org/drawingml/2006/main" xmlns:p="http://schemas.openxmlformats.org/presentationml/2006/main" xmlns:r="http://schemas.openxmlformats.org/officeDocument/2006/relationships">
+  <p:cSld>
+    <p:bg>
+      <p:bgPr>
+        <a:solidFill>
+          <a:srgbClr val="FFFFFF"/>
+        </a:solidFill>
+        <a:effectLst/>
+      </p:bgPr>
+    </p:bg>
+    <p:spTree>
+      <p:nvGrpSpPr>
+        <p:cNvPr id="1" name=""/>
+        <p:cNvGrpSpPr/>
+        <p:nvPr/>
+      </p:nvGrpSpPr>
+      <p:grpSpPr/>
+      <p:sp>
+        <p:nvSpPr>
+          <p:cNvPr id="2" name="Rectangle 1"/>
+          <p:cNvSpPr/>
+          <p:nvPr/>
+        </p:nvSpPr>
+        <p:spPr>
+          <a:xfrm>
+            <a:off x="0" y="0"/>
+            <a:ext cx="12191695" cy="960120"/>
+          </a:xfrm>
+          <a:prstGeom prst="rect">
+            <a:avLst/>
+          </a:prstGeom>
+          <a:solidFill>
+            <a:srgbClr val="095292"/>
+          </a:solidFill>
+          <a:ln>
+            <a:noFill/>
+          </a:ln>
+        </p:spPr>
+        <p:style>
+          <a:lnRef idx="1">
+            <a:schemeClr val="accent1"/>
+          </a:lnRef>
+          <a:fillRef idx="3">
+            <a:schemeClr val="accent1"/>
+          </a:fillRef>
+          <a:effectRef idx="2">
+            <a:schemeClr val="accent1"/>
+          </a:effectRef>
+          <a:fontRef idx="minor">
+            <a:schemeClr val="lt1"/>
+          </a:fontRef>
+        </p:style>
+        <p:txBody>
+          <a:bodyPr rtlCol="0" anchor="ctr"/>
+          <a:lstStyle/>
+          <a:p>
+            <a:pPr algn="ctr"/>
+          </a:p>
+        </p:txBody>
+      </p:sp>
+      <p:sp>
+        <p:nvSpPr>
+          <p:cNvPr id="3" name="Rectangle 2"/>
+          <p:cNvSpPr/>
+          <p:nvPr/>
+        </p:nvSpPr>
+        <p:spPr>
+          <a:xfrm>
+            <a:off x="0" y="960120"/>
+            <a:ext cx="12191695" cy="41148"/>
+          </a:xfrm>
+          <a:prstGeom prst="rect">
+            <a:avLst/>
+          </a:prstGeom>
+          <a:solidFill>
+            <a:srgbClr val="FFD000"/>
+          </a:solidFill>
+          <a:ln>
+            <a:noFill/>
+          </a:ln>
+        </p:spPr>
+        <p:style>
+          <a:lnRef idx="1">
+            <a:schemeClr val="accent1"/>
+          </a:lnRef>
+          <a:fillRef idx="3">
+            <a:schemeClr val="accent1"/>
+          </a:fillRef>
+          <a:effectRef idx="2">
+            <a:schemeClr val="accent1"/>
+          </a:effectRef>
+          <a:fontRef idx="minor">
+            <a:schemeClr val="lt1"/>
+          </a:fontRef>
+        </p:style>
+        <p:txBody>
+          <a:bodyPr rtlCol="0" anchor="ctr"/>
+          <a:lstStyle/>
+          <a:p>
+            <a:pPr algn="ctr"/>
+          </a:p>
+        </p:txBody>
+      </p:sp>
+      <p:sp>
+        <p:nvSpPr>
+          <p:cNvPr id="4" name="TextBox 3"/>
+          <p:cNvSpPr txBox="1"/>
+          <p:nvPr/>
+        </p:nvSpPr>
+        <p:spPr>
+          <a:xfrm>
+            <a:off x="457200" y="164592"/>
+            <a:ext cx="11277295" cy="502920"/>
+          </a:xfrm>
+          <a:prstGeom prst="rect">
+            <a:avLst/>
+          </a:prstGeom>
+          <a:noFill/>
+        </p:spPr>
+        <p:txBody>
+          <a:bodyPr wrap="square">
+            <a:spAutoFit/>
+          </a:bodyPr>
+          <a:lstStyle/>
+          <a:p>
+            <a:r>
+              <a:rPr sz="2600" b="1" i="0">
+                <a:solidFill>
+                  <a:srgbClr val="FFFFFF"/>
+                </a:solidFill>
+                <a:latin typeface="Calibri"/>
+              </a:rPr>
+              <a:t>El ADR-001: seis secciones rotuladas y una sola decision (3/3)</a:t>
+            </a:r>
+          </a:p>
+        </p:txBody>
+      </p:sp>
+      <p:sp>
+        <p:nvSpPr>
+          <p:cNvPr id="5" name="TextBox 4"/>
+          <p:cNvSpPr txBox="1"/>
+          <p:nvPr/>
+        </p:nvSpPr>
+        <p:spPr>
+          <a:xfrm>
+            <a:off x="457200" y="1170432"/>
+            <a:ext cx="11277295" cy="5230368"/>
+          </a:xfrm>
+          <a:prstGeom prst="rect">
+            <a:avLst/>
+          </a:prstGeom>
+          <a:noFill/>
+        </p:spPr>
+        <p:txBody>
+          <a:bodyPr wrap="square">
+            <a:spAutoFit/>
+          </a:bodyPr>
+          <a:lstStyle/>
+          <a:p>
+            <a:pPr>
+              <a:spcAft>
+                <a:spcPts val="800"/>
+              </a:spcAft>
+            </a:pPr>
+            <a:r>
+              <a:rPr sz="2000" b="0" i="0">
+                <a:solidFill>
+                  <a:srgbClr val="333333"/>
+                </a:solidFill>
+                <a:latin typeface="Calibri"/>
+              </a:rPr>
+              <a:t>–   En ALTERNATIVAS DESCARTADAS van dos y solo dos: IaaS con maquina virtual propia, descartada porque habria que asumir parches y respaldos del sistema operativo sin tiempo para ello</a:t>
+            </a:r>
+          </a:p>
+          <a:p>
+            <a:pPr>
+              <a:spcAft>
+                <a:spcPts val="800"/>
+              </a:spcAft>
+            </a:pPr>
+            <a:r>
+              <a:rPr sz="2000" b="0" i="0">
+                <a:solidFill>
+                  <a:srgbClr val="333333"/>
+                </a:solidFill>
+                <a:latin typeface="Calibri"/>
+              </a:rPr>
+              <a:t>–   Y SaaS de agendamiento ya existente, descartada porque el proyecto perderia su objeto, ya que no habria arquitectura que disenar sino solo configuracion.</a:t>
+            </a:r>
+          </a:p>
+          <a:p>
+            <a:pPr>
+              <a:spcAft>
+                <a:spcPts val="800"/>
+              </a:spcAft>
+            </a:pPr>
+            <a:r>
+              <a:rPr sz="2000" b="0" i="0">
+                <a:solidFill>
+                  <a:srgbClr val="333333"/>
+                </a:solidFill>
+                <a:latin typeface="Calibri"/>
+              </a:rPr>
+              <a:t>–   Que identidad y correo se consuman como SaaS satelite se aclara aqui y no en la decision, porque el modelo dominante se refiere a la aplicacion propia.</a:t>
+            </a:r>
+          </a:p>
+          <a:p>
+            <a:pPr>
+              <a:spcAft>
+                <a:spcPts val="800"/>
+              </a:spcAft>
+            </a:pPr>
+            <a:r>
+              <a:rPr sz="2000" b="0" i="0">
+                <a:solidFill>
+                  <a:srgbClr val="333333"/>
+                </a:solidFill>
+                <a:latin typeface="Calibri"/>
+              </a:rPr>
+              <a:t>–   Y en CONSECUENCIAS, que es la seccion que los estudiantes dejan a medias, deben aparecer tambien las malas: se acepta un arranque en frio de varios segundos tras inactividad</a:t>
+            </a:r>
+          </a:p>
+          <a:p>
+            <a:pPr>
+              <a:spcAft>
+                <a:spcPts val="800"/>
+              </a:spcAft>
+            </a:pPr>
+            <a:r>
+              <a:rPr sz="2000" b="0" i="0">
+                <a:solidFill>
+                  <a:srgbClr val="333333"/>
+                </a:solidFill>
+                <a:latin typeface="Calibri"/>
+              </a:rPr>
+              <a:t>–   Se acepta no poder afinar el sistema operativo y se acepta un amarre medio al proveedor, mitigado con contenedores.</a:t>
+            </a:r>
+          </a:p>
+        </p:txBody>
+      </p:sp>
+      <p:sp>
+        <p:nvSpPr>
+          <p:cNvPr id="6" name="TextBox 5"/>
+          <p:cNvSpPr txBox="1"/>
+          <p:nvPr/>
+        </p:nvSpPr>
+        <p:spPr>
+          <a:xfrm>
+            <a:off x="11185855" y="6473952"/>
+            <a:ext cx="640080" cy="274320"/>
+          </a:xfrm>
+          <a:prstGeom prst="rect">
+            <a:avLst/>
+          </a:prstGeom>
+          <a:noFill/>
+        </p:spPr>
+        <p:txBody>
+          <a:bodyPr wrap="square">
+            <a:spAutoFit/>
+          </a:bodyPr>
+          <a:lstStyle/>
+          <a:p>
+            <a:pPr algn="r"/>
+            <a:r>
+              <a:rPr sz="1100" b="0" i="0">
+                <a:solidFill>
+                  <a:srgbClr val="666666"/>
+                </a:solidFill>
+                <a:latin typeface="Calibri"/>
+              </a:rPr>
+              <a:t>17</a:t>
+            </a:r>
+          </a:p>
+        </p:txBody>
+      </p:sp>
+    </p:spTree>
+  </p:cSld>
+  <p:clrMapOvr>
+    <a:masterClrMapping/>
+  </p:clrMapOvr>
+</p:sld>
+</file>
+
+<file path=ppt/slides/slide18.xml><?xml version="1.0" encoding="utf-8"?>
+<p:sld xmlns:a="http://schemas.openxmlformats.org/drawingml/2006/main" xmlns:p="http://schemas.openxmlformats.org/presentationml/2006/main" xmlns:r="http://schemas.openxmlformats.org/officeDocument/2006/relationships">
+  <p:cSld>
+    <p:bg>
+      <p:bgPr>
+        <a:solidFill>
+          <a:srgbClr val="FFFFFF"/>
+        </a:solidFill>
+        <a:effectLst/>
+      </p:bgPr>
+    </p:bg>
+    <p:spTree>
+      <p:nvGrpSpPr>
+        <p:cNvPr id="1" name=""/>
+        <p:cNvGrpSpPr/>
+        <p:nvPr/>
+      </p:nvGrpSpPr>
+      <p:grpSpPr/>
+      <p:sp>
+        <p:nvSpPr>
+          <p:cNvPr id="2" name="Rectangle 1"/>
+          <p:cNvSpPr/>
+          <p:nvPr/>
+        </p:nvSpPr>
+        <p:spPr>
+          <a:xfrm>
+            <a:off x="0" y="0"/>
+            <a:ext cx="12191695" cy="960120"/>
+          </a:xfrm>
+          <a:prstGeom prst="rect">
+            <a:avLst/>
+          </a:prstGeom>
+          <a:solidFill>
+            <a:srgbClr val="095292"/>
+          </a:solidFill>
+          <a:ln>
+            <a:noFill/>
+          </a:ln>
+        </p:spPr>
+        <p:style>
+          <a:lnRef idx="1">
+            <a:schemeClr val="accent1"/>
+          </a:lnRef>
+          <a:fillRef idx="3">
+            <a:schemeClr val="accent1"/>
+          </a:fillRef>
+          <a:effectRef idx="2">
+            <a:schemeClr val="accent1"/>
+          </a:effectRef>
+          <a:fontRef idx="minor">
+            <a:schemeClr val="lt1"/>
+          </a:fontRef>
+        </p:style>
+        <p:txBody>
+          <a:bodyPr rtlCol="0" anchor="ctr"/>
+          <a:lstStyle/>
+          <a:p>
+            <a:pPr algn="ctr"/>
+          </a:p>
+        </p:txBody>
+      </p:sp>
+      <p:sp>
+        <p:nvSpPr>
+          <p:cNvPr id="3" name="Rectangle 2"/>
+          <p:cNvSpPr/>
+          <p:nvPr/>
+        </p:nvSpPr>
+        <p:spPr>
+          <a:xfrm>
+            <a:off x="0" y="960120"/>
+            <a:ext cx="12191695" cy="41148"/>
+          </a:xfrm>
+          <a:prstGeom prst="rect">
+            <a:avLst/>
+          </a:prstGeom>
+          <a:solidFill>
+            <a:srgbClr val="FFD000"/>
+          </a:solidFill>
+          <a:ln>
+            <a:noFill/>
+          </a:ln>
+        </p:spPr>
+        <p:style>
+          <a:lnRef idx="1">
+            <a:schemeClr val="accent1"/>
+          </a:lnRef>
+          <a:fillRef idx="3">
+            <a:schemeClr val="accent1"/>
+          </a:fillRef>
+          <a:effectRef idx="2">
+            <a:schemeClr val="accent1"/>
+          </a:effectRef>
+          <a:fontRef idx="minor">
+            <a:schemeClr val="lt1"/>
+          </a:fontRef>
+        </p:style>
+        <p:txBody>
+          <a:bodyPr rtlCol="0" anchor="ctr"/>
+          <a:lstStyle/>
+          <a:p>
+            <a:pPr algn="ctr"/>
+          </a:p>
+        </p:txBody>
+      </p:sp>
+      <p:sp>
+        <p:nvSpPr>
+          <p:cNvPr id="4" name="TextBox 3"/>
+          <p:cNvSpPr txBox="1"/>
+          <p:nvPr/>
+        </p:nvSpPr>
+        <p:spPr>
+          <a:xfrm>
+            <a:off x="457200" y="164592"/>
+            <a:ext cx="11277295" cy="502920"/>
+          </a:xfrm>
+          <a:prstGeom prst="rect">
+            <a:avLst/>
+          </a:prstGeom>
+          <a:noFill/>
+        </p:spPr>
+        <p:txBody>
+          <a:bodyPr wrap="square">
+            <a:spAutoFit/>
+          </a:bodyPr>
+          <a:lstStyle/>
+          <a:p>
+            <a:r>
+              <a:rPr sz="2600" b="1" i="0">
+                <a:solidFill>
+                  <a:srgbClr val="FFFFFF"/>
+                </a:solidFill>
+                <a:latin typeface="Calibri"/>
+              </a:rPr>
+              <a:t>La pila dibujada: nombres reales para IaaS, PaaS y SaaS</a:t>
+            </a:r>
+          </a:p>
+        </p:txBody>
+      </p:sp>
+      <p:sp>
+        <p:nvSpPr>
+          <p:cNvPr id="5" name="TextBox 4"/>
+          <p:cNvSpPr txBox="1"/>
+          <p:nvPr/>
+        </p:nvSpPr>
+        <p:spPr>
+          <a:xfrm>
+            <a:off x="457200" y="1170432"/>
+            <a:ext cx="11277295" cy="5230368"/>
+          </a:xfrm>
+          <a:prstGeom prst="rect">
+            <a:avLst/>
+          </a:prstGeom>
+          <a:noFill/>
+        </p:spPr>
+        <p:txBody>
+          <a:bodyPr wrap="square">
+            <a:spAutoFit/>
+          </a:bodyPr>
+          <a:lstStyle/>
+          <a:p>
+            <a:pPr>
+              <a:spcAft>
+                <a:spcPts val="800"/>
+              </a:spcAft>
+            </a:pPr>
+            <a:r>
+              <a:rPr sz="2000" b="0" i="0">
+                <a:solidFill>
+                  <a:srgbClr val="333333"/>
+                </a:solidFill>
+                <a:latin typeface="Calibri"/>
+              </a:rPr>
+              <a:t>–   Proyecte inmediatamente despues de fijar la plantilla del ADR: es el mismo corte de responsabilidades que se acaba de explicar en prosa, ahora dibujado y con un producto reconocible en cada columna.</a:t>
+            </a:r>
+          </a:p>
+          <a:p>
+            <a:pPr>
+              <a:spcAft>
+                <a:spcPts val="800"/>
+              </a:spcAft>
+            </a:pPr>
+            <a:r>
+              <a:rPr sz="2000" b="0" i="0">
+                <a:solidFill>
+                  <a:srgbClr val="333333"/>
+                </a:solidFill>
+                <a:latin typeface="Calibri"/>
+              </a:rPr>
+              <a:t>–   Recorrala de abajo hacia arriba y no al reves: senale primero que las tres columnas comparten la misma base (infraestructura), y que lo unico que cambia es hasta donde sube el color amarillo.</a:t>
+            </a:r>
+          </a:p>
+          <a:p>
+            <a:pPr>
+              <a:spcAft>
+                <a:spcPts val="800"/>
+              </a:spcAft>
+            </a:pPr>
+            <a:r>
+              <a:rPr sz="2000" b="0" i="0">
+                <a:solidFill>
+                  <a:srgbClr val="333333"/>
+                </a:solidFill>
+                <a:latin typeface="Calibri"/>
+              </a:rPr>
+              <a:t>–   En IaaS el estudiante ya conoce DigitalOcean o AWS EC2 de oidas aunque no tenga cuenta; en PaaS, Render, Railway o Heroku son los que de verdad va a usar en el taller de hoy y en la Clase 3</a:t>
+            </a:r>
+          </a:p>
+          <a:p>
+            <a:pPr>
+              <a:spcAft>
+                <a:spcPts val="800"/>
+              </a:spcAft>
+            </a:pPr>
+            <a:r>
+              <a:rPr sz="2000" b="0" i="0">
+                <a:solidFill>
+                  <a:srgbClr val="333333"/>
+                </a:solidFill>
+                <a:latin typeface="Calibri"/>
+              </a:rPr>
+              <a:t>–   En SaaS, Gmail o Notion le sirven para entender que «usted solo configura» no es un eufemismo, de verdad no hay nada que desplegar.</a:t>
+            </a:r>
+          </a:p>
+          <a:p>
+            <a:pPr>
+              <a:spcAft>
+                <a:spcPts val="800"/>
+              </a:spcAft>
+            </a:pPr>
+            <a:r>
+              <a:rPr sz="2000" b="0" i="0">
+                <a:solidFill>
+                  <a:srgbClr val="333333"/>
+                </a:solidFill>
+                <a:latin typeface="Calibri"/>
+              </a:rPr>
+              <a:t>–   Pregunte en voz alta, senalando la columna de PaaS: «por que la fila de Sistema operativo es celeste aqui y amarilla en IaaS?» La respuesta correcta es que el proveedor la absorbio</a:t>
+            </a:r>
+          </a:p>
+          <a:p>
+            <a:pPr>
+              <a:spcAft>
+                <a:spcPts val="800"/>
+              </a:spcAft>
+            </a:pPr>
+            <a:r>
+              <a:rPr sz="2000" b="0" i="0">
+                <a:solidFill>
+                  <a:srgbClr val="333333"/>
+                </a:solidFill>
+                <a:latin typeface="Calibri"/>
+              </a:rPr>
+              <a:t>–   No que desaparecio: es el error mas comun, creer que en PaaS el sistema operativo deja de existir en vez de que alguien mas lo administra.</a:t>
+            </a:r>
+          </a:p>
+        </p:txBody>
+      </p:sp>
+      <p:sp>
+        <p:nvSpPr>
+          <p:cNvPr id="6" name="TextBox 5"/>
+          <p:cNvSpPr txBox="1"/>
+          <p:nvPr/>
+        </p:nvSpPr>
+        <p:spPr>
+          <a:xfrm>
+            <a:off x="11185855" y="6473952"/>
+            <a:ext cx="640080" cy="274320"/>
+          </a:xfrm>
+          <a:prstGeom prst="rect">
+            <a:avLst/>
+          </a:prstGeom>
+          <a:noFill/>
+        </p:spPr>
+        <p:txBody>
+          <a:bodyPr wrap="square">
+            <a:spAutoFit/>
+          </a:bodyPr>
+          <a:lstStyle/>
+          <a:p>
+            <a:pPr algn="r"/>
+            <a:r>
+              <a:rPr sz="1100" b="0" i="0">
+                <a:solidFill>
+                  <a:srgbClr val="666666"/>
+                </a:solidFill>
+                <a:latin typeface="Calibri"/>
+              </a:rPr>
+              <a:t>18</a:t>
+            </a:r>
+          </a:p>
+        </p:txBody>
+      </p:sp>
+    </p:spTree>
+  </p:cSld>
+  <p:clrMapOvr>
+    <a:masterClrMapping/>
+  </p:clrMapOvr>
+</p:sld>
+</file>
+
+<file path=ppt/slides/slide19.xml><?xml version="1.0" encoding="utf-8"?>
+<p:sld xmlns:a="http://schemas.openxmlformats.org/drawingml/2006/main" xmlns:p="http://schemas.openxmlformats.org/presentationml/2006/main" xmlns:r="http://schemas.openxmlformats.org/officeDocument/2006/relationships">
+  <p:cSld>
+    <p:bg>
+      <p:bgPr>
+        <a:solidFill>
+          <a:srgbClr val="FFFFFF"/>
+        </a:solidFill>
+        <a:effectLst/>
+      </p:bgPr>
+    </p:bg>
+    <p:spTree>
+      <p:nvGrpSpPr>
+        <p:cNvPr id="1" name=""/>
+        <p:cNvGrpSpPr/>
+        <p:nvPr/>
+      </p:nvGrpSpPr>
+      <p:grpSpPr/>
+      <p:sp>
+        <p:nvSpPr>
+          <p:cNvPr id="2" name="Rectangle 1"/>
+          <p:cNvSpPr/>
+          <p:nvPr/>
+        </p:nvSpPr>
+        <p:spPr>
+          <a:xfrm>
+            <a:off x="0" y="0"/>
+            <a:ext cx="12191695" cy="960120"/>
+          </a:xfrm>
+          <a:prstGeom prst="rect">
+            <a:avLst/>
+          </a:prstGeom>
+          <a:solidFill>
+            <a:srgbClr val="095292"/>
+          </a:solidFill>
+          <a:ln>
+            <a:noFill/>
+          </a:ln>
+        </p:spPr>
+        <p:style>
+          <a:lnRef idx="1">
+            <a:schemeClr val="accent1"/>
+          </a:lnRef>
+          <a:fillRef idx="3">
+            <a:schemeClr val="accent1"/>
+          </a:fillRef>
+          <a:effectRef idx="2">
+            <a:schemeClr val="accent1"/>
+          </a:effectRef>
+          <a:fontRef idx="minor">
+            <a:schemeClr val="lt1"/>
+          </a:fontRef>
+        </p:style>
+        <p:txBody>
+          <a:bodyPr rtlCol="0" anchor="ctr"/>
+          <a:lstStyle/>
+          <a:p>
+            <a:pPr algn="ctr"/>
+          </a:p>
+        </p:txBody>
+      </p:sp>
+      <p:sp>
+        <p:nvSpPr>
+          <p:cNvPr id="3" name="Rectangle 2"/>
+          <p:cNvSpPr/>
+          <p:nvPr/>
+        </p:nvSpPr>
+        <p:spPr>
+          <a:xfrm>
+            <a:off x="0" y="960120"/>
+            <a:ext cx="12191695" cy="41148"/>
+          </a:xfrm>
+          <a:prstGeom prst="rect">
+            <a:avLst/>
+          </a:prstGeom>
+          <a:solidFill>
+            <a:srgbClr val="FFD000"/>
+          </a:solidFill>
+          <a:ln>
+            <a:noFill/>
+          </a:ln>
+        </p:spPr>
+        <p:style>
+          <a:lnRef idx="1">
+            <a:schemeClr val="accent1"/>
+          </a:lnRef>
+          <a:fillRef idx="3">
+            <a:schemeClr val="accent1"/>
+          </a:fillRef>
+          <a:effectRef idx="2">
+            <a:schemeClr val="accent1"/>
+          </a:effectRef>
+          <a:fontRef idx="minor">
+            <a:schemeClr val="lt1"/>
+          </a:fontRef>
+        </p:style>
+        <p:txBody>
+          <a:bodyPr rtlCol="0" anchor="ctr"/>
+          <a:lstStyle/>
+          <a:p>
+            <a:pPr algn="ctr"/>
+          </a:p>
+        </p:txBody>
+      </p:sp>
+      <p:sp>
+        <p:nvSpPr>
+          <p:cNvPr id="4" name="TextBox 3"/>
+          <p:cNvSpPr txBox="1"/>
+          <p:nvPr/>
+        </p:nvSpPr>
+        <p:spPr>
+          <a:xfrm>
+            <a:off x="457200" y="164592"/>
+            <a:ext cx="11277295" cy="502920"/>
+          </a:xfrm>
+          <a:prstGeom prst="rect">
+            <a:avLst/>
+          </a:prstGeom>
+          <a:noFill/>
+        </p:spPr>
+        <p:txBody>
+          <a:bodyPr wrap="square">
+            <a:spAutoFit/>
+          </a:bodyPr>
+          <a:lstStyle/>
+          <a:p>
+            <a:r>
+              <a:rPr sz="2600" b="1" i="0">
+                <a:solidFill>
+                  <a:srgbClr val="FFFFFF"/>
+                </a:solidFill>
+                <a:latin typeface="Calibri"/>
+              </a:rPr>
+              <a:t>Preguntas frecuentes y cierre conceptual () (1/2)</a:t>
+            </a:r>
+          </a:p>
+        </p:txBody>
+      </p:sp>
+      <p:sp>
+        <p:nvSpPr>
+          <p:cNvPr id="5" name="TextBox 4"/>
+          <p:cNvSpPr txBox="1"/>
+          <p:nvPr/>
+        </p:nvSpPr>
+        <p:spPr>
+          <a:xfrm>
+            <a:off x="457200" y="1170432"/>
+            <a:ext cx="11277295" cy="5230368"/>
+          </a:xfrm>
+          <a:prstGeom prst="rect">
+            <a:avLst/>
+          </a:prstGeom>
+          <a:noFill/>
+        </p:spPr>
+        <p:txBody>
+          <a:bodyPr wrap="square">
+            <a:spAutoFit/>
+          </a:bodyPr>
+          <a:lstStyle/>
+          <a:p>
+            <a:pPr>
+              <a:spcAft>
+                <a:spcPts val="800"/>
+              </a:spcAft>
+            </a:pPr>
+            <a:r>
+              <a:rPr sz="2000" b="0" i="0">
+                <a:solidFill>
+                  <a:srgbClr val="333333"/>
+                </a:solidFill>
+                <a:latin typeface="Calibri"/>
+              </a:rPr>
+              <a:t>–   Cual de los tres modelos es el mejor: ninguno; la pregunta correcta es cual conviene para este componente, con este equipo y en este plazo, y responder que PaaS es mejor sin decir para que es la senal de que el ADR sera de relleno.</a:t>
+            </a:r>
+          </a:p>
+          <a:p>
+            <a:pPr>
+              <a:spcAft>
+                <a:spcPts val="800"/>
+              </a:spcAft>
+            </a:pPr>
+            <a:r>
+              <a:rPr sz="2000" b="0" i="0">
+                <a:solidFill>
+                  <a:srgbClr val="333333"/>
+                </a:solidFill>
+                <a:latin typeface="Calibri"/>
+              </a:rPr>
+              <a:t>–   Donde encaja serverless o las funciones como servicio: es una variante extrema de PaaS en la que no se administra ninguna instancia siempre encendida</a:t>
+            </a:r>
+          </a:p>
+          <a:p>
+            <a:pPr>
+              <a:spcAft>
+                <a:spcPts val="800"/>
+              </a:spcAft>
+            </a:pPr>
+            <a:r>
+              <a:rPr sz="2000" b="0" i="0">
+                <a:solidFill>
+                  <a:srgbClr val="333333"/>
+                </a:solidFill>
+                <a:latin typeface="Calibri"/>
+              </a:rPr>
+              <a:t>–   Se paga por invocacion y el codigo debe tolerar arrancar en frio; para efectos del curso se clasifica como PaaS anotando la diferencia.</a:t>
+            </a:r>
+          </a:p>
+          <a:p>
+            <a:pPr>
+              <a:spcAft>
+                <a:spcPts val="800"/>
+              </a:spcAft>
+            </a:pPr>
+            <a:r>
+              <a:rPr sz="2000" b="0" i="0">
+                <a:solidFill>
+                  <a:srgbClr val="333333"/>
+                </a:solidFill>
+                <a:latin typeface="Calibri"/>
+              </a:rPr>
+              <a:t>–   Y la mas comun: si elegimos PaaS, para que aprendemos Docker en la Clase 3 si la plataforma se encarga de todo.</a:t>
+            </a:r>
+          </a:p>
+          <a:p>
+            <a:pPr>
+              <a:spcAft>
+                <a:spcPts val="800"/>
+              </a:spcAft>
+            </a:pPr>
+            <a:r>
+              <a:rPr sz="2000" b="0" i="0">
+                <a:solidFill>
+                  <a:srgbClr val="333333"/>
+                </a:solidFill>
+                <a:latin typeface="Calibri"/>
+              </a:rPr>
+              <a:t>–   Respuesta: porque la plataforma construye internamente una imagen de contenedor con el codigo entregado, de modo que entender contenedores es entender que hace la plataforma por debajo</a:t>
+            </a:r>
+          </a:p>
+          <a:p>
+            <a:pPr>
+              <a:spcAft>
+                <a:spcPts val="800"/>
+              </a:spcAft>
+            </a:pPr>
+            <a:r>
+              <a:rPr sz="2000" b="0" i="0">
+                <a:solidFill>
+                  <a:srgbClr val="333333"/>
+                </a:solidFill>
+                <a:latin typeface="Calibri"/>
+              </a:rPr>
+              <a:t>–   Y porque el contenedor es precisamente el artefacto que vuelve reversible la decision de hoy.</a:t>
+            </a:r>
+          </a:p>
+          <a:p>
+            <a:pPr>
+              <a:spcAft>
+                <a:spcPts val="800"/>
+              </a:spcAft>
+            </a:pPr>
+            <a:r>
+              <a:rPr sz="2000" b="0" i="0">
+                <a:solidFill>
+                  <a:srgbClr val="333333"/>
+                </a:solidFill>
+                <a:latin typeface="Calibri"/>
+              </a:rPr>
+              <a:t>–   La Clase 4 usara este mismo ADR para justificar cuantas piezas tendra el sistema, y el Parcial 1 de la Clase 5 evalua la capacidad de ubicar la linea de responsabilidad en cada modelo.</a:t>
+            </a:r>
+          </a:p>
+        </p:txBody>
+      </p:sp>
+      <p:sp>
+        <p:nvSpPr>
+          <p:cNvPr id="6" name="TextBox 5"/>
+          <p:cNvSpPr txBox="1"/>
+          <p:nvPr/>
+        </p:nvSpPr>
+        <p:spPr>
+          <a:xfrm>
+            <a:off x="11185855" y="6473952"/>
+            <a:ext cx="640080" cy="274320"/>
+          </a:xfrm>
+          <a:prstGeom prst="rect">
+            <a:avLst/>
+          </a:prstGeom>
+          <a:noFill/>
+        </p:spPr>
+        <p:txBody>
+          <a:bodyPr wrap="square">
+            <a:spAutoFit/>
+          </a:bodyPr>
+          <a:lstStyle/>
+          <a:p>
+            <a:pPr algn="r"/>
+            <a:r>
+              <a:rPr sz="1100" b="0" i="0">
+                <a:solidFill>
+                  <a:srgbClr val="666666"/>
+                </a:solidFill>
+                <a:latin typeface="Calibri"/>
+              </a:rPr>
+              <a:t>19</a:t>
             </a:r>
           </a:p>
         </p:txBody>
@@ -6089,6 +6804,4319 @@
 </p:sld>
 </file>
 
+<file path=ppt/slides/slide20.xml><?xml version="1.0" encoding="utf-8"?>
+<p:sld xmlns:a="http://schemas.openxmlformats.org/drawingml/2006/main" xmlns:p="http://schemas.openxmlformats.org/presentationml/2006/main" xmlns:r="http://schemas.openxmlformats.org/officeDocument/2006/relationships">
+  <p:cSld>
+    <p:bg>
+      <p:bgPr>
+        <a:solidFill>
+          <a:srgbClr val="FFFFFF"/>
+        </a:solidFill>
+        <a:effectLst/>
+      </p:bgPr>
+    </p:bg>
+    <p:spTree>
+      <p:nvGrpSpPr>
+        <p:cNvPr id="1" name=""/>
+        <p:cNvGrpSpPr/>
+        <p:nvPr/>
+      </p:nvGrpSpPr>
+      <p:grpSpPr/>
+      <p:sp>
+        <p:nvSpPr>
+          <p:cNvPr id="2" name="Rectangle 1"/>
+          <p:cNvSpPr/>
+          <p:nvPr/>
+        </p:nvSpPr>
+        <p:spPr>
+          <a:xfrm>
+            <a:off x="0" y="0"/>
+            <a:ext cx="12191695" cy="960120"/>
+          </a:xfrm>
+          <a:prstGeom prst="rect">
+            <a:avLst/>
+          </a:prstGeom>
+          <a:solidFill>
+            <a:srgbClr val="095292"/>
+          </a:solidFill>
+          <a:ln>
+            <a:noFill/>
+          </a:ln>
+        </p:spPr>
+        <p:style>
+          <a:lnRef idx="1">
+            <a:schemeClr val="accent1"/>
+          </a:lnRef>
+          <a:fillRef idx="3">
+            <a:schemeClr val="accent1"/>
+          </a:fillRef>
+          <a:effectRef idx="2">
+            <a:schemeClr val="accent1"/>
+          </a:effectRef>
+          <a:fontRef idx="minor">
+            <a:schemeClr val="lt1"/>
+          </a:fontRef>
+        </p:style>
+        <p:txBody>
+          <a:bodyPr rtlCol="0" anchor="ctr"/>
+          <a:lstStyle/>
+          <a:p>
+            <a:pPr algn="ctr"/>
+          </a:p>
+        </p:txBody>
+      </p:sp>
+      <p:sp>
+        <p:nvSpPr>
+          <p:cNvPr id="3" name="Rectangle 2"/>
+          <p:cNvSpPr/>
+          <p:nvPr/>
+        </p:nvSpPr>
+        <p:spPr>
+          <a:xfrm>
+            <a:off x="0" y="960120"/>
+            <a:ext cx="12191695" cy="41148"/>
+          </a:xfrm>
+          <a:prstGeom prst="rect">
+            <a:avLst/>
+          </a:prstGeom>
+          <a:solidFill>
+            <a:srgbClr val="FFD000"/>
+          </a:solidFill>
+          <a:ln>
+            <a:noFill/>
+          </a:ln>
+        </p:spPr>
+        <p:style>
+          <a:lnRef idx="1">
+            <a:schemeClr val="accent1"/>
+          </a:lnRef>
+          <a:fillRef idx="3">
+            <a:schemeClr val="accent1"/>
+          </a:fillRef>
+          <a:effectRef idx="2">
+            <a:schemeClr val="accent1"/>
+          </a:effectRef>
+          <a:fontRef idx="minor">
+            <a:schemeClr val="lt1"/>
+          </a:fontRef>
+        </p:style>
+        <p:txBody>
+          <a:bodyPr rtlCol="0" anchor="ctr"/>
+          <a:lstStyle/>
+          <a:p>
+            <a:pPr algn="ctr"/>
+          </a:p>
+        </p:txBody>
+      </p:sp>
+      <p:sp>
+        <p:nvSpPr>
+          <p:cNvPr id="4" name="TextBox 3"/>
+          <p:cNvSpPr txBox="1"/>
+          <p:nvPr/>
+        </p:nvSpPr>
+        <p:spPr>
+          <a:xfrm>
+            <a:off x="457200" y="164592"/>
+            <a:ext cx="11277295" cy="502920"/>
+          </a:xfrm>
+          <a:prstGeom prst="rect">
+            <a:avLst/>
+          </a:prstGeom>
+          <a:noFill/>
+        </p:spPr>
+        <p:txBody>
+          <a:bodyPr wrap="square">
+            <a:spAutoFit/>
+          </a:bodyPr>
+          <a:lstStyle/>
+          <a:p>
+            <a:r>
+              <a:rPr sz="2600" b="1" i="0">
+                <a:solidFill>
+                  <a:srgbClr val="FFFFFF"/>
+                </a:solidFill>
+                <a:latin typeface="Calibri"/>
+              </a:rPr>
+              <a:t>Preguntas frecuentes y cierre conceptual () (2/2)</a:t>
+            </a:r>
+          </a:p>
+        </p:txBody>
+      </p:sp>
+      <p:sp>
+        <p:nvSpPr>
+          <p:cNvPr id="5" name="TextBox 4"/>
+          <p:cNvSpPr txBox="1"/>
+          <p:nvPr/>
+        </p:nvSpPr>
+        <p:spPr>
+          <a:xfrm>
+            <a:off x="457200" y="1170432"/>
+            <a:ext cx="11277295" cy="5230368"/>
+          </a:xfrm>
+          <a:prstGeom prst="rect">
+            <a:avLst/>
+          </a:prstGeom>
+          <a:noFill/>
+        </p:spPr>
+        <p:txBody>
+          <a:bodyPr wrap="square">
+            <a:spAutoFit/>
+          </a:bodyPr>
+          <a:lstStyle/>
+          <a:p>
+            <a:pPr>
+              <a:spcAft>
+                <a:spcPts val="800"/>
+              </a:spcAft>
+            </a:pPr>
+            <a:r>
+              <a:rPr sz="2000" b="0" i="0">
+                <a:solidFill>
+                  <a:srgbClr val="333333"/>
+                </a:solidFill>
+                <a:latin typeface="Calibri"/>
+              </a:rPr>
+              <a:t>–   Error tipico del docente que no domina el tema: presentar IaaS, PaaS y SaaS como catalogos de marcas y no como un modelo conceptual de responsabilidad</a:t>
+            </a:r>
+          </a:p>
+          <a:p>
+            <a:pPr>
+              <a:spcAft>
+                <a:spcPts val="800"/>
+              </a:spcAft>
+            </a:pPr>
+            <a:r>
+              <a:rPr sz="2000" b="0" i="0">
+                <a:solidFill>
+                  <a:srgbClr val="333333"/>
+                </a:solidFill>
+                <a:latin typeface="Calibri"/>
+              </a:rPr>
+              <a:t>–   Con lo cual el estudiante memoriza nombres de productos que cambiaran en dos periodos y no aprende a preguntar quien administra que capa</a:t>
+            </a:r>
+          </a:p>
+          <a:p>
+            <a:pPr>
+              <a:spcAft>
+                <a:spcPts val="800"/>
+              </a:spcAft>
+            </a:pPr>
+            <a:r>
+              <a:rPr sz="2000" b="0" i="0">
+                <a:solidFill>
+                  <a:srgbClr val="333333"/>
+                </a:solidFill>
+                <a:latin typeface="Calibri"/>
+              </a:rPr>
+              <a:t>–   Aguas abajo, en la Clase 6 sera incapaz de decir de que es responsable el en materia de seguridad, y en la Clase 10 no podra explicar por que su factura hipotetica sube o baja.</a:t>
+            </a:r>
+          </a:p>
+          <a:p>
+            <a:pPr>
+              <a:spcAft>
+                <a:spcPts val="800"/>
+              </a:spcAft>
+            </a:pPr>
+            <a:r>
+              <a:rPr sz="2000" b="0" i="0">
+                <a:solidFill>
+                  <a:srgbClr val="333333"/>
+                </a:solidFill>
+                <a:latin typeface="Calibri"/>
+              </a:rPr>
+              <a:t>–   El segundo error es dejar pasar ADR sin consecuencias negativas, y como esta clase tiene encuentro sincronico no hay excusa para no corregirlo en el momento: al pasar por los grupos en el tramo de taller</a:t>
+            </a:r>
+          </a:p>
+          <a:p>
+            <a:pPr>
+              <a:spcAft>
+                <a:spcPts val="800"/>
+              </a:spcAft>
+            </a:pPr>
+            <a:r>
+              <a:rPr sz="2000" b="0" i="0">
+                <a:solidFill>
+                  <a:srgbClr val="333333"/>
+                </a:solidFill>
+                <a:latin typeface="Calibri"/>
+              </a:rPr>
+              <a:t>–   Pregunte «que perdieron al elegir eso» antes de que el documento se suba.</a:t>
+            </a:r>
+          </a:p>
+          <a:p>
+            <a:pPr>
+              <a:spcAft>
+                <a:spcPts val="800"/>
+              </a:spcAft>
+            </a:pPr>
+            <a:r>
+              <a:rPr sz="2000" b="0" i="0">
+                <a:solidFill>
+                  <a:srgbClr val="333333"/>
+                </a:solidFill>
+                <a:latin typeface="Calibri"/>
+              </a:rPr>
+              <a:t>–   Un ADR que solo lista beneficios no es una decision, es una justificacion escrita despues de los hechos</a:t>
+            </a:r>
+          </a:p>
+          <a:p>
+            <a:pPr>
+              <a:spcAft>
+                <a:spcPts val="800"/>
+              </a:spcAft>
+            </a:pPr>
+            <a:r>
+              <a:rPr sz="2000" b="0" i="0">
+                <a:solidFill>
+                  <a:srgbClr val="333333"/>
+                </a:solidFill>
+                <a:latin typeface="Calibri"/>
+              </a:rPr>
+              <a:t>–   Y quien lo entrega asi llegara a la Clase 11 sin poder explicar ningun trade-off de su arquitectura, que es justamente lo que se le exigira sustentar en la Clase 15.</a:t>
+            </a:r>
+          </a:p>
+        </p:txBody>
+      </p:sp>
+      <p:sp>
+        <p:nvSpPr>
+          <p:cNvPr id="6" name="TextBox 5"/>
+          <p:cNvSpPr txBox="1"/>
+          <p:nvPr/>
+        </p:nvSpPr>
+        <p:spPr>
+          <a:xfrm>
+            <a:off x="11185855" y="6473952"/>
+            <a:ext cx="640080" cy="274320"/>
+          </a:xfrm>
+          <a:prstGeom prst="rect">
+            <a:avLst/>
+          </a:prstGeom>
+          <a:noFill/>
+        </p:spPr>
+        <p:txBody>
+          <a:bodyPr wrap="square">
+            <a:spAutoFit/>
+          </a:bodyPr>
+          <a:lstStyle/>
+          <a:p>
+            <a:pPr algn="r"/>
+            <a:r>
+              <a:rPr sz="1100" b="0" i="0">
+                <a:solidFill>
+                  <a:srgbClr val="666666"/>
+                </a:solidFill>
+                <a:latin typeface="Calibri"/>
+              </a:rPr>
+              <a:t>20</a:t>
+            </a:r>
+          </a:p>
+        </p:txBody>
+      </p:sp>
+    </p:spTree>
+  </p:cSld>
+  <p:clrMapOvr>
+    <a:masterClrMapping/>
+  </p:clrMapOvr>
+</p:sld>
+</file>
+
+<file path=ppt/slides/slide21.xml><?xml version="1.0" encoding="utf-8"?>
+<p:sld xmlns:a="http://schemas.openxmlformats.org/drawingml/2006/main" xmlns:p="http://schemas.openxmlformats.org/presentationml/2006/main" xmlns:r="http://schemas.openxmlformats.org/officeDocument/2006/relationships">
+  <p:cSld>
+    <p:bg>
+      <p:bgPr>
+        <a:solidFill>
+          <a:srgbClr val="FFFFFF"/>
+        </a:solidFill>
+        <a:effectLst/>
+      </p:bgPr>
+    </p:bg>
+    <p:spTree>
+      <p:nvGrpSpPr>
+        <p:cNvPr id="1" name=""/>
+        <p:cNvGrpSpPr/>
+        <p:nvPr/>
+      </p:nvGrpSpPr>
+      <p:grpSpPr/>
+      <p:sp>
+        <p:nvSpPr>
+          <p:cNvPr id="2" name="Rectangle 1"/>
+          <p:cNvSpPr/>
+          <p:nvPr/>
+        </p:nvSpPr>
+        <p:spPr>
+          <a:xfrm>
+            <a:off x="0" y="0"/>
+            <a:ext cx="12191695" cy="1170432"/>
+          </a:xfrm>
+          <a:prstGeom prst="rect">
+            <a:avLst/>
+          </a:prstGeom>
+          <a:solidFill>
+            <a:srgbClr val="095292"/>
+          </a:solidFill>
+          <a:ln>
+            <a:noFill/>
+          </a:ln>
+        </p:spPr>
+        <p:style>
+          <a:lnRef idx="1">
+            <a:schemeClr val="accent1"/>
+          </a:lnRef>
+          <a:fillRef idx="3">
+            <a:schemeClr val="accent1"/>
+          </a:fillRef>
+          <a:effectRef idx="2">
+            <a:schemeClr val="accent1"/>
+          </a:effectRef>
+          <a:fontRef idx="minor">
+            <a:schemeClr val="lt1"/>
+          </a:fontRef>
+        </p:style>
+        <p:txBody>
+          <a:bodyPr rtlCol="0" anchor="ctr"/>
+          <a:lstStyle/>
+          <a:p>
+            <a:pPr algn="ctr"/>
+          </a:p>
+        </p:txBody>
+      </p:sp>
+      <p:sp>
+        <p:nvSpPr>
+          <p:cNvPr id="3" name="Rectangle 2"/>
+          <p:cNvSpPr/>
+          <p:nvPr/>
+        </p:nvSpPr>
+        <p:spPr>
+          <a:xfrm>
+            <a:off x="0" y="1170432"/>
+            <a:ext cx="12191695" cy="41148"/>
+          </a:xfrm>
+          <a:prstGeom prst="rect">
+            <a:avLst/>
+          </a:prstGeom>
+          <a:solidFill>
+            <a:srgbClr val="FFD000"/>
+          </a:solidFill>
+          <a:ln>
+            <a:noFill/>
+          </a:ln>
+        </p:spPr>
+        <p:style>
+          <a:lnRef idx="1">
+            <a:schemeClr val="accent1"/>
+          </a:lnRef>
+          <a:fillRef idx="3">
+            <a:schemeClr val="accent1"/>
+          </a:fillRef>
+          <a:effectRef idx="2">
+            <a:schemeClr val="accent1"/>
+          </a:effectRef>
+          <a:fontRef idx="minor">
+            <a:schemeClr val="lt1"/>
+          </a:fontRef>
+        </p:style>
+        <p:txBody>
+          <a:bodyPr rtlCol="0" anchor="ctr"/>
+          <a:lstStyle/>
+          <a:p>
+            <a:pPr algn="ctr"/>
+          </a:p>
+        </p:txBody>
+      </p:sp>
+      <p:sp>
+        <p:nvSpPr>
+          <p:cNvPr id="4" name="TextBox 3"/>
+          <p:cNvSpPr txBox="1"/>
+          <p:nvPr/>
+        </p:nvSpPr>
+        <p:spPr>
+          <a:xfrm>
+            <a:off x="457200" y="164592"/>
+            <a:ext cx="11277295" cy="384048"/>
+          </a:xfrm>
+          <a:prstGeom prst="rect">
+            <a:avLst/>
+          </a:prstGeom>
+          <a:noFill/>
+        </p:spPr>
+        <p:txBody>
+          <a:bodyPr wrap="square">
+            <a:spAutoFit/>
+          </a:bodyPr>
+          <a:lstStyle/>
+          <a:p>
+            <a:r>
+              <a:rPr sz="2600" b="1" i="0">
+                <a:solidFill>
+                  <a:srgbClr val="FFFFFF"/>
+                </a:solidFill>
+                <a:latin typeface="Calibri"/>
+              </a:rPr>
+              <a:t>Quién administra cada capa — IaaS vs PaaS vs SaaS</a:t>
+            </a:r>
+          </a:p>
+        </p:txBody>
+      </p:sp>
+      <p:sp>
+        <p:nvSpPr>
+          <p:cNvPr id="5" name="TextBox 4"/>
+          <p:cNvSpPr txBox="1"/>
+          <p:nvPr/>
+        </p:nvSpPr>
+        <p:spPr>
+          <a:xfrm>
+            <a:off x="457200" y="566928"/>
+            <a:ext cx="11277295" cy="411480"/>
+          </a:xfrm>
+          <a:prstGeom prst="rect">
+            <a:avLst/>
+          </a:prstGeom>
+          <a:noFill/>
+        </p:spPr>
+        <p:txBody>
+          <a:bodyPr wrap="square">
+            <a:spAutoFit/>
+          </a:bodyPr>
+          <a:lstStyle/>
+          <a:p>
+            <a:r>
+              <a:rPr sz="1400" b="0" i="0">
+                <a:solidFill>
+                  <a:srgbClr val="B8D8EE"/>
+                </a:solidFill>
+                <a:latin typeface="Calibri"/>
+              </a:rPr>
+              <a:t>Misma aplicación, distinto reparto de responsabilidad entre usted y el proveedor</a:t>
+            </a:r>
+          </a:p>
+        </p:txBody>
+      </p:sp>
+      <p:sp>
+        <p:nvSpPr>
+          <p:cNvPr id="6" name="Rounded Rectangle 5"/>
+          <p:cNvSpPr/>
+          <p:nvPr/>
+        </p:nvSpPr>
+        <p:spPr>
+          <a:xfrm>
+            <a:off x="548640" y="1325880"/>
+            <a:ext cx="3291840" cy="685800"/>
+          </a:xfrm>
+          <a:prstGeom prst="roundRect">
+            <a:avLst>
+              <a:gd name="adj" fmla="val 12000"/>
+            </a:avLst>
+          </a:prstGeom>
+          <a:solidFill>
+            <a:srgbClr val="095292"/>
+          </a:solidFill>
+          <a:ln>
+            <a:noFill/>
+          </a:ln>
+        </p:spPr>
+        <p:style>
+          <a:lnRef idx="1">
+            <a:schemeClr val="accent1"/>
+          </a:lnRef>
+          <a:fillRef idx="3">
+            <a:schemeClr val="accent1"/>
+          </a:fillRef>
+          <a:effectRef idx="2">
+            <a:schemeClr val="accent1"/>
+          </a:effectRef>
+          <a:fontRef idx="minor">
+            <a:schemeClr val="lt1"/>
+          </a:fontRef>
+        </p:style>
+        <p:txBody>
+          <a:bodyPr rtlCol="0" anchor="ctr" wrap="square"/>
+          <a:lstStyle/>
+          <a:p>
+            <a:pPr algn="ctr"/>
+            <a:r>
+              <a:rPr sz="1200" b="1" i="0">
+                <a:solidFill>
+                  <a:srgbClr val="FFFFFF"/>
+                </a:solidFill>
+                <a:latin typeface="Calibri"/>
+              </a:rPr>
+              <a:t>IaaS
+(DigitalOcean, AWS EC2)</a:t>
+            </a:r>
+          </a:p>
+        </p:txBody>
+      </p:sp>
+      <p:sp>
+        <p:nvSpPr>
+          <p:cNvPr id="7" name="Rounded Rectangle 6"/>
+          <p:cNvSpPr/>
+          <p:nvPr/>
+        </p:nvSpPr>
+        <p:spPr>
+          <a:xfrm>
+            <a:off x="4160520" y="1325880"/>
+            <a:ext cx="3291840" cy="685800"/>
+          </a:xfrm>
+          <a:prstGeom prst="roundRect">
+            <a:avLst>
+              <a:gd name="adj" fmla="val 12000"/>
+            </a:avLst>
+          </a:prstGeom>
+          <a:solidFill>
+            <a:srgbClr val="095292"/>
+          </a:solidFill>
+          <a:ln>
+            <a:noFill/>
+          </a:ln>
+        </p:spPr>
+        <p:style>
+          <a:lnRef idx="1">
+            <a:schemeClr val="accent1"/>
+          </a:lnRef>
+          <a:fillRef idx="3">
+            <a:schemeClr val="accent1"/>
+          </a:fillRef>
+          <a:effectRef idx="2">
+            <a:schemeClr val="accent1"/>
+          </a:effectRef>
+          <a:fontRef idx="minor">
+            <a:schemeClr val="lt1"/>
+          </a:fontRef>
+        </p:style>
+        <p:txBody>
+          <a:bodyPr rtlCol="0" anchor="ctr" wrap="square"/>
+          <a:lstStyle/>
+          <a:p>
+            <a:pPr algn="ctr"/>
+            <a:r>
+              <a:rPr sz="1200" b="1" i="0">
+                <a:solidFill>
+                  <a:srgbClr val="FFFFFF"/>
+                </a:solidFill>
+                <a:latin typeface="Calibri"/>
+              </a:rPr>
+              <a:t>PaaS
+(Render, Railway, Heroku)</a:t>
+            </a:r>
+          </a:p>
+        </p:txBody>
+      </p:sp>
+      <p:sp>
+        <p:nvSpPr>
+          <p:cNvPr id="8" name="Rounded Rectangle 7"/>
+          <p:cNvSpPr/>
+          <p:nvPr/>
+        </p:nvSpPr>
+        <p:spPr>
+          <a:xfrm>
+            <a:off x="7772400" y="1325880"/>
+            <a:ext cx="3291840" cy="685800"/>
+          </a:xfrm>
+          <a:prstGeom prst="roundRect">
+            <a:avLst>
+              <a:gd name="adj" fmla="val 12000"/>
+            </a:avLst>
+          </a:prstGeom>
+          <a:solidFill>
+            <a:srgbClr val="095292"/>
+          </a:solidFill>
+          <a:ln>
+            <a:noFill/>
+          </a:ln>
+        </p:spPr>
+        <p:style>
+          <a:lnRef idx="1">
+            <a:schemeClr val="accent1"/>
+          </a:lnRef>
+          <a:fillRef idx="3">
+            <a:schemeClr val="accent1"/>
+          </a:fillRef>
+          <a:effectRef idx="2">
+            <a:schemeClr val="accent1"/>
+          </a:effectRef>
+          <a:fontRef idx="minor">
+            <a:schemeClr val="lt1"/>
+          </a:fontRef>
+        </p:style>
+        <p:txBody>
+          <a:bodyPr rtlCol="0" anchor="ctr" wrap="square"/>
+          <a:lstStyle/>
+          <a:p>
+            <a:pPr algn="ctr"/>
+            <a:r>
+              <a:rPr sz="1200" b="1" i="0">
+                <a:solidFill>
+                  <a:srgbClr val="FFFFFF"/>
+                </a:solidFill>
+                <a:latin typeface="Calibri"/>
+              </a:rPr>
+              <a:t>SaaS
+(Gmail, Notion, Slack)</a:t>
+            </a:r>
+          </a:p>
+        </p:txBody>
+      </p:sp>
+      <p:sp>
+        <p:nvSpPr>
+          <p:cNvPr id="9" name="Rounded Rectangle 8"/>
+          <p:cNvSpPr/>
+          <p:nvPr/>
+        </p:nvSpPr>
+        <p:spPr>
+          <a:xfrm>
+            <a:off x="548640" y="2103120"/>
+            <a:ext cx="3291840" cy="548640"/>
+          </a:xfrm>
+          <a:prstGeom prst="roundRect">
+            <a:avLst>
+              <a:gd name="adj" fmla="val 12000"/>
+            </a:avLst>
+          </a:prstGeom>
+          <a:solidFill>
+            <a:srgbClr val="FFD000"/>
+          </a:solidFill>
+          <a:ln>
+            <a:noFill/>
+          </a:ln>
+        </p:spPr>
+        <p:style>
+          <a:lnRef idx="1">
+            <a:schemeClr val="accent1"/>
+          </a:lnRef>
+          <a:fillRef idx="3">
+            <a:schemeClr val="accent1"/>
+          </a:fillRef>
+          <a:effectRef idx="2">
+            <a:schemeClr val="accent1"/>
+          </a:effectRef>
+          <a:fontRef idx="minor">
+            <a:schemeClr val="lt1"/>
+          </a:fontRef>
+        </p:style>
+        <p:txBody>
+          <a:bodyPr rtlCol="0" anchor="ctr" wrap="square"/>
+          <a:lstStyle/>
+          <a:p>
+            <a:pPr algn="ctr"/>
+            <a:r>
+              <a:rPr sz="1100" b="1" i="0">
+                <a:solidFill>
+                  <a:srgbClr val="095292"/>
+                </a:solidFill>
+                <a:latin typeface="Calibri"/>
+              </a:rPr>
+              <a:t>Aplicación y datos</a:t>
+            </a:r>
+          </a:p>
+        </p:txBody>
+      </p:sp>
+      <p:sp>
+        <p:nvSpPr>
+          <p:cNvPr id="10" name="Rounded Rectangle 9"/>
+          <p:cNvSpPr/>
+          <p:nvPr/>
+        </p:nvSpPr>
+        <p:spPr>
+          <a:xfrm>
+            <a:off x="548640" y="2743200"/>
+            <a:ext cx="3291840" cy="548640"/>
+          </a:xfrm>
+          <a:prstGeom prst="roundRect">
+            <a:avLst>
+              <a:gd name="adj" fmla="val 12000"/>
+            </a:avLst>
+          </a:prstGeom>
+          <a:solidFill>
+            <a:srgbClr val="FFD000"/>
+          </a:solidFill>
+          <a:ln>
+            <a:noFill/>
+          </a:ln>
+        </p:spPr>
+        <p:style>
+          <a:lnRef idx="1">
+            <a:schemeClr val="accent1"/>
+          </a:lnRef>
+          <a:fillRef idx="3">
+            <a:schemeClr val="accent1"/>
+          </a:fillRef>
+          <a:effectRef idx="2">
+            <a:schemeClr val="accent1"/>
+          </a:effectRef>
+          <a:fontRef idx="minor">
+            <a:schemeClr val="lt1"/>
+          </a:fontRef>
+        </p:style>
+        <p:txBody>
+          <a:bodyPr rtlCol="0" anchor="ctr" wrap="square"/>
+          <a:lstStyle/>
+          <a:p>
+            <a:pPr algn="ctr"/>
+            <a:r>
+              <a:rPr sz="1100" b="1" i="0">
+                <a:solidFill>
+                  <a:srgbClr val="095292"/>
+                </a:solidFill>
+                <a:latin typeface="Calibri"/>
+              </a:rPr>
+              <a:t>Runtime / middleware</a:t>
+            </a:r>
+          </a:p>
+        </p:txBody>
+      </p:sp>
+      <p:sp>
+        <p:nvSpPr>
+          <p:cNvPr id="11" name="Rounded Rectangle 10"/>
+          <p:cNvSpPr/>
+          <p:nvPr/>
+        </p:nvSpPr>
+        <p:spPr>
+          <a:xfrm>
+            <a:off x="548640" y="3383280"/>
+            <a:ext cx="3291840" cy="548640"/>
+          </a:xfrm>
+          <a:prstGeom prst="roundRect">
+            <a:avLst>
+              <a:gd name="adj" fmla="val 12000"/>
+            </a:avLst>
+          </a:prstGeom>
+          <a:solidFill>
+            <a:srgbClr val="FFD000"/>
+          </a:solidFill>
+          <a:ln>
+            <a:noFill/>
+          </a:ln>
+        </p:spPr>
+        <p:style>
+          <a:lnRef idx="1">
+            <a:schemeClr val="accent1"/>
+          </a:lnRef>
+          <a:fillRef idx="3">
+            <a:schemeClr val="accent1"/>
+          </a:fillRef>
+          <a:effectRef idx="2">
+            <a:schemeClr val="accent1"/>
+          </a:effectRef>
+          <a:fontRef idx="minor">
+            <a:schemeClr val="lt1"/>
+          </a:fontRef>
+        </p:style>
+        <p:txBody>
+          <a:bodyPr rtlCol="0" anchor="ctr" wrap="square"/>
+          <a:lstStyle/>
+          <a:p>
+            <a:pPr algn="ctr"/>
+            <a:r>
+              <a:rPr sz="1100" b="1" i="0">
+                <a:solidFill>
+                  <a:srgbClr val="095292"/>
+                </a:solidFill>
+                <a:latin typeface="Calibri"/>
+              </a:rPr>
+              <a:t>Sistema operativo</a:t>
+            </a:r>
+          </a:p>
+        </p:txBody>
+      </p:sp>
+      <p:sp>
+        <p:nvSpPr>
+          <p:cNvPr id="12" name="Rounded Rectangle 11"/>
+          <p:cNvSpPr/>
+          <p:nvPr/>
+        </p:nvSpPr>
+        <p:spPr>
+          <a:xfrm>
+            <a:off x="548640" y="4023360"/>
+            <a:ext cx="3291840" cy="548640"/>
+          </a:xfrm>
+          <a:prstGeom prst="roundRect">
+            <a:avLst>
+              <a:gd name="adj" fmla="val 12000"/>
+            </a:avLst>
+          </a:prstGeom>
+          <a:solidFill>
+            <a:srgbClr val="269CCB"/>
+          </a:solidFill>
+          <a:ln>
+            <a:noFill/>
+          </a:ln>
+        </p:spPr>
+        <p:style>
+          <a:lnRef idx="1">
+            <a:schemeClr val="accent1"/>
+          </a:lnRef>
+          <a:fillRef idx="3">
+            <a:schemeClr val="accent1"/>
+          </a:fillRef>
+          <a:effectRef idx="2">
+            <a:schemeClr val="accent1"/>
+          </a:effectRef>
+          <a:fontRef idx="minor">
+            <a:schemeClr val="lt1"/>
+          </a:fontRef>
+        </p:style>
+        <p:txBody>
+          <a:bodyPr rtlCol="0" anchor="ctr" wrap="square"/>
+          <a:lstStyle/>
+          <a:p>
+            <a:pPr algn="ctr"/>
+            <a:r>
+              <a:rPr sz="1050" b="1" i="0">
+                <a:solidFill>
+                  <a:srgbClr val="FFFFFF"/>
+                </a:solidFill>
+                <a:latin typeface="Calibri"/>
+              </a:rPr>
+              <a:t>Infraestructura
+(cómputo, red, disco)</a:t>
+            </a:r>
+          </a:p>
+        </p:txBody>
+      </p:sp>
+      <p:sp>
+        <p:nvSpPr>
+          <p:cNvPr id="13" name="Rounded Rectangle 12"/>
+          <p:cNvSpPr/>
+          <p:nvPr/>
+        </p:nvSpPr>
+        <p:spPr>
+          <a:xfrm>
+            <a:off x="4160520" y="2103120"/>
+            <a:ext cx="3291840" cy="548640"/>
+          </a:xfrm>
+          <a:prstGeom prst="roundRect">
+            <a:avLst>
+              <a:gd name="adj" fmla="val 12000"/>
+            </a:avLst>
+          </a:prstGeom>
+          <a:solidFill>
+            <a:srgbClr val="FFD000"/>
+          </a:solidFill>
+          <a:ln>
+            <a:noFill/>
+          </a:ln>
+        </p:spPr>
+        <p:style>
+          <a:lnRef idx="1">
+            <a:schemeClr val="accent1"/>
+          </a:lnRef>
+          <a:fillRef idx="3">
+            <a:schemeClr val="accent1"/>
+          </a:fillRef>
+          <a:effectRef idx="2">
+            <a:schemeClr val="accent1"/>
+          </a:effectRef>
+          <a:fontRef idx="minor">
+            <a:schemeClr val="lt1"/>
+          </a:fontRef>
+        </p:style>
+        <p:txBody>
+          <a:bodyPr rtlCol="0" anchor="ctr" wrap="square"/>
+          <a:lstStyle/>
+          <a:p>
+            <a:pPr algn="ctr"/>
+            <a:r>
+              <a:rPr sz="1100" b="1" i="0">
+                <a:solidFill>
+                  <a:srgbClr val="095292"/>
+                </a:solidFill>
+                <a:latin typeface="Calibri"/>
+              </a:rPr>
+              <a:t>Aplicación y datos</a:t>
+            </a:r>
+          </a:p>
+        </p:txBody>
+      </p:sp>
+      <p:sp>
+        <p:nvSpPr>
+          <p:cNvPr id="14" name="Rounded Rectangle 13"/>
+          <p:cNvSpPr/>
+          <p:nvPr/>
+        </p:nvSpPr>
+        <p:spPr>
+          <a:xfrm>
+            <a:off x="4160520" y="2743200"/>
+            <a:ext cx="3291840" cy="548640"/>
+          </a:xfrm>
+          <a:prstGeom prst="roundRect">
+            <a:avLst>
+              <a:gd name="adj" fmla="val 12000"/>
+            </a:avLst>
+          </a:prstGeom>
+          <a:solidFill>
+            <a:srgbClr val="269CCB"/>
+          </a:solidFill>
+          <a:ln>
+            <a:noFill/>
+          </a:ln>
+        </p:spPr>
+        <p:style>
+          <a:lnRef idx="1">
+            <a:schemeClr val="accent1"/>
+          </a:lnRef>
+          <a:fillRef idx="3">
+            <a:schemeClr val="accent1"/>
+          </a:fillRef>
+          <a:effectRef idx="2">
+            <a:schemeClr val="accent1"/>
+          </a:effectRef>
+          <a:fontRef idx="minor">
+            <a:schemeClr val="lt1"/>
+          </a:fontRef>
+        </p:style>
+        <p:txBody>
+          <a:bodyPr rtlCol="0" anchor="ctr" wrap="square"/>
+          <a:lstStyle/>
+          <a:p>
+            <a:pPr algn="ctr"/>
+            <a:r>
+              <a:rPr sz="1100" b="1" i="0">
+                <a:solidFill>
+                  <a:srgbClr val="FFFFFF"/>
+                </a:solidFill>
+                <a:latin typeface="Calibri"/>
+              </a:rPr>
+              <a:t>Runtime / middleware</a:t>
+            </a:r>
+          </a:p>
+        </p:txBody>
+      </p:sp>
+      <p:sp>
+        <p:nvSpPr>
+          <p:cNvPr id="15" name="Rounded Rectangle 14"/>
+          <p:cNvSpPr/>
+          <p:nvPr/>
+        </p:nvSpPr>
+        <p:spPr>
+          <a:xfrm>
+            <a:off x="4160520" y="3383280"/>
+            <a:ext cx="3291840" cy="548640"/>
+          </a:xfrm>
+          <a:prstGeom prst="roundRect">
+            <a:avLst>
+              <a:gd name="adj" fmla="val 12000"/>
+            </a:avLst>
+          </a:prstGeom>
+          <a:solidFill>
+            <a:srgbClr val="269CCB"/>
+          </a:solidFill>
+          <a:ln>
+            <a:noFill/>
+          </a:ln>
+        </p:spPr>
+        <p:style>
+          <a:lnRef idx="1">
+            <a:schemeClr val="accent1"/>
+          </a:lnRef>
+          <a:fillRef idx="3">
+            <a:schemeClr val="accent1"/>
+          </a:fillRef>
+          <a:effectRef idx="2">
+            <a:schemeClr val="accent1"/>
+          </a:effectRef>
+          <a:fontRef idx="minor">
+            <a:schemeClr val="lt1"/>
+          </a:fontRef>
+        </p:style>
+        <p:txBody>
+          <a:bodyPr rtlCol="0" anchor="ctr" wrap="square"/>
+          <a:lstStyle/>
+          <a:p>
+            <a:pPr algn="ctr"/>
+            <a:r>
+              <a:rPr sz="1100" b="1" i="0">
+                <a:solidFill>
+                  <a:srgbClr val="FFFFFF"/>
+                </a:solidFill>
+                <a:latin typeface="Calibri"/>
+              </a:rPr>
+              <a:t>Sistema operativo</a:t>
+            </a:r>
+          </a:p>
+        </p:txBody>
+      </p:sp>
+      <p:sp>
+        <p:nvSpPr>
+          <p:cNvPr id="16" name="Rounded Rectangle 15"/>
+          <p:cNvSpPr/>
+          <p:nvPr/>
+        </p:nvSpPr>
+        <p:spPr>
+          <a:xfrm>
+            <a:off x="4160520" y="4023360"/>
+            <a:ext cx="3291840" cy="548640"/>
+          </a:xfrm>
+          <a:prstGeom prst="roundRect">
+            <a:avLst>
+              <a:gd name="adj" fmla="val 12000"/>
+            </a:avLst>
+          </a:prstGeom>
+          <a:solidFill>
+            <a:srgbClr val="269CCB"/>
+          </a:solidFill>
+          <a:ln>
+            <a:noFill/>
+          </a:ln>
+        </p:spPr>
+        <p:style>
+          <a:lnRef idx="1">
+            <a:schemeClr val="accent1"/>
+          </a:lnRef>
+          <a:fillRef idx="3">
+            <a:schemeClr val="accent1"/>
+          </a:fillRef>
+          <a:effectRef idx="2">
+            <a:schemeClr val="accent1"/>
+          </a:effectRef>
+          <a:fontRef idx="minor">
+            <a:schemeClr val="lt1"/>
+          </a:fontRef>
+        </p:style>
+        <p:txBody>
+          <a:bodyPr rtlCol="0" anchor="ctr" wrap="square"/>
+          <a:lstStyle/>
+          <a:p>
+            <a:pPr algn="ctr"/>
+            <a:r>
+              <a:rPr sz="1050" b="1" i="0">
+                <a:solidFill>
+                  <a:srgbClr val="FFFFFF"/>
+                </a:solidFill>
+                <a:latin typeface="Calibri"/>
+              </a:rPr>
+              <a:t>Infraestructura
+(cómputo, red, disco)</a:t>
+            </a:r>
+          </a:p>
+        </p:txBody>
+      </p:sp>
+      <p:sp>
+        <p:nvSpPr>
+          <p:cNvPr id="17" name="Rounded Rectangle 16"/>
+          <p:cNvSpPr/>
+          <p:nvPr/>
+        </p:nvSpPr>
+        <p:spPr>
+          <a:xfrm>
+            <a:off x="7772400" y="2103120"/>
+            <a:ext cx="3291840" cy="548640"/>
+          </a:xfrm>
+          <a:prstGeom prst="roundRect">
+            <a:avLst>
+              <a:gd name="adj" fmla="val 12000"/>
+            </a:avLst>
+          </a:prstGeom>
+          <a:solidFill>
+            <a:srgbClr val="FFD000"/>
+          </a:solidFill>
+          <a:ln>
+            <a:noFill/>
+          </a:ln>
+        </p:spPr>
+        <p:style>
+          <a:lnRef idx="1">
+            <a:schemeClr val="accent1"/>
+          </a:lnRef>
+          <a:fillRef idx="3">
+            <a:schemeClr val="accent1"/>
+          </a:fillRef>
+          <a:effectRef idx="2">
+            <a:schemeClr val="accent1"/>
+          </a:effectRef>
+          <a:fontRef idx="minor">
+            <a:schemeClr val="lt1"/>
+          </a:fontRef>
+        </p:style>
+        <p:txBody>
+          <a:bodyPr rtlCol="0" anchor="ctr" wrap="square"/>
+          <a:lstStyle/>
+          <a:p>
+            <a:pPr algn="ctr"/>
+            <a:r>
+              <a:rPr sz="1050" b="1" i="0">
+                <a:solidFill>
+                  <a:srgbClr val="095292"/>
+                </a:solidFill>
+                <a:latin typeface="Calibri"/>
+              </a:rPr>
+              <a:t>Aplicación y datos
+(usted solo configura)</a:t>
+            </a:r>
+          </a:p>
+        </p:txBody>
+      </p:sp>
+      <p:sp>
+        <p:nvSpPr>
+          <p:cNvPr id="18" name="Rounded Rectangle 17"/>
+          <p:cNvSpPr/>
+          <p:nvPr/>
+        </p:nvSpPr>
+        <p:spPr>
+          <a:xfrm>
+            <a:off x="7772400" y="2743200"/>
+            <a:ext cx="3291840" cy="548640"/>
+          </a:xfrm>
+          <a:prstGeom prst="roundRect">
+            <a:avLst>
+              <a:gd name="adj" fmla="val 12000"/>
+            </a:avLst>
+          </a:prstGeom>
+          <a:solidFill>
+            <a:srgbClr val="269CCB"/>
+          </a:solidFill>
+          <a:ln>
+            <a:noFill/>
+          </a:ln>
+        </p:spPr>
+        <p:style>
+          <a:lnRef idx="1">
+            <a:schemeClr val="accent1"/>
+          </a:lnRef>
+          <a:fillRef idx="3">
+            <a:schemeClr val="accent1"/>
+          </a:fillRef>
+          <a:effectRef idx="2">
+            <a:schemeClr val="accent1"/>
+          </a:effectRef>
+          <a:fontRef idx="minor">
+            <a:schemeClr val="lt1"/>
+          </a:fontRef>
+        </p:style>
+        <p:txBody>
+          <a:bodyPr rtlCol="0" anchor="ctr" wrap="square"/>
+          <a:lstStyle/>
+          <a:p>
+            <a:pPr algn="ctr"/>
+            <a:r>
+              <a:rPr sz="1100" b="1" i="0">
+                <a:solidFill>
+                  <a:srgbClr val="FFFFFF"/>
+                </a:solidFill>
+                <a:latin typeface="Calibri"/>
+              </a:rPr>
+              <a:t>Runtime / middleware</a:t>
+            </a:r>
+          </a:p>
+        </p:txBody>
+      </p:sp>
+      <p:sp>
+        <p:nvSpPr>
+          <p:cNvPr id="19" name="Rounded Rectangle 18"/>
+          <p:cNvSpPr/>
+          <p:nvPr/>
+        </p:nvSpPr>
+        <p:spPr>
+          <a:xfrm>
+            <a:off x="7772400" y="3383280"/>
+            <a:ext cx="3291840" cy="548640"/>
+          </a:xfrm>
+          <a:prstGeom prst="roundRect">
+            <a:avLst>
+              <a:gd name="adj" fmla="val 12000"/>
+            </a:avLst>
+          </a:prstGeom>
+          <a:solidFill>
+            <a:srgbClr val="269CCB"/>
+          </a:solidFill>
+          <a:ln>
+            <a:noFill/>
+          </a:ln>
+        </p:spPr>
+        <p:style>
+          <a:lnRef idx="1">
+            <a:schemeClr val="accent1"/>
+          </a:lnRef>
+          <a:fillRef idx="3">
+            <a:schemeClr val="accent1"/>
+          </a:fillRef>
+          <a:effectRef idx="2">
+            <a:schemeClr val="accent1"/>
+          </a:effectRef>
+          <a:fontRef idx="minor">
+            <a:schemeClr val="lt1"/>
+          </a:fontRef>
+        </p:style>
+        <p:txBody>
+          <a:bodyPr rtlCol="0" anchor="ctr" wrap="square"/>
+          <a:lstStyle/>
+          <a:p>
+            <a:pPr algn="ctr"/>
+            <a:r>
+              <a:rPr sz="1100" b="1" i="0">
+                <a:solidFill>
+                  <a:srgbClr val="FFFFFF"/>
+                </a:solidFill>
+                <a:latin typeface="Calibri"/>
+              </a:rPr>
+              <a:t>Sistema operativo</a:t>
+            </a:r>
+          </a:p>
+        </p:txBody>
+      </p:sp>
+      <p:sp>
+        <p:nvSpPr>
+          <p:cNvPr id="20" name="Rounded Rectangle 19"/>
+          <p:cNvSpPr/>
+          <p:nvPr/>
+        </p:nvSpPr>
+        <p:spPr>
+          <a:xfrm>
+            <a:off x="7772400" y="4023360"/>
+            <a:ext cx="3291840" cy="548640"/>
+          </a:xfrm>
+          <a:prstGeom prst="roundRect">
+            <a:avLst>
+              <a:gd name="adj" fmla="val 12000"/>
+            </a:avLst>
+          </a:prstGeom>
+          <a:solidFill>
+            <a:srgbClr val="269CCB"/>
+          </a:solidFill>
+          <a:ln>
+            <a:noFill/>
+          </a:ln>
+        </p:spPr>
+        <p:style>
+          <a:lnRef idx="1">
+            <a:schemeClr val="accent1"/>
+          </a:lnRef>
+          <a:fillRef idx="3">
+            <a:schemeClr val="accent1"/>
+          </a:fillRef>
+          <a:effectRef idx="2">
+            <a:schemeClr val="accent1"/>
+          </a:effectRef>
+          <a:fontRef idx="minor">
+            <a:schemeClr val="lt1"/>
+          </a:fontRef>
+        </p:style>
+        <p:txBody>
+          <a:bodyPr rtlCol="0" anchor="ctr" wrap="square"/>
+          <a:lstStyle/>
+          <a:p>
+            <a:pPr algn="ctr"/>
+            <a:r>
+              <a:rPr sz="1050" b="1" i="0">
+                <a:solidFill>
+                  <a:srgbClr val="FFFFFF"/>
+                </a:solidFill>
+                <a:latin typeface="Calibri"/>
+              </a:rPr>
+              <a:t>Infraestructura
+(cómputo, red, disco)</a:t>
+            </a:r>
+          </a:p>
+        </p:txBody>
+      </p:sp>
+      <p:sp>
+        <p:nvSpPr>
+          <p:cNvPr id="21" name="TextBox 20"/>
+          <p:cNvSpPr txBox="1"/>
+          <p:nvPr/>
+        </p:nvSpPr>
+        <p:spPr>
+          <a:xfrm>
+            <a:off x="457200" y="5897880"/>
+            <a:ext cx="11277295" cy="320040"/>
+          </a:xfrm>
+          <a:prstGeom prst="rect">
+            <a:avLst/>
+          </a:prstGeom>
+          <a:noFill/>
+        </p:spPr>
+        <p:txBody>
+          <a:bodyPr wrap="square">
+            <a:spAutoFit/>
+          </a:bodyPr>
+          <a:lstStyle/>
+          <a:p>
+            <a:r>
+              <a:rPr sz="1050" b="0" i="1">
+                <a:solidFill>
+                  <a:srgbClr val="666666"/>
+                </a:solidFill>
+                <a:latin typeface="Calibri"/>
+              </a:rPr>
+              <a:t>Amarillo = lo administra usted · Celeste = lo administra el proveedor</a:t>
+            </a:r>
+          </a:p>
+        </p:txBody>
+      </p:sp>
+      <p:sp>
+        <p:nvSpPr>
+          <p:cNvPr id="22" name="TextBox 21"/>
+          <p:cNvSpPr txBox="1"/>
+          <p:nvPr/>
+        </p:nvSpPr>
+        <p:spPr>
+          <a:xfrm>
+            <a:off x="457200" y="6263640"/>
+            <a:ext cx="11277295" cy="411480"/>
+          </a:xfrm>
+          <a:prstGeom prst="rect">
+            <a:avLst/>
+          </a:prstGeom>
+          <a:noFill/>
+        </p:spPr>
+        <p:txBody>
+          <a:bodyPr wrap="square">
+            <a:spAutoFit/>
+          </a:bodyPr>
+          <a:lstStyle/>
+          <a:p>
+            <a:r>
+              <a:rPr sz="1100" b="0" i="1">
+                <a:solidFill>
+                  <a:srgbClr val="666666"/>
+                </a:solidFill>
+                <a:latin typeface="Calibri"/>
+              </a:rPr>
+              <a:t>Suba en la pila y sube el control, pero también lo que tiene que operar usted: parches, escalado, disponibilidad. Para el MVP de CloudLite, PaaS es el punto medio: usted solo responde por su aplicación y sus datos.</a:t>
+            </a:r>
+          </a:p>
+        </p:txBody>
+      </p:sp>
+      <p:sp>
+        <p:nvSpPr>
+          <p:cNvPr id="23" name="TextBox 22"/>
+          <p:cNvSpPr txBox="1"/>
+          <p:nvPr/>
+        </p:nvSpPr>
+        <p:spPr>
+          <a:xfrm>
+            <a:off x="11185855" y="6473952"/>
+            <a:ext cx="640080" cy="274320"/>
+          </a:xfrm>
+          <a:prstGeom prst="rect">
+            <a:avLst/>
+          </a:prstGeom>
+          <a:noFill/>
+        </p:spPr>
+        <p:txBody>
+          <a:bodyPr wrap="square">
+            <a:spAutoFit/>
+          </a:bodyPr>
+          <a:lstStyle/>
+          <a:p>
+            <a:pPr algn="r"/>
+            <a:r>
+              <a:rPr sz="1100" b="0" i="0">
+                <a:solidFill>
+                  <a:srgbClr val="666666"/>
+                </a:solidFill>
+                <a:latin typeface="Calibri"/>
+              </a:rPr>
+              <a:t>21</a:t>
+            </a:r>
+          </a:p>
+        </p:txBody>
+      </p:sp>
+    </p:spTree>
+  </p:cSld>
+  <p:clrMapOvr>
+    <a:masterClrMapping/>
+  </p:clrMapOvr>
+</p:sld>
+</file>
+
+<file path=ppt/slides/slide22.xml><?xml version="1.0" encoding="utf-8"?>
+<p:sld xmlns:a="http://schemas.openxmlformats.org/drawingml/2006/main" xmlns:p="http://schemas.openxmlformats.org/presentationml/2006/main" xmlns:r="http://schemas.openxmlformats.org/officeDocument/2006/relationships">
+  <p:cSld>
+    <p:bg>
+      <p:bgPr>
+        <a:solidFill>
+          <a:srgbClr val="FFFFFF"/>
+        </a:solidFill>
+        <a:effectLst/>
+      </p:bgPr>
+    </p:bg>
+    <p:spTree>
+      <p:nvGrpSpPr>
+        <p:cNvPr id="1" name=""/>
+        <p:cNvGrpSpPr/>
+        <p:nvPr/>
+      </p:nvGrpSpPr>
+      <p:grpSpPr/>
+      <p:sp>
+        <p:nvSpPr>
+          <p:cNvPr id="2" name="Rectangle 1"/>
+          <p:cNvSpPr/>
+          <p:nvPr/>
+        </p:nvSpPr>
+        <p:spPr>
+          <a:xfrm>
+            <a:off x="0" y="0"/>
+            <a:ext cx="12191695" cy="960120"/>
+          </a:xfrm>
+          <a:prstGeom prst="rect">
+            <a:avLst/>
+          </a:prstGeom>
+          <a:solidFill>
+            <a:srgbClr val="095292"/>
+          </a:solidFill>
+          <a:ln>
+            <a:noFill/>
+          </a:ln>
+        </p:spPr>
+        <p:style>
+          <a:lnRef idx="1">
+            <a:schemeClr val="accent1"/>
+          </a:lnRef>
+          <a:fillRef idx="3">
+            <a:schemeClr val="accent1"/>
+          </a:fillRef>
+          <a:effectRef idx="2">
+            <a:schemeClr val="accent1"/>
+          </a:effectRef>
+          <a:fontRef idx="minor">
+            <a:schemeClr val="lt1"/>
+          </a:fontRef>
+        </p:style>
+        <p:txBody>
+          <a:bodyPr rtlCol="0" anchor="ctr"/>
+          <a:lstStyle/>
+          <a:p>
+            <a:pPr algn="ctr"/>
+          </a:p>
+        </p:txBody>
+      </p:sp>
+      <p:sp>
+        <p:nvSpPr>
+          <p:cNvPr id="3" name="Rectangle 2"/>
+          <p:cNvSpPr/>
+          <p:nvPr/>
+        </p:nvSpPr>
+        <p:spPr>
+          <a:xfrm>
+            <a:off x="0" y="960120"/>
+            <a:ext cx="12191695" cy="41148"/>
+          </a:xfrm>
+          <a:prstGeom prst="rect">
+            <a:avLst/>
+          </a:prstGeom>
+          <a:solidFill>
+            <a:srgbClr val="FFD000"/>
+          </a:solidFill>
+          <a:ln>
+            <a:noFill/>
+          </a:ln>
+        </p:spPr>
+        <p:style>
+          <a:lnRef idx="1">
+            <a:schemeClr val="accent1"/>
+          </a:lnRef>
+          <a:fillRef idx="3">
+            <a:schemeClr val="accent1"/>
+          </a:fillRef>
+          <a:effectRef idx="2">
+            <a:schemeClr val="accent1"/>
+          </a:effectRef>
+          <a:fontRef idx="minor">
+            <a:schemeClr val="lt1"/>
+          </a:fontRef>
+        </p:style>
+        <p:txBody>
+          <a:bodyPr rtlCol="0" anchor="ctr"/>
+          <a:lstStyle/>
+          <a:p>
+            <a:pPr algn="ctr"/>
+          </a:p>
+        </p:txBody>
+      </p:sp>
+      <p:sp>
+        <p:nvSpPr>
+          <p:cNvPr id="4" name="TextBox 3"/>
+          <p:cNvSpPr txBox="1"/>
+          <p:nvPr/>
+        </p:nvSpPr>
+        <p:spPr>
+          <a:xfrm>
+            <a:off x="457200" y="164592"/>
+            <a:ext cx="11277295" cy="502920"/>
+          </a:xfrm>
+          <a:prstGeom prst="rect">
+            <a:avLst/>
+          </a:prstGeom>
+          <a:noFill/>
+        </p:spPr>
+        <p:txBody>
+          <a:bodyPr wrap="square">
+            <a:spAutoFit/>
+          </a:bodyPr>
+          <a:lstStyle/>
+          <a:p>
+            <a:r>
+              <a:rPr sz="2600" b="1" i="0">
+                <a:solidFill>
+                  <a:srgbClr val="FFFFFF"/>
+                </a:solidFill>
+                <a:latin typeface="Calibri"/>
+              </a:rPr>
+              <a:t>ADR-001 — las 6 secciones caben en una pagina</a:t>
+            </a:r>
+          </a:p>
+        </p:txBody>
+      </p:sp>
+      <p:sp>
+        <p:nvSpPr>
+          <p:cNvPr id="5" name="Rounded Rectangle 4"/>
+          <p:cNvSpPr/>
+          <p:nvPr/>
+        </p:nvSpPr>
+        <p:spPr>
+          <a:xfrm>
+            <a:off x="457200" y="1261872"/>
+            <a:ext cx="11277295" cy="4773168"/>
+          </a:xfrm>
+          <a:prstGeom prst="roundRect">
+            <a:avLst>
+              <a:gd name="adj" fmla="val 12000"/>
+            </a:avLst>
+          </a:prstGeom>
+          <a:solidFill>
+            <a:srgbClr val="1E2A38"/>
+          </a:solidFill>
+          <a:ln>
+            <a:noFill/>
+          </a:ln>
+        </p:spPr>
+        <p:style>
+          <a:lnRef idx="1">
+            <a:schemeClr val="accent1"/>
+          </a:lnRef>
+          <a:fillRef idx="3">
+            <a:schemeClr val="accent1"/>
+          </a:fillRef>
+          <a:effectRef idx="2">
+            <a:schemeClr val="accent1"/>
+          </a:effectRef>
+          <a:fontRef idx="minor">
+            <a:schemeClr val="lt1"/>
+          </a:fontRef>
+        </p:style>
+        <p:txBody>
+          <a:bodyPr rtlCol="0" anchor="ctr"/>
+          <a:lstStyle/>
+          <a:p>
+            <a:pPr algn="ctr"/>
+          </a:p>
+        </p:txBody>
+      </p:sp>
+      <p:sp>
+        <p:nvSpPr>
+          <p:cNvPr id="6" name="Rectangle 5"/>
+          <p:cNvSpPr/>
+          <p:nvPr/>
+        </p:nvSpPr>
+        <p:spPr>
+          <a:xfrm>
+            <a:off x="457200" y="1261872"/>
+            <a:ext cx="11277295" cy="320040"/>
+          </a:xfrm>
+          <a:prstGeom prst="rect">
+            <a:avLst/>
+          </a:prstGeom>
+          <a:solidFill>
+            <a:srgbClr val="095292"/>
+          </a:solidFill>
+          <a:ln>
+            <a:noFill/>
+          </a:ln>
+        </p:spPr>
+        <p:style>
+          <a:lnRef idx="1">
+            <a:schemeClr val="accent1"/>
+          </a:lnRef>
+          <a:fillRef idx="3">
+            <a:schemeClr val="accent1"/>
+          </a:fillRef>
+          <a:effectRef idx="2">
+            <a:schemeClr val="accent1"/>
+          </a:effectRef>
+          <a:fontRef idx="minor">
+            <a:schemeClr val="lt1"/>
+          </a:fontRef>
+        </p:style>
+        <p:txBody>
+          <a:bodyPr rtlCol="0" anchor="ctr"/>
+          <a:lstStyle/>
+          <a:p>
+            <a:pPr algn="ctr"/>
+          </a:p>
+        </p:txBody>
+      </p:sp>
+      <p:sp>
+        <p:nvSpPr>
+          <p:cNvPr id="7" name="TextBox 6"/>
+          <p:cNvSpPr txBox="1"/>
+          <p:nvPr/>
+        </p:nvSpPr>
+        <p:spPr>
+          <a:xfrm>
+            <a:off x="685800" y="1307592"/>
+            <a:ext cx="10820095" cy="256032"/>
+          </a:xfrm>
+          <a:prstGeom prst="rect">
+            <a:avLst/>
+          </a:prstGeom>
+          <a:noFill/>
+        </p:spPr>
+        <p:txBody>
+          <a:bodyPr wrap="square" anchor="ctr"/>
+          <a:lstStyle/>
+          <a:p>
+            <a:r>
+              <a:rPr sz="1000" b="1" i="0">
+                <a:solidFill>
+                  <a:srgbClr val="269CCB"/>
+                </a:solidFill>
+                <a:latin typeface="Calibri"/>
+              </a:rPr>
+              <a:t>● ● ●</a:t>
+            </a:r>
+          </a:p>
+        </p:txBody>
+      </p:sp>
+      <p:sp>
+        <p:nvSpPr>
+          <p:cNvPr id="8" name="TextBox 7"/>
+          <p:cNvSpPr txBox="1"/>
+          <p:nvPr/>
+        </p:nvSpPr>
+        <p:spPr>
+          <a:xfrm>
+            <a:off x="777240" y="1719072"/>
+            <a:ext cx="10637215" cy="4133087"/>
+          </a:xfrm>
+          <a:prstGeom prst="rect">
+            <a:avLst/>
+          </a:prstGeom>
+          <a:noFill/>
+        </p:spPr>
+        <p:txBody>
+          <a:bodyPr wrap="square">
+            <a:spAutoFit/>
+          </a:bodyPr>
+          <a:lstStyle/>
+          <a:p>
+            <a:pPr>
+              <a:spcAft>
+                <a:spcPts val="400"/>
+              </a:spcAft>
+            </a:pPr>
+            <a:r>
+              <a:rPr sz="1400" b="0" i="0">
+                <a:solidFill>
+                  <a:srgbClr val="FFFFFF"/>
+                </a:solidFill>
+                <a:latin typeface="Calibri"/>
+              </a:rPr>
+              <a:t>## 1. Titulo     ADR-001 Modelo de servicio dominante de CloudLite App</a:t>
+            </a:r>
+          </a:p>
+          <a:p>
+            <a:pPr>
+              <a:spcAft>
+                <a:spcPts val="400"/>
+              </a:spcAft>
+            </a:pPr>
+            <a:r>
+              <a:rPr sz="1400" b="0" i="0">
+                <a:solidFill>
+                  <a:srgbClr val="FFFFFF"/>
+                </a:solidFill>
+                <a:latin typeface="Calibri"/>
+              </a:rPr>
+              <a:t>## 2. Estado     Aceptado — &lt;fecha de hoy&gt;</a:t>
+            </a:r>
+          </a:p>
+          <a:p>
+            <a:pPr>
+              <a:spcAft>
+                <a:spcPts val="400"/>
+              </a:spcAft>
+            </a:pPr>
+            <a:r>
+              <a:rPr sz="1400" b="0" i="0">
+                <a:solidFill>
+                  <a:srgbClr val="FFFFFF"/>
+                </a:solidFill>
+                <a:latin typeface="Calibri"/>
+              </a:rPr>
+              <a:t/>
+            </a:r>
+          </a:p>
+          <a:p>
+            <a:pPr>
+              <a:spcAft>
+                <a:spcPts val="400"/>
+              </a:spcAft>
+            </a:pPr>
+            <a:r>
+              <a:rPr sz="1400" b="0" i="0">
+                <a:solidFill>
+                  <a:srgbClr val="FFFFFF"/>
+                </a:solidFill>
+                <a:latin typeface="Calibri"/>
+              </a:rPr>
+              <a:t>## 3. Contexto                    &lt;- restricciones, no resumen del tema</a:t>
+            </a:r>
+          </a:p>
+          <a:p>
+            <a:pPr>
+              <a:spcAft>
+                <a:spcPts val="400"/>
+              </a:spcAft>
+            </a:pPr>
+            <a:r>
+              <a:rPr sz="1400" b="0" i="0">
+                <a:solidFill>
+                  <a:srgbClr val="FFFFFF"/>
+                </a:solidFill>
+                <a:latin typeface="Calibri"/>
+              </a:rPr>
+              <a:t>Lo sostengo yo solo, 12 semanas, sin presupuesto cloud ni tarjeta; demo viva el dia de la sustentacion.</a:t>
+            </a:r>
+          </a:p>
+          <a:p>
+            <a:pPr>
+              <a:spcAft>
+                <a:spcPts val="400"/>
+              </a:spcAft>
+            </a:pPr>
+            <a:r>
+              <a:rPr sz="1400" b="0" i="0">
+                <a:solidFill>
+                  <a:srgbClr val="FFFFFF"/>
+                </a:solidFill>
+                <a:latin typeface="Calibri"/>
+              </a:rPr>
+              <a:t/>
+            </a:r>
+          </a:p>
+          <a:p>
+            <a:pPr>
+              <a:spcAft>
+                <a:spcPts val="400"/>
+              </a:spcAft>
+            </a:pPr>
+            <a:r>
+              <a:rPr sz="1400" b="0" i="0">
+                <a:solidFill>
+                  <a:srgbClr val="FFFFFF"/>
+                </a:solidFill>
+                <a:latin typeface="Calibri"/>
+              </a:rPr>
+              <a:t>## 4. Decision                    &lt;- UNA frase, UN modelo dominante</a:t>
+            </a:r>
+          </a:p>
+          <a:p>
+            <a:pPr>
+              <a:spcAft>
+                <a:spcPts val="400"/>
+              </a:spcAft>
+            </a:pPr>
+            <a:r>
+              <a:rPr sz="1400" b="0" i="0">
+                <a:solidFill>
+                  <a:srgbClr val="FFFFFF"/>
+                </a:solidFill>
+                <a:latin typeface="Calibri"/>
+              </a:rPr>
+              <a:t>La aplicacion de CloudLite se despliega sobre PaaS.</a:t>
+            </a:r>
+          </a:p>
+          <a:p>
+            <a:pPr>
+              <a:spcAft>
+                <a:spcPts val="400"/>
+              </a:spcAft>
+            </a:pPr>
+            <a:r>
+              <a:rPr sz="1400" b="0" i="0">
+                <a:solidFill>
+                  <a:srgbClr val="FFFFFF"/>
+                </a:solidFill>
+                <a:latin typeface="Calibri"/>
+              </a:rPr>
+              <a:t/>
+            </a:r>
+          </a:p>
+          <a:p>
+            <a:pPr>
+              <a:spcAft>
+                <a:spcPts val="400"/>
+              </a:spcAft>
+            </a:pPr>
+            <a:r>
+              <a:rPr sz="1400" b="0" i="0">
+                <a:solidFill>
+                  <a:srgbClr val="FFFFFF"/>
+                </a:solidFill>
+                <a:latin typeface="Calibri"/>
+              </a:rPr>
+              <a:t>## 5. Alternativas descartadas    &lt;- exactamente 2, con motivo del dominio</a:t>
+            </a:r>
+          </a:p>
+          <a:p>
+            <a:pPr>
+              <a:spcAft>
+                <a:spcPts val="400"/>
+              </a:spcAft>
+            </a:pPr>
+            <a:r>
+              <a:rPr sz="1400" b="0" i="0">
+                <a:solidFill>
+                  <a:srgbClr val="FFFFFF"/>
+                </a:solidFill>
+                <a:latin typeface="Calibri"/>
+              </a:rPr>
+              <a:t>- IaaS: control total, pero yo opero SO y parches -&gt; tiempo que no tengo.</a:t>
+            </a:r>
+          </a:p>
+          <a:p>
+            <a:pPr>
+              <a:spcAft>
+                <a:spcPts val="400"/>
+              </a:spcAft>
+            </a:pPr>
+            <a:r>
+              <a:rPr sz="1400" b="0" i="0">
+                <a:solidFill>
+                  <a:srgbClr val="FFFFFF"/>
+                </a:solidFill>
+                <a:latin typeface="Calibri"/>
+              </a:rPr>
+              <a:t>- SaaS como nucleo: no queda nada que arquitecturar; solo satelite (auth/email).</a:t>
+            </a:r>
+          </a:p>
+          <a:p>
+            <a:pPr>
+              <a:spcAft>
+                <a:spcPts val="400"/>
+              </a:spcAft>
+            </a:pPr>
+            <a:r>
+              <a:rPr sz="1400" b="0" i="0">
+                <a:solidFill>
+                  <a:srgbClr val="FFFFFF"/>
+                </a:solidFill>
+                <a:latin typeface="Calibri"/>
+              </a:rPr>
+              <a:t/>
+            </a:r>
+          </a:p>
+          <a:p>
+            <a:pPr>
+              <a:spcAft>
+                <a:spcPts val="400"/>
+              </a:spcAft>
+            </a:pPr>
+            <a:r>
+              <a:rPr sz="1400" b="0" i="0">
+                <a:solidFill>
+                  <a:srgbClr val="FFFFFF"/>
+                </a:solidFill>
+                <a:latin typeface="Calibri"/>
+              </a:rPr>
+              <a:t>## 6. Consecuencias               &lt;- pregunta 7: 3 ejes, cada uno con + y -</a:t>
+            </a:r>
+          </a:p>
+          <a:p>
+            <a:pPr>
+              <a:spcAft>
+                <a:spcPts val="400"/>
+              </a:spcAft>
+            </a:pPr>
+            <a:r>
+              <a:rPr sz="1400" b="0" i="0">
+                <a:solidFill>
+                  <a:srgbClr val="FFFFFF"/>
+                </a:solidFill>
+                <a:latin typeface="Calibri"/>
+              </a:rPr>
+              <a:t>Operacion + / -        Costo + / -        Aprendizaje + / -</a:t>
+            </a:r>
+          </a:p>
+        </p:txBody>
+      </p:sp>
+      <p:sp>
+        <p:nvSpPr>
+          <p:cNvPr id="9" name="TextBox 8"/>
+          <p:cNvSpPr txBox="1"/>
+          <p:nvPr/>
+        </p:nvSpPr>
+        <p:spPr>
+          <a:xfrm>
+            <a:off x="457200" y="6080760"/>
+            <a:ext cx="11277295" cy="320040"/>
+          </a:xfrm>
+          <a:prstGeom prst="rect">
+            <a:avLst/>
+          </a:prstGeom>
+          <a:noFill/>
+        </p:spPr>
+        <p:txBody>
+          <a:bodyPr wrap="square">
+            <a:spAutoFit/>
+          </a:bodyPr>
+          <a:lstStyle/>
+          <a:p>
+            <a:pPr algn="ctr"/>
+            <a:r>
+              <a:rPr sz="1200" b="0" i="1">
+                <a:solidFill>
+                  <a:srgbClr val="666666"/>
+                </a:solidFill>
+                <a:latin typeface="Calibri"/>
+              </a:rPr>
+              <a:t>Sin Titulo y Estado con fecha no hay ADR que citar en la Clase 15: son 1.5 puntos de la pregunta 6.</a:t>
+            </a:r>
+          </a:p>
+        </p:txBody>
+      </p:sp>
+      <p:sp>
+        <p:nvSpPr>
+          <p:cNvPr id="10" name="TextBox 9"/>
+          <p:cNvSpPr txBox="1"/>
+          <p:nvPr/>
+        </p:nvSpPr>
+        <p:spPr>
+          <a:xfrm>
+            <a:off x="11185855" y="6473952"/>
+            <a:ext cx="640080" cy="274320"/>
+          </a:xfrm>
+          <a:prstGeom prst="rect">
+            <a:avLst/>
+          </a:prstGeom>
+          <a:noFill/>
+        </p:spPr>
+        <p:txBody>
+          <a:bodyPr wrap="square">
+            <a:spAutoFit/>
+          </a:bodyPr>
+          <a:lstStyle/>
+          <a:p>
+            <a:pPr algn="r"/>
+            <a:r>
+              <a:rPr sz="1100" b="0" i="0">
+                <a:solidFill>
+                  <a:srgbClr val="666666"/>
+                </a:solidFill>
+                <a:latin typeface="Calibri"/>
+              </a:rPr>
+              <a:t>22</a:t>
+            </a:r>
+          </a:p>
+        </p:txBody>
+      </p:sp>
+    </p:spTree>
+  </p:cSld>
+  <p:clrMapOvr>
+    <a:masterClrMapping/>
+  </p:clrMapOvr>
+</p:sld>
+</file>
+
+<file path=ppt/slides/slide23.xml><?xml version="1.0" encoding="utf-8"?>
+<p:sld xmlns:a="http://schemas.openxmlformats.org/drawingml/2006/main" xmlns:p="http://schemas.openxmlformats.org/presentationml/2006/main" xmlns:r="http://schemas.openxmlformats.org/officeDocument/2006/relationships">
+  <p:cSld>
+    <p:bg>
+      <p:bgPr>
+        <a:solidFill>
+          <a:srgbClr val="FFFFFF"/>
+        </a:solidFill>
+        <a:effectLst/>
+      </p:bgPr>
+    </p:bg>
+    <p:spTree>
+      <p:nvGrpSpPr>
+        <p:cNvPr id="1" name=""/>
+        <p:cNvGrpSpPr/>
+        <p:nvPr/>
+      </p:nvGrpSpPr>
+      <p:grpSpPr/>
+      <p:sp>
+        <p:nvSpPr>
+          <p:cNvPr id="2" name="Rectangle 1"/>
+          <p:cNvSpPr/>
+          <p:nvPr/>
+        </p:nvSpPr>
+        <p:spPr>
+          <a:xfrm>
+            <a:off x="0" y="0"/>
+            <a:ext cx="12191695" cy="1170432"/>
+          </a:xfrm>
+          <a:prstGeom prst="rect">
+            <a:avLst/>
+          </a:prstGeom>
+          <a:solidFill>
+            <a:srgbClr val="095292"/>
+          </a:solidFill>
+          <a:ln>
+            <a:noFill/>
+          </a:ln>
+        </p:spPr>
+        <p:style>
+          <a:lnRef idx="1">
+            <a:schemeClr val="accent1"/>
+          </a:lnRef>
+          <a:fillRef idx="3">
+            <a:schemeClr val="accent1"/>
+          </a:fillRef>
+          <a:effectRef idx="2">
+            <a:schemeClr val="accent1"/>
+          </a:effectRef>
+          <a:fontRef idx="minor">
+            <a:schemeClr val="lt1"/>
+          </a:fontRef>
+        </p:style>
+        <p:txBody>
+          <a:bodyPr rtlCol="0" anchor="ctr"/>
+          <a:lstStyle/>
+          <a:p>
+            <a:pPr algn="ctr"/>
+          </a:p>
+        </p:txBody>
+      </p:sp>
+      <p:sp>
+        <p:nvSpPr>
+          <p:cNvPr id="3" name="Rectangle 2"/>
+          <p:cNvSpPr/>
+          <p:nvPr/>
+        </p:nvSpPr>
+        <p:spPr>
+          <a:xfrm>
+            <a:off x="0" y="1170432"/>
+            <a:ext cx="12191695" cy="41148"/>
+          </a:xfrm>
+          <a:prstGeom prst="rect">
+            <a:avLst/>
+          </a:prstGeom>
+          <a:solidFill>
+            <a:srgbClr val="FFD000"/>
+          </a:solidFill>
+          <a:ln>
+            <a:noFill/>
+          </a:ln>
+        </p:spPr>
+        <p:style>
+          <a:lnRef idx="1">
+            <a:schemeClr val="accent1"/>
+          </a:lnRef>
+          <a:fillRef idx="3">
+            <a:schemeClr val="accent1"/>
+          </a:fillRef>
+          <a:effectRef idx="2">
+            <a:schemeClr val="accent1"/>
+          </a:effectRef>
+          <a:fontRef idx="minor">
+            <a:schemeClr val="lt1"/>
+          </a:fontRef>
+        </p:style>
+        <p:txBody>
+          <a:bodyPr rtlCol="0" anchor="ctr"/>
+          <a:lstStyle/>
+          <a:p>
+            <a:pPr algn="ctr"/>
+          </a:p>
+        </p:txBody>
+      </p:sp>
+      <p:sp>
+        <p:nvSpPr>
+          <p:cNvPr id="4" name="TextBox 3"/>
+          <p:cNvSpPr txBox="1"/>
+          <p:nvPr/>
+        </p:nvSpPr>
+        <p:spPr>
+          <a:xfrm>
+            <a:off x="457200" y="164592"/>
+            <a:ext cx="11277295" cy="384048"/>
+          </a:xfrm>
+          <a:prstGeom prst="rect">
+            <a:avLst/>
+          </a:prstGeom>
+          <a:noFill/>
+        </p:spPr>
+        <p:txBody>
+          <a:bodyPr wrap="square">
+            <a:spAutoFit/>
+          </a:bodyPr>
+          <a:lstStyle/>
+          <a:p>
+            <a:r>
+              <a:rPr sz="2600" b="1" i="0">
+                <a:solidFill>
+                  <a:srgbClr val="FFFFFF"/>
+                </a:solidFill>
+                <a:latin typeface="Calibri"/>
+              </a:rPr>
+              <a:t>Herramientas de hoy</a:t>
+            </a:r>
+          </a:p>
+        </p:txBody>
+      </p:sp>
+      <p:sp>
+        <p:nvSpPr>
+          <p:cNvPr id="5" name="TextBox 4"/>
+          <p:cNvSpPr txBox="1"/>
+          <p:nvPr/>
+        </p:nvSpPr>
+        <p:spPr>
+          <a:xfrm>
+            <a:off x="457200" y="566928"/>
+            <a:ext cx="11277295" cy="411480"/>
+          </a:xfrm>
+          <a:prstGeom prst="rect">
+            <a:avLst/>
+          </a:prstGeom>
+          <a:noFill/>
+        </p:spPr>
+        <p:txBody>
+          <a:bodyPr wrap="square">
+            <a:spAutoFit/>
+          </a:bodyPr>
+          <a:lstStyle/>
+          <a:p>
+            <a:r>
+              <a:rPr sz="1400" b="0" i="0">
+                <a:solidFill>
+                  <a:srgbClr val="B8D8EE"/>
+                </a:solidFill>
+                <a:latin typeface="Calibri"/>
+              </a:rPr>
+              <a:t>Gratis · navegador o free tier · sin cuenta de pago</a:t>
+            </a:r>
+          </a:p>
+        </p:txBody>
+      </p:sp>
+      <p:sp>
+        <p:nvSpPr>
+          <p:cNvPr id="6" name="Rounded Rectangle 5"/>
+          <p:cNvSpPr/>
+          <p:nvPr/>
+        </p:nvSpPr>
+        <p:spPr>
+          <a:xfrm>
+            <a:off x="457200" y="1591056"/>
+            <a:ext cx="3624986" cy="2331720"/>
+          </a:xfrm>
+          <a:prstGeom prst="roundRect">
+            <a:avLst>
+              <a:gd name="adj" fmla="val 12000"/>
+            </a:avLst>
+          </a:prstGeom>
+          <a:solidFill>
+            <a:srgbClr val="F2F2F2"/>
+          </a:solidFill>
+          <a:ln>
+            <a:noFill/>
+          </a:ln>
+        </p:spPr>
+        <p:style>
+          <a:lnRef idx="1">
+            <a:schemeClr val="accent1"/>
+          </a:lnRef>
+          <a:fillRef idx="3">
+            <a:schemeClr val="accent1"/>
+          </a:fillRef>
+          <a:effectRef idx="2">
+            <a:schemeClr val="accent1"/>
+          </a:effectRef>
+          <a:fontRef idx="minor">
+            <a:schemeClr val="lt1"/>
+          </a:fontRef>
+        </p:style>
+        <p:txBody>
+          <a:bodyPr rtlCol="0" anchor="ctr"/>
+          <a:lstStyle/>
+          <a:p>
+            <a:pPr algn="ctr"/>
+          </a:p>
+        </p:txBody>
+      </p:sp>
+      <p:sp>
+        <p:nvSpPr>
+          <p:cNvPr id="7" name="Rectangle 6"/>
+          <p:cNvSpPr/>
+          <p:nvPr/>
+        </p:nvSpPr>
+        <p:spPr>
+          <a:xfrm>
+            <a:off x="457200" y="1591056"/>
+            <a:ext cx="3624986" cy="64008"/>
+          </a:xfrm>
+          <a:prstGeom prst="rect">
+            <a:avLst/>
+          </a:prstGeom>
+          <a:solidFill>
+            <a:srgbClr val="095292"/>
+          </a:solidFill>
+          <a:ln>
+            <a:noFill/>
+          </a:ln>
+        </p:spPr>
+        <p:style>
+          <a:lnRef idx="1">
+            <a:schemeClr val="accent1"/>
+          </a:lnRef>
+          <a:fillRef idx="3">
+            <a:schemeClr val="accent1"/>
+          </a:fillRef>
+          <a:effectRef idx="2">
+            <a:schemeClr val="accent1"/>
+          </a:effectRef>
+          <a:fontRef idx="minor">
+            <a:schemeClr val="lt1"/>
+          </a:fontRef>
+        </p:style>
+        <p:txBody>
+          <a:bodyPr rtlCol="0" anchor="ctr"/>
+          <a:lstStyle/>
+          <a:p>
+            <a:pPr algn="ctr"/>
+          </a:p>
+        </p:txBody>
+      </p:sp>
+      <p:sp>
+        <p:nvSpPr>
+          <p:cNvPr id="8" name="Rectangle 7"/>
+          <p:cNvSpPr/>
+          <p:nvPr/>
+        </p:nvSpPr>
+        <p:spPr>
+          <a:xfrm>
+            <a:off x="457200" y="1655064"/>
+            <a:ext cx="3624986" cy="27432"/>
+          </a:xfrm>
+          <a:prstGeom prst="rect">
+            <a:avLst/>
+          </a:prstGeom>
+          <a:solidFill>
+            <a:srgbClr val="FFD000"/>
+          </a:solidFill>
+          <a:ln>
+            <a:noFill/>
+          </a:ln>
+        </p:spPr>
+        <p:style>
+          <a:lnRef idx="1">
+            <a:schemeClr val="accent1"/>
+          </a:lnRef>
+          <a:fillRef idx="3">
+            <a:schemeClr val="accent1"/>
+          </a:fillRef>
+          <a:effectRef idx="2">
+            <a:schemeClr val="accent1"/>
+          </a:effectRef>
+          <a:fontRef idx="minor">
+            <a:schemeClr val="lt1"/>
+          </a:fontRef>
+        </p:style>
+        <p:txBody>
+          <a:bodyPr rtlCol="0" anchor="ctr"/>
+          <a:lstStyle/>
+          <a:p>
+            <a:pPr algn="ctr"/>
+          </a:p>
+        </p:txBody>
+      </p:sp>
+      <p:pic>
+        <p:nvPicPr>
+          <p:cNvPr id="9" name="Picture 8" descr="google_docs.png"/>
+          <p:cNvPicPr>
+            <a:picLocks noChangeAspect="1"/>
+          </p:cNvPicPr>
+          <p:nvPr/>
+        </p:nvPicPr>
+        <p:blipFill>
+          <a:blip r:embed="rId2"/>
+          <a:stretch>
+            <a:fillRect/>
+          </a:stretch>
+        </p:blipFill>
+        <p:spPr>
+          <a:xfrm>
+            <a:off x="1643329" y="1847087"/>
+            <a:ext cx="1252728" cy="1252728"/>
+          </a:xfrm>
+          <a:prstGeom prst="rect">
+            <a:avLst/>
+          </a:prstGeom>
+        </p:spPr>
+      </p:pic>
+      <p:sp>
+        <p:nvSpPr>
+          <p:cNvPr id="10" name="TextBox 9"/>
+          <p:cNvSpPr txBox="1"/>
+          <p:nvPr/>
+        </p:nvSpPr>
+        <p:spPr>
+          <a:xfrm>
+            <a:off x="530352" y="3191256"/>
+            <a:ext cx="3478682" cy="621792"/>
+          </a:xfrm>
+          <a:prstGeom prst="rect">
+            <a:avLst/>
+          </a:prstGeom>
+          <a:noFill/>
+        </p:spPr>
+        <p:txBody>
+          <a:bodyPr wrap="square" anchor="t"/>
+          <a:lstStyle/>
+          <a:p>
+            <a:pPr algn="ctr"/>
+            <a:r>
+              <a:rPr sz="1300" b="1" i="0">
+                <a:solidFill>
+                  <a:srgbClr val="095292"/>
+                </a:solidFill>
+                <a:latin typeface="Calibri"/>
+              </a:rPr>
+              <a:t>Google Docs</a:t>
+            </a:r>
+          </a:p>
+          <a:p>
+            <a:pPr algn="ctr">
+              <a:spcBef>
+                <a:spcPts val="200"/>
+              </a:spcBef>
+            </a:pPr>
+            <a:r>
+              <a:rPr sz="1000" b="0" i="0">
+                <a:solidFill>
+                  <a:srgbClr val="666666"/>
+                </a:solidFill>
+                <a:latin typeface="Calibri"/>
+              </a:rPr>
+              <a:t>ADR-001</a:t>
+            </a:r>
+          </a:p>
+        </p:txBody>
+      </p:sp>
+      <p:sp>
+        <p:nvSpPr>
+          <p:cNvPr id="11" name="Rounded Rectangle 10"/>
+          <p:cNvSpPr/>
+          <p:nvPr/>
+        </p:nvSpPr>
+        <p:spPr>
+          <a:xfrm>
+            <a:off x="4283354" y="1591056"/>
+            <a:ext cx="3624986" cy="2331720"/>
+          </a:xfrm>
+          <a:prstGeom prst="roundRect">
+            <a:avLst>
+              <a:gd name="adj" fmla="val 12000"/>
+            </a:avLst>
+          </a:prstGeom>
+          <a:solidFill>
+            <a:srgbClr val="F2F2F2"/>
+          </a:solidFill>
+          <a:ln>
+            <a:noFill/>
+          </a:ln>
+        </p:spPr>
+        <p:style>
+          <a:lnRef idx="1">
+            <a:schemeClr val="accent1"/>
+          </a:lnRef>
+          <a:fillRef idx="3">
+            <a:schemeClr val="accent1"/>
+          </a:fillRef>
+          <a:effectRef idx="2">
+            <a:schemeClr val="accent1"/>
+          </a:effectRef>
+          <a:fontRef idx="minor">
+            <a:schemeClr val="lt1"/>
+          </a:fontRef>
+        </p:style>
+        <p:txBody>
+          <a:bodyPr rtlCol="0" anchor="ctr"/>
+          <a:lstStyle/>
+          <a:p>
+            <a:pPr algn="ctr"/>
+          </a:p>
+        </p:txBody>
+      </p:sp>
+      <p:sp>
+        <p:nvSpPr>
+          <p:cNvPr id="12" name="Rectangle 11"/>
+          <p:cNvSpPr/>
+          <p:nvPr/>
+        </p:nvSpPr>
+        <p:spPr>
+          <a:xfrm>
+            <a:off x="4283354" y="1591056"/>
+            <a:ext cx="3624986" cy="64008"/>
+          </a:xfrm>
+          <a:prstGeom prst="rect">
+            <a:avLst/>
+          </a:prstGeom>
+          <a:solidFill>
+            <a:srgbClr val="095292"/>
+          </a:solidFill>
+          <a:ln>
+            <a:noFill/>
+          </a:ln>
+        </p:spPr>
+        <p:style>
+          <a:lnRef idx="1">
+            <a:schemeClr val="accent1"/>
+          </a:lnRef>
+          <a:fillRef idx="3">
+            <a:schemeClr val="accent1"/>
+          </a:fillRef>
+          <a:effectRef idx="2">
+            <a:schemeClr val="accent1"/>
+          </a:effectRef>
+          <a:fontRef idx="minor">
+            <a:schemeClr val="lt1"/>
+          </a:fontRef>
+        </p:style>
+        <p:txBody>
+          <a:bodyPr rtlCol="0" anchor="ctr"/>
+          <a:lstStyle/>
+          <a:p>
+            <a:pPr algn="ctr"/>
+          </a:p>
+        </p:txBody>
+      </p:sp>
+      <p:sp>
+        <p:nvSpPr>
+          <p:cNvPr id="13" name="Rectangle 12"/>
+          <p:cNvSpPr/>
+          <p:nvPr/>
+        </p:nvSpPr>
+        <p:spPr>
+          <a:xfrm>
+            <a:off x="4283354" y="1655064"/>
+            <a:ext cx="3624986" cy="27432"/>
+          </a:xfrm>
+          <a:prstGeom prst="rect">
+            <a:avLst/>
+          </a:prstGeom>
+          <a:solidFill>
+            <a:srgbClr val="FFD000"/>
+          </a:solidFill>
+          <a:ln>
+            <a:noFill/>
+          </a:ln>
+        </p:spPr>
+        <p:style>
+          <a:lnRef idx="1">
+            <a:schemeClr val="accent1"/>
+          </a:lnRef>
+          <a:fillRef idx="3">
+            <a:schemeClr val="accent1"/>
+          </a:fillRef>
+          <a:effectRef idx="2">
+            <a:schemeClr val="accent1"/>
+          </a:effectRef>
+          <a:fontRef idx="minor">
+            <a:schemeClr val="lt1"/>
+          </a:fontRef>
+        </p:style>
+        <p:txBody>
+          <a:bodyPr rtlCol="0" anchor="ctr"/>
+          <a:lstStyle/>
+          <a:p>
+            <a:pPr algn="ctr"/>
+          </a:p>
+        </p:txBody>
+      </p:sp>
+      <p:pic>
+        <p:nvPicPr>
+          <p:cNvPr id="14" name="Picture 13" descr="drawio.png"/>
+          <p:cNvPicPr>
+            <a:picLocks noChangeAspect="1"/>
+          </p:cNvPicPr>
+          <p:nvPr/>
+        </p:nvPicPr>
+        <p:blipFill>
+          <a:blip r:embed="rId3"/>
+          <a:stretch>
+            <a:fillRect/>
+          </a:stretch>
+        </p:blipFill>
+        <p:spPr>
+          <a:xfrm>
+            <a:off x="5469483" y="1847087"/>
+            <a:ext cx="1252728" cy="1252728"/>
+          </a:xfrm>
+          <a:prstGeom prst="rect">
+            <a:avLst/>
+          </a:prstGeom>
+        </p:spPr>
+      </p:pic>
+      <p:sp>
+        <p:nvSpPr>
+          <p:cNvPr id="15" name="TextBox 14"/>
+          <p:cNvSpPr txBox="1"/>
+          <p:nvPr/>
+        </p:nvSpPr>
+        <p:spPr>
+          <a:xfrm>
+            <a:off x="4356506" y="3191256"/>
+            <a:ext cx="3478682" cy="621792"/>
+          </a:xfrm>
+          <a:prstGeom prst="rect">
+            <a:avLst/>
+          </a:prstGeom>
+          <a:noFill/>
+        </p:spPr>
+        <p:txBody>
+          <a:bodyPr wrap="square" anchor="t"/>
+          <a:lstStyle/>
+          <a:p>
+            <a:pPr algn="ctr"/>
+            <a:r>
+              <a:rPr sz="1300" b="1" i="0">
+                <a:solidFill>
+                  <a:srgbClr val="095292"/>
+                </a:solidFill>
+                <a:latin typeface="Calibri"/>
+              </a:rPr>
+              <a:t>draw.io</a:t>
+            </a:r>
+          </a:p>
+          <a:p>
+            <a:pPr algn="ctr">
+              <a:spcBef>
+                <a:spcPts val="200"/>
+              </a:spcBef>
+            </a:pPr>
+            <a:r>
+              <a:rPr sz="1000" b="0" i="0">
+                <a:solidFill>
+                  <a:srgbClr val="666666"/>
+                </a:solidFill>
+                <a:latin typeface="Calibri"/>
+              </a:rPr>
+              <a:t>Matriz de modelos</a:t>
+            </a:r>
+          </a:p>
+        </p:txBody>
+      </p:sp>
+      <p:sp>
+        <p:nvSpPr>
+          <p:cNvPr id="16" name="Rounded Rectangle 15"/>
+          <p:cNvSpPr/>
+          <p:nvPr/>
+        </p:nvSpPr>
+        <p:spPr>
+          <a:xfrm>
+            <a:off x="8109508" y="1591056"/>
+            <a:ext cx="3624986" cy="2331720"/>
+          </a:xfrm>
+          <a:prstGeom prst="roundRect">
+            <a:avLst>
+              <a:gd name="adj" fmla="val 12000"/>
+            </a:avLst>
+          </a:prstGeom>
+          <a:solidFill>
+            <a:srgbClr val="F2F2F2"/>
+          </a:solidFill>
+          <a:ln>
+            <a:noFill/>
+          </a:ln>
+        </p:spPr>
+        <p:style>
+          <a:lnRef idx="1">
+            <a:schemeClr val="accent1"/>
+          </a:lnRef>
+          <a:fillRef idx="3">
+            <a:schemeClr val="accent1"/>
+          </a:fillRef>
+          <a:effectRef idx="2">
+            <a:schemeClr val="accent1"/>
+          </a:effectRef>
+          <a:fontRef idx="minor">
+            <a:schemeClr val="lt1"/>
+          </a:fontRef>
+        </p:style>
+        <p:txBody>
+          <a:bodyPr rtlCol="0" anchor="ctr"/>
+          <a:lstStyle/>
+          <a:p>
+            <a:pPr algn="ctr"/>
+          </a:p>
+        </p:txBody>
+      </p:sp>
+      <p:sp>
+        <p:nvSpPr>
+          <p:cNvPr id="17" name="Rectangle 16"/>
+          <p:cNvSpPr/>
+          <p:nvPr/>
+        </p:nvSpPr>
+        <p:spPr>
+          <a:xfrm>
+            <a:off x="8109508" y="1591056"/>
+            <a:ext cx="3624986" cy="64008"/>
+          </a:xfrm>
+          <a:prstGeom prst="rect">
+            <a:avLst/>
+          </a:prstGeom>
+          <a:solidFill>
+            <a:srgbClr val="095292"/>
+          </a:solidFill>
+          <a:ln>
+            <a:noFill/>
+          </a:ln>
+        </p:spPr>
+        <p:style>
+          <a:lnRef idx="1">
+            <a:schemeClr val="accent1"/>
+          </a:lnRef>
+          <a:fillRef idx="3">
+            <a:schemeClr val="accent1"/>
+          </a:fillRef>
+          <a:effectRef idx="2">
+            <a:schemeClr val="accent1"/>
+          </a:effectRef>
+          <a:fontRef idx="minor">
+            <a:schemeClr val="lt1"/>
+          </a:fontRef>
+        </p:style>
+        <p:txBody>
+          <a:bodyPr rtlCol="0" anchor="ctr"/>
+          <a:lstStyle/>
+          <a:p>
+            <a:pPr algn="ctr"/>
+          </a:p>
+        </p:txBody>
+      </p:sp>
+      <p:sp>
+        <p:nvSpPr>
+          <p:cNvPr id="18" name="Rectangle 17"/>
+          <p:cNvSpPr/>
+          <p:nvPr/>
+        </p:nvSpPr>
+        <p:spPr>
+          <a:xfrm>
+            <a:off x="8109508" y="1655064"/>
+            <a:ext cx="3624986" cy="27432"/>
+          </a:xfrm>
+          <a:prstGeom prst="rect">
+            <a:avLst/>
+          </a:prstGeom>
+          <a:solidFill>
+            <a:srgbClr val="FFD000"/>
+          </a:solidFill>
+          <a:ln>
+            <a:noFill/>
+          </a:ln>
+        </p:spPr>
+        <p:style>
+          <a:lnRef idx="1">
+            <a:schemeClr val="accent1"/>
+          </a:lnRef>
+          <a:fillRef idx="3">
+            <a:schemeClr val="accent1"/>
+          </a:fillRef>
+          <a:effectRef idx="2">
+            <a:schemeClr val="accent1"/>
+          </a:effectRef>
+          <a:fontRef idx="minor">
+            <a:schemeClr val="lt1"/>
+          </a:fontRef>
+        </p:style>
+        <p:txBody>
+          <a:bodyPr rtlCol="0" anchor="ctr"/>
+          <a:lstStyle/>
+          <a:p>
+            <a:pPr algn="ctr"/>
+          </a:p>
+        </p:txBody>
+      </p:sp>
+      <p:pic>
+        <p:nvPicPr>
+          <p:cNvPr id="19" name="Picture 18" descr="examlab.png"/>
+          <p:cNvPicPr>
+            <a:picLocks noChangeAspect="1"/>
+          </p:cNvPicPr>
+          <p:nvPr/>
+        </p:nvPicPr>
+        <p:blipFill>
+          <a:blip r:embed="rId4"/>
+          <a:stretch>
+            <a:fillRect/>
+          </a:stretch>
+        </p:blipFill>
+        <p:spPr>
+          <a:xfrm>
+            <a:off x="9295638" y="1847087"/>
+            <a:ext cx="1252728" cy="1252728"/>
+          </a:xfrm>
+          <a:prstGeom prst="rect">
+            <a:avLst/>
+          </a:prstGeom>
+        </p:spPr>
+      </p:pic>
+      <p:sp>
+        <p:nvSpPr>
+          <p:cNvPr id="20" name="TextBox 19"/>
+          <p:cNvSpPr txBox="1"/>
+          <p:nvPr/>
+        </p:nvSpPr>
+        <p:spPr>
+          <a:xfrm>
+            <a:off x="8182660" y="3191256"/>
+            <a:ext cx="3478682" cy="621792"/>
+          </a:xfrm>
+          <a:prstGeom prst="rect">
+            <a:avLst/>
+          </a:prstGeom>
+          <a:noFill/>
+        </p:spPr>
+        <p:txBody>
+          <a:bodyPr wrap="square" anchor="t"/>
+          <a:lstStyle/>
+          <a:p>
+            <a:pPr algn="ctr"/>
+            <a:r>
+              <a:rPr sz="1300" b="1" i="0">
+                <a:solidFill>
+                  <a:srgbClr val="095292"/>
+                </a:solidFill>
+                <a:latin typeface="Calibri"/>
+              </a:rPr>
+              <a:t>la plataforma del curso</a:t>
+            </a:r>
+          </a:p>
+          <a:p>
+            <a:pPr algn="ctr">
+              <a:spcBef>
+                <a:spcPts val="200"/>
+              </a:spcBef>
+            </a:pPr>
+            <a:r>
+              <a:rPr sz="1000" b="0" i="0">
+                <a:solidFill>
+                  <a:srgbClr val="666666"/>
+                </a:solidFill>
+                <a:latin typeface="Calibri"/>
+              </a:rPr>
+              <a:t>Donde se entrega</a:t>
+            </a:r>
+          </a:p>
+        </p:txBody>
+      </p:sp>
+      <p:sp>
+        <p:nvSpPr>
+          <p:cNvPr id="21" name="TextBox 20"/>
+          <p:cNvSpPr txBox="1"/>
+          <p:nvPr/>
+        </p:nvSpPr>
+        <p:spPr>
+          <a:xfrm>
+            <a:off x="11185855" y="6473952"/>
+            <a:ext cx="640080" cy="274320"/>
+          </a:xfrm>
+          <a:prstGeom prst="rect">
+            <a:avLst/>
+          </a:prstGeom>
+          <a:noFill/>
+        </p:spPr>
+        <p:txBody>
+          <a:bodyPr wrap="square">
+            <a:spAutoFit/>
+          </a:bodyPr>
+          <a:lstStyle/>
+          <a:p>
+            <a:pPr algn="r"/>
+            <a:r>
+              <a:rPr sz="1100" b="0" i="0">
+                <a:solidFill>
+                  <a:srgbClr val="666666"/>
+                </a:solidFill>
+                <a:latin typeface="Calibri"/>
+              </a:rPr>
+              <a:t>23</a:t>
+            </a:r>
+          </a:p>
+        </p:txBody>
+      </p:sp>
+    </p:spTree>
+  </p:cSld>
+  <p:clrMapOvr>
+    <a:masterClrMapping/>
+  </p:clrMapOvr>
+</p:sld>
+</file>
+
+<file path=ppt/slides/slide24.xml><?xml version="1.0" encoding="utf-8"?>
+<p:sld xmlns:a="http://schemas.openxmlformats.org/drawingml/2006/main" xmlns:p="http://schemas.openxmlformats.org/presentationml/2006/main" xmlns:r="http://schemas.openxmlformats.org/officeDocument/2006/relationships">
+  <p:cSld>
+    <p:bg>
+      <p:bgPr>
+        <a:solidFill>
+          <a:srgbClr val="FFFFFF"/>
+        </a:solidFill>
+        <a:effectLst/>
+      </p:bgPr>
+    </p:bg>
+    <p:spTree>
+      <p:nvGrpSpPr>
+        <p:cNvPr id="1" name=""/>
+        <p:cNvGrpSpPr/>
+        <p:nvPr/>
+      </p:nvGrpSpPr>
+      <p:grpSpPr/>
+      <p:sp>
+        <p:nvSpPr>
+          <p:cNvPr id="2" name="Rectangle 1"/>
+          <p:cNvSpPr/>
+          <p:nvPr/>
+        </p:nvSpPr>
+        <p:spPr>
+          <a:xfrm>
+            <a:off x="0" y="0"/>
+            <a:ext cx="12191695" cy="960120"/>
+          </a:xfrm>
+          <a:prstGeom prst="rect">
+            <a:avLst/>
+          </a:prstGeom>
+          <a:solidFill>
+            <a:srgbClr val="095292"/>
+          </a:solidFill>
+          <a:ln>
+            <a:noFill/>
+          </a:ln>
+        </p:spPr>
+        <p:style>
+          <a:lnRef idx="1">
+            <a:schemeClr val="accent1"/>
+          </a:lnRef>
+          <a:fillRef idx="3">
+            <a:schemeClr val="accent1"/>
+          </a:fillRef>
+          <a:effectRef idx="2">
+            <a:schemeClr val="accent1"/>
+          </a:effectRef>
+          <a:fontRef idx="minor">
+            <a:schemeClr val="lt1"/>
+          </a:fontRef>
+        </p:style>
+        <p:txBody>
+          <a:bodyPr rtlCol="0" anchor="ctr"/>
+          <a:lstStyle/>
+          <a:p>
+            <a:pPr algn="ctr"/>
+          </a:p>
+        </p:txBody>
+      </p:sp>
+      <p:sp>
+        <p:nvSpPr>
+          <p:cNvPr id="3" name="Rectangle 2"/>
+          <p:cNvSpPr/>
+          <p:nvPr/>
+        </p:nvSpPr>
+        <p:spPr>
+          <a:xfrm>
+            <a:off x="0" y="960120"/>
+            <a:ext cx="12191695" cy="41148"/>
+          </a:xfrm>
+          <a:prstGeom prst="rect">
+            <a:avLst/>
+          </a:prstGeom>
+          <a:solidFill>
+            <a:srgbClr val="FFD000"/>
+          </a:solidFill>
+          <a:ln>
+            <a:noFill/>
+          </a:ln>
+        </p:spPr>
+        <p:style>
+          <a:lnRef idx="1">
+            <a:schemeClr val="accent1"/>
+          </a:lnRef>
+          <a:fillRef idx="3">
+            <a:schemeClr val="accent1"/>
+          </a:fillRef>
+          <a:effectRef idx="2">
+            <a:schemeClr val="accent1"/>
+          </a:effectRef>
+          <a:fontRef idx="minor">
+            <a:schemeClr val="lt1"/>
+          </a:fontRef>
+        </p:style>
+        <p:txBody>
+          <a:bodyPr rtlCol="0" anchor="ctr"/>
+          <a:lstStyle/>
+          <a:p>
+            <a:pPr algn="ctr"/>
+          </a:p>
+        </p:txBody>
+      </p:sp>
+      <p:sp>
+        <p:nvSpPr>
+          <p:cNvPr id="4" name="TextBox 3"/>
+          <p:cNvSpPr txBox="1"/>
+          <p:nvPr/>
+        </p:nvSpPr>
+        <p:spPr>
+          <a:xfrm>
+            <a:off x="457200" y="164592"/>
+            <a:ext cx="11277295" cy="502920"/>
+          </a:xfrm>
+          <a:prstGeom prst="rect">
+            <a:avLst/>
+          </a:prstGeom>
+          <a:noFill/>
+        </p:spPr>
+        <p:txBody>
+          <a:bodyPr wrap="square">
+            <a:spAutoFit/>
+          </a:bodyPr>
+          <a:lstStyle/>
+          <a:p>
+            <a:r>
+              <a:rPr sz="2600" b="1" i="0">
+                <a:solidFill>
+                  <a:srgbClr val="FFFFFF"/>
+                </a:solidFill>
+                <a:latin typeface="Calibri"/>
+              </a:rPr>
+              <a:t>PI CloudLite — entregable de hoy</a:t>
+            </a:r>
+          </a:p>
+        </p:txBody>
+      </p:sp>
+      <p:sp>
+        <p:nvSpPr>
+          <p:cNvPr id="5" name="TextBox 4"/>
+          <p:cNvSpPr txBox="1"/>
+          <p:nvPr/>
+        </p:nvSpPr>
+        <p:spPr>
+          <a:xfrm>
+            <a:off x="457200" y="1170432"/>
+            <a:ext cx="11277295" cy="5230368"/>
+          </a:xfrm>
+          <a:prstGeom prst="rect">
+            <a:avLst/>
+          </a:prstGeom>
+          <a:noFill/>
+        </p:spPr>
+        <p:txBody>
+          <a:bodyPr wrap="square">
+            <a:spAutoFit/>
+          </a:bodyPr>
+          <a:lstStyle/>
+          <a:p>
+            <a:pPr>
+              <a:spcAft>
+                <a:spcPts val="800"/>
+              </a:spcAft>
+            </a:pPr>
+            <a:r>
+              <a:rPr sz="2000" b="0" i="0">
+                <a:solidFill>
+                  <a:srgbClr val="333333"/>
+                </a:solidFill>
+                <a:latin typeface="Calibri"/>
+              </a:rPr>
+              <a:t>–   </a:t>
+            </a:r>
+            <a:r>
+              <a:rPr sz="2000" b="1" i="0">
+                <a:solidFill>
+                  <a:srgbClr val="333333"/>
+                </a:solidFill>
+                <a:latin typeface="Calibri"/>
+              </a:rPr>
+              <a:t>Entregable:</a:t>
+            </a:r>
+            <a:r>
+              <a:rPr sz="2000" b="0" i="0">
+                <a:solidFill>
+                  <a:srgbClr val="333333"/>
+                </a:solidFill>
+                <a:latin typeface="Calibri"/>
+              </a:rPr>
+              <a:t> ADR-001: decisión de modelo de servicio + matriz de comparación aplicada al dominio</a:t>
+            </a:r>
+          </a:p>
+          <a:p>
+            <a:pPr>
+              <a:spcAft>
+                <a:spcPts val="800"/>
+              </a:spcAft>
+            </a:pPr>
+            <a:r>
+              <a:rPr sz="2000" b="0" i="0">
+                <a:solidFill>
+                  <a:srgbClr val="333333"/>
+                </a:solidFill>
+                <a:latin typeface="Calibri"/>
+              </a:rPr>
+              <a:t>–   Herramienta: </a:t>
+            </a:r>
+            <a:r>
+              <a:rPr sz="2000" b="1" i="0">
+                <a:solidFill>
+                  <a:srgbClr val="333333"/>
+                </a:solidFill>
+                <a:latin typeface="Calibri"/>
+              </a:rPr>
+              <a:t>Google Docs · draw.io (opcional)</a:t>
+            </a:r>
+          </a:p>
+          <a:p>
+            <a:pPr>
+              <a:spcAft>
+                <a:spcPts val="800"/>
+              </a:spcAft>
+            </a:pPr>
+            <a:r>
+              <a:rPr sz="2000" b="0" i="0">
+                <a:solidFill>
+                  <a:srgbClr val="333333"/>
+                </a:solidFill>
+                <a:latin typeface="Calibri"/>
+              </a:rPr>
+              <a:t>–   Todo lo que construyan hoy entra al </a:t>
+            </a:r>
+            <a:r>
+              <a:rPr sz="2000" b="1" i="0">
+                <a:solidFill>
+                  <a:srgbClr val="333333"/>
+                </a:solidFill>
+                <a:latin typeface="Calibri"/>
+              </a:rPr>
+              <a:t>informe/repo del PI</a:t>
+            </a:r>
+            <a:r>
+              <a:rPr sz="2000" b="0" i="0">
+                <a:solidFill>
+                  <a:srgbClr val="333333"/>
+                </a:solidFill>
+                <a:latin typeface="Calibri"/>
+              </a:rPr>
+              <a:t> (no es lab suelto).</a:t>
+            </a:r>
+          </a:p>
+          <a:p>
+            <a:pPr>
+              <a:spcAft>
+                <a:spcPts val="800"/>
+              </a:spcAft>
+            </a:pPr>
+            <a:r>
+              <a:rPr sz="2000" b="0" i="0">
+                <a:solidFill>
+                  <a:srgbClr val="333333"/>
+                </a:solidFill>
+                <a:latin typeface="Calibri"/>
+              </a:rPr>
+              <a:t>–   Individual por defecto · el docente puede autorizar equipos de 2–3; la entrega en la plataforma del curso siempre es individual.</a:t>
+            </a:r>
+          </a:p>
+        </p:txBody>
+      </p:sp>
+      <p:sp>
+        <p:nvSpPr>
+          <p:cNvPr id="6" name="TextBox 5"/>
+          <p:cNvSpPr txBox="1"/>
+          <p:nvPr/>
+        </p:nvSpPr>
+        <p:spPr>
+          <a:xfrm>
+            <a:off x="11185855" y="6473952"/>
+            <a:ext cx="640080" cy="274320"/>
+          </a:xfrm>
+          <a:prstGeom prst="rect">
+            <a:avLst/>
+          </a:prstGeom>
+          <a:noFill/>
+        </p:spPr>
+        <p:txBody>
+          <a:bodyPr wrap="square">
+            <a:spAutoFit/>
+          </a:bodyPr>
+          <a:lstStyle/>
+          <a:p>
+            <a:pPr algn="r"/>
+            <a:r>
+              <a:rPr sz="1100" b="0" i="0">
+                <a:solidFill>
+                  <a:srgbClr val="666666"/>
+                </a:solidFill>
+                <a:latin typeface="Calibri"/>
+              </a:rPr>
+              <a:t>24</a:t>
+            </a:r>
+          </a:p>
+        </p:txBody>
+      </p:sp>
+    </p:spTree>
+  </p:cSld>
+  <p:clrMapOvr>
+    <a:masterClrMapping/>
+  </p:clrMapOvr>
+</p:sld>
+</file>
+
+<file path=ppt/slides/slide25.xml><?xml version="1.0" encoding="utf-8"?>
+<p:sld xmlns:a="http://schemas.openxmlformats.org/drawingml/2006/main" xmlns:p="http://schemas.openxmlformats.org/presentationml/2006/main" xmlns:r="http://schemas.openxmlformats.org/officeDocument/2006/relationships">
+  <p:cSld>
+    <p:bg>
+      <p:bgPr>
+        <a:solidFill>
+          <a:srgbClr val="FFFFFF"/>
+        </a:solidFill>
+        <a:effectLst/>
+      </p:bgPr>
+    </p:bg>
+    <p:spTree>
+      <p:nvGrpSpPr>
+        <p:cNvPr id="1" name=""/>
+        <p:cNvGrpSpPr/>
+        <p:nvPr/>
+      </p:nvGrpSpPr>
+      <p:grpSpPr/>
+      <p:sp>
+        <p:nvSpPr>
+          <p:cNvPr id="2" name="Rectangle 1"/>
+          <p:cNvSpPr/>
+          <p:nvPr/>
+        </p:nvSpPr>
+        <p:spPr>
+          <a:xfrm>
+            <a:off x="0" y="0"/>
+            <a:ext cx="12191695" cy="960120"/>
+          </a:xfrm>
+          <a:prstGeom prst="rect">
+            <a:avLst/>
+          </a:prstGeom>
+          <a:solidFill>
+            <a:srgbClr val="095292"/>
+          </a:solidFill>
+          <a:ln>
+            <a:noFill/>
+          </a:ln>
+        </p:spPr>
+        <p:style>
+          <a:lnRef idx="1">
+            <a:schemeClr val="accent1"/>
+          </a:lnRef>
+          <a:fillRef idx="3">
+            <a:schemeClr val="accent1"/>
+          </a:fillRef>
+          <a:effectRef idx="2">
+            <a:schemeClr val="accent1"/>
+          </a:effectRef>
+          <a:fontRef idx="minor">
+            <a:schemeClr val="lt1"/>
+          </a:fontRef>
+        </p:style>
+        <p:txBody>
+          <a:bodyPr rtlCol="0" anchor="ctr"/>
+          <a:lstStyle/>
+          <a:p>
+            <a:pPr algn="ctr"/>
+          </a:p>
+        </p:txBody>
+      </p:sp>
+      <p:sp>
+        <p:nvSpPr>
+          <p:cNvPr id="3" name="Rectangle 2"/>
+          <p:cNvSpPr/>
+          <p:nvPr/>
+        </p:nvSpPr>
+        <p:spPr>
+          <a:xfrm>
+            <a:off x="0" y="960120"/>
+            <a:ext cx="12191695" cy="41148"/>
+          </a:xfrm>
+          <a:prstGeom prst="rect">
+            <a:avLst/>
+          </a:prstGeom>
+          <a:solidFill>
+            <a:srgbClr val="FFD000"/>
+          </a:solidFill>
+          <a:ln>
+            <a:noFill/>
+          </a:ln>
+        </p:spPr>
+        <p:style>
+          <a:lnRef idx="1">
+            <a:schemeClr val="accent1"/>
+          </a:lnRef>
+          <a:fillRef idx="3">
+            <a:schemeClr val="accent1"/>
+          </a:fillRef>
+          <a:effectRef idx="2">
+            <a:schemeClr val="accent1"/>
+          </a:effectRef>
+          <a:fontRef idx="minor">
+            <a:schemeClr val="lt1"/>
+          </a:fontRef>
+        </p:style>
+        <p:txBody>
+          <a:bodyPr rtlCol="0" anchor="ctr"/>
+          <a:lstStyle/>
+          <a:p>
+            <a:pPr algn="ctr"/>
+          </a:p>
+        </p:txBody>
+      </p:sp>
+      <p:sp>
+        <p:nvSpPr>
+          <p:cNvPr id="4" name="TextBox 3"/>
+          <p:cNvSpPr txBox="1"/>
+          <p:nvPr/>
+        </p:nvSpPr>
+        <p:spPr>
+          <a:xfrm>
+            <a:off x="457200" y="164592"/>
+            <a:ext cx="11277295" cy="502920"/>
+          </a:xfrm>
+          <a:prstGeom prst="rect">
+            <a:avLst/>
+          </a:prstGeom>
+          <a:noFill/>
+        </p:spPr>
+        <p:txBody>
+          <a:bodyPr wrap="square">
+            <a:spAutoFit/>
+          </a:bodyPr>
+          <a:lstStyle/>
+          <a:p>
+            <a:r>
+              <a:rPr sz="2600" b="1" i="0">
+                <a:solidFill>
+                  <a:srgbClr val="FFFFFF"/>
+                </a:solidFill>
+                <a:latin typeface="Calibri"/>
+              </a:rPr>
+              <a:t>Manos a la obra (paso a paso)</a:t>
+            </a:r>
+          </a:p>
+        </p:txBody>
+      </p:sp>
+      <p:sp>
+        <p:nvSpPr>
+          <p:cNvPr id="5" name="TextBox 4"/>
+          <p:cNvSpPr txBox="1"/>
+          <p:nvPr/>
+        </p:nvSpPr>
+        <p:spPr>
+          <a:xfrm>
+            <a:off x="457200" y="1170432"/>
+            <a:ext cx="11277295" cy="5230368"/>
+          </a:xfrm>
+          <a:prstGeom prst="rect">
+            <a:avLst/>
+          </a:prstGeom>
+          <a:noFill/>
+        </p:spPr>
+        <p:txBody>
+          <a:bodyPr wrap="square">
+            <a:spAutoFit/>
+          </a:bodyPr>
+          <a:lstStyle/>
+          <a:p>
+            <a:pPr>
+              <a:spcAft>
+                <a:spcPts val="800"/>
+              </a:spcAft>
+            </a:pPr>
+            <a:r>
+              <a:rPr sz="2000" b="1" i="0">
+                <a:solidFill>
+                  <a:srgbClr val="333333"/>
+                </a:solidFill>
+                <a:latin typeface="Calibri"/>
+              </a:rPr>
+              <a:t>1.</a:t>
+            </a:r>
+            <a:r>
+              <a:rPr sz="2000" b="0" i="0">
+                <a:solidFill>
+                  <a:srgbClr val="333333"/>
+                </a:solidFill>
+                <a:latin typeface="Calibri"/>
+              </a:rPr>
+              <a:t> Paso 1: relea su ficha y su C4 Context de la Clase 1. No cambie de dominio: las preguntas 5 a 7 se califican sobre el mismo sistema, y el ADR que redacte hoy se reutiliza en el informe del PI y en la sustentacion de la Clase 15.</a:t>
+            </a:r>
+          </a:p>
+          <a:p>
+            <a:pPr>
+              <a:spcAft>
+                <a:spcPts val="800"/>
+              </a:spcAft>
+            </a:pPr>
+            <a:r>
+              <a:rPr sz="2000" b="0" i="0">
+                <a:solidFill>
+                  <a:srgbClr val="333333"/>
+                </a:solidFill>
+                <a:latin typeface="Calibri"/>
+              </a:rPr>
+              <a:t>–   </a:t>
+            </a:r>
+            <a:r>
+              <a:rPr sz="2000" b="1" i="0">
+                <a:solidFill>
+                  <a:srgbClr val="333333"/>
+                </a:solidFill>
+                <a:latin typeface="Calibri"/>
+              </a:rPr>
+              <a:t>2.</a:t>
+            </a:r>
+            <a:r>
+              <a:rPr sz="2000" b="0" i="0">
+                <a:solidFill>
+                  <a:srgbClr val="333333"/>
+                </a:solidFill>
+                <a:latin typeface="Calibri"/>
+              </a:rPr>
+              <a:t> Paso 2: construya en la pregunta 5 la matriz «Criterio | IaaS | PaaS | SaaS» con las cuatro filas en orden (control, costo cualitativo, operacion, time-to-demo) y maximo 2 lineas por celda; verifique que cada celda nombre una capacidad o una restriccion de SU dominio, y que la fila de operacion no afirme que en PaaS o SaaS usted deja de responder por su propia aplicacion.</a:t>
+            </a:r>
+          </a:p>
+          <a:p>
+            <a:pPr>
+              <a:spcAft>
+                <a:spcPts val="800"/>
+              </a:spcAft>
+            </a:pPr>
+            <a:r>
+              <a:rPr sz="2000" b="0" i="0">
+                <a:solidFill>
+                  <a:srgbClr val="333333"/>
+                </a:solidFill>
+                <a:latin typeface="Calibri"/>
+              </a:rPr>
+              <a:t>–   </a:t>
+            </a:r>
+            <a:r>
+              <a:rPr sz="2000" b="1" i="0">
+                <a:solidFill>
+                  <a:srgbClr val="333333"/>
+                </a:solidFill>
+                <a:latin typeface="Calibri"/>
+              </a:rPr>
+              <a:t>3.</a:t>
+            </a:r>
+            <a:r>
+              <a:rPr sz="2000" b="0" i="0">
+                <a:solidFill>
+                  <a:srgbClr val="333333"/>
+                </a:solidFill>
+                <a:latin typeface="Calibri"/>
+              </a:rPr>
+              <a:t> Paso 3: redacte en la pregunta 6 el ADR-001 con las cinco secciones rotuladas —titulo, estado con fecha, contexto con sus restricciones reales, la decision en UNA sola frase con UN modelo dominante, y exactamente 2 alternativas descartadas con el motivo atado a su dominio—; verifique que la seccion de decision no nombre dos modelos, porque en ese caso vale cero.</a:t>
+            </a:r>
+          </a:p>
+          <a:p>
+            <a:pPr>
+              <a:spcAft>
+                <a:spcPts val="800"/>
+              </a:spcAft>
+            </a:pPr>
+            <a:r>
+              <a:rPr sz="2000" b="0" i="0">
+                <a:solidFill>
+                  <a:srgbClr val="333333"/>
+                </a:solidFill>
+                <a:latin typeface="Calibri"/>
+              </a:rPr>
+              <a:t>–   </a:t>
+            </a:r>
+            <a:r>
+              <a:rPr sz="2000" b="1" i="0">
+                <a:solidFill>
+                  <a:srgbClr val="333333"/>
+                </a:solidFill>
+                <a:latin typeface="Calibri"/>
+              </a:rPr>
+              <a:t>4.</a:t>
+            </a:r>
+            <a:r>
+              <a:rPr sz="2000" b="0" i="0">
+                <a:solidFill>
+                  <a:srgbClr val="333333"/>
+                </a:solidFill>
+                <a:latin typeface="Calibri"/>
+              </a:rPr>
+              <a:t> Paso 4: escriba en la pregunta 7 la seccion 6 del mismo ADR, las consecuencias en los tres ejes (operacion, costo y aprendizaje), con al menos una positiva y una negativa por eje marcadas con + y -, y verifique que al menos una negativa hable de amarre al proveedor o de perdida de control; guarde y continue, que la actividad se entrega completa al cierre del corte.</a:t>
+            </a:r>
+          </a:p>
+        </p:txBody>
+      </p:sp>
+      <p:sp>
+        <p:nvSpPr>
+          <p:cNvPr id="6" name="TextBox 5"/>
+          <p:cNvSpPr txBox="1"/>
+          <p:nvPr/>
+        </p:nvSpPr>
+        <p:spPr>
+          <a:xfrm>
+            <a:off x="11185855" y="6473952"/>
+            <a:ext cx="640080" cy="274320"/>
+          </a:xfrm>
+          <a:prstGeom prst="rect">
+            <a:avLst/>
+          </a:prstGeom>
+          <a:noFill/>
+        </p:spPr>
+        <p:txBody>
+          <a:bodyPr wrap="square">
+            <a:spAutoFit/>
+          </a:bodyPr>
+          <a:lstStyle/>
+          <a:p>
+            <a:pPr algn="r"/>
+            <a:r>
+              <a:rPr sz="1100" b="0" i="0">
+                <a:solidFill>
+                  <a:srgbClr val="666666"/>
+                </a:solidFill>
+                <a:latin typeface="Calibri"/>
+              </a:rPr>
+              <a:t>25</a:t>
+            </a:r>
+          </a:p>
+        </p:txBody>
+      </p:sp>
+    </p:spTree>
+  </p:cSld>
+  <p:clrMapOvr>
+    <a:masterClrMapping/>
+  </p:clrMapOvr>
+</p:sld>
+</file>
+
+<file path=ppt/slides/slide26.xml><?xml version="1.0" encoding="utf-8"?>
+<p:sld xmlns:a="http://schemas.openxmlformats.org/drawingml/2006/main" xmlns:p="http://schemas.openxmlformats.org/presentationml/2006/main" xmlns:r="http://schemas.openxmlformats.org/officeDocument/2006/relationships">
+  <p:cSld>
+    <p:bg>
+      <p:bgPr>
+        <a:solidFill>
+          <a:srgbClr val="FFFFFF"/>
+        </a:solidFill>
+        <a:effectLst/>
+      </p:bgPr>
+    </p:bg>
+    <p:spTree>
+      <p:nvGrpSpPr>
+        <p:cNvPr id="1" name=""/>
+        <p:cNvGrpSpPr/>
+        <p:nvPr/>
+      </p:nvGrpSpPr>
+      <p:grpSpPr/>
+      <p:sp>
+        <p:nvSpPr>
+          <p:cNvPr id="2" name="Rectangle 1"/>
+          <p:cNvSpPr/>
+          <p:nvPr/>
+        </p:nvSpPr>
+        <p:spPr>
+          <a:xfrm>
+            <a:off x="0" y="0"/>
+            <a:ext cx="12191695" cy="960120"/>
+          </a:xfrm>
+          <a:prstGeom prst="rect">
+            <a:avLst/>
+          </a:prstGeom>
+          <a:solidFill>
+            <a:srgbClr val="095292"/>
+          </a:solidFill>
+          <a:ln>
+            <a:noFill/>
+          </a:ln>
+        </p:spPr>
+        <p:style>
+          <a:lnRef idx="1">
+            <a:schemeClr val="accent1"/>
+          </a:lnRef>
+          <a:fillRef idx="3">
+            <a:schemeClr val="accent1"/>
+          </a:fillRef>
+          <a:effectRef idx="2">
+            <a:schemeClr val="accent1"/>
+          </a:effectRef>
+          <a:fontRef idx="minor">
+            <a:schemeClr val="lt1"/>
+          </a:fontRef>
+        </p:style>
+        <p:txBody>
+          <a:bodyPr rtlCol="0" anchor="ctr"/>
+          <a:lstStyle/>
+          <a:p>
+            <a:pPr algn="ctr"/>
+          </a:p>
+        </p:txBody>
+      </p:sp>
+      <p:sp>
+        <p:nvSpPr>
+          <p:cNvPr id="3" name="Rectangle 2"/>
+          <p:cNvSpPr/>
+          <p:nvPr/>
+        </p:nvSpPr>
+        <p:spPr>
+          <a:xfrm>
+            <a:off x="0" y="960120"/>
+            <a:ext cx="12191695" cy="41148"/>
+          </a:xfrm>
+          <a:prstGeom prst="rect">
+            <a:avLst/>
+          </a:prstGeom>
+          <a:solidFill>
+            <a:srgbClr val="FFD000"/>
+          </a:solidFill>
+          <a:ln>
+            <a:noFill/>
+          </a:ln>
+        </p:spPr>
+        <p:style>
+          <a:lnRef idx="1">
+            <a:schemeClr val="accent1"/>
+          </a:lnRef>
+          <a:fillRef idx="3">
+            <a:schemeClr val="accent1"/>
+          </a:fillRef>
+          <a:effectRef idx="2">
+            <a:schemeClr val="accent1"/>
+          </a:effectRef>
+          <a:fontRef idx="minor">
+            <a:schemeClr val="lt1"/>
+          </a:fontRef>
+        </p:style>
+        <p:txBody>
+          <a:bodyPr rtlCol="0" anchor="ctr"/>
+          <a:lstStyle/>
+          <a:p>
+            <a:pPr algn="ctr"/>
+          </a:p>
+        </p:txBody>
+      </p:sp>
+      <p:sp>
+        <p:nvSpPr>
+          <p:cNvPr id="4" name="TextBox 3"/>
+          <p:cNvSpPr txBox="1"/>
+          <p:nvPr/>
+        </p:nvSpPr>
+        <p:spPr>
+          <a:xfrm>
+            <a:off x="457200" y="164592"/>
+            <a:ext cx="11277295" cy="502920"/>
+          </a:xfrm>
+          <a:prstGeom prst="rect">
+            <a:avLst/>
+          </a:prstGeom>
+          <a:noFill/>
+        </p:spPr>
+        <p:txBody>
+          <a:bodyPr wrap="square">
+            <a:spAutoFit/>
+          </a:bodyPr>
+          <a:lstStyle/>
+          <a:p>
+            <a:r>
+              <a:rPr sz="2600" b="1" i="0">
+                <a:solidFill>
+                  <a:srgbClr val="FFFFFF"/>
+                </a:solidFill>
+                <a:latin typeface="Calibri"/>
+              </a:rPr>
+              <a:t>Para continuar (PI)</a:t>
+            </a:r>
+          </a:p>
+        </p:txBody>
+      </p:sp>
+      <p:sp>
+        <p:nvSpPr>
+          <p:cNvPr id="5" name="Rounded Rectangle 4"/>
+          <p:cNvSpPr/>
+          <p:nvPr/>
+        </p:nvSpPr>
+        <p:spPr>
+          <a:xfrm>
+            <a:off x="457200" y="1261872"/>
+            <a:ext cx="11277295" cy="1051560"/>
+          </a:xfrm>
+          <a:prstGeom prst="roundRect">
+            <a:avLst>
+              <a:gd name="adj" fmla="val 12000"/>
+            </a:avLst>
+          </a:prstGeom>
+          <a:solidFill>
+            <a:srgbClr val="E8F4FA"/>
+          </a:solidFill>
+          <a:ln>
+            <a:noFill/>
+          </a:ln>
+        </p:spPr>
+        <p:style>
+          <a:lnRef idx="1">
+            <a:schemeClr val="accent1"/>
+          </a:lnRef>
+          <a:fillRef idx="3">
+            <a:schemeClr val="accent1"/>
+          </a:fillRef>
+          <a:effectRef idx="2">
+            <a:schemeClr val="accent1"/>
+          </a:effectRef>
+          <a:fontRef idx="minor">
+            <a:schemeClr val="lt1"/>
+          </a:fontRef>
+        </p:style>
+        <p:txBody>
+          <a:bodyPr rtlCol="0" anchor="ctr"/>
+          <a:lstStyle/>
+          <a:p>
+            <a:pPr algn="ctr"/>
+          </a:p>
+        </p:txBody>
+      </p:sp>
+      <p:sp>
+        <p:nvSpPr>
+          <p:cNvPr id="6" name="Rectangle 5"/>
+          <p:cNvSpPr/>
+          <p:nvPr/>
+        </p:nvSpPr>
+        <p:spPr>
+          <a:xfrm>
+            <a:off x="457200" y="1261872"/>
+            <a:ext cx="128016" cy="1051560"/>
+          </a:xfrm>
+          <a:prstGeom prst="rect">
+            <a:avLst/>
+          </a:prstGeom>
+          <a:solidFill>
+            <a:srgbClr val="269CCB"/>
+          </a:solidFill>
+          <a:ln>
+            <a:noFill/>
+          </a:ln>
+        </p:spPr>
+        <p:style>
+          <a:lnRef idx="1">
+            <a:schemeClr val="accent1"/>
+          </a:lnRef>
+          <a:fillRef idx="3">
+            <a:schemeClr val="accent1"/>
+          </a:fillRef>
+          <a:effectRef idx="2">
+            <a:schemeClr val="accent1"/>
+          </a:effectRef>
+          <a:fontRef idx="minor">
+            <a:schemeClr val="lt1"/>
+          </a:fontRef>
+        </p:style>
+        <p:txBody>
+          <a:bodyPr rtlCol="0" anchor="ctr"/>
+          <a:lstStyle/>
+          <a:p>
+            <a:pPr algn="ctr"/>
+          </a:p>
+        </p:txBody>
+      </p:sp>
+      <p:sp>
+        <p:nvSpPr>
+          <p:cNvPr id="7" name="TextBox 6"/>
+          <p:cNvSpPr txBox="1"/>
+          <p:nvPr/>
+        </p:nvSpPr>
+        <p:spPr>
+          <a:xfrm>
+            <a:off x="777240" y="1399031"/>
+            <a:ext cx="10774375" cy="822959"/>
+          </a:xfrm>
+          <a:prstGeom prst="rect">
+            <a:avLst/>
+          </a:prstGeom>
+          <a:noFill/>
+        </p:spPr>
+        <p:txBody>
+          <a:bodyPr wrap="square">
+            <a:spAutoFit/>
+          </a:bodyPr>
+          <a:lstStyle/>
+          <a:p>
+            <a:r>
+              <a:rPr sz="1200" b="1" i="0">
+                <a:solidFill>
+                  <a:srgbClr val="269CCB"/>
+                </a:solidFill>
+                <a:latin typeface="Calibri"/>
+              </a:rPr>
+              <a:t>Info</a:t>
+            </a:r>
+          </a:p>
+          <a:p>
+            <a:pPr>
+              <a:spcBef>
+                <a:spcPts val="400"/>
+              </a:spcBef>
+            </a:pPr>
+            <a:r>
+              <a:rPr sz="1400" b="0" i="0">
+                <a:solidFill>
+                  <a:srgbClr val="333333"/>
+                </a:solidFill>
+                <a:latin typeface="Calibri"/>
+              </a:rPr>
+              <a:t>Entregable: ADR-001: decisión de modelo de servicio + matriz de comparación aplicada al dominio</a:t>
+            </a:r>
+          </a:p>
+        </p:txBody>
+      </p:sp>
+      <p:sp>
+        <p:nvSpPr>
+          <p:cNvPr id="8" name="Rounded Rectangle 7"/>
+          <p:cNvSpPr/>
+          <p:nvPr/>
+        </p:nvSpPr>
+        <p:spPr>
+          <a:xfrm>
+            <a:off x="457200" y="2478024"/>
+            <a:ext cx="11277295" cy="1051560"/>
+          </a:xfrm>
+          <a:prstGeom prst="roundRect">
+            <a:avLst>
+              <a:gd name="adj" fmla="val 12000"/>
+            </a:avLst>
+          </a:prstGeom>
+          <a:solidFill>
+            <a:srgbClr val="FFF8E1"/>
+          </a:solidFill>
+          <a:ln>
+            <a:noFill/>
+          </a:ln>
+        </p:spPr>
+        <p:style>
+          <a:lnRef idx="1">
+            <a:schemeClr val="accent1"/>
+          </a:lnRef>
+          <a:fillRef idx="3">
+            <a:schemeClr val="accent1"/>
+          </a:fillRef>
+          <a:effectRef idx="2">
+            <a:schemeClr val="accent1"/>
+          </a:effectRef>
+          <a:fontRef idx="minor">
+            <a:schemeClr val="lt1"/>
+          </a:fontRef>
+        </p:style>
+        <p:txBody>
+          <a:bodyPr rtlCol="0" anchor="ctr"/>
+          <a:lstStyle/>
+          <a:p>
+            <a:pPr algn="ctr"/>
+          </a:p>
+        </p:txBody>
+      </p:sp>
+      <p:sp>
+        <p:nvSpPr>
+          <p:cNvPr id="9" name="Rectangle 8"/>
+          <p:cNvSpPr/>
+          <p:nvPr/>
+        </p:nvSpPr>
+        <p:spPr>
+          <a:xfrm>
+            <a:off x="457200" y="2478024"/>
+            <a:ext cx="128016" cy="1051560"/>
+          </a:xfrm>
+          <a:prstGeom prst="rect">
+            <a:avLst/>
+          </a:prstGeom>
+          <a:solidFill>
+            <a:srgbClr val="FFD000"/>
+          </a:solidFill>
+          <a:ln>
+            <a:noFill/>
+          </a:ln>
+        </p:spPr>
+        <p:style>
+          <a:lnRef idx="1">
+            <a:schemeClr val="accent1"/>
+          </a:lnRef>
+          <a:fillRef idx="3">
+            <a:schemeClr val="accent1"/>
+          </a:fillRef>
+          <a:effectRef idx="2">
+            <a:schemeClr val="accent1"/>
+          </a:effectRef>
+          <a:fontRef idx="minor">
+            <a:schemeClr val="lt1"/>
+          </a:fontRef>
+        </p:style>
+        <p:txBody>
+          <a:bodyPr rtlCol="0" anchor="ctr"/>
+          <a:lstStyle/>
+          <a:p>
+            <a:pPr algn="ctr"/>
+          </a:p>
+        </p:txBody>
+      </p:sp>
+      <p:sp>
+        <p:nvSpPr>
+          <p:cNvPr id="10" name="TextBox 9"/>
+          <p:cNvSpPr txBox="1"/>
+          <p:nvPr/>
+        </p:nvSpPr>
+        <p:spPr>
+          <a:xfrm>
+            <a:off x="777240" y="2615184"/>
+            <a:ext cx="10774375" cy="822959"/>
+          </a:xfrm>
+          <a:prstGeom prst="rect">
+            <a:avLst/>
+          </a:prstGeom>
+          <a:noFill/>
+        </p:spPr>
+        <p:txBody>
+          <a:bodyPr wrap="square">
+            <a:spAutoFit/>
+          </a:bodyPr>
+          <a:lstStyle/>
+          <a:p>
+            <a:r>
+              <a:rPr sz="1200" b="1" i="0">
+                <a:solidFill>
+                  <a:srgbClr val="FFD000"/>
+                </a:solidFill>
+                <a:latin typeface="Calibri"/>
+              </a:rPr>
+              <a:t>Aclaración</a:t>
+            </a:r>
+          </a:p>
+          <a:p>
+            <a:pPr>
+              <a:spcBef>
+                <a:spcPts val="400"/>
+              </a:spcBef>
+            </a:pPr>
+            <a:r>
+              <a:rPr sz="1400" b="0" i="0">
+                <a:solidFill>
+                  <a:srgbClr val="333333"/>
+                </a:solidFill>
+                <a:latin typeface="Calibri"/>
+              </a:rPr>
+              <a:t>Subir evidencias al paquete CloudLite (Drive/repo) y a la plataforma del curso en la fecha que indique el docente.</a:t>
+            </a:r>
+          </a:p>
+        </p:txBody>
+      </p:sp>
+      <p:sp>
+        <p:nvSpPr>
+          <p:cNvPr id="11" name="Rounded Rectangle 10"/>
+          <p:cNvSpPr/>
+          <p:nvPr/>
+        </p:nvSpPr>
+        <p:spPr>
+          <a:xfrm>
+            <a:off x="457200" y="3694176"/>
+            <a:ext cx="11277295" cy="1051560"/>
+          </a:xfrm>
+          <a:prstGeom prst="roundRect">
+            <a:avLst>
+              <a:gd name="adj" fmla="val 12000"/>
+            </a:avLst>
+          </a:prstGeom>
+          <a:solidFill>
+            <a:srgbClr val="FBE4E4"/>
+          </a:solidFill>
+          <a:ln>
+            <a:noFill/>
+          </a:ln>
+        </p:spPr>
+        <p:style>
+          <a:lnRef idx="1">
+            <a:schemeClr val="accent1"/>
+          </a:lnRef>
+          <a:fillRef idx="3">
+            <a:schemeClr val="accent1"/>
+          </a:fillRef>
+          <a:effectRef idx="2">
+            <a:schemeClr val="accent1"/>
+          </a:effectRef>
+          <a:fontRef idx="minor">
+            <a:schemeClr val="lt1"/>
+          </a:fontRef>
+        </p:style>
+        <p:txBody>
+          <a:bodyPr rtlCol="0" anchor="ctr"/>
+          <a:lstStyle/>
+          <a:p>
+            <a:pPr algn="ctr"/>
+          </a:p>
+        </p:txBody>
+      </p:sp>
+      <p:sp>
+        <p:nvSpPr>
+          <p:cNvPr id="12" name="Rectangle 11"/>
+          <p:cNvSpPr/>
+          <p:nvPr/>
+        </p:nvSpPr>
+        <p:spPr>
+          <a:xfrm>
+            <a:off x="457200" y="3694176"/>
+            <a:ext cx="128016" cy="1051560"/>
+          </a:xfrm>
+          <a:prstGeom prst="rect">
+            <a:avLst/>
+          </a:prstGeom>
+          <a:solidFill>
+            <a:srgbClr val="A02030"/>
+          </a:solidFill>
+          <a:ln>
+            <a:noFill/>
+          </a:ln>
+        </p:spPr>
+        <p:style>
+          <a:lnRef idx="1">
+            <a:schemeClr val="accent1"/>
+          </a:lnRef>
+          <a:fillRef idx="3">
+            <a:schemeClr val="accent1"/>
+          </a:fillRef>
+          <a:effectRef idx="2">
+            <a:schemeClr val="accent1"/>
+          </a:effectRef>
+          <a:fontRef idx="minor">
+            <a:schemeClr val="lt1"/>
+          </a:fontRef>
+        </p:style>
+        <p:txBody>
+          <a:bodyPr rtlCol="0" anchor="ctr"/>
+          <a:lstStyle/>
+          <a:p>
+            <a:pPr algn="ctr"/>
+          </a:p>
+        </p:txBody>
+      </p:sp>
+      <p:sp>
+        <p:nvSpPr>
+          <p:cNvPr id="13" name="TextBox 12"/>
+          <p:cNvSpPr txBox="1"/>
+          <p:nvPr/>
+        </p:nvSpPr>
+        <p:spPr>
+          <a:xfrm>
+            <a:off x="777240" y="3831336"/>
+            <a:ext cx="10774375" cy="822959"/>
+          </a:xfrm>
+          <a:prstGeom prst="rect">
+            <a:avLst/>
+          </a:prstGeom>
+          <a:noFill/>
+        </p:spPr>
+        <p:txBody>
+          <a:bodyPr wrap="square">
+            <a:spAutoFit/>
+          </a:bodyPr>
+          <a:lstStyle/>
+          <a:p>
+            <a:r>
+              <a:rPr sz="1200" b="1" i="0">
+                <a:solidFill>
+                  <a:srgbClr val="A02030"/>
+                </a:solidFill>
+                <a:latin typeface="Calibri"/>
+              </a:rPr>
+              <a:t>Atención</a:t>
+            </a:r>
+          </a:p>
+          <a:p>
+            <a:pPr>
+              <a:spcBef>
+                <a:spcPts val="400"/>
+              </a:spcBef>
+            </a:pPr>
+            <a:r>
+              <a:rPr sz="1400" b="0" i="0">
+                <a:solidFill>
+                  <a:srgbClr val="333333"/>
+                </a:solidFill>
+                <a:latin typeface="Calibri"/>
+              </a:rPr>
+              <a:t>Sin cloud de pago ni instalaciones obligatorias de hipervisores/Docker Desktop.</a:t>
+            </a:r>
+          </a:p>
+        </p:txBody>
+      </p:sp>
+      <p:sp>
+        <p:nvSpPr>
+          <p:cNvPr id="14" name="TextBox 13"/>
+          <p:cNvSpPr txBox="1"/>
+          <p:nvPr/>
+        </p:nvSpPr>
+        <p:spPr>
+          <a:xfrm>
+            <a:off x="11185855" y="6473952"/>
+            <a:ext cx="640080" cy="274320"/>
+          </a:xfrm>
+          <a:prstGeom prst="rect">
+            <a:avLst/>
+          </a:prstGeom>
+          <a:noFill/>
+        </p:spPr>
+        <p:txBody>
+          <a:bodyPr wrap="square">
+            <a:spAutoFit/>
+          </a:bodyPr>
+          <a:lstStyle/>
+          <a:p>
+            <a:pPr algn="r"/>
+            <a:r>
+              <a:rPr sz="1100" b="0" i="0">
+                <a:solidFill>
+                  <a:srgbClr val="666666"/>
+                </a:solidFill>
+                <a:latin typeface="Calibri"/>
+              </a:rPr>
+              <a:t>26</a:t>
+            </a:r>
+          </a:p>
+        </p:txBody>
+      </p:sp>
+    </p:spTree>
+  </p:cSld>
+  <p:clrMapOvr>
+    <a:masterClrMapping/>
+  </p:clrMapOvr>
+</p:sld>
+</file>
+
+<file path=ppt/slides/slide27.xml><?xml version="1.0" encoding="utf-8"?>
+<p:sld xmlns:a="http://schemas.openxmlformats.org/drawingml/2006/main" xmlns:p="http://schemas.openxmlformats.org/presentationml/2006/main" xmlns:r="http://schemas.openxmlformats.org/officeDocument/2006/relationships">
+  <p:cSld>
+    <p:bg>
+      <p:bgPr>
+        <a:solidFill>
+          <a:srgbClr val="FFFFFF"/>
+        </a:solidFill>
+        <a:effectLst/>
+      </p:bgPr>
+    </p:bg>
+    <p:spTree>
+      <p:nvGrpSpPr>
+        <p:cNvPr id="1" name=""/>
+        <p:cNvGrpSpPr/>
+        <p:nvPr/>
+      </p:nvGrpSpPr>
+      <p:grpSpPr/>
+      <p:sp>
+        <p:nvSpPr>
+          <p:cNvPr id="2" name="Rectangle 1"/>
+          <p:cNvSpPr/>
+          <p:nvPr/>
+        </p:nvSpPr>
+        <p:spPr>
+          <a:xfrm>
+            <a:off x="0" y="0"/>
+            <a:ext cx="12191695" cy="164592"/>
+          </a:xfrm>
+          <a:prstGeom prst="rect">
+            <a:avLst/>
+          </a:prstGeom>
+          <a:solidFill>
+            <a:srgbClr val="269CCB"/>
+          </a:solidFill>
+          <a:ln>
+            <a:noFill/>
+          </a:ln>
+        </p:spPr>
+        <p:style>
+          <a:lnRef idx="1">
+            <a:schemeClr val="accent1"/>
+          </a:lnRef>
+          <a:fillRef idx="3">
+            <a:schemeClr val="accent1"/>
+          </a:fillRef>
+          <a:effectRef idx="2">
+            <a:schemeClr val="accent1"/>
+          </a:effectRef>
+          <a:fontRef idx="minor">
+            <a:schemeClr val="lt1"/>
+          </a:fontRef>
+        </p:style>
+        <p:txBody>
+          <a:bodyPr rtlCol="0" anchor="ctr"/>
+          <a:lstStyle/>
+          <a:p>
+            <a:pPr algn="ctr"/>
+          </a:p>
+        </p:txBody>
+      </p:sp>
+      <p:pic>
+        <p:nvPicPr>
+          <p:cNvPr id="3" name="Picture 2" descr="logo_uniajc_color.png"/>
+          <p:cNvPicPr>
+            <a:picLocks noChangeAspect="1"/>
+          </p:cNvPicPr>
+          <p:nvPr/>
+        </p:nvPicPr>
+        <p:blipFill>
+          <a:blip r:embed="rId2"/>
+          <a:stretch>
+            <a:fillRect/>
+          </a:stretch>
+        </p:blipFill>
+        <p:spPr>
+          <a:xfrm>
+            <a:off x="10271455" y="5998464"/>
+            <a:ext cx="1463040" cy="643233"/>
+          </a:xfrm>
+          <a:prstGeom prst="rect">
+            <a:avLst/>
+          </a:prstGeom>
+        </p:spPr>
+      </p:pic>
+      <p:sp>
+        <p:nvSpPr>
+          <p:cNvPr id="4" name="TextBox 3"/>
+          <p:cNvSpPr txBox="1"/>
+          <p:nvPr/>
+        </p:nvSpPr>
+        <p:spPr>
+          <a:xfrm>
+            <a:off x="457200" y="1737360"/>
+            <a:ext cx="11277295" cy="1097280"/>
+          </a:xfrm>
+          <a:prstGeom prst="rect">
+            <a:avLst/>
+          </a:prstGeom>
+          <a:noFill/>
+        </p:spPr>
+        <p:txBody>
+          <a:bodyPr wrap="square" anchor="ctr"/>
+          <a:lstStyle/>
+          <a:p>
+            <a:pPr algn="ctr"/>
+            <a:r>
+              <a:rPr sz="3400" b="1" i="0">
+                <a:solidFill>
+                  <a:srgbClr val="095292"/>
+                </a:solidFill>
+                <a:latin typeface="Calibri"/>
+              </a:rPr>
+              <a:t>Clase 2 · PI en movimiento</a:t>
+            </a:r>
+          </a:p>
+        </p:txBody>
+      </p:sp>
+      <p:sp>
+        <p:nvSpPr>
+          <p:cNvPr id="5" name="TextBox 4"/>
+          <p:cNvSpPr txBox="1"/>
+          <p:nvPr/>
+        </p:nvSpPr>
+        <p:spPr>
+          <a:xfrm>
+            <a:off x="457200" y="3017520"/>
+            <a:ext cx="11277295" cy="1645920"/>
+          </a:xfrm>
+          <a:prstGeom prst="rect">
+            <a:avLst/>
+          </a:prstGeom>
+          <a:noFill/>
+        </p:spPr>
+        <p:txBody>
+          <a:bodyPr wrap="square">
+            <a:spAutoFit/>
+          </a:bodyPr>
+          <a:lstStyle/>
+          <a:p>
+            <a:pPr algn="ctr">
+              <a:spcAft>
+                <a:spcPts val="600"/>
+              </a:spcAft>
+            </a:pPr>
+            <a:r>
+              <a:rPr sz="1600" b="0" i="0">
+                <a:solidFill>
+                  <a:srgbClr val="333333"/>
+                </a:solidFill>
+                <a:latin typeface="Calibri"/>
+              </a:rPr>
+              <a:t>Decidir modelo dominante (IaaS/PaaS/SaaS) para CloudLite + ADR breve</a:t>
+            </a:r>
+          </a:p>
+          <a:p>
+            <a:pPr algn="ctr">
+              <a:spcAft>
+                <a:spcPts val="600"/>
+              </a:spcAft>
+            </a:pPr>
+            <a:r>
+              <a:rPr sz="1600" b="0" i="0">
+                <a:solidFill>
+                  <a:srgbClr val="333333"/>
+                </a:solidFill>
+                <a:latin typeface="Calibri"/>
+              </a:rPr>
+              <a:t>Evidencia: ADR-001: decisión de modelo de servicio + matriz de comparación aplicada al dominio</a:t>
+            </a:r>
+          </a:p>
+          <a:p>
+            <a:pPr algn="ctr">
+              <a:spcAft>
+                <a:spcPts val="600"/>
+              </a:spcAft>
+            </a:pPr>
+            <a:r>
+              <a:rPr sz="1600" b="0" i="0">
+                <a:solidFill>
+                  <a:srgbClr val="333333"/>
+                </a:solidFill>
+                <a:latin typeface="Calibri"/>
+              </a:rPr>
+              <a:t>Siguiente paso = siguiente hito del PI CloudLite</a:t>
+            </a:r>
+          </a:p>
+        </p:txBody>
+      </p:sp>
+      <p:sp>
+        <p:nvSpPr>
+          <p:cNvPr id="6" name="TextBox 5"/>
+          <p:cNvSpPr txBox="1"/>
+          <p:nvPr/>
+        </p:nvSpPr>
+        <p:spPr>
+          <a:xfrm>
+            <a:off x="457200" y="4754880"/>
+            <a:ext cx="11277295" cy="640080"/>
+          </a:xfrm>
+          <a:prstGeom prst="rect">
+            <a:avLst/>
+          </a:prstGeom>
+          <a:noFill/>
+        </p:spPr>
+        <p:txBody>
+          <a:bodyPr wrap="square">
+            <a:spAutoFit/>
+          </a:bodyPr>
+          <a:lstStyle/>
+          <a:p>
+            <a:pPr algn="ctr"/>
+            <a:r>
+              <a:rPr sz="2000" b="1" i="0">
+                <a:solidFill>
+                  <a:srgbClr val="269CCB"/>
+                </a:solidFill>
+                <a:latin typeface="Calibri"/>
+              </a:rPr>
+              <a:t>Teoría al servicio del proyecto</a:t>
+            </a:r>
+          </a:p>
+        </p:txBody>
+      </p:sp>
+    </p:spTree>
+  </p:cSld>
+  <p:clrMapOvr>
+    <a:masterClrMapping/>
+  </p:clrMapOvr>
+</p:sld>
+</file>
+
 <file path=ppt/slides/slide3.xml><?xml version="1.0" encoding="utf-8"?>
 <p:sld xmlns:a="http://schemas.openxmlformats.org/drawingml/2006/main" xmlns:p="http://schemas.openxmlformats.org/presentationml/2006/main" xmlns:r="http://schemas.openxmlformats.org/officeDocument/2006/relationships">
   <p:cSld>
@@ -7924,7 +12952,7 @@
         <p:spPr>
           <a:xfrm>
             <a:off x="0" y="0"/>
-            <a:ext cx="12191695" cy="1170432"/>
+            <a:ext cx="12191695" cy="960120"/>
           </a:xfrm>
           <a:prstGeom prst="rect">
             <a:avLst/>
@@ -7966,7 +12994,7 @@
         </p:nvSpPr>
         <p:spPr>
           <a:xfrm>
-            <a:off x="0" y="1170432"/>
+            <a:off x="0" y="960120"/>
             <a:ext cx="12191695" cy="41148"/>
           </a:xfrm>
           <a:prstGeom prst="rect">
@@ -8010,7 +13038,7 @@
         <p:spPr>
           <a:xfrm>
             <a:off x="457200" y="164592"/>
-            <a:ext cx="11277295" cy="384048"/>
+            <a:ext cx="11277295" cy="502920"/>
           </a:xfrm>
           <a:prstGeom prst="rect">
             <a:avLst/>
@@ -8030,7 +13058,7 @@
                 </a:solidFill>
                 <a:latin typeface="Calibri"/>
               </a:rPr>
-              <a:t>Quién administra cada capa — IaaS vs PaaS vs SaaS</a:t>
+              <a:t>De que se parte y que se decide hoy</a:t>
             </a:r>
           </a:p>
         </p:txBody>
@@ -8043,8 +13071,8 @@
         </p:nvSpPr>
         <p:spPr>
           <a:xfrm>
-            <a:off x="457200" y="566928"/>
-            <a:ext cx="11277295" cy="411480"/>
+            <a:off x="457200" y="1170432"/>
+            <a:ext cx="11277295" cy="5230368"/>
           </a:xfrm>
           <a:prstGeom prst="rect">
             <a:avLst/>
@@ -8057,906 +13085,90 @@
           </a:bodyPr>
           <a:lstStyle/>
           <a:p>
-            <a:r>
-              <a:rPr sz="1400" b="0" i="0">
-                <a:solidFill>
-                  <a:srgbClr val="B8D8EE"/>
-                </a:solidFill>
-                <a:latin typeface="Calibri"/>
-              </a:rPr>
-              <a:t>Misma aplicación, distinto reparto de responsabilidad entre usted y el proveedor</a:t>
-            </a:r>
-          </a:p>
-        </p:txBody>
-      </p:sp>
-      <p:sp>
-        <p:nvSpPr>
-          <p:cNvPr id="6" name="Rounded Rectangle 5"/>
-          <p:cNvSpPr/>
-          <p:nvPr/>
-        </p:nvSpPr>
-        <p:spPr>
-          <a:xfrm>
-            <a:off x="548640" y="1325880"/>
-            <a:ext cx="3291840" cy="685800"/>
-          </a:xfrm>
-          <a:prstGeom prst="roundRect">
-            <a:avLst>
-              <a:gd name="adj" fmla="val 12000"/>
-            </a:avLst>
-          </a:prstGeom>
-          <a:solidFill>
-            <a:srgbClr val="095292"/>
-          </a:solidFill>
-          <a:ln>
-            <a:noFill/>
-          </a:ln>
-        </p:spPr>
-        <p:style>
-          <a:lnRef idx="1">
-            <a:schemeClr val="accent1"/>
-          </a:lnRef>
-          <a:fillRef idx="3">
-            <a:schemeClr val="accent1"/>
-          </a:fillRef>
-          <a:effectRef idx="2">
-            <a:schemeClr val="accent1"/>
-          </a:effectRef>
-          <a:fontRef idx="minor">
-            <a:schemeClr val="lt1"/>
-          </a:fontRef>
-        </p:style>
-        <p:txBody>
-          <a:bodyPr rtlCol="0" anchor="ctr" wrap="square"/>
-          <a:lstStyle/>
-          <a:p>
-            <a:pPr algn="ctr"/>
-            <a:r>
-              <a:rPr sz="1200" b="1" i="0">
-                <a:solidFill>
-                  <a:srgbClr val="FFFFFF"/>
-                </a:solidFill>
-                <a:latin typeface="Calibri"/>
-              </a:rPr>
-              <a:t>IaaS
-(DigitalOcean, AWS EC2)</a:t>
-            </a:r>
-          </a:p>
-        </p:txBody>
-      </p:sp>
-      <p:sp>
-        <p:nvSpPr>
-          <p:cNvPr id="7" name="Rounded Rectangle 6"/>
-          <p:cNvSpPr/>
-          <p:nvPr/>
-        </p:nvSpPr>
-        <p:spPr>
-          <a:xfrm>
-            <a:off x="4160520" y="1325880"/>
-            <a:ext cx="3291840" cy="685800"/>
-          </a:xfrm>
-          <a:prstGeom prst="roundRect">
-            <a:avLst>
-              <a:gd name="adj" fmla="val 12000"/>
-            </a:avLst>
-          </a:prstGeom>
-          <a:solidFill>
-            <a:srgbClr val="095292"/>
-          </a:solidFill>
-          <a:ln>
-            <a:noFill/>
-          </a:ln>
-        </p:spPr>
-        <p:style>
-          <a:lnRef idx="1">
-            <a:schemeClr val="accent1"/>
-          </a:lnRef>
-          <a:fillRef idx="3">
-            <a:schemeClr val="accent1"/>
-          </a:fillRef>
-          <a:effectRef idx="2">
-            <a:schemeClr val="accent1"/>
-          </a:effectRef>
-          <a:fontRef idx="minor">
-            <a:schemeClr val="lt1"/>
-          </a:fontRef>
-        </p:style>
-        <p:txBody>
-          <a:bodyPr rtlCol="0" anchor="ctr" wrap="square"/>
-          <a:lstStyle/>
-          <a:p>
-            <a:pPr algn="ctr"/>
-            <a:r>
-              <a:rPr sz="1200" b="1" i="0">
-                <a:solidFill>
-                  <a:srgbClr val="FFFFFF"/>
-                </a:solidFill>
-                <a:latin typeface="Calibri"/>
-              </a:rPr>
-              <a:t>PaaS
-(Render, Railway, Heroku)</a:t>
-            </a:r>
-          </a:p>
-        </p:txBody>
-      </p:sp>
-      <p:sp>
-        <p:nvSpPr>
-          <p:cNvPr id="8" name="Rounded Rectangle 7"/>
-          <p:cNvSpPr/>
-          <p:nvPr/>
-        </p:nvSpPr>
-        <p:spPr>
-          <a:xfrm>
-            <a:off x="7772400" y="1325880"/>
-            <a:ext cx="3291840" cy="685800"/>
-          </a:xfrm>
-          <a:prstGeom prst="roundRect">
-            <a:avLst>
-              <a:gd name="adj" fmla="val 12000"/>
-            </a:avLst>
-          </a:prstGeom>
-          <a:solidFill>
-            <a:srgbClr val="095292"/>
-          </a:solidFill>
-          <a:ln>
-            <a:noFill/>
-          </a:ln>
-        </p:spPr>
-        <p:style>
-          <a:lnRef idx="1">
-            <a:schemeClr val="accent1"/>
-          </a:lnRef>
-          <a:fillRef idx="3">
-            <a:schemeClr val="accent1"/>
-          </a:fillRef>
-          <a:effectRef idx="2">
-            <a:schemeClr val="accent1"/>
-          </a:effectRef>
-          <a:fontRef idx="minor">
-            <a:schemeClr val="lt1"/>
-          </a:fontRef>
-        </p:style>
-        <p:txBody>
-          <a:bodyPr rtlCol="0" anchor="ctr" wrap="square"/>
-          <a:lstStyle/>
-          <a:p>
-            <a:pPr algn="ctr"/>
-            <a:r>
-              <a:rPr sz="1200" b="1" i="0">
-                <a:solidFill>
-                  <a:srgbClr val="FFFFFF"/>
-                </a:solidFill>
-                <a:latin typeface="Calibri"/>
-              </a:rPr>
-              <a:t>SaaS
-(Gmail, Notion, Slack)</a:t>
-            </a:r>
-          </a:p>
-        </p:txBody>
-      </p:sp>
-      <p:sp>
-        <p:nvSpPr>
-          <p:cNvPr id="9" name="Rounded Rectangle 8"/>
-          <p:cNvSpPr/>
-          <p:nvPr/>
-        </p:nvSpPr>
-        <p:spPr>
-          <a:xfrm>
-            <a:off x="548640" y="2103120"/>
-            <a:ext cx="3291840" cy="548640"/>
-          </a:xfrm>
-          <a:prstGeom prst="roundRect">
-            <a:avLst>
-              <a:gd name="adj" fmla="val 12000"/>
-            </a:avLst>
-          </a:prstGeom>
-          <a:solidFill>
-            <a:srgbClr val="FFD000"/>
-          </a:solidFill>
-          <a:ln>
-            <a:noFill/>
-          </a:ln>
-        </p:spPr>
-        <p:style>
-          <a:lnRef idx="1">
-            <a:schemeClr val="accent1"/>
-          </a:lnRef>
-          <a:fillRef idx="3">
-            <a:schemeClr val="accent1"/>
-          </a:fillRef>
-          <a:effectRef idx="2">
-            <a:schemeClr val="accent1"/>
-          </a:effectRef>
-          <a:fontRef idx="minor">
-            <a:schemeClr val="lt1"/>
-          </a:fontRef>
-        </p:style>
-        <p:txBody>
-          <a:bodyPr rtlCol="0" anchor="ctr" wrap="square"/>
-          <a:lstStyle/>
-          <a:p>
-            <a:pPr algn="ctr"/>
-            <a:r>
-              <a:rPr sz="1100" b="1" i="0">
-                <a:solidFill>
-                  <a:srgbClr val="095292"/>
-                </a:solidFill>
-                <a:latin typeface="Calibri"/>
-              </a:rPr>
-              <a:t>Aplicación y datos</a:t>
-            </a:r>
-          </a:p>
-        </p:txBody>
-      </p:sp>
-      <p:sp>
-        <p:nvSpPr>
-          <p:cNvPr id="10" name="Rounded Rectangle 9"/>
-          <p:cNvSpPr/>
-          <p:nvPr/>
-        </p:nvSpPr>
-        <p:spPr>
-          <a:xfrm>
-            <a:off x="548640" y="2743200"/>
-            <a:ext cx="3291840" cy="548640"/>
-          </a:xfrm>
-          <a:prstGeom prst="roundRect">
-            <a:avLst>
-              <a:gd name="adj" fmla="val 12000"/>
-            </a:avLst>
-          </a:prstGeom>
-          <a:solidFill>
-            <a:srgbClr val="FFD000"/>
-          </a:solidFill>
-          <a:ln>
-            <a:noFill/>
-          </a:ln>
-        </p:spPr>
-        <p:style>
-          <a:lnRef idx="1">
-            <a:schemeClr val="accent1"/>
-          </a:lnRef>
-          <a:fillRef idx="3">
-            <a:schemeClr val="accent1"/>
-          </a:fillRef>
-          <a:effectRef idx="2">
-            <a:schemeClr val="accent1"/>
-          </a:effectRef>
-          <a:fontRef idx="minor">
-            <a:schemeClr val="lt1"/>
-          </a:fontRef>
-        </p:style>
-        <p:txBody>
-          <a:bodyPr rtlCol="0" anchor="ctr" wrap="square"/>
-          <a:lstStyle/>
-          <a:p>
-            <a:pPr algn="ctr"/>
-            <a:r>
-              <a:rPr sz="1100" b="1" i="0">
-                <a:solidFill>
-                  <a:srgbClr val="095292"/>
-                </a:solidFill>
-                <a:latin typeface="Calibri"/>
-              </a:rPr>
-              <a:t>Runtime / middleware</a:t>
-            </a:r>
-          </a:p>
-        </p:txBody>
-      </p:sp>
-      <p:sp>
-        <p:nvSpPr>
-          <p:cNvPr id="11" name="Rounded Rectangle 10"/>
-          <p:cNvSpPr/>
-          <p:nvPr/>
-        </p:nvSpPr>
-        <p:spPr>
-          <a:xfrm>
-            <a:off x="548640" y="3383280"/>
-            <a:ext cx="3291840" cy="548640"/>
-          </a:xfrm>
-          <a:prstGeom prst="roundRect">
-            <a:avLst>
-              <a:gd name="adj" fmla="val 12000"/>
-            </a:avLst>
-          </a:prstGeom>
-          <a:solidFill>
-            <a:srgbClr val="FFD000"/>
-          </a:solidFill>
-          <a:ln>
-            <a:noFill/>
-          </a:ln>
-        </p:spPr>
-        <p:style>
-          <a:lnRef idx="1">
-            <a:schemeClr val="accent1"/>
-          </a:lnRef>
-          <a:fillRef idx="3">
-            <a:schemeClr val="accent1"/>
-          </a:fillRef>
-          <a:effectRef idx="2">
-            <a:schemeClr val="accent1"/>
-          </a:effectRef>
-          <a:fontRef idx="minor">
-            <a:schemeClr val="lt1"/>
-          </a:fontRef>
-        </p:style>
-        <p:txBody>
-          <a:bodyPr rtlCol="0" anchor="ctr" wrap="square"/>
-          <a:lstStyle/>
-          <a:p>
-            <a:pPr algn="ctr"/>
-            <a:r>
-              <a:rPr sz="1100" b="1" i="0">
-                <a:solidFill>
-                  <a:srgbClr val="095292"/>
-                </a:solidFill>
-                <a:latin typeface="Calibri"/>
-              </a:rPr>
-              <a:t>Sistema operativo</a:t>
-            </a:r>
-          </a:p>
-        </p:txBody>
-      </p:sp>
-      <p:sp>
-        <p:nvSpPr>
-          <p:cNvPr id="12" name="Rounded Rectangle 11"/>
-          <p:cNvSpPr/>
-          <p:nvPr/>
-        </p:nvSpPr>
-        <p:spPr>
-          <a:xfrm>
-            <a:off x="548640" y="4023360"/>
-            <a:ext cx="3291840" cy="548640"/>
-          </a:xfrm>
-          <a:prstGeom prst="roundRect">
-            <a:avLst>
-              <a:gd name="adj" fmla="val 12000"/>
-            </a:avLst>
-          </a:prstGeom>
-          <a:solidFill>
-            <a:srgbClr val="269CCB"/>
-          </a:solidFill>
-          <a:ln>
-            <a:noFill/>
-          </a:ln>
-        </p:spPr>
-        <p:style>
-          <a:lnRef idx="1">
-            <a:schemeClr val="accent1"/>
-          </a:lnRef>
-          <a:fillRef idx="3">
-            <a:schemeClr val="accent1"/>
-          </a:fillRef>
-          <a:effectRef idx="2">
-            <a:schemeClr val="accent1"/>
-          </a:effectRef>
-          <a:fontRef idx="minor">
-            <a:schemeClr val="lt1"/>
-          </a:fontRef>
-        </p:style>
-        <p:txBody>
-          <a:bodyPr rtlCol="0" anchor="ctr" wrap="square"/>
-          <a:lstStyle/>
-          <a:p>
-            <a:pPr algn="ctr"/>
-            <a:r>
-              <a:rPr sz="1050" b="1" i="0">
-                <a:solidFill>
-                  <a:srgbClr val="FFFFFF"/>
-                </a:solidFill>
-                <a:latin typeface="Calibri"/>
-              </a:rPr>
-              <a:t>Infraestructura
-(cómputo, red, disco)</a:t>
-            </a:r>
-          </a:p>
-        </p:txBody>
-      </p:sp>
-      <p:sp>
-        <p:nvSpPr>
-          <p:cNvPr id="13" name="Rounded Rectangle 12"/>
-          <p:cNvSpPr/>
-          <p:nvPr/>
-        </p:nvSpPr>
-        <p:spPr>
-          <a:xfrm>
-            <a:off x="4160520" y="2103120"/>
-            <a:ext cx="3291840" cy="548640"/>
-          </a:xfrm>
-          <a:prstGeom prst="roundRect">
-            <a:avLst>
-              <a:gd name="adj" fmla="val 12000"/>
-            </a:avLst>
-          </a:prstGeom>
-          <a:solidFill>
-            <a:srgbClr val="FFD000"/>
-          </a:solidFill>
-          <a:ln>
-            <a:noFill/>
-          </a:ln>
-        </p:spPr>
-        <p:style>
-          <a:lnRef idx="1">
-            <a:schemeClr val="accent1"/>
-          </a:lnRef>
-          <a:fillRef idx="3">
-            <a:schemeClr val="accent1"/>
-          </a:fillRef>
-          <a:effectRef idx="2">
-            <a:schemeClr val="accent1"/>
-          </a:effectRef>
-          <a:fontRef idx="minor">
-            <a:schemeClr val="lt1"/>
-          </a:fontRef>
-        </p:style>
-        <p:txBody>
-          <a:bodyPr rtlCol="0" anchor="ctr" wrap="square"/>
-          <a:lstStyle/>
-          <a:p>
-            <a:pPr algn="ctr"/>
-            <a:r>
-              <a:rPr sz="1100" b="1" i="0">
-                <a:solidFill>
-                  <a:srgbClr val="095292"/>
-                </a:solidFill>
-                <a:latin typeface="Calibri"/>
-              </a:rPr>
-              <a:t>Aplicación y datos</a:t>
-            </a:r>
-          </a:p>
-        </p:txBody>
-      </p:sp>
-      <p:sp>
-        <p:nvSpPr>
-          <p:cNvPr id="14" name="Rounded Rectangle 13"/>
-          <p:cNvSpPr/>
-          <p:nvPr/>
-        </p:nvSpPr>
-        <p:spPr>
-          <a:xfrm>
-            <a:off x="4160520" y="2743200"/>
-            <a:ext cx="3291840" cy="548640"/>
-          </a:xfrm>
-          <a:prstGeom prst="roundRect">
-            <a:avLst>
-              <a:gd name="adj" fmla="val 12000"/>
-            </a:avLst>
-          </a:prstGeom>
-          <a:solidFill>
-            <a:srgbClr val="269CCB"/>
-          </a:solidFill>
-          <a:ln>
-            <a:noFill/>
-          </a:ln>
-        </p:spPr>
-        <p:style>
-          <a:lnRef idx="1">
-            <a:schemeClr val="accent1"/>
-          </a:lnRef>
-          <a:fillRef idx="3">
-            <a:schemeClr val="accent1"/>
-          </a:fillRef>
-          <a:effectRef idx="2">
-            <a:schemeClr val="accent1"/>
-          </a:effectRef>
-          <a:fontRef idx="minor">
-            <a:schemeClr val="lt1"/>
-          </a:fontRef>
-        </p:style>
-        <p:txBody>
-          <a:bodyPr rtlCol="0" anchor="ctr" wrap="square"/>
-          <a:lstStyle/>
-          <a:p>
-            <a:pPr algn="ctr"/>
-            <a:r>
-              <a:rPr sz="1100" b="1" i="0">
-                <a:solidFill>
-                  <a:srgbClr val="FFFFFF"/>
-                </a:solidFill>
-                <a:latin typeface="Calibri"/>
-              </a:rPr>
-              <a:t>Runtime / middleware</a:t>
-            </a:r>
-          </a:p>
-        </p:txBody>
-      </p:sp>
-      <p:sp>
-        <p:nvSpPr>
-          <p:cNvPr id="15" name="Rounded Rectangle 14"/>
-          <p:cNvSpPr/>
-          <p:nvPr/>
-        </p:nvSpPr>
-        <p:spPr>
-          <a:xfrm>
-            <a:off x="4160520" y="3383280"/>
-            <a:ext cx="3291840" cy="548640"/>
-          </a:xfrm>
-          <a:prstGeom prst="roundRect">
-            <a:avLst>
-              <a:gd name="adj" fmla="val 12000"/>
-            </a:avLst>
-          </a:prstGeom>
-          <a:solidFill>
-            <a:srgbClr val="269CCB"/>
-          </a:solidFill>
-          <a:ln>
-            <a:noFill/>
-          </a:ln>
-        </p:spPr>
-        <p:style>
-          <a:lnRef idx="1">
-            <a:schemeClr val="accent1"/>
-          </a:lnRef>
-          <a:fillRef idx="3">
-            <a:schemeClr val="accent1"/>
-          </a:fillRef>
-          <a:effectRef idx="2">
-            <a:schemeClr val="accent1"/>
-          </a:effectRef>
-          <a:fontRef idx="minor">
-            <a:schemeClr val="lt1"/>
-          </a:fontRef>
-        </p:style>
-        <p:txBody>
-          <a:bodyPr rtlCol="0" anchor="ctr" wrap="square"/>
-          <a:lstStyle/>
-          <a:p>
-            <a:pPr algn="ctr"/>
-            <a:r>
-              <a:rPr sz="1100" b="1" i="0">
-                <a:solidFill>
-                  <a:srgbClr val="FFFFFF"/>
-                </a:solidFill>
-                <a:latin typeface="Calibri"/>
-              </a:rPr>
-              <a:t>Sistema operativo</a:t>
-            </a:r>
-          </a:p>
-        </p:txBody>
-      </p:sp>
-      <p:sp>
-        <p:nvSpPr>
-          <p:cNvPr id="16" name="Rounded Rectangle 15"/>
-          <p:cNvSpPr/>
-          <p:nvPr/>
-        </p:nvSpPr>
-        <p:spPr>
-          <a:xfrm>
-            <a:off x="4160520" y="4023360"/>
-            <a:ext cx="3291840" cy="548640"/>
-          </a:xfrm>
-          <a:prstGeom prst="roundRect">
-            <a:avLst>
-              <a:gd name="adj" fmla="val 12000"/>
-            </a:avLst>
-          </a:prstGeom>
-          <a:solidFill>
-            <a:srgbClr val="269CCB"/>
-          </a:solidFill>
-          <a:ln>
-            <a:noFill/>
-          </a:ln>
-        </p:spPr>
-        <p:style>
-          <a:lnRef idx="1">
-            <a:schemeClr val="accent1"/>
-          </a:lnRef>
-          <a:fillRef idx="3">
-            <a:schemeClr val="accent1"/>
-          </a:fillRef>
-          <a:effectRef idx="2">
-            <a:schemeClr val="accent1"/>
-          </a:effectRef>
-          <a:fontRef idx="minor">
-            <a:schemeClr val="lt1"/>
-          </a:fontRef>
-        </p:style>
-        <p:txBody>
-          <a:bodyPr rtlCol="0" anchor="ctr" wrap="square"/>
-          <a:lstStyle/>
-          <a:p>
-            <a:pPr algn="ctr"/>
-            <a:r>
-              <a:rPr sz="1050" b="1" i="0">
-                <a:solidFill>
-                  <a:srgbClr val="FFFFFF"/>
-                </a:solidFill>
-                <a:latin typeface="Calibri"/>
-              </a:rPr>
-              <a:t>Infraestructura
-(cómputo, red, disco)</a:t>
-            </a:r>
-          </a:p>
-        </p:txBody>
-      </p:sp>
-      <p:sp>
-        <p:nvSpPr>
-          <p:cNvPr id="17" name="Rounded Rectangle 16"/>
-          <p:cNvSpPr/>
-          <p:nvPr/>
-        </p:nvSpPr>
-        <p:spPr>
-          <a:xfrm>
-            <a:off x="7772400" y="2103120"/>
-            <a:ext cx="3291840" cy="548640"/>
-          </a:xfrm>
-          <a:prstGeom prst="roundRect">
-            <a:avLst>
-              <a:gd name="adj" fmla="val 12000"/>
-            </a:avLst>
-          </a:prstGeom>
-          <a:solidFill>
-            <a:srgbClr val="FFD000"/>
-          </a:solidFill>
-          <a:ln>
-            <a:noFill/>
-          </a:ln>
-        </p:spPr>
-        <p:style>
-          <a:lnRef idx="1">
-            <a:schemeClr val="accent1"/>
-          </a:lnRef>
-          <a:fillRef idx="3">
-            <a:schemeClr val="accent1"/>
-          </a:fillRef>
-          <a:effectRef idx="2">
-            <a:schemeClr val="accent1"/>
-          </a:effectRef>
-          <a:fontRef idx="minor">
-            <a:schemeClr val="lt1"/>
-          </a:fontRef>
-        </p:style>
-        <p:txBody>
-          <a:bodyPr rtlCol="0" anchor="ctr" wrap="square"/>
-          <a:lstStyle/>
-          <a:p>
-            <a:pPr algn="ctr"/>
-            <a:r>
-              <a:rPr sz="1050" b="1" i="0">
-                <a:solidFill>
-                  <a:srgbClr val="095292"/>
-                </a:solidFill>
-                <a:latin typeface="Calibri"/>
-              </a:rPr>
-              <a:t>Aplicación y datos
-(usted solo configura)</a:t>
-            </a:r>
-          </a:p>
-        </p:txBody>
-      </p:sp>
-      <p:sp>
-        <p:nvSpPr>
-          <p:cNvPr id="18" name="Rounded Rectangle 17"/>
-          <p:cNvSpPr/>
-          <p:nvPr/>
-        </p:nvSpPr>
-        <p:spPr>
-          <a:xfrm>
-            <a:off x="7772400" y="2743200"/>
-            <a:ext cx="3291840" cy="548640"/>
-          </a:xfrm>
-          <a:prstGeom prst="roundRect">
-            <a:avLst>
-              <a:gd name="adj" fmla="val 12000"/>
-            </a:avLst>
-          </a:prstGeom>
-          <a:solidFill>
-            <a:srgbClr val="269CCB"/>
-          </a:solidFill>
-          <a:ln>
-            <a:noFill/>
-          </a:ln>
-        </p:spPr>
-        <p:style>
-          <a:lnRef idx="1">
-            <a:schemeClr val="accent1"/>
-          </a:lnRef>
-          <a:fillRef idx="3">
-            <a:schemeClr val="accent1"/>
-          </a:fillRef>
-          <a:effectRef idx="2">
-            <a:schemeClr val="accent1"/>
-          </a:effectRef>
-          <a:fontRef idx="minor">
-            <a:schemeClr val="lt1"/>
-          </a:fontRef>
-        </p:style>
-        <p:txBody>
-          <a:bodyPr rtlCol="0" anchor="ctr" wrap="square"/>
-          <a:lstStyle/>
-          <a:p>
-            <a:pPr algn="ctr"/>
-            <a:r>
-              <a:rPr sz="1100" b="1" i="0">
-                <a:solidFill>
-                  <a:srgbClr val="FFFFFF"/>
-                </a:solidFill>
-                <a:latin typeface="Calibri"/>
-              </a:rPr>
-              <a:t>Runtime / middleware</a:t>
-            </a:r>
-          </a:p>
-        </p:txBody>
-      </p:sp>
-      <p:sp>
-        <p:nvSpPr>
-          <p:cNvPr id="19" name="Rounded Rectangle 18"/>
-          <p:cNvSpPr/>
-          <p:nvPr/>
-        </p:nvSpPr>
-        <p:spPr>
-          <a:xfrm>
-            <a:off x="7772400" y="3383280"/>
-            <a:ext cx="3291840" cy="548640"/>
-          </a:xfrm>
-          <a:prstGeom prst="roundRect">
-            <a:avLst>
-              <a:gd name="adj" fmla="val 12000"/>
-            </a:avLst>
-          </a:prstGeom>
-          <a:solidFill>
-            <a:srgbClr val="269CCB"/>
-          </a:solidFill>
-          <a:ln>
-            <a:noFill/>
-          </a:ln>
-        </p:spPr>
-        <p:style>
-          <a:lnRef idx="1">
-            <a:schemeClr val="accent1"/>
-          </a:lnRef>
-          <a:fillRef idx="3">
-            <a:schemeClr val="accent1"/>
-          </a:fillRef>
-          <a:effectRef idx="2">
-            <a:schemeClr val="accent1"/>
-          </a:effectRef>
-          <a:fontRef idx="minor">
-            <a:schemeClr val="lt1"/>
-          </a:fontRef>
-        </p:style>
-        <p:txBody>
-          <a:bodyPr rtlCol="0" anchor="ctr" wrap="square"/>
-          <a:lstStyle/>
-          <a:p>
-            <a:pPr algn="ctr"/>
-            <a:r>
-              <a:rPr sz="1100" b="1" i="0">
-                <a:solidFill>
-                  <a:srgbClr val="FFFFFF"/>
-                </a:solidFill>
-                <a:latin typeface="Calibri"/>
-              </a:rPr>
-              <a:t>Sistema operativo</a:t>
-            </a:r>
-          </a:p>
-        </p:txBody>
-      </p:sp>
-      <p:sp>
-        <p:nvSpPr>
-          <p:cNvPr id="20" name="Rounded Rectangle 19"/>
-          <p:cNvSpPr/>
-          <p:nvPr/>
-        </p:nvSpPr>
-        <p:spPr>
-          <a:xfrm>
-            <a:off x="7772400" y="4023360"/>
-            <a:ext cx="3291840" cy="548640"/>
-          </a:xfrm>
-          <a:prstGeom prst="roundRect">
-            <a:avLst>
-              <a:gd name="adj" fmla="val 12000"/>
-            </a:avLst>
-          </a:prstGeom>
-          <a:solidFill>
-            <a:srgbClr val="269CCB"/>
-          </a:solidFill>
-          <a:ln>
-            <a:noFill/>
-          </a:ln>
-        </p:spPr>
-        <p:style>
-          <a:lnRef idx="1">
-            <a:schemeClr val="accent1"/>
-          </a:lnRef>
-          <a:fillRef idx="3">
-            <a:schemeClr val="accent1"/>
-          </a:fillRef>
-          <a:effectRef idx="2">
-            <a:schemeClr val="accent1"/>
-          </a:effectRef>
-          <a:fontRef idx="minor">
-            <a:schemeClr val="lt1"/>
-          </a:fontRef>
-        </p:style>
-        <p:txBody>
-          <a:bodyPr rtlCol="0" anchor="ctr" wrap="square"/>
-          <a:lstStyle/>
-          <a:p>
-            <a:pPr algn="ctr"/>
-            <a:r>
-              <a:rPr sz="1050" b="1" i="0">
-                <a:solidFill>
-                  <a:srgbClr val="FFFFFF"/>
-                </a:solidFill>
-                <a:latin typeface="Calibri"/>
-              </a:rPr>
-              <a:t>Infraestructura
-(cómputo, red, disco)</a:t>
-            </a:r>
-          </a:p>
-        </p:txBody>
-      </p:sp>
-      <p:sp>
-        <p:nvSpPr>
-          <p:cNvPr id="21" name="TextBox 20"/>
-          <p:cNvSpPr txBox="1"/>
-          <p:nvPr/>
-        </p:nvSpPr>
-        <p:spPr>
-          <a:xfrm>
-            <a:off x="457200" y="5897880"/>
-            <a:ext cx="11277295" cy="320040"/>
-          </a:xfrm>
-          <a:prstGeom prst="rect">
-            <a:avLst/>
-          </a:prstGeom>
-          <a:noFill/>
-        </p:spPr>
-        <p:txBody>
-          <a:bodyPr wrap="square">
-            <a:spAutoFit/>
-          </a:bodyPr>
-          <a:lstStyle/>
-          <a:p>
-            <a:r>
-              <a:rPr sz="1050" b="0" i="1">
-                <a:solidFill>
-                  <a:srgbClr val="666666"/>
-                </a:solidFill>
-                <a:latin typeface="Calibri"/>
-              </a:rPr>
-              <a:t>Amarillo = lo administra usted · Celeste = lo administra el proveedor</a:t>
-            </a:r>
-          </a:p>
-        </p:txBody>
-      </p:sp>
-      <p:sp>
-        <p:nvSpPr>
-          <p:cNvPr id="22" name="TextBox 21"/>
-          <p:cNvSpPr txBox="1"/>
-          <p:nvPr/>
-        </p:nvSpPr>
-        <p:spPr>
-          <a:xfrm>
-            <a:off x="457200" y="6263640"/>
-            <a:ext cx="11277295" cy="411480"/>
-          </a:xfrm>
-          <a:prstGeom prst="rect">
-            <a:avLst/>
-          </a:prstGeom>
-          <a:noFill/>
-        </p:spPr>
-        <p:txBody>
-          <a:bodyPr wrap="square">
-            <a:spAutoFit/>
-          </a:bodyPr>
-          <a:lstStyle/>
-          <a:p>
-            <a:r>
-              <a:rPr sz="1100" b="0" i="1">
-                <a:solidFill>
-                  <a:srgbClr val="666666"/>
-                </a:solidFill>
-                <a:latin typeface="Calibri"/>
-              </a:rPr>
-              <a:t>Suba en la pila y sube el control, pero también lo que tiene que operar usted: parches, escalado, disponibilidad. Para el MVP de CloudLite, PaaS es el punto medio: usted solo responde por su aplicación y sus datos.</a:t>
-            </a:r>
-          </a:p>
-        </p:txBody>
-      </p:sp>
-      <p:sp>
-        <p:nvSpPr>
-          <p:cNvPr id="23" name="TextBox 22"/>
+            <a:pPr>
+              <a:spcAft>
+                <a:spcPts val="800"/>
+              </a:spcAft>
+            </a:pPr>
+            <a:r>
+              <a:rPr sz="2000" b="0" i="0">
+                <a:solidFill>
+                  <a:srgbClr val="333333"/>
+                </a:solidFill>
+                <a:latin typeface="Calibri"/>
+              </a:rPr>
+              <a:t>–   Esta clase se dicta en sesion virtual sincrona, en el mismo bloque de 120 minutos de siempre: hay explicacion en vivo</a:t>
+            </a:r>
+          </a:p>
+          <a:p>
+            <a:pPr>
+              <a:spcAft>
+                <a:spcPts val="800"/>
+              </a:spcAft>
+            </a:pPr>
+            <a:r>
+              <a:rPr sz="2000" b="0" i="0">
+                <a:solidFill>
+                  <a:srgbClr val="333333"/>
+                </a:solidFill>
+                <a:latin typeface="Calibri"/>
+              </a:rPr>
+              <a:t>–   Taller acompanado y tiempo para preguntar, asi que este fundamento es material del docente para dictar y no una lectura que reemplace la clase.</a:t>
+            </a:r>
+          </a:p>
+          <a:p>
+            <a:pPr>
+              <a:spcAft>
+                <a:spcPts val="800"/>
+              </a:spcAft>
+            </a:pPr>
+            <a:r>
+              <a:rPr sz="2000" b="0" i="0">
+                <a:solidFill>
+                  <a:srgbClr val="333333"/>
+                </a:solidFill>
+                <a:latin typeface="Calibri"/>
+              </a:rPr>
+              <a:t>–   El punto de partida es lo definido en la Clase 1: cada estudiante ya tiene un dominio para CloudLite App, tres a cinco capacidades, sus actores y un diagrama de contexto.</a:t>
+            </a:r>
+          </a:p>
+          <a:p>
+            <a:pPr>
+              <a:spcAft>
+                <a:spcPts val="800"/>
+              </a:spcAft>
+            </a:pPr>
+            <a:r>
+              <a:rPr sz="2000" b="0" i="0">
+                <a:solidFill>
+                  <a:srgbClr val="333333"/>
+                </a:solidFill>
+                <a:latin typeface="Calibri"/>
+              </a:rPr>
+              <a:t>–   La pregunta de hoy es la siguiente en orden logico: si ese sistema va a vivir en la nube, quien administra cada capa de la maquinaria que lo sostiene.</a:t>
+            </a:r>
+          </a:p>
+          <a:p>
+            <a:pPr>
+              <a:spcAft>
+                <a:spcPts val="800"/>
+              </a:spcAft>
+            </a:pPr>
+            <a:r>
+              <a:rPr sz="2000" b="0" i="0">
+                <a:solidFill>
+                  <a:srgbClr val="333333"/>
+                </a:solidFill>
+                <a:latin typeface="Calibri"/>
+              </a:rPr>
+              <a:t>–   No hay una sola respuesta, hay tres respuestas estandar que la industria llama IaaS, PaaS y SaaS, y elegir entre ellas es una decision de arquitectura con consecuencias medibles en costo, velocidad de entrega, seguridad y libertad futura.</a:t>
+            </a:r>
+          </a:p>
+        </p:txBody>
+      </p:sp>
+      <p:sp>
+        <p:nvSpPr>
+          <p:cNvPr id="6" name="TextBox 5"/>
           <p:cNvSpPr txBox="1"/>
           <p:nvPr/>
         </p:nvSpPr>
@@ -9130,141 +13342,21 @@
                 </a:solidFill>
                 <a:latin typeface="Calibri"/>
               </a:rPr>
-              <a:t>ADR-001 — las 6 secciones caben en una pagina</a:t>
-            </a:r>
-          </a:p>
-        </p:txBody>
-      </p:sp>
-      <p:sp>
-        <p:nvSpPr>
-          <p:cNvPr id="5" name="Rounded Rectangle 4"/>
-          <p:cNvSpPr/>
-          <p:nvPr/>
-        </p:nvSpPr>
-        <p:spPr>
-          <a:xfrm>
-            <a:off x="457200" y="1261872"/>
-            <a:ext cx="11277295" cy="4773168"/>
-          </a:xfrm>
-          <a:prstGeom prst="roundRect">
-            <a:avLst>
-              <a:gd name="adj" fmla="val 12000"/>
-            </a:avLst>
-          </a:prstGeom>
-          <a:solidFill>
-            <a:srgbClr val="1E2A38"/>
-          </a:solidFill>
-          <a:ln>
-            <a:noFill/>
-          </a:ln>
-        </p:spPr>
-        <p:style>
-          <a:lnRef idx="1">
-            <a:schemeClr val="accent1"/>
-          </a:lnRef>
-          <a:fillRef idx="3">
-            <a:schemeClr val="accent1"/>
-          </a:fillRef>
-          <a:effectRef idx="2">
-            <a:schemeClr val="accent1"/>
-          </a:effectRef>
-          <a:fontRef idx="minor">
-            <a:schemeClr val="lt1"/>
-          </a:fontRef>
-        </p:style>
-        <p:txBody>
-          <a:bodyPr rtlCol="0" anchor="ctr"/>
-          <a:lstStyle/>
-          <a:p>
-            <a:pPr algn="ctr"/>
-          </a:p>
-        </p:txBody>
-      </p:sp>
-      <p:sp>
-        <p:nvSpPr>
-          <p:cNvPr id="6" name="Rectangle 5"/>
-          <p:cNvSpPr/>
-          <p:nvPr/>
-        </p:nvSpPr>
-        <p:spPr>
-          <a:xfrm>
-            <a:off x="457200" y="1261872"/>
-            <a:ext cx="11277295" cy="320040"/>
-          </a:xfrm>
-          <a:prstGeom prst="rect">
-            <a:avLst/>
-          </a:prstGeom>
-          <a:solidFill>
-            <a:srgbClr val="095292"/>
-          </a:solidFill>
-          <a:ln>
-            <a:noFill/>
-          </a:ln>
-        </p:spPr>
-        <p:style>
-          <a:lnRef idx="1">
-            <a:schemeClr val="accent1"/>
-          </a:lnRef>
-          <a:fillRef idx="3">
-            <a:schemeClr val="accent1"/>
-          </a:fillRef>
-          <a:effectRef idx="2">
-            <a:schemeClr val="accent1"/>
-          </a:effectRef>
-          <a:fontRef idx="minor">
-            <a:schemeClr val="lt1"/>
-          </a:fontRef>
-        </p:style>
-        <p:txBody>
-          <a:bodyPr rtlCol="0" anchor="ctr"/>
-          <a:lstStyle/>
-          <a:p>
-            <a:pPr algn="ctr"/>
-          </a:p>
-        </p:txBody>
-      </p:sp>
-      <p:sp>
-        <p:nvSpPr>
-          <p:cNvPr id="7" name="TextBox 6"/>
+              <a:t>La pila de responsabilidades: donde se corta la linea</a:t>
+            </a:r>
+          </a:p>
+        </p:txBody>
+      </p:sp>
+      <p:sp>
+        <p:nvSpPr>
+          <p:cNvPr id="5" name="TextBox 4"/>
           <p:cNvSpPr txBox="1"/>
           <p:nvPr/>
         </p:nvSpPr>
         <p:spPr>
           <a:xfrm>
-            <a:off x="685800" y="1307592"/>
-            <a:ext cx="10820095" cy="256032"/>
-          </a:xfrm>
-          <a:prstGeom prst="rect">
-            <a:avLst/>
-          </a:prstGeom>
-          <a:noFill/>
-        </p:spPr>
-        <p:txBody>
-          <a:bodyPr wrap="square" anchor="ctr"/>
-          <a:lstStyle/>
-          <a:p>
-            <a:r>
-              <a:rPr sz="1000" b="1" i="0">
-                <a:solidFill>
-                  <a:srgbClr val="269CCB"/>
-                </a:solidFill>
-                <a:latin typeface="Calibri"/>
-              </a:rPr>
-              <a:t>● ● ●</a:t>
-            </a:r>
-          </a:p>
-        </p:txBody>
-      </p:sp>
-      <p:sp>
-        <p:nvSpPr>
-          <p:cNvPr id="8" name="TextBox 7"/>
-          <p:cNvSpPr txBox="1"/>
-          <p:nvPr/>
-        </p:nvSpPr>
-        <p:spPr>
-          <a:xfrm>
-            <a:off x="777240" y="1719072"/>
-            <a:ext cx="10637215" cy="4133087"/>
+            <a:off x="457200" y="1170432"/>
+            <a:ext cx="11277295" cy="5230368"/>
           </a:xfrm>
           <a:prstGeom prst="rect">
             <a:avLst/>
@@ -9279,283 +13371,136 @@
           <a:p>
             <a:pPr>
               <a:spcAft>
-                <a:spcPts val="400"/>
+                <a:spcPts val="800"/>
               </a:spcAft>
             </a:pPr>
             <a:r>
-              <a:rPr sz="1400" b="0" i="0">
-                <a:solidFill>
-                  <a:srgbClr val="FFFFFF"/>
-                </a:solidFill>
-                <a:latin typeface="Calibri"/>
-              </a:rPr>
-              <a:t>## 1. Titulo     ADR-001 Modelo de servicio dominante de CloudLite App</a:t>
+              <a:rPr sz="2000" b="0" i="0">
+                <a:solidFill>
+                  <a:srgbClr val="333333"/>
+                </a:solidFill>
+                <a:latin typeface="Calibri"/>
+              </a:rPr>
+              <a:t>–   Para entender los tres modelos hay que ver primero la pila completa de responsabilidades que existe debajo de cualquier aplicacion</a:t>
             </a:r>
           </a:p>
           <a:p>
             <a:pPr>
               <a:spcAft>
-                <a:spcPts val="400"/>
+                <a:spcPts val="800"/>
               </a:spcAft>
             </a:pPr>
             <a:r>
-              <a:rPr sz="1400" b="0" i="0">
-                <a:solidFill>
-                  <a:srgbClr val="FFFFFF"/>
-                </a:solidFill>
-                <a:latin typeface="Calibri"/>
-              </a:rPr>
-              <a:t>## 2. Estado     Aceptado — &lt;fecha de hoy&gt;</a:t>
+              <a:rPr sz="2000" b="0" i="0">
+                <a:solidFill>
+                  <a:srgbClr val="333333"/>
+                </a:solidFill>
+                <a:latin typeface="Calibri"/>
+              </a:rPr>
+              <a:t>–   De abajo hacia arriba: el edificio y la energia electrica, el hardware fisico (servidores, discos, cableado de red), la capa de virtualizacion que parte ese hardware en maquinas logicas</a:t>
             </a:r>
           </a:p>
           <a:p>
             <a:pPr>
               <a:spcAft>
-                <a:spcPts val="400"/>
+                <a:spcPts val="800"/>
               </a:spcAft>
             </a:pPr>
             <a:r>
-              <a:rPr sz="1400" b="0" i="0">
-                <a:solidFill>
-                  <a:srgbClr val="FFFFFF"/>
-                </a:solidFill>
-                <a:latin typeface="Calibri"/>
-              </a:rPr>
-              <a:t/>
+              <a:rPr sz="2000" b="0" i="0">
+                <a:solidFill>
+                  <a:srgbClr val="333333"/>
+                </a:solidFill>
+                <a:latin typeface="Calibri"/>
+              </a:rPr>
+              <a:t>–   El sistema operativo de cada maquina, el runtime o entorno de ejecucion (por ejemplo Node.js, Python o la maquina virtual de Java) junto con servicios de apoyo como la base de datos</a:t>
             </a:r>
           </a:p>
           <a:p>
             <a:pPr>
               <a:spcAft>
-                <a:spcPts val="400"/>
+                <a:spcPts val="800"/>
               </a:spcAft>
             </a:pPr>
             <a:r>
-              <a:rPr sz="1400" b="0" i="0">
-                <a:solidFill>
-                  <a:srgbClr val="FFFFFF"/>
-                </a:solidFill>
-                <a:latin typeface="Calibri"/>
-              </a:rPr>
-              <a:t>## 3. Contexto                    &lt;- restricciones, no resumen del tema</a:t>
+              <a:rPr sz="2000" b="0" i="0">
+                <a:solidFill>
+                  <a:srgbClr val="333333"/>
+                </a:solidFill>
+                <a:latin typeface="Calibri"/>
+              </a:rPr>
+              <a:t>–   Y finalmente el codigo de la aplicacion, sus datos y la administracion de usuarios y permisos.</a:t>
             </a:r>
           </a:p>
           <a:p>
             <a:pPr>
               <a:spcAft>
-                <a:spcPts val="400"/>
+                <a:spcPts val="800"/>
               </a:spcAft>
             </a:pPr>
             <a:r>
-              <a:rPr sz="1400" b="0" i="0">
-                <a:solidFill>
-                  <a:srgbClr val="FFFFFF"/>
-                </a:solidFill>
-                <a:latin typeface="Calibri"/>
-              </a:rPr>
-              <a:t>Lo sostengo yo solo, 12 semanas, sin presupuesto cloud ni tarjeta; demo viva el dia de la sustentacion.</a:t>
+              <a:rPr sz="2000" b="0" i="0">
+                <a:solidFill>
+                  <a:srgbClr val="333333"/>
+                </a:solidFill>
+                <a:latin typeface="Calibri"/>
+              </a:rPr>
+              <a:t>–   Son ocho o nueve capas segun como se cuente.</a:t>
             </a:r>
           </a:p>
           <a:p>
             <a:pPr>
               <a:spcAft>
-                <a:spcPts val="400"/>
+                <a:spcPts val="800"/>
               </a:spcAft>
             </a:pPr>
             <a:r>
-              <a:rPr sz="1400" b="0" i="0">
-                <a:solidFill>
-                  <a:srgbClr val="FFFFFF"/>
-                </a:solidFill>
-                <a:latin typeface="Calibri"/>
-              </a:rPr>
-              <a:t/>
+              <a:rPr sz="2000" b="0" i="0">
+                <a:solidFill>
+                  <a:srgbClr val="333333"/>
+                </a:solidFill>
+                <a:latin typeface="Calibri"/>
+              </a:rPr>
+              <a:t>–   En el modelo tradicional, llamado on-premise porque los equipos son propios y estan en las instalaciones de la organizacion, todas son responsabilidad del cliente.</a:t>
             </a:r>
           </a:p>
           <a:p>
             <a:pPr>
               <a:spcAft>
-                <a:spcPts val="400"/>
+                <a:spcPts val="800"/>
               </a:spcAft>
             </a:pPr>
             <a:r>
-              <a:rPr sz="1400" b="0" i="0">
-                <a:solidFill>
-                  <a:srgbClr val="FFFFFF"/>
-                </a:solidFill>
-                <a:latin typeface="Calibri"/>
-              </a:rPr>
-              <a:t>## 4. Decision                    &lt;- UNA frase, UN modelo dominante</a:t>
+              <a:rPr sz="2000" b="0" i="0">
+                <a:solidFill>
+                  <a:srgbClr val="333333"/>
+                </a:solidFill>
+                <a:latin typeface="Calibri"/>
+              </a:rPr>
+              <a:t>–   Los tres modelos de servicio se distinguen exactamente por donde se traza la linea que separa lo que administra el proveedor de lo que administra el cliente.</a:t>
             </a:r>
           </a:p>
           <a:p>
             <a:pPr>
               <a:spcAft>
-                <a:spcPts val="400"/>
+                <a:spcPts val="800"/>
               </a:spcAft>
             </a:pPr>
             <a:r>
-              <a:rPr sz="1400" b="0" i="0">
-                <a:solidFill>
-                  <a:srgbClr val="FFFFFF"/>
-                </a:solidFill>
-                <a:latin typeface="Calibri"/>
-              </a:rPr>
-              <a:t>La aplicacion de CloudLite se despliega sobre PaaS.</a:t>
-            </a:r>
-          </a:p>
-          <a:p>
-            <a:pPr>
-              <a:spcAft>
-                <a:spcPts val="400"/>
-              </a:spcAft>
-            </a:pPr>
-            <a:r>
-              <a:rPr sz="1400" b="0" i="0">
-                <a:solidFill>
-                  <a:srgbClr val="FFFFFF"/>
-                </a:solidFill>
-                <a:latin typeface="Calibri"/>
-              </a:rPr>
-              <a:t/>
-            </a:r>
-          </a:p>
-          <a:p>
-            <a:pPr>
-              <a:spcAft>
-                <a:spcPts val="400"/>
-              </a:spcAft>
-            </a:pPr>
-            <a:r>
-              <a:rPr sz="1400" b="0" i="0">
-                <a:solidFill>
-                  <a:srgbClr val="FFFFFF"/>
-                </a:solidFill>
-                <a:latin typeface="Calibri"/>
-              </a:rPr>
-              <a:t>## 5. Alternativas descartadas    &lt;- exactamente 2, con motivo del dominio</a:t>
-            </a:r>
-          </a:p>
-          <a:p>
-            <a:pPr>
-              <a:spcAft>
-                <a:spcPts val="400"/>
-              </a:spcAft>
-            </a:pPr>
-            <a:r>
-              <a:rPr sz="1400" b="0" i="0">
-                <a:solidFill>
-                  <a:srgbClr val="FFFFFF"/>
-                </a:solidFill>
-                <a:latin typeface="Calibri"/>
-              </a:rPr>
-              <a:t>- IaaS: control total, pero yo opero SO y parches -&gt; tiempo que no tengo.</a:t>
-            </a:r>
-          </a:p>
-          <a:p>
-            <a:pPr>
-              <a:spcAft>
-                <a:spcPts val="400"/>
-              </a:spcAft>
-            </a:pPr>
-            <a:r>
-              <a:rPr sz="1400" b="0" i="0">
-                <a:solidFill>
-                  <a:srgbClr val="FFFFFF"/>
-                </a:solidFill>
-                <a:latin typeface="Calibri"/>
-              </a:rPr>
-              <a:t>- SaaS como nucleo: no queda nada que arquitecturar; solo satelite (auth/email).</a:t>
-            </a:r>
-          </a:p>
-          <a:p>
-            <a:pPr>
-              <a:spcAft>
-                <a:spcPts val="400"/>
-              </a:spcAft>
-            </a:pPr>
-            <a:r>
-              <a:rPr sz="1400" b="0" i="0">
-                <a:solidFill>
-                  <a:srgbClr val="FFFFFF"/>
-                </a:solidFill>
-                <a:latin typeface="Calibri"/>
-              </a:rPr>
-              <a:t/>
-            </a:r>
-          </a:p>
-          <a:p>
-            <a:pPr>
-              <a:spcAft>
-                <a:spcPts val="400"/>
-              </a:spcAft>
-            </a:pPr>
-            <a:r>
-              <a:rPr sz="1400" b="0" i="0">
-                <a:solidFill>
-                  <a:srgbClr val="FFFFFF"/>
-                </a:solidFill>
-                <a:latin typeface="Calibri"/>
-              </a:rPr>
-              <a:t>## 6. Consecuencias               &lt;- pregunta 7: 3 ejes, cada uno con + y -</a:t>
-            </a:r>
-          </a:p>
-          <a:p>
-            <a:pPr>
-              <a:spcAft>
-                <a:spcPts val="400"/>
-              </a:spcAft>
-            </a:pPr>
-            <a:r>
-              <a:rPr sz="1400" b="0" i="0">
-                <a:solidFill>
-                  <a:srgbClr val="FFFFFF"/>
-                </a:solidFill>
-                <a:latin typeface="Calibri"/>
-              </a:rPr>
-              <a:t>Operacion + / -        Costo + / -        Aprendizaje + / -</a:t>
-            </a:r>
-          </a:p>
-        </p:txBody>
-      </p:sp>
-      <p:sp>
-        <p:nvSpPr>
-          <p:cNvPr id="9" name="TextBox 8"/>
-          <p:cNvSpPr txBox="1"/>
-          <p:nvPr/>
-        </p:nvSpPr>
-        <p:spPr>
-          <a:xfrm>
-            <a:off x="457200" y="6080760"/>
-            <a:ext cx="11277295" cy="320040"/>
-          </a:xfrm>
-          <a:prstGeom prst="rect">
-            <a:avLst/>
-          </a:prstGeom>
-          <a:noFill/>
-        </p:spPr>
-        <p:txBody>
-          <a:bodyPr wrap="square">
-            <a:spAutoFit/>
-          </a:bodyPr>
-          <a:lstStyle/>
-          <a:p>
-            <a:pPr algn="ctr"/>
-            <a:r>
-              <a:rPr sz="1200" b="0" i="1">
-                <a:solidFill>
-                  <a:srgbClr val="666666"/>
-                </a:solidFill>
-                <a:latin typeface="Calibri"/>
-              </a:rPr>
-              <a:t>Sin Titulo y Estado con fecha no hay ADR que citar en la Clase 15: son 1.5 puntos de la pregunta 6.</a:t>
-            </a:r>
-          </a:p>
-        </p:txBody>
-      </p:sp>
-      <p:sp>
-        <p:nvSpPr>
-          <p:cNvPr id="10" name="TextBox 9"/>
+              <a:rPr sz="2000" b="0" i="0">
+                <a:solidFill>
+                  <a:srgbClr val="333333"/>
+                </a:solidFill>
+                <a:latin typeface="Calibri"/>
+              </a:rPr>
+              <a:t>–   Nada mas y nada menos: si el estudiante entiende esa frase, entendio la clase.</a:t>
+            </a:r>
+          </a:p>
+        </p:txBody>
+      </p:sp>
+      <p:sp>
+        <p:nvSpPr>
+          <p:cNvPr id="6" name="TextBox 5"/>
           <p:cNvSpPr txBox="1"/>
           <p:nvPr/>
         </p:nvSpPr>

--- a/Arquitectura de Sistemas Computacionales/Clases/Clase 2 - Modelos de servicio IaaS PaaS SaaS/Presentacion.pptx
+++ b/Arquitectura de Sistemas Computacionales/Clases/Clase 2 - Modelos de servicio IaaS PaaS SaaS/Presentacion.pptx
@@ -32,6 +32,12 @@
     <p:sldId id="280" r:id="rId31"/>
     <p:sldId id="281" r:id="rId32"/>
     <p:sldId id="282" r:id="rId33"/>
+    <p:sldId id="283" r:id="rId34"/>
+    <p:sldId id="284" r:id="rId35"/>
+    <p:sldId id="285" r:id="rId36"/>
+    <p:sldId id="286" r:id="rId37"/>
+    <p:sldId id="287" r:id="rId38"/>
+    <p:sldId id="288" r:id="rId39"/>
   </p:sldIdLst>
   <p:sldSz cx="12191695" cy="6858000" type="screen4x3"/>
   <p:notesSz cx="6858000" cy="9144000"/>
@@ -3590,7 +3596,7 @@
                 </a:solidFill>
                 <a:latin typeface="Calibri"/>
               </a:rPr>
-              <a:t>IaaS, PaaS y SaaS: los tres cortes, uno por uno (1/3)</a:t>
+              <a:t>La pila de responsabilidades: donde se corta la linea (1/2)</a:t>
             </a:r>
           </a:p>
         </p:txBody>
@@ -3623,13 +3629,13 @@
               </a:spcAft>
             </a:pPr>
             <a:r>
-              <a:rPr sz="1800" b="0" i="0">
-                <a:solidFill>
-                  <a:srgbClr val="333333"/>
-                </a:solidFill>
-                <a:latin typeface="Calibri"/>
-              </a:rPr>
-              <a:t>–   IaaS, infraestructura como servicio, corta la linea justo encima de la virtualizacion: el proveedor entrega maquinas virtuales, redes y discos</a:t>
+              <a:rPr sz="2000" b="0" i="0">
+                <a:solidFill>
+                  <a:srgbClr val="333333"/>
+                </a:solidFill>
+                <a:latin typeface="Calibri"/>
+              </a:rPr>
+              <a:t>–   Para entender los tres modelos hay que ver primero la pila completa de responsabilidades que existe debajo de cualquier aplicacion</a:t>
             </a:r>
           </a:p>
           <a:p>
@@ -3639,13 +3645,13 @@
               </a:spcAft>
             </a:pPr>
             <a:r>
-              <a:rPr sz="1800" b="0" i="0">
-                <a:solidFill>
-                  <a:srgbClr val="333333"/>
-                </a:solidFill>
-                <a:latin typeface="Calibri"/>
-              </a:rPr>
-              <a:t>–   Y el cliente recibe una maquina practicamente vacia con un sistema operativo que debe actualizar, endurecer, monitorear y respaldar el mismo.</a:t>
+              <a:rPr sz="2000" b="0" i="0">
+                <a:solidFill>
+                  <a:srgbClr val="333333"/>
+                </a:solidFill>
+                <a:latin typeface="Calibri"/>
+              </a:rPr>
+              <a:t>–   De abajo hacia arriba: el edificio y la energia electrica, el hardware fisico (servidores, discos, cableado de red), la capa de virtualizacion que parte ese hardware en maquinas logicas</a:t>
             </a:r>
           </a:p>
           <a:p>
@@ -3655,77 +3661,13 @@
               </a:spcAft>
             </a:pPr>
             <a:r>
-              <a:rPr sz="1800" b="0" i="0">
-                <a:solidFill>
-                  <a:srgbClr val="333333"/>
-                </a:solidFill>
-                <a:latin typeface="Calibri"/>
-              </a:rPr>
-              <a:t>–   Lo que gana es control total, porque puede instalar cualquier version de cualquier cosa, abrir los puertos que quiera y afinar el sistema.</a:t>
-            </a:r>
-          </a:p>
-          <a:p>
-            <a:pPr>
-              <a:spcAft>
-                <a:spcPts val="800"/>
-              </a:spcAft>
-            </a:pPr>
-            <a:r>
-              <a:rPr sz="1800" b="0" i="0">
-                <a:solidFill>
-                  <a:srgbClr val="333333"/>
-                </a:solidFill>
-                <a:latin typeface="Calibri"/>
-              </a:rPr>
-              <a:t>–   Lo que paga es trabajo operativo permanente, que en la practica se mide en horas de persona por semana dedicadas a aplicar parches de seguridad, rotar certificados y vigilar el espacio en disco.</a:t>
-            </a:r>
-          </a:p>
-          <a:p>
-            <a:pPr>
-              <a:spcAft>
-                <a:spcPts val="800"/>
-              </a:spcAft>
-            </a:pPr>
-            <a:r>
-              <a:rPr sz="1800" b="0" i="0">
-                <a:solidFill>
-                  <a:srgbClr val="333333"/>
-                </a:solidFill>
-                <a:latin typeface="Calibri"/>
-              </a:rPr>
-              <a:t>–   Para CloudLite Turnos, el ejemplo de la barberia con agendamiento de citas, elegir IaaS significaria que el estudiante se compromete a administrar el sistema operativo donde corren la API y la base de datos; en un curso de doce semanas</a:t>
-            </a:r>
-          </a:p>
-          <a:p>
-            <a:pPr>
-              <a:spcAft>
-                <a:spcPts val="800"/>
-              </a:spcAft>
-            </a:pPr>
-            <a:r>
-              <a:rPr sz="1800" b="0" i="0">
-                <a:solidFill>
-                  <a:srgbClr val="333333"/>
-                </a:solidFill>
-                <a:latin typeface="Calibri"/>
-              </a:rPr>
-              <a:t>–   Y trabajando solo o con dos companeros, eso consume justamente el tiempo que deberia dedicarse a disenar la arquitectura y a sustentarla.</a:t>
-            </a:r>
-          </a:p>
-          <a:p>
-            <a:pPr>
-              <a:spcAft>
-                <a:spcPts val="800"/>
-              </a:spcAft>
-            </a:pPr>
-            <a:r>
-              <a:rPr sz="1800" b="0" i="0">
-                <a:solidFill>
-                  <a:srgbClr val="333333"/>
-                </a:solidFill>
-                <a:latin typeface="Calibri"/>
-              </a:rPr>
-              <a:t>–   PaaS, plataforma como servicio, sube la linea dos escalones: el proveedor administra tambien el sistema operativo y el runtime, y el cliente entrega su codigo mas un archivo de configuracion; la plataforma lo construye, lo empaqueta y lo pone a correr.</a:t>
+              <a:rPr sz="2000" b="0" i="0">
+                <a:solidFill>
+                  <a:srgbClr val="333333"/>
+                </a:solidFill>
+                <a:latin typeface="Calibri"/>
+              </a:rPr>
+              <a:t>–   El sistema operativo de cada maquina, el runtime o entorno de ejecucion (por ejemplo Node.js, Python o la maquina virtual de Java) junto con servicios de apoyo como la base de datos</a:t>
             </a:r>
           </a:p>
         </p:txBody>
@@ -3906,7 +3848,7 @@
                 </a:solidFill>
                 <a:latin typeface="Calibri"/>
               </a:rPr>
-              <a:t>IaaS, PaaS y SaaS: los tres cortes, uno por uno (2/3)</a:t>
+              <a:t>La pila de responsabilidades: donde se corta la linea (2/2)</a:t>
             </a:r>
           </a:p>
         </p:txBody>
@@ -3945,7 +3887,7 @@
                 </a:solidFill>
                 <a:latin typeface="Calibri"/>
               </a:rPr>
-              <a:t>–   El cliente pierde el acceso a la maquina, porque ya no hay un servidor donde entrar por consola</a:t>
+              <a:t>–   Y finalmente el codigo de la aplicacion, sus datos y la administracion de usuarios y permisos.</a:t>
             </a:r>
           </a:p>
           <a:p>
@@ -3961,7 +3903,7 @@
                 </a:solidFill>
                 <a:latin typeface="Calibri"/>
               </a:rPr>
-              <a:t>–   Y gana velocidad: un despliegue que en IaaS implica preparar una imagen, configurar el servicio y probar la red, en PaaS se reduce a subir el codigo al repositorio.</a:t>
+              <a:t>–   Son ocho o nueve capas segun como se cuente.</a:t>
             </a:r>
           </a:p>
           <a:p>
@@ -3977,7 +3919,7 @@
                 </a:solidFill>
                 <a:latin typeface="Calibri"/>
               </a:rPr>
-              <a:t>–   Los niveles gratuitos tipicos de este modelo ofrecen del orden de 512 MB de memoria por instancia, una cantidad limitada de horas de ejecucion al mes y suspension automatica del servicio tras unos 15 minutos sin trafico</a:t>
+              <a:t>–   En el modelo tradicional, llamado on-premise porque los equipos son propios y estan en las instalaciones de la organizacion, todas son responsabilidad del cliente.</a:t>
             </a:r>
           </a:p>
           <a:p>
@@ -3993,55 +3935,7 @@
                 </a:solidFill>
                 <a:latin typeface="Calibri"/>
               </a:rPr>
-              <a:t>–   Lo que produce el efecto conocido como arranque en frio: la primera peticion despues de la inactividad puede tardar varios segundos en lugar de milisegundos.</a:t>
-            </a:r>
-          </a:p>
-          <a:p>
-            <a:pPr>
-              <a:spcAft>
-                <a:spcPts val="800"/>
-              </a:spcAft>
-            </a:pPr>
-            <a:r>
-              <a:rPr sz="2000" b="0" i="0">
-                <a:solidFill>
-                  <a:srgbClr val="333333"/>
-                </a:solidFill>
-                <a:latin typeface="Calibri"/>
-              </a:rPr>
-              <a:t>–   Esos numeros son ordenes de magnitud tipicos que varian entre proveedores, no constantes; lo estructural es el patron, porque gratis siempre implica limites de memoria, de horas y de latencia en frio</a:t>
-            </a:r>
-          </a:p>
-          <a:p>
-            <a:pPr>
-              <a:spcAft>
-                <a:spcPts val="800"/>
-              </a:spcAft>
-            </a:pPr>
-            <a:r>
-              <a:rPr sz="2000" b="0" i="0">
-                <a:solidFill>
-                  <a:srgbClr val="333333"/>
-                </a:solidFill>
-                <a:latin typeface="Calibri"/>
-              </a:rPr>
-              <a:t>–   Y el estudiante debe anticiparlo en su diseno en vez de descubrirlo la noche antes de la sustentacion.</a:t>
-            </a:r>
-          </a:p>
-          <a:p>
-            <a:pPr>
-              <a:spcAft>
-                <a:spcPts val="800"/>
-              </a:spcAft>
-            </a:pPr>
-            <a:r>
-              <a:rPr sz="2000" b="0" i="0">
-                <a:solidFill>
-                  <a:srgbClr val="333333"/>
-                </a:solidFill>
-                <a:latin typeface="Calibri"/>
-              </a:rPr>
-              <a:t>–   SaaS, software como servicio, lleva la linea hasta arriba: el proveedor administra la aplicacion completa y el cliente solo la configura y la usa, sin desplegar nada.</a:t>
+              <a:t>–   Nada mas y nada menos: si el estudiante entiende esa frase, entendio la clase.</a:t>
             </a:r>
           </a:p>
         </p:txBody>
@@ -4222,7 +4116,7 @@
                 </a:solidFill>
                 <a:latin typeface="Calibri"/>
               </a:rPr>
-              <a:t>IaaS, PaaS y SaaS: los tres cortes, uno por uno (3/3)</a:t>
+              <a:t>IaaS, PaaS y SaaS: los tres cortes, uno por uno (1/4)</a:t>
             </a:r>
           </a:p>
         </p:txBody>
@@ -4261,7 +4155,7 @@
                 </a:solidFill>
                 <a:latin typeface="Calibri"/>
               </a:rPr>
-              <a:t>–   El correo corporativo, un servicio de envio de mensajes transaccionales, un proveedor de identidad que resuelve el inicio de sesion o un servicio de almacenamiento y transformacion de imagenes son SaaS desde la perspectiva de quien construye CloudLite.</a:t>
+              <a:t>–   IaaS, infraestructura como servicio, corta la linea justo encima de la virtualizacion: el proveedor entrega maquinas virtuales, redes y discos</a:t>
             </a:r>
           </a:p>
           <a:p>
@@ -4277,7 +4171,7 @@
                 </a:solidFill>
                 <a:latin typeface="Calibri"/>
               </a:rPr>
-              <a:t>–   Y aqui esta el punto que casi siempre se pierde: los tres modelos no son excluyentes y un sistema real los combina.</a:t>
+              <a:t>–   Y el cliente recibe una maquina practicamente vacia con un sistema operativo que debe actualizar, endurecer, monitorear y respaldar el mismo.</a:t>
             </a:r>
           </a:p>
           <a:p>
@@ -4293,7 +4187,7 @@
                 </a:solidFill>
                 <a:latin typeface="Calibri"/>
               </a:rPr>
-              <a:t>–   La arquitectura probable de CloudLite Turnos es hibrida: la API desplegada como PaaS, la base de datos como servicio gestionado (que es PaaS en su variante de datos)</a:t>
+              <a:t>–   PaaS, plataforma como servicio, sube la linea dos escalones: el proveedor administra tambien el sistema operativo y el runtime, y el cliente entrega su codigo mas un archivo de configuracion; la plataforma lo construye, lo empaqueta y lo pone a correr.</a:t>
             </a:r>
           </a:p>
           <a:p>
@@ -4309,23 +4203,7 @@
                 </a:solidFill>
                 <a:latin typeface="Calibri"/>
               </a:rPr>
-              <a:t>–   El envio de recordatorios delegado a un SaaS de correo y el almacenamiento de fotos de perfil a un SaaS de archivos.</a:t>
-            </a:r>
-          </a:p>
-          <a:p>
-            <a:pPr>
-              <a:spcAft>
-                <a:spcPts val="800"/>
-              </a:spcAft>
-            </a:pPr>
-            <a:r>
-              <a:rPr sz="2000" b="0" i="0">
-                <a:solidFill>
-                  <a:srgbClr val="333333"/>
-                </a:solidFill>
-                <a:latin typeface="Calibri"/>
-              </a:rPr>
-              <a:t>–   El entregable de hoy no pide elegir un modelo unico para todo el sistema; pide elegir por componente y justificar cada eleccion, que es exactamente como se decide en la industria.</a:t>
+              <a:t>–   El cliente pierde el acceso a la maquina, porque ya no hay un servidor donde entrar por consola</a:t>
             </a:r>
           </a:p>
         </p:txBody>
@@ -4506,7 +4384,7 @@
                 </a:solidFill>
                 <a:latin typeface="Calibri"/>
               </a:rPr>
-              <a:t>Responsabilidad compartida: quien responde por que (1/2)</a:t>
+              <a:t>IaaS, PaaS y SaaS: los tres cortes, uno por uno (2/4)</a:t>
             </a:r>
           </a:p>
         </p:txBody>
@@ -4545,7 +4423,7 @@
                 </a:solidFill>
                 <a:latin typeface="Calibri"/>
               </a:rPr>
-              <a:t>–   El concepto que unifica todo esto se llama modelo de responsabilidad compartida y se resume en una frase que conviene memorizar: el proveedor es responsable de la seguridad DE la nube y el cliente de la seguridad EN la nube.</a:t>
+              <a:t>–   Y gana velocidad: un despliegue que en IaaS implica preparar una imagen, configurar el servicio y probar la red, en PaaS se reduce a subir el codigo al repositorio.</a:t>
             </a:r>
           </a:p>
           <a:p>
@@ -4561,7 +4439,7 @@
                 </a:solidFill>
                 <a:latin typeface="Calibri"/>
               </a:rPr>
-              <a:t>–   El proveedor garantiza que el centro de datos no se incendie, que la capa de virtualizacion este parcheada y que los discos esten cifrados en reposo; el cliente sigue siendo responsable de sus contrasenas, sus permisos, sus datos y su configuracion.</a:t>
+              <a:t>–   Los niveles gratuitos tipicos de este modelo ofrecen del orden de 512 MB de memoria por instancia, una cantidad limitada de horas de ejecucion al mes y suspension automatica del servicio tras unos 15 minutos sin trafico</a:t>
             </a:r>
           </a:p>
           <a:p>
@@ -4577,7 +4455,7 @@
                 </a:solidFill>
                 <a:latin typeface="Calibri"/>
               </a:rPr>
-              <a:t>–   Importa porque la causa dominante de los incidentes de seguridad en la nube no son fallas del proveedor sino configuraciones erradas del cliente: un almacenamiento de archivos dejado publico</a:t>
+              <a:t>–   Lo que produce el efecto conocido como arranque en frio: la primera peticion despues de la inactividad puede tardar varios segundos en lugar de milisegundos.</a:t>
             </a:r>
           </a:p>
           <a:p>
@@ -4593,23 +4471,7 @@
                 </a:solidFill>
                 <a:latin typeface="Calibri"/>
               </a:rPr>
-              <a:t>–   Una credencial subida al repositorio en texto plano, un puerto de base de datos expuesto a internet.</a:t>
-            </a:r>
-          </a:p>
-          <a:p>
-            <a:pPr>
-              <a:spcAft>
-                <a:spcPts val="800"/>
-              </a:spcAft>
-            </a:pPr>
-            <a:r>
-              <a:rPr sz="2000" b="0" i="0">
-                <a:solidFill>
-                  <a:srgbClr val="333333"/>
-                </a:solidFill>
-                <a:latin typeface="Calibri"/>
-              </a:rPr>
-              <a:t>–   Subir de IaaS a PaaS reduce la superficie de responsabilidad del cliente, pero nunca la elimina, y esa idea es el punto de partida literal de la Clase 6.</a:t>
+              <a:t>–   Esos numeros son ordenes de magnitud tipicos que varian entre proveedores, no constantes; lo estructural es el patron, porque gratis siempre implica limites de memoria, de horas y de latencia en frio</a:t>
             </a:r>
           </a:p>
         </p:txBody>
@@ -4790,7 +4652,7 @@
                 </a:solidFill>
                 <a:latin typeface="Calibri"/>
               </a:rPr>
-              <a:t>Responsabilidad compartida: quien responde por que (2/2)</a:t>
+              <a:t>IaaS, PaaS y SaaS: los tres cortes, uno por uno (3/4)</a:t>
             </a:r>
           </a:p>
         </p:txBody>
@@ -4829,7 +4691,7 @@
                 </a:solidFill>
                 <a:latin typeface="Calibri"/>
               </a:rPr>
-              <a:t>–   De ahi sale el trade-off central, que se escribe como regla practica: a mas abstraccion, menos control y menos trabajo operativo.</a:t>
+              <a:t>–   Y el estudiante debe anticiparlo en su diseno en vez de descubrirlo la noche antes de la sustentacion.</a:t>
             </a:r>
           </a:p>
           <a:p>
@@ -4845,7 +4707,7 @@
                 </a:solidFill>
                 <a:latin typeface="Calibri"/>
               </a:rPr>
-              <a:t>–   Pero hay un tercer eje que el estudiante no ve solo, el amarre al proveedor o vendor lock-in, que es el costo de mudarse a otro proveedor mas adelante: bajo en IaaS, porque una maquina virtual con Linux se parece a cualquier otra; medio en PaaS</a:t>
+              <a:t>–   SaaS, software como servicio, lleva la linea hasta arriba: el proveedor administra la aplicacion completa y el cliente solo la configura y la usa, sin desplegar nada.</a:t>
             </a:r>
           </a:p>
           <a:p>
@@ -4861,7 +4723,7 @@
                 </a:solidFill>
                 <a:latin typeface="Calibri"/>
               </a:rPr>
-              <a:t>–   Porque el archivo de configuracion y algunos servicios son propietarios; potencialmente alto en SaaS, porque los datos y parte de la logica viven dentro de un producto ajeno.</a:t>
+              <a:t>–   El correo corporativo, un servicio de envio de mensajes transaccionales, un proveedor de identidad que resuelve el inicio de sesion o un servicio de almacenamiento y transformacion de imagenes son SaaS desde la perspectiva de quien construye CloudLite.</a:t>
             </a:r>
           </a:p>
           <a:p>
@@ -4877,7 +4739,7 @@
                 </a:solidFill>
                 <a:latin typeface="Calibri"/>
               </a:rPr>
-              <a:t>–   Para CloudLite la mitigacion no es evitar SaaS sino acotarlo: si el envio de correos se encapsula detras de una interfaz propia, por ejemplo un modulo Notificador con un solo metodo enviar, cambiar de proveedor toca un archivo y no cuarenta.</a:t>
+              <a:t>–   Y aqui esta el punto que casi siempre se pierde: los tres modelos no son excluyentes y un sistema real los combina.</a:t>
             </a:r>
           </a:p>
         </p:txBody>
@@ -5058,7 +4920,7 @@
                 </a:solidFill>
                 <a:latin typeface="Calibri"/>
               </a:rPr>
-              <a:t>El ADR-001: seis secciones rotuladas y una sola decision (1/3)</a:t>
+              <a:t>IaaS, PaaS y SaaS: los tres cortes, uno por uno (4/4)</a:t>
             </a:r>
           </a:p>
         </p:txBody>
@@ -5097,7 +4959,7 @@
                 </a:solidFill>
                 <a:latin typeface="Calibri"/>
               </a:rPr>
-              <a:t>–   El entregable concreto es el ADR-001.</a:t>
+              <a:t>–   La arquitectura probable de CloudLite Turnos es hibrida: la API desplegada como PaaS, la base de datos como servicio gestionado (que es PaaS en su variante de datos)</a:t>
             </a:r>
           </a:p>
           <a:p>
@@ -5113,7 +4975,7 @@
                 </a:solidFill>
                 <a:latin typeface="Calibri"/>
               </a:rPr>
-              <a:t>–   Un ADR (Architecture Decision Record, registro de decision arquitectonica) es un documento corto, de media pagina a una pagina, que registra UNA sola decision.</a:t>
+              <a:t>–   El envio de recordatorios delegado a un SaaS de correo y el almacenamiento de fotos de perfil a un SaaS de archivos.</a:t>
             </a:r>
           </a:p>
           <a:p>
@@ -5129,71 +4991,7 @@
                 </a:solidFill>
                 <a:latin typeface="Calibri"/>
               </a:rPr>
-              <a:t>–   En este curso tiene SEIS secciones rotuladas, siempre las mismas y en este orden, y hay que dictarlas tal cual porque son las que la actividad califica: 1) Titulo, con el numero consecutivo del ADR; 2) Estado</a:t>
-            </a:r>
-          </a:p>
-          <a:p>
-            <a:pPr>
-              <a:spcAft>
-                <a:spcPts val="800"/>
-              </a:spcAft>
-            </a:pPr>
-            <a:r>
-              <a:rPr sz="2000" b="0" i="0">
-                <a:solidFill>
-                  <a:srgbClr val="333333"/>
-                </a:solidFill>
-                <a:latin typeface="Calibri"/>
-              </a:rPr>
-              <a:t>–   Que hoy es «Aceptado» mas la fecha de la sesion; 3) Contexto, o sea las restricciones bajo las que se decide; 4) Decision, en una sola frase y con un unico modelo dominante</a:t>
-            </a:r>
-          </a:p>
-          <a:p>
-            <a:pPr>
-              <a:spcAft>
-                <a:spcPts val="800"/>
-              </a:spcAft>
-            </a:pPr>
-            <a:r>
-              <a:rPr sz="2000" b="0" i="0">
-                <a:solidFill>
-                  <a:srgbClr val="333333"/>
-                </a:solidFill>
-                <a:latin typeface="Calibri"/>
-              </a:rPr>
-              <a:t>–   5) Alternativas descartadas, exactamente dos y con el motivo atado al dominio; 6) Consecuencias, con lo bueno y lo malo que se acepta.</a:t>
-            </a:r>
-          </a:p>
-          <a:p>
-            <a:pPr>
-              <a:spcAft>
-                <a:spcPts val="800"/>
-              </a:spcAft>
-            </a:pPr>
-            <a:r>
-              <a:rPr sz="2000" b="0" i="0">
-                <a:solidFill>
-                  <a:srgbClr val="333333"/>
-                </a:solidFill>
-                <a:latin typeface="Calibri"/>
-              </a:rPr>
-              <a:t>–   El reparto en la plataforma es que las cinco primeras van en la pregunta 6 y la sexta en la pregunta 7, pero es UN solo documento</a:t>
-            </a:r>
-          </a:p>
-          <a:p>
-            <a:pPr>
-              <a:spcAft>
-                <a:spcPts val="800"/>
-              </a:spcAft>
-            </a:pPr>
-            <a:r>
-              <a:rPr sz="2000" b="0" i="0">
-                <a:solidFill>
-                  <a:srgbClr val="333333"/>
-                </a:solidFill>
-                <a:latin typeface="Calibri"/>
-              </a:rPr>
-              <a:t>–   Y conviene decirlo en voz alta porque el estudiante que lo entienda como dos ejercicios sueltos repite la decision en las consecuencias y pierde puntos.</a:t>
+              <a:t>–   El entregable de hoy no pide elegir un modelo unico para todo el sistema; pide elegir por componente y justificar cada eleccion, que es exactamente como se decide en la industria.</a:t>
             </a:r>
           </a:p>
         </p:txBody>
@@ -5374,7 +5172,7 @@
                 </a:solidFill>
                 <a:latin typeface="Calibri"/>
               </a:rPr>
-              <a:t>El ADR-001: seis secciones rotuladas y una sola decision (2/3)</a:t>
+              <a:t>Responsabilidad compartida: quien responde por que (1/2)</a:t>
             </a:r>
           </a:p>
         </p:txBody>
@@ -5413,7 +5211,7 @@
                 </a:solidFill>
                 <a:latin typeface="Calibri"/>
               </a:rPr>
-              <a:t>–   No hay seccion de «opciones consideradas»: ese analisis es la matriz de la pregunta 5, y en el ADR solo quedan las dos alternativas que se descartaron.</a:t>
+              <a:t>–   El concepto que unifica todo esto se llama modelo de responsabilidad compartida y se resume en una frase que conviene memorizar: el proveedor es responsable de la seguridad DE la nube y el cliente de la seguridad EN la nube.</a:t>
             </a:r>
           </a:p>
           <a:p>
@@ -5429,7 +5227,7 @@
                 </a:solidFill>
                 <a:latin typeface="Calibri"/>
               </a:rPr>
-              <a:t>–   La regla de una decision por documento no es burocracia: es lo que permite que meses despues alguien lea por que se eligio algo sin depender de la memoria de nadie.</a:t>
+              <a:t>–   El proveedor garantiza que el centro de datos no se incendie, que la capa de virtualizacion este parcheada y que los discos esten cifrados en reposo; el cliente sigue siendo responsable de sus contrasenas, sus permisos, sus datos y su configuracion.</a:t>
             </a:r>
           </a:p>
           <a:p>
@@ -5445,7 +5243,7 @@
                 </a:solidFill>
                 <a:latin typeface="Calibri"/>
               </a:rPr>
-              <a:t>–   Un ADR-001 aceptable para CloudLite Turnos diria en CONTEXTO: la barberia agenda por mensajeria y pierde alrededor de tres turnos diarios por doble reserva</a:t>
+              <a:t>–   Importa porque la causa dominante de los incidentes de seguridad en la nube no son fallas del proveedor sino configuraciones erradas del cliente: un almacenamiento de archivos dejado publico</a:t>
             </a:r>
           </a:p>
           <a:p>
@@ -5461,7 +5259,7 @@
                 </a:solidFill>
                 <a:latin typeface="Calibri"/>
               </a:rPr>
-              <a:t>–   El proyecto lo sostiene un desarrollador (o un equipo de dos o tres, si el docente lo autorizo) durante doce semanas, sin presupuesto ni tarjeta de credito, y el sistema tiene que estar disponible el dia de la sustentacion.</a:t>
+              <a:t>–   Una credencial subida al repositorio en texto plano, un puerto de base de datos expuesto a internet.</a:t>
             </a:r>
           </a:p>
           <a:p>
@@ -5477,39 +5275,7 @@
                 </a:solidFill>
                 <a:latin typeface="Calibri"/>
               </a:rPr>
-              <a:t>–   Eso es contexto: son restricciones, no teoria.</a:t>
-            </a:r>
-          </a:p>
-          <a:p>
-            <a:pPr>
-              <a:spcAft>
-                <a:spcPts val="800"/>
-              </a:spcAft>
-            </a:pPr>
-            <a:r>
-              <a:rPr sz="2000" b="0" i="0">
-                <a:solidFill>
-                  <a:srgbClr val="333333"/>
-                </a:solidFill>
-                <a:latin typeface="Calibri"/>
-              </a:rPr>
-              <a:t>–   «Existen tres modelos de servicio y hay que elegir uno» NO es contexto, es el apunte de clase, y esa confusion es el error dominante de la pregunta 6.</a:t>
-            </a:r>
-          </a:p>
-          <a:p>
-            <a:pPr>
-              <a:spcAft>
-                <a:spcPts val="800"/>
-              </a:spcAft>
-            </a:pPr>
-            <a:r>
-              <a:rPr sz="2000" b="0" i="0">
-                <a:solidFill>
-                  <a:srgbClr val="333333"/>
-                </a:solidFill>
-                <a:latin typeface="Calibri"/>
-              </a:rPr>
-              <a:t>–   En DECISION va una frase: la aplicacion de CloudLite Turnos se despliega sobre PaaS.</a:t>
+              <a:t>–   Subir de IaaS a PaaS reduce la superficie de responsabilidad del cliente, pero nunca la elimina, y esa idea es el punto de partida literal de la Clase 6.</a:t>
             </a:r>
           </a:p>
         </p:txBody>
@@ -5690,7 +5456,7 @@
                 </a:solidFill>
                 <a:latin typeface="Calibri"/>
               </a:rPr>
-              <a:t>El ADR-001: seis secciones rotuladas y una sola decision (3/3)</a:t>
+              <a:t>Responsabilidad compartida: quien responde por que (2/2)</a:t>
             </a:r>
           </a:p>
         </p:txBody>
@@ -5729,7 +5495,7 @@
                 </a:solidFill>
                 <a:latin typeface="Calibri"/>
               </a:rPr>
-              <a:t>–   En ALTERNATIVAS DESCARTADAS van dos y solo dos: IaaS con maquina virtual propia, descartada porque habria que asumir parches y respaldos del sistema operativo sin tiempo para ello</a:t>
+              <a:t>–   Pero hay un tercer eje que el estudiante no ve solo, el amarre al proveedor o vendor lock-in, que es el costo de mudarse a otro proveedor mas adelante: bajo en IaaS, porque una maquina virtual con Linux se parece a cualquier otra; medio en PaaS</a:t>
             </a:r>
           </a:p>
           <a:p>
@@ -5745,7 +5511,7 @@
                 </a:solidFill>
                 <a:latin typeface="Calibri"/>
               </a:rPr>
-              <a:t>–   Y SaaS de agendamiento ya existente, descartada porque el proyecto perderia su objeto, ya que no habria arquitectura que disenar sino solo configuracion.</a:t>
+              <a:t>–   Porque el archivo de configuracion y algunos servicios son propietarios; potencialmente alto en SaaS, porque los datos y parte de la logica viven dentro de un producto ajeno.</a:t>
             </a:r>
           </a:p>
           <a:p>
@@ -5761,39 +5527,7 @@
                 </a:solidFill>
                 <a:latin typeface="Calibri"/>
               </a:rPr>
-              <a:t>–   Que identidad y correo se consuman como SaaS satelite se aclara aqui y no en la decision, porque el modelo dominante se refiere a la aplicacion propia.</a:t>
-            </a:r>
-          </a:p>
-          <a:p>
-            <a:pPr>
-              <a:spcAft>
-                <a:spcPts val="800"/>
-              </a:spcAft>
-            </a:pPr>
-            <a:r>
-              <a:rPr sz="2000" b="0" i="0">
-                <a:solidFill>
-                  <a:srgbClr val="333333"/>
-                </a:solidFill>
-                <a:latin typeface="Calibri"/>
-              </a:rPr>
-              <a:t>–   Y en CONSECUENCIAS, que es la seccion que los estudiantes dejan a medias, deben aparecer tambien las malas: se acepta un arranque en frio de varios segundos tras inactividad</a:t>
-            </a:r>
-          </a:p>
-          <a:p>
-            <a:pPr>
-              <a:spcAft>
-                <a:spcPts val="800"/>
-              </a:spcAft>
-            </a:pPr>
-            <a:r>
-              <a:rPr sz="2000" b="0" i="0">
-                <a:solidFill>
-                  <a:srgbClr val="333333"/>
-                </a:solidFill>
-                <a:latin typeface="Calibri"/>
-              </a:rPr>
-              <a:t>–   Se acepta no poder afinar el sistema operativo y se acepta un amarre medio al proveedor, mitigado con contenedores.</a:t>
+              <a:t>–   Para CloudLite la mitigacion no es evitar SaaS sino acotarlo: si el envio de correos se encapsula detras de una interfaz propia, por ejemplo un modulo Notificador con un solo metodo enviar, cambiar de proveedor toca un archivo y no cuarenta.</a:t>
             </a:r>
           </a:p>
         </p:txBody>
@@ -5974,7 +5708,7 @@
                 </a:solidFill>
                 <a:latin typeface="Calibri"/>
               </a:rPr>
-              <a:t>La pila dibujada: nombres reales para IaaS, PaaS y SaaS</a:t>
+              <a:t>El ADR-001: seis secciones rotuladas y una sola decision (1/4)</a:t>
             </a:r>
           </a:p>
         </p:txBody>
@@ -6013,7 +5747,7 @@
                 </a:solidFill>
                 <a:latin typeface="Calibri"/>
               </a:rPr>
-              <a:t>–   Proyecte inmediatamente despues de fijar la plantilla del ADR: es el mismo corte de responsabilidades que se acaba de explicar en prosa, ahora dibujado y con un producto reconocible en cada columna.</a:t>
+              <a:t>–   El entregable concreto es el ADR-001.</a:t>
             </a:r>
           </a:p>
           <a:p>
@@ -6029,7 +5763,7 @@
                 </a:solidFill>
                 <a:latin typeface="Calibri"/>
               </a:rPr>
-              <a:t>–   Recorrala de abajo hacia arriba y no al reves: senale primero que las tres columnas comparten la misma base (infraestructura), y que lo unico que cambia es hasta donde sube el color amarillo.</a:t>
+              <a:t>–   Un ADR (Architecture Decision Record, registro de decision arquitectonica) es un documento corto, de media pagina a una pagina, que registra UNA sola decision.</a:t>
             </a:r>
           </a:p>
           <a:p>
@@ -6045,7 +5779,7 @@
                 </a:solidFill>
                 <a:latin typeface="Calibri"/>
               </a:rPr>
-              <a:t>–   En IaaS el estudiante ya conoce DigitalOcean o AWS EC2 de oidas aunque no tenga cuenta; en PaaS, Render, Railway o Heroku son los que de verdad va a usar en el taller de hoy y en la Clase 3</a:t>
+              <a:t>–   En este curso tiene SEIS secciones rotuladas, siempre las mismas y en este orden, y hay que dictarlas tal cual porque son las que la actividad califica: 1) Titulo, con el numero consecutivo del ADR; 2) Estado</a:t>
             </a:r>
           </a:p>
           <a:p>
@@ -6061,7 +5795,7 @@
                 </a:solidFill>
                 <a:latin typeface="Calibri"/>
               </a:rPr>
-              <a:t>–   En SaaS, Gmail o Notion le sirven para entender que «usted solo configura» no es un eufemismo, de verdad no hay nada que desplegar.</a:t>
+              <a:t>–   Que hoy es «Aceptado» mas la fecha de la sesion; 3) Contexto, o sea las restricciones bajo las que se decide; 4) Decision, en una sola frase y con un unico modelo dominante</a:t>
             </a:r>
           </a:p>
           <a:p>
@@ -6077,23 +5811,7 @@
                 </a:solidFill>
                 <a:latin typeface="Calibri"/>
               </a:rPr>
-              <a:t>–   Pregunte en voz alta, senalando la columna de PaaS: «por que la fila de Sistema operativo es celeste aqui y amarilla en IaaS?» La respuesta correcta es que el proveedor la absorbio</a:t>
-            </a:r>
-          </a:p>
-          <a:p>
-            <a:pPr>
-              <a:spcAft>
-                <a:spcPts val="800"/>
-              </a:spcAft>
-            </a:pPr>
-            <a:r>
-              <a:rPr sz="2000" b="0" i="0">
-                <a:solidFill>
-                  <a:srgbClr val="333333"/>
-                </a:solidFill>
-                <a:latin typeface="Calibri"/>
-              </a:rPr>
-              <a:t>–   No que desaparecio: es el error mas comun, creer que en PaaS el sistema operativo deja de existir en vez de que alguien mas lo administra.</a:t>
+              <a:t>–   5) Alternativas descartadas, exactamente dos y con el motivo atado al dominio; 6) Consecuencias, con lo bueno y lo malo que se acepta.</a:t>
             </a:r>
           </a:p>
         </p:txBody>
@@ -6274,7 +5992,7 @@
                 </a:solidFill>
                 <a:latin typeface="Calibri"/>
               </a:rPr>
-              <a:t>Preguntas frecuentes y cierre conceptual () (1/2)</a:t>
+              <a:t>El ADR-001: seis secciones rotuladas y una sola decision (2/4)</a:t>
             </a:r>
           </a:p>
         </p:txBody>
@@ -6313,7 +6031,7 @@
                 </a:solidFill>
                 <a:latin typeface="Calibri"/>
               </a:rPr>
-              <a:t>–   Cual de los tres modelos es el mejor: ninguno; la pregunta correcta es cual conviene para este componente, con este equipo y en este plazo, y responder que PaaS es mejor sin decir para que es la senal de que el ADR sera de relleno.</a:t>
+              <a:t>–   El reparto en la plataforma es que las cinco primeras van en la pregunta 6 y la sexta en la pregunta 7, pero es UN solo documento</a:t>
             </a:r>
           </a:p>
           <a:p>
@@ -6329,7 +6047,7 @@
                 </a:solidFill>
                 <a:latin typeface="Calibri"/>
               </a:rPr>
-              <a:t>–   Donde encaja serverless o las funciones como servicio: es una variante extrema de PaaS en la que no se administra ninguna instancia siempre encendida</a:t>
+              <a:t>–   Y conviene decirlo en voz alta porque el estudiante que lo entienda como dos ejercicios sueltos repite la decision en las consecuencias y pierde puntos.</a:t>
             </a:r>
           </a:p>
           <a:p>
@@ -6345,7 +6063,7 @@
                 </a:solidFill>
                 <a:latin typeface="Calibri"/>
               </a:rPr>
-              <a:t>–   Se paga por invocacion y el codigo debe tolerar arrancar en frio; para efectos del curso se clasifica como PaaS anotando la diferencia.</a:t>
+              <a:t>–   No hay seccion de «opciones consideradas»: ese analisis es la matriz de la pregunta 5, y en el ADR solo quedan las dos alternativas que se descartaron.</a:t>
             </a:r>
           </a:p>
           <a:p>
@@ -6361,7 +6079,7 @@
                 </a:solidFill>
                 <a:latin typeface="Calibri"/>
               </a:rPr>
-              <a:t>–   Y la mas comun: si elegimos PaaS, para que aprendemos Docker en la Clase 3 si la plataforma se encarga de todo.</a:t>
+              <a:t>–   La regla de una decision por documento no es burocracia: es lo que permite que meses despues alguien lea por que se eligio algo sin depender de la memoria de nadie.</a:t>
             </a:r>
           </a:p>
           <a:p>
@@ -6377,39 +6095,7 @@
                 </a:solidFill>
                 <a:latin typeface="Calibri"/>
               </a:rPr>
-              <a:t>–   Respuesta: porque la plataforma construye internamente una imagen de contenedor con el codigo entregado, de modo que entender contenedores es entender que hace la plataforma por debajo</a:t>
-            </a:r>
-          </a:p>
-          <a:p>
-            <a:pPr>
-              <a:spcAft>
-                <a:spcPts val="800"/>
-              </a:spcAft>
-            </a:pPr>
-            <a:r>
-              <a:rPr sz="2000" b="0" i="0">
-                <a:solidFill>
-                  <a:srgbClr val="333333"/>
-                </a:solidFill>
-                <a:latin typeface="Calibri"/>
-              </a:rPr>
-              <a:t>–   Y porque el contenedor es precisamente el artefacto que vuelve reversible la decision de hoy.</a:t>
-            </a:r>
-          </a:p>
-          <a:p>
-            <a:pPr>
-              <a:spcAft>
-                <a:spcPts val="800"/>
-              </a:spcAft>
-            </a:pPr>
-            <a:r>
-              <a:rPr sz="2000" b="0" i="0">
-                <a:solidFill>
-                  <a:srgbClr val="333333"/>
-                </a:solidFill>
-                <a:latin typeface="Calibri"/>
-              </a:rPr>
-              <a:t>–   La Clase 4 usara este mismo ADR para justificar cuantas piezas tendra el sistema, y el Parcial 1 de la Clase 5 evalua la capacidad de ubicar la linea de responsabilidad en cada modelo.</a:t>
+              <a:t>–   Un ADR-001 aceptable para CloudLite Turnos diria en CONTEXTO: la barberia agenda por mensajeria y pierde alrededor de tres turnos diarios por doble reserva</a:t>
             </a:r>
           </a:p>
         </p:txBody>
@@ -6937,7 +6623,7 @@
                 </a:solidFill>
                 <a:latin typeface="Calibri"/>
               </a:rPr>
-              <a:t>Preguntas frecuentes y cierre conceptual () (2/2)</a:t>
+              <a:t>El ADR-001: seis secciones rotuladas y una sola decision (3/4)</a:t>
             </a:r>
           </a:p>
         </p:txBody>
@@ -6976,7 +6662,7 @@
                 </a:solidFill>
                 <a:latin typeface="Calibri"/>
               </a:rPr>
-              <a:t>–   Error tipico del docente que no domina el tema: presentar IaaS, PaaS y SaaS como catalogos de marcas y no como un modelo conceptual de responsabilidad</a:t>
+              <a:t>–   El proyecto lo sostiene un desarrollador (o un equipo de dos o tres, si el docente lo autorizo) durante doce semanas, sin presupuesto ni tarjeta de credito, y el sistema tiene que estar disponible el dia de la sustentacion.</a:t>
             </a:r>
           </a:p>
           <a:p>
@@ -6992,7 +6678,7 @@
                 </a:solidFill>
                 <a:latin typeface="Calibri"/>
               </a:rPr>
-              <a:t>–   Con lo cual el estudiante memoriza nombres de productos que cambiaran en dos periodos y no aprende a preguntar quien administra que capa</a:t>
+              <a:t>–   «Existen tres modelos de servicio y hay que elegir uno» NO es contexto, es el apunte de clase, y esa confusion es el error dominante de la pregunta 6.</a:t>
             </a:r>
           </a:p>
           <a:p>
@@ -7008,7 +6694,7 @@
                 </a:solidFill>
                 <a:latin typeface="Calibri"/>
               </a:rPr>
-              <a:t>–   Aguas abajo, en la Clase 6 sera incapaz de decir de que es responsable el en materia de seguridad, y en la Clase 10 no podra explicar por que su factura hipotetica sube o baja.</a:t>
+              <a:t>–   En DECISION va una frase: la aplicacion de CloudLite Turnos se despliega sobre PaaS.</a:t>
             </a:r>
           </a:p>
           <a:p>
@@ -7024,55 +6710,7 @@
                 </a:solidFill>
                 <a:latin typeface="Calibri"/>
               </a:rPr>
-              <a:t>–   El segundo error es dejar pasar ADR sin consecuencias negativas, y como esta clase tiene encuentro sincronico no hay excusa para no corregirlo en el momento: al pasar por los grupos en el tramo de taller</a:t>
-            </a:r>
-          </a:p>
-          <a:p>
-            <a:pPr>
-              <a:spcAft>
-                <a:spcPts val="800"/>
-              </a:spcAft>
-            </a:pPr>
-            <a:r>
-              <a:rPr sz="2000" b="0" i="0">
-                <a:solidFill>
-                  <a:srgbClr val="333333"/>
-                </a:solidFill>
-                <a:latin typeface="Calibri"/>
-              </a:rPr>
-              <a:t>–   Pregunte «que perdieron al elegir eso» antes de que el documento se suba.</a:t>
-            </a:r>
-          </a:p>
-          <a:p>
-            <a:pPr>
-              <a:spcAft>
-                <a:spcPts val="800"/>
-              </a:spcAft>
-            </a:pPr>
-            <a:r>
-              <a:rPr sz="2000" b="0" i="0">
-                <a:solidFill>
-                  <a:srgbClr val="333333"/>
-                </a:solidFill>
-                <a:latin typeface="Calibri"/>
-              </a:rPr>
-              <a:t>–   Un ADR que solo lista beneficios no es una decision, es una justificacion escrita despues de los hechos</a:t>
-            </a:r>
-          </a:p>
-          <a:p>
-            <a:pPr>
-              <a:spcAft>
-                <a:spcPts val="800"/>
-              </a:spcAft>
-            </a:pPr>
-            <a:r>
-              <a:rPr sz="2000" b="0" i="0">
-                <a:solidFill>
-                  <a:srgbClr val="333333"/>
-                </a:solidFill>
-                <a:latin typeface="Calibri"/>
-              </a:rPr>
-              <a:t>–   Y quien lo entrega asi llegara a la Clase 11 sin poder explicar ningun trade-off de su arquitectura, que es justamente lo que se le exigira sustentar en la Clase 15.</a:t>
+              <a:t>–   En ALTERNATIVAS DESCARTADAS van dos y solo dos: IaaS con maquina virtual propia, descartada porque habria que asumir parches y respaldos del sistema operativo sin tiempo para ello</a:t>
             </a:r>
           </a:p>
         </p:txBody>
@@ -7147,7 +6785,7 @@
         <p:spPr>
           <a:xfrm>
             <a:off x="0" y="0"/>
-            <a:ext cx="12191695" cy="1170432"/>
+            <a:ext cx="12191695" cy="960120"/>
           </a:xfrm>
           <a:prstGeom prst="rect">
             <a:avLst/>
@@ -7189,7 +6827,7 @@
         </p:nvSpPr>
         <p:spPr>
           <a:xfrm>
-            <a:off x="0" y="1170432"/>
+            <a:off x="0" y="960120"/>
             <a:ext cx="12191695" cy="41148"/>
           </a:xfrm>
           <a:prstGeom prst="rect">
@@ -7233,7 +6871,7 @@
         <p:spPr>
           <a:xfrm>
             <a:off x="457200" y="164592"/>
-            <a:ext cx="11277295" cy="384048"/>
+            <a:ext cx="11277295" cy="502920"/>
           </a:xfrm>
           <a:prstGeom prst="rect">
             <a:avLst/>
@@ -7253,7 +6891,7 @@
                 </a:solidFill>
                 <a:latin typeface="Calibri"/>
               </a:rPr>
-              <a:t>Quién administra cada capa — IaaS vs PaaS vs SaaS</a:t>
+              <a:t>El ADR-001: seis secciones rotuladas y una sola decision (4/4)</a:t>
             </a:r>
           </a:p>
         </p:txBody>
@@ -7266,8 +6904,8 @@
         </p:nvSpPr>
         <p:spPr>
           <a:xfrm>
-            <a:off x="457200" y="566928"/>
-            <a:ext cx="11277295" cy="411480"/>
+            <a:off x="457200" y="1170432"/>
+            <a:ext cx="11277295" cy="5230368"/>
           </a:xfrm>
           <a:prstGeom prst="rect">
             <a:avLst/>
@@ -7280,906 +6918,58 @@
           </a:bodyPr>
           <a:lstStyle/>
           <a:p>
-            <a:r>
-              <a:rPr sz="1400" b="0" i="0">
-                <a:solidFill>
-                  <a:srgbClr val="B8D8EE"/>
-                </a:solidFill>
-                <a:latin typeface="Calibri"/>
-              </a:rPr>
-              <a:t>Misma aplicación, distinto reparto de responsabilidad entre usted y el proveedor</a:t>
-            </a:r>
-          </a:p>
-        </p:txBody>
-      </p:sp>
-      <p:sp>
-        <p:nvSpPr>
-          <p:cNvPr id="6" name="Rounded Rectangle 5"/>
-          <p:cNvSpPr/>
-          <p:nvPr/>
-        </p:nvSpPr>
-        <p:spPr>
-          <a:xfrm>
-            <a:off x="548640" y="1325880"/>
-            <a:ext cx="3291840" cy="685800"/>
-          </a:xfrm>
-          <a:prstGeom prst="roundRect">
-            <a:avLst>
-              <a:gd name="adj" fmla="val 12000"/>
-            </a:avLst>
-          </a:prstGeom>
-          <a:solidFill>
-            <a:srgbClr val="095292"/>
-          </a:solidFill>
-          <a:ln>
-            <a:noFill/>
-          </a:ln>
-        </p:spPr>
-        <p:style>
-          <a:lnRef idx="1">
-            <a:schemeClr val="accent1"/>
-          </a:lnRef>
-          <a:fillRef idx="3">
-            <a:schemeClr val="accent1"/>
-          </a:fillRef>
-          <a:effectRef idx="2">
-            <a:schemeClr val="accent1"/>
-          </a:effectRef>
-          <a:fontRef idx="minor">
-            <a:schemeClr val="lt1"/>
-          </a:fontRef>
-        </p:style>
-        <p:txBody>
-          <a:bodyPr rtlCol="0" anchor="ctr" wrap="square"/>
-          <a:lstStyle/>
-          <a:p>
-            <a:pPr algn="ctr"/>
-            <a:r>
-              <a:rPr sz="1200" b="1" i="0">
-                <a:solidFill>
-                  <a:srgbClr val="FFFFFF"/>
-                </a:solidFill>
-                <a:latin typeface="Calibri"/>
-              </a:rPr>
-              <a:t>IaaS
-(DigitalOcean, AWS EC2)</a:t>
-            </a:r>
-          </a:p>
-        </p:txBody>
-      </p:sp>
-      <p:sp>
-        <p:nvSpPr>
-          <p:cNvPr id="7" name="Rounded Rectangle 6"/>
-          <p:cNvSpPr/>
-          <p:nvPr/>
-        </p:nvSpPr>
-        <p:spPr>
-          <a:xfrm>
-            <a:off x="4160520" y="1325880"/>
-            <a:ext cx="3291840" cy="685800"/>
-          </a:xfrm>
-          <a:prstGeom prst="roundRect">
-            <a:avLst>
-              <a:gd name="adj" fmla="val 12000"/>
-            </a:avLst>
-          </a:prstGeom>
-          <a:solidFill>
-            <a:srgbClr val="095292"/>
-          </a:solidFill>
-          <a:ln>
-            <a:noFill/>
-          </a:ln>
-        </p:spPr>
-        <p:style>
-          <a:lnRef idx="1">
-            <a:schemeClr val="accent1"/>
-          </a:lnRef>
-          <a:fillRef idx="3">
-            <a:schemeClr val="accent1"/>
-          </a:fillRef>
-          <a:effectRef idx="2">
-            <a:schemeClr val="accent1"/>
-          </a:effectRef>
-          <a:fontRef idx="minor">
-            <a:schemeClr val="lt1"/>
-          </a:fontRef>
-        </p:style>
-        <p:txBody>
-          <a:bodyPr rtlCol="0" anchor="ctr" wrap="square"/>
-          <a:lstStyle/>
-          <a:p>
-            <a:pPr algn="ctr"/>
-            <a:r>
-              <a:rPr sz="1200" b="1" i="0">
-                <a:solidFill>
-                  <a:srgbClr val="FFFFFF"/>
-                </a:solidFill>
-                <a:latin typeface="Calibri"/>
-              </a:rPr>
-              <a:t>PaaS
-(Render, Railway, Heroku)</a:t>
-            </a:r>
-          </a:p>
-        </p:txBody>
-      </p:sp>
-      <p:sp>
-        <p:nvSpPr>
-          <p:cNvPr id="8" name="Rounded Rectangle 7"/>
-          <p:cNvSpPr/>
-          <p:nvPr/>
-        </p:nvSpPr>
-        <p:spPr>
-          <a:xfrm>
-            <a:off x="7772400" y="1325880"/>
-            <a:ext cx="3291840" cy="685800"/>
-          </a:xfrm>
-          <a:prstGeom prst="roundRect">
-            <a:avLst>
-              <a:gd name="adj" fmla="val 12000"/>
-            </a:avLst>
-          </a:prstGeom>
-          <a:solidFill>
-            <a:srgbClr val="095292"/>
-          </a:solidFill>
-          <a:ln>
-            <a:noFill/>
-          </a:ln>
-        </p:spPr>
-        <p:style>
-          <a:lnRef idx="1">
-            <a:schemeClr val="accent1"/>
-          </a:lnRef>
-          <a:fillRef idx="3">
-            <a:schemeClr val="accent1"/>
-          </a:fillRef>
-          <a:effectRef idx="2">
-            <a:schemeClr val="accent1"/>
-          </a:effectRef>
-          <a:fontRef idx="minor">
-            <a:schemeClr val="lt1"/>
-          </a:fontRef>
-        </p:style>
-        <p:txBody>
-          <a:bodyPr rtlCol="0" anchor="ctr" wrap="square"/>
-          <a:lstStyle/>
-          <a:p>
-            <a:pPr algn="ctr"/>
-            <a:r>
-              <a:rPr sz="1200" b="1" i="0">
-                <a:solidFill>
-                  <a:srgbClr val="FFFFFF"/>
-                </a:solidFill>
-                <a:latin typeface="Calibri"/>
-              </a:rPr>
-              <a:t>SaaS
-(Gmail, Notion, Slack)</a:t>
-            </a:r>
-          </a:p>
-        </p:txBody>
-      </p:sp>
-      <p:sp>
-        <p:nvSpPr>
-          <p:cNvPr id="9" name="Rounded Rectangle 8"/>
-          <p:cNvSpPr/>
-          <p:nvPr/>
-        </p:nvSpPr>
-        <p:spPr>
-          <a:xfrm>
-            <a:off x="548640" y="2103120"/>
-            <a:ext cx="3291840" cy="548640"/>
-          </a:xfrm>
-          <a:prstGeom prst="roundRect">
-            <a:avLst>
-              <a:gd name="adj" fmla="val 12000"/>
-            </a:avLst>
-          </a:prstGeom>
-          <a:solidFill>
-            <a:srgbClr val="FFD000"/>
-          </a:solidFill>
-          <a:ln>
-            <a:noFill/>
-          </a:ln>
-        </p:spPr>
-        <p:style>
-          <a:lnRef idx="1">
-            <a:schemeClr val="accent1"/>
-          </a:lnRef>
-          <a:fillRef idx="3">
-            <a:schemeClr val="accent1"/>
-          </a:fillRef>
-          <a:effectRef idx="2">
-            <a:schemeClr val="accent1"/>
-          </a:effectRef>
-          <a:fontRef idx="minor">
-            <a:schemeClr val="lt1"/>
-          </a:fontRef>
-        </p:style>
-        <p:txBody>
-          <a:bodyPr rtlCol="0" anchor="ctr" wrap="square"/>
-          <a:lstStyle/>
-          <a:p>
-            <a:pPr algn="ctr"/>
-            <a:r>
-              <a:rPr sz="1100" b="1" i="0">
-                <a:solidFill>
-                  <a:srgbClr val="095292"/>
-                </a:solidFill>
-                <a:latin typeface="Calibri"/>
-              </a:rPr>
-              <a:t>Aplicación y datos</a:t>
-            </a:r>
-          </a:p>
-        </p:txBody>
-      </p:sp>
-      <p:sp>
-        <p:nvSpPr>
-          <p:cNvPr id="10" name="Rounded Rectangle 9"/>
-          <p:cNvSpPr/>
-          <p:nvPr/>
-        </p:nvSpPr>
-        <p:spPr>
-          <a:xfrm>
-            <a:off x="548640" y="2743200"/>
-            <a:ext cx="3291840" cy="548640"/>
-          </a:xfrm>
-          <a:prstGeom prst="roundRect">
-            <a:avLst>
-              <a:gd name="adj" fmla="val 12000"/>
-            </a:avLst>
-          </a:prstGeom>
-          <a:solidFill>
-            <a:srgbClr val="FFD000"/>
-          </a:solidFill>
-          <a:ln>
-            <a:noFill/>
-          </a:ln>
-        </p:spPr>
-        <p:style>
-          <a:lnRef idx="1">
-            <a:schemeClr val="accent1"/>
-          </a:lnRef>
-          <a:fillRef idx="3">
-            <a:schemeClr val="accent1"/>
-          </a:fillRef>
-          <a:effectRef idx="2">
-            <a:schemeClr val="accent1"/>
-          </a:effectRef>
-          <a:fontRef idx="minor">
-            <a:schemeClr val="lt1"/>
-          </a:fontRef>
-        </p:style>
-        <p:txBody>
-          <a:bodyPr rtlCol="0" anchor="ctr" wrap="square"/>
-          <a:lstStyle/>
-          <a:p>
-            <a:pPr algn="ctr"/>
-            <a:r>
-              <a:rPr sz="1100" b="1" i="0">
-                <a:solidFill>
-                  <a:srgbClr val="095292"/>
-                </a:solidFill>
-                <a:latin typeface="Calibri"/>
-              </a:rPr>
-              <a:t>Runtime / middleware</a:t>
-            </a:r>
-          </a:p>
-        </p:txBody>
-      </p:sp>
-      <p:sp>
-        <p:nvSpPr>
-          <p:cNvPr id="11" name="Rounded Rectangle 10"/>
-          <p:cNvSpPr/>
-          <p:nvPr/>
-        </p:nvSpPr>
-        <p:spPr>
-          <a:xfrm>
-            <a:off x="548640" y="3383280"/>
-            <a:ext cx="3291840" cy="548640"/>
-          </a:xfrm>
-          <a:prstGeom prst="roundRect">
-            <a:avLst>
-              <a:gd name="adj" fmla="val 12000"/>
-            </a:avLst>
-          </a:prstGeom>
-          <a:solidFill>
-            <a:srgbClr val="FFD000"/>
-          </a:solidFill>
-          <a:ln>
-            <a:noFill/>
-          </a:ln>
-        </p:spPr>
-        <p:style>
-          <a:lnRef idx="1">
-            <a:schemeClr val="accent1"/>
-          </a:lnRef>
-          <a:fillRef idx="3">
-            <a:schemeClr val="accent1"/>
-          </a:fillRef>
-          <a:effectRef idx="2">
-            <a:schemeClr val="accent1"/>
-          </a:effectRef>
-          <a:fontRef idx="minor">
-            <a:schemeClr val="lt1"/>
-          </a:fontRef>
-        </p:style>
-        <p:txBody>
-          <a:bodyPr rtlCol="0" anchor="ctr" wrap="square"/>
-          <a:lstStyle/>
-          <a:p>
-            <a:pPr algn="ctr"/>
-            <a:r>
-              <a:rPr sz="1100" b="1" i="0">
-                <a:solidFill>
-                  <a:srgbClr val="095292"/>
-                </a:solidFill>
-                <a:latin typeface="Calibri"/>
-              </a:rPr>
-              <a:t>Sistema operativo</a:t>
-            </a:r>
-          </a:p>
-        </p:txBody>
-      </p:sp>
-      <p:sp>
-        <p:nvSpPr>
-          <p:cNvPr id="12" name="Rounded Rectangle 11"/>
-          <p:cNvSpPr/>
-          <p:nvPr/>
-        </p:nvSpPr>
-        <p:spPr>
-          <a:xfrm>
-            <a:off x="548640" y="4023360"/>
-            <a:ext cx="3291840" cy="548640"/>
-          </a:xfrm>
-          <a:prstGeom prst="roundRect">
-            <a:avLst>
-              <a:gd name="adj" fmla="val 12000"/>
-            </a:avLst>
-          </a:prstGeom>
-          <a:solidFill>
-            <a:srgbClr val="269CCB"/>
-          </a:solidFill>
-          <a:ln>
-            <a:noFill/>
-          </a:ln>
-        </p:spPr>
-        <p:style>
-          <a:lnRef idx="1">
-            <a:schemeClr val="accent1"/>
-          </a:lnRef>
-          <a:fillRef idx="3">
-            <a:schemeClr val="accent1"/>
-          </a:fillRef>
-          <a:effectRef idx="2">
-            <a:schemeClr val="accent1"/>
-          </a:effectRef>
-          <a:fontRef idx="minor">
-            <a:schemeClr val="lt1"/>
-          </a:fontRef>
-        </p:style>
-        <p:txBody>
-          <a:bodyPr rtlCol="0" anchor="ctr" wrap="square"/>
-          <a:lstStyle/>
-          <a:p>
-            <a:pPr algn="ctr"/>
-            <a:r>
-              <a:rPr sz="1050" b="1" i="0">
-                <a:solidFill>
-                  <a:srgbClr val="FFFFFF"/>
-                </a:solidFill>
-                <a:latin typeface="Calibri"/>
-              </a:rPr>
-              <a:t>Infraestructura
-(cómputo, red, disco)</a:t>
-            </a:r>
-          </a:p>
-        </p:txBody>
-      </p:sp>
-      <p:sp>
-        <p:nvSpPr>
-          <p:cNvPr id="13" name="Rounded Rectangle 12"/>
-          <p:cNvSpPr/>
-          <p:nvPr/>
-        </p:nvSpPr>
-        <p:spPr>
-          <a:xfrm>
-            <a:off x="4160520" y="2103120"/>
-            <a:ext cx="3291840" cy="548640"/>
-          </a:xfrm>
-          <a:prstGeom prst="roundRect">
-            <a:avLst>
-              <a:gd name="adj" fmla="val 12000"/>
-            </a:avLst>
-          </a:prstGeom>
-          <a:solidFill>
-            <a:srgbClr val="FFD000"/>
-          </a:solidFill>
-          <a:ln>
-            <a:noFill/>
-          </a:ln>
-        </p:spPr>
-        <p:style>
-          <a:lnRef idx="1">
-            <a:schemeClr val="accent1"/>
-          </a:lnRef>
-          <a:fillRef idx="3">
-            <a:schemeClr val="accent1"/>
-          </a:fillRef>
-          <a:effectRef idx="2">
-            <a:schemeClr val="accent1"/>
-          </a:effectRef>
-          <a:fontRef idx="minor">
-            <a:schemeClr val="lt1"/>
-          </a:fontRef>
-        </p:style>
-        <p:txBody>
-          <a:bodyPr rtlCol="0" anchor="ctr" wrap="square"/>
-          <a:lstStyle/>
-          <a:p>
-            <a:pPr algn="ctr"/>
-            <a:r>
-              <a:rPr sz="1100" b="1" i="0">
-                <a:solidFill>
-                  <a:srgbClr val="095292"/>
-                </a:solidFill>
-                <a:latin typeface="Calibri"/>
-              </a:rPr>
-              <a:t>Aplicación y datos</a:t>
-            </a:r>
-          </a:p>
-        </p:txBody>
-      </p:sp>
-      <p:sp>
-        <p:nvSpPr>
-          <p:cNvPr id="14" name="Rounded Rectangle 13"/>
-          <p:cNvSpPr/>
-          <p:nvPr/>
-        </p:nvSpPr>
-        <p:spPr>
-          <a:xfrm>
-            <a:off x="4160520" y="2743200"/>
-            <a:ext cx="3291840" cy="548640"/>
-          </a:xfrm>
-          <a:prstGeom prst="roundRect">
-            <a:avLst>
-              <a:gd name="adj" fmla="val 12000"/>
-            </a:avLst>
-          </a:prstGeom>
-          <a:solidFill>
-            <a:srgbClr val="269CCB"/>
-          </a:solidFill>
-          <a:ln>
-            <a:noFill/>
-          </a:ln>
-        </p:spPr>
-        <p:style>
-          <a:lnRef idx="1">
-            <a:schemeClr val="accent1"/>
-          </a:lnRef>
-          <a:fillRef idx="3">
-            <a:schemeClr val="accent1"/>
-          </a:fillRef>
-          <a:effectRef idx="2">
-            <a:schemeClr val="accent1"/>
-          </a:effectRef>
-          <a:fontRef idx="minor">
-            <a:schemeClr val="lt1"/>
-          </a:fontRef>
-        </p:style>
-        <p:txBody>
-          <a:bodyPr rtlCol="0" anchor="ctr" wrap="square"/>
-          <a:lstStyle/>
-          <a:p>
-            <a:pPr algn="ctr"/>
-            <a:r>
-              <a:rPr sz="1100" b="1" i="0">
-                <a:solidFill>
-                  <a:srgbClr val="FFFFFF"/>
-                </a:solidFill>
-                <a:latin typeface="Calibri"/>
-              </a:rPr>
-              <a:t>Runtime / middleware</a:t>
-            </a:r>
-          </a:p>
-        </p:txBody>
-      </p:sp>
-      <p:sp>
-        <p:nvSpPr>
-          <p:cNvPr id="15" name="Rounded Rectangle 14"/>
-          <p:cNvSpPr/>
-          <p:nvPr/>
-        </p:nvSpPr>
-        <p:spPr>
-          <a:xfrm>
-            <a:off x="4160520" y="3383280"/>
-            <a:ext cx="3291840" cy="548640"/>
-          </a:xfrm>
-          <a:prstGeom prst="roundRect">
-            <a:avLst>
-              <a:gd name="adj" fmla="val 12000"/>
-            </a:avLst>
-          </a:prstGeom>
-          <a:solidFill>
-            <a:srgbClr val="269CCB"/>
-          </a:solidFill>
-          <a:ln>
-            <a:noFill/>
-          </a:ln>
-        </p:spPr>
-        <p:style>
-          <a:lnRef idx="1">
-            <a:schemeClr val="accent1"/>
-          </a:lnRef>
-          <a:fillRef idx="3">
-            <a:schemeClr val="accent1"/>
-          </a:fillRef>
-          <a:effectRef idx="2">
-            <a:schemeClr val="accent1"/>
-          </a:effectRef>
-          <a:fontRef idx="minor">
-            <a:schemeClr val="lt1"/>
-          </a:fontRef>
-        </p:style>
-        <p:txBody>
-          <a:bodyPr rtlCol="0" anchor="ctr" wrap="square"/>
-          <a:lstStyle/>
-          <a:p>
-            <a:pPr algn="ctr"/>
-            <a:r>
-              <a:rPr sz="1100" b="1" i="0">
-                <a:solidFill>
-                  <a:srgbClr val="FFFFFF"/>
-                </a:solidFill>
-                <a:latin typeface="Calibri"/>
-              </a:rPr>
-              <a:t>Sistema operativo</a:t>
-            </a:r>
-          </a:p>
-        </p:txBody>
-      </p:sp>
-      <p:sp>
-        <p:nvSpPr>
-          <p:cNvPr id="16" name="Rounded Rectangle 15"/>
-          <p:cNvSpPr/>
-          <p:nvPr/>
-        </p:nvSpPr>
-        <p:spPr>
-          <a:xfrm>
-            <a:off x="4160520" y="4023360"/>
-            <a:ext cx="3291840" cy="548640"/>
-          </a:xfrm>
-          <a:prstGeom prst="roundRect">
-            <a:avLst>
-              <a:gd name="adj" fmla="val 12000"/>
-            </a:avLst>
-          </a:prstGeom>
-          <a:solidFill>
-            <a:srgbClr val="269CCB"/>
-          </a:solidFill>
-          <a:ln>
-            <a:noFill/>
-          </a:ln>
-        </p:spPr>
-        <p:style>
-          <a:lnRef idx="1">
-            <a:schemeClr val="accent1"/>
-          </a:lnRef>
-          <a:fillRef idx="3">
-            <a:schemeClr val="accent1"/>
-          </a:fillRef>
-          <a:effectRef idx="2">
-            <a:schemeClr val="accent1"/>
-          </a:effectRef>
-          <a:fontRef idx="minor">
-            <a:schemeClr val="lt1"/>
-          </a:fontRef>
-        </p:style>
-        <p:txBody>
-          <a:bodyPr rtlCol="0" anchor="ctr" wrap="square"/>
-          <a:lstStyle/>
-          <a:p>
-            <a:pPr algn="ctr"/>
-            <a:r>
-              <a:rPr sz="1050" b="1" i="0">
-                <a:solidFill>
-                  <a:srgbClr val="FFFFFF"/>
-                </a:solidFill>
-                <a:latin typeface="Calibri"/>
-              </a:rPr>
-              <a:t>Infraestructura
-(cómputo, red, disco)</a:t>
-            </a:r>
-          </a:p>
-        </p:txBody>
-      </p:sp>
-      <p:sp>
-        <p:nvSpPr>
-          <p:cNvPr id="17" name="Rounded Rectangle 16"/>
-          <p:cNvSpPr/>
-          <p:nvPr/>
-        </p:nvSpPr>
-        <p:spPr>
-          <a:xfrm>
-            <a:off x="7772400" y="2103120"/>
-            <a:ext cx="3291840" cy="548640"/>
-          </a:xfrm>
-          <a:prstGeom prst="roundRect">
-            <a:avLst>
-              <a:gd name="adj" fmla="val 12000"/>
-            </a:avLst>
-          </a:prstGeom>
-          <a:solidFill>
-            <a:srgbClr val="FFD000"/>
-          </a:solidFill>
-          <a:ln>
-            <a:noFill/>
-          </a:ln>
-        </p:spPr>
-        <p:style>
-          <a:lnRef idx="1">
-            <a:schemeClr val="accent1"/>
-          </a:lnRef>
-          <a:fillRef idx="3">
-            <a:schemeClr val="accent1"/>
-          </a:fillRef>
-          <a:effectRef idx="2">
-            <a:schemeClr val="accent1"/>
-          </a:effectRef>
-          <a:fontRef idx="minor">
-            <a:schemeClr val="lt1"/>
-          </a:fontRef>
-        </p:style>
-        <p:txBody>
-          <a:bodyPr rtlCol="0" anchor="ctr" wrap="square"/>
-          <a:lstStyle/>
-          <a:p>
-            <a:pPr algn="ctr"/>
-            <a:r>
-              <a:rPr sz="1050" b="1" i="0">
-                <a:solidFill>
-                  <a:srgbClr val="095292"/>
-                </a:solidFill>
-                <a:latin typeface="Calibri"/>
-              </a:rPr>
-              <a:t>Aplicación y datos
-(usted solo configura)</a:t>
-            </a:r>
-          </a:p>
-        </p:txBody>
-      </p:sp>
-      <p:sp>
-        <p:nvSpPr>
-          <p:cNvPr id="18" name="Rounded Rectangle 17"/>
-          <p:cNvSpPr/>
-          <p:nvPr/>
-        </p:nvSpPr>
-        <p:spPr>
-          <a:xfrm>
-            <a:off x="7772400" y="2743200"/>
-            <a:ext cx="3291840" cy="548640"/>
-          </a:xfrm>
-          <a:prstGeom prst="roundRect">
-            <a:avLst>
-              <a:gd name="adj" fmla="val 12000"/>
-            </a:avLst>
-          </a:prstGeom>
-          <a:solidFill>
-            <a:srgbClr val="269CCB"/>
-          </a:solidFill>
-          <a:ln>
-            <a:noFill/>
-          </a:ln>
-        </p:spPr>
-        <p:style>
-          <a:lnRef idx="1">
-            <a:schemeClr val="accent1"/>
-          </a:lnRef>
-          <a:fillRef idx="3">
-            <a:schemeClr val="accent1"/>
-          </a:fillRef>
-          <a:effectRef idx="2">
-            <a:schemeClr val="accent1"/>
-          </a:effectRef>
-          <a:fontRef idx="minor">
-            <a:schemeClr val="lt1"/>
-          </a:fontRef>
-        </p:style>
-        <p:txBody>
-          <a:bodyPr rtlCol="0" anchor="ctr" wrap="square"/>
-          <a:lstStyle/>
-          <a:p>
-            <a:pPr algn="ctr"/>
-            <a:r>
-              <a:rPr sz="1100" b="1" i="0">
-                <a:solidFill>
-                  <a:srgbClr val="FFFFFF"/>
-                </a:solidFill>
-                <a:latin typeface="Calibri"/>
-              </a:rPr>
-              <a:t>Runtime / middleware</a:t>
-            </a:r>
-          </a:p>
-        </p:txBody>
-      </p:sp>
-      <p:sp>
-        <p:nvSpPr>
-          <p:cNvPr id="19" name="Rounded Rectangle 18"/>
-          <p:cNvSpPr/>
-          <p:nvPr/>
-        </p:nvSpPr>
-        <p:spPr>
-          <a:xfrm>
-            <a:off x="7772400" y="3383280"/>
-            <a:ext cx="3291840" cy="548640"/>
-          </a:xfrm>
-          <a:prstGeom prst="roundRect">
-            <a:avLst>
-              <a:gd name="adj" fmla="val 12000"/>
-            </a:avLst>
-          </a:prstGeom>
-          <a:solidFill>
-            <a:srgbClr val="269CCB"/>
-          </a:solidFill>
-          <a:ln>
-            <a:noFill/>
-          </a:ln>
-        </p:spPr>
-        <p:style>
-          <a:lnRef idx="1">
-            <a:schemeClr val="accent1"/>
-          </a:lnRef>
-          <a:fillRef idx="3">
-            <a:schemeClr val="accent1"/>
-          </a:fillRef>
-          <a:effectRef idx="2">
-            <a:schemeClr val="accent1"/>
-          </a:effectRef>
-          <a:fontRef idx="minor">
-            <a:schemeClr val="lt1"/>
-          </a:fontRef>
-        </p:style>
-        <p:txBody>
-          <a:bodyPr rtlCol="0" anchor="ctr" wrap="square"/>
-          <a:lstStyle/>
-          <a:p>
-            <a:pPr algn="ctr"/>
-            <a:r>
-              <a:rPr sz="1100" b="1" i="0">
-                <a:solidFill>
-                  <a:srgbClr val="FFFFFF"/>
-                </a:solidFill>
-                <a:latin typeface="Calibri"/>
-              </a:rPr>
-              <a:t>Sistema operativo</a:t>
-            </a:r>
-          </a:p>
-        </p:txBody>
-      </p:sp>
-      <p:sp>
-        <p:nvSpPr>
-          <p:cNvPr id="20" name="Rounded Rectangle 19"/>
-          <p:cNvSpPr/>
-          <p:nvPr/>
-        </p:nvSpPr>
-        <p:spPr>
-          <a:xfrm>
-            <a:off x="7772400" y="4023360"/>
-            <a:ext cx="3291840" cy="548640"/>
-          </a:xfrm>
-          <a:prstGeom prst="roundRect">
-            <a:avLst>
-              <a:gd name="adj" fmla="val 12000"/>
-            </a:avLst>
-          </a:prstGeom>
-          <a:solidFill>
-            <a:srgbClr val="269CCB"/>
-          </a:solidFill>
-          <a:ln>
-            <a:noFill/>
-          </a:ln>
-        </p:spPr>
-        <p:style>
-          <a:lnRef idx="1">
-            <a:schemeClr val="accent1"/>
-          </a:lnRef>
-          <a:fillRef idx="3">
-            <a:schemeClr val="accent1"/>
-          </a:fillRef>
-          <a:effectRef idx="2">
-            <a:schemeClr val="accent1"/>
-          </a:effectRef>
-          <a:fontRef idx="minor">
-            <a:schemeClr val="lt1"/>
-          </a:fontRef>
-        </p:style>
-        <p:txBody>
-          <a:bodyPr rtlCol="0" anchor="ctr" wrap="square"/>
-          <a:lstStyle/>
-          <a:p>
-            <a:pPr algn="ctr"/>
-            <a:r>
-              <a:rPr sz="1050" b="1" i="0">
-                <a:solidFill>
-                  <a:srgbClr val="FFFFFF"/>
-                </a:solidFill>
-                <a:latin typeface="Calibri"/>
-              </a:rPr>
-              <a:t>Infraestructura
-(cómputo, red, disco)</a:t>
-            </a:r>
-          </a:p>
-        </p:txBody>
-      </p:sp>
-      <p:sp>
-        <p:nvSpPr>
-          <p:cNvPr id="21" name="TextBox 20"/>
-          <p:cNvSpPr txBox="1"/>
-          <p:nvPr/>
-        </p:nvSpPr>
-        <p:spPr>
-          <a:xfrm>
-            <a:off x="457200" y="5897880"/>
-            <a:ext cx="11277295" cy="320040"/>
-          </a:xfrm>
-          <a:prstGeom prst="rect">
-            <a:avLst/>
-          </a:prstGeom>
-          <a:noFill/>
-        </p:spPr>
-        <p:txBody>
-          <a:bodyPr wrap="square">
-            <a:spAutoFit/>
-          </a:bodyPr>
-          <a:lstStyle/>
-          <a:p>
-            <a:r>
-              <a:rPr sz="1050" b="0" i="1">
-                <a:solidFill>
-                  <a:srgbClr val="666666"/>
-                </a:solidFill>
-                <a:latin typeface="Calibri"/>
-              </a:rPr>
-              <a:t>Amarillo = lo administra usted · Celeste = lo administra el proveedor</a:t>
-            </a:r>
-          </a:p>
-        </p:txBody>
-      </p:sp>
-      <p:sp>
-        <p:nvSpPr>
-          <p:cNvPr id="22" name="TextBox 21"/>
-          <p:cNvSpPr txBox="1"/>
-          <p:nvPr/>
-        </p:nvSpPr>
-        <p:spPr>
-          <a:xfrm>
-            <a:off x="457200" y="6263640"/>
-            <a:ext cx="11277295" cy="411480"/>
-          </a:xfrm>
-          <a:prstGeom prst="rect">
-            <a:avLst/>
-          </a:prstGeom>
-          <a:noFill/>
-        </p:spPr>
-        <p:txBody>
-          <a:bodyPr wrap="square">
-            <a:spAutoFit/>
-          </a:bodyPr>
-          <a:lstStyle/>
-          <a:p>
-            <a:r>
-              <a:rPr sz="1100" b="0" i="1">
-                <a:solidFill>
-                  <a:srgbClr val="666666"/>
-                </a:solidFill>
-                <a:latin typeface="Calibri"/>
-              </a:rPr>
-              <a:t>Suba en la pila y sube el control, pero también lo que tiene que operar usted: parches, escalado, disponibilidad. Para el MVP de CloudLite, PaaS es el punto medio: usted solo responde por su aplicación y sus datos.</a:t>
-            </a:r>
-          </a:p>
-        </p:txBody>
-      </p:sp>
-      <p:sp>
-        <p:nvSpPr>
-          <p:cNvPr id="23" name="TextBox 22"/>
+            <a:pPr>
+              <a:spcAft>
+                <a:spcPts val="800"/>
+              </a:spcAft>
+            </a:pPr>
+            <a:r>
+              <a:rPr sz="2000" b="0" i="0">
+                <a:solidFill>
+                  <a:srgbClr val="333333"/>
+                </a:solidFill>
+                <a:latin typeface="Calibri"/>
+              </a:rPr>
+              <a:t>–   Y SaaS de agendamiento ya existente, descartada porque el proyecto perderia su objeto, ya que no habria arquitectura que disenar sino solo configuracion.</a:t>
+            </a:r>
+          </a:p>
+          <a:p>
+            <a:pPr>
+              <a:spcAft>
+                <a:spcPts val="800"/>
+              </a:spcAft>
+            </a:pPr>
+            <a:r>
+              <a:rPr sz="2000" b="0" i="0">
+                <a:solidFill>
+                  <a:srgbClr val="333333"/>
+                </a:solidFill>
+                <a:latin typeface="Calibri"/>
+              </a:rPr>
+              <a:t>–   Y en CONSECUENCIAS, que es la seccion que los estudiantes dejan a medias, deben aparecer tambien las malas: se acepta un arranque en frio de varios segundos tras inactividad</a:t>
+            </a:r>
+          </a:p>
+          <a:p>
+            <a:pPr>
+              <a:spcAft>
+                <a:spcPts val="800"/>
+              </a:spcAft>
+            </a:pPr>
+            <a:r>
+              <a:rPr sz="2000" b="0" i="0">
+                <a:solidFill>
+                  <a:srgbClr val="333333"/>
+                </a:solidFill>
+                <a:latin typeface="Calibri"/>
+              </a:rPr>
+              <a:t>–   Se acepta no poder afinar el sistema operativo y se acepta un amarre medio al proveedor, mitigado con contenedores.</a:t>
+            </a:r>
+          </a:p>
+        </p:txBody>
+      </p:sp>
+      <p:sp>
+        <p:nvSpPr>
+          <p:cNvPr id="6" name="TextBox 5"/>
           <p:cNvSpPr txBox="1"/>
           <p:nvPr/>
         </p:nvSpPr>
@@ -8353,141 +7143,21 @@
                 </a:solidFill>
                 <a:latin typeface="Calibri"/>
               </a:rPr>
-              <a:t>ADR-001 — las 6 secciones caben en una pagina</a:t>
-            </a:r>
-          </a:p>
-        </p:txBody>
-      </p:sp>
-      <p:sp>
-        <p:nvSpPr>
-          <p:cNvPr id="5" name="Rounded Rectangle 4"/>
-          <p:cNvSpPr/>
-          <p:nvPr/>
-        </p:nvSpPr>
-        <p:spPr>
-          <a:xfrm>
-            <a:off x="457200" y="1261872"/>
-            <a:ext cx="11277295" cy="4773168"/>
-          </a:xfrm>
-          <a:prstGeom prst="roundRect">
-            <a:avLst>
-              <a:gd name="adj" fmla="val 12000"/>
-            </a:avLst>
-          </a:prstGeom>
-          <a:solidFill>
-            <a:srgbClr val="1E2A38"/>
-          </a:solidFill>
-          <a:ln>
-            <a:noFill/>
-          </a:ln>
-        </p:spPr>
-        <p:style>
-          <a:lnRef idx="1">
-            <a:schemeClr val="accent1"/>
-          </a:lnRef>
-          <a:fillRef idx="3">
-            <a:schemeClr val="accent1"/>
-          </a:fillRef>
-          <a:effectRef idx="2">
-            <a:schemeClr val="accent1"/>
-          </a:effectRef>
-          <a:fontRef idx="minor">
-            <a:schemeClr val="lt1"/>
-          </a:fontRef>
-        </p:style>
-        <p:txBody>
-          <a:bodyPr rtlCol="0" anchor="ctr"/>
-          <a:lstStyle/>
-          <a:p>
-            <a:pPr algn="ctr"/>
-          </a:p>
-        </p:txBody>
-      </p:sp>
-      <p:sp>
-        <p:nvSpPr>
-          <p:cNvPr id="6" name="Rectangle 5"/>
-          <p:cNvSpPr/>
-          <p:nvPr/>
-        </p:nvSpPr>
-        <p:spPr>
-          <a:xfrm>
-            <a:off x="457200" y="1261872"/>
-            <a:ext cx="11277295" cy="320040"/>
-          </a:xfrm>
-          <a:prstGeom prst="rect">
-            <a:avLst/>
-          </a:prstGeom>
-          <a:solidFill>
-            <a:srgbClr val="095292"/>
-          </a:solidFill>
-          <a:ln>
-            <a:noFill/>
-          </a:ln>
-        </p:spPr>
-        <p:style>
-          <a:lnRef idx="1">
-            <a:schemeClr val="accent1"/>
-          </a:lnRef>
-          <a:fillRef idx="3">
-            <a:schemeClr val="accent1"/>
-          </a:fillRef>
-          <a:effectRef idx="2">
-            <a:schemeClr val="accent1"/>
-          </a:effectRef>
-          <a:fontRef idx="minor">
-            <a:schemeClr val="lt1"/>
-          </a:fontRef>
-        </p:style>
-        <p:txBody>
-          <a:bodyPr rtlCol="0" anchor="ctr"/>
-          <a:lstStyle/>
-          <a:p>
-            <a:pPr algn="ctr"/>
-          </a:p>
-        </p:txBody>
-      </p:sp>
-      <p:sp>
-        <p:nvSpPr>
-          <p:cNvPr id="7" name="TextBox 6"/>
+              <a:t>La pila dibujada: nombres reales para IaaS, PaaS y SaaS (1/2)</a:t>
+            </a:r>
+          </a:p>
+        </p:txBody>
+      </p:sp>
+      <p:sp>
+        <p:nvSpPr>
+          <p:cNvPr id="5" name="TextBox 4"/>
           <p:cNvSpPr txBox="1"/>
           <p:nvPr/>
         </p:nvSpPr>
         <p:spPr>
           <a:xfrm>
-            <a:off x="685800" y="1307592"/>
-            <a:ext cx="10820095" cy="256032"/>
-          </a:xfrm>
-          <a:prstGeom prst="rect">
-            <a:avLst/>
-          </a:prstGeom>
-          <a:noFill/>
-        </p:spPr>
-        <p:txBody>
-          <a:bodyPr wrap="square" anchor="ctr"/>
-          <a:lstStyle/>
-          <a:p>
-            <a:r>
-              <a:rPr sz="1000" b="1" i="0">
-                <a:solidFill>
-                  <a:srgbClr val="269CCB"/>
-                </a:solidFill>
-                <a:latin typeface="Calibri"/>
-              </a:rPr>
-              <a:t>● ● ●</a:t>
-            </a:r>
-          </a:p>
-        </p:txBody>
-      </p:sp>
-      <p:sp>
-        <p:nvSpPr>
-          <p:cNvPr id="8" name="TextBox 7"/>
-          <p:cNvSpPr txBox="1"/>
-          <p:nvPr/>
-        </p:nvSpPr>
-        <p:spPr>
-          <a:xfrm>
-            <a:off x="777240" y="1719072"/>
-            <a:ext cx="10637215" cy="4133087"/>
+            <a:off x="457200" y="1170432"/>
+            <a:ext cx="11277295" cy="5230368"/>
           </a:xfrm>
           <a:prstGeom prst="rect">
             <a:avLst/>
@@ -8502,283 +7172,56 @@
           <a:p>
             <a:pPr>
               <a:spcAft>
-                <a:spcPts val="400"/>
+                <a:spcPts val="800"/>
               </a:spcAft>
             </a:pPr>
             <a:r>
-              <a:rPr sz="1400" b="0" i="0">
-                <a:solidFill>
-                  <a:srgbClr val="FFFFFF"/>
-                </a:solidFill>
-                <a:latin typeface="Calibri"/>
-              </a:rPr>
-              <a:t>## 1. Titulo     ADR-001 Modelo de servicio dominante de CloudLite App</a:t>
+              <a:rPr sz="2000" b="0" i="0">
+                <a:solidFill>
+                  <a:srgbClr val="333333"/>
+                </a:solidFill>
+                <a:latin typeface="Calibri"/>
+              </a:rPr>
+              <a:t>–   Proyecte inmediatamente despues de fijar la plantilla del ADR: es el mismo corte de responsabilidades que se acaba de explicar en prosa, ahora dibujado y con un producto reconocible en cada columna.</a:t>
             </a:r>
           </a:p>
           <a:p>
             <a:pPr>
               <a:spcAft>
-                <a:spcPts val="400"/>
+                <a:spcPts val="800"/>
               </a:spcAft>
             </a:pPr>
             <a:r>
-              <a:rPr sz="1400" b="0" i="0">
-                <a:solidFill>
-                  <a:srgbClr val="FFFFFF"/>
-                </a:solidFill>
-                <a:latin typeface="Calibri"/>
-              </a:rPr>
-              <a:t>## 2. Estado     Aceptado — &lt;fecha de hoy&gt;</a:t>
+              <a:rPr sz="2000" b="0" i="0">
+                <a:solidFill>
+                  <a:srgbClr val="333333"/>
+                </a:solidFill>
+                <a:latin typeface="Calibri"/>
+              </a:rPr>
+              <a:t>–   Recorrala de abajo hacia arriba y no al reves: senale primero que las tres columnas comparten la misma base (infraestructura), y que lo unico que cambia es hasta donde sube el color amarillo.</a:t>
             </a:r>
           </a:p>
           <a:p>
             <a:pPr>
               <a:spcAft>
-                <a:spcPts val="400"/>
+                <a:spcPts val="800"/>
               </a:spcAft>
             </a:pPr>
             <a:r>
-              <a:rPr sz="1400" b="0" i="0">
-                <a:solidFill>
-                  <a:srgbClr val="FFFFFF"/>
-                </a:solidFill>
-                <a:latin typeface="Calibri"/>
-              </a:rPr>
-              <a:t/>
-            </a:r>
-          </a:p>
-          <a:p>
-            <a:pPr>
-              <a:spcAft>
-                <a:spcPts val="400"/>
-              </a:spcAft>
-            </a:pPr>
-            <a:r>
-              <a:rPr sz="1400" b="0" i="0">
-                <a:solidFill>
-                  <a:srgbClr val="FFFFFF"/>
-                </a:solidFill>
-                <a:latin typeface="Calibri"/>
-              </a:rPr>
-              <a:t>## 3. Contexto                    &lt;- restricciones, no resumen del tema</a:t>
-            </a:r>
-          </a:p>
-          <a:p>
-            <a:pPr>
-              <a:spcAft>
-                <a:spcPts val="400"/>
-              </a:spcAft>
-            </a:pPr>
-            <a:r>
-              <a:rPr sz="1400" b="0" i="0">
-                <a:solidFill>
-                  <a:srgbClr val="FFFFFF"/>
-                </a:solidFill>
-                <a:latin typeface="Calibri"/>
-              </a:rPr>
-              <a:t>Lo sostengo yo solo, 12 semanas, sin presupuesto cloud ni tarjeta; demo viva el dia de la sustentacion.</a:t>
-            </a:r>
-          </a:p>
-          <a:p>
-            <a:pPr>
-              <a:spcAft>
-                <a:spcPts val="400"/>
-              </a:spcAft>
-            </a:pPr>
-            <a:r>
-              <a:rPr sz="1400" b="0" i="0">
-                <a:solidFill>
-                  <a:srgbClr val="FFFFFF"/>
-                </a:solidFill>
-                <a:latin typeface="Calibri"/>
-              </a:rPr>
-              <a:t/>
-            </a:r>
-          </a:p>
-          <a:p>
-            <a:pPr>
-              <a:spcAft>
-                <a:spcPts val="400"/>
-              </a:spcAft>
-            </a:pPr>
-            <a:r>
-              <a:rPr sz="1400" b="0" i="0">
-                <a:solidFill>
-                  <a:srgbClr val="FFFFFF"/>
-                </a:solidFill>
-                <a:latin typeface="Calibri"/>
-              </a:rPr>
-              <a:t>## 4. Decision                    &lt;- UNA frase, UN modelo dominante</a:t>
-            </a:r>
-          </a:p>
-          <a:p>
-            <a:pPr>
-              <a:spcAft>
-                <a:spcPts val="400"/>
-              </a:spcAft>
-            </a:pPr>
-            <a:r>
-              <a:rPr sz="1400" b="0" i="0">
-                <a:solidFill>
-                  <a:srgbClr val="FFFFFF"/>
-                </a:solidFill>
-                <a:latin typeface="Calibri"/>
-              </a:rPr>
-              <a:t>La aplicacion de CloudLite se despliega sobre PaaS.</a:t>
-            </a:r>
-          </a:p>
-          <a:p>
-            <a:pPr>
-              <a:spcAft>
-                <a:spcPts val="400"/>
-              </a:spcAft>
-            </a:pPr>
-            <a:r>
-              <a:rPr sz="1400" b="0" i="0">
-                <a:solidFill>
-                  <a:srgbClr val="FFFFFF"/>
-                </a:solidFill>
-                <a:latin typeface="Calibri"/>
-              </a:rPr>
-              <a:t/>
-            </a:r>
-          </a:p>
-          <a:p>
-            <a:pPr>
-              <a:spcAft>
-                <a:spcPts val="400"/>
-              </a:spcAft>
-            </a:pPr>
-            <a:r>
-              <a:rPr sz="1400" b="0" i="0">
-                <a:solidFill>
-                  <a:srgbClr val="FFFFFF"/>
-                </a:solidFill>
-                <a:latin typeface="Calibri"/>
-              </a:rPr>
-              <a:t>## 5. Alternativas descartadas    &lt;- exactamente 2, con motivo del dominio</a:t>
-            </a:r>
-          </a:p>
-          <a:p>
-            <a:pPr>
-              <a:spcAft>
-                <a:spcPts val="400"/>
-              </a:spcAft>
-            </a:pPr>
-            <a:r>
-              <a:rPr sz="1400" b="0" i="0">
-                <a:solidFill>
-                  <a:srgbClr val="FFFFFF"/>
-                </a:solidFill>
-                <a:latin typeface="Calibri"/>
-              </a:rPr>
-              <a:t>- IaaS: control total, pero yo opero SO y parches -&gt; tiempo que no tengo.</a:t>
-            </a:r>
-          </a:p>
-          <a:p>
-            <a:pPr>
-              <a:spcAft>
-                <a:spcPts val="400"/>
-              </a:spcAft>
-            </a:pPr>
-            <a:r>
-              <a:rPr sz="1400" b="0" i="0">
-                <a:solidFill>
-                  <a:srgbClr val="FFFFFF"/>
-                </a:solidFill>
-                <a:latin typeface="Calibri"/>
-              </a:rPr>
-              <a:t>- SaaS como nucleo: no queda nada que arquitecturar; solo satelite (auth/email).</a:t>
-            </a:r>
-          </a:p>
-          <a:p>
-            <a:pPr>
-              <a:spcAft>
-                <a:spcPts val="400"/>
-              </a:spcAft>
-            </a:pPr>
-            <a:r>
-              <a:rPr sz="1400" b="0" i="0">
-                <a:solidFill>
-                  <a:srgbClr val="FFFFFF"/>
-                </a:solidFill>
-                <a:latin typeface="Calibri"/>
-              </a:rPr>
-              <a:t/>
-            </a:r>
-          </a:p>
-          <a:p>
-            <a:pPr>
-              <a:spcAft>
-                <a:spcPts val="400"/>
-              </a:spcAft>
-            </a:pPr>
-            <a:r>
-              <a:rPr sz="1400" b="0" i="0">
-                <a:solidFill>
-                  <a:srgbClr val="FFFFFF"/>
-                </a:solidFill>
-                <a:latin typeface="Calibri"/>
-              </a:rPr>
-              <a:t>## 6. Consecuencias               &lt;- pregunta 7: 3 ejes, cada uno con + y -</a:t>
-            </a:r>
-          </a:p>
-          <a:p>
-            <a:pPr>
-              <a:spcAft>
-                <a:spcPts val="400"/>
-              </a:spcAft>
-            </a:pPr>
-            <a:r>
-              <a:rPr sz="1400" b="0" i="0">
-                <a:solidFill>
-                  <a:srgbClr val="FFFFFF"/>
-                </a:solidFill>
-                <a:latin typeface="Calibri"/>
-              </a:rPr>
-              <a:t>Operacion + / -        Costo + / -        Aprendizaje + / -</a:t>
-            </a:r>
-          </a:p>
-        </p:txBody>
-      </p:sp>
-      <p:sp>
-        <p:nvSpPr>
-          <p:cNvPr id="9" name="TextBox 8"/>
-          <p:cNvSpPr txBox="1"/>
-          <p:nvPr/>
-        </p:nvSpPr>
-        <p:spPr>
-          <a:xfrm>
-            <a:off x="457200" y="6080760"/>
-            <a:ext cx="11277295" cy="320040"/>
-          </a:xfrm>
-          <a:prstGeom prst="rect">
-            <a:avLst/>
-          </a:prstGeom>
-          <a:noFill/>
-        </p:spPr>
-        <p:txBody>
-          <a:bodyPr wrap="square">
-            <a:spAutoFit/>
-          </a:bodyPr>
-          <a:lstStyle/>
-          <a:p>
-            <a:pPr algn="ctr"/>
-            <a:r>
-              <a:rPr sz="1200" b="0" i="1">
-                <a:solidFill>
-                  <a:srgbClr val="666666"/>
-                </a:solidFill>
-                <a:latin typeface="Calibri"/>
-              </a:rPr>
-              <a:t>Sin Titulo y Estado con fecha no hay ADR que citar en la Clase 15: son 1.5 puntos de la pregunta 6.</a:t>
-            </a:r>
-          </a:p>
-        </p:txBody>
-      </p:sp>
-      <p:sp>
-        <p:nvSpPr>
-          <p:cNvPr id="10" name="TextBox 9"/>
+              <a:rPr sz="2000" b="0" i="0">
+                <a:solidFill>
+                  <a:srgbClr val="333333"/>
+                </a:solidFill>
+                <a:latin typeface="Calibri"/>
+              </a:rPr>
+              <a:t>–   En IaaS el estudiante ya conoce DigitalOcean o AWS EC2 de oidas aunque no tenga cuenta; en PaaS, Render, Railway o Heroku son los que de verdad va a usar en el taller de hoy y en la Clase 3</a:t>
+            </a:r>
+          </a:p>
+        </p:txBody>
+      </p:sp>
+      <p:sp>
+        <p:nvSpPr>
+          <p:cNvPr id="6" name="TextBox 5"/>
           <p:cNvSpPr txBox="1"/>
           <p:nvPr/>
         </p:nvSpPr>
@@ -8846,7 +7289,7 @@
         <p:spPr>
           <a:xfrm>
             <a:off x="0" y="0"/>
-            <a:ext cx="12191695" cy="1170432"/>
+            <a:ext cx="12191695" cy="960120"/>
           </a:xfrm>
           <a:prstGeom prst="rect">
             <a:avLst/>
@@ -8888,7 +7331,7 @@
         </p:nvSpPr>
         <p:spPr>
           <a:xfrm>
-            <a:off x="0" y="1170432"/>
+            <a:off x="0" y="960120"/>
             <a:ext cx="12191695" cy="41148"/>
           </a:xfrm>
           <a:prstGeom prst="rect">
@@ -8932,7 +7375,7 @@
         <p:spPr>
           <a:xfrm>
             <a:off x="457200" y="164592"/>
-            <a:ext cx="11277295" cy="384048"/>
+            <a:ext cx="11277295" cy="502920"/>
           </a:xfrm>
           <a:prstGeom prst="rect">
             <a:avLst/>
@@ -8952,7 +7395,7 @@
                 </a:solidFill>
                 <a:latin typeface="Calibri"/>
               </a:rPr>
-              <a:t>Herramientas de hoy</a:t>
+              <a:t>La pila dibujada: nombres reales para IaaS, PaaS y SaaS (2/2)</a:t>
             </a:r>
           </a:p>
         </p:txBody>
@@ -8965,8 +7408,8 @@
         </p:nvSpPr>
         <p:spPr>
           <a:xfrm>
-            <a:off x="457200" y="566928"/>
-            <a:ext cx="11277295" cy="411480"/>
+            <a:off x="457200" y="1170432"/>
+            <a:ext cx="11277295" cy="5230368"/>
           </a:xfrm>
           <a:prstGeom prst="rect">
             <a:avLst/>
@@ -8979,633 +7422,58 @@
           </a:bodyPr>
           <a:lstStyle/>
           <a:p>
-            <a:r>
-              <a:rPr sz="1400" b="0" i="0">
-                <a:solidFill>
-                  <a:srgbClr val="B8D8EE"/>
-                </a:solidFill>
-                <a:latin typeface="Calibri"/>
-              </a:rPr>
-              <a:t>Gratis · navegador o free tier · sin cuenta de pago</a:t>
-            </a:r>
-          </a:p>
-        </p:txBody>
-      </p:sp>
-      <p:sp>
-        <p:nvSpPr>
-          <p:cNvPr id="6" name="Rounded Rectangle 5"/>
-          <p:cNvSpPr/>
-          <p:nvPr/>
-        </p:nvSpPr>
-        <p:spPr>
-          <a:xfrm>
-            <a:off x="457200" y="1591056"/>
-            <a:ext cx="3624986" cy="2331720"/>
-          </a:xfrm>
-          <a:prstGeom prst="roundRect">
-            <a:avLst>
-              <a:gd name="adj" fmla="val 12000"/>
-            </a:avLst>
-          </a:prstGeom>
-          <a:solidFill>
-            <a:srgbClr val="F2F2F2"/>
-          </a:solidFill>
-          <a:ln>
-            <a:noFill/>
-          </a:ln>
-        </p:spPr>
-        <p:style>
-          <a:lnRef idx="1">
-            <a:schemeClr val="accent1"/>
-          </a:lnRef>
-          <a:fillRef idx="3">
-            <a:schemeClr val="accent1"/>
-          </a:fillRef>
-          <a:effectRef idx="2">
-            <a:schemeClr val="accent1"/>
-          </a:effectRef>
-          <a:fontRef idx="minor">
-            <a:schemeClr val="lt1"/>
-          </a:fontRef>
-        </p:style>
-        <p:txBody>
-          <a:bodyPr rtlCol="0" anchor="ctr"/>
-          <a:lstStyle/>
-          <a:p>
-            <a:pPr algn="ctr"/>
-          </a:p>
-        </p:txBody>
-      </p:sp>
-      <p:sp>
-        <p:nvSpPr>
-          <p:cNvPr id="7" name="Rectangle 6"/>
-          <p:cNvSpPr/>
-          <p:nvPr/>
-        </p:nvSpPr>
-        <p:spPr>
-          <a:xfrm>
-            <a:off x="457200" y="1591056"/>
-            <a:ext cx="3624986" cy="64008"/>
-          </a:xfrm>
-          <a:prstGeom prst="rect">
-            <a:avLst/>
-          </a:prstGeom>
-          <a:solidFill>
-            <a:srgbClr val="095292"/>
-          </a:solidFill>
-          <a:ln>
-            <a:noFill/>
-          </a:ln>
-        </p:spPr>
-        <p:style>
-          <a:lnRef idx="1">
-            <a:schemeClr val="accent1"/>
-          </a:lnRef>
-          <a:fillRef idx="3">
-            <a:schemeClr val="accent1"/>
-          </a:fillRef>
-          <a:effectRef idx="2">
-            <a:schemeClr val="accent1"/>
-          </a:effectRef>
-          <a:fontRef idx="minor">
-            <a:schemeClr val="lt1"/>
-          </a:fontRef>
-        </p:style>
-        <p:txBody>
-          <a:bodyPr rtlCol="0" anchor="ctr"/>
-          <a:lstStyle/>
-          <a:p>
-            <a:pPr algn="ctr"/>
-          </a:p>
-        </p:txBody>
-      </p:sp>
-      <p:sp>
-        <p:nvSpPr>
-          <p:cNvPr id="8" name="Rectangle 7"/>
-          <p:cNvSpPr/>
-          <p:nvPr/>
-        </p:nvSpPr>
-        <p:spPr>
-          <a:xfrm>
-            <a:off x="457200" y="1655064"/>
-            <a:ext cx="3624986" cy="27432"/>
-          </a:xfrm>
-          <a:prstGeom prst="rect">
-            <a:avLst/>
-          </a:prstGeom>
-          <a:solidFill>
-            <a:srgbClr val="FFD000"/>
-          </a:solidFill>
-          <a:ln>
-            <a:noFill/>
-          </a:ln>
-        </p:spPr>
-        <p:style>
-          <a:lnRef idx="1">
-            <a:schemeClr val="accent1"/>
-          </a:lnRef>
-          <a:fillRef idx="3">
-            <a:schemeClr val="accent1"/>
-          </a:fillRef>
-          <a:effectRef idx="2">
-            <a:schemeClr val="accent1"/>
-          </a:effectRef>
-          <a:fontRef idx="minor">
-            <a:schemeClr val="lt1"/>
-          </a:fontRef>
-        </p:style>
-        <p:txBody>
-          <a:bodyPr rtlCol="0" anchor="ctr"/>
-          <a:lstStyle/>
-          <a:p>
-            <a:pPr algn="ctr"/>
-          </a:p>
-        </p:txBody>
-      </p:sp>
-      <p:pic>
-        <p:nvPicPr>
-          <p:cNvPr id="9" name="Picture 8" descr="google_docs.png"/>
-          <p:cNvPicPr>
-            <a:picLocks noChangeAspect="1"/>
-          </p:cNvPicPr>
-          <p:nvPr/>
-        </p:nvPicPr>
-        <p:blipFill>
-          <a:blip r:embed="rId2"/>
-          <a:stretch>
-            <a:fillRect/>
-          </a:stretch>
-        </p:blipFill>
-        <p:spPr>
-          <a:xfrm>
-            <a:off x="1643329" y="1847087"/>
-            <a:ext cx="1252728" cy="1252728"/>
-          </a:xfrm>
-          <a:prstGeom prst="rect">
-            <a:avLst/>
-          </a:prstGeom>
-        </p:spPr>
-      </p:pic>
-      <p:sp>
-        <p:nvSpPr>
-          <p:cNvPr id="10" name="TextBox 9"/>
-          <p:cNvSpPr txBox="1"/>
-          <p:nvPr/>
-        </p:nvSpPr>
-        <p:spPr>
-          <a:xfrm>
-            <a:off x="530352" y="3191256"/>
-            <a:ext cx="3478682" cy="621792"/>
-          </a:xfrm>
-          <a:prstGeom prst="rect">
-            <a:avLst/>
-          </a:prstGeom>
-          <a:noFill/>
-        </p:spPr>
-        <p:txBody>
-          <a:bodyPr wrap="square" anchor="t"/>
-          <a:lstStyle/>
-          <a:p>
-            <a:pPr algn="ctr"/>
-            <a:r>
-              <a:rPr sz="1300" b="1" i="0">
-                <a:solidFill>
-                  <a:srgbClr val="095292"/>
-                </a:solidFill>
-                <a:latin typeface="Calibri"/>
-              </a:rPr>
-              <a:t>Google Docs</a:t>
-            </a:r>
-          </a:p>
-          <a:p>
-            <a:pPr algn="ctr">
-              <a:spcBef>
-                <a:spcPts val="200"/>
-              </a:spcBef>
+            <a:pPr>
+              <a:spcAft>
+                <a:spcPts val="800"/>
+              </a:spcAft>
             </a:pPr>
             <a:r>
-              <a:rPr sz="1000" b="0" i="0">
-                <a:solidFill>
-                  <a:srgbClr val="666666"/>
-                </a:solidFill>
-                <a:latin typeface="Calibri"/>
-              </a:rPr>
-              <a:t>ADR-001</a:t>
-            </a:r>
-          </a:p>
-        </p:txBody>
-      </p:sp>
-      <p:sp>
-        <p:nvSpPr>
-          <p:cNvPr id="11" name="Rounded Rectangle 10"/>
-          <p:cNvSpPr/>
-          <p:nvPr/>
-        </p:nvSpPr>
-        <p:spPr>
-          <a:xfrm>
-            <a:off x="4283354" y="1591056"/>
-            <a:ext cx="3624986" cy="2331720"/>
-          </a:xfrm>
-          <a:prstGeom prst="roundRect">
-            <a:avLst>
-              <a:gd name="adj" fmla="val 12000"/>
-            </a:avLst>
-          </a:prstGeom>
-          <a:solidFill>
-            <a:srgbClr val="F2F2F2"/>
-          </a:solidFill>
-          <a:ln>
-            <a:noFill/>
-          </a:ln>
-        </p:spPr>
-        <p:style>
-          <a:lnRef idx="1">
-            <a:schemeClr val="accent1"/>
-          </a:lnRef>
-          <a:fillRef idx="3">
-            <a:schemeClr val="accent1"/>
-          </a:fillRef>
-          <a:effectRef idx="2">
-            <a:schemeClr val="accent1"/>
-          </a:effectRef>
-          <a:fontRef idx="minor">
-            <a:schemeClr val="lt1"/>
-          </a:fontRef>
-        </p:style>
-        <p:txBody>
-          <a:bodyPr rtlCol="0" anchor="ctr"/>
-          <a:lstStyle/>
-          <a:p>
-            <a:pPr algn="ctr"/>
-          </a:p>
-        </p:txBody>
-      </p:sp>
-      <p:sp>
-        <p:nvSpPr>
-          <p:cNvPr id="12" name="Rectangle 11"/>
-          <p:cNvSpPr/>
-          <p:nvPr/>
-        </p:nvSpPr>
-        <p:spPr>
-          <a:xfrm>
-            <a:off x="4283354" y="1591056"/>
-            <a:ext cx="3624986" cy="64008"/>
-          </a:xfrm>
-          <a:prstGeom prst="rect">
-            <a:avLst/>
-          </a:prstGeom>
-          <a:solidFill>
-            <a:srgbClr val="095292"/>
-          </a:solidFill>
-          <a:ln>
-            <a:noFill/>
-          </a:ln>
-        </p:spPr>
-        <p:style>
-          <a:lnRef idx="1">
-            <a:schemeClr val="accent1"/>
-          </a:lnRef>
-          <a:fillRef idx="3">
-            <a:schemeClr val="accent1"/>
-          </a:fillRef>
-          <a:effectRef idx="2">
-            <a:schemeClr val="accent1"/>
-          </a:effectRef>
-          <a:fontRef idx="minor">
-            <a:schemeClr val="lt1"/>
-          </a:fontRef>
-        </p:style>
-        <p:txBody>
-          <a:bodyPr rtlCol="0" anchor="ctr"/>
-          <a:lstStyle/>
-          <a:p>
-            <a:pPr algn="ctr"/>
-          </a:p>
-        </p:txBody>
-      </p:sp>
-      <p:sp>
-        <p:nvSpPr>
-          <p:cNvPr id="13" name="Rectangle 12"/>
-          <p:cNvSpPr/>
-          <p:nvPr/>
-        </p:nvSpPr>
-        <p:spPr>
-          <a:xfrm>
-            <a:off x="4283354" y="1655064"/>
-            <a:ext cx="3624986" cy="27432"/>
-          </a:xfrm>
-          <a:prstGeom prst="rect">
-            <a:avLst/>
-          </a:prstGeom>
-          <a:solidFill>
-            <a:srgbClr val="FFD000"/>
-          </a:solidFill>
-          <a:ln>
-            <a:noFill/>
-          </a:ln>
-        </p:spPr>
-        <p:style>
-          <a:lnRef idx="1">
-            <a:schemeClr val="accent1"/>
-          </a:lnRef>
-          <a:fillRef idx="3">
-            <a:schemeClr val="accent1"/>
-          </a:fillRef>
-          <a:effectRef idx="2">
-            <a:schemeClr val="accent1"/>
-          </a:effectRef>
-          <a:fontRef idx="minor">
-            <a:schemeClr val="lt1"/>
-          </a:fontRef>
-        </p:style>
-        <p:txBody>
-          <a:bodyPr rtlCol="0" anchor="ctr"/>
-          <a:lstStyle/>
-          <a:p>
-            <a:pPr algn="ctr"/>
-          </a:p>
-        </p:txBody>
-      </p:sp>
-      <p:pic>
-        <p:nvPicPr>
-          <p:cNvPr id="14" name="Picture 13" descr="drawio.png"/>
-          <p:cNvPicPr>
-            <a:picLocks noChangeAspect="1"/>
-          </p:cNvPicPr>
-          <p:nvPr/>
-        </p:nvPicPr>
-        <p:blipFill>
-          <a:blip r:embed="rId3"/>
-          <a:stretch>
-            <a:fillRect/>
-          </a:stretch>
-        </p:blipFill>
-        <p:spPr>
-          <a:xfrm>
-            <a:off x="5469483" y="1847087"/>
-            <a:ext cx="1252728" cy="1252728"/>
-          </a:xfrm>
-          <a:prstGeom prst="rect">
-            <a:avLst/>
-          </a:prstGeom>
-        </p:spPr>
-      </p:pic>
-      <p:sp>
-        <p:nvSpPr>
-          <p:cNvPr id="15" name="TextBox 14"/>
-          <p:cNvSpPr txBox="1"/>
-          <p:nvPr/>
-        </p:nvSpPr>
-        <p:spPr>
-          <a:xfrm>
-            <a:off x="4356506" y="3191256"/>
-            <a:ext cx="3478682" cy="621792"/>
-          </a:xfrm>
-          <a:prstGeom prst="rect">
-            <a:avLst/>
-          </a:prstGeom>
-          <a:noFill/>
-        </p:spPr>
-        <p:txBody>
-          <a:bodyPr wrap="square" anchor="t"/>
-          <a:lstStyle/>
-          <a:p>
-            <a:pPr algn="ctr"/>
-            <a:r>
-              <a:rPr sz="1300" b="1" i="0">
-                <a:solidFill>
-                  <a:srgbClr val="095292"/>
-                </a:solidFill>
-                <a:latin typeface="Calibri"/>
-              </a:rPr>
-              <a:t>draw.io</a:t>
-            </a:r>
-          </a:p>
-          <a:p>
-            <a:pPr algn="ctr">
-              <a:spcBef>
-                <a:spcPts val="200"/>
-              </a:spcBef>
+              <a:rPr sz="2000" b="0" i="0">
+                <a:solidFill>
+                  <a:srgbClr val="333333"/>
+                </a:solidFill>
+                <a:latin typeface="Calibri"/>
+              </a:rPr>
+              <a:t>–   En SaaS, Gmail o Notion le sirven para entender que «usted solo configura» no es un eufemismo, de verdad no hay nada que desplegar.</a:t>
+            </a:r>
+          </a:p>
+          <a:p>
+            <a:pPr>
+              <a:spcAft>
+                <a:spcPts val="800"/>
+              </a:spcAft>
             </a:pPr>
             <a:r>
-              <a:rPr sz="1000" b="0" i="0">
-                <a:solidFill>
-                  <a:srgbClr val="666666"/>
-                </a:solidFill>
-                <a:latin typeface="Calibri"/>
-              </a:rPr>
-              <a:t>Matriz de modelos</a:t>
-            </a:r>
-          </a:p>
-        </p:txBody>
-      </p:sp>
-      <p:sp>
-        <p:nvSpPr>
-          <p:cNvPr id="16" name="Rounded Rectangle 15"/>
-          <p:cNvSpPr/>
-          <p:nvPr/>
-        </p:nvSpPr>
-        <p:spPr>
-          <a:xfrm>
-            <a:off x="8109508" y="1591056"/>
-            <a:ext cx="3624986" cy="2331720"/>
-          </a:xfrm>
-          <a:prstGeom prst="roundRect">
-            <a:avLst>
-              <a:gd name="adj" fmla="val 12000"/>
-            </a:avLst>
-          </a:prstGeom>
-          <a:solidFill>
-            <a:srgbClr val="F2F2F2"/>
-          </a:solidFill>
-          <a:ln>
-            <a:noFill/>
-          </a:ln>
-        </p:spPr>
-        <p:style>
-          <a:lnRef idx="1">
-            <a:schemeClr val="accent1"/>
-          </a:lnRef>
-          <a:fillRef idx="3">
-            <a:schemeClr val="accent1"/>
-          </a:fillRef>
-          <a:effectRef idx="2">
-            <a:schemeClr val="accent1"/>
-          </a:effectRef>
-          <a:fontRef idx="minor">
-            <a:schemeClr val="lt1"/>
-          </a:fontRef>
-        </p:style>
-        <p:txBody>
-          <a:bodyPr rtlCol="0" anchor="ctr"/>
-          <a:lstStyle/>
-          <a:p>
-            <a:pPr algn="ctr"/>
-          </a:p>
-        </p:txBody>
-      </p:sp>
-      <p:sp>
-        <p:nvSpPr>
-          <p:cNvPr id="17" name="Rectangle 16"/>
-          <p:cNvSpPr/>
-          <p:nvPr/>
-        </p:nvSpPr>
-        <p:spPr>
-          <a:xfrm>
-            <a:off x="8109508" y="1591056"/>
-            <a:ext cx="3624986" cy="64008"/>
-          </a:xfrm>
-          <a:prstGeom prst="rect">
-            <a:avLst/>
-          </a:prstGeom>
-          <a:solidFill>
-            <a:srgbClr val="095292"/>
-          </a:solidFill>
-          <a:ln>
-            <a:noFill/>
-          </a:ln>
-        </p:spPr>
-        <p:style>
-          <a:lnRef idx="1">
-            <a:schemeClr val="accent1"/>
-          </a:lnRef>
-          <a:fillRef idx="3">
-            <a:schemeClr val="accent1"/>
-          </a:fillRef>
-          <a:effectRef idx="2">
-            <a:schemeClr val="accent1"/>
-          </a:effectRef>
-          <a:fontRef idx="minor">
-            <a:schemeClr val="lt1"/>
-          </a:fontRef>
-        </p:style>
-        <p:txBody>
-          <a:bodyPr rtlCol="0" anchor="ctr"/>
-          <a:lstStyle/>
-          <a:p>
-            <a:pPr algn="ctr"/>
-          </a:p>
-        </p:txBody>
-      </p:sp>
-      <p:sp>
-        <p:nvSpPr>
-          <p:cNvPr id="18" name="Rectangle 17"/>
-          <p:cNvSpPr/>
-          <p:nvPr/>
-        </p:nvSpPr>
-        <p:spPr>
-          <a:xfrm>
-            <a:off x="8109508" y="1655064"/>
-            <a:ext cx="3624986" cy="27432"/>
-          </a:xfrm>
-          <a:prstGeom prst="rect">
-            <a:avLst/>
-          </a:prstGeom>
-          <a:solidFill>
-            <a:srgbClr val="FFD000"/>
-          </a:solidFill>
-          <a:ln>
-            <a:noFill/>
-          </a:ln>
-        </p:spPr>
-        <p:style>
-          <a:lnRef idx="1">
-            <a:schemeClr val="accent1"/>
-          </a:lnRef>
-          <a:fillRef idx="3">
-            <a:schemeClr val="accent1"/>
-          </a:fillRef>
-          <a:effectRef idx="2">
-            <a:schemeClr val="accent1"/>
-          </a:effectRef>
-          <a:fontRef idx="minor">
-            <a:schemeClr val="lt1"/>
-          </a:fontRef>
-        </p:style>
-        <p:txBody>
-          <a:bodyPr rtlCol="0" anchor="ctr"/>
-          <a:lstStyle/>
-          <a:p>
-            <a:pPr algn="ctr"/>
-          </a:p>
-        </p:txBody>
-      </p:sp>
-      <p:pic>
-        <p:nvPicPr>
-          <p:cNvPr id="19" name="Picture 18" descr="examlab.png"/>
-          <p:cNvPicPr>
-            <a:picLocks noChangeAspect="1"/>
-          </p:cNvPicPr>
-          <p:nvPr/>
-        </p:nvPicPr>
-        <p:blipFill>
-          <a:blip r:embed="rId4"/>
-          <a:stretch>
-            <a:fillRect/>
-          </a:stretch>
-        </p:blipFill>
-        <p:spPr>
-          <a:xfrm>
-            <a:off x="9295638" y="1847087"/>
-            <a:ext cx="1252728" cy="1252728"/>
-          </a:xfrm>
-          <a:prstGeom prst="rect">
-            <a:avLst/>
-          </a:prstGeom>
-        </p:spPr>
-      </p:pic>
-      <p:sp>
-        <p:nvSpPr>
-          <p:cNvPr id="20" name="TextBox 19"/>
-          <p:cNvSpPr txBox="1"/>
-          <p:nvPr/>
-        </p:nvSpPr>
-        <p:spPr>
-          <a:xfrm>
-            <a:off x="8182660" y="3191256"/>
-            <a:ext cx="3478682" cy="621792"/>
-          </a:xfrm>
-          <a:prstGeom prst="rect">
-            <a:avLst/>
-          </a:prstGeom>
-          <a:noFill/>
-        </p:spPr>
-        <p:txBody>
-          <a:bodyPr wrap="square" anchor="t"/>
-          <a:lstStyle/>
-          <a:p>
-            <a:pPr algn="ctr"/>
-            <a:r>
-              <a:rPr sz="1300" b="1" i="0">
-                <a:solidFill>
-                  <a:srgbClr val="095292"/>
-                </a:solidFill>
-                <a:latin typeface="Calibri"/>
-              </a:rPr>
-              <a:t>la plataforma del curso</a:t>
-            </a:r>
-          </a:p>
-          <a:p>
-            <a:pPr algn="ctr">
-              <a:spcBef>
-                <a:spcPts val="200"/>
-              </a:spcBef>
+              <a:rPr sz="2000" b="0" i="0">
+                <a:solidFill>
+                  <a:srgbClr val="333333"/>
+                </a:solidFill>
+                <a:latin typeface="Calibri"/>
+              </a:rPr>
+              <a:t>–   Pregunte en voz alta, senalando la columna de PaaS: «por que la fila de Sistema operativo es celeste aqui y amarilla en IaaS?» La respuesta correcta es que el proveedor la absorbio</a:t>
+            </a:r>
+          </a:p>
+          <a:p>
+            <a:pPr>
+              <a:spcAft>
+                <a:spcPts val="800"/>
+              </a:spcAft>
             </a:pPr>
             <a:r>
-              <a:rPr sz="1000" b="0" i="0">
-                <a:solidFill>
-                  <a:srgbClr val="666666"/>
-                </a:solidFill>
-                <a:latin typeface="Calibri"/>
-              </a:rPr>
-              <a:t>Donde se entrega</a:t>
-            </a:r>
-          </a:p>
-        </p:txBody>
-      </p:sp>
-      <p:sp>
-        <p:nvSpPr>
-          <p:cNvPr id="21" name="TextBox 20"/>
+              <a:rPr sz="2000" b="0" i="0">
+                <a:solidFill>
+                  <a:srgbClr val="333333"/>
+                </a:solidFill>
+                <a:latin typeface="Calibri"/>
+              </a:rPr>
+              <a:t>–   No que desaparecio: es el error mas comun, creer que en PaaS el sistema operativo deja de existir en vez de que alguien mas lo administra.</a:t>
+            </a:r>
+          </a:p>
+        </p:txBody>
+      </p:sp>
+      <p:sp>
+        <p:nvSpPr>
+          <p:cNvPr id="6" name="TextBox 5"/>
           <p:cNvSpPr txBox="1"/>
           <p:nvPr/>
         </p:nvSpPr>
@@ -9779,7 +7647,7 @@
                 </a:solidFill>
                 <a:latin typeface="Calibri"/>
               </a:rPr>
-              <a:t>PI CloudLite — entregable de hoy</a:t>
+              <a:t>Preguntas frecuentes y cierre conceptual () (1/3)</a:t>
             </a:r>
           </a:p>
         </p:txBody>
@@ -9818,25 +7686,7 @@
                 </a:solidFill>
                 <a:latin typeface="Calibri"/>
               </a:rPr>
-              <a:t>–   </a:t>
-            </a:r>
-            <a:r>
-              <a:rPr sz="2000" b="1" i="0">
-                <a:solidFill>
-                  <a:srgbClr val="333333"/>
-                </a:solidFill>
-                <a:latin typeface="Calibri"/>
-              </a:rPr>
-              <a:t>Entregable:</a:t>
-            </a:r>
-            <a:r>
-              <a:rPr sz="2000" b="0" i="0">
-                <a:solidFill>
-                  <a:srgbClr val="333333"/>
-                </a:solidFill>
-                <a:latin typeface="Calibri"/>
-              </a:rPr>
-              <a:t> ADR-001: decisión de modelo de servicio + matriz de comparación aplicada al dominio</a:t>
+              <a:t>–   Cual de los tres modelos es el mejor: ninguno; la pregunta correcta es cual conviene para este componente, con este equipo y en este plazo, y responder que PaaS es mejor sin decir para que es la senal de que el ADR sera de relleno.</a:t>
             </a:r>
           </a:p>
           <a:p>
@@ -9852,16 +7702,7 @@
                 </a:solidFill>
                 <a:latin typeface="Calibri"/>
               </a:rPr>
-              <a:t>–   Herramienta: </a:t>
-            </a:r>
-            <a:r>
-              <a:rPr sz="2000" b="1" i="0">
-                <a:solidFill>
-                  <a:srgbClr val="333333"/>
-                </a:solidFill>
-                <a:latin typeface="Calibri"/>
-              </a:rPr>
-              <a:t>Google Docs · draw.io (opcional)</a:t>
+              <a:t>–   Donde encaja serverless o las funciones como servicio: es una variante extrema de PaaS en la que no se administra ninguna instancia siempre encendida</a:t>
             </a:r>
           </a:p>
           <a:p>
@@ -9877,25 +7718,7 @@
                 </a:solidFill>
                 <a:latin typeface="Calibri"/>
               </a:rPr>
-              <a:t>–   Todo lo que construyan hoy entra al </a:t>
-            </a:r>
-            <a:r>
-              <a:rPr sz="2000" b="1" i="0">
-                <a:solidFill>
-                  <a:srgbClr val="333333"/>
-                </a:solidFill>
-                <a:latin typeface="Calibri"/>
-              </a:rPr>
-              <a:t>informe/repo del PI</a:t>
-            </a:r>
-            <a:r>
-              <a:rPr sz="2000" b="0" i="0">
-                <a:solidFill>
-                  <a:srgbClr val="333333"/>
-                </a:solidFill>
-                <a:latin typeface="Calibri"/>
-              </a:rPr>
-              <a:t> (no es lab suelto).</a:t>
+              <a:t>–   Se paga por invocacion y el codigo debe tolerar arrancar en frio; para efectos del curso se clasifica como PaaS anotando la diferencia.</a:t>
             </a:r>
           </a:p>
           <a:p>
@@ -9911,7 +7734,23 @@
                 </a:solidFill>
                 <a:latin typeface="Calibri"/>
               </a:rPr>
-              <a:t>–   Individual por defecto · el docente puede autorizar equipos de 2–3; la entrega en la plataforma del curso siempre es individual.</a:t>
+              <a:t>–   Y la mas comun: si elegimos PaaS, para que aprendemos Docker en la Clase 3 si la plataforma se encarga de todo.</a:t>
+            </a:r>
+          </a:p>
+          <a:p>
+            <a:pPr>
+              <a:spcAft>
+                <a:spcPts val="800"/>
+              </a:spcAft>
+            </a:pPr>
+            <a:r>
+              <a:rPr sz="2000" b="0" i="0">
+                <a:solidFill>
+                  <a:srgbClr val="333333"/>
+                </a:solidFill>
+                <a:latin typeface="Calibri"/>
+              </a:rPr>
+              <a:t>–   Respuesta: porque la plataforma construye internamente una imagen de contenedor con el codigo entregado, de modo que entender contenedores es entender que hace la plataforma por debajo</a:t>
             </a:r>
           </a:p>
         </p:txBody>
@@ -10092,7 +7931,7 @@
                 </a:solidFill>
                 <a:latin typeface="Calibri"/>
               </a:rPr>
-              <a:t>Manos a la obra (paso a paso)</a:t>
+              <a:t>Preguntas frecuentes y cierre conceptual () (2/3)</a:t>
             </a:r>
           </a:p>
         </p:txBody>
@@ -10125,22 +7964,13 @@
               </a:spcAft>
             </a:pPr>
             <a:r>
-              <a:rPr sz="2000" b="1" i="0">
-                <a:solidFill>
-                  <a:srgbClr val="333333"/>
-                </a:solidFill>
-                <a:latin typeface="Calibri"/>
-              </a:rPr>
-              <a:t>1.</a:t>
-            </a:r>
-            <a:r>
               <a:rPr sz="2000" b="0" i="0">
                 <a:solidFill>
                   <a:srgbClr val="333333"/>
                 </a:solidFill>
                 <a:latin typeface="Calibri"/>
               </a:rPr>
-              <a:t> Paso 1: relea su ficha y su C4 Context de la Clase 1. No cambie de dominio: las preguntas 5 a 7 se califican sobre el mismo sistema, y el ADR que redacte hoy se reutiliza en el informe del PI y en la sustentacion de la Clase 15.</a:t>
+              <a:t>–   Y porque el contenedor es precisamente el artefacto que vuelve reversible la decision de hoy.</a:t>
             </a:r>
           </a:p>
           <a:p>
@@ -10156,25 +7986,7 @@
                 </a:solidFill>
                 <a:latin typeface="Calibri"/>
               </a:rPr>
-              <a:t>–   </a:t>
-            </a:r>
-            <a:r>
-              <a:rPr sz="2000" b="1" i="0">
-                <a:solidFill>
-                  <a:srgbClr val="333333"/>
-                </a:solidFill>
-                <a:latin typeface="Calibri"/>
-              </a:rPr>
-              <a:t>2.</a:t>
-            </a:r>
-            <a:r>
-              <a:rPr sz="2000" b="0" i="0">
-                <a:solidFill>
-                  <a:srgbClr val="333333"/>
-                </a:solidFill>
-                <a:latin typeface="Calibri"/>
-              </a:rPr>
-              <a:t> Paso 2: construya en la pregunta 5 la matriz «Criterio | IaaS | PaaS | SaaS» con las cuatro filas en orden (control, costo cualitativo, operacion, time-to-demo) y maximo 2 lineas por celda; verifique que cada celda nombre una capacidad o una restriccion de SU dominio, y que la fila de operacion no afirme que en PaaS o SaaS usted deja de responder por su propia aplicacion.</a:t>
+              <a:t>–   La Clase 4 usara este mismo ADR para justificar cuantas piezas tendra el sistema, y el Parcial 1 de la Clase 5 evalua la capacidad de ubicar la linea de responsabilidad en cada modelo.</a:t>
             </a:r>
           </a:p>
           <a:p>
@@ -10190,25 +8002,7 @@
                 </a:solidFill>
                 <a:latin typeface="Calibri"/>
               </a:rPr>
-              <a:t>–   </a:t>
-            </a:r>
-            <a:r>
-              <a:rPr sz="2000" b="1" i="0">
-                <a:solidFill>
-                  <a:srgbClr val="333333"/>
-                </a:solidFill>
-                <a:latin typeface="Calibri"/>
-              </a:rPr>
-              <a:t>3.</a:t>
-            </a:r>
-            <a:r>
-              <a:rPr sz="2000" b="0" i="0">
-                <a:solidFill>
-                  <a:srgbClr val="333333"/>
-                </a:solidFill>
-                <a:latin typeface="Calibri"/>
-              </a:rPr>
-              <a:t> Paso 3: redacte en la pregunta 6 el ADR-001 con las cinco secciones rotuladas —titulo, estado con fecha, contexto con sus restricciones reales, la decision en UNA sola frase con UN modelo dominante, y exactamente 2 alternativas descartadas con el motivo atado a su dominio—; verifique que la seccion de decision no nombre dos modelos, porque en ese caso vale cero.</a:t>
+              <a:t>–   Error tipico del docente que no domina el tema: presentar IaaS, PaaS y SaaS como catalogos de marcas y no como un modelo conceptual de responsabilidad</a:t>
             </a:r>
           </a:p>
           <a:p>
@@ -10224,17 +8018,15 @@
                 </a:solidFill>
                 <a:latin typeface="Calibri"/>
               </a:rPr>
-              <a:t>–   </a:t>
-            </a:r>
-            <a:r>
-              <a:rPr sz="2000" b="1" i="0">
-                <a:solidFill>
-                  <a:srgbClr val="333333"/>
-                </a:solidFill>
-                <a:latin typeface="Calibri"/>
-              </a:rPr>
-              <a:t>4.</a:t>
-            </a:r>
+              <a:t>–   Con lo cual el estudiante memoriza nombres de productos que cambiaran en dos periodos y no aprende a preguntar quien administra que capa</a:t>
+            </a:r>
+          </a:p>
+          <a:p>
+            <a:pPr>
+              <a:spcAft>
+                <a:spcPts val="800"/>
+              </a:spcAft>
+            </a:pPr>
             <a:r>
               <a:rPr sz="2000" b="0" i="0">
                 <a:solidFill>
@@ -10242,7 +8034,7 @@
                 </a:solidFill>
                 <a:latin typeface="Calibri"/>
               </a:rPr>
-              <a:t> Paso 4: escriba en la pregunta 7 la seccion 6 del mismo ADR, las consecuencias en los tres ejes (operacion, costo y aprendizaje), con al menos una positiva y una negativa por eje marcadas con + y -, y verifique que al menos una negativa hable de amarre al proveedor o de perdida de control; guarde y continue, que la actividad se entrega completa al cierre del corte.</a:t>
+              <a:t>–   Aguas abajo, en la Clase 6 sera incapaz de decir de que es responsable el en materia de seguridad, y en la Clase 10 no podra explicar por que su factura hipotetica sube o baja.</a:t>
             </a:r>
           </a:p>
         </p:txBody>
@@ -10423,109 +8215,21 @@
                 </a:solidFill>
                 <a:latin typeface="Calibri"/>
               </a:rPr>
-              <a:t>Para continuar (PI)</a:t>
-            </a:r>
-          </a:p>
-        </p:txBody>
-      </p:sp>
-      <p:sp>
-        <p:nvSpPr>
-          <p:cNvPr id="5" name="Rounded Rectangle 4"/>
-          <p:cNvSpPr/>
-          <p:nvPr/>
-        </p:nvSpPr>
-        <p:spPr>
-          <a:xfrm>
-            <a:off x="457200" y="1261872"/>
-            <a:ext cx="11277295" cy="1051560"/>
-          </a:xfrm>
-          <a:prstGeom prst="roundRect">
-            <a:avLst>
-              <a:gd name="adj" fmla="val 12000"/>
-            </a:avLst>
-          </a:prstGeom>
-          <a:solidFill>
-            <a:srgbClr val="E8F4FA"/>
-          </a:solidFill>
-          <a:ln>
-            <a:noFill/>
-          </a:ln>
-        </p:spPr>
-        <p:style>
-          <a:lnRef idx="1">
-            <a:schemeClr val="accent1"/>
-          </a:lnRef>
-          <a:fillRef idx="3">
-            <a:schemeClr val="accent1"/>
-          </a:fillRef>
-          <a:effectRef idx="2">
-            <a:schemeClr val="accent1"/>
-          </a:effectRef>
-          <a:fontRef idx="minor">
-            <a:schemeClr val="lt1"/>
-          </a:fontRef>
-        </p:style>
-        <p:txBody>
-          <a:bodyPr rtlCol="0" anchor="ctr"/>
-          <a:lstStyle/>
-          <a:p>
-            <a:pPr algn="ctr"/>
-          </a:p>
-        </p:txBody>
-      </p:sp>
-      <p:sp>
-        <p:nvSpPr>
-          <p:cNvPr id="6" name="Rectangle 5"/>
-          <p:cNvSpPr/>
-          <p:nvPr/>
-        </p:nvSpPr>
-        <p:spPr>
-          <a:xfrm>
-            <a:off x="457200" y="1261872"/>
-            <a:ext cx="128016" cy="1051560"/>
-          </a:xfrm>
-          <a:prstGeom prst="rect">
-            <a:avLst/>
-          </a:prstGeom>
-          <a:solidFill>
-            <a:srgbClr val="269CCB"/>
-          </a:solidFill>
-          <a:ln>
-            <a:noFill/>
-          </a:ln>
-        </p:spPr>
-        <p:style>
-          <a:lnRef idx="1">
-            <a:schemeClr val="accent1"/>
-          </a:lnRef>
-          <a:fillRef idx="3">
-            <a:schemeClr val="accent1"/>
-          </a:fillRef>
-          <a:effectRef idx="2">
-            <a:schemeClr val="accent1"/>
-          </a:effectRef>
-          <a:fontRef idx="minor">
-            <a:schemeClr val="lt1"/>
-          </a:fontRef>
-        </p:style>
-        <p:txBody>
-          <a:bodyPr rtlCol="0" anchor="ctr"/>
-          <a:lstStyle/>
-          <a:p>
-            <a:pPr algn="ctr"/>
-          </a:p>
-        </p:txBody>
-      </p:sp>
-      <p:sp>
-        <p:nvSpPr>
-          <p:cNvPr id="7" name="TextBox 6"/>
+              <a:t>Preguntas frecuentes y cierre conceptual () (3/3)</a:t>
+            </a:r>
+          </a:p>
+        </p:txBody>
+      </p:sp>
+      <p:sp>
+        <p:nvSpPr>
+          <p:cNvPr id="5" name="TextBox 4"/>
           <p:cNvSpPr txBox="1"/>
           <p:nvPr/>
         </p:nvSpPr>
         <p:spPr>
           <a:xfrm>
-            <a:off x="777240" y="1399031"/>
-            <a:ext cx="10774375" cy="822959"/>
+            <a:off x="457200" y="1170432"/>
+            <a:ext cx="11277295" cy="5230368"/>
           </a:xfrm>
           <a:prstGeom prst="rect">
             <a:avLst/>
@@ -10538,313 +8242,74 @@
           </a:bodyPr>
           <a:lstStyle/>
           <a:p>
-            <a:r>
-              <a:rPr sz="1200" b="1" i="0">
-                <a:solidFill>
-                  <a:srgbClr val="269CCB"/>
-                </a:solidFill>
-                <a:latin typeface="Calibri"/>
-              </a:rPr>
-              <a:t>Info</a:t>
-            </a:r>
-          </a:p>
-          <a:p>
             <a:pPr>
-              <a:spcBef>
-                <a:spcPts val="400"/>
-              </a:spcBef>
+              <a:spcAft>
+                <a:spcPts val="800"/>
+              </a:spcAft>
             </a:pPr>
             <a:r>
-              <a:rPr sz="1400" b="0" i="0">
-                <a:solidFill>
-                  <a:srgbClr val="333333"/>
-                </a:solidFill>
-                <a:latin typeface="Calibri"/>
-              </a:rPr>
-              <a:t>Entregable: ADR-001: decisión de modelo de servicio + matriz de comparación aplicada al dominio</a:t>
-            </a:r>
-          </a:p>
-        </p:txBody>
-      </p:sp>
-      <p:sp>
-        <p:nvSpPr>
-          <p:cNvPr id="8" name="Rounded Rectangle 7"/>
-          <p:cNvSpPr/>
-          <p:nvPr/>
-        </p:nvSpPr>
-        <p:spPr>
-          <a:xfrm>
-            <a:off x="457200" y="2478024"/>
-            <a:ext cx="11277295" cy="1051560"/>
-          </a:xfrm>
-          <a:prstGeom prst="roundRect">
-            <a:avLst>
-              <a:gd name="adj" fmla="val 12000"/>
-            </a:avLst>
-          </a:prstGeom>
-          <a:solidFill>
-            <a:srgbClr val="FFF8E1"/>
-          </a:solidFill>
-          <a:ln>
-            <a:noFill/>
-          </a:ln>
-        </p:spPr>
-        <p:style>
-          <a:lnRef idx="1">
-            <a:schemeClr val="accent1"/>
-          </a:lnRef>
-          <a:fillRef idx="3">
-            <a:schemeClr val="accent1"/>
-          </a:fillRef>
-          <a:effectRef idx="2">
-            <a:schemeClr val="accent1"/>
-          </a:effectRef>
-          <a:fontRef idx="minor">
-            <a:schemeClr val="lt1"/>
-          </a:fontRef>
-        </p:style>
-        <p:txBody>
-          <a:bodyPr rtlCol="0" anchor="ctr"/>
-          <a:lstStyle/>
-          <a:p>
-            <a:pPr algn="ctr"/>
-          </a:p>
-        </p:txBody>
-      </p:sp>
-      <p:sp>
-        <p:nvSpPr>
-          <p:cNvPr id="9" name="Rectangle 8"/>
-          <p:cNvSpPr/>
-          <p:nvPr/>
-        </p:nvSpPr>
-        <p:spPr>
-          <a:xfrm>
-            <a:off x="457200" y="2478024"/>
-            <a:ext cx="128016" cy="1051560"/>
-          </a:xfrm>
-          <a:prstGeom prst="rect">
-            <a:avLst/>
-          </a:prstGeom>
-          <a:solidFill>
-            <a:srgbClr val="FFD000"/>
-          </a:solidFill>
-          <a:ln>
-            <a:noFill/>
-          </a:ln>
-        </p:spPr>
-        <p:style>
-          <a:lnRef idx="1">
-            <a:schemeClr val="accent1"/>
-          </a:lnRef>
-          <a:fillRef idx="3">
-            <a:schemeClr val="accent1"/>
-          </a:fillRef>
-          <a:effectRef idx="2">
-            <a:schemeClr val="accent1"/>
-          </a:effectRef>
-          <a:fontRef idx="minor">
-            <a:schemeClr val="lt1"/>
-          </a:fontRef>
-        </p:style>
-        <p:txBody>
-          <a:bodyPr rtlCol="0" anchor="ctr"/>
-          <a:lstStyle/>
-          <a:p>
-            <a:pPr algn="ctr"/>
-          </a:p>
-        </p:txBody>
-      </p:sp>
-      <p:sp>
-        <p:nvSpPr>
-          <p:cNvPr id="10" name="TextBox 9"/>
-          <p:cNvSpPr txBox="1"/>
-          <p:nvPr/>
-        </p:nvSpPr>
-        <p:spPr>
-          <a:xfrm>
-            <a:off x="777240" y="2615184"/>
-            <a:ext cx="10774375" cy="822959"/>
-          </a:xfrm>
-          <a:prstGeom prst="rect">
-            <a:avLst/>
-          </a:prstGeom>
-          <a:noFill/>
-        </p:spPr>
-        <p:txBody>
-          <a:bodyPr wrap="square">
-            <a:spAutoFit/>
-          </a:bodyPr>
-          <a:lstStyle/>
-          <a:p>
-            <a:r>
-              <a:rPr sz="1200" b="1" i="0">
-                <a:solidFill>
-                  <a:srgbClr val="FFD000"/>
-                </a:solidFill>
-                <a:latin typeface="Calibri"/>
-              </a:rPr>
-              <a:t>Aclaración</a:t>
+              <a:rPr sz="2000" b="0" i="0">
+                <a:solidFill>
+                  <a:srgbClr val="333333"/>
+                </a:solidFill>
+                <a:latin typeface="Calibri"/>
+              </a:rPr>
+              <a:t>–   El segundo error es dejar pasar ADR sin consecuencias negativas, y como esta clase tiene encuentro sincronico no hay excusa para no corregirlo en el momento: al pasar por los grupos en el tramo de taller</a:t>
             </a:r>
           </a:p>
           <a:p>
             <a:pPr>
-              <a:spcBef>
-                <a:spcPts val="400"/>
-              </a:spcBef>
+              <a:spcAft>
+                <a:spcPts val="800"/>
+              </a:spcAft>
             </a:pPr>
             <a:r>
-              <a:rPr sz="1400" b="0" i="0">
-                <a:solidFill>
-                  <a:srgbClr val="333333"/>
-                </a:solidFill>
-                <a:latin typeface="Calibri"/>
-              </a:rPr>
-              <a:t>Subir evidencias al paquete CloudLite (Drive/repo) y a la plataforma del curso en la fecha que indique el docente.</a:t>
-            </a:r>
-          </a:p>
-        </p:txBody>
-      </p:sp>
-      <p:sp>
-        <p:nvSpPr>
-          <p:cNvPr id="11" name="Rounded Rectangle 10"/>
-          <p:cNvSpPr/>
-          <p:nvPr/>
-        </p:nvSpPr>
-        <p:spPr>
-          <a:xfrm>
-            <a:off x="457200" y="3694176"/>
-            <a:ext cx="11277295" cy="1051560"/>
-          </a:xfrm>
-          <a:prstGeom prst="roundRect">
-            <a:avLst>
-              <a:gd name="adj" fmla="val 12000"/>
-            </a:avLst>
-          </a:prstGeom>
-          <a:solidFill>
-            <a:srgbClr val="FBE4E4"/>
-          </a:solidFill>
-          <a:ln>
-            <a:noFill/>
-          </a:ln>
-        </p:spPr>
-        <p:style>
-          <a:lnRef idx="1">
-            <a:schemeClr val="accent1"/>
-          </a:lnRef>
-          <a:fillRef idx="3">
-            <a:schemeClr val="accent1"/>
-          </a:fillRef>
-          <a:effectRef idx="2">
-            <a:schemeClr val="accent1"/>
-          </a:effectRef>
-          <a:fontRef idx="minor">
-            <a:schemeClr val="lt1"/>
-          </a:fontRef>
-        </p:style>
-        <p:txBody>
-          <a:bodyPr rtlCol="0" anchor="ctr"/>
-          <a:lstStyle/>
-          <a:p>
-            <a:pPr algn="ctr"/>
-          </a:p>
-        </p:txBody>
-      </p:sp>
-      <p:sp>
-        <p:nvSpPr>
-          <p:cNvPr id="12" name="Rectangle 11"/>
-          <p:cNvSpPr/>
-          <p:nvPr/>
-        </p:nvSpPr>
-        <p:spPr>
-          <a:xfrm>
-            <a:off x="457200" y="3694176"/>
-            <a:ext cx="128016" cy="1051560"/>
-          </a:xfrm>
-          <a:prstGeom prst="rect">
-            <a:avLst/>
-          </a:prstGeom>
-          <a:solidFill>
-            <a:srgbClr val="A02030"/>
-          </a:solidFill>
-          <a:ln>
-            <a:noFill/>
-          </a:ln>
-        </p:spPr>
-        <p:style>
-          <a:lnRef idx="1">
-            <a:schemeClr val="accent1"/>
-          </a:lnRef>
-          <a:fillRef idx="3">
-            <a:schemeClr val="accent1"/>
-          </a:fillRef>
-          <a:effectRef idx="2">
-            <a:schemeClr val="accent1"/>
-          </a:effectRef>
-          <a:fontRef idx="minor">
-            <a:schemeClr val="lt1"/>
-          </a:fontRef>
-        </p:style>
-        <p:txBody>
-          <a:bodyPr rtlCol="0" anchor="ctr"/>
-          <a:lstStyle/>
-          <a:p>
-            <a:pPr algn="ctr"/>
-          </a:p>
-        </p:txBody>
-      </p:sp>
-      <p:sp>
-        <p:nvSpPr>
-          <p:cNvPr id="13" name="TextBox 12"/>
-          <p:cNvSpPr txBox="1"/>
-          <p:nvPr/>
-        </p:nvSpPr>
-        <p:spPr>
-          <a:xfrm>
-            <a:off x="777240" y="3831336"/>
-            <a:ext cx="10774375" cy="822959"/>
-          </a:xfrm>
-          <a:prstGeom prst="rect">
-            <a:avLst/>
-          </a:prstGeom>
-          <a:noFill/>
-        </p:spPr>
-        <p:txBody>
-          <a:bodyPr wrap="square">
-            <a:spAutoFit/>
-          </a:bodyPr>
-          <a:lstStyle/>
-          <a:p>
-            <a:r>
-              <a:rPr sz="1200" b="1" i="0">
-                <a:solidFill>
-                  <a:srgbClr val="A02030"/>
-                </a:solidFill>
-                <a:latin typeface="Calibri"/>
-              </a:rPr>
-              <a:t>Atención</a:t>
+              <a:rPr sz="2000" b="0" i="0">
+                <a:solidFill>
+                  <a:srgbClr val="333333"/>
+                </a:solidFill>
+                <a:latin typeface="Calibri"/>
+              </a:rPr>
+              <a:t>–   Pregunte «que perdieron al elegir eso» antes de que el documento se suba.</a:t>
             </a:r>
           </a:p>
           <a:p>
             <a:pPr>
-              <a:spcBef>
-                <a:spcPts val="400"/>
-              </a:spcBef>
+              <a:spcAft>
+                <a:spcPts val="800"/>
+              </a:spcAft>
             </a:pPr>
             <a:r>
-              <a:rPr sz="1400" b="0" i="0">
-                <a:solidFill>
-                  <a:srgbClr val="333333"/>
-                </a:solidFill>
-                <a:latin typeface="Calibri"/>
-              </a:rPr>
-              <a:t>Sin cloud de pago ni instalaciones obligatorias de hipervisores/Docker Desktop.</a:t>
-            </a:r>
-          </a:p>
-        </p:txBody>
-      </p:sp>
-      <p:sp>
-        <p:nvSpPr>
-          <p:cNvPr id="14" name="TextBox 13"/>
+              <a:rPr sz="2000" b="0" i="0">
+                <a:solidFill>
+                  <a:srgbClr val="333333"/>
+                </a:solidFill>
+                <a:latin typeface="Calibri"/>
+              </a:rPr>
+              <a:t>–   Un ADR que solo lista beneficios no es una decision, es una justificacion escrita despues de los hechos</a:t>
+            </a:r>
+          </a:p>
+          <a:p>
+            <a:pPr>
+              <a:spcAft>
+                <a:spcPts val="800"/>
+              </a:spcAft>
+            </a:pPr>
+            <a:r>
+              <a:rPr sz="2000" b="0" i="0">
+                <a:solidFill>
+                  <a:srgbClr val="333333"/>
+                </a:solidFill>
+                <a:latin typeface="Calibri"/>
+              </a:rPr>
+              <a:t>–   Y quien lo entrega asi llegara a la Clase 11 sin poder explicar ningun trade-off de su arquitectura, que es justamente lo que se le exigira sustentar en la Clase 15.</a:t>
+            </a:r>
+          </a:p>
+        </p:txBody>
+      </p:sp>
+      <p:sp>
+        <p:nvSpPr>
+          <p:cNvPr id="6" name="TextBox 5"/>
           <p:cNvSpPr txBox="1"/>
           <p:nvPr/>
         </p:nvSpPr>
@@ -10912,10 +8377,493 @@
         <p:spPr>
           <a:xfrm>
             <a:off x="0" y="0"/>
-            <a:ext cx="12191695" cy="164592"/>
-          </a:xfrm>
-          <a:prstGeom prst="rect">
-            <a:avLst/>
+            <a:ext cx="12191695" cy="1170432"/>
+          </a:xfrm>
+          <a:prstGeom prst="rect">
+            <a:avLst/>
+          </a:prstGeom>
+          <a:solidFill>
+            <a:srgbClr val="095292"/>
+          </a:solidFill>
+          <a:ln>
+            <a:noFill/>
+          </a:ln>
+        </p:spPr>
+        <p:style>
+          <a:lnRef idx="1">
+            <a:schemeClr val="accent1"/>
+          </a:lnRef>
+          <a:fillRef idx="3">
+            <a:schemeClr val="accent1"/>
+          </a:fillRef>
+          <a:effectRef idx="2">
+            <a:schemeClr val="accent1"/>
+          </a:effectRef>
+          <a:fontRef idx="minor">
+            <a:schemeClr val="lt1"/>
+          </a:fontRef>
+        </p:style>
+        <p:txBody>
+          <a:bodyPr rtlCol="0" anchor="ctr"/>
+          <a:lstStyle/>
+          <a:p>
+            <a:pPr algn="ctr"/>
+          </a:p>
+        </p:txBody>
+      </p:sp>
+      <p:sp>
+        <p:nvSpPr>
+          <p:cNvPr id="3" name="Rectangle 2"/>
+          <p:cNvSpPr/>
+          <p:nvPr/>
+        </p:nvSpPr>
+        <p:spPr>
+          <a:xfrm>
+            <a:off x="0" y="1170432"/>
+            <a:ext cx="12191695" cy="41148"/>
+          </a:xfrm>
+          <a:prstGeom prst="rect">
+            <a:avLst/>
+          </a:prstGeom>
+          <a:solidFill>
+            <a:srgbClr val="FFD000"/>
+          </a:solidFill>
+          <a:ln>
+            <a:noFill/>
+          </a:ln>
+        </p:spPr>
+        <p:style>
+          <a:lnRef idx="1">
+            <a:schemeClr val="accent1"/>
+          </a:lnRef>
+          <a:fillRef idx="3">
+            <a:schemeClr val="accent1"/>
+          </a:fillRef>
+          <a:effectRef idx="2">
+            <a:schemeClr val="accent1"/>
+          </a:effectRef>
+          <a:fontRef idx="minor">
+            <a:schemeClr val="lt1"/>
+          </a:fontRef>
+        </p:style>
+        <p:txBody>
+          <a:bodyPr rtlCol="0" anchor="ctr"/>
+          <a:lstStyle/>
+          <a:p>
+            <a:pPr algn="ctr"/>
+          </a:p>
+        </p:txBody>
+      </p:sp>
+      <p:sp>
+        <p:nvSpPr>
+          <p:cNvPr id="4" name="TextBox 3"/>
+          <p:cNvSpPr txBox="1"/>
+          <p:nvPr/>
+        </p:nvSpPr>
+        <p:spPr>
+          <a:xfrm>
+            <a:off x="457200" y="164592"/>
+            <a:ext cx="11277295" cy="384048"/>
+          </a:xfrm>
+          <a:prstGeom prst="rect">
+            <a:avLst/>
+          </a:prstGeom>
+          <a:noFill/>
+        </p:spPr>
+        <p:txBody>
+          <a:bodyPr wrap="square">
+            <a:spAutoFit/>
+          </a:bodyPr>
+          <a:lstStyle/>
+          <a:p>
+            <a:r>
+              <a:rPr sz="2600" b="1" i="0">
+                <a:solidFill>
+                  <a:srgbClr val="FFFFFF"/>
+                </a:solidFill>
+                <a:latin typeface="Calibri"/>
+              </a:rPr>
+              <a:t>Quién administra cada capa — IaaS vs PaaS vs SaaS</a:t>
+            </a:r>
+          </a:p>
+        </p:txBody>
+      </p:sp>
+      <p:sp>
+        <p:nvSpPr>
+          <p:cNvPr id="5" name="TextBox 4"/>
+          <p:cNvSpPr txBox="1"/>
+          <p:nvPr/>
+        </p:nvSpPr>
+        <p:spPr>
+          <a:xfrm>
+            <a:off x="457200" y="566928"/>
+            <a:ext cx="11277295" cy="411480"/>
+          </a:xfrm>
+          <a:prstGeom prst="rect">
+            <a:avLst/>
+          </a:prstGeom>
+          <a:noFill/>
+        </p:spPr>
+        <p:txBody>
+          <a:bodyPr wrap="square">
+            <a:spAutoFit/>
+          </a:bodyPr>
+          <a:lstStyle/>
+          <a:p>
+            <a:r>
+              <a:rPr sz="1400" b="0" i="0">
+                <a:solidFill>
+                  <a:srgbClr val="B8D8EE"/>
+                </a:solidFill>
+                <a:latin typeface="Calibri"/>
+              </a:rPr>
+              <a:t>Misma aplicación, distinto reparto de responsabilidad entre usted y el proveedor</a:t>
+            </a:r>
+          </a:p>
+        </p:txBody>
+      </p:sp>
+      <p:sp>
+        <p:nvSpPr>
+          <p:cNvPr id="6" name="Rounded Rectangle 5"/>
+          <p:cNvSpPr/>
+          <p:nvPr/>
+        </p:nvSpPr>
+        <p:spPr>
+          <a:xfrm>
+            <a:off x="548640" y="1325880"/>
+            <a:ext cx="3291840" cy="685800"/>
+          </a:xfrm>
+          <a:prstGeom prst="roundRect">
+            <a:avLst>
+              <a:gd name="adj" fmla="val 12000"/>
+            </a:avLst>
+          </a:prstGeom>
+          <a:solidFill>
+            <a:srgbClr val="095292"/>
+          </a:solidFill>
+          <a:ln>
+            <a:noFill/>
+          </a:ln>
+        </p:spPr>
+        <p:style>
+          <a:lnRef idx="1">
+            <a:schemeClr val="accent1"/>
+          </a:lnRef>
+          <a:fillRef idx="3">
+            <a:schemeClr val="accent1"/>
+          </a:fillRef>
+          <a:effectRef idx="2">
+            <a:schemeClr val="accent1"/>
+          </a:effectRef>
+          <a:fontRef idx="minor">
+            <a:schemeClr val="lt1"/>
+          </a:fontRef>
+        </p:style>
+        <p:txBody>
+          <a:bodyPr rtlCol="0" anchor="ctr" wrap="square"/>
+          <a:lstStyle/>
+          <a:p>
+            <a:pPr algn="ctr"/>
+            <a:r>
+              <a:rPr sz="1200" b="1" i="0">
+                <a:solidFill>
+                  <a:srgbClr val="FFFFFF"/>
+                </a:solidFill>
+                <a:latin typeface="Calibri"/>
+              </a:rPr>
+              <a:t>IaaS
+(DigitalOcean, AWS EC2)</a:t>
+            </a:r>
+          </a:p>
+        </p:txBody>
+      </p:sp>
+      <p:sp>
+        <p:nvSpPr>
+          <p:cNvPr id="7" name="Rounded Rectangle 6"/>
+          <p:cNvSpPr/>
+          <p:nvPr/>
+        </p:nvSpPr>
+        <p:spPr>
+          <a:xfrm>
+            <a:off x="4160520" y="1325880"/>
+            <a:ext cx="3291840" cy="685800"/>
+          </a:xfrm>
+          <a:prstGeom prst="roundRect">
+            <a:avLst>
+              <a:gd name="adj" fmla="val 12000"/>
+            </a:avLst>
+          </a:prstGeom>
+          <a:solidFill>
+            <a:srgbClr val="095292"/>
+          </a:solidFill>
+          <a:ln>
+            <a:noFill/>
+          </a:ln>
+        </p:spPr>
+        <p:style>
+          <a:lnRef idx="1">
+            <a:schemeClr val="accent1"/>
+          </a:lnRef>
+          <a:fillRef idx="3">
+            <a:schemeClr val="accent1"/>
+          </a:fillRef>
+          <a:effectRef idx="2">
+            <a:schemeClr val="accent1"/>
+          </a:effectRef>
+          <a:fontRef idx="minor">
+            <a:schemeClr val="lt1"/>
+          </a:fontRef>
+        </p:style>
+        <p:txBody>
+          <a:bodyPr rtlCol="0" anchor="ctr" wrap="square"/>
+          <a:lstStyle/>
+          <a:p>
+            <a:pPr algn="ctr"/>
+            <a:r>
+              <a:rPr sz="1200" b="1" i="0">
+                <a:solidFill>
+                  <a:srgbClr val="FFFFFF"/>
+                </a:solidFill>
+                <a:latin typeface="Calibri"/>
+              </a:rPr>
+              <a:t>PaaS
+(Render, Railway, Heroku)</a:t>
+            </a:r>
+          </a:p>
+        </p:txBody>
+      </p:sp>
+      <p:sp>
+        <p:nvSpPr>
+          <p:cNvPr id="8" name="Rounded Rectangle 7"/>
+          <p:cNvSpPr/>
+          <p:nvPr/>
+        </p:nvSpPr>
+        <p:spPr>
+          <a:xfrm>
+            <a:off x="7772400" y="1325880"/>
+            <a:ext cx="3291840" cy="685800"/>
+          </a:xfrm>
+          <a:prstGeom prst="roundRect">
+            <a:avLst>
+              <a:gd name="adj" fmla="val 12000"/>
+            </a:avLst>
+          </a:prstGeom>
+          <a:solidFill>
+            <a:srgbClr val="095292"/>
+          </a:solidFill>
+          <a:ln>
+            <a:noFill/>
+          </a:ln>
+        </p:spPr>
+        <p:style>
+          <a:lnRef idx="1">
+            <a:schemeClr val="accent1"/>
+          </a:lnRef>
+          <a:fillRef idx="3">
+            <a:schemeClr val="accent1"/>
+          </a:fillRef>
+          <a:effectRef idx="2">
+            <a:schemeClr val="accent1"/>
+          </a:effectRef>
+          <a:fontRef idx="minor">
+            <a:schemeClr val="lt1"/>
+          </a:fontRef>
+        </p:style>
+        <p:txBody>
+          <a:bodyPr rtlCol="0" anchor="ctr" wrap="square"/>
+          <a:lstStyle/>
+          <a:p>
+            <a:pPr algn="ctr"/>
+            <a:r>
+              <a:rPr sz="1200" b="1" i="0">
+                <a:solidFill>
+                  <a:srgbClr val="FFFFFF"/>
+                </a:solidFill>
+                <a:latin typeface="Calibri"/>
+              </a:rPr>
+              <a:t>SaaS
+(Gmail, Notion, Slack)</a:t>
+            </a:r>
+          </a:p>
+        </p:txBody>
+      </p:sp>
+      <p:sp>
+        <p:nvSpPr>
+          <p:cNvPr id="9" name="Rounded Rectangle 8"/>
+          <p:cNvSpPr/>
+          <p:nvPr/>
+        </p:nvSpPr>
+        <p:spPr>
+          <a:xfrm>
+            <a:off x="548640" y="2103120"/>
+            <a:ext cx="3291840" cy="548640"/>
+          </a:xfrm>
+          <a:prstGeom prst="roundRect">
+            <a:avLst>
+              <a:gd name="adj" fmla="val 12000"/>
+            </a:avLst>
+          </a:prstGeom>
+          <a:solidFill>
+            <a:srgbClr val="FFD000"/>
+          </a:solidFill>
+          <a:ln>
+            <a:noFill/>
+          </a:ln>
+        </p:spPr>
+        <p:style>
+          <a:lnRef idx="1">
+            <a:schemeClr val="accent1"/>
+          </a:lnRef>
+          <a:fillRef idx="3">
+            <a:schemeClr val="accent1"/>
+          </a:fillRef>
+          <a:effectRef idx="2">
+            <a:schemeClr val="accent1"/>
+          </a:effectRef>
+          <a:fontRef idx="minor">
+            <a:schemeClr val="lt1"/>
+          </a:fontRef>
+        </p:style>
+        <p:txBody>
+          <a:bodyPr rtlCol="0" anchor="ctr" wrap="square"/>
+          <a:lstStyle/>
+          <a:p>
+            <a:pPr algn="ctr"/>
+            <a:r>
+              <a:rPr sz="1100" b="1" i="0">
+                <a:solidFill>
+                  <a:srgbClr val="095292"/>
+                </a:solidFill>
+                <a:latin typeface="Calibri"/>
+              </a:rPr>
+              <a:t>Aplicación y datos</a:t>
+            </a:r>
+          </a:p>
+        </p:txBody>
+      </p:sp>
+      <p:sp>
+        <p:nvSpPr>
+          <p:cNvPr id="10" name="Rounded Rectangle 9"/>
+          <p:cNvSpPr/>
+          <p:nvPr/>
+        </p:nvSpPr>
+        <p:spPr>
+          <a:xfrm>
+            <a:off x="548640" y="2743200"/>
+            <a:ext cx="3291840" cy="548640"/>
+          </a:xfrm>
+          <a:prstGeom prst="roundRect">
+            <a:avLst>
+              <a:gd name="adj" fmla="val 12000"/>
+            </a:avLst>
+          </a:prstGeom>
+          <a:solidFill>
+            <a:srgbClr val="FFD000"/>
+          </a:solidFill>
+          <a:ln>
+            <a:noFill/>
+          </a:ln>
+        </p:spPr>
+        <p:style>
+          <a:lnRef idx="1">
+            <a:schemeClr val="accent1"/>
+          </a:lnRef>
+          <a:fillRef idx="3">
+            <a:schemeClr val="accent1"/>
+          </a:fillRef>
+          <a:effectRef idx="2">
+            <a:schemeClr val="accent1"/>
+          </a:effectRef>
+          <a:fontRef idx="minor">
+            <a:schemeClr val="lt1"/>
+          </a:fontRef>
+        </p:style>
+        <p:txBody>
+          <a:bodyPr rtlCol="0" anchor="ctr" wrap="square"/>
+          <a:lstStyle/>
+          <a:p>
+            <a:pPr algn="ctr"/>
+            <a:r>
+              <a:rPr sz="1100" b="1" i="0">
+                <a:solidFill>
+                  <a:srgbClr val="095292"/>
+                </a:solidFill>
+                <a:latin typeface="Calibri"/>
+              </a:rPr>
+              <a:t>Runtime / middleware</a:t>
+            </a:r>
+          </a:p>
+        </p:txBody>
+      </p:sp>
+      <p:sp>
+        <p:nvSpPr>
+          <p:cNvPr id="11" name="Rounded Rectangle 10"/>
+          <p:cNvSpPr/>
+          <p:nvPr/>
+        </p:nvSpPr>
+        <p:spPr>
+          <a:xfrm>
+            <a:off x="548640" y="3383280"/>
+            <a:ext cx="3291840" cy="548640"/>
+          </a:xfrm>
+          <a:prstGeom prst="roundRect">
+            <a:avLst>
+              <a:gd name="adj" fmla="val 12000"/>
+            </a:avLst>
+          </a:prstGeom>
+          <a:solidFill>
+            <a:srgbClr val="FFD000"/>
+          </a:solidFill>
+          <a:ln>
+            <a:noFill/>
+          </a:ln>
+        </p:spPr>
+        <p:style>
+          <a:lnRef idx="1">
+            <a:schemeClr val="accent1"/>
+          </a:lnRef>
+          <a:fillRef idx="3">
+            <a:schemeClr val="accent1"/>
+          </a:fillRef>
+          <a:effectRef idx="2">
+            <a:schemeClr val="accent1"/>
+          </a:effectRef>
+          <a:fontRef idx="minor">
+            <a:schemeClr val="lt1"/>
+          </a:fontRef>
+        </p:style>
+        <p:txBody>
+          <a:bodyPr rtlCol="0" anchor="ctr" wrap="square"/>
+          <a:lstStyle/>
+          <a:p>
+            <a:pPr algn="ctr"/>
+            <a:r>
+              <a:rPr sz="1100" b="1" i="0">
+                <a:solidFill>
+                  <a:srgbClr val="095292"/>
+                </a:solidFill>
+                <a:latin typeface="Calibri"/>
+              </a:rPr>
+              <a:t>Sistema operativo</a:t>
+            </a:r>
+          </a:p>
+        </p:txBody>
+      </p:sp>
+      <p:sp>
+        <p:nvSpPr>
+          <p:cNvPr id="12" name="Rounded Rectangle 11"/>
+          <p:cNvSpPr/>
+          <p:nvPr/>
+        </p:nvSpPr>
+        <p:spPr>
+          <a:xfrm>
+            <a:off x="548640" y="4023360"/>
+            <a:ext cx="3291840" cy="548640"/>
+          </a:xfrm>
+          <a:prstGeom prst="roundRect">
+            <a:avLst>
+              <a:gd name="adj" fmla="val 12000"/>
+            </a:avLst>
           </a:prstGeom>
           <a:solidFill>
             <a:srgbClr val="269CCB"/>
@@ -10939,6 +8887,1464 @@
           </a:fontRef>
         </p:style>
         <p:txBody>
+          <a:bodyPr rtlCol="0" anchor="ctr" wrap="square"/>
+          <a:lstStyle/>
+          <a:p>
+            <a:pPr algn="ctr"/>
+            <a:r>
+              <a:rPr sz="1050" b="1" i="0">
+                <a:solidFill>
+                  <a:srgbClr val="FFFFFF"/>
+                </a:solidFill>
+                <a:latin typeface="Calibri"/>
+              </a:rPr>
+              <a:t>Infraestructura
+(cómputo, red, disco)</a:t>
+            </a:r>
+          </a:p>
+        </p:txBody>
+      </p:sp>
+      <p:sp>
+        <p:nvSpPr>
+          <p:cNvPr id="13" name="Rounded Rectangle 12"/>
+          <p:cNvSpPr/>
+          <p:nvPr/>
+        </p:nvSpPr>
+        <p:spPr>
+          <a:xfrm>
+            <a:off x="4160520" y="2103120"/>
+            <a:ext cx="3291840" cy="548640"/>
+          </a:xfrm>
+          <a:prstGeom prst="roundRect">
+            <a:avLst>
+              <a:gd name="adj" fmla="val 12000"/>
+            </a:avLst>
+          </a:prstGeom>
+          <a:solidFill>
+            <a:srgbClr val="FFD000"/>
+          </a:solidFill>
+          <a:ln>
+            <a:noFill/>
+          </a:ln>
+        </p:spPr>
+        <p:style>
+          <a:lnRef idx="1">
+            <a:schemeClr val="accent1"/>
+          </a:lnRef>
+          <a:fillRef idx="3">
+            <a:schemeClr val="accent1"/>
+          </a:fillRef>
+          <a:effectRef idx="2">
+            <a:schemeClr val="accent1"/>
+          </a:effectRef>
+          <a:fontRef idx="minor">
+            <a:schemeClr val="lt1"/>
+          </a:fontRef>
+        </p:style>
+        <p:txBody>
+          <a:bodyPr rtlCol="0" anchor="ctr" wrap="square"/>
+          <a:lstStyle/>
+          <a:p>
+            <a:pPr algn="ctr"/>
+            <a:r>
+              <a:rPr sz="1100" b="1" i="0">
+                <a:solidFill>
+                  <a:srgbClr val="095292"/>
+                </a:solidFill>
+                <a:latin typeface="Calibri"/>
+              </a:rPr>
+              <a:t>Aplicación y datos</a:t>
+            </a:r>
+          </a:p>
+        </p:txBody>
+      </p:sp>
+      <p:sp>
+        <p:nvSpPr>
+          <p:cNvPr id="14" name="Rounded Rectangle 13"/>
+          <p:cNvSpPr/>
+          <p:nvPr/>
+        </p:nvSpPr>
+        <p:spPr>
+          <a:xfrm>
+            <a:off x="4160520" y="2743200"/>
+            <a:ext cx="3291840" cy="548640"/>
+          </a:xfrm>
+          <a:prstGeom prst="roundRect">
+            <a:avLst>
+              <a:gd name="adj" fmla="val 12000"/>
+            </a:avLst>
+          </a:prstGeom>
+          <a:solidFill>
+            <a:srgbClr val="269CCB"/>
+          </a:solidFill>
+          <a:ln>
+            <a:noFill/>
+          </a:ln>
+        </p:spPr>
+        <p:style>
+          <a:lnRef idx="1">
+            <a:schemeClr val="accent1"/>
+          </a:lnRef>
+          <a:fillRef idx="3">
+            <a:schemeClr val="accent1"/>
+          </a:fillRef>
+          <a:effectRef idx="2">
+            <a:schemeClr val="accent1"/>
+          </a:effectRef>
+          <a:fontRef idx="minor">
+            <a:schemeClr val="lt1"/>
+          </a:fontRef>
+        </p:style>
+        <p:txBody>
+          <a:bodyPr rtlCol="0" anchor="ctr" wrap="square"/>
+          <a:lstStyle/>
+          <a:p>
+            <a:pPr algn="ctr"/>
+            <a:r>
+              <a:rPr sz="1100" b="1" i="0">
+                <a:solidFill>
+                  <a:srgbClr val="FFFFFF"/>
+                </a:solidFill>
+                <a:latin typeface="Calibri"/>
+              </a:rPr>
+              <a:t>Runtime / middleware</a:t>
+            </a:r>
+          </a:p>
+        </p:txBody>
+      </p:sp>
+      <p:sp>
+        <p:nvSpPr>
+          <p:cNvPr id="15" name="Rounded Rectangle 14"/>
+          <p:cNvSpPr/>
+          <p:nvPr/>
+        </p:nvSpPr>
+        <p:spPr>
+          <a:xfrm>
+            <a:off x="4160520" y="3383280"/>
+            <a:ext cx="3291840" cy="548640"/>
+          </a:xfrm>
+          <a:prstGeom prst="roundRect">
+            <a:avLst>
+              <a:gd name="adj" fmla="val 12000"/>
+            </a:avLst>
+          </a:prstGeom>
+          <a:solidFill>
+            <a:srgbClr val="269CCB"/>
+          </a:solidFill>
+          <a:ln>
+            <a:noFill/>
+          </a:ln>
+        </p:spPr>
+        <p:style>
+          <a:lnRef idx="1">
+            <a:schemeClr val="accent1"/>
+          </a:lnRef>
+          <a:fillRef idx="3">
+            <a:schemeClr val="accent1"/>
+          </a:fillRef>
+          <a:effectRef idx="2">
+            <a:schemeClr val="accent1"/>
+          </a:effectRef>
+          <a:fontRef idx="minor">
+            <a:schemeClr val="lt1"/>
+          </a:fontRef>
+        </p:style>
+        <p:txBody>
+          <a:bodyPr rtlCol="0" anchor="ctr" wrap="square"/>
+          <a:lstStyle/>
+          <a:p>
+            <a:pPr algn="ctr"/>
+            <a:r>
+              <a:rPr sz="1100" b="1" i="0">
+                <a:solidFill>
+                  <a:srgbClr val="FFFFFF"/>
+                </a:solidFill>
+                <a:latin typeface="Calibri"/>
+              </a:rPr>
+              <a:t>Sistema operativo</a:t>
+            </a:r>
+          </a:p>
+        </p:txBody>
+      </p:sp>
+      <p:sp>
+        <p:nvSpPr>
+          <p:cNvPr id="16" name="Rounded Rectangle 15"/>
+          <p:cNvSpPr/>
+          <p:nvPr/>
+        </p:nvSpPr>
+        <p:spPr>
+          <a:xfrm>
+            <a:off x="4160520" y="4023360"/>
+            <a:ext cx="3291840" cy="548640"/>
+          </a:xfrm>
+          <a:prstGeom prst="roundRect">
+            <a:avLst>
+              <a:gd name="adj" fmla="val 12000"/>
+            </a:avLst>
+          </a:prstGeom>
+          <a:solidFill>
+            <a:srgbClr val="269CCB"/>
+          </a:solidFill>
+          <a:ln>
+            <a:noFill/>
+          </a:ln>
+        </p:spPr>
+        <p:style>
+          <a:lnRef idx="1">
+            <a:schemeClr val="accent1"/>
+          </a:lnRef>
+          <a:fillRef idx="3">
+            <a:schemeClr val="accent1"/>
+          </a:fillRef>
+          <a:effectRef idx="2">
+            <a:schemeClr val="accent1"/>
+          </a:effectRef>
+          <a:fontRef idx="minor">
+            <a:schemeClr val="lt1"/>
+          </a:fontRef>
+        </p:style>
+        <p:txBody>
+          <a:bodyPr rtlCol="0" anchor="ctr" wrap="square"/>
+          <a:lstStyle/>
+          <a:p>
+            <a:pPr algn="ctr"/>
+            <a:r>
+              <a:rPr sz="1050" b="1" i="0">
+                <a:solidFill>
+                  <a:srgbClr val="FFFFFF"/>
+                </a:solidFill>
+                <a:latin typeface="Calibri"/>
+              </a:rPr>
+              <a:t>Infraestructura
+(cómputo, red, disco)</a:t>
+            </a:r>
+          </a:p>
+        </p:txBody>
+      </p:sp>
+      <p:sp>
+        <p:nvSpPr>
+          <p:cNvPr id="17" name="Rounded Rectangle 16"/>
+          <p:cNvSpPr/>
+          <p:nvPr/>
+        </p:nvSpPr>
+        <p:spPr>
+          <a:xfrm>
+            <a:off x="7772400" y="2103120"/>
+            <a:ext cx="3291840" cy="548640"/>
+          </a:xfrm>
+          <a:prstGeom prst="roundRect">
+            <a:avLst>
+              <a:gd name="adj" fmla="val 12000"/>
+            </a:avLst>
+          </a:prstGeom>
+          <a:solidFill>
+            <a:srgbClr val="FFD000"/>
+          </a:solidFill>
+          <a:ln>
+            <a:noFill/>
+          </a:ln>
+        </p:spPr>
+        <p:style>
+          <a:lnRef idx="1">
+            <a:schemeClr val="accent1"/>
+          </a:lnRef>
+          <a:fillRef idx="3">
+            <a:schemeClr val="accent1"/>
+          </a:fillRef>
+          <a:effectRef idx="2">
+            <a:schemeClr val="accent1"/>
+          </a:effectRef>
+          <a:fontRef idx="minor">
+            <a:schemeClr val="lt1"/>
+          </a:fontRef>
+        </p:style>
+        <p:txBody>
+          <a:bodyPr rtlCol="0" anchor="ctr" wrap="square"/>
+          <a:lstStyle/>
+          <a:p>
+            <a:pPr algn="ctr"/>
+            <a:r>
+              <a:rPr sz="1050" b="1" i="0">
+                <a:solidFill>
+                  <a:srgbClr val="095292"/>
+                </a:solidFill>
+                <a:latin typeface="Calibri"/>
+              </a:rPr>
+              <a:t>Aplicación y datos
+(usted solo configura)</a:t>
+            </a:r>
+          </a:p>
+        </p:txBody>
+      </p:sp>
+      <p:sp>
+        <p:nvSpPr>
+          <p:cNvPr id="18" name="Rounded Rectangle 17"/>
+          <p:cNvSpPr/>
+          <p:nvPr/>
+        </p:nvSpPr>
+        <p:spPr>
+          <a:xfrm>
+            <a:off x="7772400" y="2743200"/>
+            <a:ext cx="3291840" cy="548640"/>
+          </a:xfrm>
+          <a:prstGeom prst="roundRect">
+            <a:avLst>
+              <a:gd name="adj" fmla="val 12000"/>
+            </a:avLst>
+          </a:prstGeom>
+          <a:solidFill>
+            <a:srgbClr val="269CCB"/>
+          </a:solidFill>
+          <a:ln>
+            <a:noFill/>
+          </a:ln>
+        </p:spPr>
+        <p:style>
+          <a:lnRef idx="1">
+            <a:schemeClr val="accent1"/>
+          </a:lnRef>
+          <a:fillRef idx="3">
+            <a:schemeClr val="accent1"/>
+          </a:fillRef>
+          <a:effectRef idx="2">
+            <a:schemeClr val="accent1"/>
+          </a:effectRef>
+          <a:fontRef idx="minor">
+            <a:schemeClr val="lt1"/>
+          </a:fontRef>
+        </p:style>
+        <p:txBody>
+          <a:bodyPr rtlCol="0" anchor="ctr" wrap="square"/>
+          <a:lstStyle/>
+          <a:p>
+            <a:pPr algn="ctr"/>
+            <a:r>
+              <a:rPr sz="1100" b="1" i="0">
+                <a:solidFill>
+                  <a:srgbClr val="FFFFFF"/>
+                </a:solidFill>
+                <a:latin typeface="Calibri"/>
+              </a:rPr>
+              <a:t>Runtime / middleware</a:t>
+            </a:r>
+          </a:p>
+        </p:txBody>
+      </p:sp>
+      <p:sp>
+        <p:nvSpPr>
+          <p:cNvPr id="19" name="Rounded Rectangle 18"/>
+          <p:cNvSpPr/>
+          <p:nvPr/>
+        </p:nvSpPr>
+        <p:spPr>
+          <a:xfrm>
+            <a:off x="7772400" y="3383280"/>
+            <a:ext cx="3291840" cy="548640"/>
+          </a:xfrm>
+          <a:prstGeom prst="roundRect">
+            <a:avLst>
+              <a:gd name="adj" fmla="val 12000"/>
+            </a:avLst>
+          </a:prstGeom>
+          <a:solidFill>
+            <a:srgbClr val="269CCB"/>
+          </a:solidFill>
+          <a:ln>
+            <a:noFill/>
+          </a:ln>
+        </p:spPr>
+        <p:style>
+          <a:lnRef idx="1">
+            <a:schemeClr val="accent1"/>
+          </a:lnRef>
+          <a:fillRef idx="3">
+            <a:schemeClr val="accent1"/>
+          </a:fillRef>
+          <a:effectRef idx="2">
+            <a:schemeClr val="accent1"/>
+          </a:effectRef>
+          <a:fontRef idx="minor">
+            <a:schemeClr val="lt1"/>
+          </a:fontRef>
+        </p:style>
+        <p:txBody>
+          <a:bodyPr rtlCol="0" anchor="ctr" wrap="square"/>
+          <a:lstStyle/>
+          <a:p>
+            <a:pPr algn="ctr"/>
+            <a:r>
+              <a:rPr sz="1100" b="1" i="0">
+                <a:solidFill>
+                  <a:srgbClr val="FFFFFF"/>
+                </a:solidFill>
+                <a:latin typeface="Calibri"/>
+              </a:rPr>
+              <a:t>Sistema operativo</a:t>
+            </a:r>
+          </a:p>
+        </p:txBody>
+      </p:sp>
+      <p:sp>
+        <p:nvSpPr>
+          <p:cNvPr id="20" name="Rounded Rectangle 19"/>
+          <p:cNvSpPr/>
+          <p:nvPr/>
+        </p:nvSpPr>
+        <p:spPr>
+          <a:xfrm>
+            <a:off x="7772400" y="4023360"/>
+            <a:ext cx="3291840" cy="548640"/>
+          </a:xfrm>
+          <a:prstGeom prst="roundRect">
+            <a:avLst>
+              <a:gd name="adj" fmla="val 12000"/>
+            </a:avLst>
+          </a:prstGeom>
+          <a:solidFill>
+            <a:srgbClr val="269CCB"/>
+          </a:solidFill>
+          <a:ln>
+            <a:noFill/>
+          </a:ln>
+        </p:spPr>
+        <p:style>
+          <a:lnRef idx="1">
+            <a:schemeClr val="accent1"/>
+          </a:lnRef>
+          <a:fillRef idx="3">
+            <a:schemeClr val="accent1"/>
+          </a:fillRef>
+          <a:effectRef idx="2">
+            <a:schemeClr val="accent1"/>
+          </a:effectRef>
+          <a:fontRef idx="minor">
+            <a:schemeClr val="lt1"/>
+          </a:fontRef>
+        </p:style>
+        <p:txBody>
+          <a:bodyPr rtlCol="0" anchor="ctr" wrap="square"/>
+          <a:lstStyle/>
+          <a:p>
+            <a:pPr algn="ctr"/>
+            <a:r>
+              <a:rPr sz="1050" b="1" i="0">
+                <a:solidFill>
+                  <a:srgbClr val="FFFFFF"/>
+                </a:solidFill>
+                <a:latin typeface="Calibri"/>
+              </a:rPr>
+              <a:t>Infraestructura
+(cómputo, red, disco)</a:t>
+            </a:r>
+          </a:p>
+        </p:txBody>
+      </p:sp>
+      <p:sp>
+        <p:nvSpPr>
+          <p:cNvPr id="21" name="TextBox 20"/>
+          <p:cNvSpPr txBox="1"/>
+          <p:nvPr/>
+        </p:nvSpPr>
+        <p:spPr>
+          <a:xfrm>
+            <a:off x="457200" y="5897880"/>
+            <a:ext cx="11277295" cy="320040"/>
+          </a:xfrm>
+          <a:prstGeom prst="rect">
+            <a:avLst/>
+          </a:prstGeom>
+          <a:noFill/>
+        </p:spPr>
+        <p:txBody>
+          <a:bodyPr wrap="square">
+            <a:spAutoFit/>
+          </a:bodyPr>
+          <a:lstStyle/>
+          <a:p>
+            <a:r>
+              <a:rPr sz="1050" b="0" i="1">
+                <a:solidFill>
+                  <a:srgbClr val="666666"/>
+                </a:solidFill>
+                <a:latin typeface="Calibri"/>
+              </a:rPr>
+              <a:t>Amarillo = lo administra usted · Celeste = lo administra el proveedor</a:t>
+            </a:r>
+          </a:p>
+        </p:txBody>
+      </p:sp>
+      <p:sp>
+        <p:nvSpPr>
+          <p:cNvPr id="22" name="TextBox 21"/>
+          <p:cNvSpPr txBox="1"/>
+          <p:nvPr/>
+        </p:nvSpPr>
+        <p:spPr>
+          <a:xfrm>
+            <a:off x="457200" y="6263640"/>
+            <a:ext cx="11277295" cy="411480"/>
+          </a:xfrm>
+          <a:prstGeom prst="rect">
+            <a:avLst/>
+          </a:prstGeom>
+          <a:noFill/>
+        </p:spPr>
+        <p:txBody>
+          <a:bodyPr wrap="square">
+            <a:spAutoFit/>
+          </a:bodyPr>
+          <a:lstStyle/>
+          <a:p>
+            <a:r>
+              <a:rPr sz="1100" b="0" i="1">
+                <a:solidFill>
+                  <a:srgbClr val="666666"/>
+                </a:solidFill>
+                <a:latin typeface="Calibri"/>
+              </a:rPr>
+              <a:t>Suba en la pila y sube el control, pero también lo que tiene que operar usted: parches, escalado, disponibilidad. Para el MVP de CloudLite, PaaS es el punto medio: usted solo responde por su aplicación y sus datos.</a:t>
+            </a:r>
+          </a:p>
+        </p:txBody>
+      </p:sp>
+      <p:sp>
+        <p:nvSpPr>
+          <p:cNvPr id="23" name="TextBox 22"/>
+          <p:cNvSpPr txBox="1"/>
+          <p:nvPr/>
+        </p:nvSpPr>
+        <p:spPr>
+          <a:xfrm>
+            <a:off x="11185855" y="6473952"/>
+            <a:ext cx="640080" cy="274320"/>
+          </a:xfrm>
+          <a:prstGeom prst="rect">
+            <a:avLst/>
+          </a:prstGeom>
+          <a:noFill/>
+        </p:spPr>
+        <p:txBody>
+          <a:bodyPr wrap="square">
+            <a:spAutoFit/>
+          </a:bodyPr>
+          <a:lstStyle/>
+          <a:p>
+            <a:pPr algn="r"/>
+            <a:r>
+              <a:rPr sz="1100" b="0" i="0">
+                <a:solidFill>
+                  <a:srgbClr val="666666"/>
+                </a:solidFill>
+                <a:latin typeface="Calibri"/>
+              </a:rPr>
+              <a:t>27</a:t>
+            </a:r>
+          </a:p>
+        </p:txBody>
+      </p:sp>
+    </p:spTree>
+  </p:cSld>
+  <p:clrMapOvr>
+    <a:masterClrMapping/>
+  </p:clrMapOvr>
+</p:sld>
+</file>
+
+<file path=ppt/slides/slide28.xml><?xml version="1.0" encoding="utf-8"?>
+<p:sld xmlns:a="http://schemas.openxmlformats.org/drawingml/2006/main" xmlns:p="http://schemas.openxmlformats.org/presentationml/2006/main" xmlns:r="http://schemas.openxmlformats.org/officeDocument/2006/relationships">
+  <p:cSld>
+    <p:bg>
+      <p:bgPr>
+        <a:solidFill>
+          <a:srgbClr val="FFFFFF"/>
+        </a:solidFill>
+        <a:effectLst/>
+      </p:bgPr>
+    </p:bg>
+    <p:spTree>
+      <p:nvGrpSpPr>
+        <p:cNvPr id="1" name=""/>
+        <p:cNvGrpSpPr/>
+        <p:nvPr/>
+      </p:nvGrpSpPr>
+      <p:grpSpPr/>
+      <p:sp>
+        <p:nvSpPr>
+          <p:cNvPr id="2" name="Rectangle 1"/>
+          <p:cNvSpPr/>
+          <p:nvPr/>
+        </p:nvSpPr>
+        <p:spPr>
+          <a:xfrm>
+            <a:off x="0" y="0"/>
+            <a:ext cx="12191695" cy="960120"/>
+          </a:xfrm>
+          <a:prstGeom prst="rect">
+            <a:avLst/>
+          </a:prstGeom>
+          <a:solidFill>
+            <a:srgbClr val="095292"/>
+          </a:solidFill>
+          <a:ln>
+            <a:noFill/>
+          </a:ln>
+        </p:spPr>
+        <p:style>
+          <a:lnRef idx="1">
+            <a:schemeClr val="accent1"/>
+          </a:lnRef>
+          <a:fillRef idx="3">
+            <a:schemeClr val="accent1"/>
+          </a:fillRef>
+          <a:effectRef idx="2">
+            <a:schemeClr val="accent1"/>
+          </a:effectRef>
+          <a:fontRef idx="minor">
+            <a:schemeClr val="lt1"/>
+          </a:fontRef>
+        </p:style>
+        <p:txBody>
+          <a:bodyPr rtlCol="0" anchor="ctr"/>
+          <a:lstStyle/>
+          <a:p>
+            <a:pPr algn="ctr"/>
+          </a:p>
+        </p:txBody>
+      </p:sp>
+      <p:sp>
+        <p:nvSpPr>
+          <p:cNvPr id="3" name="Rectangle 2"/>
+          <p:cNvSpPr/>
+          <p:nvPr/>
+        </p:nvSpPr>
+        <p:spPr>
+          <a:xfrm>
+            <a:off x="0" y="960120"/>
+            <a:ext cx="12191695" cy="41148"/>
+          </a:xfrm>
+          <a:prstGeom prst="rect">
+            <a:avLst/>
+          </a:prstGeom>
+          <a:solidFill>
+            <a:srgbClr val="FFD000"/>
+          </a:solidFill>
+          <a:ln>
+            <a:noFill/>
+          </a:ln>
+        </p:spPr>
+        <p:style>
+          <a:lnRef idx="1">
+            <a:schemeClr val="accent1"/>
+          </a:lnRef>
+          <a:fillRef idx="3">
+            <a:schemeClr val="accent1"/>
+          </a:fillRef>
+          <a:effectRef idx="2">
+            <a:schemeClr val="accent1"/>
+          </a:effectRef>
+          <a:fontRef idx="minor">
+            <a:schemeClr val="lt1"/>
+          </a:fontRef>
+        </p:style>
+        <p:txBody>
+          <a:bodyPr rtlCol="0" anchor="ctr"/>
+          <a:lstStyle/>
+          <a:p>
+            <a:pPr algn="ctr"/>
+          </a:p>
+        </p:txBody>
+      </p:sp>
+      <p:sp>
+        <p:nvSpPr>
+          <p:cNvPr id="4" name="TextBox 3"/>
+          <p:cNvSpPr txBox="1"/>
+          <p:nvPr/>
+        </p:nvSpPr>
+        <p:spPr>
+          <a:xfrm>
+            <a:off x="457200" y="164592"/>
+            <a:ext cx="11277295" cy="502920"/>
+          </a:xfrm>
+          <a:prstGeom prst="rect">
+            <a:avLst/>
+          </a:prstGeom>
+          <a:noFill/>
+        </p:spPr>
+        <p:txBody>
+          <a:bodyPr wrap="square">
+            <a:spAutoFit/>
+          </a:bodyPr>
+          <a:lstStyle/>
+          <a:p>
+            <a:r>
+              <a:rPr sz="2600" b="1" i="0">
+                <a:solidFill>
+                  <a:srgbClr val="FFFFFF"/>
+                </a:solidFill>
+                <a:latin typeface="Calibri"/>
+              </a:rPr>
+              <a:t>ADR-001 — las 6 secciones caben en una pagina</a:t>
+            </a:r>
+          </a:p>
+        </p:txBody>
+      </p:sp>
+      <p:sp>
+        <p:nvSpPr>
+          <p:cNvPr id="5" name="Rounded Rectangle 4"/>
+          <p:cNvSpPr/>
+          <p:nvPr/>
+        </p:nvSpPr>
+        <p:spPr>
+          <a:xfrm>
+            <a:off x="457200" y="1261872"/>
+            <a:ext cx="11277295" cy="4773168"/>
+          </a:xfrm>
+          <a:prstGeom prst="roundRect">
+            <a:avLst>
+              <a:gd name="adj" fmla="val 12000"/>
+            </a:avLst>
+          </a:prstGeom>
+          <a:solidFill>
+            <a:srgbClr val="1E2A38"/>
+          </a:solidFill>
+          <a:ln>
+            <a:noFill/>
+          </a:ln>
+        </p:spPr>
+        <p:style>
+          <a:lnRef idx="1">
+            <a:schemeClr val="accent1"/>
+          </a:lnRef>
+          <a:fillRef idx="3">
+            <a:schemeClr val="accent1"/>
+          </a:fillRef>
+          <a:effectRef idx="2">
+            <a:schemeClr val="accent1"/>
+          </a:effectRef>
+          <a:fontRef idx="minor">
+            <a:schemeClr val="lt1"/>
+          </a:fontRef>
+        </p:style>
+        <p:txBody>
+          <a:bodyPr rtlCol="0" anchor="ctr"/>
+          <a:lstStyle/>
+          <a:p>
+            <a:pPr algn="ctr"/>
+          </a:p>
+        </p:txBody>
+      </p:sp>
+      <p:sp>
+        <p:nvSpPr>
+          <p:cNvPr id="6" name="Rectangle 5"/>
+          <p:cNvSpPr/>
+          <p:nvPr/>
+        </p:nvSpPr>
+        <p:spPr>
+          <a:xfrm>
+            <a:off x="457200" y="1261872"/>
+            <a:ext cx="11277295" cy="320040"/>
+          </a:xfrm>
+          <a:prstGeom prst="rect">
+            <a:avLst/>
+          </a:prstGeom>
+          <a:solidFill>
+            <a:srgbClr val="095292"/>
+          </a:solidFill>
+          <a:ln>
+            <a:noFill/>
+          </a:ln>
+        </p:spPr>
+        <p:style>
+          <a:lnRef idx="1">
+            <a:schemeClr val="accent1"/>
+          </a:lnRef>
+          <a:fillRef idx="3">
+            <a:schemeClr val="accent1"/>
+          </a:fillRef>
+          <a:effectRef idx="2">
+            <a:schemeClr val="accent1"/>
+          </a:effectRef>
+          <a:fontRef idx="minor">
+            <a:schemeClr val="lt1"/>
+          </a:fontRef>
+        </p:style>
+        <p:txBody>
+          <a:bodyPr rtlCol="0" anchor="ctr"/>
+          <a:lstStyle/>
+          <a:p>
+            <a:pPr algn="ctr"/>
+          </a:p>
+        </p:txBody>
+      </p:sp>
+      <p:sp>
+        <p:nvSpPr>
+          <p:cNvPr id="7" name="TextBox 6"/>
+          <p:cNvSpPr txBox="1"/>
+          <p:nvPr/>
+        </p:nvSpPr>
+        <p:spPr>
+          <a:xfrm>
+            <a:off x="685800" y="1307592"/>
+            <a:ext cx="10820095" cy="256032"/>
+          </a:xfrm>
+          <a:prstGeom prst="rect">
+            <a:avLst/>
+          </a:prstGeom>
+          <a:noFill/>
+        </p:spPr>
+        <p:txBody>
+          <a:bodyPr wrap="square" anchor="ctr"/>
+          <a:lstStyle/>
+          <a:p>
+            <a:r>
+              <a:rPr sz="1000" b="1" i="0">
+                <a:solidFill>
+                  <a:srgbClr val="269CCB"/>
+                </a:solidFill>
+                <a:latin typeface="Calibri"/>
+              </a:rPr>
+              <a:t>● ● ●</a:t>
+            </a:r>
+          </a:p>
+        </p:txBody>
+      </p:sp>
+      <p:sp>
+        <p:nvSpPr>
+          <p:cNvPr id="8" name="TextBox 7"/>
+          <p:cNvSpPr txBox="1"/>
+          <p:nvPr/>
+        </p:nvSpPr>
+        <p:spPr>
+          <a:xfrm>
+            <a:off x="777240" y="1719072"/>
+            <a:ext cx="10637215" cy="4133087"/>
+          </a:xfrm>
+          <a:prstGeom prst="rect">
+            <a:avLst/>
+          </a:prstGeom>
+          <a:noFill/>
+        </p:spPr>
+        <p:txBody>
+          <a:bodyPr wrap="square">
+            <a:spAutoFit/>
+          </a:bodyPr>
+          <a:lstStyle/>
+          <a:p>
+            <a:pPr>
+              <a:spcAft>
+                <a:spcPts val="400"/>
+              </a:spcAft>
+            </a:pPr>
+            <a:r>
+              <a:rPr sz="1400" b="0" i="0">
+                <a:solidFill>
+                  <a:srgbClr val="FFFFFF"/>
+                </a:solidFill>
+                <a:latin typeface="Calibri"/>
+              </a:rPr>
+              <a:t>## 1. Titulo     ADR-001 Modelo de servicio dominante de CloudLite App</a:t>
+            </a:r>
+          </a:p>
+          <a:p>
+            <a:pPr>
+              <a:spcAft>
+                <a:spcPts val="400"/>
+              </a:spcAft>
+            </a:pPr>
+            <a:r>
+              <a:rPr sz="1400" b="0" i="0">
+                <a:solidFill>
+                  <a:srgbClr val="FFFFFF"/>
+                </a:solidFill>
+                <a:latin typeface="Calibri"/>
+              </a:rPr>
+              <a:t>## 2. Estado     Aceptado — &lt;fecha de hoy&gt;</a:t>
+            </a:r>
+          </a:p>
+          <a:p>
+            <a:pPr>
+              <a:spcAft>
+                <a:spcPts val="400"/>
+              </a:spcAft>
+            </a:pPr>
+            <a:r>
+              <a:rPr sz="1400" b="0" i="0">
+                <a:solidFill>
+                  <a:srgbClr val="FFFFFF"/>
+                </a:solidFill>
+                <a:latin typeface="Calibri"/>
+              </a:rPr>
+              <a:t/>
+            </a:r>
+          </a:p>
+          <a:p>
+            <a:pPr>
+              <a:spcAft>
+                <a:spcPts val="400"/>
+              </a:spcAft>
+            </a:pPr>
+            <a:r>
+              <a:rPr sz="1400" b="0" i="0">
+                <a:solidFill>
+                  <a:srgbClr val="FFFFFF"/>
+                </a:solidFill>
+                <a:latin typeface="Calibri"/>
+              </a:rPr>
+              <a:t>## 3. Contexto                    &lt;- restricciones, no resumen del tema</a:t>
+            </a:r>
+          </a:p>
+          <a:p>
+            <a:pPr>
+              <a:spcAft>
+                <a:spcPts val="400"/>
+              </a:spcAft>
+            </a:pPr>
+            <a:r>
+              <a:rPr sz="1400" b="0" i="0">
+                <a:solidFill>
+                  <a:srgbClr val="FFFFFF"/>
+                </a:solidFill>
+                <a:latin typeface="Calibri"/>
+              </a:rPr>
+              <a:t>Lo sostengo yo solo, 12 semanas, sin presupuesto cloud ni tarjeta; demo viva el dia de la sustentacion.</a:t>
+            </a:r>
+          </a:p>
+          <a:p>
+            <a:pPr>
+              <a:spcAft>
+                <a:spcPts val="400"/>
+              </a:spcAft>
+            </a:pPr>
+            <a:r>
+              <a:rPr sz="1400" b="0" i="0">
+                <a:solidFill>
+                  <a:srgbClr val="FFFFFF"/>
+                </a:solidFill>
+                <a:latin typeface="Calibri"/>
+              </a:rPr>
+              <a:t/>
+            </a:r>
+          </a:p>
+          <a:p>
+            <a:pPr>
+              <a:spcAft>
+                <a:spcPts val="400"/>
+              </a:spcAft>
+            </a:pPr>
+            <a:r>
+              <a:rPr sz="1400" b="0" i="0">
+                <a:solidFill>
+                  <a:srgbClr val="FFFFFF"/>
+                </a:solidFill>
+                <a:latin typeface="Calibri"/>
+              </a:rPr>
+              <a:t>## 4. Decision                    &lt;- UNA frase, UN modelo dominante</a:t>
+            </a:r>
+          </a:p>
+          <a:p>
+            <a:pPr>
+              <a:spcAft>
+                <a:spcPts val="400"/>
+              </a:spcAft>
+            </a:pPr>
+            <a:r>
+              <a:rPr sz="1400" b="0" i="0">
+                <a:solidFill>
+                  <a:srgbClr val="FFFFFF"/>
+                </a:solidFill>
+                <a:latin typeface="Calibri"/>
+              </a:rPr>
+              <a:t>La aplicacion de CloudLite se despliega sobre PaaS.</a:t>
+            </a:r>
+          </a:p>
+          <a:p>
+            <a:pPr>
+              <a:spcAft>
+                <a:spcPts val="400"/>
+              </a:spcAft>
+            </a:pPr>
+            <a:r>
+              <a:rPr sz="1400" b="0" i="0">
+                <a:solidFill>
+                  <a:srgbClr val="FFFFFF"/>
+                </a:solidFill>
+                <a:latin typeface="Calibri"/>
+              </a:rPr>
+              <a:t/>
+            </a:r>
+          </a:p>
+          <a:p>
+            <a:pPr>
+              <a:spcAft>
+                <a:spcPts val="400"/>
+              </a:spcAft>
+            </a:pPr>
+            <a:r>
+              <a:rPr sz="1400" b="0" i="0">
+                <a:solidFill>
+                  <a:srgbClr val="FFFFFF"/>
+                </a:solidFill>
+                <a:latin typeface="Calibri"/>
+              </a:rPr>
+              <a:t>## 5. Alternativas descartadas    &lt;- exactamente 2, con motivo del dominio</a:t>
+            </a:r>
+          </a:p>
+          <a:p>
+            <a:pPr>
+              <a:spcAft>
+                <a:spcPts val="400"/>
+              </a:spcAft>
+            </a:pPr>
+            <a:r>
+              <a:rPr sz="1400" b="0" i="0">
+                <a:solidFill>
+                  <a:srgbClr val="FFFFFF"/>
+                </a:solidFill>
+                <a:latin typeface="Calibri"/>
+              </a:rPr>
+              <a:t>- IaaS: control total, pero yo opero SO y parches -&gt; tiempo que no tengo.</a:t>
+            </a:r>
+          </a:p>
+          <a:p>
+            <a:pPr>
+              <a:spcAft>
+                <a:spcPts val="400"/>
+              </a:spcAft>
+            </a:pPr>
+            <a:r>
+              <a:rPr sz="1400" b="0" i="0">
+                <a:solidFill>
+                  <a:srgbClr val="FFFFFF"/>
+                </a:solidFill>
+                <a:latin typeface="Calibri"/>
+              </a:rPr>
+              <a:t>- SaaS como nucleo: no queda nada que arquitecturar; solo satelite (auth/email).</a:t>
+            </a:r>
+          </a:p>
+          <a:p>
+            <a:pPr>
+              <a:spcAft>
+                <a:spcPts val="400"/>
+              </a:spcAft>
+            </a:pPr>
+            <a:r>
+              <a:rPr sz="1400" b="0" i="0">
+                <a:solidFill>
+                  <a:srgbClr val="FFFFFF"/>
+                </a:solidFill>
+                <a:latin typeface="Calibri"/>
+              </a:rPr>
+              <a:t/>
+            </a:r>
+          </a:p>
+          <a:p>
+            <a:pPr>
+              <a:spcAft>
+                <a:spcPts val="400"/>
+              </a:spcAft>
+            </a:pPr>
+            <a:r>
+              <a:rPr sz="1400" b="0" i="0">
+                <a:solidFill>
+                  <a:srgbClr val="FFFFFF"/>
+                </a:solidFill>
+                <a:latin typeface="Calibri"/>
+              </a:rPr>
+              <a:t>## 6. Consecuencias               &lt;- pregunta 7: 3 ejes, cada uno con + y -</a:t>
+            </a:r>
+          </a:p>
+          <a:p>
+            <a:pPr>
+              <a:spcAft>
+                <a:spcPts val="400"/>
+              </a:spcAft>
+            </a:pPr>
+            <a:r>
+              <a:rPr sz="1400" b="0" i="0">
+                <a:solidFill>
+                  <a:srgbClr val="FFFFFF"/>
+                </a:solidFill>
+                <a:latin typeface="Calibri"/>
+              </a:rPr>
+              <a:t>Operacion + / -        Costo + / -        Aprendizaje + / -</a:t>
+            </a:r>
+          </a:p>
+        </p:txBody>
+      </p:sp>
+      <p:sp>
+        <p:nvSpPr>
+          <p:cNvPr id="9" name="TextBox 8"/>
+          <p:cNvSpPr txBox="1"/>
+          <p:nvPr/>
+        </p:nvSpPr>
+        <p:spPr>
+          <a:xfrm>
+            <a:off x="457200" y="6080760"/>
+            <a:ext cx="11277295" cy="320040"/>
+          </a:xfrm>
+          <a:prstGeom prst="rect">
+            <a:avLst/>
+          </a:prstGeom>
+          <a:noFill/>
+        </p:spPr>
+        <p:txBody>
+          <a:bodyPr wrap="square">
+            <a:spAutoFit/>
+          </a:bodyPr>
+          <a:lstStyle/>
+          <a:p>
+            <a:pPr algn="ctr"/>
+            <a:r>
+              <a:rPr sz="1200" b="0" i="1">
+                <a:solidFill>
+                  <a:srgbClr val="666666"/>
+                </a:solidFill>
+                <a:latin typeface="Calibri"/>
+              </a:rPr>
+              <a:t>Sin Titulo y Estado con fecha no hay ADR que citar en la Clase 15: son 1.5 puntos de la pregunta 6.</a:t>
+            </a:r>
+          </a:p>
+        </p:txBody>
+      </p:sp>
+      <p:sp>
+        <p:nvSpPr>
+          <p:cNvPr id="10" name="TextBox 9"/>
+          <p:cNvSpPr txBox="1"/>
+          <p:nvPr/>
+        </p:nvSpPr>
+        <p:spPr>
+          <a:xfrm>
+            <a:off x="11185855" y="6473952"/>
+            <a:ext cx="640080" cy="274320"/>
+          </a:xfrm>
+          <a:prstGeom prst="rect">
+            <a:avLst/>
+          </a:prstGeom>
+          <a:noFill/>
+        </p:spPr>
+        <p:txBody>
+          <a:bodyPr wrap="square">
+            <a:spAutoFit/>
+          </a:bodyPr>
+          <a:lstStyle/>
+          <a:p>
+            <a:pPr algn="r"/>
+            <a:r>
+              <a:rPr sz="1100" b="0" i="0">
+                <a:solidFill>
+                  <a:srgbClr val="666666"/>
+                </a:solidFill>
+                <a:latin typeface="Calibri"/>
+              </a:rPr>
+              <a:t>28</a:t>
+            </a:r>
+          </a:p>
+        </p:txBody>
+      </p:sp>
+    </p:spTree>
+  </p:cSld>
+  <p:clrMapOvr>
+    <a:masterClrMapping/>
+  </p:clrMapOvr>
+</p:sld>
+</file>
+
+<file path=ppt/slides/slide29.xml><?xml version="1.0" encoding="utf-8"?>
+<p:sld xmlns:a="http://schemas.openxmlformats.org/drawingml/2006/main" xmlns:p="http://schemas.openxmlformats.org/presentationml/2006/main" xmlns:r="http://schemas.openxmlformats.org/officeDocument/2006/relationships">
+  <p:cSld>
+    <p:bg>
+      <p:bgPr>
+        <a:solidFill>
+          <a:srgbClr val="FFFFFF"/>
+        </a:solidFill>
+        <a:effectLst/>
+      </p:bgPr>
+    </p:bg>
+    <p:spTree>
+      <p:nvGrpSpPr>
+        <p:cNvPr id="1" name=""/>
+        <p:cNvGrpSpPr/>
+        <p:nvPr/>
+      </p:nvGrpSpPr>
+      <p:grpSpPr/>
+      <p:sp>
+        <p:nvSpPr>
+          <p:cNvPr id="2" name="Rectangle 1"/>
+          <p:cNvSpPr/>
+          <p:nvPr/>
+        </p:nvSpPr>
+        <p:spPr>
+          <a:xfrm>
+            <a:off x="0" y="0"/>
+            <a:ext cx="12191695" cy="1170432"/>
+          </a:xfrm>
+          <a:prstGeom prst="rect">
+            <a:avLst/>
+          </a:prstGeom>
+          <a:solidFill>
+            <a:srgbClr val="095292"/>
+          </a:solidFill>
+          <a:ln>
+            <a:noFill/>
+          </a:ln>
+        </p:spPr>
+        <p:style>
+          <a:lnRef idx="1">
+            <a:schemeClr val="accent1"/>
+          </a:lnRef>
+          <a:fillRef idx="3">
+            <a:schemeClr val="accent1"/>
+          </a:fillRef>
+          <a:effectRef idx="2">
+            <a:schemeClr val="accent1"/>
+          </a:effectRef>
+          <a:fontRef idx="minor">
+            <a:schemeClr val="lt1"/>
+          </a:fontRef>
+        </p:style>
+        <p:txBody>
+          <a:bodyPr rtlCol="0" anchor="ctr"/>
+          <a:lstStyle/>
+          <a:p>
+            <a:pPr algn="ctr"/>
+          </a:p>
+        </p:txBody>
+      </p:sp>
+      <p:sp>
+        <p:nvSpPr>
+          <p:cNvPr id="3" name="Rectangle 2"/>
+          <p:cNvSpPr/>
+          <p:nvPr/>
+        </p:nvSpPr>
+        <p:spPr>
+          <a:xfrm>
+            <a:off x="0" y="1170432"/>
+            <a:ext cx="12191695" cy="41148"/>
+          </a:xfrm>
+          <a:prstGeom prst="rect">
+            <a:avLst/>
+          </a:prstGeom>
+          <a:solidFill>
+            <a:srgbClr val="FFD000"/>
+          </a:solidFill>
+          <a:ln>
+            <a:noFill/>
+          </a:ln>
+        </p:spPr>
+        <p:style>
+          <a:lnRef idx="1">
+            <a:schemeClr val="accent1"/>
+          </a:lnRef>
+          <a:fillRef idx="3">
+            <a:schemeClr val="accent1"/>
+          </a:fillRef>
+          <a:effectRef idx="2">
+            <a:schemeClr val="accent1"/>
+          </a:effectRef>
+          <a:fontRef idx="minor">
+            <a:schemeClr val="lt1"/>
+          </a:fontRef>
+        </p:style>
+        <p:txBody>
+          <a:bodyPr rtlCol="0" anchor="ctr"/>
+          <a:lstStyle/>
+          <a:p>
+            <a:pPr algn="ctr"/>
+          </a:p>
+        </p:txBody>
+      </p:sp>
+      <p:sp>
+        <p:nvSpPr>
+          <p:cNvPr id="4" name="TextBox 3"/>
+          <p:cNvSpPr txBox="1"/>
+          <p:nvPr/>
+        </p:nvSpPr>
+        <p:spPr>
+          <a:xfrm>
+            <a:off x="457200" y="164592"/>
+            <a:ext cx="11277295" cy="384048"/>
+          </a:xfrm>
+          <a:prstGeom prst="rect">
+            <a:avLst/>
+          </a:prstGeom>
+          <a:noFill/>
+        </p:spPr>
+        <p:txBody>
+          <a:bodyPr wrap="square">
+            <a:spAutoFit/>
+          </a:bodyPr>
+          <a:lstStyle/>
+          <a:p>
+            <a:r>
+              <a:rPr sz="2600" b="1" i="0">
+                <a:solidFill>
+                  <a:srgbClr val="FFFFFF"/>
+                </a:solidFill>
+                <a:latin typeface="Calibri"/>
+              </a:rPr>
+              <a:t>Herramientas de hoy</a:t>
+            </a:r>
+          </a:p>
+        </p:txBody>
+      </p:sp>
+      <p:sp>
+        <p:nvSpPr>
+          <p:cNvPr id="5" name="TextBox 4"/>
+          <p:cNvSpPr txBox="1"/>
+          <p:nvPr/>
+        </p:nvSpPr>
+        <p:spPr>
+          <a:xfrm>
+            <a:off x="457200" y="566928"/>
+            <a:ext cx="11277295" cy="411480"/>
+          </a:xfrm>
+          <a:prstGeom prst="rect">
+            <a:avLst/>
+          </a:prstGeom>
+          <a:noFill/>
+        </p:spPr>
+        <p:txBody>
+          <a:bodyPr wrap="square">
+            <a:spAutoFit/>
+          </a:bodyPr>
+          <a:lstStyle/>
+          <a:p>
+            <a:r>
+              <a:rPr sz="1400" b="0" i="0">
+                <a:solidFill>
+                  <a:srgbClr val="B8D8EE"/>
+                </a:solidFill>
+                <a:latin typeface="Calibri"/>
+              </a:rPr>
+              <a:t>Gratis · navegador o free tier · sin cuenta de pago</a:t>
+            </a:r>
+          </a:p>
+        </p:txBody>
+      </p:sp>
+      <p:sp>
+        <p:nvSpPr>
+          <p:cNvPr id="6" name="Rounded Rectangle 5"/>
+          <p:cNvSpPr/>
+          <p:nvPr/>
+        </p:nvSpPr>
+        <p:spPr>
+          <a:xfrm>
+            <a:off x="457200" y="1591056"/>
+            <a:ext cx="3624986" cy="2331720"/>
+          </a:xfrm>
+          <a:prstGeom prst="roundRect">
+            <a:avLst>
+              <a:gd name="adj" fmla="val 12000"/>
+            </a:avLst>
+          </a:prstGeom>
+          <a:solidFill>
+            <a:srgbClr val="F2F2F2"/>
+          </a:solidFill>
+          <a:ln>
+            <a:noFill/>
+          </a:ln>
+        </p:spPr>
+        <p:style>
+          <a:lnRef idx="1">
+            <a:schemeClr val="accent1"/>
+          </a:lnRef>
+          <a:fillRef idx="3">
+            <a:schemeClr val="accent1"/>
+          </a:fillRef>
+          <a:effectRef idx="2">
+            <a:schemeClr val="accent1"/>
+          </a:effectRef>
+          <a:fontRef idx="minor">
+            <a:schemeClr val="lt1"/>
+          </a:fontRef>
+        </p:style>
+        <p:txBody>
+          <a:bodyPr rtlCol="0" anchor="ctr"/>
+          <a:lstStyle/>
+          <a:p>
+            <a:pPr algn="ctr"/>
+          </a:p>
+        </p:txBody>
+      </p:sp>
+      <p:sp>
+        <p:nvSpPr>
+          <p:cNvPr id="7" name="Rectangle 6"/>
+          <p:cNvSpPr/>
+          <p:nvPr/>
+        </p:nvSpPr>
+        <p:spPr>
+          <a:xfrm>
+            <a:off x="457200" y="1591056"/>
+            <a:ext cx="3624986" cy="64008"/>
+          </a:xfrm>
+          <a:prstGeom prst="rect">
+            <a:avLst/>
+          </a:prstGeom>
+          <a:solidFill>
+            <a:srgbClr val="095292"/>
+          </a:solidFill>
+          <a:ln>
+            <a:noFill/>
+          </a:ln>
+        </p:spPr>
+        <p:style>
+          <a:lnRef idx="1">
+            <a:schemeClr val="accent1"/>
+          </a:lnRef>
+          <a:fillRef idx="3">
+            <a:schemeClr val="accent1"/>
+          </a:fillRef>
+          <a:effectRef idx="2">
+            <a:schemeClr val="accent1"/>
+          </a:effectRef>
+          <a:fontRef idx="minor">
+            <a:schemeClr val="lt1"/>
+          </a:fontRef>
+        </p:style>
+        <p:txBody>
+          <a:bodyPr rtlCol="0" anchor="ctr"/>
+          <a:lstStyle/>
+          <a:p>
+            <a:pPr algn="ctr"/>
+          </a:p>
+        </p:txBody>
+      </p:sp>
+      <p:sp>
+        <p:nvSpPr>
+          <p:cNvPr id="8" name="Rectangle 7"/>
+          <p:cNvSpPr/>
+          <p:nvPr/>
+        </p:nvSpPr>
+        <p:spPr>
+          <a:xfrm>
+            <a:off x="457200" y="1655064"/>
+            <a:ext cx="3624986" cy="27432"/>
+          </a:xfrm>
+          <a:prstGeom prst="rect">
+            <a:avLst/>
+          </a:prstGeom>
+          <a:solidFill>
+            <a:srgbClr val="FFD000"/>
+          </a:solidFill>
+          <a:ln>
+            <a:noFill/>
+          </a:ln>
+        </p:spPr>
+        <p:style>
+          <a:lnRef idx="1">
+            <a:schemeClr val="accent1"/>
+          </a:lnRef>
+          <a:fillRef idx="3">
+            <a:schemeClr val="accent1"/>
+          </a:fillRef>
+          <a:effectRef idx="2">
+            <a:schemeClr val="accent1"/>
+          </a:effectRef>
+          <a:fontRef idx="minor">
+            <a:schemeClr val="lt1"/>
+          </a:fontRef>
+        </p:style>
+        <p:txBody>
           <a:bodyPr rtlCol="0" anchor="ctr"/>
           <a:lstStyle/>
           <a:p>
@@ -10948,7 +10354,7 @@
       </p:sp>
       <p:pic>
         <p:nvPicPr>
-          <p:cNvPr id="3" name="Picture 2" descr="logo_uniajc_color.png"/>
+          <p:cNvPr id="9" name="Picture 8" descr="google_docs.png"/>
           <p:cNvPicPr>
             <a:picLocks noChangeAspect="1"/>
           </p:cNvPicPr>
@@ -10962,8 +10368,8 @@
         </p:blipFill>
         <p:spPr>
           <a:xfrm>
-            <a:off x="10271455" y="5998464"/>
-            <a:ext cx="1463040" cy="643233"/>
+            <a:off x="1643329" y="1847087"/>
+            <a:ext cx="1252728" cy="1252728"/>
           </a:xfrm>
           <a:prstGeom prst="rect">
             <a:avLst/>
@@ -10972,14 +10378,14 @@
       </p:pic>
       <p:sp>
         <p:nvSpPr>
-          <p:cNvPr id="4" name="TextBox 3"/>
+          <p:cNvPr id="10" name="TextBox 9"/>
           <p:cNvSpPr txBox="1"/>
           <p:nvPr/>
         </p:nvSpPr>
         <p:spPr>
           <a:xfrm>
-            <a:off x="457200" y="1737360"/>
-            <a:ext cx="11277295" cy="1097280"/>
+            <a:off x="530352" y="3191256"/>
+            <a:ext cx="3478682" cy="621792"/>
           </a:xfrm>
           <a:prstGeom prst="rect">
             <a:avLst/>
@@ -10987,32 +10393,456 @@
           <a:noFill/>
         </p:spPr>
         <p:txBody>
-          <a:bodyPr wrap="square" anchor="ctr"/>
+          <a:bodyPr wrap="square" anchor="t"/>
           <a:lstStyle/>
           <a:p>
             <a:pPr algn="ctr"/>
             <a:r>
-              <a:rPr sz="3400" b="1" i="0">
+              <a:rPr sz="1300" b="1" i="0">
                 <a:solidFill>
                   <a:srgbClr val="095292"/>
                 </a:solidFill>
                 <a:latin typeface="Calibri"/>
               </a:rPr>
-              <a:t>Clase 2 · PI en movimiento</a:t>
-            </a:r>
-          </a:p>
-        </p:txBody>
-      </p:sp>
-      <p:sp>
-        <p:nvSpPr>
-          <p:cNvPr id="5" name="TextBox 4"/>
+              <a:t>Google Docs</a:t>
+            </a:r>
+          </a:p>
+          <a:p>
+            <a:pPr algn="ctr">
+              <a:spcBef>
+                <a:spcPts val="200"/>
+              </a:spcBef>
+            </a:pPr>
+            <a:r>
+              <a:rPr sz="1000" b="0" i="0">
+                <a:solidFill>
+                  <a:srgbClr val="666666"/>
+                </a:solidFill>
+                <a:latin typeface="Calibri"/>
+              </a:rPr>
+              <a:t>ADR-001</a:t>
+            </a:r>
+          </a:p>
+        </p:txBody>
+      </p:sp>
+      <p:sp>
+        <p:nvSpPr>
+          <p:cNvPr id="11" name="Rounded Rectangle 10"/>
+          <p:cNvSpPr/>
+          <p:nvPr/>
+        </p:nvSpPr>
+        <p:spPr>
+          <a:xfrm>
+            <a:off x="4283354" y="1591056"/>
+            <a:ext cx="3624986" cy="2331720"/>
+          </a:xfrm>
+          <a:prstGeom prst="roundRect">
+            <a:avLst>
+              <a:gd name="adj" fmla="val 12000"/>
+            </a:avLst>
+          </a:prstGeom>
+          <a:solidFill>
+            <a:srgbClr val="F2F2F2"/>
+          </a:solidFill>
+          <a:ln>
+            <a:noFill/>
+          </a:ln>
+        </p:spPr>
+        <p:style>
+          <a:lnRef idx="1">
+            <a:schemeClr val="accent1"/>
+          </a:lnRef>
+          <a:fillRef idx="3">
+            <a:schemeClr val="accent1"/>
+          </a:fillRef>
+          <a:effectRef idx="2">
+            <a:schemeClr val="accent1"/>
+          </a:effectRef>
+          <a:fontRef idx="minor">
+            <a:schemeClr val="lt1"/>
+          </a:fontRef>
+        </p:style>
+        <p:txBody>
+          <a:bodyPr rtlCol="0" anchor="ctr"/>
+          <a:lstStyle/>
+          <a:p>
+            <a:pPr algn="ctr"/>
+          </a:p>
+        </p:txBody>
+      </p:sp>
+      <p:sp>
+        <p:nvSpPr>
+          <p:cNvPr id="12" name="Rectangle 11"/>
+          <p:cNvSpPr/>
+          <p:nvPr/>
+        </p:nvSpPr>
+        <p:spPr>
+          <a:xfrm>
+            <a:off x="4283354" y="1591056"/>
+            <a:ext cx="3624986" cy="64008"/>
+          </a:xfrm>
+          <a:prstGeom prst="rect">
+            <a:avLst/>
+          </a:prstGeom>
+          <a:solidFill>
+            <a:srgbClr val="095292"/>
+          </a:solidFill>
+          <a:ln>
+            <a:noFill/>
+          </a:ln>
+        </p:spPr>
+        <p:style>
+          <a:lnRef idx="1">
+            <a:schemeClr val="accent1"/>
+          </a:lnRef>
+          <a:fillRef idx="3">
+            <a:schemeClr val="accent1"/>
+          </a:fillRef>
+          <a:effectRef idx="2">
+            <a:schemeClr val="accent1"/>
+          </a:effectRef>
+          <a:fontRef idx="minor">
+            <a:schemeClr val="lt1"/>
+          </a:fontRef>
+        </p:style>
+        <p:txBody>
+          <a:bodyPr rtlCol="0" anchor="ctr"/>
+          <a:lstStyle/>
+          <a:p>
+            <a:pPr algn="ctr"/>
+          </a:p>
+        </p:txBody>
+      </p:sp>
+      <p:sp>
+        <p:nvSpPr>
+          <p:cNvPr id="13" name="Rectangle 12"/>
+          <p:cNvSpPr/>
+          <p:nvPr/>
+        </p:nvSpPr>
+        <p:spPr>
+          <a:xfrm>
+            <a:off x="4283354" y="1655064"/>
+            <a:ext cx="3624986" cy="27432"/>
+          </a:xfrm>
+          <a:prstGeom prst="rect">
+            <a:avLst/>
+          </a:prstGeom>
+          <a:solidFill>
+            <a:srgbClr val="FFD000"/>
+          </a:solidFill>
+          <a:ln>
+            <a:noFill/>
+          </a:ln>
+        </p:spPr>
+        <p:style>
+          <a:lnRef idx="1">
+            <a:schemeClr val="accent1"/>
+          </a:lnRef>
+          <a:fillRef idx="3">
+            <a:schemeClr val="accent1"/>
+          </a:fillRef>
+          <a:effectRef idx="2">
+            <a:schemeClr val="accent1"/>
+          </a:effectRef>
+          <a:fontRef idx="minor">
+            <a:schemeClr val="lt1"/>
+          </a:fontRef>
+        </p:style>
+        <p:txBody>
+          <a:bodyPr rtlCol="0" anchor="ctr"/>
+          <a:lstStyle/>
+          <a:p>
+            <a:pPr algn="ctr"/>
+          </a:p>
+        </p:txBody>
+      </p:sp>
+      <p:pic>
+        <p:nvPicPr>
+          <p:cNvPr id="14" name="Picture 13" descr="drawio.png"/>
+          <p:cNvPicPr>
+            <a:picLocks noChangeAspect="1"/>
+          </p:cNvPicPr>
+          <p:nvPr/>
+        </p:nvPicPr>
+        <p:blipFill>
+          <a:blip r:embed="rId3"/>
+          <a:stretch>
+            <a:fillRect/>
+          </a:stretch>
+        </p:blipFill>
+        <p:spPr>
+          <a:xfrm>
+            <a:off x="5469483" y="1847087"/>
+            <a:ext cx="1252728" cy="1252728"/>
+          </a:xfrm>
+          <a:prstGeom prst="rect">
+            <a:avLst/>
+          </a:prstGeom>
+        </p:spPr>
+      </p:pic>
+      <p:sp>
+        <p:nvSpPr>
+          <p:cNvPr id="15" name="TextBox 14"/>
           <p:cNvSpPr txBox="1"/>
           <p:nvPr/>
         </p:nvSpPr>
         <p:spPr>
           <a:xfrm>
-            <a:off x="457200" y="3017520"/>
-            <a:ext cx="11277295" cy="1645920"/>
+            <a:off x="4356506" y="3191256"/>
+            <a:ext cx="3478682" cy="621792"/>
+          </a:xfrm>
+          <a:prstGeom prst="rect">
+            <a:avLst/>
+          </a:prstGeom>
+          <a:noFill/>
+        </p:spPr>
+        <p:txBody>
+          <a:bodyPr wrap="square" anchor="t"/>
+          <a:lstStyle/>
+          <a:p>
+            <a:pPr algn="ctr"/>
+            <a:r>
+              <a:rPr sz="1300" b="1" i="0">
+                <a:solidFill>
+                  <a:srgbClr val="095292"/>
+                </a:solidFill>
+                <a:latin typeface="Calibri"/>
+              </a:rPr>
+              <a:t>draw.io</a:t>
+            </a:r>
+          </a:p>
+          <a:p>
+            <a:pPr algn="ctr">
+              <a:spcBef>
+                <a:spcPts val="200"/>
+              </a:spcBef>
+            </a:pPr>
+            <a:r>
+              <a:rPr sz="1000" b="0" i="0">
+                <a:solidFill>
+                  <a:srgbClr val="666666"/>
+                </a:solidFill>
+                <a:latin typeface="Calibri"/>
+              </a:rPr>
+              <a:t>Matriz de modelos</a:t>
+            </a:r>
+          </a:p>
+        </p:txBody>
+      </p:sp>
+      <p:sp>
+        <p:nvSpPr>
+          <p:cNvPr id="16" name="Rounded Rectangle 15"/>
+          <p:cNvSpPr/>
+          <p:nvPr/>
+        </p:nvSpPr>
+        <p:spPr>
+          <a:xfrm>
+            <a:off x="8109508" y="1591056"/>
+            <a:ext cx="3624986" cy="2331720"/>
+          </a:xfrm>
+          <a:prstGeom prst="roundRect">
+            <a:avLst>
+              <a:gd name="adj" fmla="val 12000"/>
+            </a:avLst>
+          </a:prstGeom>
+          <a:solidFill>
+            <a:srgbClr val="F2F2F2"/>
+          </a:solidFill>
+          <a:ln>
+            <a:noFill/>
+          </a:ln>
+        </p:spPr>
+        <p:style>
+          <a:lnRef idx="1">
+            <a:schemeClr val="accent1"/>
+          </a:lnRef>
+          <a:fillRef idx="3">
+            <a:schemeClr val="accent1"/>
+          </a:fillRef>
+          <a:effectRef idx="2">
+            <a:schemeClr val="accent1"/>
+          </a:effectRef>
+          <a:fontRef idx="minor">
+            <a:schemeClr val="lt1"/>
+          </a:fontRef>
+        </p:style>
+        <p:txBody>
+          <a:bodyPr rtlCol="0" anchor="ctr"/>
+          <a:lstStyle/>
+          <a:p>
+            <a:pPr algn="ctr"/>
+          </a:p>
+        </p:txBody>
+      </p:sp>
+      <p:sp>
+        <p:nvSpPr>
+          <p:cNvPr id="17" name="Rectangle 16"/>
+          <p:cNvSpPr/>
+          <p:nvPr/>
+        </p:nvSpPr>
+        <p:spPr>
+          <a:xfrm>
+            <a:off x="8109508" y="1591056"/>
+            <a:ext cx="3624986" cy="64008"/>
+          </a:xfrm>
+          <a:prstGeom prst="rect">
+            <a:avLst/>
+          </a:prstGeom>
+          <a:solidFill>
+            <a:srgbClr val="095292"/>
+          </a:solidFill>
+          <a:ln>
+            <a:noFill/>
+          </a:ln>
+        </p:spPr>
+        <p:style>
+          <a:lnRef idx="1">
+            <a:schemeClr val="accent1"/>
+          </a:lnRef>
+          <a:fillRef idx="3">
+            <a:schemeClr val="accent1"/>
+          </a:fillRef>
+          <a:effectRef idx="2">
+            <a:schemeClr val="accent1"/>
+          </a:effectRef>
+          <a:fontRef idx="minor">
+            <a:schemeClr val="lt1"/>
+          </a:fontRef>
+        </p:style>
+        <p:txBody>
+          <a:bodyPr rtlCol="0" anchor="ctr"/>
+          <a:lstStyle/>
+          <a:p>
+            <a:pPr algn="ctr"/>
+          </a:p>
+        </p:txBody>
+      </p:sp>
+      <p:sp>
+        <p:nvSpPr>
+          <p:cNvPr id="18" name="Rectangle 17"/>
+          <p:cNvSpPr/>
+          <p:nvPr/>
+        </p:nvSpPr>
+        <p:spPr>
+          <a:xfrm>
+            <a:off x="8109508" y="1655064"/>
+            <a:ext cx="3624986" cy="27432"/>
+          </a:xfrm>
+          <a:prstGeom prst="rect">
+            <a:avLst/>
+          </a:prstGeom>
+          <a:solidFill>
+            <a:srgbClr val="FFD000"/>
+          </a:solidFill>
+          <a:ln>
+            <a:noFill/>
+          </a:ln>
+        </p:spPr>
+        <p:style>
+          <a:lnRef idx="1">
+            <a:schemeClr val="accent1"/>
+          </a:lnRef>
+          <a:fillRef idx="3">
+            <a:schemeClr val="accent1"/>
+          </a:fillRef>
+          <a:effectRef idx="2">
+            <a:schemeClr val="accent1"/>
+          </a:effectRef>
+          <a:fontRef idx="minor">
+            <a:schemeClr val="lt1"/>
+          </a:fontRef>
+        </p:style>
+        <p:txBody>
+          <a:bodyPr rtlCol="0" anchor="ctr"/>
+          <a:lstStyle/>
+          <a:p>
+            <a:pPr algn="ctr"/>
+          </a:p>
+        </p:txBody>
+      </p:sp>
+      <p:pic>
+        <p:nvPicPr>
+          <p:cNvPr id="19" name="Picture 18" descr="examlab.png"/>
+          <p:cNvPicPr>
+            <a:picLocks noChangeAspect="1"/>
+          </p:cNvPicPr>
+          <p:nvPr/>
+        </p:nvPicPr>
+        <p:blipFill>
+          <a:blip r:embed="rId4"/>
+          <a:stretch>
+            <a:fillRect/>
+          </a:stretch>
+        </p:blipFill>
+        <p:spPr>
+          <a:xfrm>
+            <a:off x="9295638" y="1847087"/>
+            <a:ext cx="1252728" cy="1252728"/>
+          </a:xfrm>
+          <a:prstGeom prst="rect">
+            <a:avLst/>
+          </a:prstGeom>
+        </p:spPr>
+      </p:pic>
+      <p:sp>
+        <p:nvSpPr>
+          <p:cNvPr id="20" name="TextBox 19"/>
+          <p:cNvSpPr txBox="1"/>
+          <p:nvPr/>
+        </p:nvSpPr>
+        <p:spPr>
+          <a:xfrm>
+            <a:off x="8182660" y="3191256"/>
+            <a:ext cx="3478682" cy="621792"/>
+          </a:xfrm>
+          <a:prstGeom prst="rect">
+            <a:avLst/>
+          </a:prstGeom>
+          <a:noFill/>
+        </p:spPr>
+        <p:txBody>
+          <a:bodyPr wrap="square" anchor="t"/>
+          <a:lstStyle/>
+          <a:p>
+            <a:pPr algn="ctr"/>
+            <a:r>
+              <a:rPr sz="1300" b="1" i="0">
+                <a:solidFill>
+                  <a:srgbClr val="095292"/>
+                </a:solidFill>
+                <a:latin typeface="Calibri"/>
+              </a:rPr>
+              <a:t>la plataforma del curso</a:t>
+            </a:r>
+          </a:p>
+          <a:p>
+            <a:pPr algn="ctr">
+              <a:spcBef>
+                <a:spcPts val="200"/>
+              </a:spcBef>
+            </a:pPr>
+            <a:r>
+              <a:rPr sz="1000" b="0" i="0">
+                <a:solidFill>
+                  <a:srgbClr val="666666"/>
+                </a:solidFill>
+                <a:latin typeface="Calibri"/>
+              </a:rPr>
+              <a:t>Donde se entrega</a:t>
+            </a:r>
+          </a:p>
+        </p:txBody>
+      </p:sp>
+      <p:sp>
+        <p:nvSpPr>
+          <p:cNvPr id="21" name="TextBox 20"/>
+          <p:cNvSpPr txBox="1"/>
+          <p:nvPr/>
+        </p:nvSpPr>
+        <p:spPr>
+          <a:xfrm>
+            <a:off x="11185855" y="6473952"/>
+            <a:ext cx="640080" cy="274320"/>
           </a:xfrm>
           <a:prstGeom prst="rect">
             <a:avLst/>
@@ -11025,86 +10855,15 @@
           </a:bodyPr>
           <a:lstStyle/>
           <a:p>
-            <a:pPr algn="ctr">
-              <a:spcAft>
-                <a:spcPts val="600"/>
-              </a:spcAft>
-            </a:pPr>
-            <a:r>
-              <a:rPr sz="1600" b="0" i="0">
-                <a:solidFill>
-                  <a:srgbClr val="333333"/>
-                </a:solidFill>
-                <a:latin typeface="Calibri"/>
-              </a:rPr>
-              <a:t>Decidir modelo dominante (IaaS/PaaS/SaaS) para CloudLite + ADR breve</a:t>
-            </a:r>
-          </a:p>
-          <a:p>
-            <a:pPr algn="ctr">
-              <a:spcAft>
-                <a:spcPts val="600"/>
-              </a:spcAft>
-            </a:pPr>
-            <a:r>
-              <a:rPr sz="1600" b="0" i="0">
-                <a:solidFill>
-                  <a:srgbClr val="333333"/>
-                </a:solidFill>
-                <a:latin typeface="Calibri"/>
-              </a:rPr>
-              <a:t>Evidencia: ADR-001: decisión de modelo de servicio + matriz de comparación aplicada al dominio</a:t>
-            </a:r>
-          </a:p>
-          <a:p>
-            <a:pPr algn="ctr">
-              <a:spcAft>
-                <a:spcPts val="600"/>
-              </a:spcAft>
-            </a:pPr>
-            <a:r>
-              <a:rPr sz="1600" b="0" i="0">
-                <a:solidFill>
-                  <a:srgbClr val="333333"/>
-                </a:solidFill>
-                <a:latin typeface="Calibri"/>
-              </a:rPr>
-              <a:t>Siguiente paso = siguiente hito del PI CloudLite</a:t>
-            </a:r>
-          </a:p>
-        </p:txBody>
-      </p:sp>
-      <p:sp>
-        <p:nvSpPr>
-          <p:cNvPr id="6" name="TextBox 5"/>
-          <p:cNvSpPr txBox="1"/>
-          <p:nvPr/>
-        </p:nvSpPr>
-        <p:spPr>
-          <a:xfrm>
-            <a:off x="457200" y="4754880"/>
-            <a:ext cx="11277295" cy="640080"/>
-          </a:xfrm>
-          <a:prstGeom prst="rect">
-            <a:avLst/>
-          </a:prstGeom>
-          <a:noFill/>
-        </p:spPr>
-        <p:txBody>
-          <a:bodyPr wrap="square">
-            <a:spAutoFit/>
-          </a:bodyPr>
-          <a:lstStyle/>
-          <a:p>
-            <a:pPr algn="ctr"/>
-            <a:r>
-              <a:rPr sz="2000" b="1" i="0">
-                <a:solidFill>
-                  <a:srgbClr val="269CCB"/>
-                </a:solidFill>
-                <a:latin typeface="Calibri"/>
-              </a:rPr>
-              <a:t>Teoría al servicio del proyecto</a:t>
+            <a:pPr algn="r"/>
+            <a:r>
+              <a:rPr sz="1100" b="0" i="0">
+                <a:solidFill>
+                  <a:srgbClr val="666666"/>
+                </a:solidFill>
+                <a:latin typeface="Calibri"/>
+              </a:rPr>
+              <a:t>29</a:t>
             </a:r>
           </a:p>
         </p:txBody>
@@ -11405,6 +11164,1477 @@
 </p:sld>
 </file>
 
+<file path=ppt/slides/slide30.xml><?xml version="1.0" encoding="utf-8"?>
+<p:sld xmlns:a="http://schemas.openxmlformats.org/drawingml/2006/main" xmlns:p="http://schemas.openxmlformats.org/presentationml/2006/main" xmlns:r="http://schemas.openxmlformats.org/officeDocument/2006/relationships">
+  <p:cSld>
+    <p:bg>
+      <p:bgPr>
+        <a:solidFill>
+          <a:srgbClr val="FFFFFF"/>
+        </a:solidFill>
+        <a:effectLst/>
+      </p:bgPr>
+    </p:bg>
+    <p:spTree>
+      <p:nvGrpSpPr>
+        <p:cNvPr id="1" name=""/>
+        <p:cNvGrpSpPr/>
+        <p:nvPr/>
+      </p:nvGrpSpPr>
+      <p:grpSpPr/>
+      <p:sp>
+        <p:nvSpPr>
+          <p:cNvPr id="2" name="Rectangle 1"/>
+          <p:cNvSpPr/>
+          <p:nvPr/>
+        </p:nvSpPr>
+        <p:spPr>
+          <a:xfrm>
+            <a:off x="0" y="0"/>
+            <a:ext cx="12191695" cy="960120"/>
+          </a:xfrm>
+          <a:prstGeom prst="rect">
+            <a:avLst/>
+          </a:prstGeom>
+          <a:solidFill>
+            <a:srgbClr val="095292"/>
+          </a:solidFill>
+          <a:ln>
+            <a:noFill/>
+          </a:ln>
+        </p:spPr>
+        <p:style>
+          <a:lnRef idx="1">
+            <a:schemeClr val="accent1"/>
+          </a:lnRef>
+          <a:fillRef idx="3">
+            <a:schemeClr val="accent1"/>
+          </a:fillRef>
+          <a:effectRef idx="2">
+            <a:schemeClr val="accent1"/>
+          </a:effectRef>
+          <a:fontRef idx="minor">
+            <a:schemeClr val="lt1"/>
+          </a:fontRef>
+        </p:style>
+        <p:txBody>
+          <a:bodyPr rtlCol="0" anchor="ctr"/>
+          <a:lstStyle/>
+          <a:p>
+            <a:pPr algn="ctr"/>
+          </a:p>
+        </p:txBody>
+      </p:sp>
+      <p:sp>
+        <p:nvSpPr>
+          <p:cNvPr id="3" name="Rectangle 2"/>
+          <p:cNvSpPr/>
+          <p:nvPr/>
+        </p:nvSpPr>
+        <p:spPr>
+          <a:xfrm>
+            <a:off x="0" y="960120"/>
+            <a:ext cx="12191695" cy="41148"/>
+          </a:xfrm>
+          <a:prstGeom prst="rect">
+            <a:avLst/>
+          </a:prstGeom>
+          <a:solidFill>
+            <a:srgbClr val="FFD000"/>
+          </a:solidFill>
+          <a:ln>
+            <a:noFill/>
+          </a:ln>
+        </p:spPr>
+        <p:style>
+          <a:lnRef idx="1">
+            <a:schemeClr val="accent1"/>
+          </a:lnRef>
+          <a:fillRef idx="3">
+            <a:schemeClr val="accent1"/>
+          </a:fillRef>
+          <a:effectRef idx="2">
+            <a:schemeClr val="accent1"/>
+          </a:effectRef>
+          <a:fontRef idx="minor">
+            <a:schemeClr val="lt1"/>
+          </a:fontRef>
+        </p:style>
+        <p:txBody>
+          <a:bodyPr rtlCol="0" anchor="ctr"/>
+          <a:lstStyle/>
+          <a:p>
+            <a:pPr algn="ctr"/>
+          </a:p>
+        </p:txBody>
+      </p:sp>
+      <p:sp>
+        <p:nvSpPr>
+          <p:cNvPr id="4" name="TextBox 3"/>
+          <p:cNvSpPr txBox="1"/>
+          <p:nvPr/>
+        </p:nvSpPr>
+        <p:spPr>
+          <a:xfrm>
+            <a:off x="457200" y="164592"/>
+            <a:ext cx="11277295" cy="502920"/>
+          </a:xfrm>
+          <a:prstGeom prst="rect">
+            <a:avLst/>
+          </a:prstGeom>
+          <a:noFill/>
+        </p:spPr>
+        <p:txBody>
+          <a:bodyPr wrap="square">
+            <a:spAutoFit/>
+          </a:bodyPr>
+          <a:lstStyle/>
+          <a:p>
+            <a:r>
+              <a:rPr sz="2600" b="1" i="0">
+                <a:solidFill>
+                  <a:srgbClr val="FFFFFF"/>
+                </a:solidFill>
+                <a:latin typeface="Calibri"/>
+              </a:rPr>
+              <a:t>PI CloudLite — entregable de hoy</a:t>
+            </a:r>
+          </a:p>
+        </p:txBody>
+      </p:sp>
+      <p:sp>
+        <p:nvSpPr>
+          <p:cNvPr id="5" name="TextBox 4"/>
+          <p:cNvSpPr txBox="1"/>
+          <p:nvPr/>
+        </p:nvSpPr>
+        <p:spPr>
+          <a:xfrm>
+            <a:off x="457200" y="1170432"/>
+            <a:ext cx="11277295" cy="5230368"/>
+          </a:xfrm>
+          <a:prstGeom prst="rect">
+            <a:avLst/>
+          </a:prstGeom>
+          <a:noFill/>
+        </p:spPr>
+        <p:txBody>
+          <a:bodyPr wrap="square">
+            <a:spAutoFit/>
+          </a:bodyPr>
+          <a:lstStyle/>
+          <a:p>
+            <a:pPr>
+              <a:spcAft>
+                <a:spcPts val="800"/>
+              </a:spcAft>
+            </a:pPr>
+            <a:r>
+              <a:rPr sz="2000" b="0" i="0">
+                <a:solidFill>
+                  <a:srgbClr val="333333"/>
+                </a:solidFill>
+                <a:latin typeface="Calibri"/>
+              </a:rPr>
+              <a:t>–   </a:t>
+            </a:r>
+            <a:r>
+              <a:rPr sz="2000" b="1" i="0">
+                <a:solidFill>
+                  <a:srgbClr val="333333"/>
+                </a:solidFill>
+                <a:latin typeface="Calibri"/>
+              </a:rPr>
+              <a:t>Entregable:</a:t>
+            </a:r>
+            <a:r>
+              <a:rPr sz="2000" b="0" i="0">
+                <a:solidFill>
+                  <a:srgbClr val="333333"/>
+                </a:solidFill>
+                <a:latin typeface="Calibri"/>
+              </a:rPr>
+              <a:t> ADR-001: decisión de modelo de servicio + matriz de comparación aplicada al dominio</a:t>
+            </a:r>
+          </a:p>
+          <a:p>
+            <a:pPr>
+              <a:spcAft>
+                <a:spcPts val="800"/>
+              </a:spcAft>
+            </a:pPr>
+            <a:r>
+              <a:rPr sz="2000" b="0" i="0">
+                <a:solidFill>
+                  <a:srgbClr val="333333"/>
+                </a:solidFill>
+                <a:latin typeface="Calibri"/>
+              </a:rPr>
+              <a:t>–   Herramienta: </a:t>
+            </a:r>
+            <a:r>
+              <a:rPr sz="2000" b="1" i="0">
+                <a:solidFill>
+                  <a:srgbClr val="333333"/>
+                </a:solidFill>
+                <a:latin typeface="Calibri"/>
+              </a:rPr>
+              <a:t>Google Docs · draw.io (opcional)</a:t>
+            </a:r>
+          </a:p>
+          <a:p>
+            <a:pPr>
+              <a:spcAft>
+                <a:spcPts val="800"/>
+              </a:spcAft>
+            </a:pPr>
+            <a:r>
+              <a:rPr sz="2000" b="0" i="0">
+                <a:solidFill>
+                  <a:srgbClr val="333333"/>
+                </a:solidFill>
+                <a:latin typeface="Calibri"/>
+              </a:rPr>
+              <a:t>–   Todo lo que construyan hoy entra al </a:t>
+            </a:r>
+            <a:r>
+              <a:rPr sz="2000" b="1" i="0">
+                <a:solidFill>
+                  <a:srgbClr val="333333"/>
+                </a:solidFill>
+                <a:latin typeface="Calibri"/>
+              </a:rPr>
+              <a:t>informe/repo del PI</a:t>
+            </a:r>
+            <a:r>
+              <a:rPr sz="2000" b="0" i="0">
+                <a:solidFill>
+                  <a:srgbClr val="333333"/>
+                </a:solidFill>
+                <a:latin typeface="Calibri"/>
+              </a:rPr>
+              <a:t> (no es lab suelto).</a:t>
+            </a:r>
+          </a:p>
+          <a:p>
+            <a:pPr>
+              <a:spcAft>
+                <a:spcPts val="800"/>
+              </a:spcAft>
+            </a:pPr>
+            <a:r>
+              <a:rPr sz="2000" b="0" i="0">
+                <a:solidFill>
+                  <a:srgbClr val="333333"/>
+                </a:solidFill>
+                <a:latin typeface="Calibri"/>
+              </a:rPr>
+              <a:t>–   Individual por defecto · el docente puede autorizar equipos de 2–3; la entrega en la plataforma del curso siempre es individual.</a:t>
+            </a:r>
+          </a:p>
+        </p:txBody>
+      </p:sp>
+      <p:sp>
+        <p:nvSpPr>
+          <p:cNvPr id="6" name="TextBox 5"/>
+          <p:cNvSpPr txBox="1"/>
+          <p:nvPr/>
+        </p:nvSpPr>
+        <p:spPr>
+          <a:xfrm>
+            <a:off x="11185855" y="6473952"/>
+            <a:ext cx="640080" cy="274320"/>
+          </a:xfrm>
+          <a:prstGeom prst="rect">
+            <a:avLst/>
+          </a:prstGeom>
+          <a:noFill/>
+        </p:spPr>
+        <p:txBody>
+          <a:bodyPr wrap="square">
+            <a:spAutoFit/>
+          </a:bodyPr>
+          <a:lstStyle/>
+          <a:p>
+            <a:pPr algn="r"/>
+            <a:r>
+              <a:rPr sz="1100" b="0" i="0">
+                <a:solidFill>
+                  <a:srgbClr val="666666"/>
+                </a:solidFill>
+                <a:latin typeface="Calibri"/>
+              </a:rPr>
+              <a:t>30</a:t>
+            </a:r>
+          </a:p>
+        </p:txBody>
+      </p:sp>
+    </p:spTree>
+  </p:cSld>
+  <p:clrMapOvr>
+    <a:masterClrMapping/>
+  </p:clrMapOvr>
+</p:sld>
+</file>
+
+<file path=ppt/slides/slide31.xml><?xml version="1.0" encoding="utf-8"?>
+<p:sld xmlns:a="http://schemas.openxmlformats.org/drawingml/2006/main" xmlns:p="http://schemas.openxmlformats.org/presentationml/2006/main" xmlns:r="http://schemas.openxmlformats.org/officeDocument/2006/relationships">
+  <p:cSld>
+    <p:bg>
+      <p:bgPr>
+        <a:solidFill>
+          <a:srgbClr val="FFFFFF"/>
+        </a:solidFill>
+        <a:effectLst/>
+      </p:bgPr>
+    </p:bg>
+    <p:spTree>
+      <p:nvGrpSpPr>
+        <p:cNvPr id="1" name=""/>
+        <p:cNvGrpSpPr/>
+        <p:nvPr/>
+      </p:nvGrpSpPr>
+      <p:grpSpPr/>
+      <p:sp>
+        <p:nvSpPr>
+          <p:cNvPr id="2" name="Rectangle 1"/>
+          <p:cNvSpPr/>
+          <p:nvPr/>
+        </p:nvSpPr>
+        <p:spPr>
+          <a:xfrm>
+            <a:off x="0" y="0"/>
+            <a:ext cx="12191695" cy="960120"/>
+          </a:xfrm>
+          <a:prstGeom prst="rect">
+            <a:avLst/>
+          </a:prstGeom>
+          <a:solidFill>
+            <a:srgbClr val="095292"/>
+          </a:solidFill>
+          <a:ln>
+            <a:noFill/>
+          </a:ln>
+        </p:spPr>
+        <p:style>
+          <a:lnRef idx="1">
+            <a:schemeClr val="accent1"/>
+          </a:lnRef>
+          <a:fillRef idx="3">
+            <a:schemeClr val="accent1"/>
+          </a:fillRef>
+          <a:effectRef idx="2">
+            <a:schemeClr val="accent1"/>
+          </a:effectRef>
+          <a:fontRef idx="minor">
+            <a:schemeClr val="lt1"/>
+          </a:fontRef>
+        </p:style>
+        <p:txBody>
+          <a:bodyPr rtlCol="0" anchor="ctr"/>
+          <a:lstStyle/>
+          <a:p>
+            <a:pPr algn="ctr"/>
+          </a:p>
+        </p:txBody>
+      </p:sp>
+      <p:sp>
+        <p:nvSpPr>
+          <p:cNvPr id="3" name="Rectangle 2"/>
+          <p:cNvSpPr/>
+          <p:nvPr/>
+        </p:nvSpPr>
+        <p:spPr>
+          <a:xfrm>
+            <a:off x="0" y="960120"/>
+            <a:ext cx="12191695" cy="41148"/>
+          </a:xfrm>
+          <a:prstGeom prst="rect">
+            <a:avLst/>
+          </a:prstGeom>
+          <a:solidFill>
+            <a:srgbClr val="FFD000"/>
+          </a:solidFill>
+          <a:ln>
+            <a:noFill/>
+          </a:ln>
+        </p:spPr>
+        <p:style>
+          <a:lnRef idx="1">
+            <a:schemeClr val="accent1"/>
+          </a:lnRef>
+          <a:fillRef idx="3">
+            <a:schemeClr val="accent1"/>
+          </a:fillRef>
+          <a:effectRef idx="2">
+            <a:schemeClr val="accent1"/>
+          </a:effectRef>
+          <a:fontRef idx="minor">
+            <a:schemeClr val="lt1"/>
+          </a:fontRef>
+        </p:style>
+        <p:txBody>
+          <a:bodyPr rtlCol="0" anchor="ctr"/>
+          <a:lstStyle/>
+          <a:p>
+            <a:pPr algn="ctr"/>
+          </a:p>
+        </p:txBody>
+      </p:sp>
+      <p:sp>
+        <p:nvSpPr>
+          <p:cNvPr id="4" name="TextBox 3"/>
+          <p:cNvSpPr txBox="1"/>
+          <p:nvPr/>
+        </p:nvSpPr>
+        <p:spPr>
+          <a:xfrm>
+            <a:off x="457200" y="164592"/>
+            <a:ext cx="11277295" cy="502920"/>
+          </a:xfrm>
+          <a:prstGeom prst="rect">
+            <a:avLst/>
+          </a:prstGeom>
+          <a:noFill/>
+        </p:spPr>
+        <p:txBody>
+          <a:bodyPr wrap="square">
+            <a:spAutoFit/>
+          </a:bodyPr>
+          <a:lstStyle/>
+          <a:p>
+            <a:r>
+              <a:rPr sz="2600" b="1" i="0">
+                <a:solidFill>
+                  <a:srgbClr val="FFFFFF"/>
+                </a:solidFill>
+                <a:latin typeface="Calibri"/>
+              </a:rPr>
+              <a:t>Manos a la obra (paso a paso)</a:t>
+            </a:r>
+          </a:p>
+        </p:txBody>
+      </p:sp>
+      <p:sp>
+        <p:nvSpPr>
+          <p:cNvPr id="5" name="TextBox 4"/>
+          <p:cNvSpPr txBox="1"/>
+          <p:nvPr/>
+        </p:nvSpPr>
+        <p:spPr>
+          <a:xfrm>
+            <a:off x="457200" y="1170432"/>
+            <a:ext cx="11277295" cy="5230368"/>
+          </a:xfrm>
+          <a:prstGeom prst="rect">
+            <a:avLst/>
+          </a:prstGeom>
+          <a:noFill/>
+        </p:spPr>
+        <p:txBody>
+          <a:bodyPr wrap="square">
+            <a:spAutoFit/>
+          </a:bodyPr>
+          <a:lstStyle/>
+          <a:p>
+            <a:pPr>
+              <a:spcAft>
+                <a:spcPts val="800"/>
+              </a:spcAft>
+            </a:pPr>
+            <a:r>
+              <a:rPr sz="2000" b="1" i="0">
+                <a:solidFill>
+                  <a:srgbClr val="333333"/>
+                </a:solidFill>
+                <a:latin typeface="Calibri"/>
+              </a:rPr>
+              <a:t>1.</a:t>
+            </a:r>
+            <a:r>
+              <a:rPr sz="2000" b="0" i="0">
+                <a:solidFill>
+                  <a:srgbClr val="333333"/>
+                </a:solidFill>
+                <a:latin typeface="Calibri"/>
+              </a:rPr>
+              <a:t> Paso 1: relea su ficha y su C4 Context de la Clase 1. No cambie de dominio: las preguntas 5 a 7 se califican sobre el mismo sistema, y el ADR que redacte hoy se reutiliza en el informe del PI y en la sustentacion de la Clase 15.</a:t>
+            </a:r>
+          </a:p>
+          <a:p>
+            <a:pPr>
+              <a:spcAft>
+                <a:spcPts val="800"/>
+              </a:spcAft>
+            </a:pPr>
+            <a:r>
+              <a:rPr sz="2000" b="0" i="0">
+                <a:solidFill>
+                  <a:srgbClr val="333333"/>
+                </a:solidFill>
+                <a:latin typeface="Calibri"/>
+              </a:rPr>
+              <a:t>–   </a:t>
+            </a:r>
+            <a:r>
+              <a:rPr sz="2000" b="1" i="0">
+                <a:solidFill>
+                  <a:srgbClr val="333333"/>
+                </a:solidFill>
+                <a:latin typeface="Calibri"/>
+              </a:rPr>
+              <a:t>2.</a:t>
+            </a:r>
+            <a:r>
+              <a:rPr sz="2000" b="0" i="0">
+                <a:solidFill>
+                  <a:srgbClr val="333333"/>
+                </a:solidFill>
+                <a:latin typeface="Calibri"/>
+              </a:rPr>
+              <a:t> Paso 2: construya en la pregunta 5 la matriz «Criterio | IaaS | PaaS | SaaS» con las cuatro filas en orden (control, costo cualitativo, operacion, time-to-demo) y maximo 2 lineas por celda; verifique que cada celda nombre una capacidad o una restriccion de SU dominio, y que la fila de operacion no afirme que en PaaS o SaaS usted deja de responder por su propia aplicacion.</a:t>
+            </a:r>
+          </a:p>
+          <a:p>
+            <a:pPr>
+              <a:spcAft>
+                <a:spcPts val="800"/>
+              </a:spcAft>
+            </a:pPr>
+            <a:r>
+              <a:rPr sz="2000" b="0" i="0">
+                <a:solidFill>
+                  <a:srgbClr val="333333"/>
+                </a:solidFill>
+                <a:latin typeface="Calibri"/>
+              </a:rPr>
+              <a:t>–   </a:t>
+            </a:r>
+            <a:r>
+              <a:rPr sz="2000" b="1" i="0">
+                <a:solidFill>
+                  <a:srgbClr val="333333"/>
+                </a:solidFill>
+                <a:latin typeface="Calibri"/>
+              </a:rPr>
+              <a:t>3.</a:t>
+            </a:r>
+            <a:r>
+              <a:rPr sz="2000" b="0" i="0">
+                <a:solidFill>
+                  <a:srgbClr val="333333"/>
+                </a:solidFill>
+                <a:latin typeface="Calibri"/>
+              </a:rPr>
+              <a:t> Paso 3: redacte en la pregunta 6 el ADR-001 con las cinco secciones rotuladas —titulo, estado con fecha, contexto con sus restricciones reales, la decision en UNA sola frase con UN modelo dominante, y exactamente 2 alternativas descartadas con el motivo atado a su dominio—; verifique que la seccion de decision no nombre dos modelos, porque en ese caso vale cero.</a:t>
+            </a:r>
+          </a:p>
+          <a:p>
+            <a:pPr>
+              <a:spcAft>
+                <a:spcPts val="800"/>
+              </a:spcAft>
+            </a:pPr>
+            <a:r>
+              <a:rPr sz="2000" b="0" i="0">
+                <a:solidFill>
+                  <a:srgbClr val="333333"/>
+                </a:solidFill>
+                <a:latin typeface="Calibri"/>
+              </a:rPr>
+              <a:t>–   </a:t>
+            </a:r>
+            <a:r>
+              <a:rPr sz="2000" b="1" i="0">
+                <a:solidFill>
+                  <a:srgbClr val="333333"/>
+                </a:solidFill>
+                <a:latin typeface="Calibri"/>
+              </a:rPr>
+              <a:t>4.</a:t>
+            </a:r>
+            <a:r>
+              <a:rPr sz="2000" b="0" i="0">
+                <a:solidFill>
+                  <a:srgbClr val="333333"/>
+                </a:solidFill>
+                <a:latin typeface="Calibri"/>
+              </a:rPr>
+              <a:t> Paso 4: escriba en la pregunta 7 la seccion 6 del mismo ADR, las consecuencias en los tres ejes (operacion, costo y aprendizaje), con al menos una positiva y una negativa por eje marcadas con + y -, y verifique que al menos una negativa hable de amarre al proveedor o de perdida de control; guarde y continue, que la actividad se entrega completa al cierre del corte.</a:t>
+            </a:r>
+          </a:p>
+        </p:txBody>
+      </p:sp>
+      <p:sp>
+        <p:nvSpPr>
+          <p:cNvPr id="6" name="TextBox 5"/>
+          <p:cNvSpPr txBox="1"/>
+          <p:nvPr/>
+        </p:nvSpPr>
+        <p:spPr>
+          <a:xfrm>
+            <a:off x="11185855" y="6473952"/>
+            <a:ext cx="640080" cy="274320"/>
+          </a:xfrm>
+          <a:prstGeom prst="rect">
+            <a:avLst/>
+          </a:prstGeom>
+          <a:noFill/>
+        </p:spPr>
+        <p:txBody>
+          <a:bodyPr wrap="square">
+            <a:spAutoFit/>
+          </a:bodyPr>
+          <a:lstStyle/>
+          <a:p>
+            <a:pPr algn="r"/>
+            <a:r>
+              <a:rPr sz="1100" b="0" i="0">
+                <a:solidFill>
+                  <a:srgbClr val="666666"/>
+                </a:solidFill>
+                <a:latin typeface="Calibri"/>
+              </a:rPr>
+              <a:t>31</a:t>
+            </a:r>
+          </a:p>
+        </p:txBody>
+      </p:sp>
+    </p:spTree>
+  </p:cSld>
+  <p:clrMapOvr>
+    <a:masterClrMapping/>
+  </p:clrMapOvr>
+</p:sld>
+</file>
+
+<file path=ppt/slides/slide32.xml><?xml version="1.0" encoding="utf-8"?>
+<p:sld xmlns:a="http://schemas.openxmlformats.org/drawingml/2006/main" xmlns:p="http://schemas.openxmlformats.org/presentationml/2006/main" xmlns:r="http://schemas.openxmlformats.org/officeDocument/2006/relationships">
+  <p:cSld>
+    <p:bg>
+      <p:bgPr>
+        <a:solidFill>
+          <a:srgbClr val="FFFFFF"/>
+        </a:solidFill>
+        <a:effectLst/>
+      </p:bgPr>
+    </p:bg>
+    <p:spTree>
+      <p:nvGrpSpPr>
+        <p:cNvPr id="1" name=""/>
+        <p:cNvGrpSpPr/>
+        <p:nvPr/>
+      </p:nvGrpSpPr>
+      <p:grpSpPr/>
+      <p:sp>
+        <p:nvSpPr>
+          <p:cNvPr id="2" name="Rectangle 1"/>
+          <p:cNvSpPr/>
+          <p:nvPr/>
+        </p:nvSpPr>
+        <p:spPr>
+          <a:xfrm>
+            <a:off x="0" y="0"/>
+            <a:ext cx="12191695" cy="960120"/>
+          </a:xfrm>
+          <a:prstGeom prst="rect">
+            <a:avLst/>
+          </a:prstGeom>
+          <a:solidFill>
+            <a:srgbClr val="095292"/>
+          </a:solidFill>
+          <a:ln>
+            <a:noFill/>
+          </a:ln>
+        </p:spPr>
+        <p:style>
+          <a:lnRef idx="1">
+            <a:schemeClr val="accent1"/>
+          </a:lnRef>
+          <a:fillRef idx="3">
+            <a:schemeClr val="accent1"/>
+          </a:fillRef>
+          <a:effectRef idx="2">
+            <a:schemeClr val="accent1"/>
+          </a:effectRef>
+          <a:fontRef idx="minor">
+            <a:schemeClr val="lt1"/>
+          </a:fontRef>
+        </p:style>
+        <p:txBody>
+          <a:bodyPr rtlCol="0" anchor="ctr"/>
+          <a:lstStyle/>
+          <a:p>
+            <a:pPr algn="ctr"/>
+          </a:p>
+        </p:txBody>
+      </p:sp>
+      <p:sp>
+        <p:nvSpPr>
+          <p:cNvPr id="3" name="Rectangle 2"/>
+          <p:cNvSpPr/>
+          <p:nvPr/>
+        </p:nvSpPr>
+        <p:spPr>
+          <a:xfrm>
+            <a:off x="0" y="960120"/>
+            <a:ext cx="12191695" cy="41148"/>
+          </a:xfrm>
+          <a:prstGeom prst="rect">
+            <a:avLst/>
+          </a:prstGeom>
+          <a:solidFill>
+            <a:srgbClr val="FFD000"/>
+          </a:solidFill>
+          <a:ln>
+            <a:noFill/>
+          </a:ln>
+        </p:spPr>
+        <p:style>
+          <a:lnRef idx="1">
+            <a:schemeClr val="accent1"/>
+          </a:lnRef>
+          <a:fillRef idx="3">
+            <a:schemeClr val="accent1"/>
+          </a:fillRef>
+          <a:effectRef idx="2">
+            <a:schemeClr val="accent1"/>
+          </a:effectRef>
+          <a:fontRef idx="minor">
+            <a:schemeClr val="lt1"/>
+          </a:fontRef>
+        </p:style>
+        <p:txBody>
+          <a:bodyPr rtlCol="0" anchor="ctr"/>
+          <a:lstStyle/>
+          <a:p>
+            <a:pPr algn="ctr"/>
+          </a:p>
+        </p:txBody>
+      </p:sp>
+      <p:sp>
+        <p:nvSpPr>
+          <p:cNvPr id="4" name="TextBox 3"/>
+          <p:cNvSpPr txBox="1"/>
+          <p:nvPr/>
+        </p:nvSpPr>
+        <p:spPr>
+          <a:xfrm>
+            <a:off x="457200" y="164592"/>
+            <a:ext cx="11277295" cy="502920"/>
+          </a:xfrm>
+          <a:prstGeom prst="rect">
+            <a:avLst/>
+          </a:prstGeom>
+          <a:noFill/>
+        </p:spPr>
+        <p:txBody>
+          <a:bodyPr wrap="square">
+            <a:spAutoFit/>
+          </a:bodyPr>
+          <a:lstStyle/>
+          <a:p>
+            <a:r>
+              <a:rPr sz="2600" b="1" i="0">
+                <a:solidFill>
+                  <a:srgbClr val="FFFFFF"/>
+                </a:solidFill>
+                <a:latin typeface="Calibri"/>
+              </a:rPr>
+              <a:t>Para continuar (PI)</a:t>
+            </a:r>
+          </a:p>
+        </p:txBody>
+      </p:sp>
+      <p:sp>
+        <p:nvSpPr>
+          <p:cNvPr id="5" name="Rounded Rectangle 4"/>
+          <p:cNvSpPr/>
+          <p:nvPr/>
+        </p:nvSpPr>
+        <p:spPr>
+          <a:xfrm>
+            <a:off x="457200" y="1261872"/>
+            <a:ext cx="11277295" cy="1051560"/>
+          </a:xfrm>
+          <a:prstGeom prst="roundRect">
+            <a:avLst>
+              <a:gd name="adj" fmla="val 12000"/>
+            </a:avLst>
+          </a:prstGeom>
+          <a:solidFill>
+            <a:srgbClr val="E8F4FA"/>
+          </a:solidFill>
+          <a:ln>
+            <a:noFill/>
+          </a:ln>
+        </p:spPr>
+        <p:style>
+          <a:lnRef idx="1">
+            <a:schemeClr val="accent1"/>
+          </a:lnRef>
+          <a:fillRef idx="3">
+            <a:schemeClr val="accent1"/>
+          </a:fillRef>
+          <a:effectRef idx="2">
+            <a:schemeClr val="accent1"/>
+          </a:effectRef>
+          <a:fontRef idx="minor">
+            <a:schemeClr val="lt1"/>
+          </a:fontRef>
+        </p:style>
+        <p:txBody>
+          <a:bodyPr rtlCol="0" anchor="ctr"/>
+          <a:lstStyle/>
+          <a:p>
+            <a:pPr algn="ctr"/>
+          </a:p>
+        </p:txBody>
+      </p:sp>
+      <p:sp>
+        <p:nvSpPr>
+          <p:cNvPr id="6" name="Rectangle 5"/>
+          <p:cNvSpPr/>
+          <p:nvPr/>
+        </p:nvSpPr>
+        <p:spPr>
+          <a:xfrm>
+            <a:off x="457200" y="1261872"/>
+            <a:ext cx="128016" cy="1051560"/>
+          </a:xfrm>
+          <a:prstGeom prst="rect">
+            <a:avLst/>
+          </a:prstGeom>
+          <a:solidFill>
+            <a:srgbClr val="269CCB"/>
+          </a:solidFill>
+          <a:ln>
+            <a:noFill/>
+          </a:ln>
+        </p:spPr>
+        <p:style>
+          <a:lnRef idx="1">
+            <a:schemeClr val="accent1"/>
+          </a:lnRef>
+          <a:fillRef idx="3">
+            <a:schemeClr val="accent1"/>
+          </a:fillRef>
+          <a:effectRef idx="2">
+            <a:schemeClr val="accent1"/>
+          </a:effectRef>
+          <a:fontRef idx="minor">
+            <a:schemeClr val="lt1"/>
+          </a:fontRef>
+        </p:style>
+        <p:txBody>
+          <a:bodyPr rtlCol="0" anchor="ctr"/>
+          <a:lstStyle/>
+          <a:p>
+            <a:pPr algn="ctr"/>
+          </a:p>
+        </p:txBody>
+      </p:sp>
+      <p:sp>
+        <p:nvSpPr>
+          <p:cNvPr id="7" name="TextBox 6"/>
+          <p:cNvSpPr txBox="1"/>
+          <p:nvPr/>
+        </p:nvSpPr>
+        <p:spPr>
+          <a:xfrm>
+            <a:off x="777240" y="1399031"/>
+            <a:ext cx="10774375" cy="822959"/>
+          </a:xfrm>
+          <a:prstGeom prst="rect">
+            <a:avLst/>
+          </a:prstGeom>
+          <a:noFill/>
+        </p:spPr>
+        <p:txBody>
+          <a:bodyPr wrap="square">
+            <a:spAutoFit/>
+          </a:bodyPr>
+          <a:lstStyle/>
+          <a:p>
+            <a:r>
+              <a:rPr sz="1200" b="1" i="0">
+                <a:solidFill>
+                  <a:srgbClr val="269CCB"/>
+                </a:solidFill>
+                <a:latin typeface="Calibri"/>
+              </a:rPr>
+              <a:t>Info</a:t>
+            </a:r>
+          </a:p>
+          <a:p>
+            <a:pPr>
+              <a:spcBef>
+                <a:spcPts val="400"/>
+              </a:spcBef>
+            </a:pPr>
+            <a:r>
+              <a:rPr sz="1400" b="0" i="0">
+                <a:solidFill>
+                  <a:srgbClr val="333333"/>
+                </a:solidFill>
+                <a:latin typeface="Calibri"/>
+              </a:rPr>
+              <a:t>Entregable: ADR-001: decisión de modelo de servicio + matriz de comparación aplicada al dominio</a:t>
+            </a:r>
+          </a:p>
+        </p:txBody>
+      </p:sp>
+      <p:sp>
+        <p:nvSpPr>
+          <p:cNvPr id="8" name="Rounded Rectangle 7"/>
+          <p:cNvSpPr/>
+          <p:nvPr/>
+        </p:nvSpPr>
+        <p:spPr>
+          <a:xfrm>
+            <a:off x="457200" y="2478024"/>
+            <a:ext cx="11277295" cy="1051560"/>
+          </a:xfrm>
+          <a:prstGeom prst="roundRect">
+            <a:avLst>
+              <a:gd name="adj" fmla="val 12000"/>
+            </a:avLst>
+          </a:prstGeom>
+          <a:solidFill>
+            <a:srgbClr val="FFF8E1"/>
+          </a:solidFill>
+          <a:ln>
+            <a:noFill/>
+          </a:ln>
+        </p:spPr>
+        <p:style>
+          <a:lnRef idx="1">
+            <a:schemeClr val="accent1"/>
+          </a:lnRef>
+          <a:fillRef idx="3">
+            <a:schemeClr val="accent1"/>
+          </a:fillRef>
+          <a:effectRef idx="2">
+            <a:schemeClr val="accent1"/>
+          </a:effectRef>
+          <a:fontRef idx="minor">
+            <a:schemeClr val="lt1"/>
+          </a:fontRef>
+        </p:style>
+        <p:txBody>
+          <a:bodyPr rtlCol="0" anchor="ctr"/>
+          <a:lstStyle/>
+          <a:p>
+            <a:pPr algn="ctr"/>
+          </a:p>
+        </p:txBody>
+      </p:sp>
+      <p:sp>
+        <p:nvSpPr>
+          <p:cNvPr id="9" name="Rectangle 8"/>
+          <p:cNvSpPr/>
+          <p:nvPr/>
+        </p:nvSpPr>
+        <p:spPr>
+          <a:xfrm>
+            <a:off x="457200" y="2478024"/>
+            <a:ext cx="128016" cy="1051560"/>
+          </a:xfrm>
+          <a:prstGeom prst="rect">
+            <a:avLst/>
+          </a:prstGeom>
+          <a:solidFill>
+            <a:srgbClr val="FFD000"/>
+          </a:solidFill>
+          <a:ln>
+            <a:noFill/>
+          </a:ln>
+        </p:spPr>
+        <p:style>
+          <a:lnRef idx="1">
+            <a:schemeClr val="accent1"/>
+          </a:lnRef>
+          <a:fillRef idx="3">
+            <a:schemeClr val="accent1"/>
+          </a:fillRef>
+          <a:effectRef idx="2">
+            <a:schemeClr val="accent1"/>
+          </a:effectRef>
+          <a:fontRef idx="minor">
+            <a:schemeClr val="lt1"/>
+          </a:fontRef>
+        </p:style>
+        <p:txBody>
+          <a:bodyPr rtlCol="0" anchor="ctr"/>
+          <a:lstStyle/>
+          <a:p>
+            <a:pPr algn="ctr"/>
+          </a:p>
+        </p:txBody>
+      </p:sp>
+      <p:sp>
+        <p:nvSpPr>
+          <p:cNvPr id="10" name="TextBox 9"/>
+          <p:cNvSpPr txBox="1"/>
+          <p:nvPr/>
+        </p:nvSpPr>
+        <p:spPr>
+          <a:xfrm>
+            <a:off x="777240" y="2615184"/>
+            <a:ext cx="10774375" cy="822959"/>
+          </a:xfrm>
+          <a:prstGeom prst="rect">
+            <a:avLst/>
+          </a:prstGeom>
+          <a:noFill/>
+        </p:spPr>
+        <p:txBody>
+          <a:bodyPr wrap="square">
+            <a:spAutoFit/>
+          </a:bodyPr>
+          <a:lstStyle/>
+          <a:p>
+            <a:r>
+              <a:rPr sz="1200" b="1" i="0">
+                <a:solidFill>
+                  <a:srgbClr val="FFD000"/>
+                </a:solidFill>
+                <a:latin typeface="Calibri"/>
+              </a:rPr>
+              <a:t>Aclaración</a:t>
+            </a:r>
+          </a:p>
+          <a:p>
+            <a:pPr>
+              <a:spcBef>
+                <a:spcPts val="400"/>
+              </a:spcBef>
+            </a:pPr>
+            <a:r>
+              <a:rPr sz="1400" b="0" i="0">
+                <a:solidFill>
+                  <a:srgbClr val="333333"/>
+                </a:solidFill>
+                <a:latin typeface="Calibri"/>
+              </a:rPr>
+              <a:t>Subir evidencias al paquete CloudLite (Drive/repo) y a la plataforma del curso en la fecha que indique el docente.</a:t>
+            </a:r>
+          </a:p>
+        </p:txBody>
+      </p:sp>
+      <p:sp>
+        <p:nvSpPr>
+          <p:cNvPr id="11" name="Rounded Rectangle 10"/>
+          <p:cNvSpPr/>
+          <p:nvPr/>
+        </p:nvSpPr>
+        <p:spPr>
+          <a:xfrm>
+            <a:off x="457200" y="3694176"/>
+            <a:ext cx="11277295" cy="1051560"/>
+          </a:xfrm>
+          <a:prstGeom prst="roundRect">
+            <a:avLst>
+              <a:gd name="adj" fmla="val 12000"/>
+            </a:avLst>
+          </a:prstGeom>
+          <a:solidFill>
+            <a:srgbClr val="FBE4E4"/>
+          </a:solidFill>
+          <a:ln>
+            <a:noFill/>
+          </a:ln>
+        </p:spPr>
+        <p:style>
+          <a:lnRef idx="1">
+            <a:schemeClr val="accent1"/>
+          </a:lnRef>
+          <a:fillRef idx="3">
+            <a:schemeClr val="accent1"/>
+          </a:fillRef>
+          <a:effectRef idx="2">
+            <a:schemeClr val="accent1"/>
+          </a:effectRef>
+          <a:fontRef idx="minor">
+            <a:schemeClr val="lt1"/>
+          </a:fontRef>
+        </p:style>
+        <p:txBody>
+          <a:bodyPr rtlCol="0" anchor="ctr"/>
+          <a:lstStyle/>
+          <a:p>
+            <a:pPr algn="ctr"/>
+          </a:p>
+        </p:txBody>
+      </p:sp>
+      <p:sp>
+        <p:nvSpPr>
+          <p:cNvPr id="12" name="Rectangle 11"/>
+          <p:cNvSpPr/>
+          <p:nvPr/>
+        </p:nvSpPr>
+        <p:spPr>
+          <a:xfrm>
+            <a:off x="457200" y="3694176"/>
+            <a:ext cx="128016" cy="1051560"/>
+          </a:xfrm>
+          <a:prstGeom prst="rect">
+            <a:avLst/>
+          </a:prstGeom>
+          <a:solidFill>
+            <a:srgbClr val="A02030"/>
+          </a:solidFill>
+          <a:ln>
+            <a:noFill/>
+          </a:ln>
+        </p:spPr>
+        <p:style>
+          <a:lnRef idx="1">
+            <a:schemeClr val="accent1"/>
+          </a:lnRef>
+          <a:fillRef idx="3">
+            <a:schemeClr val="accent1"/>
+          </a:fillRef>
+          <a:effectRef idx="2">
+            <a:schemeClr val="accent1"/>
+          </a:effectRef>
+          <a:fontRef idx="minor">
+            <a:schemeClr val="lt1"/>
+          </a:fontRef>
+        </p:style>
+        <p:txBody>
+          <a:bodyPr rtlCol="0" anchor="ctr"/>
+          <a:lstStyle/>
+          <a:p>
+            <a:pPr algn="ctr"/>
+          </a:p>
+        </p:txBody>
+      </p:sp>
+      <p:sp>
+        <p:nvSpPr>
+          <p:cNvPr id="13" name="TextBox 12"/>
+          <p:cNvSpPr txBox="1"/>
+          <p:nvPr/>
+        </p:nvSpPr>
+        <p:spPr>
+          <a:xfrm>
+            <a:off x="777240" y="3831336"/>
+            <a:ext cx="10774375" cy="822959"/>
+          </a:xfrm>
+          <a:prstGeom prst="rect">
+            <a:avLst/>
+          </a:prstGeom>
+          <a:noFill/>
+        </p:spPr>
+        <p:txBody>
+          <a:bodyPr wrap="square">
+            <a:spAutoFit/>
+          </a:bodyPr>
+          <a:lstStyle/>
+          <a:p>
+            <a:r>
+              <a:rPr sz="1200" b="1" i="0">
+                <a:solidFill>
+                  <a:srgbClr val="A02030"/>
+                </a:solidFill>
+                <a:latin typeface="Calibri"/>
+              </a:rPr>
+              <a:t>Atención</a:t>
+            </a:r>
+          </a:p>
+          <a:p>
+            <a:pPr>
+              <a:spcBef>
+                <a:spcPts val="400"/>
+              </a:spcBef>
+            </a:pPr>
+            <a:r>
+              <a:rPr sz="1400" b="0" i="0">
+                <a:solidFill>
+                  <a:srgbClr val="333333"/>
+                </a:solidFill>
+                <a:latin typeface="Calibri"/>
+              </a:rPr>
+              <a:t>Sin cloud de pago ni instalaciones obligatorias de hipervisores/Docker Desktop.</a:t>
+            </a:r>
+          </a:p>
+        </p:txBody>
+      </p:sp>
+      <p:sp>
+        <p:nvSpPr>
+          <p:cNvPr id="14" name="TextBox 13"/>
+          <p:cNvSpPr txBox="1"/>
+          <p:nvPr/>
+        </p:nvSpPr>
+        <p:spPr>
+          <a:xfrm>
+            <a:off x="11185855" y="6473952"/>
+            <a:ext cx="640080" cy="274320"/>
+          </a:xfrm>
+          <a:prstGeom prst="rect">
+            <a:avLst/>
+          </a:prstGeom>
+          <a:noFill/>
+        </p:spPr>
+        <p:txBody>
+          <a:bodyPr wrap="square">
+            <a:spAutoFit/>
+          </a:bodyPr>
+          <a:lstStyle/>
+          <a:p>
+            <a:pPr algn="r"/>
+            <a:r>
+              <a:rPr sz="1100" b="0" i="0">
+                <a:solidFill>
+                  <a:srgbClr val="666666"/>
+                </a:solidFill>
+                <a:latin typeface="Calibri"/>
+              </a:rPr>
+              <a:t>32</a:t>
+            </a:r>
+          </a:p>
+        </p:txBody>
+      </p:sp>
+    </p:spTree>
+  </p:cSld>
+  <p:clrMapOvr>
+    <a:masterClrMapping/>
+  </p:clrMapOvr>
+</p:sld>
+</file>
+
+<file path=ppt/slides/slide33.xml><?xml version="1.0" encoding="utf-8"?>
+<p:sld xmlns:a="http://schemas.openxmlformats.org/drawingml/2006/main" xmlns:p="http://schemas.openxmlformats.org/presentationml/2006/main" xmlns:r="http://schemas.openxmlformats.org/officeDocument/2006/relationships">
+  <p:cSld>
+    <p:bg>
+      <p:bgPr>
+        <a:solidFill>
+          <a:srgbClr val="FFFFFF"/>
+        </a:solidFill>
+        <a:effectLst/>
+      </p:bgPr>
+    </p:bg>
+    <p:spTree>
+      <p:nvGrpSpPr>
+        <p:cNvPr id="1" name=""/>
+        <p:cNvGrpSpPr/>
+        <p:nvPr/>
+      </p:nvGrpSpPr>
+      <p:grpSpPr/>
+      <p:sp>
+        <p:nvSpPr>
+          <p:cNvPr id="2" name="Rectangle 1"/>
+          <p:cNvSpPr/>
+          <p:nvPr/>
+        </p:nvSpPr>
+        <p:spPr>
+          <a:xfrm>
+            <a:off x="0" y="0"/>
+            <a:ext cx="12191695" cy="164592"/>
+          </a:xfrm>
+          <a:prstGeom prst="rect">
+            <a:avLst/>
+          </a:prstGeom>
+          <a:solidFill>
+            <a:srgbClr val="269CCB"/>
+          </a:solidFill>
+          <a:ln>
+            <a:noFill/>
+          </a:ln>
+        </p:spPr>
+        <p:style>
+          <a:lnRef idx="1">
+            <a:schemeClr val="accent1"/>
+          </a:lnRef>
+          <a:fillRef idx="3">
+            <a:schemeClr val="accent1"/>
+          </a:fillRef>
+          <a:effectRef idx="2">
+            <a:schemeClr val="accent1"/>
+          </a:effectRef>
+          <a:fontRef idx="minor">
+            <a:schemeClr val="lt1"/>
+          </a:fontRef>
+        </p:style>
+        <p:txBody>
+          <a:bodyPr rtlCol="0" anchor="ctr"/>
+          <a:lstStyle/>
+          <a:p>
+            <a:pPr algn="ctr"/>
+          </a:p>
+        </p:txBody>
+      </p:sp>
+      <p:pic>
+        <p:nvPicPr>
+          <p:cNvPr id="3" name="Picture 2" descr="logo_uniajc_color.png"/>
+          <p:cNvPicPr>
+            <a:picLocks noChangeAspect="1"/>
+          </p:cNvPicPr>
+          <p:nvPr/>
+        </p:nvPicPr>
+        <p:blipFill>
+          <a:blip r:embed="rId2"/>
+          <a:stretch>
+            <a:fillRect/>
+          </a:stretch>
+        </p:blipFill>
+        <p:spPr>
+          <a:xfrm>
+            <a:off x="10271455" y="5998464"/>
+            <a:ext cx="1463040" cy="643233"/>
+          </a:xfrm>
+          <a:prstGeom prst="rect">
+            <a:avLst/>
+          </a:prstGeom>
+        </p:spPr>
+      </p:pic>
+      <p:sp>
+        <p:nvSpPr>
+          <p:cNvPr id="4" name="TextBox 3"/>
+          <p:cNvSpPr txBox="1"/>
+          <p:nvPr/>
+        </p:nvSpPr>
+        <p:spPr>
+          <a:xfrm>
+            <a:off x="457200" y="1737360"/>
+            <a:ext cx="11277295" cy="1097280"/>
+          </a:xfrm>
+          <a:prstGeom prst="rect">
+            <a:avLst/>
+          </a:prstGeom>
+          <a:noFill/>
+        </p:spPr>
+        <p:txBody>
+          <a:bodyPr wrap="square" anchor="ctr"/>
+          <a:lstStyle/>
+          <a:p>
+            <a:pPr algn="ctr"/>
+            <a:r>
+              <a:rPr sz="3400" b="1" i="0">
+                <a:solidFill>
+                  <a:srgbClr val="095292"/>
+                </a:solidFill>
+                <a:latin typeface="Calibri"/>
+              </a:rPr>
+              <a:t>Clase 2 · PI en movimiento</a:t>
+            </a:r>
+          </a:p>
+        </p:txBody>
+      </p:sp>
+      <p:sp>
+        <p:nvSpPr>
+          <p:cNvPr id="5" name="TextBox 4"/>
+          <p:cNvSpPr txBox="1"/>
+          <p:nvPr/>
+        </p:nvSpPr>
+        <p:spPr>
+          <a:xfrm>
+            <a:off x="457200" y="3017520"/>
+            <a:ext cx="11277295" cy="1645920"/>
+          </a:xfrm>
+          <a:prstGeom prst="rect">
+            <a:avLst/>
+          </a:prstGeom>
+          <a:noFill/>
+        </p:spPr>
+        <p:txBody>
+          <a:bodyPr wrap="square">
+            <a:spAutoFit/>
+          </a:bodyPr>
+          <a:lstStyle/>
+          <a:p>
+            <a:pPr algn="ctr">
+              <a:spcAft>
+                <a:spcPts val="600"/>
+              </a:spcAft>
+            </a:pPr>
+            <a:r>
+              <a:rPr sz="1600" b="0" i="0">
+                <a:solidFill>
+                  <a:srgbClr val="333333"/>
+                </a:solidFill>
+                <a:latin typeface="Calibri"/>
+              </a:rPr>
+              <a:t>Decidir modelo dominante (IaaS/PaaS/SaaS) para CloudLite + ADR breve</a:t>
+            </a:r>
+          </a:p>
+          <a:p>
+            <a:pPr algn="ctr">
+              <a:spcAft>
+                <a:spcPts val="600"/>
+              </a:spcAft>
+            </a:pPr>
+            <a:r>
+              <a:rPr sz="1600" b="0" i="0">
+                <a:solidFill>
+                  <a:srgbClr val="333333"/>
+                </a:solidFill>
+                <a:latin typeface="Calibri"/>
+              </a:rPr>
+              <a:t>Evidencia: ADR-001: decisión de modelo de servicio + matriz de comparación aplicada al dominio</a:t>
+            </a:r>
+          </a:p>
+          <a:p>
+            <a:pPr algn="ctr">
+              <a:spcAft>
+                <a:spcPts val="600"/>
+              </a:spcAft>
+            </a:pPr>
+            <a:r>
+              <a:rPr sz="1600" b="0" i="0">
+                <a:solidFill>
+                  <a:srgbClr val="333333"/>
+                </a:solidFill>
+                <a:latin typeface="Calibri"/>
+              </a:rPr>
+              <a:t>Siguiente paso = siguiente hito del PI CloudLite</a:t>
+            </a:r>
+          </a:p>
+        </p:txBody>
+      </p:sp>
+      <p:sp>
+        <p:nvSpPr>
+          <p:cNvPr id="6" name="TextBox 5"/>
+          <p:cNvSpPr txBox="1"/>
+          <p:nvPr/>
+        </p:nvSpPr>
+        <p:spPr>
+          <a:xfrm>
+            <a:off x="457200" y="4754880"/>
+            <a:ext cx="11277295" cy="640080"/>
+          </a:xfrm>
+          <a:prstGeom prst="rect">
+            <a:avLst/>
+          </a:prstGeom>
+          <a:noFill/>
+        </p:spPr>
+        <p:txBody>
+          <a:bodyPr wrap="square">
+            <a:spAutoFit/>
+          </a:bodyPr>
+          <a:lstStyle/>
+          <a:p>
+            <a:pPr algn="ctr"/>
+            <a:r>
+              <a:rPr sz="2000" b="1" i="0">
+                <a:solidFill>
+                  <a:srgbClr val="269CCB"/>
+                </a:solidFill>
+                <a:latin typeface="Calibri"/>
+              </a:rPr>
+              <a:t>Teoría al servicio del proyecto</a:t>
+            </a:r>
+          </a:p>
+        </p:txBody>
+      </p:sp>
+    </p:spTree>
+  </p:cSld>
+  <p:clrMapOvr>
+    <a:masterClrMapping/>
+  </p:clrMapOvr>
+</p:sld>
+</file>
+
 <file path=ppt/slides/slide4.xml><?xml version="1.0" encoding="utf-8"?>
 <p:sld xmlns:a="http://schemas.openxmlformats.org/drawingml/2006/main" xmlns:p="http://schemas.openxmlformats.org/presentationml/2006/main" xmlns:r="http://schemas.openxmlformats.org/officeDocument/2006/relationships">
   <p:cSld>
@@ -13058,7 +14288,7 @@
                 </a:solidFill>
                 <a:latin typeface="Calibri"/>
               </a:rPr>
-              <a:t>De que se parte y que se decide hoy</a:t>
+              <a:t>De que se parte y que se decide hoy (1/2)</a:t>
             </a:r>
           </a:p>
         </p:txBody>
@@ -13130,38 +14360,6 @@
                 <a:latin typeface="Calibri"/>
               </a:rPr>
               <a:t>–   El punto de partida es lo definido en la Clase 1: cada estudiante ya tiene un dominio para CloudLite App, tres a cinco capacidades, sus actores y un diagrama de contexto.</a:t>
-            </a:r>
-          </a:p>
-          <a:p>
-            <a:pPr>
-              <a:spcAft>
-                <a:spcPts val="800"/>
-              </a:spcAft>
-            </a:pPr>
-            <a:r>
-              <a:rPr sz="2000" b="0" i="0">
-                <a:solidFill>
-                  <a:srgbClr val="333333"/>
-                </a:solidFill>
-                <a:latin typeface="Calibri"/>
-              </a:rPr>
-              <a:t>–   La pregunta de hoy es la siguiente en orden logico: si ese sistema va a vivir en la nube, quien administra cada capa de la maquinaria que lo sostiene.</a:t>
-            </a:r>
-          </a:p>
-          <a:p>
-            <a:pPr>
-              <a:spcAft>
-                <a:spcPts val="800"/>
-              </a:spcAft>
-            </a:pPr>
-            <a:r>
-              <a:rPr sz="2000" b="0" i="0">
-                <a:solidFill>
-                  <a:srgbClr val="333333"/>
-                </a:solidFill>
-                <a:latin typeface="Calibri"/>
-              </a:rPr>
-              <a:t>–   No hay una sola respuesta, hay tres respuestas estandar que la industria llama IaaS, PaaS y SaaS, y elegir entre ellas es una decision de arquitectura con consecuencias medibles en costo, velocidad de entrega, seguridad y libertad futura.</a:t>
             </a:r>
           </a:p>
         </p:txBody>
@@ -13342,7 +14540,7 @@
                 </a:solidFill>
                 <a:latin typeface="Calibri"/>
               </a:rPr>
-              <a:t>La pila de responsabilidades: donde se corta la linea</a:t>
+              <a:t>De que se parte y que se decide hoy (2/2)</a:t>
             </a:r>
           </a:p>
         </p:txBody>
@@ -13381,7 +14579,7 @@
                 </a:solidFill>
                 <a:latin typeface="Calibri"/>
               </a:rPr>
-              <a:t>–   Para entender los tres modelos hay que ver primero la pila completa de responsabilidades que existe debajo de cualquier aplicacion</a:t>
+              <a:t>–   La pregunta de hoy es la siguiente en orden logico: si ese sistema va a vivir en la nube, quien administra cada capa de la maquinaria que lo sostiene.</a:t>
             </a:r>
           </a:p>
           <a:p>
@@ -13397,103 +14595,7 @@
                 </a:solidFill>
                 <a:latin typeface="Calibri"/>
               </a:rPr>
-              <a:t>–   De abajo hacia arriba: el edificio y la energia electrica, el hardware fisico (servidores, discos, cableado de red), la capa de virtualizacion que parte ese hardware en maquinas logicas</a:t>
-            </a:r>
-          </a:p>
-          <a:p>
-            <a:pPr>
-              <a:spcAft>
-                <a:spcPts val="800"/>
-              </a:spcAft>
-            </a:pPr>
-            <a:r>
-              <a:rPr sz="2000" b="0" i="0">
-                <a:solidFill>
-                  <a:srgbClr val="333333"/>
-                </a:solidFill>
-                <a:latin typeface="Calibri"/>
-              </a:rPr>
-              <a:t>–   El sistema operativo de cada maquina, el runtime o entorno de ejecucion (por ejemplo Node.js, Python o la maquina virtual de Java) junto con servicios de apoyo como la base de datos</a:t>
-            </a:r>
-          </a:p>
-          <a:p>
-            <a:pPr>
-              <a:spcAft>
-                <a:spcPts val="800"/>
-              </a:spcAft>
-            </a:pPr>
-            <a:r>
-              <a:rPr sz="2000" b="0" i="0">
-                <a:solidFill>
-                  <a:srgbClr val="333333"/>
-                </a:solidFill>
-                <a:latin typeface="Calibri"/>
-              </a:rPr>
-              <a:t>–   Y finalmente el codigo de la aplicacion, sus datos y la administracion de usuarios y permisos.</a:t>
-            </a:r>
-          </a:p>
-          <a:p>
-            <a:pPr>
-              <a:spcAft>
-                <a:spcPts val="800"/>
-              </a:spcAft>
-            </a:pPr>
-            <a:r>
-              <a:rPr sz="2000" b="0" i="0">
-                <a:solidFill>
-                  <a:srgbClr val="333333"/>
-                </a:solidFill>
-                <a:latin typeface="Calibri"/>
-              </a:rPr>
-              <a:t>–   Son ocho o nueve capas segun como se cuente.</a:t>
-            </a:r>
-          </a:p>
-          <a:p>
-            <a:pPr>
-              <a:spcAft>
-                <a:spcPts val="800"/>
-              </a:spcAft>
-            </a:pPr>
-            <a:r>
-              <a:rPr sz="2000" b="0" i="0">
-                <a:solidFill>
-                  <a:srgbClr val="333333"/>
-                </a:solidFill>
-                <a:latin typeface="Calibri"/>
-              </a:rPr>
-              <a:t>–   En el modelo tradicional, llamado on-premise porque los equipos son propios y estan en las instalaciones de la organizacion, todas son responsabilidad del cliente.</a:t>
-            </a:r>
-          </a:p>
-          <a:p>
-            <a:pPr>
-              <a:spcAft>
-                <a:spcPts val="800"/>
-              </a:spcAft>
-            </a:pPr>
-            <a:r>
-              <a:rPr sz="2000" b="0" i="0">
-                <a:solidFill>
-                  <a:srgbClr val="333333"/>
-                </a:solidFill>
-                <a:latin typeface="Calibri"/>
-              </a:rPr>
-              <a:t>–   Los tres modelos de servicio se distinguen exactamente por donde se traza la linea que separa lo que administra el proveedor de lo que administra el cliente.</a:t>
-            </a:r>
-          </a:p>
-          <a:p>
-            <a:pPr>
-              <a:spcAft>
-                <a:spcPts val="800"/>
-              </a:spcAft>
-            </a:pPr>
-            <a:r>
-              <a:rPr sz="2000" b="0" i="0">
-                <a:solidFill>
-                  <a:srgbClr val="333333"/>
-                </a:solidFill>
-                <a:latin typeface="Calibri"/>
-              </a:rPr>
-              <a:t>–   Nada mas y nada menos: si el estudiante entiende esa frase, entendio la clase.</a:t>
+              <a:t>–   No hay una sola respuesta, hay tres respuestas estandar que la industria llama IaaS, PaaS y SaaS, y elegir entre ellas es una decision de arquitectura con consecuencias medibles en costo, velocidad de entrega, seguridad y libertad futura.</a:t>
             </a:r>
           </a:p>
         </p:txBody>

--- a/Arquitectura de Sistemas Computacionales/Clases/Clase 2 - Modelos de servicio IaaS PaaS SaaS/Presentacion.pptx
+++ b/Arquitectura de Sistemas Computacionales/Clases/Clase 2 - Modelos de servicio IaaS PaaS SaaS/Presentacion.pptx
@@ -38,6 +38,7 @@
     <p:sldId id="286" r:id="rId37"/>
     <p:sldId id="287" r:id="rId38"/>
     <p:sldId id="288" r:id="rId39"/>
+    <p:sldId id="289" r:id="rId40"/>
   </p:sldIdLst>
   <p:sldSz cx="12191695" cy="6858000" type="screen4x3"/>
   <p:notesSz cx="6858000" cy="9144000"/>
@@ -8377,7 +8378,7 @@
         <p:spPr>
           <a:xfrm>
             <a:off x="0" y="0"/>
-            <a:ext cx="12191695" cy="1170432"/>
+            <a:ext cx="12191695" cy="960120"/>
           </a:xfrm>
           <a:prstGeom prst="rect">
             <a:avLst/>
@@ -8419,7 +8420,7 @@
         </p:nvSpPr>
         <p:spPr>
           <a:xfrm>
-            <a:off x="0" y="1170432"/>
+            <a:off x="0" y="960120"/>
             <a:ext cx="12191695" cy="41148"/>
           </a:xfrm>
           <a:prstGeom prst="rect">
@@ -8463,7 +8464,7 @@
         <p:spPr>
           <a:xfrm>
             <a:off x="457200" y="164592"/>
-            <a:ext cx="11277295" cy="384048"/>
+            <a:ext cx="11277295" cy="502920"/>
           </a:xfrm>
           <a:prstGeom prst="rect">
             <a:avLst/>
@@ -8483,60 +8484,69 @@
                 </a:solidFill>
                 <a:latin typeface="Calibri"/>
               </a:rPr>
-              <a:t>Quién administra cada capa — IaaS vs PaaS vs SaaS</a:t>
-            </a:r>
-          </a:p>
-        </p:txBody>
-      </p:sp>
-      <p:sp>
-        <p:nvSpPr>
-          <p:cNvPr id="5" name="TextBox 4"/>
-          <p:cNvSpPr txBox="1"/>
-          <p:nvPr/>
-        </p:nvSpPr>
-        <p:spPr>
-          <a:xfrm>
-            <a:off x="457200" y="566928"/>
-            <a:ext cx="11277295" cy="411480"/>
-          </a:xfrm>
-          <a:prstGeom prst="rect">
-            <a:avLst/>
-          </a:prstGeom>
-          <a:noFill/>
-        </p:spPr>
-        <p:txBody>
-          <a:bodyPr wrap="square">
-            <a:spAutoFit/>
-          </a:bodyPr>
-          <a:lstStyle/>
-          <a:p>
-            <a:r>
-              <a:rPr sz="1400" b="0" i="0">
-                <a:solidFill>
-                  <a:srgbClr val="B8D8EE"/>
-                </a:solidFill>
-                <a:latin typeface="Calibri"/>
-              </a:rPr>
-              <a:t>Misma aplicación, distinto reparto de responsabilidad entre usted y el proveedor</a:t>
-            </a:r>
-          </a:p>
-        </p:txBody>
-      </p:sp>
-      <p:sp>
-        <p:nvSpPr>
-          <p:cNvPr id="6" name="Rounded Rectangle 5"/>
+              <a:t>La plantilla de ADR, con los seis apartados que se califican</a:t>
+            </a:r>
+          </a:p>
+        </p:txBody>
+      </p:sp>
+      <p:sp>
+        <p:nvSpPr>
+          <p:cNvPr id="5" name="Rounded Rectangle 4"/>
           <p:cNvSpPr/>
           <p:nvPr/>
         </p:nvSpPr>
         <p:spPr>
           <a:xfrm>
-            <a:off x="548640" y="1325880"/>
-            <a:ext cx="3291840" cy="685800"/>
+            <a:off x="457200" y="1261872"/>
+            <a:ext cx="11277295" cy="5093208"/>
           </a:xfrm>
           <a:prstGeom prst="roundRect">
             <a:avLst>
               <a:gd name="adj" fmla="val 12000"/>
             </a:avLst>
+          </a:prstGeom>
+          <a:solidFill>
+            <a:srgbClr val="1E2A38"/>
+          </a:solidFill>
+          <a:ln>
+            <a:noFill/>
+          </a:ln>
+        </p:spPr>
+        <p:style>
+          <a:lnRef idx="1">
+            <a:schemeClr val="accent1"/>
+          </a:lnRef>
+          <a:fillRef idx="3">
+            <a:schemeClr val="accent1"/>
+          </a:fillRef>
+          <a:effectRef idx="2">
+            <a:schemeClr val="accent1"/>
+          </a:effectRef>
+          <a:fontRef idx="minor">
+            <a:schemeClr val="lt1"/>
+          </a:fontRef>
+        </p:style>
+        <p:txBody>
+          <a:bodyPr rtlCol="0" anchor="ctr"/>
+          <a:lstStyle/>
+          <a:p>
+            <a:pPr algn="ctr"/>
+          </a:p>
+        </p:txBody>
+      </p:sp>
+      <p:sp>
+        <p:nvSpPr>
+          <p:cNvPr id="6" name="Rectangle 5"/>
+          <p:cNvSpPr/>
+          <p:nvPr/>
+        </p:nvSpPr>
+        <p:spPr>
+          <a:xfrm>
+            <a:off x="457200" y="1261872"/>
+            <a:ext cx="11277295" cy="320040"/>
+          </a:xfrm>
+          <a:prstGeom prst="rect">
+            <a:avLst/>
           </a:prstGeom>
           <a:solidFill>
             <a:srgbClr val="095292"/>
@@ -8560,795 +8570,55 @@
           </a:fontRef>
         </p:style>
         <p:txBody>
-          <a:bodyPr rtlCol="0" anchor="ctr" wrap="square"/>
+          <a:bodyPr rtlCol="0" anchor="ctr"/>
           <a:lstStyle/>
           <a:p>
             <a:pPr algn="ctr"/>
-            <a:r>
-              <a:rPr sz="1200" b="1" i="0">
-                <a:solidFill>
-                  <a:srgbClr val="FFFFFF"/>
-                </a:solidFill>
-                <a:latin typeface="Calibri"/>
-              </a:rPr>
-              <a:t>IaaS
-(DigitalOcean, AWS EC2)</a:t>
-            </a:r>
-          </a:p>
-        </p:txBody>
-      </p:sp>
-      <p:sp>
-        <p:nvSpPr>
-          <p:cNvPr id="7" name="Rounded Rectangle 6"/>
-          <p:cNvSpPr/>
-          <p:nvPr/>
-        </p:nvSpPr>
-        <p:spPr>
-          <a:xfrm>
-            <a:off x="4160520" y="1325880"/>
-            <a:ext cx="3291840" cy="685800"/>
-          </a:xfrm>
-          <a:prstGeom prst="roundRect">
-            <a:avLst>
-              <a:gd name="adj" fmla="val 12000"/>
-            </a:avLst>
-          </a:prstGeom>
-          <a:solidFill>
-            <a:srgbClr val="095292"/>
-          </a:solidFill>
-          <a:ln>
-            <a:noFill/>
-          </a:ln>
-        </p:spPr>
-        <p:style>
-          <a:lnRef idx="1">
-            <a:schemeClr val="accent1"/>
-          </a:lnRef>
-          <a:fillRef idx="3">
-            <a:schemeClr val="accent1"/>
-          </a:fillRef>
-          <a:effectRef idx="2">
-            <a:schemeClr val="accent1"/>
-          </a:effectRef>
-          <a:fontRef idx="minor">
-            <a:schemeClr val="lt1"/>
-          </a:fontRef>
-        </p:style>
-        <p:txBody>
-          <a:bodyPr rtlCol="0" anchor="ctr" wrap="square"/>
-          <a:lstStyle/>
-          <a:p>
-            <a:pPr algn="ctr"/>
-            <a:r>
-              <a:rPr sz="1200" b="1" i="0">
-                <a:solidFill>
-                  <a:srgbClr val="FFFFFF"/>
-                </a:solidFill>
-                <a:latin typeface="Calibri"/>
-              </a:rPr>
-              <a:t>PaaS
-(Render, Railway, Heroku)</a:t>
-            </a:r>
-          </a:p>
-        </p:txBody>
-      </p:sp>
-      <p:sp>
-        <p:nvSpPr>
-          <p:cNvPr id="8" name="Rounded Rectangle 7"/>
-          <p:cNvSpPr/>
-          <p:nvPr/>
-        </p:nvSpPr>
-        <p:spPr>
-          <a:xfrm>
-            <a:off x="7772400" y="1325880"/>
-            <a:ext cx="3291840" cy="685800"/>
-          </a:xfrm>
-          <a:prstGeom prst="roundRect">
-            <a:avLst>
-              <a:gd name="adj" fmla="val 12000"/>
-            </a:avLst>
-          </a:prstGeom>
-          <a:solidFill>
-            <a:srgbClr val="095292"/>
-          </a:solidFill>
-          <a:ln>
-            <a:noFill/>
-          </a:ln>
-        </p:spPr>
-        <p:style>
-          <a:lnRef idx="1">
-            <a:schemeClr val="accent1"/>
-          </a:lnRef>
-          <a:fillRef idx="3">
-            <a:schemeClr val="accent1"/>
-          </a:fillRef>
-          <a:effectRef idx="2">
-            <a:schemeClr val="accent1"/>
-          </a:effectRef>
-          <a:fontRef idx="minor">
-            <a:schemeClr val="lt1"/>
-          </a:fontRef>
-        </p:style>
-        <p:txBody>
-          <a:bodyPr rtlCol="0" anchor="ctr" wrap="square"/>
-          <a:lstStyle/>
-          <a:p>
-            <a:pPr algn="ctr"/>
-            <a:r>
-              <a:rPr sz="1200" b="1" i="0">
-                <a:solidFill>
-                  <a:srgbClr val="FFFFFF"/>
-                </a:solidFill>
-                <a:latin typeface="Calibri"/>
-              </a:rPr>
-              <a:t>SaaS
-(Gmail, Notion, Slack)</a:t>
-            </a:r>
-          </a:p>
-        </p:txBody>
-      </p:sp>
-      <p:sp>
-        <p:nvSpPr>
-          <p:cNvPr id="9" name="Rounded Rectangle 8"/>
-          <p:cNvSpPr/>
-          <p:nvPr/>
-        </p:nvSpPr>
-        <p:spPr>
-          <a:xfrm>
-            <a:off x="548640" y="2103120"/>
-            <a:ext cx="3291840" cy="548640"/>
-          </a:xfrm>
-          <a:prstGeom prst="roundRect">
-            <a:avLst>
-              <a:gd name="adj" fmla="val 12000"/>
-            </a:avLst>
-          </a:prstGeom>
-          <a:solidFill>
-            <a:srgbClr val="FFD000"/>
-          </a:solidFill>
-          <a:ln>
-            <a:noFill/>
-          </a:ln>
-        </p:spPr>
-        <p:style>
-          <a:lnRef idx="1">
-            <a:schemeClr val="accent1"/>
-          </a:lnRef>
-          <a:fillRef idx="3">
-            <a:schemeClr val="accent1"/>
-          </a:fillRef>
-          <a:effectRef idx="2">
-            <a:schemeClr val="accent1"/>
-          </a:effectRef>
-          <a:fontRef idx="minor">
-            <a:schemeClr val="lt1"/>
-          </a:fontRef>
-        </p:style>
-        <p:txBody>
-          <a:bodyPr rtlCol="0" anchor="ctr" wrap="square"/>
-          <a:lstStyle/>
-          <a:p>
-            <a:pPr algn="ctr"/>
-            <a:r>
-              <a:rPr sz="1100" b="1" i="0">
-                <a:solidFill>
-                  <a:srgbClr val="095292"/>
-                </a:solidFill>
-                <a:latin typeface="Calibri"/>
-              </a:rPr>
-              <a:t>Aplicación y datos</a:t>
-            </a:r>
-          </a:p>
-        </p:txBody>
-      </p:sp>
-      <p:sp>
-        <p:nvSpPr>
-          <p:cNvPr id="10" name="Rounded Rectangle 9"/>
-          <p:cNvSpPr/>
-          <p:nvPr/>
-        </p:nvSpPr>
-        <p:spPr>
-          <a:xfrm>
-            <a:off x="548640" y="2743200"/>
-            <a:ext cx="3291840" cy="548640"/>
-          </a:xfrm>
-          <a:prstGeom prst="roundRect">
-            <a:avLst>
-              <a:gd name="adj" fmla="val 12000"/>
-            </a:avLst>
-          </a:prstGeom>
-          <a:solidFill>
-            <a:srgbClr val="FFD000"/>
-          </a:solidFill>
-          <a:ln>
-            <a:noFill/>
-          </a:ln>
-        </p:spPr>
-        <p:style>
-          <a:lnRef idx="1">
-            <a:schemeClr val="accent1"/>
-          </a:lnRef>
-          <a:fillRef idx="3">
-            <a:schemeClr val="accent1"/>
-          </a:fillRef>
-          <a:effectRef idx="2">
-            <a:schemeClr val="accent1"/>
-          </a:effectRef>
-          <a:fontRef idx="minor">
-            <a:schemeClr val="lt1"/>
-          </a:fontRef>
-        </p:style>
-        <p:txBody>
-          <a:bodyPr rtlCol="0" anchor="ctr" wrap="square"/>
-          <a:lstStyle/>
-          <a:p>
-            <a:pPr algn="ctr"/>
-            <a:r>
-              <a:rPr sz="1100" b="1" i="0">
-                <a:solidFill>
-                  <a:srgbClr val="095292"/>
-                </a:solidFill>
-                <a:latin typeface="Calibri"/>
-              </a:rPr>
-              <a:t>Runtime / middleware</a:t>
-            </a:r>
-          </a:p>
-        </p:txBody>
-      </p:sp>
-      <p:sp>
-        <p:nvSpPr>
-          <p:cNvPr id="11" name="Rounded Rectangle 10"/>
-          <p:cNvSpPr/>
-          <p:nvPr/>
-        </p:nvSpPr>
-        <p:spPr>
-          <a:xfrm>
-            <a:off x="548640" y="3383280"/>
-            <a:ext cx="3291840" cy="548640"/>
-          </a:xfrm>
-          <a:prstGeom prst="roundRect">
-            <a:avLst>
-              <a:gd name="adj" fmla="val 12000"/>
-            </a:avLst>
-          </a:prstGeom>
-          <a:solidFill>
-            <a:srgbClr val="FFD000"/>
-          </a:solidFill>
-          <a:ln>
-            <a:noFill/>
-          </a:ln>
-        </p:spPr>
-        <p:style>
-          <a:lnRef idx="1">
-            <a:schemeClr val="accent1"/>
-          </a:lnRef>
-          <a:fillRef idx="3">
-            <a:schemeClr val="accent1"/>
-          </a:fillRef>
-          <a:effectRef idx="2">
-            <a:schemeClr val="accent1"/>
-          </a:effectRef>
-          <a:fontRef idx="minor">
-            <a:schemeClr val="lt1"/>
-          </a:fontRef>
-        </p:style>
-        <p:txBody>
-          <a:bodyPr rtlCol="0" anchor="ctr" wrap="square"/>
-          <a:lstStyle/>
-          <a:p>
-            <a:pPr algn="ctr"/>
-            <a:r>
-              <a:rPr sz="1100" b="1" i="0">
-                <a:solidFill>
-                  <a:srgbClr val="095292"/>
-                </a:solidFill>
-                <a:latin typeface="Calibri"/>
-              </a:rPr>
-              <a:t>Sistema operativo</a:t>
-            </a:r>
-          </a:p>
-        </p:txBody>
-      </p:sp>
-      <p:sp>
-        <p:nvSpPr>
-          <p:cNvPr id="12" name="Rounded Rectangle 11"/>
-          <p:cNvSpPr/>
-          <p:nvPr/>
-        </p:nvSpPr>
-        <p:spPr>
-          <a:xfrm>
-            <a:off x="548640" y="4023360"/>
-            <a:ext cx="3291840" cy="548640"/>
-          </a:xfrm>
-          <a:prstGeom prst="roundRect">
-            <a:avLst>
-              <a:gd name="adj" fmla="val 12000"/>
-            </a:avLst>
-          </a:prstGeom>
-          <a:solidFill>
-            <a:srgbClr val="269CCB"/>
-          </a:solidFill>
-          <a:ln>
-            <a:noFill/>
-          </a:ln>
-        </p:spPr>
-        <p:style>
-          <a:lnRef idx="1">
-            <a:schemeClr val="accent1"/>
-          </a:lnRef>
-          <a:fillRef idx="3">
-            <a:schemeClr val="accent1"/>
-          </a:fillRef>
-          <a:effectRef idx="2">
-            <a:schemeClr val="accent1"/>
-          </a:effectRef>
-          <a:fontRef idx="minor">
-            <a:schemeClr val="lt1"/>
-          </a:fontRef>
-        </p:style>
-        <p:txBody>
-          <a:bodyPr rtlCol="0" anchor="ctr" wrap="square"/>
-          <a:lstStyle/>
-          <a:p>
-            <a:pPr algn="ctr"/>
-            <a:r>
-              <a:rPr sz="1050" b="1" i="0">
-                <a:solidFill>
-                  <a:srgbClr val="FFFFFF"/>
-                </a:solidFill>
-                <a:latin typeface="Calibri"/>
-              </a:rPr>
-              <a:t>Infraestructura
-(cómputo, red, disco)</a:t>
-            </a:r>
-          </a:p>
-        </p:txBody>
-      </p:sp>
-      <p:sp>
-        <p:nvSpPr>
-          <p:cNvPr id="13" name="Rounded Rectangle 12"/>
-          <p:cNvSpPr/>
-          <p:nvPr/>
-        </p:nvSpPr>
-        <p:spPr>
-          <a:xfrm>
-            <a:off x="4160520" y="2103120"/>
-            <a:ext cx="3291840" cy="548640"/>
-          </a:xfrm>
-          <a:prstGeom prst="roundRect">
-            <a:avLst>
-              <a:gd name="adj" fmla="val 12000"/>
-            </a:avLst>
-          </a:prstGeom>
-          <a:solidFill>
-            <a:srgbClr val="FFD000"/>
-          </a:solidFill>
-          <a:ln>
-            <a:noFill/>
-          </a:ln>
-        </p:spPr>
-        <p:style>
-          <a:lnRef idx="1">
-            <a:schemeClr val="accent1"/>
-          </a:lnRef>
-          <a:fillRef idx="3">
-            <a:schemeClr val="accent1"/>
-          </a:fillRef>
-          <a:effectRef idx="2">
-            <a:schemeClr val="accent1"/>
-          </a:effectRef>
-          <a:fontRef idx="minor">
-            <a:schemeClr val="lt1"/>
-          </a:fontRef>
-        </p:style>
-        <p:txBody>
-          <a:bodyPr rtlCol="0" anchor="ctr" wrap="square"/>
-          <a:lstStyle/>
-          <a:p>
-            <a:pPr algn="ctr"/>
-            <a:r>
-              <a:rPr sz="1100" b="1" i="0">
-                <a:solidFill>
-                  <a:srgbClr val="095292"/>
-                </a:solidFill>
-                <a:latin typeface="Calibri"/>
-              </a:rPr>
-              <a:t>Aplicación y datos</a:t>
-            </a:r>
-          </a:p>
-        </p:txBody>
-      </p:sp>
-      <p:sp>
-        <p:nvSpPr>
-          <p:cNvPr id="14" name="Rounded Rectangle 13"/>
-          <p:cNvSpPr/>
-          <p:nvPr/>
-        </p:nvSpPr>
-        <p:spPr>
-          <a:xfrm>
-            <a:off x="4160520" y="2743200"/>
-            <a:ext cx="3291840" cy="548640"/>
-          </a:xfrm>
-          <a:prstGeom prst="roundRect">
-            <a:avLst>
-              <a:gd name="adj" fmla="val 12000"/>
-            </a:avLst>
-          </a:prstGeom>
-          <a:solidFill>
-            <a:srgbClr val="269CCB"/>
-          </a:solidFill>
-          <a:ln>
-            <a:noFill/>
-          </a:ln>
-        </p:spPr>
-        <p:style>
-          <a:lnRef idx="1">
-            <a:schemeClr val="accent1"/>
-          </a:lnRef>
-          <a:fillRef idx="3">
-            <a:schemeClr val="accent1"/>
-          </a:fillRef>
-          <a:effectRef idx="2">
-            <a:schemeClr val="accent1"/>
-          </a:effectRef>
-          <a:fontRef idx="minor">
-            <a:schemeClr val="lt1"/>
-          </a:fontRef>
-        </p:style>
-        <p:txBody>
-          <a:bodyPr rtlCol="0" anchor="ctr" wrap="square"/>
-          <a:lstStyle/>
-          <a:p>
-            <a:pPr algn="ctr"/>
-            <a:r>
-              <a:rPr sz="1100" b="1" i="0">
-                <a:solidFill>
-                  <a:srgbClr val="FFFFFF"/>
-                </a:solidFill>
-                <a:latin typeface="Calibri"/>
-              </a:rPr>
-              <a:t>Runtime / middleware</a:t>
-            </a:r>
-          </a:p>
-        </p:txBody>
-      </p:sp>
-      <p:sp>
-        <p:nvSpPr>
-          <p:cNvPr id="15" name="Rounded Rectangle 14"/>
-          <p:cNvSpPr/>
-          <p:nvPr/>
-        </p:nvSpPr>
-        <p:spPr>
-          <a:xfrm>
-            <a:off x="4160520" y="3383280"/>
-            <a:ext cx="3291840" cy="548640"/>
-          </a:xfrm>
-          <a:prstGeom prst="roundRect">
-            <a:avLst>
-              <a:gd name="adj" fmla="val 12000"/>
-            </a:avLst>
-          </a:prstGeom>
-          <a:solidFill>
-            <a:srgbClr val="269CCB"/>
-          </a:solidFill>
-          <a:ln>
-            <a:noFill/>
-          </a:ln>
-        </p:spPr>
-        <p:style>
-          <a:lnRef idx="1">
-            <a:schemeClr val="accent1"/>
-          </a:lnRef>
-          <a:fillRef idx="3">
-            <a:schemeClr val="accent1"/>
-          </a:fillRef>
-          <a:effectRef idx="2">
-            <a:schemeClr val="accent1"/>
-          </a:effectRef>
-          <a:fontRef idx="minor">
-            <a:schemeClr val="lt1"/>
-          </a:fontRef>
-        </p:style>
-        <p:txBody>
-          <a:bodyPr rtlCol="0" anchor="ctr" wrap="square"/>
-          <a:lstStyle/>
-          <a:p>
-            <a:pPr algn="ctr"/>
-            <a:r>
-              <a:rPr sz="1100" b="1" i="0">
-                <a:solidFill>
-                  <a:srgbClr val="FFFFFF"/>
-                </a:solidFill>
-                <a:latin typeface="Calibri"/>
-              </a:rPr>
-              <a:t>Sistema operativo</a:t>
-            </a:r>
-          </a:p>
-        </p:txBody>
-      </p:sp>
-      <p:sp>
-        <p:nvSpPr>
-          <p:cNvPr id="16" name="Rounded Rectangle 15"/>
-          <p:cNvSpPr/>
-          <p:nvPr/>
-        </p:nvSpPr>
-        <p:spPr>
-          <a:xfrm>
-            <a:off x="4160520" y="4023360"/>
-            <a:ext cx="3291840" cy="548640"/>
-          </a:xfrm>
-          <a:prstGeom prst="roundRect">
-            <a:avLst>
-              <a:gd name="adj" fmla="val 12000"/>
-            </a:avLst>
-          </a:prstGeom>
-          <a:solidFill>
-            <a:srgbClr val="269CCB"/>
-          </a:solidFill>
-          <a:ln>
-            <a:noFill/>
-          </a:ln>
-        </p:spPr>
-        <p:style>
-          <a:lnRef idx="1">
-            <a:schemeClr val="accent1"/>
-          </a:lnRef>
-          <a:fillRef idx="3">
-            <a:schemeClr val="accent1"/>
-          </a:fillRef>
-          <a:effectRef idx="2">
-            <a:schemeClr val="accent1"/>
-          </a:effectRef>
-          <a:fontRef idx="minor">
-            <a:schemeClr val="lt1"/>
-          </a:fontRef>
-        </p:style>
-        <p:txBody>
-          <a:bodyPr rtlCol="0" anchor="ctr" wrap="square"/>
-          <a:lstStyle/>
-          <a:p>
-            <a:pPr algn="ctr"/>
-            <a:r>
-              <a:rPr sz="1050" b="1" i="0">
-                <a:solidFill>
-                  <a:srgbClr val="FFFFFF"/>
-                </a:solidFill>
-                <a:latin typeface="Calibri"/>
-              </a:rPr>
-              <a:t>Infraestructura
-(cómputo, red, disco)</a:t>
-            </a:r>
-          </a:p>
-        </p:txBody>
-      </p:sp>
-      <p:sp>
-        <p:nvSpPr>
-          <p:cNvPr id="17" name="Rounded Rectangle 16"/>
-          <p:cNvSpPr/>
-          <p:nvPr/>
-        </p:nvSpPr>
-        <p:spPr>
-          <a:xfrm>
-            <a:off x="7772400" y="2103120"/>
-            <a:ext cx="3291840" cy="548640"/>
-          </a:xfrm>
-          <a:prstGeom prst="roundRect">
-            <a:avLst>
-              <a:gd name="adj" fmla="val 12000"/>
-            </a:avLst>
-          </a:prstGeom>
-          <a:solidFill>
-            <a:srgbClr val="FFD000"/>
-          </a:solidFill>
-          <a:ln>
-            <a:noFill/>
-          </a:ln>
-        </p:spPr>
-        <p:style>
-          <a:lnRef idx="1">
-            <a:schemeClr val="accent1"/>
-          </a:lnRef>
-          <a:fillRef idx="3">
-            <a:schemeClr val="accent1"/>
-          </a:fillRef>
-          <a:effectRef idx="2">
-            <a:schemeClr val="accent1"/>
-          </a:effectRef>
-          <a:fontRef idx="minor">
-            <a:schemeClr val="lt1"/>
-          </a:fontRef>
-        </p:style>
-        <p:txBody>
-          <a:bodyPr rtlCol="0" anchor="ctr" wrap="square"/>
-          <a:lstStyle/>
-          <a:p>
-            <a:pPr algn="ctr"/>
-            <a:r>
-              <a:rPr sz="1050" b="1" i="0">
-                <a:solidFill>
-                  <a:srgbClr val="095292"/>
-                </a:solidFill>
-                <a:latin typeface="Calibri"/>
-              </a:rPr>
-              <a:t>Aplicación y datos
-(usted solo configura)</a:t>
-            </a:r>
-          </a:p>
-        </p:txBody>
-      </p:sp>
-      <p:sp>
-        <p:nvSpPr>
-          <p:cNvPr id="18" name="Rounded Rectangle 17"/>
-          <p:cNvSpPr/>
-          <p:nvPr/>
-        </p:nvSpPr>
-        <p:spPr>
-          <a:xfrm>
-            <a:off x="7772400" y="2743200"/>
-            <a:ext cx="3291840" cy="548640"/>
-          </a:xfrm>
-          <a:prstGeom prst="roundRect">
-            <a:avLst>
-              <a:gd name="adj" fmla="val 12000"/>
-            </a:avLst>
-          </a:prstGeom>
-          <a:solidFill>
-            <a:srgbClr val="269CCB"/>
-          </a:solidFill>
-          <a:ln>
-            <a:noFill/>
-          </a:ln>
-        </p:spPr>
-        <p:style>
-          <a:lnRef idx="1">
-            <a:schemeClr val="accent1"/>
-          </a:lnRef>
-          <a:fillRef idx="3">
-            <a:schemeClr val="accent1"/>
-          </a:fillRef>
-          <a:effectRef idx="2">
-            <a:schemeClr val="accent1"/>
-          </a:effectRef>
-          <a:fontRef idx="minor">
-            <a:schemeClr val="lt1"/>
-          </a:fontRef>
-        </p:style>
-        <p:txBody>
-          <a:bodyPr rtlCol="0" anchor="ctr" wrap="square"/>
-          <a:lstStyle/>
-          <a:p>
-            <a:pPr algn="ctr"/>
-            <a:r>
-              <a:rPr sz="1100" b="1" i="0">
-                <a:solidFill>
-                  <a:srgbClr val="FFFFFF"/>
-                </a:solidFill>
-                <a:latin typeface="Calibri"/>
-              </a:rPr>
-              <a:t>Runtime / middleware</a:t>
-            </a:r>
-          </a:p>
-        </p:txBody>
-      </p:sp>
-      <p:sp>
-        <p:nvSpPr>
-          <p:cNvPr id="19" name="Rounded Rectangle 18"/>
-          <p:cNvSpPr/>
-          <p:nvPr/>
-        </p:nvSpPr>
-        <p:spPr>
-          <a:xfrm>
-            <a:off x="7772400" y="3383280"/>
-            <a:ext cx="3291840" cy="548640"/>
-          </a:xfrm>
-          <a:prstGeom prst="roundRect">
-            <a:avLst>
-              <a:gd name="adj" fmla="val 12000"/>
-            </a:avLst>
-          </a:prstGeom>
-          <a:solidFill>
-            <a:srgbClr val="269CCB"/>
-          </a:solidFill>
-          <a:ln>
-            <a:noFill/>
-          </a:ln>
-        </p:spPr>
-        <p:style>
-          <a:lnRef idx="1">
-            <a:schemeClr val="accent1"/>
-          </a:lnRef>
-          <a:fillRef idx="3">
-            <a:schemeClr val="accent1"/>
-          </a:fillRef>
-          <a:effectRef idx="2">
-            <a:schemeClr val="accent1"/>
-          </a:effectRef>
-          <a:fontRef idx="minor">
-            <a:schemeClr val="lt1"/>
-          </a:fontRef>
-        </p:style>
-        <p:txBody>
-          <a:bodyPr rtlCol="0" anchor="ctr" wrap="square"/>
-          <a:lstStyle/>
-          <a:p>
-            <a:pPr algn="ctr"/>
-            <a:r>
-              <a:rPr sz="1100" b="1" i="0">
-                <a:solidFill>
-                  <a:srgbClr val="FFFFFF"/>
-                </a:solidFill>
-                <a:latin typeface="Calibri"/>
-              </a:rPr>
-              <a:t>Sistema operativo</a:t>
-            </a:r>
-          </a:p>
-        </p:txBody>
-      </p:sp>
-      <p:sp>
-        <p:nvSpPr>
-          <p:cNvPr id="20" name="Rounded Rectangle 19"/>
-          <p:cNvSpPr/>
-          <p:nvPr/>
-        </p:nvSpPr>
-        <p:spPr>
-          <a:xfrm>
-            <a:off x="7772400" y="4023360"/>
-            <a:ext cx="3291840" cy="548640"/>
-          </a:xfrm>
-          <a:prstGeom prst="roundRect">
-            <a:avLst>
-              <a:gd name="adj" fmla="val 12000"/>
-            </a:avLst>
-          </a:prstGeom>
-          <a:solidFill>
-            <a:srgbClr val="269CCB"/>
-          </a:solidFill>
-          <a:ln>
-            <a:noFill/>
-          </a:ln>
-        </p:spPr>
-        <p:style>
-          <a:lnRef idx="1">
-            <a:schemeClr val="accent1"/>
-          </a:lnRef>
-          <a:fillRef idx="3">
-            <a:schemeClr val="accent1"/>
-          </a:fillRef>
-          <a:effectRef idx="2">
-            <a:schemeClr val="accent1"/>
-          </a:effectRef>
-          <a:fontRef idx="minor">
-            <a:schemeClr val="lt1"/>
-          </a:fontRef>
-        </p:style>
-        <p:txBody>
-          <a:bodyPr rtlCol="0" anchor="ctr" wrap="square"/>
-          <a:lstStyle/>
-          <a:p>
-            <a:pPr algn="ctr"/>
-            <a:r>
-              <a:rPr sz="1050" b="1" i="0">
-                <a:solidFill>
-                  <a:srgbClr val="FFFFFF"/>
-                </a:solidFill>
-                <a:latin typeface="Calibri"/>
-              </a:rPr>
-              <a:t>Infraestructura
-(cómputo, red, disco)</a:t>
-            </a:r>
-          </a:p>
-        </p:txBody>
-      </p:sp>
-      <p:sp>
-        <p:nvSpPr>
-          <p:cNvPr id="21" name="TextBox 20"/>
+          </a:p>
+        </p:txBody>
+      </p:sp>
+      <p:sp>
+        <p:nvSpPr>
+          <p:cNvPr id="7" name="TextBox 6"/>
           <p:cNvSpPr txBox="1"/>
           <p:nvPr/>
         </p:nvSpPr>
         <p:spPr>
           <a:xfrm>
-            <a:off x="457200" y="5897880"/>
-            <a:ext cx="11277295" cy="320040"/>
+            <a:off x="685800" y="1307592"/>
+            <a:ext cx="10820095" cy="256032"/>
+          </a:xfrm>
+          <a:prstGeom prst="rect">
+            <a:avLst/>
+          </a:prstGeom>
+          <a:noFill/>
+        </p:spPr>
+        <p:txBody>
+          <a:bodyPr wrap="square" anchor="ctr"/>
+          <a:lstStyle/>
+          <a:p>
+            <a:r>
+              <a:rPr sz="1000" b="1" i="0">
+                <a:solidFill>
+                  <a:srgbClr val="269CCB"/>
+                </a:solidFill>
+                <a:latin typeface="Calibri"/>
+              </a:rPr>
+              <a:t>● ● ●</a:t>
+            </a:r>
+          </a:p>
+        </p:txBody>
+      </p:sp>
+      <p:sp>
+        <p:nvSpPr>
+          <p:cNvPr id="8" name="TextBox 7"/>
+          <p:cNvSpPr txBox="1"/>
+          <p:nvPr/>
+        </p:nvSpPr>
+        <p:spPr>
+          <a:xfrm>
+            <a:off x="777240" y="1719072"/>
+            <a:ext cx="5181447" cy="4453128"/>
           </a:xfrm>
           <a:prstGeom prst="rect">
             <a:avLst/>
@@ -9361,28 +8631,193 @@
           </a:bodyPr>
           <a:lstStyle/>
           <a:p>
-            <a:r>
-              <a:rPr sz="1050" b="0" i="1">
-                <a:solidFill>
-                  <a:srgbClr val="666666"/>
-                </a:solidFill>
-                <a:latin typeface="Calibri"/>
-              </a:rPr>
-              <a:t>Amarillo = lo administra usted · Celeste = lo administra el proveedor</a:t>
-            </a:r>
-          </a:p>
-        </p:txBody>
-      </p:sp>
-      <p:sp>
-        <p:nvSpPr>
-          <p:cNvPr id="22" name="TextBox 21"/>
+            <a:pPr>
+              <a:spcAft>
+                <a:spcPts val="400"/>
+              </a:spcAft>
+            </a:pPr>
+            <a:r>
+              <a:rPr sz="1400" b="0" i="0">
+                <a:solidFill>
+                  <a:srgbClr val="FFFFFF"/>
+                </a:solidFill>
+                <a:latin typeface="Calibri"/>
+              </a:rPr>
+              <a:t># ADR-001 · Modelo de servicio dominante de CloudLite</a:t>
+            </a:r>
+          </a:p>
+          <a:p>
+            <a:pPr>
+              <a:spcAft>
+                <a:spcPts val="400"/>
+              </a:spcAft>
+            </a:pPr>
+            <a:r>
+              <a:rPr sz="1400" b="0" i="0">
+                <a:solidFill>
+                  <a:srgbClr val="FFFFFF"/>
+                </a:solidFill>
+                <a:latin typeface="Calibri"/>
+              </a:rPr>
+              <a:t/>
+            </a:r>
+          </a:p>
+          <a:p>
+            <a:pPr>
+              <a:spcAft>
+                <a:spcPts val="400"/>
+              </a:spcAft>
+            </a:pPr>
+            <a:r>
+              <a:rPr sz="1400" b="0" i="0">
+                <a:solidFill>
+                  <a:srgbClr val="FFFFFF"/>
+                </a:solidFill>
+                <a:latin typeface="Calibri"/>
+              </a:rPr>
+              <a:t>## 1. Estado</a:t>
+            </a:r>
+          </a:p>
+          <a:p>
+            <a:pPr>
+              <a:spcAft>
+                <a:spcPts val="400"/>
+              </a:spcAft>
+            </a:pPr>
+            <a:r>
+              <a:rPr sz="1400" b="0" i="0">
+                <a:solidFill>
+                  <a:srgbClr val="FFFFFF"/>
+                </a:solidFill>
+                <a:latin typeface="Calibri"/>
+              </a:rPr>
+              <a:t>Aceptada · 2026-09-01 · decide: &lt;su nombre&gt;</a:t>
+            </a:r>
+          </a:p>
+          <a:p>
+            <a:pPr>
+              <a:spcAft>
+                <a:spcPts val="400"/>
+              </a:spcAft>
+            </a:pPr>
+            <a:r>
+              <a:rPr sz="1400" b="0" i="0">
+                <a:solidFill>
+                  <a:srgbClr val="FFFFFF"/>
+                </a:solidFill>
+                <a:latin typeface="Calibri"/>
+              </a:rPr>
+              <a:t/>
+            </a:r>
+          </a:p>
+          <a:p>
+            <a:pPr>
+              <a:spcAft>
+                <a:spcPts val="400"/>
+              </a:spcAft>
+            </a:pPr>
+            <a:r>
+              <a:rPr sz="1400" b="0" i="0">
+                <a:solidFill>
+                  <a:srgbClr val="FFFFFF"/>
+                </a:solidFill>
+                <a:latin typeface="Calibri"/>
+              </a:rPr>
+              <a:t>## 2. Contexto</a:t>
+            </a:r>
+          </a:p>
+          <a:p>
+            <a:pPr>
+              <a:spcAft>
+                <a:spcPts val="400"/>
+              </a:spcAft>
+            </a:pPr>
+            <a:r>
+              <a:rPr sz="1400" b="0" i="0">
+                <a:solidFill>
+                  <a:srgbClr val="FFFFFF"/>
+                </a:solidFill>
+                <a:latin typeface="Calibri"/>
+              </a:rPr>
+              <a:t>&lt;que problema del dominio obliga a decidir esto, en 3 o 4 lineas&gt;</a:t>
+            </a:r>
+          </a:p>
+          <a:p>
+            <a:pPr>
+              <a:spcAft>
+                <a:spcPts val="400"/>
+              </a:spcAft>
+            </a:pPr>
+            <a:r>
+              <a:rPr sz="1400" b="0" i="0">
+                <a:solidFill>
+                  <a:srgbClr val="FFFFFF"/>
+                </a:solidFill>
+                <a:latin typeface="Calibri"/>
+              </a:rPr>
+              <a:t/>
+            </a:r>
+          </a:p>
+          <a:p>
+            <a:pPr>
+              <a:spcAft>
+                <a:spcPts val="400"/>
+              </a:spcAft>
+            </a:pPr>
+            <a:r>
+              <a:rPr sz="1400" b="0" i="0">
+                <a:solidFill>
+                  <a:srgbClr val="FFFFFF"/>
+                </a:solidFill>
+                <a:latin typeface="Calibri"/>
+              </a:rPr>
+              <a:t>## 3. Alternativas consideradas</a:t>
+            </a:r>
+          </a:p>
+          <a:p>
+            <a:pPr>
+              <a:spcAft>
+                <a:spcPts val="400"/>
+              </a:spcAft>
+            </a:pPr>
+            <a:r>
+              <a:rPr sz="1400" b="0" i="0">
+                <a:solidFill>
+                  <a:srgbClr val="FFFFFF"/>
+                </a:solidFill>
+                <a:latin typeface="Calibri"/>
+              </a:rPr>
+              <a:t>- IaaS  — &lt;que ganaria y que costaria en SU dominio&gt;</a:t>
+            </a:r>
+          </a:p>
+          <a:p>
+            <a:pPr>
+              <a:spcAft>
+                <a:spcPts val="400"/>
+              </a:spcAft>
+            </a:pPr>
+            <a:r>
+              <a:rPr sz="1400" b="0" i="0">
+                <a:solidFill>
+                  <a:srgbClr val="FFFFFF"/>
+                </a:solidFill>
+                <a:latin typeface="Calibri"/>
+              </a:rPr>
+              <a:t>- PaaS  — &lt;idem&gt;</a:t>
+            </a:r>
+          </a:p>
+        </p:txBody>
+      </p:sp>
+      <p:sp>
+        <p:nvSpPr>
+          <p:cNvPr id="9" name="TextBox 8"/>
           <p:cNvSpPr txBox="1"/>
           <p:nvPr/>
         </p:nvSpPr>
         <p:spPr>
           <a:xfrm>
-            <a:off x="457200" y="6263640"/>
-            <a:ext cx="11277295" cy="411480"/>
+            <a:off x="6233007" y="1719072"/>
+            <a:ext cx="5181447" cy="4453128"/>
           </a:xfrm>
           <a:prstGeom prst="rect">
             <a:avLst/>
@@ -9395,21 +8830,170 @@
           </a:bodyPr>
           <a:lstStyle/>
           <a:p>
-            <a:r>
-              <a:rPr sz="1100" b="0" i="1">
-                <a:solidFill>
-                  <a:srgbClr val="666666"/>
-                </a:solidFill>
-                <a:latin typeface="Calibri"/>
-              </a:rPr>
-              <a:t>Suba en la pila y sube el control, pero también lo que tiene que operar usted: parches, escalado, disponibilidad. Para el MVP de CloudLite, PaaS es el punto medio: usted solo responde por su aplicación y sus datos.</a:t>
-            </a:r>
-          </a:p>
-        </p:txBody>
-      </p:sp>
-      <p:sp>
-        <p:nvSpPr>
-          <p:cNvPr id="23" name="TextBox 22"/>
+            <a:pPr>
+              <a:spcAft>
+                <a:spcPts val="400"/>
+              </a:spcAft>
+            </a:pPr>
+            <a:r>
+              <a:rPr sz="1400" b="0" i="0">
+                <a:solidFill>
+                  <a:srgbClr val="FFFFFF"/>
+                </a:solidFill>
+                <a:latin typeface="Calibri"/>
+              </a:rPr>
+              <a:t>- SaaS  — &lt;idem&gt;</a:t>
+            </a:r>
+          </a:p>
+          <a:p>
+            <a:pPr>
+              <a:spcAft>
+                <a:spcPts val="400"/>
+              </a:spcAft>
+            </a:pPr>
+            <a:r>
+              <a:rPr sz="1400" b="0" i="0">
+                <a:solidFill>
+                  <a:srgbClr val="FFFFFF"/>
+                </a:solidFill>
+                <a:latin typeface="Calibri"/>
+              </a:rPr>
+              <a:t/>
+            </a:r>
+          </a:p>
+          <a:p>
+            <a:pPr>
+              <a:spcAft>
+                <a:spcPts val="400"/>
+              </a:spcAft>
+            </a:pPr>
+            <a:r>
+              <a:rPr sz="1400" b="0" i="0">
+                <a:solidFill>
+                  <a:srgbClr val="FFFFFF"/>
+                </a:solidFill>
+                <a:latin typeface="Calibri"/>
+              </a:rPr>
+              <a:t>## 4. Decision</a:t>
+            </a:r>
+          </a:p>
+          <a:p>
+            <a:pPr>
+              <a:spcAft>
+                <a:spcPts val="400"/>
+              </a:spcAft>
+            </a:pPr>
+            <a:r>
+              <a:rPr sz="1400" b="0" i="0">
+                <a:solidFill>
+                  <a:srgbClr val="FFFFFF"/>
+                </a:solidFill>
+                <a:latin typeface="Calibri"/>
+              </a:rPr>
+              <a:t>Se adopta &lt;IaaS|PaaS|SaaS&gt; como modelo dominante porque &lt;criterio&gt;.</a:t>
+            </a:r>
+          </a:p>
+          <a:p>
+            <a:pPr>
+              <a:spcAft>
+                <a:spcPts val="400"/>
+              </a:spcAft>
+            </a:pPr>
+            <a:r>
+              <a:rPr sz="1400" b="0" i="0">
+                <a:solidFill>
+                  <a:srgbClr val="FFFFFF"/>
+                </a:solidFill>
+                <a:latin typeface="Calibri"/>
+              </a:rPr>
+              <a:t/>
+            </a:r>
+          </a:p>
+          <a:p>
+            <a:pPr>
+              <a:spcAft>
+                <a:spcPts val="400"/>
+              </a:spcAft>
+            </a:pPr>
+            <a:r>
+              <a:rPr sz="1400" b="0" i="0">
+                <a:solidFill>
+                  <a:srgbClr val="FFFFFF"/>
+                </a:solidFill>
+                <a:latin typeface="Calibri"/>
+              </a:rPr>
+              <a:t>## 5. Justificacion contra los atributos de calidad</a:t>
+            </a:r>
+          </a:p>
+          <a:p>
+            <a:pPr>
+              <a:spcAft>
+                <a:spcPts val="400"/>
+              </a:spcAft>
+            </a:pPr>
+            <a:r>
+              <a:rPr sz="1400" b="0" i="0">
+                <a:solidFill>
+                  <a:srgbClr val="FFFFFF"/>
+                </a:solidFill>
+                <a:latin typeface="Calibri"/>
+              </a:rPr>
+              <a:t>&lt;el atributo de la Clase 1 que esta decision favorece, y el que sacrifica&gt;</a:t>
+            </a:r>
+          </a:p>
+          <a:p>
+            <a:pPr>
+              <a:spcAft>
+                <a:spcPts val="400"/>
+              </a:spcAft>
+            </a:pPr>
+            <a:r>
+              <a:rPr sz="1400" b="0" i="0">
+                <a:solidFill>
+                  <a:srgbClr val="FFFFFF"/>
+                </a:solidFill>
+                <a:latin typeface="Calibri"/>
+              </a:rPr>
+              <a:t/>
+            </a:r>
+          </a:p>
+          <a:p>
+            <a:pPr>
+              <a:spcAft>
+                <a:spcPts val="400"/>
+              </a:spcAft>
+            </a:pPr>
+            <a:r>
+              <a:rPr sz="1400" b="0" i="0">
+                <a:solidFill>
+                  <a:srgbClr val="FFFFFF"/>
+                </a:solidFill>
+                <a:latin typeface="Calibri"/>
+              </a:rPr>
+              <a:t>## 6. Consecuencias</a:t>
+            </a:r>
+          </a:p>
+          <a:p>
+            <a:pPr>
+              <a:spcAft>
+                <a:spcPts val="400"/>
+              </a:spcAft>
+            </a:pPr>
+            <a:r>
+              <a:rPr sz="1400" b="0" i="0">
+                <a:solidFill>
+                  <a:srgbClr val="FFFFFF"/>
+                </a:solidFill>
+                <a:latin typeface="Calibri"/>
+              </a:rPr>
+              <a:t>Positivas: &lt;...&gt;   Negativas: &lt;...&gt;   A revisar si: &lt;condicion&gt;</a:t>
+            </a:r>
+          </a:p>
+        </p:txBody>
+      </p:sp>
+      <p:sp>
+        <p:nvSpPr>
+          <p:cNvPr id="10" name="TextBox 9"/>
           <p:cNvSpPr txBox="1"/>
           <p:nvPr/>
         </p:nvSpPr>
@@ -9477,7 +9061,7 @@
         <p:spPr>
           <a:xfrm>
             <a:off x="0" y="0"/>
-            <a:ext cx="12191695" cy="960120"/>
+            <a:ext cx="12191695" cy="1170432"/>
           </a:xfrm>
           <a:prstGeom prst="rect">
             <a:avLst/>
@@ -9519,7 +9103,7 @@
         </p:nvSpPr>
         <p:spPr>
           <a:xfrm>
-            <a:off x="0" y="960120"/>
+            <a:off x="0" y="1170432"/>
             <a:ext cx="12191695" cy="41148"/>
           </a:xfrm>
           <a:prstGeom prst="rect">
@@ -9563,7 +9147,7 @@
         <p:spPr>
           <a:xfrm>
             <a:off x="457200" y="164592"/>
-            <a:ext cx="11277295" cy="502920"/>
+            <a:ext cx="11277295" cy="384048"/>
           </a:xfrm>
           <a:prstGeom prst="rect">
             <a:avLst/>
@@ -9583,69 +9167,60 @@
                 </a:solidFill>
                 <a:latin typeface="Calibri"/>
               </a:rPr>
-              <a:t>ADR-001 — las 6 secciones caben en una pagina</a:t>
-            </a:r>
-          </a:p>
-        </p:txBody>
-      </p:sp>
-      <p:sp>
-        <p:nvSpPr>
-          <p:cNvPr id="5" name="Rounded Rectangle 4"/>
+              <a:t>Quién administra cada capa — IaaS vs PaaS vs SaaS</a:t>
+            </a:r>
+          </a:p>
+        </p:txBody>
+      </p:sp>
+      <p:sp>
+        <p:nvSpPr>
+          <p:cNvPr id="5" name="TextBox 4"/>
+          <p:cNvSpPr txBox="1"/>
+          <p:nvPr/>
+        </p:nvSpPr>
+        <p:spPr>
+          <a:xfrm>
+            <a:off x="457200" y="566928"/>
+            <a:ext cx="11277295" cy="411480"/>
+          </a:xfrm>
+          <a:prstGeom prst="rect">
+            <a:avLst/>
+          </a:prstGeom>
+          <a:noFill/>
+        </p:spPr>
+        <p:txBody>
+          <a:bodyPr wrap="square">
+            <a:spAutoFit/>
+          </a:bodyPr>
+          <a:lstStyle/>
+          <a:p>
+            <a:r>
+              <a:rPr sz="1400" b="0" i="0">
+                <a:solidFill>
+                  <a:srgbClr val="B8D8EE"/>
+                </a:solidFill>
+                <a:latin typeface="Calibri"/>
+              </a:rPr>
+              <a:t>Misma aplicación, distinto reparto de responsabilidad entre usted y el proveedor</a:t>
+            </a:r>
+          </a:p>
+        </p:txBody>
+      </p:sp>
+      <p:sp>
+        <p:nvSpPr>
+          <p:cNvPr id="6" name="Rounded Rectangle 5"/>
           <p:cNvSpPr/>
           <p:nvPr/>
         </p:nvSpPr>
         <p:spPr>
           <a:xfrm>
-            <a:off x="457200" y="1261872"/>
-            <a:ext cx="11277295" cy="4773168"/>
+            <a:off x="548640" y="1325880"/>
+            <a:ext cx="3291840" cy="685800"/>
           </a:xfrm>
           <a:prstGeom prst="roundRect">
             <a:avLst>
               <a:gd name="adj" fmla="val 12000"/>
             </a:avLst>
-          </a:prstGeom>
-          <a:solidFill>
-            <a:srgbClr val="1E2A38"/>
-          </a:solidFill>
-          <a:ln>
-            <a:noFill/>
-          </a:ln>
-        </p:spPr>
-        <p:style>
-          <a:lnRef idx="1">
-            <a:schemeClr val="accent1"/>
-          </a:lnRef>
-          <a:fillRef idx="3">
-            <a:schemeClr val="accent1"/>
-          </a:fillRef>
-          <a:effectRef idx="2">
-            <a:schemeClr val="accent1"/>
-          </a:effectRef>
-          <a:fontRef idx="minor">
-            <a:schemeClr val="lt1"/>
-          </a:fontRef>
-        </p:style>
-        <p:txBody>
-          <a:bodyPr rtlCol="0" anchor="ctr"/>
-          <a:lstStyle/>
-          <a:p>
-            <a:pPr algn="ctr"/>
-          </a:p>
-        </p:txBody>
-      </p:sp>
-      <p:sp>
-        <p:nvSpPr>
-          <p:cNvPr id="6" name="Rectangle 5"/>
-          <p:cNvSpPr/>
-          <p:nvPr/>
-        </p:nvSpPr>
-        <p:spPr>
-          <a:xfrm>
-            <a:off x="457200" y="1261872"/>
-            <a:ext cx="11277295" cy="320040"/>
-          </a:xfrm>
-          <a:prstGeom prst="rect">
-            <a:avLst/>
           </a:prstGeom>
           <a:solidFill>
             <a:srgbClr val="095292"/>
@@ -9669,55 +9244,795 @@
           </a:fontRef>
         </p:style>
         <p:txBody>
-          <a:bodyPr rtlCol="0" anchor="ctr"/>
+          <a:bodyPr rtlCol="0" anchor="ctr" wrap="square"/>
           <a:lstStyle/>
           <a:p>
             <a:pPr algn="ctr"/>
-          </a:p>
-        </p:txBody>
-      </p:sp>
-      <p:sp>
-        <p:nvSpPr>
-          <p:cNvPr id="7" name="TextBox 6"/>
+            <a:r>
+              <a:rPr sz="1200" b="1" i="0">
+                <a:solidFill>
+                  <a:srgbClr val="FFFFFF"/>
+                </a:solidFill>
+                <a:latin typeface="Calibri"/>
+              </a:rPr>
+              <a:t>IaaS
+(DigitalOcean, AWS EC2)</a:t>
+            </a:r>
+          </a:p>
+        </p:txBody>
+      </p:sp>
+      <p:sp>
+        <p:nvSpPr>
+          <p:cNvPr id="7" name="Rounded Rectangle 6"/>
+          <p:cNvSpPr/>
+          <p:nvPr/>
+        </p:nvSpPr>
+        <p:spPr>
+          <a:xfrm>
+            <a:off x="4160520" y="1325880"/>
+            <a:ext cx="3291840" cy="685800"/>
+          </a:xfrm>
+          <a:prstGeom prst="roundRect">
+            <a:avLst>
+              <a:gd name="adj" fmla="val 12000"/>
+            </a:avLst>
+          </a:prstGeom>
+          <a:solidFill>
+            <a:srgbClr val="095292"/>
+          </a:solidFill>
+          <a:ln>
+            <a:noFill/>
+          </a:ln>
+        </p:spPr>
+        <p:style>
+          <a:lnRef idx="1">
+            <a:schemeClr val="accent1"/>
+          </a:lnRef>
+          <a:fillRef idx="3">
+            <a:schemeClr val="accent1"/>
+          </a:fillRef>
+          <a:effectRef idx="2">
+            <a:schemeClr val="accent1"/>
+          </a:effectRef>
+          <a:fontRef idx="minor">
+            <a:schemeClr val="lt1"/>
+          </a:fontRef>
+        </p:style>
+        <p:txBody>
+          <a:bodyPr rtlCol="0" anchor="ctr" wrap="square"/>
+          <a:lstStyle/>
+          <a:p>
+            <a:pPr algn="ctr"/>
+            <a:r>
+              <a:rPr sz="1200" b="1" i="0">
+                <a:solidFill>
+                  <a:srgbClr val="FFFFFF"/>
+                </a:solidFill>
+                <a:latin typeface="Calibri"/>
+              </a:rPr>
+              <a:t>PaaS
+(Render, Railway, Heroku)</a:t>
+            </a:r>
+          </a:p>
+        </p:txBody>
+      </p:sp>
+      <p:sp>
+        <p:nvSpPr>
+          <p:cNvPr id="8" name="Rounded Rectangle 7"/>
+          <p:cNvSpPr/>
+          <p:nvPr/>
+        </p:nvSpPr>
+        <p:spPr>
+          <a:xfrm>
+            <a:off x="7772400" y="1325880"/>
+            <a:ext cx="3291840" cy="685800"/>
+          </a:xfrm>
+          <a:prstGeom prst="roundRect">
+            <a:avLst>
+              <a:gd name="adj" fmla="val 12000"/>
+            </a:avLst>
+          </a:prstGeom>
+          <a:solidFill>
+            <a:srgbClr val="095292"/>
+          </a:solidFill>
+          <a:ln>
+            <a:noFill/>
+          </a:ln>
+        </p:spPr>
+        <p:style>
+          <a:lnRef idx="1">
+            <a:schemeClr val="accent1"/>
+          </a:lnRef>
+          <a:fillRef idx="3">
+            <a:schemeClr val="accent1"/>
+          </a:fillRef>
+          <a:effectRef idx="2">
+            <a:schemeClr val="accent1"/>
+          </a:effectRef>
+          <a:fontRef idx="minor">
+            <a:schemeClr val="lt1"/>
+          </a:fontRef>
+        </p:style>
+        <p:txBody>
+          <a:bodyPr rtlCol="0" anchor="ctr" wrap="square"/>
+          <a:lstStyle/>
+          <a:p>
+            <a:pPr algn="ctr"/>
+            <a:r>
+              <a:rPr sz="1200" b="1" i="0">
+                <a:solidFill>
+                  <a:srgbClr val="FFFFFF"/>
+                </a:solidFill>
+                <a:latin typeface="Calibri"/>
+              </a:rPr>
+              <a:t>SaaS
+(Gmail, Notion, Slack)</a:t>
+            </a:r>
+          </a:p>
+        </p:txBody>
+      </p:sp>
+      <p:sp>
+        <p:nvSpPr>
+          <p:cNvPr id="9" name="Rounded Rectangle 8"/>
+          <p:cNvSpPr/>
+          <p:nvPr/>
+        </p:nvSpPr>
+        <p:spPr>
+          <a:xfrm>
+            <a:off x="548640" y="2103120"/>
+            <a:ext cx="3291840" cy="548640"/>
+          </a:xfrm>
+          <a:prstGeom prst="roundRect">
+            <a:avLst>
+              <a:gd name="adj" fmla="val 12000"/>
+            </a:avLst>
+          </a:prstGeom>
+          <a:solidFill>
+            <a:srgbClr val="FFD000"/>
+          </a:solidFill>
+          <a:ln>
+            <a:noFill/>
+          </a:ln>
+        </p:spPr>
+        <p:style>
+          <a:lnRef idx="1">
+            <a:schemeClr val="accent1"/>
+          </a:lnRef>
+          <a:fillRef idx="3">
+            <a:schemeClr val="accent1"/>
+          </a:fillRef>
+          <a:effectRef idx="2">
+            <a:schemeClr val="accent1"/>
+          </a:effectRef>
+          <a:fontRef idx="minor">
+            <a:schemeClr val="lt1"/>
+          </a:fontRef>
+        </p:style>
+        <p:txBody>
+          <a:bodyPr rtlCol="0" anchor="ctr" wrap="square"/>
+          <a:lstStyle/>
+          <a:p>
+            <a:pPr algn="ctr"/>
+            <a:r>
+              <a:rPr sz="1100" b="1" i="0">
+                <a:solidFill>
+                  <a:srgbClr val="095292"/>
+                </a:solidFill>
+                <a:latin typeface="Calibri"/>
+              </a:rPr>
+              <a:t>Aplicación y datos</a:t>
+            </a:r>
+          </a:p>
+        </p:txBody>
+      </p:sp>
+      <p:sp>
+        <p:nvSpPr>
+          <p:cNvPr id="10" name="Rounded Rectangle 9"/>
+          <p:cNvSpPr/>
+          <p:nvPr/>
+        </p:nvSpPr>
+        <p:spPr>
+          <a:xfrm>
+            <a:off x="548640" y="2743200"/>
+            <a:ext cx="3291840" cy="548640"/>
+          </a:xfrm>
+          <a:prstGeom prst="roundRect">
+            <a:avLst>
+              <a:gd name="adj" fmla="val 12000"/>
+            </a:avLst>
+          </a:prstGeom>
+          <a:solidFill>
+            <a:srgbClr val="FFD000"/>
+          </a:solidFill>
+          <a:ln>
+            <a:noFill/>
+          </a:ln>
+        </p:spPr>
+        <p:style>
+          <a:lnRef idx="1">
+            <a:schemeClr val="accent1"/>
+          </a:lnRef>
+          <a:fillRef idx="3">
+            <a:schemeClr val="accent1"/>
+          </a:fillRef>
+          <a:effectRef idx="2">
+            <a:schemeClr val="accent1"/>
+          </a:effectRef>
+          <a:fontRef idx="minor">
+            <a:schemeClr val="lt1"/>
+          </a:fontRef>
+        </p:style>
+        <p:txBody>
+          <a:bodyPr rtlCol="0" anchor="ctr" wrap="square"/>
+          <a:lstStyle/>
+          <a:p>
+            <a:pPr algn="ctr"/>
+            <a:r>
+              <a:rPr sz="1100" b="1" i="0">
+                <a:solidFill>
+                  <a:srgbClr val="095292"/>
+                </a:solidFill>
+                <a:latin typeface="Calibri"/>
+              </a:rPr>
+              <a:t>Runtime / middleware</a:t>
+            </a:r>
+          </a:p>
+        </p:txBody>
+      </p:sp>
+      <p:sp>
+        <p:nvSpPr>
+          <p:cNvPr id="11" name="Rounded Rectangle 10"/>
+          <p:cNvSpPr/>
+          <p:nvPr/>
+        </p:nvSpPr>
+        <p:spPr>
+          <a:xfrm>
+            <a:off x="548640" y="3383280"/>
+            <a:ext cx="3291840" cy="548640"/>
+          </a:xfrm>
+          <a:prstGeom prst="roundRect">
+            <a:avLst>
+              <a:gd name="adj" fmla="val 12000"/>
+            </a:avLst>
+          </a:prstGeom>
+          <a:solidFill>
+            <a:srgbClr val="FFD000"/>
+          </a:solidFill>
+          <a:ln>
+            <a:noFill/>
+          </a:ln>
+        </p:spPr>
+        <p:style>
+          <a:lnRef idx="1">
+            <a:schemeClr val="accent1"/>
+          </a:lnRef>
+          <a:fillRef idx="3">
+            <a:schemeClr val="accent1"/>
+          </a:fillRef>
+          <a:effectRef idx="2">
+            <a:schemeClr val="accent1"/>
+          </a:effectRef>
+          <a:fontRef idx="minor">
+            <a:schemeClr val="lt1"/>
+          </a:fontRef>
+        </p:style>
+        <p:txBody>
+          <a:bodyPr rtlCol="0" anchor="ctr" wrap="square"/>
+          <a:lstStyle/>
+          <a:p>
+            <a:pPr algn="ctr"/>
+            <a:r>
+              <a:rPr sz="1100" b="1" i="0">
+                <a:solidFill>
+                  <a:srgbClr val="095292"/>
+                </a:solidFill>
+                <a:latin typeface="Calibri"/>
+              </a:rPr>
+              <a:t>Sistema operativo</a:t>
+            </a:r>
+          </a:p>
+        </p:txBody>
+      </p:sp>
+      <p:sp>
+        <p:nvSpPr>
+          <p:cNvPr id="12" name="Rounded Rectangle 11"/>
+          <p:cNvSpPr/>
+          <p:nvPr/>
+        </p:nvSpPr>
+        <p:spPr>
+          <a:xfrm>
+            <a:off x="548640" y="4023360"/>
+            <a:ext cx="3291840" cy="548640"/>
+          </a:xfrm>
+          <a:prstGeom prst="roundRect">
+            <a:avLst>
+              <a:gd name="adj" fmla="val 12000"/>
+            </a:avLst>
+          </a:prstGeom>
+          <a:solidFill>
+            <a:srgbClr val="269CCB"/>
+          </a:solidFill>
+          <a:ln>
+            <a:noFill/>
+          </a:ln>
+        </p:spPr>
+        <p:style>
+          <a:lnRef idx="1">
+            <a:schemeClr val="accent1"/>
+          </a:lnRef>
+          <a:fillRef idx="3">
+            <a:schemeClr val="accent1"/>
+          </a:fillRef>
+          <a:effectRef idx="2">
+            <a:schemeClr val="accent1"/>
+          </a:effectRef>
+          <a:fontRef idx="minor">
+            <a:schemeClr val="lt1"/>
+          </a:fontRef>
+        </p:style>
+        <p:txBody>
+          <a:bodyPr rtlCol="0" anchor="ctr" wrap="square"/>
+          <a:lstStyle/>
+          <a:p>
+            <a:pPr algn="ctr"/>
+            <a:r>
+              <a:rPr sz="1050" b="1" i="0">
+                <a:solidFill>
+                  <a:srgbClr val="FFFFFF"/>
+                </a:solidFill>
+                <a:latin typeface="Calibri"/>
+              </a:rPr>
+              <a:t>Infraestructura
+(cómputo, red, disco)</a:t>
+            </a:r>
+          </a:p>
+        </p:txBody>
+      </p:sp>
+      <p:sp>
+        <p:nvSpPr>
+          <p:cNvPr id="13" name="Rounded Rectangle 12"/>
+          <p:cNvSpPr/>
+          <p:nvPr/>
+        </p:nvSpPr>
+        <p:spPr>
+          <a:xfrm>
+            <a:off x="4160520" y="2103120"/>
+            <a:ext cx="3291840" cy="548640"/>
+          </a:xfrm>
+          <a:prstGeom prst="roundRect">
+            <a:avLst>
+              <a:gd name="adj" fmla="val 12000"/>
+            </a:avLst>
+          </a:prstGeom>
+          <a:solidFill>
+            <a:srgbClr val="FFD000"/>
+          </a:solidFill>
+          <a:ln>
+            <a:noFill/>
+          </a:ln>
+        </p:spPr>
+        <p:style>
+          <a:lnRef idx="1">
+            <a:schemeClr val="accent1"/>
+          </a:lnRef>
+          <a:fillRef idx="3">
+            <a:schemeClr val="accent1"/>
+          </a:fillRef>
+          <a:effectRef idx="2">
+            <a:schemeClr val="accent1"/>
+          </a:effectRef>
+          <a:fontRef idx="minor">
+            <a:schemeClr val="lt1"/>
+          </a:fontRef>
+        </p:style>
+        <p:txBody>
+          <a:bodyPr rtlCol="0" anchor="ctr" wrap="square"/>
+          <a:lstStyle/>
+          <a:p>
+            <a:pPr algn="ctr"/>
+            <a:r>
+              <a:rPr sz="1100" b="1" i="0">
+                <a:solidFill>
+                  <a:srgbClr val="095292"/>
+                </a:solidFill>
+                <a:latin typeface="Calibri"/>
+              </a:rPr>
+              <a:t>Aplicación y datos</a:t>
+            </a:r>
+          </a:p>
+        </p:txBody>
+      </p:sp>
+      <p:sp>
+        <p:nvSpPr>
+          <p:cNvPr id="14" name="Rounded Rectangle 13"/>
+          <p:cNvSpPr/>
+          <p:nvPr/>
+        </p:nvSpPr>
+        <p:spPr>
+          <a:xfrm>
+            <a:off x="4160520" y="2743200"/>
+            <a:ext cx="3291840" cy="548640"/>
+          </a:xfrm>
+          <a:prstGeom prst="roundRect">
+            <a:avLst>
+              <a:gd name="adj" fmla="val 12000"/>
+            </a:avLst>
+          </a:prstGeom>
+          <a:solidFill>
+            <a:srgbClr val="269CCB"/>
+          </a:solidFill>
+          <a:ln>
+            <a:noFill/>
+          </a:ln>
+        </p:spPr>
+        <p:style>
+          <a:lnRef idx="1">
+            <a:schemeClr val="accent1"/>
+          </a:lnRef>
+          <a:fillRef idx="3">
+            <a:schemeClr val="accent1"/>
+          </a:fillRef>
+          <a:effectRef idx="2">
+            <a:schemeClr val="accent1"/>
+          </a:effectRef>
+          <a:fontRef idx="minor">
+            <a:schemeClr val="lt1"/>
+          </a:fontRef>
+        </p:style>
+        <p:txBody>
+          <a:bodyPr rtlCol="0" anchor="ctr" wrap="square"/>
+          <a:lstStyle/>
+          <a:p>
+            <a:pPr algn="ctr"/>
+            <a:r>
+              <a:rPr sz="1100" b="1" i="0">
+                <a:solidFill>
+                  <a:srgbClr val="FFFFFF"/>
+                </a:solidFill>
+                <a:latin typeface="Calibri"/>
+              </a:rPr>
+              <a:t>Runtime / middleware</a:t>
+            </a:r>
+          </a:p>
+        </p:txBody>
+      </p:sp>
+      <p:sp>
+        <p:nvSpPr>
+          <p:cNvPr id="15" name="Rounded Rectangle 14"/>
+          <p:cNvSpPr/>
+          <p:nvPr/>
+        </p:nvSpPr>
+        <p:spPr>
+          <a:xfrm>
+            <a:off x="4160520" y="3383280"/>
+            <a:ext cx="3291840" cy="548640"/>
+          </a:xfrm>
+          <a:prstGeom prst="roundRect">
+            <a:avLst>
+              <a:gd name="adj" fmla="val 12000"/>
+            </a:avLst>
+          </a:prstGeom>
+          <a:solidFill>
+            <a:srgbClr val="269CCB"/>
+          </a:solidFill>
+          <a:ln>
+            <a:noFill/>
+          </a:ln>
+        </p:spPr>
+        <p:style>
+          <a:lnRef idx="1">
+            <a:schemeClr val="accent1"/>
+          </a:lnRef>
+          <a:fillRef idx="3">
+            <a:schemeClr val="accent1"/>
+          </a:fillRef>
+          <a:effectRef idx="2">
+            <a:schemeClr val="accent1"/>
+          </a:effectRef>
+          <a:fontRef idx="minor">
+            <a:schemeClr val="lt1"/>
+          </a:fontRef>
+        </p:style>
+        <p:txBody>
+          <a:bodyPr rtlCol="0" anchor="ctr" wrap="square"/>
+          <a:lstStyle/>
+          <a:p>
+            <a:pPr algn="ctr"/>
+            <a:r>
+              <a:rPr sz="1100" b="1" i="0">
+                <a:solidFill>
+                  <a:srgbClr val="FFFFFF"/>
+                </a:solidFill>
+                <a:latin typeface="Calibri"/>
+              </a:rPr>
+              <a:t>Sistema operativo</a:t>
+            </a:r>
+          </a:p>
+        </p:txBody>
+      </p:sp>
+      <p:sp>
+        <p:nvSpPr>
+          <p:cNvPr id="16" name="Rounded Rectangle 15"/>
+          <p:cNvSpPr/>
+          <p:nvPr/>
+        </p:nvSpPr>
+        <p:spPr>
+          <a:xfrm>
+            <a:off x="4160520" y="4023360"/>
+            <a:ext cx="3291840" cy="548640"/>
+          </a:xfrm>
+          <a:prstGeom prst="roundRect">
+            <a:avLst>
+              <a:gd name="adj" fmla="val 12000"/>
+            </a:avLst>
+          </a:prstGeom>
+          <a:solidFill>
+            <a:srgbClr val="269CCB"/>
+          </a:solidFill>
+          <a:ln>
+            <a:noFill/>
+          </a:ln>
+        </p:spPr>
+        <p:style>
+          <a:lnRef idx="1">
+            <a:schemeClr val="accent1"/>
+          </a:lnRef>
+          <a:fillRef idx="3">
+            <a:schemeClr val="accent1"/>
+          </a:fillRef>
+          <a:effectRef idx="2">
+            <a:schemeClr val="accent1"/>
+          </a:effectRef>
+          <a:fontRef idx="minor">
+            <a:schemeClr val="lt1"/>
+          </a:fontRef>
+        </p:style>
+        <p:txBody>
+          <a:bodyPr rtlCol="0" anchor="ctr" wrap="square"/>
+          <a:lstStyle/>
+          <a:p>
+            <a:pPr algn="ctr"/>
+            <a:r>
+              <a:rPr sz="1050" b="1" i="0">
+                <a:solidFill>
+                  <a:srgbClr val="FFFFFF"/>
+                </a:solidFill>
+                <a:latin typeface="Calibri"/>
+              </a:rPr>
+              <a:t>Infraestructura
+(cómputo, red, disco)</a:t>
+            </a:r>
+          </a:p>
+        </p:txBody>
+      </p:sp>
+      <p:sp>
+        <p:nvSpPr>
+          <p:cNvPr id="17" name="Rounded Rectangle 16"/>
+          <p:cNvSpPr/>
+          <p:nvPr/>
+        </p:nvSpPr>
+        <p:spPr>
+          <a:xfrm>
+            <a:off x="7772400" y="2103120"/>
+            <a:ext cx="3291840" cy="548640"/>
+          </a:xfrm>
+          <a:prstGeom prst="roundRect">
+            <a:avLst>
+              <a:gd name="adj" fmla="val 12000"/>
+            </a:avLst>
+          </a:prstGeom>
+          <a:solidFill>
+            <a:srgbClr val="FFD000"/>
+          </a:solidFill>
+          <a:ln>
+            <a:noFill/>
+          </a:ln>
+        </p:spPr>
+        <p:style>
+          <a:lnRef idx="1">
+            <a:schemeClr val="accent1"/>
+          </a:lnRef>
+          <a:fillRef idx="3">
+            <a:schemeClr val="accent1"/>
+          </a:fillRef>
+          <a:effectRef idx="2">
+            <a:schemeClr val="accent1"/>
+          </a:effectRef>
+          <a:fontRef idx="minor">
+            <a:schemeClr val="lt1"/>
+          </a:fontRef>
+        </p:style>
+        <p:txBody>
+          <a:bodyPr rtlCol="0" anchor="ctr" wrap="square"/>
+          <a:lstStyle/>
+          <a:p>
+            <a:pPr algn="ctr"/>
+            <a:r>
+              <a:rPr sz="1050" b="1" i="0">
+                <a:solidFill>
+                  <a:srgbClr val="095292"/>
+                </a:solidFill>
+                <a:latin typeface="Calibri"/>
+              </a:rPr>
+              <a:t>Aplicación y datos
+(usted solo configura)</a:t>
+            </a:r>
+          </a:p>
+        </p:txBody>
+      </p:sp>
+      <p:sp>
+        <p:nvSpPr>
+          <p:cNvPr id="18" name="Rounded Rectangle 17"/>
+          <p:cNvSpPr/>
+          <p:nvPr/>
+        </p:nvSpPr>
+        <p:spPr>
+          <a:xfrm>
+            <a:off x="7772400" y="2743200"/>
+            <a:ext cx="3291840" cy="548640"/>
+          </a:xfrm>
+          <a:prstGeom prst="roundRect">
+            <a:avLst>
+              <a:gd name="adj" fmla="val 12000"/>
+            </a:avLst>
+          </a:prstGeom>
+          <a:solidFill>
+            <a:srgbClr val="269CCB"/>
+          </a:solidFill>
+          <a:ln>
+            <a:noFill/>
+          </a:ln>
+        </p:spPr>
+        <p:style>
+          <a:lnRef idx="1">
+            <a:schemeClr val="accent1"/>
+          </a:lnRef>
+          <a:fillRef idx="3">
+            <a:schemeClr val="accent1"/>
+          </a:fillRef>
+          <a:effectRef idx="2">
+            <a:schemeClr val="accent1"/>
+          </a:effectRef>
+          <a:fontRef idx="minor">
+            <a:schemeClr val="lt1"/>
+          </a:fontRef>
+        </p:style>
+        <p:txBody>
+          <a:bodyPr rtlCol="0" anchor="ctr" wrap="square"/>
+          <a:lstStyle/>
+          <a:p>
+            <a:pPr algn="ctr"/>
+            <a:r>
+              <a:rPr sz="1100" b="1" i="0">
+                <a:solidFill>
+                  <a:srgbClr val="FFFFFF"/>
+                </a:solidFill>
+                <a:latin typeface="Calibri"/>
+              </a:rPr>
+              <a:t>Runtime / middleware</a:t>
+            </a:r>
+          </a:p>
+        </p:txBody>
+      </p:sp>
+      <p:sp>
+        <p:nvSpPr>
+          <p:cNvPr id="19" name="Rounded Rectangle 18"/>
+          <p:cNvSpPr/>
+          <p:nvPr/>
+        </p:nvSpPr>
+        <p:spPr>
+          <a:xfrm>
+            <a:off x="7772400" y="3383280"/>
+            <a:ext cx="3291840" cy="548640"/>
+          </a:xfrm>
+          <a:prstGeom prst="roundRect">
+            <a:avLst>
+              <a:gd name="adj" fmla="val 12000"/>
+            </a:avLst>
+          </a:prstGeom>
+          <a:solidFill>
+            <a:srgbClr val="269CCB"/>
+          </a:solidFill>
+          <a:ln>
+            <a:noFill/>
+          </a:ln>
+        </p:spPr>
+        <p:style>
+          <a:lnRef idx="1">
+            <a:schemeClr val="accent1"/>
+          </a:lnRef>
+          <a:fillRef idx="3">
+            <a:schemeClr val="accent1"/>
+          </a:fillRef>
+          <a:effectRef idx="2">
+            <a:schemeClr val="accent1"/>
+          </a:effectRef>
+          <a:fontRef idx="minor">
+            <a:schemeClr val="lt1"/>
+          </a:fontRef>
+        </p:style>
+        <p:txBody>
+          <a:bodyPr rtlCol="0" anchor="ctr" wrap="square"/>
+          <a:lstStyle/>
+          <a:p>
+            <a:pPr algn="ctr"/>
+            <a:r>
+              <a:rPr sz="1100" b="1" i="0">
+                <a:solidFill>
+                  <a:srgbClr val="FFFFFF"/>
+                </a:solidFill>
+                <a:latin typeface="Calibri"/>
+              </a:rPr>
+              <a:t>Sistema operativo</a:t>
+            </a:r>
+          </a:p>
+        </p:txBody>
+      </p:sp>
+      <p:sp>
+        <p:nvSpPr>
+          <p:cNvPr id="20" name="Rounded Rectangle 19"/>
+          <p:cNvSpPr/>
+          <p:nvPr/>
+        </p:nvSpPr>
+        <p:spPr>
+          <a:xfrm>
+            <a:off x="7772400" y="4023360"/>
+            <a:ext cx="3291840" cy="548640"/>
+          </a:xfrm>
+          <a:prstGeom prst="roundRect">
+            <a:avLst>
+              <a:gd name="adj" fmla="val 12000"/>
+            </a:avLst>
+          </a:prstGeom>
+          <a:solidFill>
+            <a:srgbClr val="269CCB"/>
+          </a:solidFill>
+          <a:ln>
+            <a:noFill/>
+          </a:ln>
+        </p:spPr>
+        <p:style>
+          <a:lnRef idx="1">
+            <a:schemeClr val="accent1"/>
+          </a:lnRef>
+          <a:fillRef idx="3">
+            <a:schemeClr val="accent1"/>
+          </a:fillRef>
+          <a:effectRef idx="2">
+            <a:schemeClr val="accent1"/>
+          </a:effectRef>
+          <a:fontRef idx="minor">
+            <a:schemeClr val="lt1"/>
+          </a:fontRef>
+        </p:style>
+        <p:txBody>
+          <a:bodyPr rtlCol="0" anchor="ctr" wrap="square"/>
+          <a:lstStyle/>
+          <a:p>
+            <a:pPr algn="ctr"/>
+            <a:r>
+              <a:rPr sz="1050" b="1" i="0">
+                <a:solidFill>
+                  <a:srgbClr val="FFFFFF"/>
+                </a:solidFill>
+                <a:latin typeface="Calibri"/>
+              </a:rPr>
+              <a:t>Infraestructura
+(cómputo, red, disco)</a:t>
+            </a:r>
+          </a:p>
+        </p:txBody>
+      </p:sp>
+      <p:sp>
+        <p:nvSpPr>
+          <p:cNvPr id="21" name="TextBox 20"/>
           <p:cNvSpPr txBox="1"/>
           <p:nvPr/>
         </p:nvSpPr>
         <p:spPr>
           <a:xfrm>
-            <a:off x="685800" y="1307592"/>
-            <a:ext cx="10820095" cy="256032"/>
-          </a:xfrm>
-          <a:prstGeom prst="rect">
-            <a:avLst/>
-          </a:prstGeom>
-          <a:noFill/>
-        </p:spPr>
-        <p:txBody>
-          <a:bodyPr wrap="square" anchor="ctr"/>
-          <a:lstStyle/>
-          <a:p>
-            <a:r>
-              <a:rPr sz="1000" b="1" i="0">
-                <a:solidFill>
-                  <a:srgbClr val="269CCB"/>
-                </a:solidFill>
-                <a:latin typeface="Calibri"/>
-              </a:rPr>
-              <a:t>● ● ●</a:t>
-            </a:r>
-          </a:p>
-        </p:txBody>
-      </p:sp>
-      <p:sp>
-        <p:nvSpPr>
-          <p:cNvPr id="8" name="TextBox 7"/>
-          <p:cNvSpPr txBox="1"/>
-          <p:nvPr/>
-        </p:nvSpPr>
-        <p:spPr>
-          <a:xfrm>
-            <a:off x="777240" y="1719072"/>
-            <a:ext cx="10637215" cy="4133087"/>
+            <a:off x="457200" y="5897880"/>
+            <a:ext cx="11277295" cy="320040"/>
           </a:xfrm>
           <a:prstGeom prst="rect">
             <a:avLst/>
@@ -9730,257 +10045,28 @@
           </a:bodyPr>
           <a:lstStyle/>
           <a:p>
-            <a:pPr>
-              <a:spcAft>
-                <a:spcPts val="400"/>
-              </a:spcAft>
-            </a:pPr>
-            <a:r>
-              <a:rPr sz="1400" b="0" i="0">
-                <a:solidFill>
-                  <a:srgbClr val="FFFFFF"/>
-                </a:solidFill>
-                <a:latin typeface="Calibri"/>
-              </a:rPr>
-              <a:t>## 1. Titulo     ADR-001 Modelo de servicio dominante de CloudLite App</a:t>
-            </a:r>
-          </a:p>
-          <a:p>
-            <a:pPr>
-              <a:spcAft>
-                <a:spcPts val="400"/>
-              </a:spcAft>
-            </a:pPr>
-            <a:r>
-              <a:rPr sz="1400" b="0" i="0">
-                <a:solidFill>
-                  <a:srgbClr val="FFFFFF"/>
-                </a:solidFill>
-                <a:latin typeface="Calibri"/>
-              </a:rPr>
-              <a:t>## 2. Estado     Aceptado — &lt;fecha de hoy&gt;</a:t>
-            </a:r>
-          </a:p>
-          <a:p>
-            <a:pPr>
-              <a:spcAft>
-                <a:spcPts val="400"/>
-              </a:spcAft>
-            </a:pPr>
-            <a:r>
-              <a:rPr sz="1400" b="0" i="0">
-                <a:solidFill>
-                  <a:srgbClr val="FFFFFF"/>
-                </a:solidFill>
-                <a:latin typeface="Calibri"/>
-              </a:rPr>
-              <a:t/>
-            </a:r>
-          </a:p>
-          <a:p>
-            <a:pPr>
-              <a:spcAft>
-                <a:spcPts val="400"/>
-              </a:spcAft>
-            </a:pPr>
-            <a:r>
-              <a:rPr sz="1400" b="0" i="0">
-                <a:solidFill>
-                  <a:srgbClr val="FFFFFF"/>
-                </a:solidFill>
-                <a:latin typeface="Calibri"/>
-              </a:rPr>
-              <a:t>## 3. Contexto                    &lt;- restricciones, no resumen del tema</a:t>
-            </a:r>
-          </a:p>
-          <a:p>
-            <a:pPr>
-              <a:spcAft>
-                <a:spcPts val="400"/>
-              </a:spcAft>
-            </a:pPr>
-            <a:r>
-              <a:rPr sz="1400" b="0" i="0">
-                <a:solidFill>
-                  <a:srgbClr val="FFFFFF"/>
-                </a:solidFill>
-                <a:latin typeface="Calibri"/>
-              </a:rPr>
-              <a:t>Lo sostengo yo solo, 12 semanas, sin presupuesto cloud ni tarjeta; demo viva el dia de la sustentacion.</a:t>
-            </a:r>
-          </a:p>
-          <a:p>
-            <a:pPr>
-              <a:spcAft>
-                <a:spcPts val="400"/>
-              </a:spcAft>
-            </a:pPr>
-            <a:r>
-              <a:rPr sz="1400" b="0" i="0">
-                <a:solidFill>
-                  <a:srgbClr val="FFFFFF"/>
-                </a:solidFill>
-                <a:latin typeface="Calibri"/>
-              </a:rPr>
-              <a:t/>
-            </a:r>
-          </a:p>
-          <a:p>
-            <a:pPr>
-              <a:spcAft>
-                <a:spcPts val="400"/>
-              </a:spcAft>
-            </a:pPr>
-            <a:r>
-              <a:rPr sz="1400" b="0" i="0">
-                <a:solidFill>
-                  <a:srgbClr val="FFFFFF"/>
-                </a:solidFill>
-                <a:latin typeface="Calibri"/>
-              </a:rPr>
-              <a:t>## 4. Decision                    &lt;- UNA frase, UN modelo dominante</a:t>
-            </a:r>
-          </a:p>
-          <a:p>
-            <a:pPr>
-              <a:spcAft>
-                <a:spcPts val="400"/>
-              </a:spcAft>
-            </a:pPr>
-            <a:r>
-              <a:rPr sz="1400" b="0" i="0">
-                <a:solidFill>
-                  <a:srgbClr val="FFFFFF"/>
-                </a:solidFill>
-                <a:latin typeface="Calibri"/>
-              </a:rPr>
-              <a:t>La aplicacion de CloudLite se despliega sobre PaaS.</a:t>
-            </a:r>
-          </a:p>
-          <a:p>
-            <a:pPr>
-              <a:spcAft>
-                <a:spcPts val="400"/>
-              </a:spcAft>
-            </a:pPr>
-            <a:r>
-              <a:rPr sz="1400" b="0" i="0">
-                <a:solidFill>
-                  <a:srgbClr val="FFFFFF"/>
-                </a:solidFill>
-                <a:latin typeface="Calibri"/>
-              </a:rPr>
-              <a:t/>
-            </a:r>
-          </a:p>
-          <a:p>
-            <a:pPr>
-              <a:spcAft>
-                <a:spcPts val="400"/>
-              </a:spcAft>
-            </a:pPr>
-            <a:r>
-              <a:rPr sz="1400" b="0" i="0">
-                <a:solidFill>
-                  <a:srgbClr val="FFFFFF"/>
-                </a:solidFill>
-                <a:latin typeface="Calibri"/>
-              </a:rPr>
-              <a:t>## 5. Alternativas descartadas    &lt;- exactamente 2, con motivo del dominio</a:t>
-            </a:r>
-          </a:p>
-          <a:p>
-            <a:pPr>
-              <a:spcAft>
-                <a:spcPts val="400"/>
-              </a:spcAft>
-            </a:pPr>
-            <a:r>
-              <a:rPr sz="1400" b="0" i="0">
-                <a:solidFill>
-                  <a:srgbClr val="FFFFFF"/>
-                </a:solidFill>
-                <a:latin typeface="Calibri"/>
-              </a:rPr>
-              <a:t>- IaaS: control total, pero yo opero SO y parches -&gt; tiempo que no tengo.</a:t>
-            </a:r>
-          </a:p>
-          <a:p>
-            <a:pPr>
-              <a:spcAft>
-                <a:spcPts val="400"/>
-              </a:spcAft>
-            </a:pPr>
-            <a:r>
-              <a:rPr sz="1400" b="0" i="0">
-                <a:solidFill>
-                  <a:srgbClr val="FFFFFF"/>
-                </a:solidFill>
-                <a:latin typeface="Calibri"/>
-              </a:rPr>
-              <a:t>- SaaS como nucleo: no queda nada que arquitecturar; solo satelite (auth/email).</a:t>
-            </a:r>
-          </a:p>
-          <a:p>
-            <a:pPr>
-              <a:spcAft>
-                <a:spcPts val="400"/>
-              </a:spcAft>
-            </a:pPr>
-            <a:r>
-              <a:rPr sz="1400" b="0" i="0">
-                <a:solidFill>
-                  <a:srgbClr val="FFFFFF"/>
-                </a:solidFill>
-                <a:latin typeface="Calibri"/>
-              </a:rPr>
-              <a:t/>
-            </a:r>
-          </a:p>
-          <a:p>
-            <a:pPr>
-              <a:spcAft>
-                <a:spcPts val="400"/>
-              </a:spcAft>
-            </a:pPr>
-            <a:r>
-              <a:rPr sz="1400" b="0" i="0">
-                <a:solidFill>
-                  <a:srgbClr val="FFFFFF"/>
-                </a:solidFill>
-                <a:latin typeface="Calibri"/>
-              </a:rPr>
-              <a:t>## 6. Consecuencias               &lt;- pregunta 7: 3 ejes, cada uno con + y -</a:t>
-            </a:r>
-          </a:p>
-          <a:p>
-            <a:pPr>
-              <a:spcAft>
-                <a:spcPts val="400"/>
-              </a:spcAft>
-            </a:pPr>
-            <a:r>
-              <a:rPr sz="1400" b="0" i="0">
-                <a:solidFill>
-                  <a:srgbClr val="FFFFFF"/>
-                </a:solidFill>
-                <a:latin typeface="Calibri"/>
-              </a:rPr>
-              <a:t>Operacion + / -        Costo + / -        Aprendizaje + / -</a:t>
-            </a:r>
-          </a:p>
-        </p:txBody>
-      </p:sp>
-      <p:sp>
-        <p:nvSpPr>
-          <p:cNvPr id="9" name="TextBox 8"/>
+            <a:r>
+              <a:rPr sz="1050" b="0" i="1">
+                <a:solidFill>
+                  <a:srgbClr val="666666"/>
+                </a:solidFill>
+                <a:latin typeface="Calibri"/>
+              </a:rPr>
+              <a:t>Amarillo = lo administra usted · Celeste = lo administra el proveedor</a:t>
+            </a:r>
+          </a:p>
+        </p:txBody>
+      </p:sp>
+      <p:sp>
+        <p:nvSpPr>
+          <p:cNvPr id="22" name="TextBox 21"/>
           <p:cNvSpPr txBox="1"/>
           <p:nvPr/>
         </p:nvSpPr>
         <p:spPr>
           <a:xfrm>
-            <a:off x="457200" y="6080760"/>
-            <a:ext cx="11277295" cy="320040"/>
+            <a:off x="457200" y="6263640"/>
+            <a:ext cx="11277295" cy="411480"/>
           </a:xfrm>
           <a:prstGeom prst="rect">
             <a:avLst/>
@@ -9993,22 +10079,21 @@
           </a:bodyPr>
           <a:lstStyle/>
           <a:p>
-            <a:pPr algn="ctr"/>
-            <a:r>
-              <a:rPr sz="1200" b="0" i="1">
+            <a:r>
+              <a:rPr sz="1100" b="0" i="1">
                 <a:solidFill>
                   <a:srgbClr val="666666"/>
                 </a:solidFill>
                 <a:latin typeface="Calibri"/>
               </a:rPr>
-              <a:t>Sin Titulo y Estado con fecha no hay ADR que citar en la Clase 15: son 1.5 puntos de la pregunta 6.</a:t>
-            </a:r>
-          </a:p>
-        </p:txBody>
-      </p:sp>
-      <p:sp>
-        <p:nvSpPr>
-          <p:cNvPr id="10" name="TextBox 9"/>
+              <a:t>Suba en la pila y sube el control, pero también lo que tiene que operar usted: parches, escalado, disponibilidad. Para el MVP de CloudLite, PaaS es el punto medio: usted solo responde por su aplicación y sus datos.</a:t>
+            </a:r>
+          </a:p>
+        </p:txBody>
+      </p:sp>
+      <p:sp>
+        <p:nvSpPr>
+          <p:cNvPr id="23" name="TextBox 22"/>
           <p:cNvSpPr txBox="1"/>
           <p:nvPr/>
         </p:nvSpPr>
@@ -10076,7 +10161,7 @@
         <p:spPr>
           <a:xfrm>
             <a:off x="0" y="0"/>
-            <a:ext cx="12191695" cy="1170432"/>
+            <a:ext cx="12191695" cy="960120"/>
           </a:xfrm>
           <a:prstGeom prst="rect">
             <a:avLst/>
@@ -10118,7 +10203,7 @@
         </p:nvSpPr>
         <p:spPr>
           <a:xfrm>
-            <a:off x="0" y="1170432"/>
+            <a:off x="0" y="960120"/>
             <a:ext cx="12191695" cy="41148"/>
           </a:xfrm>
           <a:prstGeom prst="rect">
@@ -10162,7 +10247,7 @@
         <p:spPr>
           <a:xfrm>
             <a:off x="457200" y="164592"/>
-            <a:ext cx="11277295" cy="384048"/>
+            <a:ext cx="11277295" cy="502920"/>
           </a:xfrm>
           <a:prstGeom prst="rect">
             <a:avLst/>
@@ -10182,55 +10267,21 @@
                 </a:solidFill>
                 <a:latin typeface="Calibri"/>
               </a:rPr>
-              <a:t>Herramientas de hoy</a:t>
-            </a:r>
-          </a:p>
-        </p:txBody>
-      </p:sp>
-      <p:sp>
-        <p:nvSpPr>
-          <p:cNvPr id="5" name="TextBox 4"/>
-          <p:cNvSpPr txBox="1"/>
-          <p:nvPr/>
-        </p:nvSpPr>
-        <p:spPr>
-          <a:xfrm>
-            <a:off x="457200" y="566928"/>
-            <a:ext cx="11277295" cy="411480"/>
-          </a:xfrm>
-          <a:prstGeom prst="rect">
-            <a:avLst/>
-          </a:prstGeom>
-          <a:noFill/>
-        </p:spPr>
-        <p:txBody>
-          <a:bodyPr wrap="square">
-            <a:spAutoFit/>
-          </a:bodyPr>
-          <a:lstStyle/>
-          <a:p>
-            <a:r>
-              <a:rPr sz="1400" b="0" i="0">
-                <a:solidFill>
-                  <a:srgbClr val="B8D8EE"/>
-                </a:solidFill>
-                <a:latin typeface="Calibri"/>
-              </a:rPr>
-              <a:t>Gratis · navegador o free tier · sin cuenta de pago</a:t>
-            </a:r>
-          </a:p>
-        </p:txBody>
-      </p:sp>
-      <p:sp>
-        <p:nvSpPr>
-          <p:cNvPr id="6" name="Rounded Rectangle 5"/>
+              <a:t>ADR-001 — las 6 secciones caben en una pagina</a:t>
+            </a:r>
+          </a:p>
+        </p:txBody>
+      </p:sp>
+      <p:sp>
+        <p:nvSpPr>
+          <p:cNvPr id="5" name="Rounded Rectangle 4"/>
           <p:cNvSpPr/>
           <p:nvPr/>
         </p:nvSpPr>
         <p:spPr>
           <a:xfrm>
-            <a:off x="457200" y="1591056"/>
-            <a:ext cx="3624986" cy="2331720"/>
+            <a:off x="457200" y="1261872"/>
+            <a:ext cx="11277295" cy="4773168"/>
           </a:xfrm>
           <a:prstGeom prst="roundRect">
             <a:avLst>
@@ -10238,7 +10289,7 @@
             </a:avLst>
           </a:prstGeom>
           <a:solidFill>
-            <a:srgbClr val="F2F2F2"/>
+            <a:srgbClr val="1E2A38"/>
           </a:solidFill>
           <a:ln>
             <a:noFill/>
@@ -10268,14 +10319,14 @@
       </p:sp>
       <p:sp>
         <p:nvSpPr>
-          <p:cNvPr id="7" name="Rectangle 6"/>
+          <p:cNvPr id="6" name="Rectangle 5"/>
           <p:cNvSpPr/>
           <p:nvPr/>
         </p:nvSpPr>
         <p:spPr>
           <a:xfrm>
-            <a:off x="457200" y="1591056"/>
-            <a:ext cx="3624986" cy="64008"/>
+            <a:off x="457200" y="1261872"/>
+            <a:ext cx="11277295" cy="320040"/>
           </a:xfrm>
           <a:prstGeom prst="rect">
             <a:avLst/>
@@ -10311,531 +10362,337 @@
       </p:sp>
       <p:sp>
         <p:nvSpPr>
-          <p:cNvPr id="8" name="Rectangle 7"/>
-          <p:cNvSpPr/>
-          <p:nvPr/>
-        </p:nvSpPr>
-        <p:spPr>
-          <a:xfrm>
-            <a:off x="457200" y="1655064"/>
-            <a:ext cx="3624986" cy="27432"/>
-          </a:xfrm>
-          <a:prstGeom prst="rect">
-            <a:avLst/>
-          </a:prstGeom>
-          <a:solidFill>
-            <a:srgbClr val="FFD000"/>
-          </a:solidFill>
-          <a:ln>
-            <a:noFill/>
-          </a:ln>
-        </p:spPr>
-        <p:style>
-          <a:lnRef idx="1">
-            <a:schemeClr val="accent1"/>
-          </a:lnRef>
-          <a:fillRef idx="3">
-            <a:schemeClr val="accent1"/>
-          </a:fillRef>
-          <a:effectRef idx="2">
-            <a:schemeClr val="accent1"/>
-          </a:effectRef>
-          <a:fontRef idx="minor">
-            <a:schemeClr val="lt1"/>
-          </a:fontRef>
-        </p:style>
-        <p:txBody>
-          <a:bodyPr rtlCol="0" anchor="ctr"/>
+          <p:cNvPr id="7" name="TextBox 6"/>
+          <p:cNvSpPr txBox="1"/>
+          <p:nvPr/>
+        </p:nvSpPr>
+        <p:spPr>
+          <a:xfrm>
+            <a:off x="685800" y="1307592"/>
+            <a:ext cx="10820095" cy="256032"/>
+          </a:xfrm>
+          <a:prstGeom prst="rect">
+            <a:avLst/>
+          </a:prstGeom>
+          <a:noFill/>
+        </p:spPr>
+        <p:txBody>
+          <a:bodyPr wrap="square" anchor="ctr"/>
+          <a:lstStyle/>
+          <a:p>
+            <a:r>
+              <a:rPr sz="1000" b="1" i="0">
+                <a:solidFill>
+                  <a:srgbClr val="269CCB"/>
+                </a:solidFill>
+                <a:latin typeface="Calibri"/>
+              </a:rPr>
+              <a:t>● ● ●</a:t>
+            </a:r>
+          </a:p>
+        </p:txBody>
+      </p:sp>
+      <p:sp>
+        <p:nvSpPr>
+          <p:cNvPr id="8" name="TextBox 7"/>
+          <p:cNvSpPr txBox="1"/>
+          <p:nvPr/>
+        </p:nvSpPr>
+        <p:spPr>
+          <a:xfrm>
+            <a:off x="777240" y="1719072"/>
+            <a:ext cx="10637215" cy="4133087"/>
+          </a:xfrm>
+          <a:prstGeom prst="rect">
+            <a:avLst/>
+          </a:prstGeom>
+          <a:noFill/>
+        </p:spPr>
+        <p:txBody>
+          <a:bodyPr wrap="square">
+            <a:spAutoFit/>
+          </a:bodyPr>
+          <a:lstStyle/>
+          <a:p>
+            <a:pPr>
+              <a:spcAft>
+                <a:spcPts val="400"/>
+              </a:spcAft>
+            </a:pPr>
+            <a:r>
+              <a:rPr sz="1400" b="0" i="0">
+                <a:solidFill>
+                  <a:srgbClr val="FFFFFF"/>
+                </a:solidFill>
+                <a:latin typeface="Calibri"/>
+              </a:rPr>
+              <a:t>## 1. Titulo     ADR-001 Modelo de servicio dominante de CloudLite App</a:t>
+            </a:r>
+          </a:p>
+          <a:p>
+            <a:pPr>
+              <a:spcAft>
+                <a:spcPts val="400"/>
+              </a:spcAft>
+            </a:pPr>
+            <a:r>
+              <a:rPr sz="1400" b="0" i="0">
+                <a:solidFill>
+                  <a:srgbClr val="FFFFFF"/>
+                </a:solidFill>
+                <a:latin typeface="Calibri"/>
+              </a:rPr>
+              <a:t>## 2. Estado     Aceptado — &lt;fecha de hoy&gt;</a:t>
+            </a:r>
+          </a:p>
+          <a:p>
+            <a:pPr>
+              <a:spcAft>
+                <a:spcPts val="400"/>
+              </a:spcAft>
+            </a:pPr>
+            <a:r>
+              <a:rPr sz="1400" b="0" i="0">
+                <a:solidFill>
+                  <a:srgbClr val="FFFFFF"/>
+                </a:solidFill>
+                <a:latin typeface="Calibri"/>
+              </a:rPr>
+              <a:t/>
+            </a:r>
+          </a:p>
+          <a:p>
+            <a:pPr>
+              <a:spcAft>
+                <a:spcPts val="400"/>
+              </a:spcAft>
+            </a:pPr>
+            <a:r>
+              <a:rPr sz="1400" b="0" i="0">
+                <a:solidFill>
+                  <a:srgbClr val="FFFFFF"/>
+                </a:solidFill>
+                <a:latin typeface="Calibri"/>
+              </a:rPr>
+              <a:t>## 3. Contexto                    &lt;- restricciones, no resumen del tema</a:t>
+            </a:r>
+          </a:p>
+          <a:p>
+            <a:pPr>
+              <a:spcAft>
+                <a:spcPts val="400"/>
+              </a:spcAft>
+            </a:pPr>
+            <a:r>
+              <a:rPr sz="1400" b="0" i="0">
+                <a:solidFill>
+                  <a:srgbClr val="FFFFFF"/>
+                </a:solidFill>
+                <a:latin typeface="Calibri"/>
+              </a:rPr>
+              <a:t>Lo sostengo yo solo, 12 semanas, sin presupuesto cloud ni tarjeta; demo viva el dia de la sustentacion.</a:t>
+            </a:r>
+          </a:p>
+          <a:p>
+            <a:pPr>
+              <a:spcAft>
+                <a:spcPts val="400"/>
+              </a:spcAft>
+            </a:pPr>
+            <a:r>
+              <a:rPr sz="1400" b="0" i="0">
+                <a:solidFill>
+                  <a:srgbClr val="FFFFFF"/>
+                </a:solidFill>
+                <a:latin typeface="Calibri"/>
+              </a:rPr>
+              <a:t/>
+            </a:r>
+          </a:p>
+          <a:p>
+            <a:pPr>
+              <a:spcAft>
+                <a:spcPts val="400"/>
+              </a:spcAft>
+            </a:pPr>
+            <a:r>
+              <a:rPr sz="1400" b="0" i="0">
+                <a:solidFill>
+                  <a:srgbClr val="FFFFFF"/>
+                </a:solidFill>
+                <a:latin typeface="Calibri"/>
+              </a:rPr>
+              <a:t>## 4. Decision                    &lt;- UNA frase, UN modelo dominante</a:t>
+            </a:r>
+          </a:p>
+          <a:p>
+            <a:pPr>
+              <a:spcAft>
+                <a:spcPts val="400"/>
+              </a:spcAft>
+            </a:pPr>
+            <a:r>
+              <a:rPr sz="1400" b="0" i="0">
+                <a:solidFill>
+                  <a:srgbClr val="FFFFFF"/>
+                </a:solidFill>
+                <a:latin typeface="Calibri"/>
+              </a:rPr>
+              <a:t>La aplicacion de CloudLite se despliega sobre PaaS.</a:t>
+            </a:r>
+          </a:p>
+          <a:p>
+            <a:pPr>
+              <a:spcAft>
+                <a:spcPts val="400"/>
+              </a:spcAft>
+            </a:pPr>
+            <a:r>
+              <a:rPr sz="1400" b="0" i="0">
+                <a:solidFill>
+                  <a:srgbClr val="FFFFFF"/>
+                </a:solidFill>
+                <a:latin typeface="Calibri"/>
+              </a:rPr>
+              <a:t/>
+            </a:r>
+          </a:p>
+          <a:p>
+            <a:pPr>
+              <a:spcAft>
+                <a:spcPts val="400"/>
+              </a:spcAft>
+            </a:pPr>
+            <a:r>
+              <a:rPr sz="1400" b="0" i="0">
+                <a:solidFill>
+                  <a:srgbClr val="FFFFFF"/>
+                </a:solidFill>
+                <a:latin typeface="Calibri"/>
+              </a:rPr>
+              <a:t>## 5. Alternativas descartadas    &lt;- exactamente 2, con motivo del dominio</a:t>
+            </a:r>
+          </a:p>
+          <a:p>
+            <a:pPr>
+              <a:spcAft>
+                <a:spcPts val="400"/>
+              </a:spcAft>
+            </a:pPr>
+            <a:r>
+              <a:rPr sz="1400" b="0" i="0">
+                <a:solidFill>
+                  <a:srgbClr val="FFFFFF"/>
+                </a:solidFill>
+                <a:latin typeface="Calibri"/>
+              </a:rPr>
+              <a:t>- IaaS: control total, pero yo opero SO y parches -&gt; tiempo que no tengo.</a:t>
+            </a:r>
+          </a:p>
+          <a:p>
+            <a:pPr>
+              <a:spcAft>
+                <a:spcPts val="400"/>
+              </a:spcAft>
+            </a:pPr>
+            <a:r>
+              <a:rPr sz="1400" b="0" i="0">
+                <a:solidFill>
+                  <a:srgbClr val="FFFFFF"/>
+                </a:solidFill>
+                <a:latin typeface="Calibri"/>
+              </a:rPr>
+              <a:t>- SaaS como nucleo: no queda nada que arquitecturar; solo satelite (auth/email).</a:t>
+            </a:r>
+          </a:p>
+          <a:p>
+            <a:pPr>
+              <a:spcAft>
+                <a:spcPts val="400"/>
+              </a:spcAft>
+            </a:pPr>
+            <a:r>
+              <a:rPr sz="1400" b="0" i="0">
+                <a:solidFill>
+                  <a:srgbClr val="FFFFFF"/>
+                </a:solidFill>
+                <a:latin typeface="Calibri"/>
+              </a:rPr>
+              <a:t/>
+            </a:r>
+          </a:p>
+          <a:p>
+            <a:pPr>
+              <a:spcAft>
+                <a:spcPts val="400"/>
+              </a:spcAft>
+            </a:pPr>
+            <a:r>
+              <a:rPr sz="1400" b="0" i="0">
+                <a:solidFill>
+                  <a:srgbClr val="FFFFFF"/>
+                </a:solidFill>
+                <a:latin typeface="Calibri"/>
+              </a:rPr>
+              <a:t>## 6. Consecuencias               &lt;- pregunta 7: 3 ejes, cada uno con + y -</a:t>
+            </a:r>
+          </a:p>
+          <a:p>
+            <a:pPr>
+              <a:spcAft>
+                <a:spcPts val="400"/>
+              </a:spcAft>
+            </a:pPr>
+            <a:r>
+              <a:rPr sz="1400" b="0" i="0">
+                <a:solidFill>
+                  <a:srgbClr val="FFFFFF"/>
+                </a:solidFill>
+                <a:latin typeface="Calibri"/>
+              </a:rPr>
+              <a:t>Operacion + / -        Costo + / -        Aprendizaje + / -</a:t>
+            </a:r>
+          </a:p>
+        </p:txBody>
+      </p:sp>
+      <p:sp>
+        <p:nvSpPr>
+          <p:cNvPr id="9" name="TextBox 8"/>
+          <p:cNvSpPr txBox="1"/>
+          <p:nvPr/>
+        </p:nvSpPr>
+        <p:spPr>
+          <a:xfrm>
+            <a:off x="457200" y="6080760"/>
+            <a:ext cx="11277295" cy="320040"/>
+          </a:xfrm>
+          <a:prstGeom prst="rect">
+            <a:avLst/>
+          </a:prstGeom>
+          <a:noFill/>
+        </p:spPr>
+        <p:txBody>
+          <a:bodyPr wrap="square">
+            <a:spAutoFit/>
+          </a:bodyPr>
           <a:lstStyle/>
           <a:p>
             <a:pPr algn="ctr"/>
-          </a:p>
-        </p:txBody>
-      </p:sp>
-      <p:pic>
-        <p:nvPicPr>
-          <p:cNvPr id="9" name="Picture 8" descr="google_docs.png"/>
-          <p:cNvPicPr>
-            <a:picLocks noChangeAspect="1"/>
-          </p:cNvPicPr>
-          <p:nvPr/>
-        </p:nvPicPr>
-        <p:blipFill>
-          <a:blip r:embed="rId2"/>
-          <a:stretch>
-            <a:fillRect/>
-          </a:stretch>
-        </p:blipFill>
-        <p:spPr>
-          <a:xfrm>
-            <a:off x="1643329" y="1847087"/>
-            <a:ext cx="1252728" cy="1252728"/>
-          </a:xfrm>
-          <a:prstGeom prst="rect">
-            <a:avLst/>
-          </a:prstGeom>
-        </p:spPr>
-      </p:pic>
+            <a:r>
+              <a:rPr sz="1200" b="0" i="1">
+                <a:solidFill>
+                  <a:srgbClr val="666666"/>
+                </a:solidFill>
+                <a:latin typeface="Calibri"/>
+              </a:rPr>
+              <a:t>Sin Titulo y Estado con fecha no hay ADR que citar en la Clase 15: son 1.5 puntos de la pregunta 6.</a:t>
+            </a:r>
+          </a:p>
+        </p:txBody>
+      </p:sp>
       <p:sp>
         <p:nvSpPr>
           <p:cNvPr id="10" name="TextBox 9"/>
-          <p:cNvSpPr txBox="1"/>
-          <p:nvPr/>
-        </p:nvSpPr>
-        <p:spPr>
-          <a:xfrm>
-            <a:off x="530352" y="3191256"/>
-            <a:ext cx="3478682" cy="621792"/>
-          </a:xfrm>
-          <a:prstGeom prst="rect">
-            <a:avLst/>
-          </a:prstGeom>
-          <a:noFill/>
-        </p:spPr>
-        <p:txBody>
-          <a:bodyPr wrap="square" anchor="t"/>
-          <a:lstStyle/>
-          <a:p>
-            <a:pPr algn="ctr"/>
-            <a:r>
-              <a:rPr sz="1300" b="1" i="0">
-                <a:solidFill>
-                  <a:srgbClr val="095292"/>
-                </a:solidFill>
-                <a:latin typeface="Calibri"/>
-              </a:rPr>
-              <a:t>Google Docs</a:t>
-            </a:r>
-          </a:p>
-          <a:p>
-            <a:pPr algn="ctr">
-              <a:spcBef>
-                <a:spcPts val="200"/>
-              </a:spcBef>
-            </a:pPr>
-            <a:r>
-              <a:rPr sz="1000" b="0" i="0">
-                <a:solidFill>
-                  <a:srgbClr val="666666"/>
-                </a:solidFill>
-                <a:latin typeface="Calibri"/>
-              </a:rPr>
-              <a:t>ADR-001</a:t>
-            </a:r>
-          </a:p>
-        </p:txBody>
-      </p:sp>
-      <p:sp>
-        <p:nvSpPr>
-          <p:cNvPr id="11" name="Rounded Rectangle 10"/>
-          <p:cNvSpPr/>
-          <p:nvPr/>
-        </p:nvSpPr>
-        <p:spPr>
-          <a:xfrm>
-            <a:off x="4283354" y="1591056"/>
-            <a:ext cx="3624986" cy="2331720"/>
-          </a:xfrm>
-          <a:prstGeom prst="roundRect">
-            <a:avLst>
-              <a:gd name="adj" fmla="val 12000"/>
-            </a:avLst>
-          </a:prstGeom>
-          <a:solidFill>
-            <a:srgbClr val="F2F2F2"/>
-          </a:solidFill>
-          <a:ln>
-            <a:noFill/>
-          </a:ln>
-        </p:spPr>
-        <p:style>
-          <a:lnRef idx="1">
-            <a:schemeClr val="accent1"/>
-          </a:lnRef>
-          <a:fillRef idx="3">
-            <a:schemeClr val="accent1"/>
-          </a:fillRef>
-          <a:effectRef idx="2">
-            <a:schemeClr val="accent1"/>
-          </a:effectRef>
-          <a:fontRef idx="minor">
-            <a:schemeClr val="lt1"/>
-          </a:fontRef>
-        </p:style>
-        <p:txBody>
-          <a:bodyPr rtlCol="0" anchor="ctr"/>
-          <a:lstStyle/>
-          <a:p>
-            <a:pPr algn="ctr"/>
-          </a:p>
-        </p:txBody>
-      </p:sp>
-      <p:sp>
-        <p:nvSpPr>
-          <p:cNvPr id="12" name="Rectangle 11"/>
-          <p:cNvSpPr/>
-          <p:nvPr/>
-        </p:nvSpPr>
-        <p:spPr>
-          <a:xfrm>
-            <a:off x="4283354" y="1591056"/>
-            <a:ext cx="3624986" cy="64008"/>
-          </a:xfrm>
-          <a:prstGeom prst="rect">
-            <a:avLst/>
-          </a:prstGeom>
-          <a:solidFill>
-            <a:srgbClr val="095292"/>
-          </a:solidFill>
-          <a:ln>
-            <a:noFill/>
-          </a:ln>
-        </p:spPr>
-        <p:style>
-          <a:lnRef idx="1">
-            <a:schemeClr val="accent1"/>
-          </a:lnRef>
-          <a:fillRef idx="3">
-            <a:schemeClr val="accent1"/>
-          </a:fillRef>
-          <a:effectRef idx="2">
-            <a:schemeClr val="accent1"/>
-          </a:effectRef>
-          <a:fontRef idx="minor">
-            <a:schemeClr val="lt1"/>
-          </a:fontRef>
-        </p:style>
-        <p:txBody>
-          <a:bodyPr rtlCol="0" anchor="ctr"/>
-          <a:lstStyle/>
-          <a:p>
-            <a:pPr algn="ctr"/>
-          </a:p>
-        </p:txBody>
-      </p:sp>
-      <p:sp>
-        <p:nvSpPr>
-          <p:cNvPr id="13" name="Rectangle 12"/>
-          <p:cNvSpPr/>
-          <p:nvPr/>
-        </p:nvSpPr>
-        <p:spPr>
-          <a:xfrm>
-            <a:off x="4283354" y="1655064"/>
-            <a:ext cx="3624986" cy="27432"/>
-          </a:xfrm>
-          <a:prstGeom prst="rect">
-            <a:avLst/>
-          </a:prstGeom>
-          <a:solidFill>
-            <a:srgbClr val="FFD000"/>
-          </a:solidFill>
-          <a:ln>
-            <a:noFill/>
-          </a:ln>
-        </p:spPr>
-        <p:style>
-          <a:lnRef idx="1">
-            <a:schemeClr val="accent1"/>
-          </a:lnRef>
-          <a:fillRef idx="3">
-            <a:schemeClr val="accent1"/>
-          </a:fillRef>
-          <a:effectRef idx="2">
-            <a:schemeClr val="accent1"/>
-          </a:effectRef>
-          <a:fontRef idx="minor">
-            <a:schemeClr val="lt1"/>
-          </a:fontRef>
-        </p:style>
-        <p:txBody>
-          <a:bodyPr rtlCol="0" anchor="ctr"/>
-          <a:lstStyle/>
-          <a:p>
-            <a:pPr algn="ctr"/>
-          </a:p>
-        </p:txBody>
-      </p:sp>
-      <p:pic>
-        <p:nvPicPr>
-          <p:cNvPr id="14" name="Picture 13" descr="drawio.png"/>
-          <p:cNvPicPr>
-            <a:picLocks noChangeAspect="1"/>
-          </p:cNvPicPr>
-          <p:nvPr/>
-        </p:nvPicPr>
-        <p:blipFill>
-          <a:blip r:embed="rId3"/>
-          <a:stretch>
-            <a:fillRect/>
-          </a:stretch>
-        </p:blipFill>
-        <p:spPr>
-          <a:xfrm>
-            <a:off x="5469483" y="1847087"/>
-            <a:ext cx="1252728" cy="1252728"/>
-          </a:xfrm>
-          <a:prstGeom prst="rect">
-            <a:avLst/>
-          </a:prstGeom>
-        </p:spPr>
-      </p:pic>
-      <p:sp>
-        <p:nvSpPr>
-          <p:cNvPr id="15" name="TextBox 14"/>
-          <p:cNvSpPr txBox="1"/>
-          <p:nvPr/>
-        </p:nvSpPr>
-        <p:spPr>
-          <a:xfrm>
-            <a:off x="4356506" y="3191256"/>
-            <a:ext cx="3478682" cy="621792"/>
-          </a:xfrm>
-          <a:prstGeom prst="rect">
-            <a:avLst/>
-          </a:prstGeom>
-          <a:noFill/>
-        </p:spPr>
-        <p:txBody>
-          <a:bodyPr wrap="square" anchor="t"/>
-          <a:lstStyle/>
-          <a:p>
-            <a:pPr algn="ctr"/>
-            <a:r>
-              <a:rPr sz="1300" b="1" i="0">
-                <a:solidFill>
-                  <a:srgbClr val="095292"/>
-                </a:solidFill>
-                <a:latin typeface="Calibri"/>
-              </a:rPr>
-              <a:t>draw.io</a:t>
-            </a:r>
-          </a:p>
-          <a:p>
-            <a:pPr algn="ctr">
-              <a:spcBef>
-                <a:spcPts val="200"/>
-              </a:spcBef>
-            </a:pPr>
-            <a:r>
-              <a:rPr sz="1000" b="0" i="0">
-                <a:solidFill>
-                  <a:srgbClr val="666666"/>
-                </a:solidFill>
-                <a:latin typeface="Calibri"/>
-              </a:rPr>
-              <a:t>Matriz de modelos</a:t>
-            </a:r>
-          </a:p>
-        </p:txBody>
-      </p:sp>
-      <p:sp>
-        <p:nvSpPr>
-          <p:cNvPr id="16" name="Rounded Rectangle 15"/>
-          <p:cNvSpPr/>
-          <p:nvPr/>
-        </p:nvSpPr>
-        <p:spPr>
-          <a:xfrm>
-            <a:off x="8109508" y="1591056"/>
-            <a:ext cx="3624986" cy="2331720"/>
-          </a:xfrm>
-          <a:prstGeom prst="roundRect">
-            <a:avLst>
-              <a:gd name="adj" fmla="val 12000"/>
-            </a:avLst>
-          </a:prstGeom>
-          <a:solidFill>
-            <a:srgbClr val="F2F2F2"/>
-          </a:solidFill>
-          <a:ln>
-            <a:noFill/>
-          </a:ln>
-        </p:spPr>
-        <p:style>
-          <a:lnRef idx="1">
-            <a:schemeClr val="accent1"/>
-          </a:lnRef>
-          <a:fillRef idx="3">
-            <a:schemeClr val="accent1"/>
-          </a:fillRef>
-          <a:effectRef idx="2">
-            <a:schemeClr val="accent1"/>
-          </a:effectRef>
-          <a:fontRef idx="minor">
-            <a:schemeClr val="lt1"/>
-          </a:fontRef>
-        </p:style>
-        <p:txBody>
-          <a:bodyPr rtlCol="0" anchor="ctr"/>
-          <a:lstStyle/>
-          <a:p>
-            <a:pPr algn="ctr"/>
-          </a:p>
-        </p:txBody>
-      </p:sp>
-      <p:sp>
-        <p:nvSpPr>
-          <p:cNvPr id="17" name="Rectangle 16"/>
-          <p:cNvSpPr/>
-          <p:nvPr/>
-        </p:nvSpPr>
-        <p:spPr>
-          <a:xfrm>
-            <a:off x="8109508" y="1591056"/>
-            <a:ext cx="3624986" cy="64008"/>
-          </a:xfrm>
-          <a:prstGeom prst="rect">
-            <a:avLst/>
-          </a:prstGeom>
-          <a:solidFill>
-            <a:srgbClr val="095292"/>
-          </a:solidFill>
-          <a:ln>
-            <a:noFill/>
-          </a:ln>
-        </p:spPr>
-        <p:style>
-          <a:lnRef idx="1">
-            <a:schemeClr val="accent1"/>
-          </a:lnRef>
-          <a:fillRef idx="3">
-            <a:schemeClr val="accent1"/>
-          </a:fillRef>
-          <a:effectRef idx="2">
-            <a:schemeClr val="accent1"/>
-          </a:effectRef>
-          <a:fontRef idx="minor">
-            <a:schemeClr val="lt1"/>
-          </a:fontRef>
-        </p:style>
-        <p:txBody>
-          <a:bodyPr rtlCol="0" anchor="ctr"/>
-          <a:lstStyle/>
-          <a:p>
-            <a:pPr algn="ctr"/>
-          </a:p>
-        </p:txBody>
-      </p:sp>
-      <p:sp>
-        <p:nvSpPr>
-          <p:cNvPr id="18" name="Rectangle 17"/>
-          <p:cNvSpPr/>
-          <p:nvPr/>
-        </p:nvSpPr>
-        <p:spPr>
-          <a:xfrm>
-            <a:off x="8109508" y="1655064"/>
-            <a:ext cx="3624986" cy="27432"/>
-          </a:xfrm>
-          <a:prstGeom prst="rect">
-            <a:avLst/>
-          </a:prstGeom>
-          <a:solidFill>
-            <a:srgbClr val="FFD000"/>
-          </a:solidFill>
-          <a:ln>
-            <a:noFill/>
-          </a:ln>
-        </p:spPr>
-        <p:style>
-          <a:lnRef idx="1">
-            <a:schemeClr val="accent1"/>
-          </a:lnRef>
-          <a:fillRef idx="3">
-            <a:schemeClr val="accent1"/>
-          </a:fillRef>
-          <a:effectRef idx="2">
-            <a:schemeClr val="accent1"/>
-          </a:effectRef>
-          <a:fontRef idx="minor">
-            <a:schemeClr val="lt1"/>
-          </a:fontRef>
-        </p:style>
-        <p:txBody>
-          <a:bodyPr rtlCol="0" anchor="ctr"/>
-          <a:lstStyle/>
-          <a:p>
-            <a:pPr algn="ctr"/>
-          </a:p>
-        </p:txBody>
-      </p:sp>
-      <p:pic>
-        <p:nvPicPr>
-          <p:cNvPr id="19" name="Picture 18" descr="examlab.png"/>
-          <p:cNvPicPr>
-            <a:picLocks noChangeAspect="1"/>
-          </p:cNvPicPr>
-          <p:nvPr/>
-        </p:nvPicPr>
-        <p:blipFill>
-          <a:blip r:embed="rId4"/>
-          <a:stretch>
-            <a:fillRect/>
-          </a:stretch>
-        </p:blipFill>
-        <p:spPr>
-          <a:xfrm>
-            <a:off x="9295638" y="1847087"/>
-            <a:ext cx="1252728" cy="1252728"/>
-          </a:xfrm>
-          <a:prstGeom prst="rect">
-            <a:avLst/>
-          </a:prstGeom>
-        </p:spPr>
-      </p:pic>
-      <p:sp>
-        <p:nvSpPr>
-          <p:cNvPr id="20" name="TextBox 19"/>
-          <p:cNvSpPr txBox="1"/>
-          <p:nvPr/>
-        </p:nvSpPr>
-        <p:spPr>
-          <a:xfrm>
-            <a:off x="8182660" y="3191256"/>
-            <a:ext cx="3478682" cy="621792"/>
-          </a:xfrm>
-          <a:prstGeom prst="rect">
-            <a:avLst/>
-          </a:prstGeom>
-          <a:noFill/>
-        </p:spPr>
-        <p:txBody>
-          <a:bodyPr wrap="square" anchor="t"/>
-          <a:lstStyle/>
-          <a:p>
-            <a:pPr algn="ctr"/>
-            <a:r>
-              <a:rPr sz="1300" b="1" i="0">
-                <a:solidFill>
-                  <a:srgbClr val="095292"/>
-                </a:solidFill>
-                <a:latin typeface="Calibri"/>
-              </a:rPr>
-              <a:t>la plataforma del curso</a:t>
-            </a:r>
-          </a:p>
-          <a:p>
-            <a:pPr algn="ctr">
-              <a:spcBef>
-                <a:spcPts val="200"/>
-              </a:spcBef>
-            </a:pPr>
-            <a:r>
-              <a:rPr sz="1000" b="0" i="0">
-                <a:solidFill>
-                  <a:srgbClr val="666666"/>
-                </a:solidFill>
-                <a:latin typeface="Calibri"/>
-              </a:rPr>
-              <a:t>Donde se entrega</a:t>
-            </a:r>
-          </a:p>
-        </p:txBody>
-      </p:sp>
-      <p:sp>
-        <p:nvSpPr>
-          <p:cNvPr id="21" name="TextBox 20"/>
           <p:cNvSpPr txBox="1"/>
           <p:nvPr/>
         </p:nvSpPr>
@@ -11191,7 +11048,7 @@
         <p:spPr>
           <a:xfrm>
             <a:off x="0" y="0"/>
-            <a:ext cx="12191695" cy="960120"/>
+            <a:ext cx="12191695" cy="1170432"/>
           </a:xfrm>
           <a:prstGeom prst="rect">
             <a:avLst/>
@@ -11233,7 +11090,7 @@
         </p:nvSpPr>
         <p:spPr>
           <a:xfrm>
-            <a:off x="0" y="960120"/>
+            <a:off x="0" y="1170432"/>
             <a:ext cx="12191695" cy="41148"/>
           </a:xfrm>
           <a:prstGeom prst="rect">
@@ -11277,7 +11134,7 @@
         <p:spPr>
           <a:xfrm>
             <a:off x="457200" y="164592"/>
-            <a:ext cx="11277295" cy="502920"/>
+            <a:ext cx="11277295" cy="384048"/>
           </a:xfrm>
           <a:prstGeom prst="rect">
             <a:avLst/>
@@ -11297,7 +11154,7 @@
                 </a:solidFill>
                 <a:latin typeface="Calibri"/>
               </a:rPr>
-              <a:t>PI CloudLite — entregable de hoy</a:t>
+              <a:t>Herramientas de hoy</a:t>
             </a:r>
           </a:p>
         </p:txBody>
@@ -11310,8 +11167,8 @@
         </p:nvSpPr>
         <p:spPr>
           <a:xfrm>
-            <a:off x="457200" y="1170432"/>
-            <a:ext cx="11277295" cy="5230368"/>
+            <a:off x="457200" y="566928"/>
+            <a:ext cx="11277295" cy="411480"/>
           </a:xfrm>
           <a:prstGeom prst="rect">
             <a:avLst/>
@@ -11324,119 +11181,633 @@
           </a:bodyPr>
           <a:lstStyle/>
           <a:p>
-            <a:pPr>
-              <a:spcAft>
-                <a:spcPts val="800"/>
-              </a:spcAft>
+            <a:r>
+              <a:rPr sz="1400" b="0" i="0">
+                <a:solidFill>
+                  <a:srgbClr val="B8D8EE"/>
+                </a:solidFill>
+                <a:latin typeface="Calibri"/>
+              </a:rPr>
+              <a:t>Gratis · navegador o free tier · sin cuenta de pago</a:t>
+            </a:r>
+          </a:p>
+        </p:txBody>
+      </p:sp>
+      <p:sp>
+        <p:nvSpPr>
+          <p:cNvPr id="6" name="Rounded Rectangle 5"/>
+          <p:cNvSpPr/>
+          <p:nvPr/>
+        </p:nvSpPr>
+        <p:spPr>
+          <a:xfrm>
+            <a:off x="457200" y="1591056"/>
+            <a:ext cx="3624986" cy="2331720"/>
+          </a:xfrm>
+          <a:prstGeom prst="roundRect">
+            <a:avLst>
+              <a:gd name="adj" fmla="val 12000"/>
+            </a:avLst>
+          </a:prstGeom>
+          <a:solidFill>
+            <a:srgbClr val="F2F2F2"/>
+          </a:solidFill>
+          <a:ln>
+            <a:noFill/>
+          </a:ln>
+        </p:spPr>
+        <p:style>
+          <a:lnRef idx="1">
+            <a:schemeClr val="accent1"/>
+          </a:lnRef>
+          <a:fillRef idx="3">
+            <a:schemeClr val="accent1"/>
+          </a:fillRef>
+          <a:effectRef idx="2">
+            <a:schemeClr val="accent1"/>
+          </a:effectRef>
+          <a:fontRef idx="minor">
+            <a:schemeClr val="lt1"/>
+          </a:fontRef>
+        </p:style>
+        <p:txBody>
+          <a:bodyPr rtlCol="0" anchor="ctr"/>
+          <a:lstStyle/>
+          <a:p>
+            <a:pPr algn="ctr"/>
+          </a:p>
+        </p:txBody>
+      </p:sp>
+      <p:sp>
+        <p:nvSpPr>
+          <p:cNvPr id="7" name="Rectangle 6"/>
+          <p:cNvSpPr/>
+          <p:nvPr/>
+        </p:nvSpPr>
+        <p:spPr>
+          <a:xfrm>
+            <a:off x="457200" y="1591056"/>
+            <a:ext cx="3624986" cy="64008"/>
+          </a:xfrm>
+          <a:prstGeom prst="rect">
+            <a:avLst/>
+          </a:prstGeom>
+          <a:solidFill>
+            <a:srgbClr val="095292"/>
+          </a:solidFill>
+          <a:ln>
+            <a:noFill/>
+          </a:ln>
+        </p:spPr>
+        <p:style>
+          <a:lnRef idx="1">
+            <a:schemeClr val="accent1"/>
+          </a:lnRef>
+          <a:fillRef idx="3">
+            <a:schemeClr val="accent1"/>
+          </a:fillRef>
+          <a:effectRef idx="2">
+            <a:schemeClr val="accent1"/>
+          </a:effectRef>
+          <a:fontRef idx="minor">
+            <a:schemeClr val="lt1"/>
+          </a:fontRef>
+        </p:style>
+        <p:txBody>
+          <a:bodyPr rtlCol="0" anchor="ctr"/>
+          <a:lstStyle/>
+          <a:p>
+            <a:pPr algn="ctr"/>
+          </a:p>
+        </p:txBody>
+      </p:sp>
+      <p:sp>
+        <p:nvSpPr>
+          <p:cNvPr id="8" name="Rectangle 7"/>
+          <p:cNvSpPr/>
+          <p:nvPr/>
+        </p:nvSpPr>
+        <p:spPr>
+          <a:xfrm>
+            <a:off x="457200" y="1655064"/>
+            <a:ext cx="3624986" cy="27432"/>
+          </a:xfrm>
+          <a:prstGeom prst="rect">
+            <a:avLst/>
+          </a:prstGeom>
+          <a:solidFill>
+            <a:srgbClr val="FFD000"/>
+          </a:solidFill>
+          <a:ln>
+            <a:noFill/>
+          </a:ln>
+        </p:spPr>
+        <p:style>
+          <a:lnRef idx="1">
+            <a:schemeClr val="accent1"/>
+          </a:lnRef>
+          <a:fillRef idx="3">
+            <a:schemeClr val="accent1"/>
+          </a:fillRef>
+          <a:effectRef idx="2">
+            <a:schemeClr val="accent1"/>
+          </a:effectRef>
+          <a:fontRef idx="minor">
+            <a:schemeClr val="lt1"/>
+          </a:fontRef>
+        </p:style>
+        <p:txBody>
+          <a:bodyPr rtlCol="0" anchor="ctr"/>
+          <a:lstStyle/>
+          <a:p>
+            <a:pPr algn="ctr"/>
+          </a:p>
+        </p:txBody>
+      </p:sp>
+      <p:pic>
+        <p:nvPicPr>
+          <p:cNvPr id="9" name="Picture 8" descr="google_docs.png"/>
+          <p:cNvPicPr>
+            <a:picLocks noChangeAspect="1"/>
+          </p:cNvPicPr>
+          <p:nvPr/>
+        </p:nvPicPr>
+        <p:blipFill>
+          <a:blip r:embed="rId2"/>
+          <a:stretch>
+            <a:fillRect/>
+          </a:stretch>
+        </p:blipFill>
+        <p:spPr>
+          <a:xfrm>
+            <a:off x="1643329" y="1847087"/>
+            <a:ext cx="1252728" cy="1252728"/>
+          </a:xfrm>
+          <a:prstGeom prst="rect">
+            <a:avLst/>
+          </a:prstGeom>
+        </p:spPr>
+      </p:pic>
+      <p:sp>
+        <p:nvSpPr>
+          <p:cNvPr id="10" name="TextBox 9"/>
+          <p:cNvSpPr txBox="1"/>
+          <p:nvPr/>
+        </p:nvSpPr>
+        <p:spPr>
+          <a:xfrm>
+            <a:off x="530352" y="3191256"/>
+            <a:ext cx="3478682" cy="621792"/>
+          </a:xfrm>
+          <a:prstGeom prst="rect">
+            <a:avLst/>
+          </a:prstGeom>
+          <a:noFill/>
+        </p:spPr>
+        <p:txBody>
+          <a:bodyPr wrap="square" anchor="t"/>
+          <a:lstStyle/>
+          <a:p>
+            <a:pPr algn="ctr"/>
+            <a:r>
+              <a:rPr sz="1300" b="1" i="0">
+                <a:solidFill>
+                  <a:srgbClr val="095292"/>
+                </a:solidFill>
+                <a:latin typeface="Calibri"/>
+              </a:rPr>
+              <a:t>Google Docs</a:t>
+            </a:r>
+          </a:p>
+          <a:p>
+            <a:pPr algn="ctr">
+              <a:spcBef>
+                <a:spcPts val="200"/>
+              </a:spcBef>
             </a:pPr>
             <a:r>
-              <a:rPr sz="2000" b="0" i="0">
-                <a:solidFill>
-                  <a:srgbClr val="333333"/>
-                </a:solidFill>
-                <a:latin typeface="Calibri"/>
-              </a:rPr>
-              <a:t>–   </a:t>
-            </a:r>
-            <a:r>
-              <a:rPr sz="2000" b="1" i="0">
-                <a:solidFill>
-                  <a:srgbClr val="333333"/>
-                </a:solidFill>
-                <a:latin typeface="Calibri"/>
-              </a:rPr>
-              <a:t>Entregable:</a:t>
-            </a:r>
-            <a:r>
-              <a:rPr sz="2000" b="0" i="0">
-                <a:solidFill>
-                  <a:srgbClr val="333333"/>
-                </a:solidFill>
-                <a:latin typeface="Calibri"/>
-              </a:rPr>
-              <a:t> ADR-001: decisión de modelo de servicio + matriz de comparación aplicada al dominio</a:t>
-            </a:r>
-          </a:p>
-          <a:p>
-            <a:pPr>
-              <a:spcAft>
-                <a:spcPts val="800"/>
-              </a:spcAft>
+              <a:rPr sz="1000" b="0" i="0">
+                <a:solidFill>
+                  <a:srgbClr val="666666"/>
+                </a:solidFill>
+                <a:latin typeface="Calibri"/>
+              </a:rPr>
+              <a:t>ADR-001</a:t>
+            </a:r>
+          </a:p>
+        </p:txBody>
+      </p:sp>
+      <p:sp>
+        <p:nvSpPr>
+          <p:cNvPr id="11" name="Rounded Rectangle 10"/>
+          <p:cNvSpPr/>
+          <p:nvPr/>
+        </p:nvSpPr>
+        <p:spPr>
+          <a:xfrm>
+            <a:off x="4283354" y="1591056"/>
+            <a:ext cx="3624986" cy="2331720"/>
+          </a:xfrm>
+          <a:prstGeom prst="roundRect">
+            <a:avLst>
+              <a:gd name="adj" fmla="val 12000"/>
+            </a:avLst>
+          </a:prstGeom>
+          <a:solidFill>
+            <a:srgbClr val="F2F2F2"/>
+          </a:solidFill>
+          <a:ln>
+            <a:noFill/>
+          </a:ln>
+        </p:spPr>
+        <p:style>
+          <a:lnRef idx="1">
+            <a:schemeClr val="accent1"/>
+          </a:lnRef>
+          <a:fillRef idx="3">
+            <a:schemeClr val="accent1"/>
+          </a:fillRef>
+          <a:effectRef idx="2">
+            <a:schemeClr val="accent1"/>
+          </a:effectRef>
+          <a:fontRef idx="minor">
+            <a:schemeClr val="lt1"/>
+          </a:fontRef>
+        </p:style>
+        <p:txBody>
+          <a:bodyPr rtlCol="0" anchor="ctr"/>
+          <a:lstStyle/>
+          <a:p>
+            <a:pPr algn="ctr"/>
+          </a:p>
+        </p:txBody>
+      </p:sp>
+      <p:sp>
+        <p:nvSpPr>
+          <p:cNvPr id="12" name="Rectangle 11"/>
+          <p:cNvSpPr/>
+          <p:nvPr/>
+        </p:nvSpPr>
+        <p:spPr>
+          <a:xfrm>
+            <a:off x="4283354" y="1591056"/>
+            <a:ext cx="3624986" cy="64008"/>
+          </a:xfrm>
+          <a:prstGeom prst="rect">
+            <a:avLst/>
+          </a:prstGeom>
+          <a:solidFill>
+            <a:srgbClr val="095292"/>
+          </a:solidFill>
+          <a:ln>
+            <a:noFill/>
+          </a:ln>
+        </p:spPr>
+        <p:style>
+          <a:lnRef idx="1">
+            <a:schemeClr val="accent1"/>
+          </a:lnRef>
+          <a:fillRef idx="3">
+            <a:schemeClr val="accent1"/>
+          </a:fillRef>
+          <a:effectRef idx="2">
+            <a:schemeClr val="accent1"/>
+          </a:effectRef>
+          <a:fontRef idx="minor">
+            <a:schemeClr val="lt1"/>
+          </a:fontRef>
+        </p:style>
+        <p:txBody>
+          <a:bodyPr rtlCol="0" anchor="ctr"/>
+          <a:lstStyle/>
+          <a:p>
+            <a:pPr algn="ctr"/>
+          </a:p>
+        </p:txBody>
+      </p:sp>
+      <p:sp>
+        <p:nvSpPr>
+          <p:cNvPr id="13" name="Rectangle 12"/>
+          <p:cNvSpPr/>
+          <p:nvPr/>
+        </p:nvSpPr>
+        <p:spPr>
+          <a:xfrm>
+            <a:off x="4283354" y="1655064"/>
+            <a:ext cx="3624986" cy="27432"/>
+          </a:xfrm>
+          <a:prstGeom prst="rect">
+            <a:avLst/>
+          </a:prstGeom>
+          <a:solidFill>
+            <a:srgbClr val="FFD000"/>
+          </a:solidFill>
+          <a:ln>
+            <a:noFill/>
+          </a:ln>
+        </p:spPr>
+        <p:style>
+          <a:lnRef idx="1">
+            <a:schemeClr val="accent1"/>
+          </a:lnRef>
+          <a:fillRef idx="3">
+            <a:schemeClr val="accent1"/>
+          </a:fillRef>
+          <a:effectRef idx="2">
+            <a:schemeClr val="accent1"/>
+          </a:effectRef>
+          <a:fontRef idx="minor">
+            <a:schemeClr val="lt1"/>
+          </a:fontRef>
+        </p:style>
+        <p:txBody>
+          <a:bodyPr rtlCol="0" anchor="ctr"/>
+          <a:lstStyle/>
+          <a:p>
+            <a:pPr algn="ctr"/>
+          </a:p>
+        </p:txBody>
+      </p:sp>
+      <p:pic>
+        <p:nvPicPr>
+          <p:cNvPr id="14" name="Picture 13" descr="drawio.png"/>
+          <p:cNvPicPr>
+            <a:picLocks noChangeAspect="1"/>
+          </p:cNvPicPr>
+          <p:nvPr/>
+        </p:nvPicPr>
+        <p:blipFill>
+          <a:blip r:embed="rId3"/>
+          <a:stretch>
+            <a:fillRect/>
+          </a:stretch>
+        </p:blipFill>
+        <p:spPr>
+          <a:xfrm>
+            <a:off x="5469483" y="1847087"/>
+            <a:ext cx="1252728" cy="1252728"/>
+          </a:xfrm>
+          <a:prstGeom prst="rect">
+            <a:avLst/>
+          </a:prstGeom>
+        </p:spPr>
+      </p:pic>
+      <p:sp>
+        <p:nvSpPr>
+          <p:cNvPr id="15" name="TextBox 14"/>
+          <p:cNvSpPr txBox="1"/>
+          <p:nvPr/>
+        </p:nvSpPr>
+        <p:spPr>
+          <a:xfrm>
+            <a:off x="4356506" y="3191256"/>
+            <a:ext cx="3478682" cy="621792"/>
+          </a:xfrm>
+          <a:prstGeom prst="rect">
+            <a:avLst/>
+          </a:prstGeom>
+          <a:noFill/>
+        </p:spPr>
+        <p:txBody>
+          <a:bodyPr wrap="square" anchor="t"/>
+          <a:lstStyle/>
+          <a:p>
+            <a:pPr algn="ctr"/>
+            <a:r>
+              <a:rPr sz="1300" b="1" i="0">
+                <a:solidFill>
+                  <a:srgbClr val="095292"/>
+                </a:solidFill>
+                <a:latin typeface="Calibri"/>
+              </a:rPr>
+              <a:t>draw.io</a:t>
+            </a:r>
+          </a:p>
+          <a:p>
+            <a:pPr algn="ctr">
+              <a:spcBef>
+                <a:spcPts val="200"/>
+              </a:spcBef>
             </a:pPr>
             <a:r>
-              <a:rPr sz="2000" b="0" i="0">
-                <a:solidFill>
-                  <a:srgbClr val="333333"/>
-                </a:solidFill>
-                <a:latin typeface="Calibri"/>
-              </a:rPr>
-              <a:t>–   Herramienta: </a:t>
-            </a:r>
-            <a:r>
-              <a:rPr sz="2000" b="1" i="0">
-                <a:solidFill>
-                  <a:srgbClr val="333333"/>
-                </a:solidFill>
-                <a:latin typeface="Calibri"/>
-              </a:rPr>
-              <a:t>Google Docs · draw.io (opcional)</a:t>
-            </a:r>
-          </a:p>
-          <a:p>
-            <a:pPr>
-              <a:spcAft>
-                <a:spcPts val="800"/>
-              </a:spcAft>
+              <a:rPr sz="1000" b="0" i="0">
+                <a:solidFill>
+                  <a:srgbClr val="666666"/>
+                </a:solidFill>
+                <a:latin typeface="Calibri"/>
+              </a:rPr>
+              <a:t>Matriz de modelos</a:t>
+            </a:r>
+          </a:p>
+        </p:txBody>
+      </p:sp>
+      <p:sp>
+        <p:nvSpPr>
+          <p:cNvPr id="16" name="Rounded Rectangle 15"/>
+          <p:cNvSpPr/>
+          <p:nvPr/>
+        </p:nvSpPr>
+        <p:spPr>
+          <a:xfrm>
+            <a:off x="8109508" y="1591056"/>
+            <a:ext cx="3624986" cy="2331720"/>
+          </a:xfrm>
+          <a:prstGeom prst="roundRect">
+            <a:avLst>
+              <a:gd name="adj" fmla="val 12000"/>
+            </a:avLst>
+          </a:prstGeom>
+          <a:solidFill>
+            <a:srgbClr val="F2F2F2"/>
+          </a:solidFill>
+          <a:ln>
+            <a:noFill/>
+          </a:ln>
+        </p:spPr>
+        <p:style>
+          <a:lnRef idx="1">
+            <a:schemeClr val="accent1"/>
+          </a:lnRef>
+          <a:fillRef idx="3">
+            <a:schemeClr val="accent1"/>
+          </a:fillRef>
+          <a:effectRef idx="2">
+            <a:schemeClr val="accent1"/>
+          </a:effectRef>
+          <a:fontRef idx="minor">
+            <a:schemeClr val="lt1"/>
+          </a:fontRef>
+        </p:style>
+        <p:txBody>
+          <a:bodyPr rtlCol="0" anchor="ctr"/>
+          <a:lstStyle/>
+          <a:p>
+            <a:pPr algn="ctr"/>
+          </a:p>
+        </p:txBody>
+      </p:sp>
+      <p:sp>
+        <p:nvSpPr>
+          <p:cNvPr id="17" name="Rectangle 16"/>
+          <p:cNvSpPr/>
+          <p:nvPr/>
+        </p:nvSpPr>
+        <p:spPr>
+          <a:xfrm>
+            <a:off x="8109508" y="1591056"/>
+            <a:ext cx="3624986" cy="64008"/>
+          </a:xfrm>
+          <a:prstGeom prst="rect">
+            <a:avLst/>
+          </a:prstGeom>
+          <a:solidFill>
+            <a:srgbClr val="095292"/>
+          </a:solidFill>
+          <a:ln>
+            <a:noFill/>
+          </a:ln>
+        </p:spPr>
+        <p:style>
+          <a:lnRef idx="1">
+            <a:schemeClr val="accent1"/>
+          </a:lnRef>
+          <a:fillRef idx="3">
+            <a:schemeClr val="accent1"/>
+          </a:fillRef>
+          <a:effectRef idx="2">
+            <a:schemeClr val="accent1"/>
+          </a:effectRef>
+          <a:fontRef idx="minor">
+            <a:schemeClr val="lt1"/>
+          </a:fontRef>
+        </p:style>
+        <p:txBody>
+          <a:bodyPr rtlCol="0" anchor="ctr"/>
+          <a:lstStyle/>
+          <a:p>
+            <a:pPr algn="ctr"/>
+          </a:p>
+        </p:txBody>
+      </p:sp>
+      <p:sp>
+        <p:nvSpPr>
+          <p:cNvPr id="18" name="Rectangle 17"/>
+          <p:cNvSpPr/>
+          <p:nvPr/>
+        </p:nvSpPr>
+        <p:spPr>
+          <a:xfrm>
+            <a:off x="8109508" y="1655064"/>
+            <a:ext cx="3624986" cy="27432"/>
+          </a:xfrm>
+          <a:prstGeom prst="rect">
+            <a:avLst/>
+          </a:prstGeom>
+          <a:solidFill>
+            <a:srgbClr val="FFD000"/>
+          </a:solidFill>
+          <a:ln>
+            <a:noFill/>
+          </a:ln>
+        </p:spPr>
+        <p:style>
+          <a:lnRef idx="1">
+            <a:schemeClr val="accent1"/>
+          </a:lnRef>
+          <a:fillRef idx="3">
+            <a:schemeClr val="accent1"/>
+          </a:fillRef>
+          <a:effectRef idx="2">
+            <a:schemeClr val="accent1"/>
+          </a:effectRef>
+          <a:fontRef idx="minor">
+            <a:schemeClr val="lt1"/>
+          </a:fontRef>
+        </p:style>
+        <p:txBody>
+          <a:bodyPr rtlCol="0" anchor="ctr"/>
+          <a:lstStyle/>
+          <a:p>
+            <a:pPr algn="ctr"/>
+          </a:p>
+        </p:txBody>
+      </p:sp>
+      <p:pic>
+        <p:nvPicPr>
+          <p:cNvPr id="19" name="Picture 18" descr="examlab.png"/>
+          <p:cNvPicPr>
+            <a:picLocks noChangeAspect="1"/>
+          </p:cNvPicPr>
+          <p:nvPr/>
+        </p:nvPicPr>
+        <p:blipFill>
+          <a:blip r:embed="rId4"/>
+          <a:stretch>
+            <a:fillRect/>
+          </a:stretch>
+        </p:blipFill>
+        <p:spPr>
+          <a:xfrm>
+            <a:off x="9295638" y="1847087"/>
+            <a:ext cx="1252728" cy="1252728"/>
+          </a:xfrm>
+          <a:prstGeom prst="rect">
+            <a:avLst/>
+          </a:prstGeom>
+        </p:spPr>
+      </p:pic>
+      <p:sp>
+        <p:nvSpPr>
+          <p:cNvPr id="20" name="TextBox 19"/>
+          <p:cNvSpPr txBox="1"/>
+          <p:nvPr/>
+        </p:nvSpPr>
+        <p:spPr>
+          <a:xfrm>
+            <a:off x="8182660" y="3191256"/>
+            <a:ext cx="3478682" cy="621792"/>
+          </a:xfrm>
+          <a:prstGeom prst="rect">
+            <a:avLst/>
+          </a:prstGeom>
+          <a:noFill/>
+        </p:spPr>
+        <p:txBody>
+          <a:bodyPr wrap="square" anchor="t"/>
+          <a:lstStyle/>
+          <a:p>
+            <a:pPr algn="ctr"/>
+            <a:r>
+              <a:rPr sz="1300" b="1" i="0">
+                <a:solidFill>
+                  <a:srgbClr val="095292"/>
+                </a:solidFill>
+                <a:latin typeface="Calibri"/>
+              </a:rPr>
+              <a:t>la plataforma del curso</a:t>
+            </a:r>
+          </a:p>
+          <a:p>
+            <a:pPr algn="ctr">
+              <a:spcBef>
+                <a:spcPts val="200"/>
+              </a:spcBef>
             </a:pPr>
             <a:r>
-              <a:rPr sz="2000" b="0" i="0">
-                <a:solidFill>
-                  <a:srgbClr val="333333"/>
-                </a:solidFill>
-                <a:latin typeface="Calibri"/>
-              </a:rPr>
-              <a:t>–   Todo lo que construyan hoy entra al </a:t>
-            </a:r>
-            <a:r>
-              <a:rPr sz="2000" b="1" i="0">
-                <a:solidFill>
-                  <a:srgbClr val="333333"/>
-                </a:solidFill>
-                <a:latin typeface="Calibri"/>
-              </a:rPr>
-              <a:t>informe/repo del PI</a:t>
-            </a:r>
-            <a:r>
-              <a:rPr sz="2000" b="0" i="0">
-                <a:solidFill>
-                  <a:srgbClr val="333333"/>
-                </a:solidFill>
-                <a:latin typeface="Calibri"/>
-              </a:rPr>
-              <a:t> (no es lab suelto).</a:t>
-            </a:r>
-          </a:p>
-          <a:p>
-            <a:pPr>
-              <a:spcAft>
-                <a:spcPts val="800"/>
-              </a:spcAft>
-            </a:pPr>
-            <a:r>
-              <a:rPr sz="2000" b="0" i="0">
-                <a:solidFill>
-                  <a:srgbClr val="333333"/>
-                </a:solidFill>
-                <a:latin typeface="Calibri"/>
-              </a:rPr>
-              <a:t>–   Individual por defecto · el docente puede autorizar equipos de 2–3; la entrega en la plataforma del curso siempre es individual.</a:t>
-            </a:r>
-          </a:p>
-        </p:txBody>
-      </p:sp>
-      <p:sp>
-        <p:nvSpPr>
-          <p:cNvPr id="6" name="TextBox 5"/>
+              <a:rPr sz="1000" b="0" i="0">
+                <a:solidFill>
+                  <a:srgbClr val="666666"/>
+                </a:solidFill>
+                <a:latin typeface="Calibri"/>
+              </a:rPr>
+              <a:t>Donde se entrega</a:t>
+            </a:r>
+          </a:p>
+        </p:txBody>
+      </p:sp>
+      <p:sp>
+        <p:nvSpPr>
+          <p:cNvPr id="21" name="TextBox 20"/>
           <p:cNvSpPr txBox="1"/>
           <p:nvPr/>
         </p:nvSpPr>
@@ -11610,7 +11981,7 @@
                 </a:solidFill>
                 <a:latin typeface="Calibri"/>
               </a:rPr>
-              <a:t>Manos a la obra (paso a paso)</a:t>
+              <a:t>PI CloudLite — entregable de hoy</a:t>
             </a:r>
           </a:p>
         </p:txBody>
@@ -11643,13 +12014,22 @@
               </a:spcAft>
             </a:pPr>
             <a:r>
+              <a:rPr sz="2000" b="0" i="0">
+                <a:solidFill>
+                  <a:srgbClr val="333333"/>
+                </a:solidFill>
+                <a:latin typeface="Calibri"/>
+              </a:rPr>
+              <a:t>–   </a:t>
+            </a:r>
+            <a:r>
               <a:rPr sz="2000" b="1" i="0">
                 <a:solidFill>
                   <a:srgbClr val="333333"/>
                 </a:solidFill>
                 <a:latin typeface="Calibri"/>
               </a:rPr>
-              <a:t>1.</a:t>
+              <a:t>Entregable:</a:t>
             </a:r>
             <a:r>
               <a:rPr sz="2000" b="0" i="0">
@@ -11658,7 +12038,7 @@
                 </a:solidFill>
                 <a:latin typeface="Calibri"/>
               </a:rPr>
-              <a:t> Paso 1: relea su ficha y su C4 Context de la Clase 1. No cambie de dominio: las preguntas 5 a 7 se califican sobre el mismo sistema, y el ADR que redacte hoy se reutiliza en el informe del PI y en la sustentacion de la Clase 15.</a:t>
+              <a:t> ADR-001: decisión de modelo de servicio + matriz de comparación aplicada al dominio</a:t>
             </a:r>
           </a:p>
           <a:p>
@@ -11674,7 +12054,7 @@
                 </a:solidFill>
                 <a:latin typeface="Calibri"/>
               </a:rPr>
-              <a:t>–   </a:t>
+              <a:t>–   Herramienta: </a:t>
             </a:r>
             <a:r>
               <a:rPr sz="2000" b="1" i="0">
@@ -11683,16 +12063,7 @@
                 </a:solidFill>
                 <a:latin typeface="Calibri"/>
               </a:rPr>
-              <a:t>2.</a:t>
-            </a:r>
-            <a:r>
-              <a:rPr sz="2000" b="0" i="0">
-                <a:solidFill>
-                  <a:srgbClr val="333333"/>
-                </a:solidFill>
-                <a:latin typeface="Calibri"/>
-              </a:rPr>
-              <a:t> Paso 2: construya en la pregunta 5 la matriz «Criterio | IaaS | PaaS | SaaS» con las cuatro filas en orden (control, costo cualitativo, operacion, time-to-demo) y maximo 2 lineas por celda; verifique que cada celda nombre una capacidad o una restriccion de SU dominio, y que la fila de operacion no afirme que en PaaS o SaaS usted deja de responder por su propia aplicacion.</a:t>
+              <a:t>Google Docs · draw.io (opcional)</a:t>
             </a:r>
           </a:p>
           <a:p>
@@ -11708,7 +12079,7 @@
                 </a:solidFill>
                 <a:latin typeface="Calibri"/>
               </a:rPr>
-              <a:t>–   </a:t>
+              <a:t>–   Todo lo que construyan hoy entra al </a:t>
             </a:r>
             <a:r>
               <a:rPr sz="2000" b="1" i="0">
@@ -11717,7 +12088,7 @@
                 </a:solidFill>
                 <a:latin typeface="Calibri"/>
               </a:rPr>
-              <a:t>3.</a:t>
+              <a:t>informe/repo del PI</a:t>
             </a:r>
             <a:r>
               <a:rPr sz="2000" b="0" i="0">
@@ -11726,7 +12097,7 @@
                 </a:solidFill>
                 <a:latin typeface="Calibri"/>
               </a:rPr>
-              <a:t> Paso 3: redacte en la pregunta 6 el ADR-001 con las cinco secciones rotuladas —titulo, estado con fecha, contexto con sus restricciones reales, la decision en UNA sola frase con UN modelo dominante, y exactamente 2 alternativas descartadas con el motivo atado a su dominio—; verifique que la seccion de decision no nombre dos modelos, porque en ese caso vale cero.</a:t>
+              <a:t> (no es lab suelto).</a:t>
             </a:r>
           </a:p>
           <a:p>
@@ -11742,25 +12113,7 @@
                 </a:solidFill>
                 <a:latin typeface="Calibri"/>
               </a:rPr>
-              <a:t>–   </a:t>
-            </a:r>
-            <a:r>
-              <a:rPr sz="2000" b="1" i="0">
-                <a:solidFill>
-                  <a:srgbClr val="333333"/>
-                </a:solidFill>
-                <a:latin typeface="Calibri"/>
-              </a:rPr>
-              <a:t>4.</a:t>
-            </a:r>
-            <a:r>
-              <a:rPr sz="2000" b="0" i="0">
-                <a:solidFill>
-                  <a:srgbClr val="333333"/>
-                </a:solidFill>
-                <a:latin typeface="Calibri"/>
-              </a:rPr>
-              <a:t> Paso 4: escriba en la pregunta 7 la seccion 6 del mismo ADR, las consecuencias en los tres ejes (operacion, costo y aprendizaje), con al menos una positiva y una negativa por eje marcadas con + y -, y verifique que al menos una negativa hable de amarre al proveedor o de perdida de control; guarde y continue, que la actividad se entrega completa al cierre del corte.</a:t>
+              <a:t>–   Individual por defecto · el docente puede autorizar equipos de 2–3; la entrega en la plataforma del curso siempre es individual.</a:t>
             </a:r>
           </a:p>
         </p:txBody>
@@ -11941,109 +12294,21 @@
                 </a:solidFill>
                 <a:latin typeface="Calibri"/>
               </a:rPr>
-              <a:t>Para continuar (PI)</a:t>
-            </a:r>
-          </a:p>
-        </p:txBody>
-      </p:sp>
-      <p:sp>
-        <p:nvSpPr>
-          <p:cNvPr id="5" name="Rounded Rectangle 4"/>
-          <p:cNvSpPr/>
-          <p:nvPr/>
-        </p:nvSpPr>
-        <p:spPr>
-          <a:xfrm>
-            <a:off x="457200" y="1261872"/>
-            <a:ext cx="11277295" cy="1051560"/>
-          </a:xfrm>
-          <a:prstGeom prst="roundRect">
-            <a:avLst>
-              <a:gd name="adj" fmla="val 12000"/>
-            </a:avLst>
-          </a:prstGeom>
-          <a:solidFill>
-            <a:srgbClr val="E8F4FA"/>
-          </a:solidFill>
-          <a:ln>
-            <a:noFill/>
-          </a:ln>
-        </p:spPr>
-        <p:style>
-          <a:lnRef idx="1">
-            <a:schemeClr val="accent1"/>
-          </a:lnRef>
-          <a:fillRef idx="3">
-            <a:schemeClr val="accent1"/>
-          </a:fillRef>
-          <a:effectRef idx="2">
-            <a:schemeClr val="accent1"/>
-          </a:effectRef>
-          <a:fontRef idx="minor">
-            <a:schemeClr val="lt1"/>
-          </a:fontRef>
-        </p:style>
-        <p:txBody>
-          <a:bodyPr rtlCol="0" anchor="ctr"/>
-          <a:lstStyle/>
-          <a:p>
-            <a:pPr algn="ctr"/>
-          </a:p>
-        </p:txBody>
-      </p:sp>
-      <p:sp>
-        <p:nvSpPr>
-          <p:cNvPr id="6" name="Rectangle 5"/>
-          <p:cNvSpPr/>
-          <p:nvPr/>
-        </p:nvSpPr>
-        <p:spPr>
-          <a:xfrm>
-            <a:off x="457200" y="1261872"/>
-            <a:ext cx="128016" cy="1051560"/>
-          </a:xfrm>
-          <a:prstGeom prst="rect">
-            <a:avLst/>
-          </a:prstGeom>
-          <a:solidFill>
-            <a:srgbClr val="269CCB"/>
-          </a:solidFill>
-          <a:ln>
-            <a:noFill/>
-          </a:ln>
-        </p:spPr>
-        <p:style>
-          <a:lnRef idx="1">
-            <a:schemeClr val="accent1"/>
-          </a:lnRef>
-          <a:fillRef idx="3">
-            <a:schemeClr val="accent1"/>
-          </a:fillRef>
-          <a:effectRef idx="2">
-            <a:schemeClr val="accent1"/>
-          </a:effectRef>
-          <a:fontRef idx="minor">
-            <a:schemeClr val="lt1"/>
-          </a:fontRef>
-        </p:style>
-        <p:txBody>
-          <a:bodyPr rtlCol="0" anchor="ctr"/>
-          <a:lstStyle/>
-          <a:p>
-            <a:pPr algn="ctr"/>
-          </a:p>
-        </p:txBody>
-      </p:sp>
-      <p:sp>
-        <p:nvSpPr>
-          <p:cNvPr id="7" name="TextBox 6"/>
+              <a:t>Manos a la obra (paso a paso)</a:t>
+            </a:r>
+          </a:p>
+        </p:txBody>
+      </p:sp>
+      <p:sp>
+        <p:nvSpPr>
+          <p:cNvPr id="5" name="TextBox 4"/>
           <p:cNvSpPr txBox="1"/>
           <p:nvPr/>
         </p:nvSpPr>
         <p:spPr>
           <a:xfrm>
-            <a:off x="777240" y="1399031"/>
-            <a:ext cx="10774375" cy="822959"/>
+            <a:off x="457200" y="1170432"/>
+            <a:ext cx="11277295" cy="5230368"/>
           </a:xfrm>
           <a:prstGeom prst="rect">
             <a:avLst/>
@@ -12056,313 +12321,137 @@
           </a:bodyPr>
           <a:lstStyle/>
           <a:p>
-            <a:r>
-              <a:rPr sz="1200" b="1" i="0">
-                <a:solidFill>
-                  <a:srgbClr val="269CCB"/>
-                </a:solidFill>
-                <a:latin typeface="Calibri"/>
-              </a:rPr>
-              <a:t>Info</a:t>
-            </a:r>
-          </a:p>
-          <a:p>
             <a:pPr>
-              <a:spcBef>
-                <a:spcPts val="400"/>
-              </a:spcBef>
+              <a:spcAft>
+                <a:spcPts val="800"/>
+              </a:spcAft>
             </a:pPr>
             <a:r>
-              <a:rPr sz="1400" b="0" i="0">
-                <a:solidFill>
-                  <a:srgbClr val="333333"/>
-                </a:solidFill>
-                <a:latin typeface="Calibri"/>
-              </a:rPr>
-              <a:t>Entregable: ADR-001: decisión de modelo de servicio + matriz de comparación aplicada al dominio</a:t>
-            </a:r>
-          </a:p>
-        </p:txBody>
-      </p:sp>
-      <p:sp>
-        <p:nvSpPr>
-          <p:cNvPr id="8" name="Rounded Rectangle 7"/>
-          <p:cNvSpPr/>
-          <p:nvPr/>
-        </p:nvSpPr>
-        <p:spPr>
-          <a:xfrm>
-            <a:off x="457200" y="2478024"/>
-            <a:ext cx="11277295" cy="1051560"/>
-          </a:xfrm>
-          <a:prstGeom prst="roundRect">
-            <a:avLst>
-              <a:gd name="adj" fmla="val 12000"/>
-            </a:avLst>
-          </a:prstGeom>
-          <a:solidFill>
-            <a:srgbClr val="FFF8E1"/>
-          </a:solidFill>
-          <a:ln>
-            <a:noFill/>
-          </a:ln>
-        </p:spPr>
-        <p:style>
-          <a:lnRef idx="1">
-            <a:schemeClr val="accent1"/>
-          </a:lnRef>
-          <a:fillRef idx="3">
-            <a:schemeClr val="accent1"/>
-          </a:fillRef>
-          <a:effectRef idx="2">
-            <a:schemeClr val="accent1"/>
-          </a:effectRef>
-          <a:fontRef idx="minor">
-            <a:schemeClr val="lt1"/>
-          </a:fontRef>
-        </p:style>
-        <p:txBody>
-          <a:bodyPr rtlCol="0" anchor="ctr"/>
-          <a:lstStyle/>
-          <a:p>
-            <a:pPr algn="ctr"/>
-          </a:p>
-        </p:txBody>
-      </p:sp>
-      <p:sp>
-        <p:nvSpPr>
-          <p:cNvPr id="9" name="Rectangle 8"/>
-          <p:cNvSpPr/>
-          <p:nvPr/>
-        </p:nvSpPr>
-        <p:spPr>
-          <a:xfrm>
-            <a:off x="457200" y="2478024"/>
-            <a:ext cx="128016" cy="1051560"/>
-          </a:xfrm>
-          <a:prstGeom prst="rect">
-            <a:avLst/>
-          </a:prstGeom>
-          <a:solidFill>
-            <a:srgbClr val="FFD000"/>
-          </a:solidFill>
-          <a:ln>
-            <a:noFill/>
-          </a:ln>
-        </p:spPr>
-        <p:style>
-          <a:lnRef idx="1">
-            <a:schemeClr val="accent1"/>
-          </a:lnRef>
-          <a:fillRef idx="3">
-            <a:schemeClr val="accent1"/>
-          </a:fillRef>
-          <a:effectRef idx="2">
-            <a:schemeClr val="accent1"/>
-          </a:effectRef>
-          <a:fontRef idx="minor">
-            <a:schemeClr val="lt1"/>
-          </a:fontRef>
-        </p:style>
-        <p:txBody>
-          <a:bodyPr rtlCol="0" anchor="ctr"/>
-          <a:lstStyle/>
-          <a:p>
-            <a:pPr algn="ctr"/>
-          </a:p>
-        </p:txBody>
-      </p:sp>
-      <p:sp>
-        <p:nvSpPr>
-          <p:cNvPr id="10" name="TextBox 9"/>
-          <p:cNvSpPr txBox="1"/>
-          <p:nvPr/>
-        </p:nvSpPr>
-        <p:spPr>
-          <a:xfrm>
-            <a:off x="777240" y="2615184"/>
-            <a:ext cx="10774375" cy="822959"/>
-          </a:xfrm>
-          <a:prstGeom prst="rect">
-            <a:avLst/>
-          </a:prstGeom>
-          <a:noFill/>
-        </p:spPr>
-        <p:txBody>
-          <a:bodyPr wrap="square">
-            <a:spAutoFit/>
-          </a:bodyPr>
-          <a:lstStyle/>
-          <a:p>
-            <a:r>
-              <a:rPr sz="1200" b="1" i="0">
-                <a:solidFill>
-                  <a:srgbClr val="FFD000"/>
-                </a:solidFill>
-                <a:latin typeface="Calibri"/>
-              </a:rPr>
-              <a:t>Aclaración</a:t>
+              <a:rPr sz="2000" b="1" i="0">
+                <a:solidFill>
+                  <a:srgbClr val="333333"/>
+                </a:solidFill>
+                <a:latin typeface="Calibri"/>
+              </a:rPr>
+              <a:t>1.</a:t>
+            </a:r>
+            <a:r>
+              <a:rPr sz="2000" b="0" i="0">
+                <a:solidFill>
+                  <a:srgbClr val="333333"/>
+                </a:solidFill>
+                <a:latin typeface="Calibri"/>
+              </a:rPr>
+              <a:t> Paso 1: relea su ficha y su C4 Context de la Clase 1. No cambie de dominio: las preguntas 5 a 7 se califican sobre el mismo sistema, y el ADR que redacte hoy se reutiliza en el informe del PI y en la sustentacion de la Clase 15.</a:t>
             </a:r>
           </a:p>
           <a:p>
             <a:pPr>
-              <a:spcBef>
-                <a:spcPts val="400"/>
-              </a:spcBef>
+              <a:spcAft>
+                <a:spcPts val="800"/>
+              </a:spcAft>
             </a:pPr>
             <a:r>
-              <a:rPr sz="1400" b="0" i="0">
-                <a:solidFill>
-                  <a:srgbClr val="333333"/>
-                </a:solidFill>
-                <a:latin typeface="Calibri"/>
-              </a:rPr>
-              <a:t>Subir evidencias al paquete CloudLite (Drive/repo) y a la plataforma del curso en la fecha que indique el docente.</a:t>
-            </a:r>
-          </a:p>
-        </p:txBody>
-      </p:sp>
-      <p:sp>
-        <p:nvSpPr>
-          <p:cNvPr id="11" name="Rounded Rectangle 10"/>
-          <p:cNvSpPr/>
-          <p:nvPr/>
-        </p:nvSpPr>
-        <p:spPr>
-          <a:xfrm>
-            <a:off x="457200" y="3694176"/>
-            <a:ext cx="11277295" cy="1051560"/>
-          </a:xfrm>
-          <a:prstGeom prst="roundRect">
-            <a:avLst>
-              <a:gd name="adj" fmla="val 12000"/>
-            </a:avLst>
-          </a:prstGeom>
-          <a:solidFill>
-            <a:srgbClr val="FBE4E4"/>
-          </a:solidFill>
-          <a:ln>
-            <a:noFill/>
-          </a:ln>
-        </p:spPr>
-        <p:style>
-          <a:lnRef idx="1">
-            <a:schemeClr val="accent1"/>
-          </a:lnRef>
-          <a:fillRef idx="3">
-            <a:schemeClr val="accent1"/>
-          </a:fillRef>
-          <a:effectRef idx="2">
-            <a:schemeClr val="accent1"/>
-          </a:effectRef>
-          <a:fontRef idx="minor">
-            <a:schemeClr val="lt1"/>
-          </a:fontRef>
-        </p:style>
-        <p:txBody>
-          <a:bodyPr rtlCol="0" anchor="ctr"/>
-          <a:lstStyle/>
-          <a:p>
-            <a:pPr algn="ctr"/>
-          </a:p>
-        </p:txBody>
-      </p:sp>
-      <p:sp>
-        <p:nvSpPr>
-          <p:cNvPr id="12" name="Rectangle 11"/>
-          <p:cNvSpPr/>
-          <p:nvPr/>
-        </p:nvSpPr>
-        <p:spPr>
-          <a:xfrm>
-            <a:off x="457200" y="3694176"/>
-            <a:ext cx="128016" cy="1051560"/>
-          </a:xfrm>
-          <a:prstGeom prst="rect">
-            <a:avLst/>
-          </a:prstGeom>
-          <a:solidFill>
-            <a:srgbClr val="A02030"/>
-          </a:solidFill>
-          <a:ln>
-            <a:noFill/>
-          </a:ln>
-        </p:spPr>
-        <p:style>
-          <a:lnRef idx="1">
-            <a:schemeClr val="accent1"/>
-          </a:lnRef>
-          <a:fillRef idx="3">
-            <a:schemeClr val="accent1"/>
-          </a:fillRef>
-          <a:effectRef idx="2">
-            <a:schemeClr val="accent1"/>
-          </a:effectRef>
-          <a:fontRef idx="minor">
-            <a:schemeClr val="lt1"/>
-          </a:fontRef>
-        </p:style>
-        <p:txBody>
-          <a:bodyPr rtlCol="0" anchor="ctr"/>
-          <a:lstStyle/>
-          <a:p>
-            <a:pPr algn="ctr"/>
-          </a:p>
-        </p:txBody>
-      </p:sp>
-      <p:sp>
-        <p:nvSpPr>
-          <p:cNvPr id="13" name="TextBox 12"/>
-          <p:cNvSpPr txBox="1"/>
-          <p:nvPr/>
-        </p:nvSpPr>
-        <p:spPr>
-          <a:xfrm>
-            <a:off x="777240" y="3831336"/>
-            <a:ext cx="10774375" cy="822959"/>
-          </a:xfrm>
-          <a:prstGeom prst="rect">
-            <a:avLst/>
-          </a:prstGeom>
-          <a:noFill/>
-        </p:spPr>
-        <p:txBody>
-          <a:bodyPr wrap="square">
-            <a:spAutoFit/>
-          </a:bodyPr>
-          <a:lstStyle/>
-          <a:p>
-            <a:r>
-              <a:rPr sz="1200" b="1" i="0">
-                <a:solidFill>
-                  <a:srgbClr val="A02030"/>
-                </a:solidFill>
-                <a:latin typeface="Calibri"/>
-              </a:rPr>
-              <a:t>Atención</a:t>
+              <a:rPr sz="2000" b="0" i="0">
+                <a:solidFill>
+                  <a:srgbClr val="333333"/>
+                </a:solidFill>
+                <a:latin typeface="Calibri"/>
+              </a:rPr>
+              <a:t>–   </a:t>
+            </a:r>
+            <a:r>
+              <a:rPr sz="2000" b="1" i="0">
+                <a:solidFill>
+                  <a:srgbClr val="333333"/>
+                </a:solidFill>
+                <a:latin typeface="Calibri"/>
+              </a:rPr>
+              <a:t>2.</a:t>
+            </a:r>
+            <a:r>
+              <a:rPr sz="2000" b="0" i="0">
+                <a:solidFill>
+                  <a:srgbClr val="333333"/>
+                </a:solidFill>
+                <a:latin typeface="Calibri"/>
+              </a:rPr>
+              <a:t> Paso 2: construya en la pregunta 5 la matriz «Criterio | IaaS | PaaS | SaaS» con las cuatro filas en orden (control, costo cualitativo, operacion, time-to-demo) y maximo 2 lineas por celda; verifique que cada celda nombre una capacidad o una restriccion de SU dominio, y que la fila de operacion no afirme que en PaaS o SaaS usted deja de responder por su propia aplicacion.</a:t>
             </a:r>
           </a:p>
           <a:p>
             <a:pPr>
-              <a:spcBef>
-                <a:spcPts val="400"/>
-              </a:spcBef>
+              <a:spcAft>
+                <a:spcPts val="800"/>
+              </a:spcAft>
             </a:pPr>
             <a:r>
-              <a:rPr sz="1400" b="0" i="0">
-                <a:solidFill>
-                  <a:srgbClr val="333333"/>
-                </a:solidFill>
-                <a:latin typeface="Calibri"/>
-              </a:rPr>
-              <a:t>Sin cloud de pago ni instalaciones obligatorias de hipervisores/Docker Desktop.</a:t>
-            </a:r>
-          </a:p>
-        </p:txBody>
-      </p:sp>
-      <p:sp>
-        <p:nvSpPr>
-          <p:cNvPr id="14" name="TextBox 13"/>
+              <a:rPr sz="2000" b="0" i="0">
+                <a:solidFill>
+                  <a:srgbClr val="333333"/>
+                </a:solidFill>
+                <a:latin typeface="Calibri"/>
+              </a:rPr>
+              <a:t>–   </a:t>
+            </a:r>
+            <a:r>
+              <a:rPr sz="2000" b="1" i="0">
+                <a:solidFill>
+                  <a:srgbClr val="333333"/>
+                </a:solidFill>
+                <a:latin typeface="Calibri"/>
+              </a:rPr>
+              <a:t>3.</a:t>
+            </a:r>
+            <a:r>
+              <a:rPr sz="2000" b="0" i="0">
+                <a:solidFill>
+                  <a:srgbClr val="333333"/>
+                </a:solidFill>
+                <a:latin typeface="Calibri"/>
+              </a:rPr>
+              <a:t> Paso 3: redacte en la pregunta 6 el ADR-001 con las cinco secciones rotuladas —titulo, estado con fecha, contexto con sus restricciones reales, la decision en UNA sola frase con UN modelo dominante, y exactamente 2 alternativas descartadas con el motivo atado a su dominio—; verifique que la seccion de decision no nombre dos modelos, porque en ese caso vale cero.</a:t>
+            </a:r>
+          </a:p>
+          <a:p>
+            <a:pPr>
+              <a:spcAft>
+                <a:spcPts val="800"/>
+              </a:spcAft>
+            </a:pPr>
+            <a:r>
+              <a:rPr sz="2000" b="0" i="0">
+                <a:solidFill>
+                  <a:srgbClr val="333333"/>
+                </a:solidFill>
+                <a:latin typeface="Calibri"/>
+              </a:rPr>
+              <a:t>–   </a:t>
+            </a:r>
+            <a:r>
+              <a:rPr sz="2000" b="1" i="0">
+                <a:solidFill>
+                  <a:srgbClr val="333333"/>
+                </a:solidFill>
+                <a:latin typeface="Calibri"/>
+              </a:rPr>
+              <a:t>4.</a:t>
+            </a:r>
+            <a:r>
+              <a:rPr sz="2000" b="0" i="0">
+                <a:solidFill>
+                  <a:srgbClr val="333333"/>
+                </a:solidFill>
+                <a:latin typeface="Calibri"/>
+              </a:rPr>
+              <a:t> Paso 4: escriba en la pregunta 7 la seccion 6 del mismo ADR, las consecuencias en los tres ejes (operacion, costo y aprendizaje), con al menos una positiva y una negativa por eje marcadas con + y -, y verifique que al menos una negativa hable de amarre al proveedor o de perdida de control; guarde y continue, que la actividad se entrega completa al cierre del corte.</a:t>
+            </a:r>
+          </a:p>
+        </p:txBody>
+      </p:sp>
+      <p:sp>
+        <p:nvSpPr>
+          <p:cNvPr id="6" name="TextBox 5"/>
           <p:cNvSpPr txBox="1"/>
           <p:nvPr/>
         </p:nvSpPr>
@@ -12404,6 +12493,601 @@
 </file>
 
 <file path=ppt/slides/slide33.xml><?xml version="1.0" encoding="utf-8"?>
+<p:sld xmlns:a="http://schemas.openxmlformats.org/drawingml/2006/main" xmlns:p="http://schemas.openxmlformats.org/presentationml/2006/main" xmlns:r="http://schemas.openxmlformats.org/officeDocument/2006/relationships">
+  <p:cSld>
+    <p:bg>
+      <p:bgPr>
+        <a:solidFill>
+          <a:srgbClr val="FFFFFF"/>
+        </a:solidFill>
+        <a:effectLst/>
+      </p:bgPr>
+    </p:bg>
+    <p:spTree>
+      <p:nvGrpSpPr>
+        <p:cNvPr id="1" name=""/>
+        <p:cNvGrpSpPr/>
+        <p:nvPr/>
+      </p:nvGrpSpPr>
+      <p:grpSpPr/>
+      <p:sp>
+        <p:nvSpPr>
+          <p:cNvPr id="2" name="Rectangle 1"/>
+          <p:cNvSpPr/>
+          <p:nvPr/>
+        </p:nvSpPr>
+        <p:spPr>
+          <a:xfrm>
+            <a:off x="0" y="0"/>
+            <a:ext cx="12191695" cy="960120"/>
+          </a:xfrm>
+          <a:prstGeom prst="rect">
+            <a:avLst/>
+          </a:prstGeom>
+          <a:solidFill>
+            <a:srgbClr val="095292"/>
+          </a:solidFill>
+          <a:ln>
+            <a:noFill/>
+          </a:ln>
+        </p:spPr>
+        <p:style>
+          <a:lnRef idx="1">
+            <a:schemeClr val="accent1"/>
+          </a:lnRef>
+          <a:fillRef idx="3">
+            <a:schemeClr val="accent1"/>
+          </a:fillRef>
+          <a:effectRef idx="2">
+            <a:schemeClr val="accent1"/>
+          </a:effectRef>
+          <a:fontRef idx="minor">
+            <a:schemeClr val="lt1"/>
+          </a:fontRef>
+        </p:style>
+        <p:txBody>
+          <a:bodyPr rtlCol="0" anchor="ctr"/>
+          <a:lstStyle/>
+          <a:p>
+            <a:pPr algn="ctr"/>
+          </a:p>
+        </p:txBody>
+      </p:sp>
+      <p:sp>
+        <p:nvSpPr>
+          <p:cNvPr id="3" name="Rectangle 2"/>
+          <p:cNvSpPr/>
+          <p:nvPr/>
+        </p:nvSpPr>
+        <p:spPr>
+          <a:xfrm>
+            <a:off x="0" y="960120"/>
+            <a:ext cx="12191695" cy="41148"/>
+          </a:xfrm>
+          <a:prstGeom prst="rect">
+            <a:avLst/>
+          </a:prstGeom>
+          <a:solidFill>
+            <a:srgbClr val="FFD000"/>
+          </a:solidFill>
+          <a:ln>
+            <a:noFill/>
+          </a:ln>
+        </p:spPr>
+        <p:style>
+          <a:lnRef idx="1">
+            <a:schemeClr val="accent1"/>
+          </a:lnRef>
+          <a:fillRef idx="3">
+            <a:schemeClr val="accent1"/>
+          </a:fillRef>
+          <a:effectRef idx="2">
+            <a:schemeClr val="accent1"/>
+          </a:effectRef>
+          <a:fontRef idx="minor">
+            <a:schemeClr val="lt1"/>
+          </a:fontRef>
+        </p:style>
+        <p:txBody>
+          <a:bodyPr rtlCol="0" anchor="ctr"/>
+          <a:lstStyle/>
+          <a:p>
+            <a:pPr algn="ctr"/>
+          </a:p>
+        </p:txBody>
+      </p:sp>
+      <p:sp>
+        <p:nvSpPr>
+          <p:cNvPr id="4" name="TextBox 3"/>
+          <p:cNvSpPr txBox="1"/>
+          <p:nvPr/>
+        </p:nvSpPr>
+        <p:spPr>
+          <a:xfrm>
+            <a:off x="457200" y="164592"/>
+            <a:ext cx="11277295" cy="502920"/>
+          </a:xfrm>
+          <a:prstGeom prst="rect">
+            <a:avLst/>
+          </a:prstGeom>
+          <a:noFill/>
+        </p:spPr>
+        <p:txBody>
+          <a:bodyPr wrap="square">
+            <a:spAutoFit/>
+          </a:bodyPr>
+          <a:lstStyle/>
+          <a:p>
+            <a:r>
+              <a:rPr sz="2600" b="1" i="0">
+                <a:solidFill>
+                  <a:srgbClr val="FFFFFF"/>
+                </a:solidFill>
+                <a:latin typeface="Calibri"/>
+              </a:rPr>
+              <a:t>Para continuar (PI)</a:t>
+            </a:r>
+          </a:p>
+        </p:txBody>
+      </p:sp>
+      <p:sp>
+        <p:nvSpPr>
+          <p:cNvPr id="5" name="Rounded Rectangle 4"/>
+          <p:cNvSpPr/>
+          <p:nvPr/>
+        </p:nvSpPr>
+        <p:spPr>
+          <a:xfrm>
+            <a:off x="457200" y="1261872"/>
+            <a:ext cx="11277295" cy="1051560"/>
+          </a:xfrm>
+          <a:prstGeom prst="roundRect">
+            <a:avLst>
+              <a:gd name="adj" fmla="val 12000"/>
+            </a:avLst>
+          </a:prstGeom>
+          <a:solidFill>
+            <a:srgbClr val="E8F4FA"/>
+          </a:solidFill>
+          <a:ln>
+            <a:noFill/>
+          </a:ln>
+        </p:spPr>
+        <p:style>
+          <a:lnRef idx="1">
+            <a:schemeClr val="accent1"/>
+          </a:lnRef>
+          <a:fillRef idx="3">
+            <a:schemeClr val="accent1"/>
+          </a:fillRef>
+          <a:effectRef idx="2">
+            <a:schemeClr val="accent1"/>
+          </a:effectRef>
+          <a:fontRef idx="minor">
+            <a:schemeClr val="lt1"/>
+          </a:fontRef>
+        </p:style>
+        <p:txBody>
+          <a:bodyPr rtlCol="0" anchor="ctr"/>
+          <a:lstStyle/>
+          <a:p>
+            <a:pPr algn="ctr"/>
+          </a:p>
+        </p:txBody>
+      </p:sp>
+      <p:sp>
+        <p:nvSpPr>
+          <p:cNvPr id="6" name="Rectangle 5"/>
+          <p:cNvSpPr/>
+          <p:nvPr/>
+        </p:nvSpPr>
+        <p:spPr>
+          <a:xfrm>
+            <a:off x="457200" y="1261872"/>
+            <a:ext cx="128016" cy="1051560"/>
+          </a:xfrm>
+          <a:prstGeom prst="rect">
+            <a:avLst/>
+          </a:prstGeom>
+          <a:solidFill>
+            <a:srgbClr val="269CCB"/>
+          </a:solidFill>
+          <a:ln>
+            <a:noFill/>
+          </a:ln>
+        </p:spPr>
+        <p:style>
+          <a:lnRef idx="1">
+            <a:schemeClr val="accent1"/>
+          </a:lnRef>
+          <a:fillRef idx="3">
+            <a:schemeClr val="accent1"/>
+          </a:fillRef>
+          <a:effectRef idx="2">
+            <a:schemeClr val="accent1"/>
+          </a:effectRef>
+          <a:fontRef idx="minor">
+            <a:schemeClr val="lt1"/>
+          </a:fontRef>
+        </p:style>
+        <p:txBody>
+          <a:bodyPr rtlCol="0" anchor="ctr"/>
+          <a:lstStyle/>
+          <a:p>
+            <a:pPr algn="ctr"/>
+          </a:p>
+        </p:txBody>
+      </p:sp>
+      <p:sp>
+        <p:nvSpPr>
+          <p:cNvPr id="7" name="TextBox 6"/>
+          <p:cNvSpPr txBox="1"/>
+          <p:nvPr/>
+        </p:nvSpPr>
+        <p:spPr>
+          <a:xfrm>
+            <a:off x="777240" y="1399031"/>
+            <a:ext cx="10774375" cy="822959"/>
+          </a:xfrm>
+          <a:prstGeom prst="rect">
+            <a:avLst/>
+          </a:prstGeom>
+          <a:noFill/>
+        </p:spPr>
+        <p:txBody>
+          <a:bodyPr wrap="square">
+            <a:spAutoFit/>
+          </a:bodyPr>
+          <a:lstStyle/>
+          <a:p>
+            <a:r>
+              <a:rPr sz="1200" b="1" i="0">
+                <a:solidFill>
+                  <a:srgbClr val="269CCB"/>
+                </a:solidFill>
+                <a:latin typeface="Calibri"/>
+              </a:rPr>
+              <a:t>Info</a:t>
+            </a:r>
+          </a:p>
+          <a:p>
+            <a:pPr>
+              <a:spcBef>
+                <a:spcPts val="400"/>
+              </a:spcBef>
+            </a:pPr>
+            <a:r>
+              <a:rPr sz="1400" b="0" i="0">
+                <a:solidFill>
+                  <a:srgbClr val="333333"/>
+                </a:solidFill>
+                <a:latin typeface="Calibri"/>
+              </a:rPr>
+              <a:t>Entregable: ADR-001: decisión de modelo de servicio + matriz de comparación aplicada al dominio</a:t>
+            </a:r>
+          </a:p>
+        </p:txBody>
+      </p:sp>
+      <p:sp>
+        <p:nvSpPr>
+          <p:cNvPr id="8" name="Rounded Rectangle 7"/>
+          <p:cNvSpPr/>
+          <p:nvPr/>
+        </p:nvSpPr>
+        <p:spPr>
+          <a:xfrm>
+            <a:off x="457200" y="2478024"/>
+            <a:ext cx="11277295" cy="1051560"/>
+          </a:xfrm>
+          <a:prstGeom prst="roundRect">
+            <a:avLst>
+              <a:gd name="adj" fmla="val 12000"/>
+            </a:avLst>
+          </a:prstGeom>
+          <a:solidFill>
+            <a:srgbClr val="FFF8E1"/>
+          </a:solidFill>
+          <a:ln>
+            <a:noFill/>
+          </a:ln>
+        </p:spPr>
+        <p:style>
+          <a:lnRef idx="1">
+            <a:schemeClr val="accent1"/>
+          </a:lnRef>
+          <a:fillRef idx="3">
+            <a:schemeClr val="accent1"/>
+          </a:fillRef>
+          <a:effectRef idx="2">
+            <a:schemeClr val="accent1"/>
+          </a:effectRef>
+          <a:fontRef idx="minor">
+            <a:schemeClr val="lt1"/>
+          </a:fontRef>
+        </p:style>
+        <p:txBody>
+          <a:bodyPr rtlCol="0" anchor="ctr"/>
+          <a:lstStyle/>
+          <a:p>
+            <a:pPr algn="ctr"/>
+          </a:p>
+        </p:txBody>
+      </p:sp>
+      <p:sp>
+        <p:nvSpPr>
+          <p:cNvPr id="9" name="Rectangle 8"/>
+          <p:cNvSpPr/>
+          <p:nvPr/>
+        </p:nvSpPr>
+        <p:spPr>
+          <a:xfrm>
+            <a:off x="457200" y="2478024"/>
+            <a:ext cx="128016" cy="1051560"/>
+          </a:xfrm>
+          <a:prstGeom prst="rect">
+            <a:avLst/>
+          </a:prstGeom>
+          <a:solidFill>
+            <a:srgbClr val="FFD000"/>
+          </a:solidFill>
+          <a:ln>
+            <a:noFill/>
+          </a:ln>
+        </p:spPr>
+        <p:style>
+          <a:lnRef idx="1">
+            <a:schemeClr val="accent1"/>
+          </a:lnRef>
+          <a:fillRef idx="3">
+            <a:schemeClr val="accent1"/>
+          </a:fillRef>
+          <a:effectRef idx="2">
+            <a:schemeClr val="accent1"/>
+          </a:effectRef>
+          <a:fontRef idx="minor">
+            <a:schemeClr val="lt1"/>
+          </a:fontRef>
+        </p:style>
+        <p:txBody>
+          <a:bodyPr rtlCol="0" anchor="ctr"/>
+          <a:lstStyle/>
+          <a:p>
+            <a:pPr algn="ctr"/>
+          </a:p>
+        </p:txBody>
+      </p:sp>
+      <p:sp>
+        <p:nvSpPr>
+          <p:cNvPr id="10" name="TextBox 9"/>
+          <p:cNvSpPr txBox="1"/>
+          <p:nvPr/>
+        </p:nvSpPr>
+        <p:spPr>
+          <a:xfrm>
+            <a:off x="777240" y="2615184"/>
+            <a:ext cx="10774375" cy="822959"/>
+          </a:xfrm>
+          <a:prstGeom prst="rect">
+            <a:avLst/>
+          </a:prstGeom>
+          <a:noFill/>
+        </p:spPr>
+        <p:txBody>
+          <a:bodyPr wrap="square">
+            <a:spAutoFit/>
+          </a:bodyPr>
+          <a:lstStyle/>
+          <a:p>
+            <a:r>
+              <a:rPr sz="1200" b="1" i="0">
+                <a:solidFill>
+                  <a:srgbClr val="FFD000"/>
+                </a:solidFill>
+                <a:latin typeface="Calibri"/>
+              </a:rPr>
+              <a:t>Aclaración</a:t>
+            </a:r>
+          </a:p>
+          <a:p>
+            <a:pPr>
+              <a:spcBef>
+                <a:spcPts val="400"/>
+              </a:spcBef>
+            </a:pPr>
+            <a:r>
+              <a:rPr sz="1400" b="0" i="0">
+                <a:solidFill>
+                  <a:srgbClr val="333333"/>
+                </a:solidFill>
+                <a:latin typeface="Calibri"/>
+              </a:rPr>
+              <a:t>Subir evidencias al paquete CloudLite (Drive/repo) y a la plataforma del curso en la fecha que indique el docente.</a:t>
+            </a:r>
+          </a:p>
+        </p:txBody>
+      </p:sp>
+      <p:sp>
+        <p:nvSpPr>
+          <p:cNvPr id="11" name="Rounded Rectangle 10"/>
+          <p:cNvSpPr/>
+          <p:nvPr/>
+        </p:nvSpPr>
+        <p:spPr>
+          <a:xfrm>
+            <a:off x="457200" y="3694176"/>
+            <a:ext cx="11277295" cy="1051560"/>
+          </a:xfrm>
+          <a:prstGeom prst="roundRect">
+            <a:avLst>
+              <a:gd name="adj" fmla="val 12000"/>
+            </a:avLst>
+          </a:prstGeom>
+          <a:solidFill>
+            <a:srgbClr val="FBE4E4"/>
+          </a:solidFill>
+          <a:ln>
+            <a:noFill/>
+          </a:ln>
+        </p:spPr>
+        <p:style>
+          <a:lnRef idx="1">
+            <a:schemeClr val="accent1"/>
+          </a:lnRef>
+          <a:fillRef idx="3">
+            <a:schemeClr val="accent1"/>
+          </a:fillRef>
+          <a:effectRef idx="2">
+            <a:schemeClr val="accent1"/>
+          </a:effectRef>
+          <a:fontRef idx="minor">
+            <a:schemeClr val="lt1"/>
+          </a:fontRef>
+        </p:style>
+        <p:txBody>
+          <a:bodyPr rtlCol="0" anchor="ctr"/>
+          <a:lstStyle/>
+          <a:p>
+            <a:pPr algn="ctr"/>
+          </a:p>
+        </p:txBody>
+      </p:sp>
+      <p:sp>
+        <p:nvSpPr>
+          <p:cNvPr id="12" name="Rectangle 11"/>
+          <p:cNvSpPr/>
+          <p:nvPr/>
+        </p:nvSpPr>
+        <p:spPr>
+          <a:xfrm>
+            <a:off x="457200" y="3694176"/>
+            <a:ext cx="128016" cy="1051560"/>
+          </a:xfrm>
+          <a:prstGeom prst="rect">
+            <a:avLst/>
+          </a:prstGeom>
+          <a:solidFill>
+            <a:srgbClr val="A02030"/>
+          </a:solidFill>
+          <a:ln>
+            <a:noFill/>
+          </a:ln>
+        </p:spPr>
+        <p:style>
+          <a:lnRef idx="1">
+            <a:schemeClr val="accent1"/>
+          </a:lnRef>
+          <a:fillRef idx="3">
+            <a:schemeClr val="accent1"/>
+          </a:fillRef>
+          <a:effectRef idx="2">
+            <a:schemeClr val="accent1"/>
+          </a:effectRef>
+          <a:fontRef idx="minor">
+            <a:schemeClr val="lt1"/>
+          </a:fontRef>
+        </p:style>
+        <p:txBody>
+          <a:bodyPr rtlCol="0" anchor="ctr"/>
+          <a:lstStyle/>
+          <a:p>
+            <a:pPr algn="ctr"/>
+          </a:p>
+        </p:txBody>
+      </p:sp>
+      <p:sp>
+        <p:nvSpPr>
+          <p:cNvPr id="13" name="TextBox 12"/>
+          <p:cNvSpPr txBox="1"/>
+          <p:nvPr/>
+        </p:nvSpPr>
+        <p:spPr>
+          <a:xfrm>
+            <a:off x="777240" y="3831336"/>
+            <a:ext cx="10774375" cy="822959"/>
+          </a:xfrm>
+          <a:prstGeom prst="rect">
+            <a:avLst/>
+          </a:prstGeom>
+          <a:noFill/>
+        </p:spPr>
+        <p:txBody>
+          <a:bodyPr wrap="square">
+            <a:spAutoFit/>
+          </a:bodyPr>
+          <a:lstStyle/>
+          <a:p>
+            <a:r>
+              <a:rPr sz="1200" b="1" i="0">
+                <a:solidFill>
+                  <a:srgbClr val="A02030"/>
+                </a:solidFill>
+                <a:latin typeface="Calibri"/>
+              </a:rPr>
+              <a:t>Atención</a:t>
+            </a:r>
+          </a:p>
+          <a:p>
+            <a:pPr>
+              <a:spcBef>
+                <a:spcPts val="400"/>
+              </a:spcBef>
+            </a:pPr>
+            <a:r>
+              <a:rPr sz="1400" b="0" i="0">
+                <a:solidFill>
+                  <a:srgbClr val="333333"/>
+                </a:solidFill>
+                <a:latin typeface="Calibri"/>
+              </a:rPr>
+              <a:t>Sin cloud de pago ni instalaciones obligatorias de hipervisores/Docker Desktop.</a:t>
+            </a:r>
+          </a:p>
+        </p:txBody>
+      </p:sp>
+      <p:sp>
+        <p:nvSpPr>
+          <p:cNvPr id="14" name="TextBox 13"/>
+          <p:cNvSpPr txBox="1"/>
+          <p:nvPr/>
+        </p:nvSpPr>
+        <p:spPr>
+          <a:xfrm>
+            <a:off x="11185855" y="6473952"/>
+            <a:ext cx="640080" cy="274320"/>
+          </a:xfrm>
+          <a:prstGeom prst="rect">
+            <a:avLst/>
+          </a:prstGeom>
+          <a:noFill/>
+        </p:spPr>
+        <p:txBody>
+          <a:bodyPr wrap="square">
+            <a:spAutoFit/>
+          </a:bodyPr>
+          <a:lstStyle/>
+          <a:p>
+            <a:pPr algn="r"/>
+            <a:r>
+              <a:rPr sz="1100" b="0" i="0">
+                <a:solidFill>
+                  <a:srgbClr val="666666"/>
+                </a:solidFill>
+                <a:latin typeface="Calibri"/>
+              </a:rPr>
+              <a:t>33</a:t>
+            </a:r>
+          </a:p>
+        </p:txBody>
+      </p:sp>
+    </p:spTree>
+  </p:cSld>
+  <p:clrMapOvr>
+    <a:masterClrMapping/>
+  </p:clrMapOvr>
+</p:sld>
+</file>
+
+<file path=ppt/slides/slide34.xml><?xml version="1.0" encoding="utf-8"?>
 <p:sld xmlns:a="http://schemas.openxmlformats.org/drawingml/2006/main" xmlns:p="http://schemas.openxmlformats.org/presentationml/2006/main" xmlns:r="http://schemas.openxmlformats.org/officeDocument/2006/relationships">
   <p:cSld>
     <p:bg>

--- a/Arquitectura de Sistemas Computacionales/Clases/Clase 2 - Modelos de servicio IaaS PaaS SaaS/Presentacion.pptx
+++ b/Arquitectura de Sistemas Computacionales/Clases/Clase 2 - Modelos de servicio IaaS PaaS SaaS/Presentacion.pptx
@@ -8484,7 +8484,7 @@
                 </a:solidFill>
                 <a:latin typeface="Calibri"/>
               </a:rPr>
-              <a:t>La plantilla de ADR, con los seis apartados que se califican</a:t>
+              <a:t>La plantilla de ADR: los seis apartados que se califican</a:t>
             </a:r>
           </a:p>
         </p:txBody>
@@ -12063,7 +12063,7 @@
                 </a:solidFill>
                 <a:latin typeface="Calibri"/>
               </a:rPr>
-              <a:t>Google Docs · draw.io (opcional)</a:t>
+              <a:t>Navegador · editor de texto del curso</a:t>
             </a:r>
           </a:p>
           <a:p>
@@ -12901,7 +12901,7 @@
                 </a:solidFill>
                 <a:latin typeface="Calibri"/>
               </a:rPr>
-              <a:t>Subir evidencias al paquete CloudLite (Drive/repo) y a la plataforma del curso en la fecha que indique el docente.</a:t>
+              <a:t>Subir evidencias al paquete CloudLite (Drive/repo) y a la plataforma del curso (la plataforma del curso) en la fecha que indique el docente.</a:t>
             </a:r>
           </a:p>
         </p:txBody>

--- a/Arquitectura de Sistemas Computacionales/Clases/Clase 2 - Modelos de servicio IaaS PaaS SaaS/Presentacion.pptx
+++ b/Arquitectura de Sistemas Computacionales/Clases/Clase 2 - Modelos de servicio IaaS PaaS SaaS/Presentacion.pptx
@@ -15,30 +15,26 @@
     <p:sldId id="263" r:id="rId14"/>
     <p:sldId id="264" r:id="rId15"/>
     <p:sldId id="265" r:id="rId16"/>
-    <p:sldId id="266" r:id="rId17"/>
-    <p:sldId id="267" r:id="rId18"/>
-    <p:sldId id="268" r:id="rId19"/>
-    <p:sldId id="269" r:id="rId20"/>
-    <p:sldId id="270" r:id="rId21"/>
-    <p:sldId id="271" r:id="rId22"/>
-    <p:sldId id="272" r:id="rId23"/>
-    <p:sldId id="273" r:id="rId24"/>
-    <p:sldId id="274" r:id="rId25"/>
-    <p:sldId id="275" r:id="rId26"/>
-    <p:sldId id="276" r:id="rId27"/>
-    <p:sldId id="277" r:id="rId28"/>
-    <p:sldId id="278" r:id="rId29"/>
-    <p:sldId id="279" r:id="rId30"/>
-    <p:sldId id="280" r:id="rId31"/>
-    <p:sldId id="281" r:id="rId32"/>
-    <p:sldId id="282" r:id="rId33"/>
-    <p:sldId id="283" r:id="rId34"/>
-    <p:sldId id="284" r:id="rId35"/>
-    <p:sldId id="285" r:id="rId36"/>
-    <p:sldId id="286" r:id="rId37"/>
-    <p:sldId id="287" r:id="rId38"/>
-    <p:sldId id="288" r:id="rId39"/>
-    <p:sldId id="289" r:id="rId40"/>
+    <p:sldId id="266" r:id="rId18"/>
+    <p:sldId id="267" r:id="rId19"/>
+    <p:sldId id="268" r:id="rId20"/>
+    <p:sldId id="269" r:id="rId21"/>
+    <p:sldId id="270" r:id="rId22"/>
+    <p:sldId id="271" r:id="rId23"/>
+    <p:sldId id="272" r:id="rId24"/>
+    <p:sldId id="273" r:id="rId25"/>
+    <p:sldId id="274" r:id="rId26"/>
+    <p:sldId id="275" r:id="rId27"/>
+    <p:sldId id="276" r:id="rId28"/>
+    <p:sldId id="277" r:id="rId29"/>
+    <p:sldId id="278" r:id="rId30"/>
+    <p:sldId id="279" r:id="rId31"/>
+    <p:sldId id="280" r:id="rId32"/>
+    <p:sldId id="281" r:id="rId33"/>
+    <p:sldId id="282" r:id="rId34"/>
+    <p:sldId id="283" r:id="rId35"/>
+    <p:sldId id="284" r:id="rId36"/>
+    <p:sldId id="285" r:id="rId37"/>
   </p:sldIdLst>
   <p:sldSz cx="12191695" cy="6858000" type="screen4x3"/>
   <p:notesSz cx="6858000" cy="9144000"/>
@@ -138,6 +134,736 @@
     </a:lvl9pPr>
   </p:defaultTextStyle>
 </p:presentation>
+</file>
+
+<file path=ppt/notesMasters/notesMaster1.xml><?xml version="1.0" encoding="utf-8"?>
+<p:notesMaster xmlns:a="http://schemas.openxmlformats.org/drawingml/2006/main" xmlns:p="http://schemas.openxmlformats.org/presentationml/2006/main" xmlns:r="http://schemas.openxmlformats.org/officeDocument/2006/relationships">
+  <p:cSld>
+    <p:bg>
+      <p:bgRef idx="1001">
+        <a:schemeClr val="bg1"/>
+      </p:bgRef>
+    </p:bg>
+    <p:spTree>
+      <p:nvGrpSpPr>
+        <p:cNvPr id="1" name=""/>
+        <p:cNvGrpSpPr/>
+        <p:nvPr/>
+      </p:nvGrpSpPr>
+      <p:grpSpPr>
+        <a:xfrm>
+          <a:off x="0" y="0"/>
+          <a:ext cx="0" cy="0"/>
+          <a:chOff x="0" y="0"/>
+          <a:chExt cx="0" cy="0"/>
+        </a:xfrm>
+      </p:grpSpPr>
+      <p:sp>
+        <p:nvSpPr>
+          <p:cNvPr id="2" name="Header Placeholder 1"/>
+          <p:cNvSpPr>
+            <a:spLocks noGrp="1"/>
+          </p:cNvSpPr>
+          <p:nvPr>
+            <p:ph type="hdr" sz="quarter"/>
+          </p:nvPr>
+        </p:nvSpPr>
+        <p:spPr>
+          <a:xfrm>
+            <a:off x="0" y="0"/>
+            <a:ext cx="2971800" cy="457200"/>
+          </a:xfrm>
+          <a:prstGeom prst="rect">
+            <a:avLst/>
+          </a:prstGeom>
+        </p:spPr>
+        <p:txBody>
+          <a:bodyPr vert="horz" lIns="91440" tIns="45720" rIns="91440" bIns="45720" rtlCol="0"/>
+          <a:lstStyle>
+            <a:lvl1pPr algn="l">
+              <a:defRPr sz="1200"/>
+            </a:lvl1pPr>
+          </a:lstStyle>
+          <a:p>
+            <a:endParaRPr lang="en-US"/>
+          </a:p>
+        </p:txBody>
+      </p:sp>
+      <p:sp>
+        <p:nvSpPr>
+          <p:cNvPr id="3" name="Date Placeholder 2"/>
+          <p:cNvSpPr>
+            <a:spLocks noGrp="1"/>
+          </p:cNvSpPr>
+          <p:nvPr>
+            <p:ph type="dt" idx="1"/>
+          </p:nvPr>
+        </p:nvSpPr>
+        <p:spPr>
+          <a:xfrm>
+            <a:off x="3884613" y="0"/>
+            <a:ext cx="2971800" cy="457200"/>
+          </a:xfrm>
+          <a:prstGeom prst="rect">
+            <a:avLst/>
+          </a:prstGeom>
+        </p:spPr>
+        <p:txBody>
+          <a:bodyPr vert="horz" lIns="91440" tIns="45720" rIns="91440" bIns="45720" rtlCol="0"/>
+          <a:lstStyle>
+            <a:lvl1pPr algn="r">
+              <a:defRPr sz="1200"/>
+            </a:lvl1pPr>
+          </a:lstStyle>
+          <a:p>
+            <a:fld id="{0F89C1C7-3DCD-1040-A9CF-14679D8B5DDD}" type="datetimeFigureOut">
+              <a:rPr lang="en-US" smtClean="0"/>
+              <a:t>10/17/16</a:t>
+            </a:fld>
+            <a:endParaRPr lang="en-US"/>
+          </a:p>
+        </p:txBody>
+      </p:sp>
+      <p:sp>
+        <p:nvSpPr>
+          <p:cNvPr id="4" name="Slide Image Placeholder 3"/>
+          <p:cNvSpPr>
+            <a:spLocks noGrp="1" noRot="1" noChangeAspect="1"/>
+          </p:cNvSpPr>
+          <p:nvPr>
+            <p:ph type="sldImg" idx="2"/>
+          </p:nvPr>
+        </p:nvSpPr>
+        <p:spPr>
+          <a:xfrm>
+            <a:off x="1143000" y="685800"/>
+            <a:ext cx="4572000" cy="3429000"/>
+          </a:xfrm>
+          <a:prstGeom prst="rect">
+            <a:avLst/>
+          </a:prstGeom>
+          <a:noFill/>
+          <a:ln w="12700">
+            <a:solidFill>
+              <a:prstClr val="black"/>
+            </a:solidFill>
+          </a:ln>
+        </p:spPr>
+        <p:txBody>
+          <a:bodyPr vert="horz" lIns="91440" tIns="45720" rIns="91440" bIns="45720" rtlCol="0" anchor="ctr"/>
+          <a:lstStyle/>
+          <a:p>
+            <a:endParaRPr lang="en-US"/>
+          </a:p>
+        </p:txBody>
+      </p:sp>
+      <p:sp>
+        <p:nvSpPr>
+          <p:cNvPr id="5" name="Notes Placeholder 4"/>
+          <p:cNvSpPr>
+            <a:spLocks noGrp="1"/>
+          </p:cNvSpPr>
+          <p:nvPr>
+            <p:ph type="body" sz="quarter" idx="3"/>
+          </p:nvPr>
+        </p:nvSpPr>
+        <p:spPr>
+          <a:xfrm>
+            <a:off x="685800" y="4343400"/>
+            <a:ext cx="5486400" cy="4114800"/>
+          </a:xfrm>
+          <a:prstGeom prst="rect">
+            <a:avLst/>
+          </a:prstGeom>
+        </p:spPr>
+        <p:txBody>
+          <a:bodyPr vert="horz" lIns="91440" tIns="45720" rIns="91440" bIns="45720" rtlCol="0"/>
+          <a:lstStyle/>
+          <a:p>
+            <a:pPr lvl="0"/>
+            <a:r>
+              <a:rPr lang="en-US" smtClean="0"/>
+              <a:t>Click to edit Master text styles</a:t>
+            </a:r>
+          </a:p>
+          <a:p>
+            <a:pPr lvl="1"/>
+            <a:r>
+              <a:rPr lang="en-US" smtClean="0"/>
+              <a:t>Second level</a:t>
+            </a:r>
+          </a:p>
+          <a:p>
+            <a:pPr lvl="2"/>
+            <a:r>
+              <a:rPr lang="en-US" smtClean="0"/>
+              <a:t>Third level</a:t>
+            </a:r>
+          </a:p>
+          <a:p>
+            <a:pPr lvl="3"/>
+            <a:r>
+              <a:rPr lang="en-US" smtClean="0"/>
+              <a:t>Fourth level</a:t>
+            </a:r>
+          </a:p>
+          <a:p>
+            <a:pPr lvl="4"/>
+            <a:r>
+              <a:rPr lang="en-US" smtClean="0"/>
+              <a:t>Fifth level</a:t>
+            </a:r>
+            <a:endParaRPr lang="en-US"/>
+          </a:p>
+        </p:txBody>
+      </p:sp>
+      <p:sp>
+        <p:nvSpPr>
+          <p:cNvPr id="6" name="Footer Placeholder 5"/>
+          <p:cNvSpPr>
+            <a:spLocks noGrp="1"/>
+          </p:cNvSpPr>
+          <p:nvPr>
+            <p:ph type="ftr" sz="quarter" idx="4"/>
+          </p:nvPr>
+        </p:nvSpPr>
+        <p:spPr>
+          <a:xfrm>
+            <a:off x="0" y="8685213"/>
+            <a:ext cx="2971800" cy="457200"/>
+          </a:xfrm>
+          <a:prstGeom prst="rect">
+            <a:avLst/>
+          </a:prstGeom>
+        </p:spPr>
+        <p:txBody>
+          <a:bodyPr vert="horz" lIns="91440" tIns="45720" rIns="91440" bIns="45720" rtlCol="0" anchor="b"/>
+          <a:lstStyle>
+            <a:lvl1pPr algn="l">
+              <a:defRPr sz="1200"/>
+            </a:lvl1pPr>
+          </a:lstStyle>
+          <a:p>
+            <a:endParaRPr lang="en-US"/>
+          </a:p>
+        </p:txBody>
+      </p:sp>
+      <p:sp>
+        <p:nvSpPr>
+          <p:cNvPr id="7" name="Slide Number Placeholder 6"/>
+          <p:cNvSpPr>
+            <a:spLocks noGrp="1"/>
+          </p:cNvSpPr>
+          <p:nvPr>
+            <p:ph type="sldNum" sz="quarter" idx="5"/>
+          </p:nvPr>
+        </p:nvSpPr>
+        <p:spPr>
+          <a:xfrm>
+            <a:off x="3884613" y="8685213"/>
+            <a:ext cx="2971800" cy="457200"/>
+          </a:xfrm>
+          <a:prstGeom prst="rect">
+            <a:avLst/>
+          </a:prstGeom>
+        </p:spPr>
+        <p:txBody>
+          <a:bodyPr vert="horz" lIns="91440" tIns="45720" rIns="91440" bIns="45720" rtlCol="0" anchor="b"/>
+          <a:lstStyle>
+            <a:lvl1pPr algn="r">
+              <a:defRPr sz="1200"/>
+            </a:lvl1pPr>
+          </a:lstStyle>
+          <a:p>
+            <a:fld id="{BB5E49A5-4136-284D-997B-48E1D791AD67}" type="slidenum">
+              <a:rPr lang="en-US" smtClean="0"/>
+              <a:t>‹#›</a:t>
+            </a:fld>
+            <a:endParaRPr lang="en-US"/>
+          </a:p>
+        </p:txBody>
+      </p:sp>
+    </p:spTree>
+    <p:extLst>
+      <p:ext uri="{BB962C8B-B14F-4D97-AF65-F5344CB8AC3E}">
+        <p14:creationId xmlns:p14="http://schemas.microsoft.com/office/powerpoint/2010/main" val="2623252185"/>
+      </p:ext>
+    </p:extLst>
+  </p:cSld>
+  <p:clrMap bg1="lt1" tx1="dk1" bg2="lt2" tx2="dk2" accent1="accent1" accent2="accent2" accent3="accent3" accent4="accent4" accent5="accent5" accent6="accent6" hlink="hlink" folHlink="folHlink"/>
+  <p:notesStyle>
+    <a:lvl1pPr marL="0" algn="l" defTabSz="457200" rtl="0" eaLnBrk="1" latinLnBrk="0" hangingPunct="1">
+      <a:defRPr sz="1200" kern="1200">
+        <a:solidFill>
+          <a:schemeClr val="tx1"/>
+        </a:solidFill>
+        <a:latin typeface="+mn-lt"/>
+        <a:ea typeface="+mn-ea"/>
+        <a:cs typeface="+mn-cs"/>
+      </a:defRPr>
+    </a:lvl1pPr>
+    <a:lvl2pPr marL="457200" algn="l" defTabSz="457200" rtl="0" eaLnBrk="1" latinLnBrk="0" hangingPunct="1">
+      <a:defRPr sz="1200" kern="1200">
+        <a:solidFill>
+          <a:schemeClr val="tx1"/>
+        </a:solidFill>
+        <a:latin typeface="+mn-lt"/>
+        <a:ea typeface="+mn-ea"/>
+        <a:cs typeface="+mn-cs"/>
+      </a:defRPr>
+    </a:lvl2pPr>
+    <a:lvl3pPr marL="914400" algn="l" defTabSz="457200" rtl="0" eaLnBrk="1" latinLnBrk="0" hangingPunct="1">
+      <a:defRPr sz="1200" kern="1200">
+        <a:solidFill>
+          <a:schemeClr val="tx1"/>
+        </a:solidFill>
+        <a:latin typeface="+mn-lt"/>
+        <a:ea typeface="+mn-ea"/>
+        <a:cs typeface="+mn-cs"/>
+      </a:defRPr>
+    </a:lvl3pPr>
+    <a:lvl4pPr marL="1371600" algn="l" defTabSz="457200" rtl="0" eaLnBrk="1" latinLnBrk="0" hangingPunct="1">
+      <a:defRPr sz="1200" kern="1200">
+        <a:solidFill>
+          <a:schemeClr val="tx1"/>
+        </a:solidFill>
+        <a:latin typeface="+mn-lt"/>
+        <a:ea typeface="+mn-ea"/>
+        <a:cs typeface="+mn-cs"/>
+      </a:defRPr>
+    </a:lvl4pPr>
+    <a:lvl5pPr marL="1828800" algn="l" defTabSz="457200" rtl="0" eaLnBrk="1" latinLnBrk="0" hangingPunct="1">
+      <a:defRPr sz="1200" kern="1200">
+        <a:solidFill>
+          <a:schemeClr val="tx1"/>
+        </a:solidFill>
+        <a:latin typeface="+mn-lt"/>
+        <a:ea typeface="+mn-ea"/>
+        <a:cs typeface="+mn-cs"/>
+      </a:defRPr>
+    </a:lvl5pPr>
+    <a:lvl6pPr marL="2286000" algn="l" defTabSz="457200" rtl="0" eaLnBrk="1" latinLnBrk="0" hangingPunct="1">
+      <a:defRPr sz="1200" kern="1200">
+        <a:solidFill>
+          <a:schemeClr val="tx1"/>
+        </a:solidFill>
+        <a:latin typeface="+mn-lt"/>
+        <a:ea typeface="+mn-ea"/>
+        <a:cs typeface="+mn-cs"/>
+      </a:defRPr>
+    </a:lvl6pPr>
+    <a:lvl7pPr marL="2743200" algn="l" defTabSz="457200" rtl="0" eaLnBrk="1" latinLnBrk="0" hangingPunct="1">
+      <a:defRPr sz="1200" kern="1200">
+        <a:solidFill>
+          <a:schemeClr val="tx1"/>
+        </a:solidFill>
+        <a:latin typeface="+mn-lt"/>
+        <a:ea typeface="+mn-ea"/>
+        <a:cs typeface="+mn-cs"/>
+      </a:defRPr>
+    </a:lvl7pPr>
+    <a:lvl8pPr marL="3200400" algn="l" defTabSz="457200" rtl="0" eaLnBrk="1" latinLnBrk="0" hangingPunct="1">
+      <a:defRPr sz="1200" kern="1200">
+        <a:solidFill>
+          <a:schemeClr val="tx1"/>
+        </a:solidFill>
+        <a:latin typeface="+mn-lt"/>
+        <a:ea typeface="+mn-ea"/>
+        <a:cs typeface="+mn-cs"/>
+      </a:defRPr>
+    </a:lvl8pPr>
+    <a:lvl9pPr marL="3657600" algn="l" defTabSz="457200" rtl="0" eaLnBrk="1" latinLnBrk="0" hangingPunct="1">
+      <a:defRPr sz="1200" kern="1200">
+        <a:solidFill>
+          <a:schemeClr val="tx1"/>
+        </a:solidFill>
+        <a:latin typeface="+mn-lt"/>
+        <a:ea typeface="+mn-ea"/>
+        <a:cs typeface="+mn-cs"/>
+      </a:defRPr>
+    </a:lvl9pPr>
+  </p:notesStyle>
+</p:notesMaster>
+</file>
+
+<file path=ppt/notesSlides/notesSlide1.xml><?xml version="1.0" encoding="utf-8"?>
+<p:notes xmlns:a="http://schemas.openxmlformats.org/drawingml/2006/main" xmlns:p="http://schemas.openxmlformats.org/presentationml/2006/main" xmlns:r="http://schemas.openxmlformats.org/officeDocument/2006/relationships">
+  <p:cSld>
+    <p:spTree>
+      <p:nvGrpSpPr>
+        <p:cNvPr id="1" name=""/>
+        <p:cNvGrpSpPr/>
+        <p:nvPr/>
+      </p:nvGrpSpPr>
+      <p:grpSpPr>
+        <a:xfrm>
+          <a:off x="0" y="0"/>
+          <a:ext cx="0" cy="0"/>
+          <a:chOff x="0" y="0"/>
+          <a:chExt cx="0" cy="0"/>
+        </a:xfrm>
+      </p:grpSpPr>
+      <p:sp>
+        <p:nvSpPr>
+          <p:cNvPr id="2" name="Slide Image Placeholder 1"/>
+          <p:cNvSpPr>
+            <a:spLocks noGrp="1"/>
+          </p:cNvSpPr>
+          <p:nvPr>
+            <p:ph type="sldImg" idx="2"/>
+          </p:nvPr>
+        </p:nvSpPr>
+        <p:spPr/>
+      </p:sp>
+      <p:sp>
+        <p:nvSpPr>
+          <p:cNvPr id="3" name="Notes Placeholder 2"/>
+          <p:cNvSpPr>
+            <a:spLocks noGrp="1"/>
+          </p:cNvSpPr>
+          <p:nvPr>
+            <p:ph type="body" idx="3" sz="quarter"/>
+          </p:nvPr>
+        </p:nvSpPr>
+        <p:spPr/>
+        <p:txBody>
+          <a:bodyPr/>
+          <a:lstStyle/>
+          <a:p>
+            <a:r>
+              <a:t>Los tres modelos de servicio se distinguen exactamente por donde se traza la linea que separa lo que administra el proveedor de lo que administra el cliente.</a:t>
+            </a:r>
+          </a:p>
+        </p:txBody>
+      </p:sp>
+      <p:sp>
+        <p:nvSpPr>
+          <p:cNvPr id="4" name="Slide Number Placeholder 3"/>
+          <p:cNvSpPr>
+            <a:spLocks noGrp="1"/>
+          </p:cNvSpPr>
+          <p:nvPr>
+            <p:ph type="sldNum" idx="5" sz="quarter"/>
+          </p:nvPr>
+        </p:nvSpPr>
+        <p:spPr/>
+      </p:sp>
+    </p:spTree>
+  </p:cSld>
+  <p:clrMapOvr>
+    <a:masterClrMapping/>
+  </p:clrMapOvr>
+</p:notes>
+</file>
+
+<file path=ppt/notesSlides/notesSlide2.xml><?xml version="1.0" encoding="utf-8"?>
+<p:notes xmlns:a="http://schemas.openxmlformats.org/drawingml/2006/main" xmlns:p="http://schemas.openxmlformats.org/presentationml/2006/main" xmlns:r="http://schemas.openxmlformats.org/officeDocument/2006/relationships">
+  <p:cSld>
+    <p:spTree>
+      <p:nvGrpSpPr>
+        <p:cNvPr id="1" name=""/>
+        <p:cNvGrpSpPr/>
+        <p:nvPr/>
+      </p:nvGrpSpPr>
+      <p:grpSpPr>
+        <a:xfrm>
+          <a:off x="0" y="0"/>
+          <a:ext cx="0" cy="0"/>
+          <a:chOff x="0" y="0"/>
+          <a:chExt cx="0" cy="0"/>
+        </a:xfrm>
+      </p:grpSpPr>
+      <p:sp>
+        <p:nvSpPr>
+          <p:cNvPr id="2" name="Slide Image Placeholder 1"/>
+          <p:cNvSpPr>
+            <a:spLocks noGrp="1"/>
+          </p:cNvSpPr>
+          <p:nvPr>
+            <p:ph type="sldImg" idx="2"/>
+          </p:nvPr>
+        </p:nvSpPr>
+        <p:spPr/>
+      </p:sp>
+      <p:sp>
+        <p:nvSpPr>
+          <p:cNvPr id="3" name="Notes Placeholder 2"/>
+          <p:cNvSpPr>
+            <a:spLocks noGrp="1"/>
+          </p:cNvSpPr>
+          <p:nvPr>
+            <p:ph type="body" idx="3" sz="quarter"/>
+          </p:nvPr>
+        </p:nvSpPr>
+        <p:spPr/>
+        <p:txBody>
+          <a:bodyPr/>
+          <a:lstStyle/>
+          <a:p>
+            <a:r>
+              <a:t>Lo que gana es control total, porque puede instalar cualquier version de cualquier cosa, abrir los puertos que quiera y afinar el sistema.</a:t>
+            </a:r>
+          </a:p>
+          <a:p/>
+          <a:p>
+            <a:r>
+              <a:t>Lo que paga es trabajo operativo permanente, que en la practica se mide en horas de persona por semana dedicadas a aplicar parches de seguridad, rotar certificados y vigilar el espacio en disco.</a:t>
+            </a:r>
+          </a:p>
+          <a:p/>
+          <a:p>
+            <a:r>
+              <a:t>Para CloudLite Turnos, el ejemplo de la barberia con agendamiento de citas, elegir IaaS significaria que el estudiante se compromete a administrar el sistema operativo donde corren la API y la base de datos; en un curso de doce semanas, y trabajando solo o con dos companeros, eso consume justamente el tiempo que deberia dedicarse a disenar la arquitectura y a sustentarla.</a:t>
+            </a:r>
+          </a:p>
+        </p:txBody>
+      </p:sp>
+      <p:sp>
+        <p:nvSpPr>
+          <p:cNvPr id="4" name="Slide Number Placeholder 3"/>
+          <p:cNvSpPr>
+            <a:spLocks noGrp="1"/>
+          </p:cNvSpPr>
+          <p:nvPr>
+            <p:ph type="sldNum" idx="5" sz="quarter"/>
+          </p:nvPr>
+        </p:nvSpPr>
+        <p:spPr/>
+      </p:sp>
+    </p:spTree>
+  </p:cSld>
+  <p:clrMapOvr>
+    <a:masterClrMapping/>
+  </p:clrMapOvr>
+</p:notes>
+</file>
+
+<file path=ppt/notesSlides/notesSlide3.xml><?xml version="1.0" encoding="utf-8"?>
+<p:notes xmlns:a="http://schemas.openxmlformats.org/drawingml/2006/main" xmlns:p="http://schemas.openxmlformats.org/presentationml/2006/main" xmlns:r="http://schemas.openxmlformats.org/officeDocument/2006/relationships">
+  <p:cSld>
+    <p:spTree>
+      <p:nvGrpSpPr>
+        <p:cNvPr id="1" name=""/>
+        <p:cNvGrpSpPr/>
+        <p:nvPr/>
+      </p:nvGrpSpPr>
+      <p:grpSpPr>
+        <a:xfrm>
+          <a:off x="0" y="0"/>
+          <a:ext cx="0" cy="0"/>
+          <a:chOff x="0" y="0"/>
+          <a:chExt cx="0" cy="0"/>
+        </a:xfrm>
+      </p:grpSpPr>
+      <p:sp>
+        <p:nvSpPr>
+          <p:cNvPr id="2" name="Slide Image Placeholder 1"/>
+          <p:cNvSpPr>
+            <a:spLocks noGrp="1"/>
+          </p:cNvSpPr>
+          <p:nvPr>
+            <p:ph type="sldImg" idx="2"/>
+          </p:nvPr>
+        </p:nvSpPr>
+        <p:spPr/>
+      </p:sp>
+      <p:sp>
+        <p:nvSpPr>
+          <p:cNvPr id="3" name="Notes Placeholder 2"/>
+          <p:cNvSpPr>
+            <a:spLocks noGrp="1"/>
+          </p:cNvSpPr>
+          <p:nvPr>
+            <p:ph type="body" idx="3" sz="quarter"/>
+          </p:nvPr>
+        </p:nvSpPr>
+        <p:spPr/>
+        <p:txBody>
+          <a:bodyPr/>
+          <a:lstStyle/>
+          <a:p>
+            <a:r>
+              <a:t>De ahi sale el trade-off central, que se escribe como regla practica: a mas abstraccion, menos control y menos trabajo operativo.</a:t>
+            </a:r>
+          </a:p>
+        </p:txBody>
+      </p:sp>
+      <p:sp>
+        <p:nvSpPr>
+          <p:cNvPr id="4" name="Slide Number Placeholder 3"/>
+          <p:cNvSpPr>
+            <a:spLocks noGrp="1"/>
+          </p:cNvSpPr>
+          <p:nvPr>
+            <p:ph type="sldNum" idx="5" sz="quarter"/>
+          </p:nvPr>
+        </p:nvSpPr>
+        <p:spPr/>
+      </p:sp>
+    </p:spTree>
+  </p:cSld>
+  <p:clrMapOvr>
+    <a:masterClrMapping/>
+  </p:clrMapOvr>
+</p:notes>
+</file>
+
+<file path=ppt/notesSlides/notesSlide4.xml><?xml version="1.0" encoding="utf-8"?>
+<p:notes xmlns:a="http://schemas.openxmlformats.org/drawingml/2006/main" xmlns:p="http://schemas.openxmlformats.org/presentationml/2006/main" xmlns:r="http://schemas.openxmlformats.org/officeDocument/2006/relationships">
+  <p:cSld>
+    <p:spTree>
+      <p:nvGrpSpPr>
+        <p:cNvPr id="1" name=""/>
+        <p:cNvGrpSpPr/>
+        <p:nvPr/>
+      </p:nvGrpSpPr>
+      <p:grpSpPr>
+        <a:xfrm>
+          <a:off x="0" y="0"/>
+          <a:ext cx="0" cy="0"/>
+          <a:chOff x="0" y="0"/>
+          <a:chExt cx="0" cy="0"/>
+        </a:xfrm>
+      </p:grpSpPr>
+      <p:sp>
+        <p:nvSpPr>
+          <p:cNvPr id="2" name="Slide Image Placeholder 1"/>
+          <p:cNvSpPr>
+            <a:spLocks noGrp="1"/>
+          </p:cNvSpPr>
+          <p:nvPr>
+            <p:ph type="sldImg" idx="2"/>
+          </p:nvPr>
+        </p:nvSpPr>
+        <p:spPr/>
+      </p:sp>
+      <p:sp>
+        <p:nvSpPr>
+          <p:cNvPr id="3" name="Notes Placeholder 2"/>
+          <p:cNvSpPr>
+            <a:spLocks noGrp="1"/>
+          </p:cNvSpPr>
+          <p:nvPr>
+            <p:ph type="body" idx="3" sz="quarter"/>
+          </p:nvPr>
+        </p:nvSpPr>
+        <p:spPr/>
+        <p:txBody>
+          <a:bodyPr/>
+          <a:lstStyle/>
+          <a:p>
+            <a:r>
+              <a:t>Conviene mostrar la diferencia entre contexto y analisis con el ejemplo, porque es donde se pierde la seccion 3 completa.</a:t>
+            </a:r>
+          </a:p>
+          <a:p/>
+          <a:p>
+            <a:r>
+              <a:t>Eso es contexto: son restricciones, no teoria.</a:t>
+            </a:r>
+          </a:p>
+          <a:p/>
+          <a:p>
+            <a:r>
+              <a:t>La prueba que el docente puede aplicar en voz alta mientras pasa por los grupos es una sola: si del contexto no se puede deducir por que se descarta IaaS, todavia no es contexto.</a:t>
+            </a:r>
+          </a:p>
+          <a:p/>
+          <a:p>
+            <a:r>
+              <a:t>Que identidad y correo se consuman como SaaS satelite se aclara aqui y no en la decision, porque el modelo dominante se refiere a la aplicacion propia.</a:t>
+            </a:r>
+          </a:p>
+        </p:txBody>
+      </p:sp>
+      <p:sp>
+        <p:nvSpPr>
+          <p:cNvPr id="4" name="Slide Number Placeholder 3"/>
+          <p:cNvSpPr>
+            <a:spLocks noGrp="1"/>
+          </p:cNvSpPr>
+          <p:nvPr>
+            <p:ph type="sldNum" idx="5" sz="quarter"/>
+          </p:nvPr>
+        </p:nvSpPr>
+        <p:spPr/>
+      </p:sp>
+    </p:spTree>
+  </p:cSld>
+  <p:clrMapOvr>
+    <a:masterClrMapping/>
+  </p:clrMapOvr>
+</p:notes>
+</file>
+
+<file path=ppt/notesSlides/notesSlide5.xml><?xml version="1.0" encoding="utf-8"?>
+<p:notes xmlns:a="http://schemas.openxmlformats.org/drawingml/2006/main" xmlns:p="http://schemas.openxmlformats.org/presentationml/2006/main" xmlns:r="http://schemas.openxmlformats.org/officeDocument/2006/relationships">
+  <p:cSld>
+    <p:spTree>
+      <p:nvGrpSpPr>
+        <p:cNvPr id="1" name=""/>
+        <p:cNvGrpSpPr/>
+        <p:nvPr/>
+      </p:nvGrpSpPr>
+      <p:grpSpPr>
+        <a:xfrm>
+          <a:off x="0" y="0"/>
+          <a:ext cx="0" cy="0"/>
+          <a:chOff x="0" y="0"/>
+          <a:chExt cx="0" cy="0"/>
+        </a:xfrm>
+      </p:grpSpPr>
+      <p:sp>
+        <p:nvSpPr>
+          <p:cNvPr id="2" name="Slide Image Placeholder 1"/>
+          <p:cNvSpPr>
+            <a:spLocks noGrp="1"/>
+          </p:cNvSpPr>
+          <p:nvPr>
+            <p:ph type="sldImg" idx="2"/>
+          </p:nvPr>
+        </p:nvSpPr>
+        <p:spPr/>
+      </p:sp>
+      <p:sp>
+        <p:nvSpPr>
+          <p:cNvPr id="3" name="Notes Placeholder 2"/>
+          <p:cNvSpPr>
+            <a:spLocks noGrp="1"/>
+          </p:cNvSpPr>
+          <p:nvPr>
+            <p:ph type="body" idx="3" sz="quarter"/>
+          </p:nvPr>
+        </p:nvSpPr>
+        <p:spPr/>
+        <p:txBody>
+          <a:bodyPr/>
+          <a:lstStyle/>
+          <a:p>
+            <a:r>
+              <a:t>Tres preguntas salen en voz alta en esta clase casi sin falta y conviene tener la respuesta lista, porque las tres se contestan en treinta segundos y desbloquean el taller.</a:t>
+            </a:r>
+          </a:p>
+        </p:txBody>
+      </p:sp>
+      <p:sp>
+        <p:nvSpPr>
+          <p:cNvPr id="4" name="Slide Number Placeholder 3"/>
+          <p:cNvSpPr>
+            <a:spLocks noGrp="1"/>
+          </p:cNvSpPr>
+          <p:nvPr>
+            <p:ph type="sldNum" idx="5" sz="quarter"/>
+          </p:nvPr>
+        </p:nvSpPr>
+        <p:spPr/>
+      </p:sp>
+    </p:spTree>
+  </p:cSld>
+  <p:clrMapOvr>
+    <a:masterClrMapping/>
+  </p:clrMapOvr>
+</p:notes>
 </file>
 
 <file path=ppt/slideLayouts/slideLayout1.xml><?xml version="1.0" encoding="utf-8"?>
@@ -3351,13 +4077,22 @@
               </a:spcAft>
             </a:pPr>
             <a:r>
+              <a:rPr sz="1500" b="0" i="0">
+                <a:solidFill>
+                  <a:srgbClr val="333333"/>
+                </a:solidFill>
+                <a:latin typeface="Calibri"/>
+              </a:rPr>
+              <a:t>Bloque </a:t>
+            </a:r>
+            <a:r>
               <a:rPr sz="1500" b="1" i="0">
                 <a:solidFill>
                   <a:srgbClr val="333333"/>
                 </a:solidFill>
                 <a:latin typeface="Calibri"/>
               </a:rPr>
-              <a:t>Hoy avanzamos el PI en:</a:t>
+              <a:t>120 min</a:t>
             </a:r>
             <a:r>
               <a:rPr sz="1500" b="0" i="0">
@@ -3366,7 +4101,25 @@
                 </a:solidFill>
                 <a:latin typeface="Calibri"/>
               </a:rPr>
-              <a:t> Decidir modelo dominante (IaaS/PaaS/SaaS) para CloudLite + ADR breve</a:t>
+              <a:t> · sesión </a:t>
+            </a:r>
+            <a:r>
+              <a:rPr sz="1500" b="1" i="0">
+                <a:solidFill>
+                  <a:srgbClr val="333333"/>
+                </a:solidFill>
+                <a:latin typeface="Calibri"/>
+              </a:rPr>
+              <a:t>virtual síncrona</a:t>
+            </a:r>
+            <a:r>
+              <a:rPr sz="1500" b="0" i="0">
+                <a:solidFill>
+                  <a:srgbClr val="333333"/>
+                </a:solidFill>
+                <a:latin typeface="Calibri"/>
+              </a:rPr>
+              <a:t> por Google Meet.</a:t>
             </a:r>
           </a:p>
           <a:p>
@@ -3382,41 +4135,7 @@
                 </a:solidFill>
                 <a:latin typeface="Calibri"/>
               </a:rPr>
-              <a:t>Bloque </a:t>
-            </a:r>
-            <a:r>
-              <a:rPr sz="1500" b="1" i="0">
-                <a:solidFill>
-                  <a:srgbClr val="333333"/>
-                </a:solidFill>
-                <a:latin typeface="Calibri"/>
-              </a:rPr>
-              <a:t>120 min</a:t>
-            </a:r>
-            <a:r>
-              <a:rPr sz="1500" b="0" i="0">
-                <a:solidFill>
-                  <a:srgbClr val="333333"/>
-                </a:solidFill>
-                <a:latin typeface="Calibri"/>
-              </a:rPr>
-              <a:t> · Teoría breve · Taller PI · cierre.</a:t>
-            </a:r>
-          </a:p>
-          <a:p>
-            <a:pPr>
-              <a:spcAft>
-                <a:spcPts val="800"/>
-              </a:spcAft>
-            </a:pPr>
-            <a:r>
-              <a:rPr sz="1500" b="0" i="0">
-                <a:solidFill>
-                  <a:srgbClr val="333333"/>
-                </a:solidFill>
-                <a:latin typeface="Calibri"/>
-              </a:rPr>
-              <a:t>Herramientas gratis + navegador · sin AWS/GCP/Oracle Cloud.</a:t>
+              <a:t>Conceptos del tema, ejemplos resueltos sobre CloudLite y cierre conceptual.</a:t>
             </a:r>
           </a:p>
         </p:txBody>
@@ -6334,7 +7053,7 @@
                 </a:solidFill>
                 <a:latin typeface="Calibri"/>
               </a:rPr>
-              <a:t> Encuadre: hoy avanzamos el PI en… + entregable concreto.</a:t>
+              <a:t> Encuadre del tema y objetivos de la clase.</a:t>
             </a:r>
           </a:p>
           <a:p>
@@ -6350,7 +7069,7 @@
                 </a:solidFill>
                 <a:latin typeface="Calibri"/>
               </a:rPr>
-              <a:t>10–40</a:t>
+              <a:t>10–70</a:t>
             </a:r>
             <a:r>
               <a:rPr sz="2000" b="0" i="0">
@@ -6359,7 +7078,7 @@
                 </a:solidFill>
                 <a:latin typeface="Calibri"/>
               </a:rPr>
-              <a:t> Teoría Core breve (solo lo necesario para el taller PI).</a:t>
+              <a:t> Conceptos del tema, uno por lámina, con ejemplos sobre CloudLite.</a:t>
             </a:r>
           </a:p>
           <a:p>
@@ -6384,7 +7103,7 @@
                 </a:solidFill>
                 <a:latin typeface="Calibri"/>
               </a:rPr>
-              <a:t>40–100</a:t>
+              <a:t>70–100</a:t>
             </a:r>
             <a:r>
               <a:rPr sz="2000" b="0" i="0">
@@ -6393,7 +7112,7 @@
                 </a:solidFill>
                 <a:latin typeface="Calibri"/>
               </a:rPr>
-              <a:t> Trabajo guiado del PI (demo en vivo + avance individual).</a:t>
+              <a:t> Ejemplos resueltos y demo del docente sobre el tema.</a:t>
             </a:r>
           </a:p>
           <a:p>
@@ -6418,7 +7137,7 @@
                 </a:solidFill>
                 <a:latin typeface="Calibri"/>
               </a:rPr>
-              <a:t> Revisión de evidencias del PI.</a:t>
+              <a:t> Práctica (opcional, guía en la carpeta de la clase).</a:t>
             </a:r>
           </a:p>
           <a:p>
@@ -6443,7 +7162,7 @@
                 </a:solidFill>
                 <a:latin typeface="Calibri"/>
               </a:rPr>
-              <a:t> Cierre: criterio de éxito + plazo en la fecha que indique el docente.</a:t>
+              <a:t> Preguntas y cierre conceptual.</a:t>
             </a:r>
           </a:p>
         </p:txBody>
@@ -11048,13 +11767,13 @@
         <p:spPr>
           <a:xfrm>
             <a:off x="0" y="0"/>
-            <a:ext cx="12191695" cy="1170432"/>
+            <a:ext cx="12191695" cy="164592"/>
           </a:xfrm>
           <a:prstGeom prst="rect">
             <a:avLst/>
           </a:prstGeom>
           <a:solidFill>
-            <a:srgbClr val="095292"/>
+            <a:srgbClr val="269CCB"/>
           </a:solidFill>
           <a:ln>
             <a:noFill/>
@@ -11082,251 +11801,9 @@
           </a:p>
         </p:txBody>
       </p:sp>
-      <p:sp>
-        <p:nvSpPr>
-          <p:cNvPr id="3" name="Rectangle 2"/>
-          <p:cNvSpPr/>
-          <p:nvPr/>
-        </p:nvSpPr>
-        <p:spPr>
-          <a:xfrm>
-            <a:off x="0" y="1170432"/>
-            <a:ext cx="12191695" cy="41148"/>
-          </a:xfrm>
-          <a:prstGeom prst="rect">
-            <a:avLst/>
-          </a:prstGeom>
-          <a:solidFill>
-            <a:srgbClr val="FFD000"/>
-          </a:solidFill>
-          <a:ln>
-            <a:noFill/>
-          </a:ln>
-        </p:spPr>
-        <p:style>
-          <a:lnRef idx="1">
-            <a:schemeClr val="accent1"/>
-          </a:lnRef>
-          <a:fillRef idx="3">
-            <a:schemeClr val="accent1"/>
-          </a:fillRef>
-          <a:effectRef idx="2">
-            <a:schemeClr val="accent1"/>
-          </a:effectRef>
-          <a:fontRef idx="minor">
-            <a:schemeClr val="lt1"/>
-          </a:fontRef>
-        </p:style>
-        <p:txBody>
-          <a:bodyPr rtlCol="0" anchor="ctr"/>
-          <a:lstStyle/>
-          <a:p>
-            <a:pPr algn="ctr"/>
-          </a:p>
-        </p:txBody>
-      </p:sp>
-      <p:sp>
-        <p:nvSpPr>
-          <p:cNvPr id="4" name="TextBox 3"/>
-          <p:cNvSpPr txBox="1"/>
-          <p:nvPr/>
-        </p:nvSpPr>
-        <p:spPr>
-          <a:xfrm>
-            <a:off x="457200" y="164592"/>
-            <a:ext cx="11277295" cy="384048"/>
-          </a:xfrm>
-          <a:prstGeom prst="rect">
-            <a:avLst/>
-          </a:prstGeom>
-          <a:noFill/>
-        </p:spPr>
-        <p:txBody>
-          <a:bodyPr wrap="square">
-            <a:spAutoFit/>
-          </a:bodyPr>
-          <a:lstStyle/>
-          <a:p>
-            <a:r>
-              <a:rPr sz="2600" b="1" i="0">
-                <a:solidFill>
-                  <a:srgbClr val="FFFFFF"/>
-                </a:solidFill>
-                <a:latin typeface="Calibri"/>
-              </a:rPr>
-              <a:t>Herramientas de hoy</a:t>
-            </a:r>
-          </a:p>
-        </p:txBody>
-      </p:sp>
-      <p:sp>
-        <p:nvSpPr>
-          <p:cNvPr id="5" name="TextBox 4"/>
-          <p:cNvSpPr txBox="1"/>
-          <p:nvPr/>
-        </p:nvSpPr>
-        <p:spPr>
-          <a:xfrm>
-            <a:off x="457200" y="566928"/>
-            <a:ext cx="11277295" cy="411480"/>
-          </a:xfrm>
-          <a:prstGeom prst="rect">
-            <a:avLst/>
-          </a:prstGeom>
-          <a:noFill/>
-        </p:spPr>
-        <p:txBody>
-          <a:bodyPr wrap="square">
-            <a:spAutoFit/>
-          </a:bodyPr>
-          <a:lstStyle/>
-          <a:p>
-            <a:r>
-              <a:rPr sz="1400" b="0" i="0">
-                <a:solidFill>
-                  <a:srgbClr val="B8D8EE"/>
-                </a:solidFill>
-                <a:latin typeface="Calibri"/>
-              </a:rPr>
-              <a:t>Gratis · navegador o free tier · sin cuenta de pago</a:t>
-            </a:r>
-          </a:p>
-        </p:txBody>
-      </p:sp>
-      <p:sp>
-        <p:nvSpPr>
-          <p:cNvPr id="6" name="Rounded Rectangle 5"/>
-          <p:cNvSpPr/>
-          <p:nvPr/>
-        </p:nvSpPr>
-        <p:spPr>
-          <a:xfrm>
-            <a:off x="457200" y="1591056"/>
-            <a:ext cx="3624986" cy="2331720"/>
-          </a:xfrm>
-          <a:prstGeom prst="roundRect">
-            <a:avLst>
-              <a:gd name="adj" fmla="val 12000"/>
-            </a:avLst>
-          </a:prstGeom>
-          <a:solidFill>
-            <a:srgbClr val="F2F2F2"/>
-          </a:solidFill>
-          <a:ln>
-            <a:noFill/>
-          </a:ln>
-        </p:spPr>
-        <p:style>
-          <a:lnRef idx="1">
-            <a:schemeClr val="accent1"/>
-          </a:lnRef>
-          <a:fillRef idx="3">
-            <a:schemeClr val="accent1"/>
-          </a:fillRef>
-          <a:effectRef idx="2">
-            <a:schemeClr val="accent1"/>
-          </a:effectRef>
-          <a:fontRef idx="minor">
-            <a:schemeClr val="lt1"/>
-          </a:fontRef>
-        </p:style>
-        <p:txBody>
-          <a:bodyPr rtlCol="0" anchor="ctr"/>
-          <a:lstStyle/>
-          <a:p>
-            <a:pPr algn="ctr"/>
-          </a:p>
-        </p:txBody>
-      </p:sp>
-      <p:sp>
-        <p:nvSpPr>
-          <p:cNvPr id="7" name="Rectangle 6"/>
-          <p:cNvSpPr/>
-          <p:nvPr/>
-        </p:nvSpPr>
-        <p:spPr>
-          <a:xfrm>
-            <a:off x="457200" y="1591056"/>
-            <a:ext cx="3624986" cy="64008"/>
-          </a:xfrm>
-          <a:prstGeom prst="rect">
-            <a:avLst/>
-          </a:prstGeom>
-          <a:solidFill>
-            <a:srgbClr val="095292"/>
-          </a:solidFill>
-          <a:ln>
-            <a:noFill/>
-          </a:ln>
-        </p:spPr>
-        <p:style>
-          <a:lnRef idx="1">
-            <a:schemeClr val="accent1"/>
-          </a:lnRef>
-          <a:fillRef idx="3">
-            <a:schemeClr val="accent1"/>
-          </a:fillRef>
-          <a:effectRef idx="2">
-            <a:schemeClr val="accent1"/>
-          </a:effectRef>
-          <a:fontRef idx="minor">
-            <a:schemeClr val="lt1"/>
-          </a:fontRef>
-        </p:style>
-        <p:txBody>
-          <a:bodyPr rtlCol="0" anchor="ctr"/>
-          <a:lstStyle/>
-          <a:p>
-            <a:pPr algn="ctr"/>
-          </a:p>
-        </p:txBody>
-      </p:sp>
-      <p:sp>
-        <p:nvSpPr>
-          <p:cNvPr id="8" name="Rectangle 7"/>
-          <p:cNvSpPr/>
-          <p:nvPr/>
-        </p:nvSpPr>
-        <p:spPr>
-          <a:xfrm>
-            <a:off x="457200" y="1655064"/>
-            <a:ext cx="3624986" cy="27432"/>
-          </a:xfrm>
-          <a:prstGeom prst="rect">
-            <a:avLst/>
-          </a:prstGeom>
-          <a:solidFill>
-            <a:srgbClr val="FFD000"/>
-          </a:solidFill>
-          <a:ln>
-            <a:noFill/>
-          </a:ln>
-        </p:spPr>
-        <p:style>
-          <a:lnRef idx="1">
-            <a:schemeClr val="accent1"/>
-          </a:lnRef>
-          <a:fillRef idx="3">
-            <a:schemeClr val="accent1"/>
-          </a:fillRef>
-          <a:effectRef idx="2">
-            <a:schemeClr val="accent1"/>
-          </a:effectRef>
-          <a:fontRef idx="minor">
-            <a:schemeClr val="lt1"/>
-          </a:fontRef>
-        </p:style>
-        <p:txBody>
-          <a:bodyPr rtlCol="0" anchor="ctr"/>
-          <a:lstStyle/>
-          <a:p>
-            <a:pPr algn="ctr"/>
-          </a:p>
-        </p:txBody>
-      </p:sp>
       <p:pic>
         <p:nvPicPr>
-          <p:cNvPr id="9" name="Picture 8" descr="google_docs.png"/>
+          <p:cNvPr id="3" name="Picture 2" descr="logo_uniajc_color.png"/>
           <p:cNvPicPr>
             <a:picLocks noChangeAspect="1"/>
           </p:cNvPicPr>
@@ -11340,618 +11817,14 @@
         </p:blipFill>
         <p:spPr>
           <a:xfrm>
-            <a:off x="1643329" y="1847087"/>
-            <a:ext cx="1252728" cy="1252728"/>
+            <a:off x="10271455" y="5998464"/>
+            <a:ext cx="1463040" cy="643233"/>
           </a:xfrm>
           <a:prstGeom prst="rect">
             <a:avLst/>
           </a:prstGeom>
         </p:spPr>
       </p:pic>
-      <p:sp>
-        <p:nvSpPr>
-          <p:cNvPr id="10" name="TextBox 9"/>
-          <p:cNvSpPr txBox="1"/>
-          <p:nvPr/>
-        </p:nvSpPr>
-        <p:spPr>
-          <a:xfrm>
-            <a:off x="530352" y="3191256"/>
-            <a:ext cx="3478682" cy="621792"/>
-          </a:xfrm>
-          <a:prstGeom prst="rect">
-            <a:avLst/>
-          </a:prstGeom>
-          <a:noFill/>
-        </p:spPr>
-        <p:txBody>
-          <a:bodyPr wrap="square" anchor="t"/>
-          <a:lstStyle/>
-          <a:p>
-            <a:pPr algn="ctr"/>
-            <a:r>
-              <a:rPr sz="1300" b="1" i="0">
-                <a:solidFill>
-                  <a:srgbClr val="095292"/>
-                </a:solidFill>
-                <a:latin typeface="Calibri"/>
-              </a:rPr>
-              <a:t>Google Docs</a:t>
-            </a:r>
-          </a:p>
-          <a:p>
-            <a:pPr algn="ctr">
-              <a:spcBef>
-                <a:spcPts val="200"/>
-              </a:spcBef>
-            </a:pPr>
-            <a:r>
-              <a:rPr sz="1000" b="0" i="0">
-                <a:solidFill>
-                  <a:srgbClr val="666666"/>
-                </a:solidFill>
-                <a:latin typeface="Calibri"/>
-              </a:rPr>
-              <a:t>ADR-001</a:t>
-            </a:r>
-          </a:p>
-        </p:txBody>
-      </p:sp>
-      <p:sp>
-        <p:nvSpPr>
-          <p:cNvPr id="11" name="Rounded Rectangle 10"/>
-          <p:cNvSpPr/>
-          <p:nvPr/>
-        </p:nvSpPr>
-        <p:spPr>
-          <a:xfrm>
-            <a:off x="4283354" y="1591056"/>
-            <a:ext cx="3624986" cy="2331720"/>
-          </a:xfrm>
-          <a:prstGeom prst="roundRect">
-            <a:avLst>
-              <a:gd name="adj" fmla="val 12000"/>
-            </a:avLst>
-          </a:prstGeom>
-          <a:solidFill>
-            <a:srgbClr val="F2F2F2"/>
-          </a:solidFill>
-          <a:ln>
-            <a:noFill/>
-          </a:ln>
-        </p:spPr>
-        <p:style>
-          <a:lnRef idx="1">
-            <a:schemeClr val="accent1"/>
-          </a:lnRef>
-          <a:fillRef idx="3">
-            <a:schemeClr val="accent1"/>
-          </a:fillRef>
-          <a:effectRef idx="2">
-            <a:schemeClr val="accent1"/>
-          </a:effectRef>
-          <a:fontRef idx="minor">
-            <a:schemeClr val="lt1"/>
-          </a:fontRef>
-        </p:style>
-        <p:txBody>
-          <a:bodyPr rtlCol="0" anchor="ctr"/>
-          <a:lstStyle/>
-          <a:p>
-            <a:pPr algn="ctr"/>
-          </a:p>
-        </p:txBody>
-      </p:sp>
-      <p:sp>
-        <p:nvSpPr>
-          <p:cNvPr id="12" name="Rectangle 11"/>
-          <p:cNvSpPr/>
-          <p:nvPr/>
-        </p:nvSpPr>
-        <p:spPr>
-          <a:xfrm>
-            <a:off x="4283354" y="1591056"/>
-            <a:ext cx="3624986" cy="64008"/>
-          </a:xfrm>
-          <a:prstGeom prst="rect">
-            <a:avLst/>
-          </a:prstGeom>
-          <a:solidFill>
-            <a:srgbClr val="095292"/>
-          </a:solidFill>
-          <a:ln>
-            <a:noFill/>
-          </a:ln>
-        </p:spPr>
-        <p:style>
-          <a:lnRef idx="1">
-            <a:schemeClr val="accent1"/>
-          </a:lnRef>
-          <a:fillRef idx="3">
-            <a:schemeClr val="accent1"/>
-          </a:fillRef>
-          <a:effectRef idx="2">
-            <a:schemeClr val="accent1"/>
-          </a:effectRef>
-          <a:fontRef idx="minor">
-            <a:schemeClr val="lt1"/>
-          </a:fontRef>
-        </p:style>
-        <p:txBody>
-          <a:bodyPr rtlCol="0" anchor="ctr"/>
-          <a:lstStyle/>
-          <a:p>
-            <a:pPr algn="ctr"/>
-          </a:p>
-        </p:txBody>
-      </p:sp>
-      <p:sp>
-        <p:nvSpPr>
-          <p:cNvPr id="13" name="Rectangle 12"/>
-          <p:cNvSpPr/>
-          <p:nvPr/>
-        </p:nvSpPr>
-        <p:spPr>
-          <a:xfrm>
-            <a:off x="4283354" y="1655064"/>
-            <a:ext cx="3624986" cy="27432"/>
-          </a:xfrm>
-          <a:prstGeom prst="rect">
-            <a:avLst/>
-          </a:prstGeom>
-          <a:solidFill>
-            <a:srgbClr val="FFD000"/>
-          </a:solidFill>
-          <a:ln>
-            <a:noFill/>
-          </a:ln>
-        </p:spPr>
-        <p:style>
-          <a:lnRef idx="1">
-            <a:schemeClr val="accent1"/>
-          </a:lnRef>
-          <a:fillRef idx="3">
-            <a:schemeClr val="accent1"/>
-          </a:fillRef>
-          <a:effectRef idx="2">
-            <a:schemeClr val="accent1"/>
-          </a:effectRef>
-          <a:fontRef idx="minor">
-            <a:schemeClr val="lt1"/>
-          </a:fontRef>
-        </p:style>
-        <p:txBody>
-          <a:bodyPr rtlCol="0" anchor="ctr"/>
-          <a:lstStyle/>
-          <a:p>
-            <a:pPr algn="ctr"/>
-          </a:p>
-        </p:txBody>
-      </p:sp>
-      <p:pic>
-        <p:nvPicPr>
-          <p:cNvPr id="14" name="Picture 13" descr="drawio.png"/>
-          <p:cNvPicPr>
-            <a:picLocks noChangeAspect="1"/>
-          </p:cNvPicPr>
-          <p:nvPr/>
-        </p:nvPicPr>
-        <p:blipFill>
-          <a:blip r:embed="rId3"/>
-          <a:stretch>
-            <a:fillRect/>
-          </a:stretch>
-        </p:blipFill>
-        <p:spPr>
-          <a:xfrm>
-            <a:off x="5469483" y="1847087"/>
-            <a:ext cx="1252728" cy="1252728"/>
-          </a:xfrm>
-          <a:prstGeom prst="rect">
-            <a:avLst/>
-          </a:prstGeom>
-        </p:spPr>
-      </p:pic>
-      <p:sp>
-        <p:nvSpPr>
-          <p:cNvPr id="15" name="TextBox 14"/>
-          <p:cNvSpPr txBox="1"/>
-          <p:nvPr/>
-        </p:nvSpPr>
-        <p:spPr>
-          <a:xfrm>
-            <a:off x="4356506" y="3191256"/>
-            <a:ext cx="3478682" cy="621792"/>
-          </a:xfrm>
-          <a:prstGeom prst="rect">
-            <a:avLst/>
-          </a:prstGeom>
-          <a:noFill/>
-        </p:spPr>
-        <p:txBody>
-          <a:bodyPr wrap="square" anchor="t"/>
-          <a:lstStyle/>
-          <a:p>
-            <a:pPr algn="ctr"/>
-            <a:r>
-              <a:rPr sz="1300" b="1" i="0">
-                <a:solidFill>
-                  <a:srgbClr val="095292"/>
-                </a:solidFill>
-                <a:latin typeface="Calibri"/>
-              </a:rPr>
-              <a:t>draw.io</a:t>
-            </a:r>
-          </a:p>
-          <a:p>
-            <a:pPr algn="ctr">
-              <a:spcBef>
-                <a:spcPts val="200"/>
-              </a:spcBef>
-            </a:pPr>
-            <a:r>
-              <a:rPr sz="1000" b="0" i="0">
-                <a:solidFill>
-                  <a:srgbClr val="666666"/>
-                </a:solidFill>
-                <a:latin typeface="Calibri"/>
-              </a:rPr>
-              <a:t>Matriz de modelos</a:t>
-            </a:r>
-          </a:p>
-        </p:txBody>
-      </p:sp>
-      <p:sp>
-        <p:nvSpPr>
-          <p:cNvPr id="16" name="Rounded Rectangle 15"/>
-          <p:cNvSpPr/>
-          <p:nvPr/>
-        </p:nvSpPr>
-        <p:spPr>
-          <a:xfrm>
-            <a:off x="8109508" y="1591056"/>
-            <a:ext cx="3624986" cy="2331720"/>
-          </a:xfrm>
-          <a:prstGeom prst="roundRect">
-            <a:avLst>
-              <a:gd name="adj" fmla="val 12000"/>
-            </a:avLst>
-          </a:prstGeom>
-          <a:solidFill>
-            <a:srgbClr val="F2F2F2"/>
-          </a:solidFill>
-          <a:ln>
-            <a:noFill/>
-          </a:ln>
-        </p:spPr>
-        <p:style>
-          <a:lnRef idx="1">
-            <a:schemeClr val="accent1"/>
-          </a:lnRef>
-          <a:fillRef idx="3">
-            <a:schemeClr val="accent1"/>
-          </a:fillRef>
-          <a:effectRef idx="2">
-            <a:schemeClr val="accent1"/>
-          </a:effectRef>
-          <a:fontRef idx="minor">
-            <a:schemeClr val="lt1"/>
-          </a:fontRef>
-        </p:style>
-        <p:txBody>
-          <a:bodyPr rtlCol="0" anchor="ctr"/>
-          <a:lstStyle/>
-          <a:p>
-            <a:pPr algn="ctr"/>
-          </a:p>
-        </p:txBody>
-      </p:sp>
-      <p:sp>
-        <p:nvSpPr>
-          <p:cNvPr id="17" name="Rectangle 16"/>
-          <p:cNvSpPr/>
-          <p:nvPr/>
-        </p:nvSpPr>
-        <p:spPr>
-          <a:xfrm>
-            <a:off x="8109508" y="1591056"/>
-            <a:ext cx="3624986" cy="64008"/>
-          </a:xfrm>
-          <a:prstGeom prst="rect">
-            <a:avLst/>
-          </a:prstGeom>
-          <a:solidFill>
-            <a:srgbClr val="095292"/>
-          </a:solidFill>
-          <a:ln>
-            <a:noFill/>
-          </a:ln>
-        </p:spPr>
-        <p:style>
-          <a:lnRef idx="1">
-            <a:schemeClr val="accent1"/>
-          </a:lnRef>
-          <a:fillRef idx="3">
-            <a:schemeClr val="accent1"/>
-          </a:fillRef>
-          <a:effectRef idx="2">
-            <a:schemeClr val="accent1"/>
-          </a:effectRef>
-          <a:fontRef idx="minor">
-            <a:schemeClr val="lt1"/>
-          </a:fontRef>
-        </p:style>
-        <p:txBody>
-          <a:bodyPr rtlCol="0" anchor="ctr"/>
-          <a:lstStyle/>
-          <a:p>
-            <a:pPr algn="ctr"/>
-          </a:p>
-        </p:txBody>
-      </p:sp>
-      <p:sp>
-        <p:nvSpPr>
-          <p:cNvPr id="18" name="Rectangle 17"/>
-          <p:cNvSpPr/>
-          <p:nvPr/>
-        </p:nvSpPr>
-        <p:spPr>
-          <a:xfrm>
-            <a:off x="8109508" y="1655064"/>
-            <a:ext cx="3624986" cy="27432"/>
-          </a:xfrm>
-          <a:prstGeom prst="rect">
-            <a:avLst/>
-          </a:prstGeom>
-          <a:solidFill>
-            <a:srgbClr val="FFD000"/>
-          </a:solidFill>
-          <a:ln>
-            <a:noFill/>
-          </a:ln>
-        </p:spPr>
-        <p:style>
-          <a:lnRef idx="1">
-            <a:schemeClr val="accent1"/>
-          </a:lnRef>
-          <a:fillRef idx="3">
-            <a:schemeClr val="accent1"/>
-          </a:fillRef>
-          <a:effectRef idx="2">
-            <a:schemeClr val="accent1"/>
-          </a:effectRef>
-          <a:fontRef idx="minor">
-            <a:schemeClr val="lt1"/>
-          </a:fontRef>
-        </p:style>
-        <p:txBody>
-          <a:bodyPr rtlCol="0" anchor="ctr"/>
-          <a:lstStyle/>
-          <a:p>
-            <a:pPr algn="ctr"/>
-          </a:p>
-        </p:txBody>
-      </p:sp>
-      <p:pic>
-        <p:nvPicPr>
-          <p:cNvPr id="19" name="Picture 18" descr="examlab.png"/>
-          <p:cNvPicPr>
-            <a:picLocks noChangeAspect="1"/>
-          </p:cNvPicPr>
-          <p:nvPr/>
-        </p:nvPicPr>
-        <p:blipFill>
-          <a:blip r:embed="rId4"/>
-          <a:stretch>
-            <a:fillRect/>
-          </a:stretch>
-        </p:blipFill>
-        <p:spPr>
-          <a:xfrm>
-            <a:off x="9295638" y="1847087"/>
-            <a:ext cx="1252728" cy="1252728"/>
-          </a:xfrm>
-          <a:prstGeom prst="rect">
-            <a:avLst/>
-          </a:prstGeom>
-        </p:spPr>
-      </p:pic>
-      <p:sp>
-        <p:nvSpPr>
-          <p:cNvPr id="20" name="TextBox 19"/>
-          <p:cNvSpPr txBox="1"/>
-          <p:nvPr/>
-        </p:nvSpPr>
-        <p:spPr>
-          <a:xfrm>
-            <a:off x="8182660" y="3191256"/>
-            <a:ext cx="3478682" cy="621792"/>
-          </a:xfrm>
-          <a:prstGeom prst="rect">
-            <a:avLst/>
-          </a:prstGeom>
-          <a:noFill/>
-        </p:spPr>
-        <p:txBody>
-          <a:bodyPr wrap="square" anchor="t"/>
-          <a:lstStyle/>
-          <a:p>
-            <a:pPr algn="ctr"/>
-            <a:r>
-              <a:rPr sz="1300" b="1" i="0">
-                <a:solidFill>
-                  <a:srgbClr val="095292"/>
-                </a:solidFill>
-                <a:latin typeface="Calibri"/>
-              </a:rPr>
-              <a:t>la plataforma del curso</a:t>
-            </a:r>
-          </a:p>
-          <a:p>
-            <a:pPr algn="ctr">
-              <a:spcBef>
-                <a:spcPts val="200"/>
-              </a:spcBef>
-            </a:pPr>
-            <a:r>
-              <a:rPr sz="1000" b="0" i="0">
-                <a:solidFill>
-                  <a:srgbClr val="666666"/>
-                </a:solidFill>
-                <a:latin typeface="Calibri"/>
-              </a:rPr>
-              <a:t>Donde se entrega</a:t>
-            </a:r>
-          </a:p>
-        </p:txBody>
-      </p:sp>
-      <p:sp>
-        <p:nvSpPr>
-          <p:cNvPr id="21" name="TextBox 20"/>
-          <p:cNvSpPr txBox="1"/>
-          <p:nvPr/>
-        </p:nvSpPr>
-        <p:spPr>
-          <a:xfrm>
-            <a:off x="11185855" y="6473952"/>
-            <a:ext cx="640080" cy="274320"/>
-          </a:xfrm>
-          <a:prstGeom prst="rect">
-            <a:avLst/>
-          </a:prstGeom>
-          <a:noFill/>
-        </p:spPr>
-        <p:txBody>
-          <a:bodyPr wrap="square">
-            <a:spAutoFit/>
-          </a:bodyPr>
-          <a:lstStyle/>
-          <a:p>
-            <a:pPr algn="r"/>
-            <a:r>
-              <a:rPr sz="1100" b="0" i="0">
-                <a:solidFill>
-                  <a:srgbClr val="666666"/>
-                </a:solidFill>
-                <a:latin typeface="Calibri"/>
-              </a:rPr>
-              <a:t>30</a:t>
-            </a:r>
-          </a:p>
-        </p:txBody>
-      </p:sp>
-    </p:spTree>
-  </p:cSld>
-  <p:clrMapOvr>
-    <a:masterClrMapping/>
-  </p:clrMapOvr>
-</p:sld>
-</file>
-
-<file path=ppt/slides/slide31.xml><?xml version="1.0" encoding="utf-8"?>
-<p:sld xmlns:a="http://schemas.openxmlformats.org/drawingml/2006/main" xmlns:p="http://schemas.openxmlformats.org/presentationml/2006/main" xmlns:r="http://schemas.openxmlformats.org/officeDocument/2006/relationships">
-  <p:cSld>
-    <p:bg>
-      <p:bgPr>
-        <a:solidFill>
-          <a:srgbClr val="FFFFFF"/>
-        </a:solidFill>
-        <a:effectLst/>
-      </p:bgPr>
-    </p:bg>
-    <p:spTree>
-      <p:nvGrpSpPr>
-        <p:cNvPr id="1" name=""/>
-        <p:cNvGrpSpPr/>
-        <p:nvPr/>
-      </p:nvGrpSpPr>
-      <p:grpSpPr/>
-      <p:sp>
-        <p:nvSpPr>
-          <p:cNvPr id="2" name="Rectangle 1"/>
-          <p:cNvSpPr/>
-          <p:nvPr/>
-        </p:nvSpPr>
-        <p:spPr>
-          <a:xfrm>
-            <a:off x="0" y="0"/>
-            <a:ext cx="12191695" cy="960120"/>
-          </a:xfrm>
-          <a:prstGeom prst="rect">
-            <a:avLst/>
-          </a:prstGeom>
-          <a:solidFill>
-            <a:srgbClr val="095292"/>
-          </a:solidFill>
-          <a:ln>
-            <a:noFill/>
-          </a:ln>
-        </p:spPr>
-        <p:style>
-          <a:lnRef idx="1">
-            <a:schemeClr val="accent1"/>
-          </a:lnRef>
-          <a:fillRef idx="3">
-            <a:schemeClr val="accent1"/>
-          </a:fillRef>
-          <a:effectRef idx="2">
-            <a:schemeClr val="accent1"/>
-          </a:effectRef>
-          <a:fontRef idx="minor">
-            <a:schemeClr val="lt1"/>
-          </a:fontRef>
-        </p:style>
-        <p:txBody>
-          <a:bodyPr rtlCol="0" anchor="ctr"/>
-          <a:lstStyle/>
-          <a:p>
-            <a:pPr algn="ctr"/>
-          </a:p>
-        </p:txBody>
-      </p:sp>
-      <p:sp>
-        <p:nvSpPr>
-          <p:cNvPr id="3" name="Rectangle 2"/>
-          <p:cNvSpPr/>
-          <p:nvPr/>
-        </p:nvSpPr>
-        <p:spPr>
-          <a:xfrm>
-            <a:off x="0" y="960120"/>
-            <a:ext cx="12191695" cy="41148"/>
-          </a:xfrm>
-          <a:prstGeom prst="rect">
-            <a:avLst/>
-          </a:prstGeom>
-          <a:solidFill>
-            <a:srgbClr val="FFD000"/>
-          </a:solidFill>
-          <a:ln>
-            <a:noFill/>
-          </a:ln>
-        </p:spPr>
-        <p:style>
-          <a:lnRef idx="1">
-            <a:schemeClr val="accent1"/>
-          </a:lnRef>
-          <a:fillRef idx="3">
-            <a:schemeClr val="accent1"/>
-          </a:fillRef>
-          <a:effectRef idx="2">
-            <a:schemeClr val="accent1"/>
-          </a:effectRef>
-          <a:fontRef idx="minor">
-            <a:schemeClr val="lt1"/>
-          </a:fontRef>
-        </p:style>
-        <p:txBody>
-          <a:bodyPr rtlCol="0" anchor="ctr"/>
-          <a:lstStyle/>
-          <a:p>
-            <a:pPr algn="ctr"/>
-          </a:p>
-        </p:txBody>
-      </p:sp>
       <p:sp>
         <p:nvSpPr>
           <p:cNvPr id="4" name="TextBox 3"/>
@@ -11960,1226 +11833,6 @@
         </p:nvSpPr>
         <p:spPr>
           <a:xfrm>
-            <a:off x="457200" y="164592"/>
-            <a:ext cx="11277295" cy="502920"/>
-          </a:xfrm>
-          <a:prstGeom prst="rect">
-            <a:avLst/>
-          </a:prstGeom>
-          <a:noFill/>
-        </p:spPr>
-        <p:txBody>
-          <a:bodyPr wrap="square">
-            <a:spAutoFit/>
-          </a:bodyPr>
-          <a:lstStyle/>
-          <a:p>
-            <a:r>
-              <a:rPr sz="2600" b="1" i="0">
-                <a:solidFill>
-                  <a:srgbClr val="FFFFFF"/>
-                </a:solidFill>
-                <a:latin typeface="Calibri"/>
-              </a:rPr>
-              <a:t>PI CloudLite — entregable de hoy</a:t>
-            </a:r>
-          </a:p>
-        </p:txBody>
-      </p:sp>
-      <p:sp>
-        <p:nvSpPr>
-          <p:cNvPr id="5" name="TextBox 4"/>
-          <p:cNvSpPr txBox="1"/>
-          <p:nvPr/>
-        </p:nvSpPr>
-        <p:spPr>
-          <a:xfrm>
-            <a:off x="457200" y="1170432"/>
-            <a:ext cx="11277295" cy="5230368"/>
-          </a:xfrm>
-          <a:prstGeom prst="rect">
-            <a:avLst/>
-          </a:prstGeom>
-          <a:noFill/>
-        </p:spPr>
-        <p:txBody>
-          <a:bodyPr wrap="square">
-            <a:spAutoFit/>
-          </a:bodyPr>
-          <a:lstStyle/>
-          <a:p>
-            <a:pPr>
-              <a:spcAft>
-                <a:spcPts val="800"/>
-              </a:spcAft>
-            </a:pPr>
-            <a:r>
-              <a:rPr sz="2000" b="0" i="0">
-                <a:solidFill>
-                  <a:srgbClr val="333333"/>
-                </a:solidFill>
-                <a:latin typeface="Calibri"/>
-              </a:rPr>
-              <a:t>–   </a:t>
-            </a:r>
-            <a:r>
-              <a:rPr sz="2000" b="1" i="0">
-                <a:solidFill>
-                  <a:srgbClr val="333333"/>
-                </a:solidFill>
-                <a:latin typeface="Calibri"/>
-              </a:rPr>
-              <a:t>Entregable:</a:t>
-            </a:r>
-            <a:r>
-              <a:rPr sz="2000" b="0" i="0">
-                <a:solidFill>
-                  <a:srgbClr val="333333"/>
-                </a:solidFill>
-                <a:latin typeface="Calibri"/>
-              </a:rPr>
-              <a:t> ADR-001: decisión de modelo de servicio + matriz de comparación aplicada al dominio</a:t>
-            </a:r>
-          </a:p>
-          <a:p>
-            <a:pPr>
-              <a:spcAft>
-                <a:spcPts val="800"/>
-              </a:spcAft>
-            </a:pPr>
-            <a:r>
-              <a:rPr sz="2000" b="0" i="0">
-                <a:solidFill>
-                  <a:srgbClr val="333333"/>
-                </a:solidFill>
-                <a:latin typeface="Calibri"/>
-              </a:rPr>
-              <a:t>–   Herramienta: </a:t>
-            </a:r>
-            <a:r>
-              <a:rPr sz="2000" b="1" i="0">
-                <a:solidFill>
-                  <a:srgbClr val="333333"/>
-                </a:solidFill>
-                <a:latin typeface="Calibri"/>
-              </a:rPr>
-              <a:t>Navegador · editor de texto del curso</a:t>
-            </a:r>
-          </a:p>
-          <a:p>
-            <a:pPr>
-              <a:spcAft>
-                <a:spcPts val="800"/>
-              </a:spcAft>
-            </a:pPr>
-            <a:r>
-              <a:rPr sz="2000" b="0" i="0">
-                <a:solidFill>
-                  <a:srgbClr val="333333"/>
-                </a:solidFill>
-                <a:latin typeface="Calibri"/>
-              </a:rPr>
-              <a:t>–   Todo lo que construyan hoy entra al </a:t>
-            </a:r>
-            <a:r>
-              <a:rPr sz="2000" b="1" i="0">
-                <a:solidFill>
-                  <a:srgbClr val="333333"/>
-                </a:solidFill>
-                <a:latin typeface="Calibri"/>
-              </a:rPr>
-              <a:t>informe/repo del PI</a:t>
-            </a:r>
-            <a:r>
-              <a:rPr sz="2000" b="0" i="0">
-                <a:solidFill>
-                  <a:srgbClr val="333333"/>
-                </a:solidFill>
-                <a:latin typeface="Calibri"/>
-              </a:rPr>
-              <a:t> (no es lab suelto).</a:t>
-            </a:r>
-          </a:p>
-          <a:p>
-            <a:pPr>
-              <a:spcAft>
-                <a:spcPts val="800"/>
-              </a:spcAft>
-            </a:pPr>
-            <a:r>
-              <a:rPr sz="2000" b="0" i="0">
-                <a:solidFill>
-                  <a:srgbClr val="333333"/>
-                </a:solidFill>
-                <a:latin typeface="Calibri"/>
-              </a:rPr>
-              <a:t>–   Individual por defecto · el docente puede autorizar equipos de 2–3; la entrega en la plataforma del curso siempre es individual.</a:t>
-            </a:r>
-          </a:p>
-        </p:txBody>
-      </p:sp>
-      <p:sp>
-        <p:nvSpPr>
-          <p:cNvPr id="6" name="TextBox 5"/>
-          <p:cNvSpPr txBox="1"/>
-          <p:nvPr/>
-        </p:nvSpPr>
-        <p:spPr>
-          <a:xfrm>
-            <a:off x="11185855" y="6473952"/>
-            <a:ext cx="640080" cy="274320"/>
-          </a:xfrm>
-          <a:prstGeom prst="rect">
-            <a:avLst/>
-          </a:prstGeom>
-          <a:noFill/>
-        </p:spPr>
-        <p:txBody>
-          <a:bodyPr wrap="square">
-            <a:spAutoFit/>
-          </a:bodyPr>
-          <a:lstStyle/>
-          <a:p>
-            <a:pPr algn="r"/>
-            <a:r>
-              <a:rPr sz="1100" b="0" i="0">
-                <a:solidFill>
-                  <a:srgbClr val="666666"/>
-                </a:solidFill>
-                <a:latin typeface="Calibri"/>
-              </a:rPr>
-              <a:t>31</a:t>
-            </a:r>
-          </a:p>
-        </p:txBody>
-      </p:sp>
-    </p:spTree>
-  </p:cSld>
-  <p:clrMapOvr>
-    <a:masterClrMapping/>
-  </p:clrMapOvr>
-</p:sld>
-</file>
-
-<file path=ppt/slides/slide32.xml><?xml version="1.0" encoding="utf-8"?>
-<p:sld xmlns:a="http://schemas.openxmlformats.org/drawingml/2006/main" xmlns:p="http://schemas.openxmlformats.org/presentationml/2006/main" xmlns:r="http://schemas.openxmlformats.org/officeDocument/2006/relationships">
-  <p:cSld>
-    <p:bg>
-      <p:bgPr>
-        <a:solidFill>
-          <a:srgbClr val="FFFFFF"/>
-        </a:solidFill>
-        <a:effectLst/>
-      </p:bgPr>
-    </p:bg>
-    <p:spTree>
-      <p:nvGrpSpPr>
-        <p:cNvPr id="1" name=""/>
-        <p:cNvGrpSpPr/>
-        <p:nvPr/>
-      </p:nvGrpSpPr>
-      <p:grpSpPr/>
-      <p:sp>
-        <p:nvSpPr>
-          <p:cNvPr id="2" name="Rectangle 1"/>
-          <p:cNvSpPr/>
-          <p:nvPr/>
-        </p:nvSpPr>
-        <p:spPr>
-          <a:xfrm>
-            <a:off x="0" y="0"/>
-            <a:ext cx="12191695" cy="960120"/>
-          </a:xfrm>
-          <a:prstGeom prst="rect">
-            <a:avLst/>
-          </a:prstGeom>
-          <a:solidFill>
-            <a:srgbClr val="095292"/>
-          </a:solidFill>
-          <a:ln>
-            <a:noFill/>
-          </a:ln>
-        </p:spPr>
-        <p:style>
-          <a:lnRef idx="1">
-            <a:schemeClr val="accent1"/>
-          </a:lnRef>
-          <a:fillRef idx="3">
-            <a:schemeClr val="accent1"/>
-          </a:fillRef>
-          <a:effectRef idx="2">
-            <a:schemeClr val="accent1"/>
-          </a:effectRef>
-          <a:fontRef idx="minor">
-            <a:schemeClr val="lt1"/>
-          </a:fontRef>
-        </p:style>
-        <p:txBody>
-          <a:bodyPr rtlCol="0" anchor="ctr"/>
-          <a:lstStyle/>
-          <a:p>
-            <a:pPr algn="ctr"/>
-          </a:p>
-        </p:txBody>
-      </p:sp>
-      <p:sp>
-        <p:nvSpPr>
-          <p:cNvPr id="3" name="Rectangle 2"/>
-          <p:cNvSpPr/>
-          <p:nvPr/>
-        </p:nvSpPr>
-        <p:spPr>
-          <a:xfrm>
-            <a:off x="0" y="960120"/>
-            <a:ext cx="12191695" cy="41148"/>
-          </a:xfrm>
-          <a:prstGeom prst="rect">
-            <a:avLst/>
-          </a:prstGeom>
-          <a:solidFill>
-            <a:srgbClr val="FFD000"/>
-          </a:solidFill>
-          <a:ln>
-            <a:noFill/>
-          </a:ln>
-        </p:spPr>
-        <p:style>
-          <a:lnRef idx="1">
-            <a:schemeClr val="accent1"/>
-          </a:lnRef>
-          <a:fillRef idx="3">
-            <a:schemeClr val="accent1"/>
-          </a:fillRef>
-          <a:effectRef idx="2">
-            <a:schemeClr val="accent1"/>
-          </a:effectRef>
-          <a:fontRef idx="minor">
-            <a:schemeClr val="lt1"/>
-          </a:fontRef>
-        </p:style>
-        <p:txBody>
-          <a:bodyPr rtlCol="0" anchor="ctr"/>
-          <a:lstStyle/>
-          <a:p>
-            <a:pPr algn="ctr"/>
-          </a:p>
-        </p:txBody>
-      </p:sp>
-      <p:sp>
-        <p:nvSpPr>
-          <p:cNvPr id="4" name="TextBox 3"/>
-          <p:cNvSpPr txBox="1"/>
-          <p:nvPr/>
-        </p:nvSpPr>
-        <p:spPr>
-          <a:xfrm>
-            <a:off x="457200" y="164592"/>
-            <a:ext cx="11277295" cy="502920"/>
-          </a:xfrm>
-          <a:prstGeom prst="rect">
-            <a:avLst/>
-          </a:prstGeom>
-          <a:noFill/>
-        </p:spPr>
-        <p:txBody>
-          <a:bodyPr wrap="square">
-            <a:spAutoFit/>
-          </a:bodyPr>
-          <a:lstStyle/>
-          <a:p>
-            <a:r>
-              <a:rPr sz="2600" b="1" i="0">
-                <a:solidFill>
-                  <a:srgbClr val="FFFFFF"/>
-                </a:solidFill>
-                <a:latin typeface="Calibri"/>
-              </a:rPr>
-              <a:t>Manos a la obra (paso a paso)</a:t>
-            </a:r>
-          </a:p>
-        </p:txBody>
-      </p:sp>
-      <p:sp>
-        <p:nvSpPr>
-          <p:cNvPr id="5" name="TextBox 4"/>
-          <p:cNvSpPr txBox="1"/>
-          <p:nvPr/>
-        </p:nvSpPr>
-        <p:spPr>
-          <a:xfrm>
-            <a:off x="457200" y="1170432"/>
-            <a:ext cx="11277295" cy="5230368"/>
-          </a:xfrm>
-          <a:prstGeom prst="rect">
-            <a:avLst/>
-          </a:prstGeom>
-          <a:noFill/>
-        </p:spPr>
-        <p:txBody>
-          <a:bodyPr wrap="square">
-            <a:spAutoFit/>
-          </a:bodyPr>
-          <a:lstStyle/>
-          <a:p>
-            <a:pPr>
-              <a:spcAft>
-                <a:spcPts val="800"/>
-              </a:spcAft>
-            </a:pPr>
-            <a:r>
-              <a:rPr sz="2000" b="1" i="0">
-                <a:solidFill>
-                  <a:srgbClr val="333333"/>
-                </a:solidFill>
-                <a:latin typeface="Calibri"/>
-              </a:rPr>
-              <a:t>1.</a:t>
-            </a:r>
-            <a:r>
-              <a:rPr sz="2000" b="0" i="0">
-                <a:solidFill>
-                  <a:srgbClr val="333333"/>
-                </a:solidFill>
-                <a:latin typeface="Calibri"/>
-              </a:rPr>
-              <a:t> Paso 1: relea su ficha y su C4 Context de la Clase 1. No cambie de dominio: las preguntas 5 a 7 se califican sobre el mismo sistema, y el ADR que redacte hoy se reutiliza en el informe del PI y en la sustentacion de la Clase 15.</a:t>
-            </a:r>
-          </a:p>
-          <a:p>
-            <a:pPr>
-              <a:spcAft>
-                <a:spcPts val="800"/>
-              </a:spcAft>
-            </a:pPr>
-            <a:r>
-              <a:rPr sz="2000" b="0" i="0">
-                <a:solidFill>
-                  <a:srgbClr val="333333"/>
-                </a:solidFill>
-                <a:latin typeface="Calibri"/>
-              </a:rPr>
-              <a:t>–   </a:t>
-            </a:r>
-            <a:r>
-              <a:rPr sz="2000" b="1" i="0">
-                <a:solidFill>
-                  <a:srgbClr val="333333"/>
-                </a:solidFill>
-                <a:latin typeface="Calibri"/>
-              </a:rPr>
-              <a:t>2.</a:t>
-            </a:r>
-            <a:r>
-              <a:rPr sz="2000" b="0" i="0">
-                <a:solidFill>
-                  <a:srgbClr val="333333"/>
-                </a:solidFill>
-                <a:latin typeface="Calibri"/>
-              </a:rPr>
-              <a:t> Paso 2: construya en la pregunta 5 la matriz «Criterio | IaaS | PaaS | SaaS» con las cuatro filas en orden (control, costo cualitativo, operacion, time-to-demo) y maximo 2 lineas por celda; verifique que cada celda nombre una capacidad o una restriccion de SU dominio, y que la fila de operacion no afirme que en PaaS o SaaS usted deja de responder por su propia aplicacion.</a:t>
-            </a:r>
-          </a:p>
-          <a:p>
-            <a:pPr>
-              <a:spcAft>
-                <a:spcPts val="800"/>
-              </a:spcAft>
-            </a:pPr>
-            <a:r>
-              <a:rPr sz="2000" b="0" i="0">
-                <a:solidFill>
-                  <a:srgbClr val="333333"/>
-                </a:solidFill>
-                <a:latin typeface="Calibri"/>
-              </a:rPr>
-              <a:t>–   </a:t>
-            </a:r>
-            <a:r>
-              <a:rPr sz="2000" b="1" i="0">
-                <a:solidFill>
-                  <a:srgbClr val="333333"/>
-                </a:solidFill>
-                <a:latin typeface="Calibri"/>
-              </a:rPr>
-              <a:t>3.</a:t>
-            </a:r>
-            <a:r>
-              <a:rPr sz="2000" b="0" i="0">
-                <a:solidFill>
-                  <a:srgbClr val="333333"/>
-                </a:solidFill>
-                <a:latin typeface="Calibri"/>
-              </a:rPr>
-              <a:t> Paso 3: redacte en la pregunta 6 el ADR-001 con las cinco secciones rotuladas —titulo, estado con fecha, contexto con sus restricciones reales, la decision en UNA sola frase con UN modelo dominante, y exactamente 2 alternativas descartadas con el motivo atado a su dominio—; verifique que la seccion de decision no nombre dos modelos, porque en ese caso vale cero.</a:t>
-            </a:r>
-          </a:p>
-          <a:p>
-            <a:pPr>
-              <a:spcAft>
-                <a:spcPts val="800"/>
-              </a:spcAft>
-            </a:pPr>
-            <a:r>
-              <a:rPr sz="2000" b="0" i="0">
-                <a:solidFill>
-                  <a:srgbClr val="333333"/>
-                </a:solidFill>
-                <a:latin typeface="Calibri"/>
-              </a:rPr>
-              <a:t>–   </a:t>
-            </a:r>
-            <a:r>
-              <a:rPr sz="2000" b="1" i="0">
-                <a:solidFill>
-                  <a:srgbClr val="333333"/>
-                </a:solidFill>
-                <a:latin typeface="Calibri"/>
-              </a:rPr>
-              <a:t>4.</a:t>
-            </a:r>
-            <a:r>
-              <a:rPr sz="2000" b="0" i="0">
-                <a:solidFill>
-                  <a:srgbClr val="333333"/>
-                </a:solidFill>
-                <a:latin typeface="Calibri"/>
-              </a:rPr>
-              <a:t> Paso 4: escriba en la pregunta 7 la seccion 6 del mismo ADR, las consecuencias en los tres ejes (operacion, costo y aprendizaje), con al menos una positiva y una negativa por eje marcadas con + y -, y verifique que al menos una negativa hable de amarre al proveedor o de perdida de control; guarde y continue, que la actividad se entrega completa al cierre del corte.</a:t>
-            </a:r>
-          </a:p>
-        </p:txBody>
-      </p:sp>
-      <p:sp>
-        <p:nvSpPr>
-          <p:cNvPr id="6" name="TextBox 5"/>
-          <p:cNvSpPr txBox="1"/>
-          <p:nvPr/>
-        </p:nvSpPr>
-        <p:spPr>
-          <a:xfrm>
-            <a:off x="11185855" y="6473952"/>
-            <a:ext cx="640080" cy="274320"/>
-          </a:xfrm>
-          <a:prstGeom prst="rect">
-            <a:avLst/>
-          </a:prstGeom>
-          <a:noFill/>
-        </p:spPr>
-        <p:txBody>
-          <a:bodyPr wrap="square">
-            <a:spAutoFit/>
-          </a:bodyPr>
-          <a:lstStyle/>
-          <a:p>
-            <a:pPr algn="r"/>
-            <a:r>
-              <a:rPr sz="1100" b="0" i="0">
-                <a:solidFill>
-                  <a:srgbClr val="666666"/>
-                </a:solidFill>
-                <a:latin typeface="Calibri"/>
-              </a:rPr>
-              <a:t>32</a:t>
-            </a:r>
-          </a:p>
-        </p:txBody>
-      </p:sp>
-    </p:spTree>
-  </p:cSld>
-  <p:clrMapOvr>
-    <a:masterClrMapping/>
-  </p:clrMapOvr>
-</p:sld>
-</file>
-
-<file path=ppt/slides/slide33.xml><?xml version="1.0" encoding="utf-8"?>
-<p:sld xmlns:a="http://schemas.openxmlformats.org/drawingml/2006/main" xmlns:p="http://schemas.openxmlformats.org/presentationml/2006/main" xmlns:r="http://schemas.openxmlformats.org/officeDocument/2006/relationships">
-  <p:cSld>
-    <p:bg>
-      <p:bgPr>
-        <a:solidFill>
-          <a:srgbClr val="FFFFFF"/>
-        </a:solidFill>
-        <a:effectLst/>
-      </p:bgPr>
-    </p:bg>
-    <p:spTree>
-      <p:nvGrpSpPr>
-        <p:cNvPr id="1" name=""/>
-        <p:cNvGrpSpPr/>
-        <p:nvPr/>
-      </p:nvGrpSpPr>
-      <p:grpSpPr/>
-      <p:sp>
-        <p:nvSpPr>
-          <p:cNvPr id="2" name="Rectangle 1"/>
-          <p:cNvSpPr/>
-          <p:nvPr/>
-        </p:nvSpPr>
-        <p:spPr>
-          <a:xfrm>
-            <a:off x="0" y="0"/>
-            <a:ext cx="12191695" cy="960120"/>
-          </a:xfrm>
-          <a:prstGeom prst="rect">
-            <a:avLst/>
-          </a:prstGeom>
-          <a:solidFill>
-            <a:srgbClr val="095292"/>
-          </a:solidFill>
-          <a:ln>
-            <a:noFill/>
-          </a:ln>
-        </p:spPr>
-        <p:style>
-          <a:lnRef idx="1">
-            <a:schemeClr val="accent1"/>
-          </a:lnRef>
-          <a:fillRef idx="3">
-            <a:schemeClr val="accent1"/>
-          </a:fillRef>
-          <a:effectRef idx="2">
-            <a:schemeClr val="accent1"/>
-          </a:effectRef>
-          <a:fontRef idx="minor">
-            <a:schemeClr val="lt1"/>
-          </a:fontRef>
-        </p:style>
-        <p:txBody>
-          <a:bodyPr rtlCol="0" anchor="ctr"/>
-          <a:lstStyle/>
-          <a:p>
-            <a:pPr algn="ctr"/>
-          </a:p>
-        </p:txBody>
-      </p:sp>
-      <p:sp>
-        <p:nvSpPr>
-          <p:cNvPr id="3" name="Rectangle 2"/>
-          <p:cNvSpPr/>
-          <p:nvPr/>
-        </p:nvSpPr>
-        <p:spPr>
-          <a:xfrm>
-            <a:off x="0" y="960120"/>
-            <a:ext cx="12191695" cy="41148"/>
-          </a:xfrm>
-          <a:prstGeom prst="rect">
-            <a:avLst/>
-          </a:prstGeom>
-          <a:solidFill>
-            <a:srgbClr val="FFD000"/>
-          </a:solidFill>
-          <a:ln>
-            <a:noFill/>
-          </a:ln>
-        </p:spPr>
-        <p:style>
-          <a:lnRef idx="1">
-            <a:schemeClr val="accent1"/>
-          </a:lnRef>
-          <a:fillRef idx="3">
-            <a:schemeClr val="accent1"/>
-          </a:fillRef>
-          <a:effectRef idx="2">
-            <a:schemeClr val="accent1"/>
-          </a:effectRef>
-          <a:fontRef idx="minor">
-            <a:schemeClr val="lt1"/>
-          </a:fontRef>
-        </p:style>
-        <p:txBody>
-          <a:bodyPr rtlCol="0" anchor="ctr"/>
-          <a:lstStyle/>
-          <a:p>
-            <a:pPr algn="ctr"/>
-          </a:p>
-        </p:txBody>
-      </p:sp>
-      <p:sp>
-        <p:nvSpPr>
-          <p:cNvPr id="4" name="TextBox 3"/>
-          <p:cNvSpPr txBox="1"/>
-          <p:nvPr/>
-        </p:nvSpPr>
-        <p:spPr>
-          <a:xfrm>
-            <a:off x="457200" y="164592"/>
-            <a:ext cx="11277295" cy="502920"/>
-          </a:xfrm>
-          <a:prstGeom prst="rect">
-            <a:avLst/>
-          </a:prstGeom>
-          <a:noFill/>
-        </p:spPr>
-        <p:txBody>
-          <a:bodyPr wrap="square">
-            <a:spAutoFit/>
-          </a:bodyPr>
-          <a:lstStyle/>
-          <a:p>
-            <a:r>
-              <a:rPr sz="2600" b="1" i="0">
-                <a:solidFill>
-                  <a:srgbClr val="FFFFFF"/>
-                </a:solidFill>
-                <a:latin typeface="Calibri"/>
-              </a:rPr>
-              <a:t>Para continuar (PI)</a:t>
-            </a:r>
-          </a:p>
-        </p:txBody>
-      </p:sp>
-      <p:sp>
-        <p:nvSpPr>
-          <p:cNvPr id="5" name="Rounded Rectangle 4"/>
-          <p:cNvSpPr/>
-          <p:nvPr/>
-        </p:nvSpPr>
-        <p:spPr>
-          <a:xfrm>
-            <a:off x="457200" y="1261872"/>
-            <a:ext cx="11277295" cy="1051560"/>
-          </a:xfrm>
-          <a:prstGeom prst="roundRect">
-            <a:avLst>
-              <a:gd name="adj" fmla="val 12000"/>
-            </a:avLst>
-          </a:prstGeom>
-          <a:solidFill>
-            <a:srgbClr val="E8F4FA"/>
-          </a:solidFill>
-          <a:ln>
-            <a:noFill/>
-          </a:ln>
-        </p:spPr>
-        <p:style>
-          <a:lnRef idx="1">
-            <a:schemeClr val="accent1"/>
-          </a:lnRef>
-          <a:fillRef idx="3">
-            <a:schemeClr val="accent1"/>
-          </a:fillRef>
-          <a:effectRef idx="2">
-            <a:schemeClr val="accent1"/>
-          </a:effectRef>
-          <a:fontRef idx="minor">
-            <a:schemeClr val="lt1"/>
-          </a:fontRef>
-        </p:style>
-        <p:txBody>
-          <a:bodyPr rtlCol="0" anchor="ctr"/>
-          <a:lstStyle/>
-          <a:p>
-            <a:pPr algn="ctr"/>
-          </a:p>
-        </p:txBody>
-      </p:sp>
-      <p:sp>
-        <p:nvSpPr>
-          <p:cNvPr id="6" name="Rectangle 5"/>
-          <p:cNvSpPr/>
-          <p:nvPr/>
-        </p:nvSpPr>
-        <p:spPr>
-          <a:xfrm>
-            <a:off x="457200" y="1261872"/>
-            <a:ext cx="128016" cy="1051560"/>
-          </a:xfrm>
-          <a:prstGeom prst="rect">
-            <a:avLst/>
-          </a:prstGeom>
-          <a:solidFill>
-            <a:srgbClr val="269CCB"/>
-          </a:solidFill>
-          <a:ln>
-            <a:noFill/>
-          </a:ln>
-        </p:spPr>
-        <p:style>
-          <a:lnRef idx="1">
-            <a:schemeClr val="accent1"/>
-          </a:lnRef>
-          <a:fillRef idx="3">
-            <a:schemeClr val="accent1"/>
-          </a:fillRef>
-          <a:effectRef idx="2">
-            <a:schemeClr val="accent1"/>
-          </a:effectRef>
-          <a:fontRef idx="minor">
-            <a:schemeClr val="lt1"/>
-          </a:fontRef>
-        </p:style>
-        <p:txBody>
-          <a:bodyPr rtlCol="0" anchor="ctr"/>
-          <a:lstStyle/>
-          <a:p>
-            <a:pPr algn="ctr"/>
-          </a:p>
-        </p:txBody>
-      </p:sp>
-      <p:sp>
-        <p:nvSpPr>
-          <p:cNvPr id="7" name="TextBox 6"/>
-          <p:cNvSpPr txBox="1"/>
-          <p:nvPr/>
-        </p:nvSpPr>
-        <p:spPr>
-          <a:xfrm>
-            <a:off x="777240" y="1399031"/>
-            <a:ext cx="10774375" cy="822959"/>
-          </a:xfrm>
-          <a:prstGeom prst="rect">
-            <a:avLst/>
-          </a:prstGeom>
-          <a:noFill/>
-        </p:spPr>
-        <p:txBody>
-          <a:bodyPr wrap="square">
-            <a:spAutoFit/>
-          </a:bodyPr>
-          <a:lstStyle/>
-          <a:p>
-            <a:r>
-              <a:rPr sz="1200" b="1" i="0">
-                <a:solidFill>
-                  <a:srgbClr val="269CCB"/>
-                </a:solidFill>
-                <a:latin typeface="Calibri"/>
-              </a:rPr>
-              <a:t>Info</a:t>
-            </a:r>
-          </a:p>
-          <a:p>
-            <a:pPr>
-              <a:spcBef>
-                <a:spcPts val="400"/>
-              </a:spcBef>
-            </a:pPr>
-            <a:r>
-              <a:rPr sz="1400" b="0" i="0">
-                <a:solidFill>
-                  <a:srgbClr val="333333"/>
-                </a:solidFill>
-                <a:latin typeface="Calibri"/>
-              </a:rPr>
-              <a:t>Entregable: ADR-001: decisión de modelo de servicio + matriz de comparación aplicada al dominio</a:t>
-            </a:r>
-          </a:p>
-        </p:txBody>
-      </p:sp>
-      <p:sp>
-        <p:nvSpPr>
-          <p:cNvPr id="8" name="Rounded Rectangle 7"/>
-          <p:cNvSpPr/>
-          <p:nvPr/>
-        </p:nvSpPr>
-        <p:spPr>
-          <a:xfrm>
-            <a:off x="457200" y="2478024"/>
-            <a:ext cx="11277295" cy="1051560"/>
-          </a:xfrm>
-          <a:prstGeom prst="roundRect">
-            <a:avLst>
-              <a:gd name="adj" fmla="val 12000"/>
-            </a:avLst>
-          </a:prstGeom>
-          <a:solidFill>
-            <a:srgbClr val="FFF8E1"/>
-          </a:solidFill>
-          <a:ln>
-            <a:noFill/>
-          </a:ln>
-        </p:spPr>
-        <p:style>
-          <a:lnRef idx="1">
-            <a:schemeClr val="accent1"/>
-          </a:lnRef>
-          <a:fillRef idx="3">
-            <a:schemeClr val="accent1"/>
-          </a:fillRef>
-          <a:effectRef idx="2">
-            <a:schemeClr val="accent1"/>
-          </a:effectRef>
-          <a:fontRef idx="minor">
-            <a:schemeClr val="lt1"/>
-          </a:fontRef>
-        </p:style>
-        <p:txBody>
-          <a:bodyPr rtlCol="0" anchor="ctr"/>
-          <a:lstStyle/>
-          <a:p>
-            <a:pPr algn="ctr"/>
-          </a:p>
-        </p:txBody>
-      </p:sp>
-      <p:sp>
-        <p:nvSpPr>
-          <p:cNvPr id="9" name="Rectangle 8"/>
-          <p:cNvSpPr/>
-          <p:nvPr/>
-        </p:nvSpPr>
-        <p:spPr>
-          <a:xfrm>
-            <a:off x="457200" y="2478024"/>
-            <a:ext cx="128016" cy="1051560"/>
-          </a:xfrm>
-          <a:prstGeom prst="rect">
-            <a:avLst/>
-          </a:prstGeom>
-          <a:solidFill>
-            <a:srgbClr val="FFD000"/>
-          </a:solidFill>
-          <a:ln>
-            <a:noFill/>
-          </a:ln>
-        </p:spPr>
-        <p:style>
-          <a:lnRef idx="1">
-            <a:schemeClr val="accent1"/>
-          </a:lnRef>
-          <a:fillRef idx="3">
-            <a:schemeClr val="accent1"/>
-          </a:fillRef>
-          <a:effectRef idx="2">
-            <a:schemeClr val="accent1"/>
-          </a:effectRef>
-          <a:fontRef idx="minor">
-            <a:schemeClr val="lt1"/>
-          </a:fontRef>
-        </p:style>
-        <p:txBody>
-          <a:bodyPr rtlCol="0" anchor="ctr"/>
-          <a:lstStyle/>
-          <a:p>
-            <a:pPr algn="ctr"/>
-          </a:p>
-        </p:txBody>
-      </p:sp>
-      <p:sp>
-        <p:nvSpPr>
-          <p:cNvPr id="10" name="TextBox 9"/>
-          <p:cNvSpPr txBox="1"/>
-          <p:nvPr/>
-        </p:nvSpPr>
-        <p:spPr>
-          <a:xfrm>
-            <a:off x="777240" y="2615184"/>
-            <a:ext cx="10774375" cy="822959"/>
-          </a:xfrm>
-          <a:prstGeom prst="rect">
-            <a:avLst/>
-          </a:prstGeom>
-          <a:noFill/>
-        </p:spPr>
-        <p:txBody>
-          <a:bodyPr wrap="square">
-            <a:spAutoFit/>
-          </a:bodyPr>
-          <a:lstStyle/>
-          <a:p>
-            <a:r>
-              <a:rPr sz="1200" b="1" i="0">
-                <a:solidFill>
-                  <a:srgbClr val="FFD000"/>
-                </a:solidFill>
-                <a:latin typeface="Calibri"/>
-              </a:rPr>
-              <a:t>Aclaración</a:t>
-            </a:r>
-          </a:p>
-          <a:p>
-            <a:pPr>
-              <a:spcBef>
-                <a:spcPts val="400"/>
-              </a:spcBef>
-            </a:pPr>
-            <a:r>
-              <a:rPr sz="1400" b="0" i="0">
-                <a:solidFill>
-                  <a:srgbClr val="333333"/>
-                </a:solidFill>
-                <a:latin typeface="Calibri"/>
-              </a:rPr>
-              <a:t>Subir evidencias al paquete CloudLite (Drive/repo) y a la plataforma del curso (la plataforma del curso) en la fecha que indique el docente.</a:t>
-            </a:r>
-          </a:p>
-        </p:txBody>
-      </p:sp>
-      <p:sp>
-        <p:nvSpPr>
-          <p:cNvPr id="11" name="Rounded Rectangle 10"/>
-          <p:cNvSpPr/>
-          <p:nvPr/>
-        </p:nvSpPr>
-        <p:spPr>
-          <a:xfrm>
-            <a:off x="457200" y="3694176"/>
-            <a:ext cx="11277295" cy="1051560"/>
-          </a:xfrm>
-          <a:prstGeom prst="roundRect">
-            <a:avLst>
-              <a:gd name="adj" fmla="val 12000"/>
-            </a:avLst>
-          </a:prstGeom>
-          <a:solidFill>
-            <a:srgbClr val="FBE4E4"/>
-          </a:solidFill>
-          <a:ln>
-            <a:noFill/>
-          </a:ln>
-        </p:spPr>
-        <p:style>
-          <a:lnRef idx="1">
-            <a:schemeClr val="accent1"/>
-          </a:lnRef>
-          <a:fillRef idx="3">
-            <a:schemeClr val="accent1"/>
-          </a:fillRef>
-          <a:effectRef idx="2">
-            <a:schemeClr val="accent1"/>
-          </a:effectRef>
-          <a:fontRef idx="minor">
-            <a:schemeClr val="lt1"/>
-          </a:fontRef>
-        </p:style>
-        <p:txBody>
-          <a:bodyPr rtlCol="0" anchor="ctr"/>
-          <a:lstStyle/>
-          <a:p>
-            <a:pPr algn="ctr"/>
-          </a:p>
-        </p:txBody>
-      </p:sp>
-      <p:sp>
-        <p:nvSpPr>
-          <p:cNvPr id="12" name="Rectangle 11"/>
-          <p:cNvSpPr/>
-          <p:nvPr/>
-        </p:nvSpPr>
-        <p:spPr>
-          <a:xfrm>
-            <a:off x="457200" y="3694176"/>
-            <a:ext cx="128016" cy="1051560"/>
-          </a:xfrm>
-          <a:prstGeom prst="rect">
-            <a:avLst/>
-          </a:prstGeom>
-          <a:solidFill>
-            <a:srgbClr val="A02030"/>
-          </a:solidFill>
-          <a:ln>
-            <a:noFill/>
-          </a:ln>
-        </p:spPr>
-        <p:style>
-          <a:lnRef idx="1">
-            <a:schemeClr val="accent1"/>
-          </a:lnRef>
-          <a:fillRef idx="3">
-            <a:schemeClr val="accent1"/>
-          </a:fillRef>
-          <a:effectRef idx="2">
-            <a:schemeClr val="accent1"/>
-          </a:effectRef>
-          <a:fontRef idx="minor">
-            <a:schemeClr val="lt1"/>
-          </a:fontRef>
-        </p:style>
-        <p:txBody>
-          <a:bodyPr rtlCol="0" anchor="ctr"/>
-          <a:lstStyle/>
-          <a:p>
-            <a:pPr algn="ctr"/>
-          </a:p>
-        </p:txBody>
-      </p:sp>
-      <p:sp>
-        <p:nvSpPr>
-          <p:cNvPr id="13" name="TextBox 12"/>
-          <p:cNvSpPr txBox="1"/>
-          <p:nvPr/>
-        </p:nvSpPr>
-        <p:spPr>
-          <a:xfrm>
-            <a:off x="777240" y="3831336"/>
-            <a:ext cx="10774375" cy="822959"/>
-          </a:xfrm>
-          <a:prstGeom prst="rect">
-            <a:avLst/>
-          </a:prstGeom>
-          <a:noFill/>
-        </p:spPr>
-        <p:txBody>
-          <a:bodyPr wrap="square">
-            <a:spAutoFit/>
-          </a:bodyPr>
-          <a:lstStyle/>
-          <a:p>
-            <a:r>
-              <a:rPr sz="1200" b="1" i="0">
-                <a:solidFill>
-                  <a:srgbClr val="A02030"/>
-                </a:solidFill>
-                <a:latin typeface="Calibri"/>
-              </a:rPr>
-              <a:t>Atención</a:t>
-            </a:r>
-          </a:p>
-          <a:p>
-            <a:pPr>
-              <a:spcBef>
-                <a:spcPts val="400"/>
-              </a:spcBef>
-            </a:pPr>
-            <a:r>
-              <a:rPr sz="1400" b="0" i="0">
-                <a:solidFill>
-                  <a:srgbClr val="333333"/>
-                </a:solidFill>
-                <a:latin typeface="Calibri"/>
-              </a:rPr>
-              <a:t>Sin cloud de pago ni instalaciones obligatorias de hipervisores/Docker Desktop.</a:t>
-            </a:r>
-          </a:p>
-        </p:txBody>
-      </p:sp>
-      <p:sp>
-        <p:nvSpPr>
-          <p:cNvPr id="14" name="TextBox 13"/>
-          <p:cNvSpPr txBox="1"/>
-          <p:nvPr/>
-        </p:nvSpPr>
-        <p:spPr>
-          <a:xfrm>
-            <a:off x="11185855" y="6473952"/>
-            <a:ext cx="640080" cy="274320"/>
-          </a:xfrm>
-          <a:prstGeom prst="rect">
-            <a:avLst/>
-          </a:prstGeom>
-          <a:noFill/>
-        </p:spPr>
-        <p:txBody>
-          <a:bodyPr wrap="square">
-            <a:spAutoFit/>
-          </a:bodyPr>
-          <a:lstStyle/>
-          <a:p>
-            <a:pPr algn="r"/>
-            <a:r>
-              <a:rPr sz="1100" b="0" i="0">
-                <a:solidFill>
-                  <a:srgbClr val="666666"/>
-                </a:solidFill>
-                <a:latin typeface="Calibri"/>
-              </a:rPr>
-              <a:t>33</a:t>
-            </a:r>
-          </a:p>
-        </p:txBody>
-      </p:sp>
-    </p:spTree>
-  </p:cSld>
-  <p:clrMapOvr>
-    <a:masterClrMapping/>
-  </p:clrMapOvr>
-</p:sld>
-</file>
-
-<file path=ppt/slides/slide34.xml><?xml version="1.0" encoding="utf-8"?>
-<p:sld xmlns:a="http://schemas.openxmlformats.org/drawingml/2006/main" xmlns:p="http://schemas.openxmlformats.org/presentationml/2006/main" xmlns:r="http://schemas.openxmlformats.org/officeDocument/2006/relationships">
-  <p:cSld>
-    <p:bg>
-      <p:bgPr>
-        <a:solidFill>
-          <a:srgbClr val="FFFFFF"/>
-        </a:solidFill>
-        <a:effectLst/>
-      </p:bgPr>
-    </p:bg>
-    <p:spTree>
-      <p:nvGrpSpPr>
-        <p:cNvPr id="1" name=""/>
-        <p:cNvGrpSpPr/>
-        <p:nvPr/>
-      </p:nvGrpSpPr>
-      <p:grpSpPr/>
-      <p:sp>
-        <p:nvSpPr>
-          <p:cNvPr id="2" name="Rectangle 1"/>
-          <p:cNvSpPr/>
-          <p:nvPr/>
-        </p:nvSpPr>
-        <p:spPr>
-          <a:xfrm>
-            <a:off x="0" y="0"/>
-            <a:ext cx="12191695" cy="164592"/>
-          </a:xfrm>
-          <a:prstGeom prst="rect">
-            <a:avLst/>
-          </a:prstGeom>
-          <a:solidFill>
-            <a:srgbClr val="269CCB"/>
-          </a:solidFill>
-          <a:ln>
-            <a:noFill/>
-          </a:ln>
-        </p:spPr>
-        <p:style>
-          <a:lnRef idx="1">
-            <a:schemeClr val="accent1"/>
-          </a:lnRef>
-          <a:fillRef idx="3">
-            <a:schemeClr val="accent1"/>
-          </a:fillRef>
-          <a:effectRef idx="2">
-            <a:schemeClr val="accent1"/>
-          </a:effectRef>
-          <a:fontRef idx="minor">
-            <a:schemeClr val="lt1"/>
-          </a:fontRef>
-        </p:style>
-        <p:txBody>
-          <a:bodyPr rtlCol="0" anchor="ctr"/>
-          <a:lstStyle/>
-          <a:p>
-            <a:pPr algn="ctr"/>
-          </a:p>
-        </p:txBody>
-      </p:sp>
-      <p:pic>
-        <p:nvPicPr>
-          <p:cNvPr id="3" name="Picture 2" descr="logo_uniajc_color.png"/>
-          <p:cNvPicPr>
-            <a:picLocks noChangeAspect="1"/>
-          </p:cNvPicPr>
-          <p:nvPr/>
-        </p:nvPicPr>
-        <p:blipFill>
-          <a:blip r:embed="rId2"/>
-          <a:stretch>
-            <a:fillRect/>
-          </a:stretch>
-        </p:blipFill>
-        <p:spPr>
-          <a:xfrm>
-            <a:off x="10271455" y="5998464"/>
-            <a:ext cx="1463040" cy="643233"/>
-          </a:xfrm>
-          <a:prstGeom prst="rect">
-            <a:avLst/>
-          </a:prstGeom>
-        </p:spPr>
-      </p:pic>
-      <p:sp>
-        <p:nvSpPr>
-          <p:cNvPr id="4" name="TextBox 3"/>
-          <p:cNvSpPr txBox="1"/>
-          <p:nvPr/>
-        </p:nvSpPr>
-        <p:spPr>
-          <a:xfrm>
             <a:off x="457200" y="1737360"/>
             <a:ext cx="11277295" cy="1097280"/>
           </a:xfrm>
@@ -13200,7 +11853,7 @@
                 </a:solidFill>
                 <a:latin typeface="Calibri"/>
               </a:rPr>
-              <a:t>Clase 2 · PI en movimiento</a:t>
+              <a:t>Clase 2 · cierre conceptual</a:t>
             </a:r>
           </a:p>
         </p:txBody>
@@ -13239,7 +11892,7 @@
                 </a:solidFill>
                 <a:latin typeface="Calibri"/>
               </a:rPr>
-              <a:t>Decidir modelo dominante (IaaS/PaaS/SaaS) para CloudLite + ADR breve</a:t>
+              <a:t>Comparar IaaS, PaaS y SaaS con criterios de control, operación y velocidad.</a:t>
             </a:r>
           </a:p>
           <a:p>
@@ -13255,7 +11908,7 @@
                 </a:solidFill>
                 <a:latin typeface="Calibri"/>
               </a:rPr>
-              <a:t>Evidencia: ADR-001: decisión de modelo de servicio + matriz de comparación aplicada al dominio</a:t>
+              <a:t>Elegir el modelo dominante de CloudLite con justificación.</a:t>
             </a:r>
           </a:p>
           <a:p>
@@ -13271,7 +11924,7 @@
                 </a:solidFill>
                 <a:latin typeface="Calibri"/>
               </a:rPr>
-              <a:t>Siguiente paso = siguiente hito del PI CloudLite</a:t>
+              <a:t>Documentar la decisión como ADR reutilizable en el informe PI.</a:t>
             </a:r>
           </a:p>
         </p:txBody>
@@ -13306,7 +11959,7 @@
                 </a:solidFill>
                 <a:latin typeface="Calibri"/>
               </a:rPr>
-              <a:t>Teoría al servicio del proyecto</a:t>
+              <a:t>Teoría al servicio del diseño</a:t>
             </a:r>
           </a:p>
         </p:txBody>
@@ -15645,4 +14298,324 @@
   </a:objectDefaults>
   <a:extraClrSchemeLst/>
 </a:theme>
+</file>
+
+<file path=ppt/theme/theme2.xml><?xml version="1.0" encoding="utf-8"?>
+<a:theme xmlns:a="http://schemas.openxmlformats.org/drawingml/2006/main" name="Office Theme">
+  <a:themeElements>
+    <a:clrScheme name="Office">
+      <a:dk1>
+        <a:sysClr val="windowText" lastClr="000000"/>
+      </a:dk1>
+      <a:lt1>
+        <a:sysClr val="window" lastClr="FFFFFF"/>
+      </a:lt1>
+      <a:dk2>
+        <a:srgbClr val="1F497D"/>
+      </a:dk2>
+      <a:lt2>
+        <a:srgbClr val="EEECE1"/>
+      </a:lt2>
+      <a:accent1>
+        <a:srgbClr val="4F81BD"/>
+      </a:accent1>
+      <a:accent2>
+        <a:srgbClr val="C0504D"/>
+      </a:accent2>
+      <a:accent3>
+        <a:srgbClr val="9BBB59"/>
+      </a:accent3>
+      <a:accent4>
+        <a:srgbClr val="8064A2"/>
+      </a:accent4>
+      <a:accent5>
+        <a:srgbClr val="4BACC6"/>
+      </a:accent5>
+      <a:accent6>
+        <a:srgbClr val="F79646"/>
+      </a:accent6>
+      <a:hlink>
+        <a:srgbClr val="0000FF"/>
+      </a:hlink>
+      <a:folHlink>
+        <a:srgbClr val="800080"/>
+      </a:folHlink>
+    </a:clrScheme>
+    <a:fontScheme name="Office">
+      <a:majorFont>
+        <a:latin typeface="Calibri"/>
+        <a:ea typeface=""/>
+        <a:cs typeface=""/>
+        <a:font script="Jpan" typeface="ＭＳ Ｐゴシック"/>
+        <a:font script="Hang" typeface="맑은 고딕"/>
+        <a:font script="Hans" typeface="宋体"/>
+        <a:font script="Hant" typeface="新細明體"/>
+        <a:font script="Arab" typeface="Times New Roman"/>
+        <a:font script="Hebr" typeface="Times New Roman"/>
+        <a:font script="Thai" typeface="Angsana New"/>
+        <a:font script="Ethi" typeface="Nyala"/>
+        <a:font script="Beng" typeface="Vrinda"/>
+        <a:font script="Gujr" typeface="Shruti"/>
+        <a:font script="Khmr" typeface="MoolBoran"/>
+        <a:font script="Knda" typeface="Tunga"/>
+        <a:font script="Guru" typeface="Raavi"/>
+        <a:font script="Cans" typeface="Euphemia"/>
+        <a:font script="Cher" typeface="Plantagenet Cherokee"/>
+        <a:font script="Yiii" typeface="Microsoft Yi Baiti"/>
+        <a:font script="Tibt" typeface="Microsoft Himalaya"/>
+        <a:font script="Thaa" typeface="MV Boli"/>
+        <a:font script="Deva" typeface="Mangal"/>
+        <a:font script="Telu" typeface="Gautami"/>
+        <a:font script="Taml" typeface="Latha"/>
+        <a:font script="Syrc" typeface="Estrangelo Edessa"/>
+        <a:font script="Orya" typeface="Kalinga"/>
+        <a:font script="Mlym" typeface="Kartika"/>
+        <a:font script="Laoo" typeface="DokChampa"/>
+        <a:font script="Sinh" typeface="Iskoola Pota"/>
+        <a:font script="Mong" typeface="Mongolian Baiti"/>
+        <a:font script="Viet" typeface="Times New Roman"/>
+        <a:font script="Uigh" typeface="Microsoft Uighur"/>
+        <a:font script="Geor" typeface="Sylfaen"/>
+      </a:majorFont>
+      <a:minorFont>
+        <a:latin typeface="Calibri"/>
+        <a:ea typeface=""/>
+        <a:cs typeface=""/>
+        <a:font script="Jpan" typeface="ＭＳ Ｐゴシック"/>
+        <a:font script="Hang" typeface="맑은 고딕"/>
+        <a:font script="Hans" typeface="宋体"/>
+        <a:font script="Hant" typeface="新細明體"/>
+        <a:font script="Arab" typeface="Arial"/>
+        <a:font script="Hebr" typeface="Arial"/>
+        <a:font script="Thai" typeface="Cordia New"/>
+        <a:font script="Ethi" typeface="Nyala"/>
+        <a:font script="Beng" typeface="Vrinda"/>
+        <a:font script="Gujr" typeface="Shruti"/>
+        <a:font script="Khmr" typeface="DaunPenh"/>
+        <a:font script="Knda" typeface="Tunga"/>
+        <a:font script="Guru" typeface="Raavi"/>
+        <a:font script="Cans" typeface="Euphemia"/>
+        <a:font script="Cher" typeface="Plantagenet Cherokee"/>
+        <a:font script="Yiii" typeface="Microsoft Yi Baiti"/>
+        <a:font script="Tibt" typeface="Microsoft Himalaya"/>
+        <a:font script="Thaa" typeface="MV Boli"/>
+        <a:font script="Deva" typeface="Mangal"/>
+        <a:font script="Telu" typeface="Gautami"/>
+        <a:font script="Taml" typeface="Latha"/>
+        <a:font script="Syrc" typeface="Estrangelo Edessa"/>
+        <a:font script="Orya" typeface="Kalinga"/>
+        <a:font script="Mlym" typeface="Kartika"/>
+        <a:font script="Laoo" typeface="DokChampa"/>
+        <a:font script="Sinh" typeface="Iskoola Pota"/>
+        <a:font script="Mong" typeface="Mongolian Baiti"/>
+        <a:font script="Viet" typeface="Arial"/>
+        <a:font script="Uigh" typeface="Microsoft Uighur"/>
+        <a:font script="Geor" typeface="Sylfaen"/>
+      </a:minorFont>
+    </a:fontScheme>
+    <a:fmtScheme name="Office">
+      <a:fillStyleLst>
+        <a:solidFill>
+          <a:schemeClr val="phClr"/>
+        </a:solidFill>
+        <a:gradFill rotWithShape="1">
+          <a:gsLst>
+            <a:gs pos="0">
+              <a:schemeClr val="phClr">
+                <a:tint val="50000"/>
+                <a:satMod val="300000"/>
+              </a:schemeClr>
+            </a:gs>
+            <a:gs pos="35000">
+              <a:schemeClr val="phClr">
+                <a:tint val="37000"/>
+                <a:satMod val="300000"/>
+              </a:schemeClr>
+            </a:gs>
+            <a:gs pos="100000">
+              <a:schemeClr val="phClr">
+                <a:tint val="15000"/>
+                <a:satMod val="350000"/>
+              </a:schemeClr>
+            </a:gs>
+          </a:gsLst>
+          <a:lin ang="16200000" scaled="1"/>
+        </a:gradFill>
+        <a:gradFill rotWithShape="1">
+          <a:gsLst>
+            <a:gs pos="0">
+              <a:schemeClr val="phClr">
+                <a:tint val="100000"/>
+                <a:shade val="100000"/>
+                <a:satMod val="130000"/>
+              </a:schemeClr>
+            </a:gs>
+            <a:gs pos="100000">
+              <a:schemeClr val="phClr">
+                <a:tint val="50000"/>
+                <a:shade val="100000"/>
+                <a:satMod val="350000"/>
+              </a:schemeClr>
+            </a:gs>
+          </a:gsLst>
+          <a:lin ang="16200000" scaled="0"/>
+        </a:gradFill>
+      </a:fillStyleLst>
+      <a:lnStyleLst>
+        <a:ln w="9525" cap="flat" cmpd="sng" algn="ctr">
+          <a:solidFill>
+            <a:schemeClr val="phClr">
+              <a:shade val="95000"/>
+              <a:satMod val="105000"/>
+            </a:schemeClr>
+          </a:solidFill>
+          <a:prstDash val="solid"/>
+        </a:ln>
+        <a:ln w="25400" cap="flat" cmpd="sng" algn="ctr">
+          <a:solidFill>
+            <a:schemeClr val="phClr"/>
+          </a:solidFill>
+          <a:prstDash val="solid"/>
+        </a:ln>
+        <a:ln w="38100" cap="flat" cmpd="sng" algn="ctr">
+          <a:solidFill>
+            <a:schemeClr val="phClr"/>
+          </a:solidFill>
+          <a:prstDash val="solid"/>
+        </a:ln>
+      </a:lnStyleLst>
+      <a:effectStyleLst>
+        <a:effectStyle>
+          <a:effectLst>
+            <a:outerShdw blurRad="40000" dist="20000" dir="5400000" rotWithShape="0">
+              <a:srgbClr val="000000">
+                <a:alpha val="38000"/>
+              </a:srgbClr>
+            </a:outerShdw>
+          </a:effectLst>
+        </a:effectStyle>
+        <a:effectStyle>
+          <a:effectLst>
+            <a:outerShdw blurRad="40000" dist="23000" dir="5400000" rotWithShape="0">
+              <a:srgbClr val="000000">
+                <a:alpha val="35000"/>
+              </a:srgbClr>
+            </a:outerShdw>
+          </a:effectLst>
+        </a:effectStyle>
+        <a:effectStyle>
+          <a:effectLst>
+            <a:outerShdw blurRad="40000" dist="23000" dir="5400000" rotWithShape="0">
+              <a:srgbClr val="000000">
+                <a:alpha val="35000"/>
+              </a:srgbClr>
+            </a:outerShdw>
+          </a:effectLst>
+          <a:scene3d>
+            <a:camera prst="orthographicFront">
+              <a:rot lat="0" lon="0" rev="0"/>
+            </a:camera>
+            <a:lightRig rig="threePt" dir="t">
+              <a:rot lat="0" lon="0" rev="1200000"/>
+            </a:lightRig>
+          </a:scene3d>
+          <a:sp3d>
+            <a:bevelT w="63500" h="25400"/>
+          </a:sp3d>
+        </a:effectStyle>
+      </a:effectStyleLst>
+      <a:bgFillStyleLst>
+        <a:solidFill>
+          <a:schemeClr val="phClr"/>
+        </a:solidFill>
+        <a:gradFill rotWithShape="1">
+          <a:gsLst>
+            <a:gs pos="0">
+              <a:schemeClr val="phClr">
+                <a:tint val="40000"/>
+                <a:satMod val="350000"/>
+              </a:schemeClr>
+            </a:gs>
+            <a:gs pos="40000">
+              <a:schemeClr val="phClr">
+                <a:tint val="45000"/>
+                <a:shade val="99000"/>
+                <a:satMod val="350000"/>
+              </a:schemeClr>
+            </a:gs>
+            <a:gs pos="100000">
+              <a:schemeClr val="phClr">
+                <a:shade val="20000"/>
+                <a:satMod val="255000"/>
+              </a:schemeClr>
+            </a:gs>
+          </a:gsLst>
+          <a:path path="circle">
+            <a:fillToRect l="50000" t="-80000" r="50000" b="180000"/>
+          </a:path>
+        </a:gradFill>
+        <a:gradFill rotWithShape="1">
+          <a:gsLst>
+            <a:gs pos="0">
+              <a:schemeClr val="phClr">
+                <a:tint val="80000"/>
+                <a:satMod val="300000"/>
+              </a:schemeClr>
+            </a:gs>
+            <a:gs pos="100000">
+              <a:schemeClr val="phClr">
+                <a:shade val="30000"/>
+                <a:satMod val="200000"/>
+              </a:schemeClr>
+            </a:gs>
+          </a:gsLst>
+          <a:path path="circle">
+            <a:fillToRect l="50000" t="50000" r="50000" b="50000"/>
+          </a:path>
+        </a:gradFill>
+      </a:bgFillStyleLst>
+    </a:fmtScheme>
+  </a:themeElements>
+  <a:objectDefaults>
+    <a:spDef>
+      <a:spPr/>
+      <a:bodyPr/>
+      <a:lstStyle/>
+      <a:style>
+        <a:lnRef idx="1">
+          <a:schemeClr val="accent1"/>
+        </a:lnRef>
+        <a:fillRef idx="3">
+          <a:schemeClr val="accent1"/>
+        </a:fillRef>
+        <a:effectRef idx="2">
+          <a:schemeClr val="accent1"/>
+        </a:effectRef>
+        <a:fontRef idx="minor">
+          <a:schemeClr val="lt1"/>
+        </a:fontRef>
+      </a:style>
+    </a:spDef>
+    <a:lnDef>
+      <a:spPr/>
+      <a:bodyPr/>
+      <a:lstStyle/>
+      <a:style>
+        <a:lnRef idx="2">
+          <a:schemeClr val="accent1"/>
+        </a:lnRef>
+        <a:fillRef idx="0">
+          <a:schemeClr val="accent1"/>
+        </a:fillRef>
+        <a:effectRef idx="1">
+          <a:schemeClr val="accent1"/>
+        </a:effectRef>
+        <a:fontRef idx="minor">
+          <a:schemeClr val="tx1"/>
+        </a:fontRef>
+      </a:style>
+    </a:lnDef>
+  </a:objectDefaults>
+  <a:extraClrSchemeLst/>
+</a:theme>
 </file>
--- a/Arquitectura de Sistemas Computacionales/Clases/Clase 2 - Modelos de servicio IaaS PaaS SaaS/Presentacion.pptx
+++ b/Arquitectura de Sistemas Computacionales/Clases/Clase 2 - Modelos de servicio IaaS PaaS SaaS/Presentacion.pptx
@@ -13,8 +13,8 @@
     <p:sldId id="261" r:id="rId12"/>
     <p:sldId id="262" r:id="rId13"/>
     <p:sldId id="263" r:id="rId14"/>
-    <p:sldId id="264" r:id="rId15"/>
-    <p:sldId id="265" r:id="rId16"/>
+    <p:sldId id="264" r:id="rId16"/>
+    <p:sldId id="265" r:id="rId17"/>
     <p:sldId id="266" r:id="rId18"/>
     <p:sldId id="267" r:id="rId19"/>
     <p:sldId id="268" r:id="rId20"/>
@@ -32,9 +32,6 @@
     <p:sldId id="280" r:id="rId32"/>
     <p:sldId id="281" r:id="rId33"/>
     <p:sldId id="282" r:id="rId34"/>
-    <p:sldId id="283" r:id="rId35"/>
-    <p:sldId id="284" r:id="rId36"/>
-    <p:sldId id="285" r:id="rId37"/>
   </p:sldIdLst>
   <p:sldSz cx="12191695" cy="6858000" type="screen4x3"/>
   <p:notesSz cx="6858000" cy="9144000"/>
@@ -531,7 +528,7 @@
           <a:lstStyle/>
           <a:p>
             <a:r>
-              <a:t>Los tres modelos de servicio se distinguen exactamente por donde se traza la linea que separa lo que administra el proveedor de lo que administra el cliente.</a:t>
+              <a:t>(Sobre la actividad, no se proyecta) Esta clase se dicta en sesion virtual sincrona, en el mismo bloque de 120 minutos de siempre: hay explicacion en vivo, taller acompanado y tiempo para preguntar, asi que este fundamento es material del docente para dictar y no una lectura que reemplace la clase.</a:t>
             </a:r>
           </a:p>
         </p:txBody>
@@ -601,19 +598,7 @@
           <a:lstStyle/>
           <a:p>
             <a:r>
-              <a:t>Lo que gana es control total, porque puede instalar cualquier version de cualquier cosa, abrir los puertos que quiera y afinar el sistema.</a:t>
-            </a:r>
-          </a:p>
-          <a:p/>
-          <a:p>
-            <a:r>
-              <a:t>Lo que paga es trabajo operativo permanente, que en la practica se mide en horas de persona por semana dedicadas a aplicar parches de seguridad, rotar certificados y vigilar el espacio en disco.</a:t>
-            </a:r>
-          </a:p>
-          <a:p/>
-          <a:p>
-            <a:r>
-              <a:t>Para CloudLite Turnos, el ejemplo de la barberia con agendamiento de citas, elegir IaaS significaria que el estudiante se compromete a administrar el sistema operativo donde corren la API y la base de datos; en un curso de doce semanas, y trabajando solo o con dos companeros, eso consume justamente el tiempo que deberia dedicarse a disenar la arquitectura y a sustentarla.</a:t>
+              <a:t>Los tres modelos de servicio se distinguen exactamente por donde se traza la linea que separa lo que administra el proveedor de lo que administra el cliente.</a:t>
             </a:r>
           </a:p>
         </p:txBody>
@@ -683,7 +668,19 @@
           <a:lstStyle/>
           <a:p>
             <a:r>
-              <a:t>De ahi sale el trade-off central, que se escribe como regla practica: a mas abstraccion, menos control y menos trabajo operativo.</a:t>
+              <a:t>Lo que gana es control total, porque puede instalar cualquier version de cualquier cosa, abrir los puertos que quiera y afinar el sistema.</a:t>
+            </a:r>
+          </a:p>
+          <a:p/>
+          <a:p>
+            <a:r>
+              <a:t>Lo que paga es trabajo operativo permanente, que en la practica se mide en horas de persona por semana dedicadas a aplicar parches de seguridad, rotar certificados y vigilar el espacio en disco.</a:t>
+            </a:r>
+          </a:p>
+          <a:p/>
+          <a:p>
+            <a:r>
+              <a:t>Para CloudLite Turnos, el ejemplo de la barberia con agendamiento de citas, elegir IaaS significaria que el estudiante se compromete a administrar el sistema operativo donde corren la API y la base de datos; en un curso de doce semanas, y trabajando solo o con dos companeros, eso consume justamente el tiempo que deberia dedicarse a disenar la arquitectura y a sustentarla.</a:t>
             </a:r>
           </a:p>
         </p:txBody>
@@ -753,25 +750,7 @@
           <a:lstStyle/>
           <a:p>
             <a:r>
-              <a:t>Conviene mostrar la diferencia entre contexto y analisis con el ejemplo, porque es donde se pierde la seccion 3 completa.</a:t>
-            </a:r>
-          </a:p>
-          <a:p/>
-          <a:p>
-            <a:r>
-              <a:t>Eso es contexto: son restricciones, no teoria.</a:t>
-            </a:r>
-          </a:p>
-          <a:p/>
-          <a:p>
-            <a:r>
-              <a:t>La prueba que el docente puede aplicar en voz alta mientras pasa por los grupos es una sola: si del contexto no se puede deducir por que se descarta IaaS, todavia no es contexto.</a:t>
-            </a:r>
-          </a:p>
-          <a:p/>
-          <a:p>
-            <a:r>
-              <a:t>Que identidad y correo se consuman como SaaS satelite se aclara aqui y no en la decision, porque el modelo dominante se refiere a la aplicacion propia.</a:t>
+              <a:t>De ahi sale el trade-off central, que se escribe como regla practica: a mas abstraccion, menos control y menos trabajo operativo.</a:t>
             </a:r>
           </a:p>
         </p:txBody>
@@ -841,7 +820,189 @@
           <a:lstStyle/>
           <a:p>
             <a:r>
-              <a:t>Tres preguntas salen en voz alta en esta clase casi sin falta y conviene tener la respuesta lista, porque las tres se contestan en treinta segundos y desbloquean el taller.</a:t>
+              <a:t>Conviene mostrar la diferencia entre contexto y analisis con el ejemplo, porque es donde se pierde la seccion 3 completa.</a:t>
+            </a:r>
+          </a:p>
+          <a:p/>
+          <a:p>
+            <a:r>
+              <a:t>Eso es contexto: son restricciones, no teoria.</a:t>
+            </a:r>
+          </a:p>
+          <a:p/>
+          <a:p>
+            <a:r>
+              <a:t>La prueba que el docente puede aplicar en voz alta mientras pasa por los grupos es una sola: si del contexto no se puede deducir por que se descarta IaaS, todavia no es contexto.</a:t>
+            </a:r>
+          </a:p>
+          <a:p/>
+          <a:p>
+            <a:r>
+              <a:t>Que identidad y correo se consuman como SaaS satelite se aclara aqui y no en la decision, porque el modelo dominante se refiere a la aplicacion propia.</a:t>
+            </a:r>
+          </a:p>
+          <a:p/>
+          <a:p>
+            <a:r>
+              <a:t>(Sobre la actividad, no se proyecta) El reparto en la plataforma es que las cinco primeras van en la pregunta 6 y la sexta en la pregunta 7, pero es UN solo documento, y conviene decirlo en voz alta porque el estudiante que lo entienda como dos ejercicios sueltos repite la decision en las consecuencias y pierde puntos.</a:t>
+            </a:r>
+          </a:p>
+          <a:p/>
+          <a:p>
+            <a:r>
+              <a:t>(Sobre la actividad, no se proyecta) No hay seccion de «opciones consideradas»: ese analisis es la matriz de la pregunta 5, y en el ADR solo quedan las dos alternativas que se descartaron.</a:t>
+            </a:r>
+          </a:p>
+          <a:p/>
+          <a:p>
+            <a:r>
+              <a:t>(Sobre la actividad, no se proyecta) «Existen tres modelos de servicio y hay que elegir uno» NO es contexto, es el apunte de clase, y esa confusion es el error dominante de la pregunta 6.</a:t>
+            </a:r>
+          </a:p>
+        </p:txBody>
+      </p:sp>
+      <p:sp>
+        <p:nvSpPr>
+          <p:cNvPr id="4" name="Slide Number Placeholder 3"/>
+          <p:cNvSpPr>
+            <a:spLocks noGrp="1"/>
+          </p:cNvSpPr>
+          <p:nvPr>
+            <p:ph type="sldNum" idx="5" sz="quarter"/>
+          </p:nvPr>
+        </p:nvSpPr>
+        <p:spPr/>
+      </p:sp>
+    </p:spTree>
+  </p:cSld>
+  <p:clrMapOvr>
+    <a:masterClrMapping/>
+  </p:clrMapOvr>
+</p:notes>
+</file>
+
+<file path=ppt/notesSlides/notesSlide6.xml><?xml version="1.0" encoding="utf-8"?>
+<p:notes xmlns:a="http://schemas.openxmlformats.org/drawingml/2006/main" xmlns:p="http://schemas.openxmlformats.org/presentationml/2006/main" xmlns:r="http://schemas.openxmlformats.org/officeDocument/2006/relationships">
+  <p:cSld>
+    <p:spTree>
+      <p:nvGrpSpPr>
+        <p:cNvPr id="1" name=""/>
+        <p:cNvGrpSpPr/>
+        <p:nvPr/>
+      </p:nvGrpSpPr>
+      <p:grpSpPr>
+        <a:xfrm>
+          <a:off x="0" y="0"/>
+          <a:ext cx="0" cy="0"/>
+          <a:chOff x="0" y="0"/>
+          <a:chExt cx="0" cy="0"/>
+        </a:xfrm>
+      </p:grpSpPr>
+      <p:sp>
+        <p:nvSpPr>
+          <p:cNvPr id="2" name="Slide Image Placeholder 1"/>
+          <p:cNvSpPr>
+            <a:spLocks noGrp="1"/>
+          </p:cNvSpPr>
+          <p:nvPr>
+            <p:ph type="sldImg" idx="2"/>
+          </p:nvPr>
+        </p:nvSpPr>
+        <p:spPr/>
+      </p:sp>
+      <p:sp>
+        <p:nvSpPr>
+          <p:cNvPr id="3" name="Notes Placeholder 2"/>
+          <p:cNvSpPr>
+            <a:spLocks noGrp="1"/>
+          </p:cNvSpPr>
+          <p:nvPr>
+            <p:ph type="body" idx="3" sz="quarter"/>
+          </p:nvPr>
+        </p:nvSpPr>
+        <p:spPr/>
+        <p:txBody>
+          <a:bodyPr/>
+          <a:lstStyle/>
+          <a:p>
+            <a:r>
+              <a:t>(Sobre la actividad, no se proyecta) En IaaS el estudiante ya conoce DigitalOcean o AWS EC2 de oidas aunque no tenga cuenta; en PaaS, Render, Railway o Heroku son los que de verdad va a usar en el taller de hoy y en la Clase 3; en SaaS, Gmail o Notion le sirven para entender que «usted solo configura» no es un eufemismo, de verdad no hay nada que desplegar.</a:t>
+            </a:r>
+          </a:p>
+        </p:txBody>
+      </p:sp>
+      <p:sp>
+        <p:nvSpPr>
+          <p:cNvPr id="4" name="Slide Number Placeholder 3"/>
+          <p:cNvSpPr>
+            <a:spLocks noGrp="1"/>
+          </p:cNvSpPr>
+          <p:nvPr>
+            <p:ph type="sldNum" idx="5" sz="quarter"/>
+          </p:nvPr>
+        </p:nvSpPr>
+        <p:spPr/>
+      </p:sp>
+    </p:spTree>
+  </p:cSld>
+  <p:clrMapOvr>
+    <a:masterClrMapping/>
+  </p:clrMapOvr>
+</p:notes>
+</file>
+
+<file path=ppt/notesSlides/notesSlide7.xml><?xml version="1.0" encoding="utf-8"?>
+<p:notes xmlns:a="http://schemas.openxmlformats.org/drawingml/2006/main" xmlns:p="http://schemas.openxmlformats.org/presentationml/2006/main" xmlns:r="http://schemas.openxmlformats.org/officeDocument/2006/relationships">
+  <p:cSld>
+    <p:spTree>
+      <p:nvGrpSpPr>
+        <p:cNvPr id="1" name=""/>
+        <p:cNvGrpSpPr/>
+        <p:nvPr/>
+      </p:nvGrpSpPr>
+      <p:grpSpPr>
+        <a:xfrm>
+          <a:off x="0" y="0"/>
+          <a:ext cx="0" cy="0"/>
+          <a:chOff x="0" y="0"/>
+          <a:chExt cx="0" cy="0"/>
+        </a:xfrm>
+      </p:grpSpPr>
+      <p:sp>
+        <p:nvSpPr>
+          <p:cNvPr id="2" name="Slide Image Placeholder 1"/>
+          <p:cNvSpPr>
+            <a:spLocks noGrp="1"/>
+          </p:cNvSpPr>
+          <p:nvPr>
+            <p:ph type="sldImg" idx="2"/>
+          </p:nvPr>
+        </p:nvSpPr>
+        <p:spPr/>
+      </p:sp>
+      <p:sp>
+        <p:nvSpPr>
+          <p:cNvPr id="3" name="Notes Placeholder 2"/>
+          <p:cNvSpPr>
+            <a:spLocks noGrp="1"/>
+          </p:cNvSpPr>
+          <p:nvPr>
+            <p:ph type="body" idx="3" sz="quarter"/>
+          </p:nvPr>
+        </p:nvSpPr>
+        <p:spPr/>
+        <p:txBody>
+          <a:bodyPr/>
+          <a:lstStyle/>
+          <a:p>
+            <a:r>
+              <a:t>(Sobre la actividad, no se proyecta) Tres preguntas salen en voz alta en esta clase casi sin falta y conviene tener la respuesta lista, porque las tres se contestan en treinta segundos y desbloquean el taller.</a:t>
+            </a:r>
+          </a:p>
+          <a:p/>
+          <a:p>
+            <a:r>
+              <a:t>(Sobre la actividad, no se proyecta) El segundo error es dejar pasar ADR sin consecuencias negativas, y como esta clase tiene encuentro sincronico no hay excusa para no corregirlo en el momento: al pasar por los grupos en el tramo de taller, pregunte «que perdieron al elegir eso» antes de que el documento se suba.</a:t>
             </a:r>
           </a:p>
         </p:txBody>
@@ -4316,7 +4477,7 @@
                 </a:solidFill>
                 <a:latin typeface="Calibri"/>
               </a:rPr>
-              <a:t>La pila de responsabilidades: donde se corta la linea (1/2)</a:t>
+              <a:t>La pila de responsabilidades: donde se corta la linea (2/2)</a:t>
             </a:r>
           </a:p>
         </p:txBody>
@@ -4355,7 +4516,7 @@
                 </a:solidFill>
                 <a:latin typeface="Calibri"/>
               </a:rPr>
-              <a:t>–   Para entender los tres modelos hay que ver primero la pila completa de responsabilidades que existe debajo de cualquier aplicacion</a:t>
+              <a:t>–   Y finalmente el codigo de la aplicacion, sus datos y la administracion de usuarios y permisos.</a:t>
             </a:r>
           </a:p>
           <a:p>
@@ -4371,7 +4532,7 @@
                 </a:solidFill>
                 <a:latin typeface="Calibri"/>
               </a:rPr>
-              <a:t>–   De abajo hacia arriba: el edificio y la energia electrica, el hardware fisico (servidores, discos, cableado de red), la capa de virtualizacion que parte ese hardware en maquinas logicas</a:t>
+              <a:t>–   Son ocho o nueve capas segun como se cuente.</a:t>
             </a:r>
           </a:p>
           <a:p>
@@ -4387,7 +4548,23 @@
                 </a:solidFill>
                 <a:latin typeface="Calibri"/>
               </a:rPr>
-              <a:t>–   El sistema operativo de cada maquina, el runtime o entorno de ejecucion (por ejemplo Node.js, Python o la maquina virtual de Java) junto con servicios de apoyo como la base de datos</a:t>
+              <a:t>–   En el modelo tradicional, llamado on-premise porque los equipos son propios y estan en las instalaciones de la organizacion, todas son responsabilidad del cliente.</a:t>
+            </a:r>
+          </a:p>
+          <a:p>
+            <a:pPr>
+              <a:spcAft>
+                <a:spcPts val="800"/>
+              </a:spcAft>
+            </a:pPr>
+            <a:r>
+              <a:rPr sz="2000" b="0" i="0">
+                <a:solidFill>
+                  <a:srgbClr val="333333"/>
+                </a:solidFill>
+                <a:latin typeface="Calibri"/>
+              </a:rPr>
+              <a:t>–   Nada mas y nada menos: si el estudiante entiende esa frase, entendio la clase.</a:t>
             </a:r>
           </a:p>
         </p:txBody>
@@ -4568,7 +4745,7 @@
                 </a:solidFill>
                 <a:latin typeface="Calibri"/>
               </a:rPr>
-              <a:t>La pila de responsabilidades: donde se corta la linea (2/2)</a:t>
+              <a:t>IaaS, PaaS y SaaS: los tres cortes, uno por uno (1/4)</a:t>
             </a:r>
           </a:p>
         </p:txBody>
@@ -4607,7 +4784,7 @@
                 </a:solidFill>
                 <a:latin typeface="Calibri"/>
               </a:rPr>
-              <a:t>–   Y finalmente el codigo de la aplicacion, sus datos y la administracion de usuarios y permisos.</a:t>
+              <a:t>–   IaaS, infraestructura como servicio, corta la linea justo encima de la virtualizacion: el proveedor entrega maquinas virtuales, redes y discos</a:t>
             </a:r>
           </a:p>
           <a:p>
@@ -4623,7 +4800,7 @@
                 </a:solidFill>
                 <a:latin typeface="Calibri"/>
               </a:rPr>
-              <a:t>–   Son ocho o nueve capas segun como se cuente.</a:t>
+              <a:t>–   Y el cliente recibe una maquina practicamente vacia con un sistema operativo que debe actualizar, endurecer, monitorear y respaldar el mismo.</a:t>
             </a:r>
           </a:p>
           <a:p>
@@ -4639,7 +4816,7 @@
                 </a:solidFill>
                 <a:latin typeface="Calibri"/>
               </a:rPr>
-              <a:t>–   En el modelo tradicional, llamado on-premise porque los equipos son propios y estan en las instalaciones de la organizacion, todas son responsabilidad del cliente.</a:t>
+              <a:t>–   PaaS, plataforma como servicio, sube la linea dos escalones: el proveedor administra tambien el sistema operativo y el runtime, y el cliente entrega su codigo mas un archivo de configuracion; la plataforma lo construye, lo empaqueta y lo pone a correr.</a:t>
             </a:r>
           </a:p>
           <a:p>
@@ -4655,7 +4832,7 @@
                 </a:solidFill>
                 <a:latin typeface="Calibri"/>
               </a:rPr>
-              <a:t>–   Nada mas y nada menos: si el estudiante entiende esa frase, entendio la clase.</a:t>
+              <a:t>–   El cliente pierde el acceso a la maquina, porque ya no hay un servidor donde entrar por consola</a:t>
             </a:r>
           </a:p>
         </p:txBody>
@@ -4836,7 +5013,7 @@
                 </a:solidFill>
                 <a:latin typeface="Calibri"/>
               </a:rPr>
-              <a:t>IaaS, PaaS y SaaS: los tres cortes, uno por uno (1/4)</a:t>
+              <a:t>IaaS, PaaS y SaaS: los tres cortes, uno por uno (2/4)</a:t>
             </a:r>
           </a:p>
         </p:txBody>
@@ -4875,7 +5052,7 @@
                 </a:solidFill>
                 <a:latin typeface="Calibri"/>
               </a:rPr>
-              <a:t>–   IaaS, infraestructura como servicio, corta la linea justo encima de la virtualizacion: el proveedor entrega maquinas virtuales, redes y discos</a:t>
+              <a:t>–   Y gana velocidad: un despliegue que en IaaS implica preparar una imagen, configurar el servicio y probar la red, en PaaS se reduce a subir el codigo al repositorio.</a:t>
             </a:r>
           </a:p>
           <a:p>
@@ -4891,7 +5068,7 @@
                 </a:solidFill>
                 <a:latin typeface="Calibri"/>
               </a:rPr>
-              <a:t>–   Y el cliente recibe una maquina practicamente vacia con un sistema operativo que debe actualizar, endurecer, monitorear y respaldar el mismo.</a:t>
+              <a:t>–   Los niveles gratuitos tipicos de este modelo ofrecen del orden de 512 MB de memoria por instancia, una cantidad limitada de horas de ejecucion al mes y suspension automatica del servicio tras unos 15 minutos sin trafico</a:t>
             </a:r>
           </a:p>
           <a:p>
@@ -4907,7 +5084,7 @@
                 </a:solidFill>
                 <a:latin typeface="Calibri"/>
               </a:rPr>
-              <a:t>–   PaaS, plataforma como servicio, sube la linea dos escalones: el proveedor administra tambien el sistema operativo y el runtime, y el cliente entrega su codigo mas un archivo de configuracion; la plataforma lo construye, lo empaqueta y lo pone a correr.</a:t>
+              <a:t>–   Lo que produce el efecto conocido como arranque en frio: la primera peticion despues de la inactividad puede tardar varios segundos en lugar de milisegundos.</a:t>
             </a:r>
           </a:p>
           <a:p>
@@ -4923,7 +5100,7 @@
                 </a:solidFill>
                 <a:latin typeface="Calibri"/>
               </a:rPr>
-              <a:t>–   El cliente pierde el acceso a la maquina, porque ya no hay un servidor donde entrar por consola</a:t>
+              <a:t>–   Esos numeros son ordenes de magnitud tipicos que varian entre proveedores, no constantes; lo estructural es el patron, porque gratis siempre implica limites de memoria, de horas y de latencia en frio</a:t>
             </a:r>
           </a:p>
         </p:txBody>
@@ -5104,7 +5281,7 @@
                 </a:solidFill>
                 <a:latin typeface="Calibri"/>
               </a:rPr>
-              <a:t>IaaS, PaaS y SaaS: los tres cortes, uno por uno (2/4)</a:t>
+              <a:t>IaaS, PaaS y SaaS: los tres cortes, uno por uno (3/4)</a:t>
             </a:r>
           </a:p>
         </p:txBody>
@@ -5143,7 +5320,7 @@
                 </a:solidFill>
                 <a:latin typeface="Calibri"/>
               </a:rPr>
-              <a:t>–   Y gana velocidad: un despliegue que en IaaS implica preparar una imagen, configurar el servicio y probar la red, en PaaS se reduce a subir el codigo al repositorio.</a:t>
+              <a:t>–   Y el estudiante debe anticiparlo en su diseno en vez de descubrirlo la noche antes de la sustentacion.</a:t>
             </a:r>
           </a:p>
           <a:p>
@@ -5159,7 +5336,7 @@
                 </a:solidFill>
                 <a:latin typeface="Calibri"/>
               </a:rPr>
-              <a:t>–   Los niveles gratuitos tipicos de este modelo ofrecen del orden de 512 MB de memoria por instancia, una cantidad limitada de horas de ejecucion al mes y suspension automatica del servicio tras unos 15 minutos sin trafico</a:t>
+              <a:t>–   SaaS, software como servicio, lleva la linea hasta arriba: el proveedor administra la aplicacion completa y el cliente solo la configura y la usa, sin desplegar nada.</a:t>
             </a:r>
           </a:p>
           <a:p>
@@ -5175,7 +5352,7 @@
                 </a:solidFill>
                 <a:latin typeface="Calibri"/>
               </a:rPr>
-              <a:t>–   Lo que produce el efecto conocido como arranque en frio: la primera peticion despues de la inactividad puede tardar varios segundos en lugar de milisegundos.</a:t>
+              <a:t>–   El correo corporativo, un servicio de envio de mensajes transaccionales, un proveedor de identidad que resuelve el inicio de sesion o un servicio de almacenamiento y transformacion de imagenes son SaaS desde la perspectiva de quien construye CloudLite.</a:t>
             </a:r>
           </a:p>
           <a:p>
@@ -5191,7 +5368,7 @@
                 </a:solidFill>
                 <a:latin typeface="Calibri"/>
               </a:rPr>
-              <a:t>–   Esos numeros son ordenes de magnitud tipicos que varian entre proveedores, no constantes; lo estructural es el patron, porque gratis siempre implica limites de memoria, de horas y de latencia en frio</a:t>
+              <a:t>–   Y aqui esta el punto que casi siempre se pierde: los tres modelos no son excluyentes y un sistema real los combina.</a:t>
             </a:r>
           </a:p>
         </p:txBody>
@@ -5372,7 +5549,7 @@
                 </a:solidFill>
                 <a:latin typeface="Calibri"/>
               </a:rPr>
-              <a:t>IaaS, PaaS y SaaS: los tres cortes, uno por uno (3/4)</a:t>
+              <a:t>IaaS, PaaS y SaaS: los tres cortes, uno por uno (4/4)</a:t>
             </a:r>
           </a:p>
         </p:txBody>
@@ -5411,7 +5588,7 @@
                 </a:solidFill>
                 <a:latin typeface="Calibri"/>
               </a:rPr>
-              <a:t>–   Y el estudiante debe anticiparlo en su diseno en vez de descubrirlo la noche antes de la sustentacion.</a:t>
+              <a:t>–   La arquitectura probable de CloudLite Turnos es hibrida: la API desplegada como PaaS, la base de datos como servicio gestionado (que es PaaS en su variante de datos)</a:t>
             </a:r>
           </a:p>
           <a:p>
@@ -5427,7 +5604,7 @@
                 </a:solidFill>
                 <a:latin typeface="Calibri"/>
               </a:rPr>
-              <a:t>–   SaaS, software como servicio, lleva la linea hasta arriba: el proveedor administra la aplicacion completa y el cliente solo la configura y la usa, sin desplegar nada.</a:t>
+              <a:t>–   El envio de recordatorios delegado a un SaaS de correo y el almacenamiento de fotos de perfil a un SaaS de archivos.</a:t>
             </a:r>
           </a:p>
           <a:p>
@@ -5443,23 +5620,7 @@
                 </a:solidFill>
                 <a:latin typeface="Calibri"/>
               </a:rPr>
-              <a:t>–   El correo corporativo, un servicio de envio de mensajes transaccionales, un proveedor de identidad que resuelve el inicio de sesion o un servicio de almacenamiento y transformacion de imagenes son SaaS desde la perspectiva de quien construye CloudLite.</a:t>
-            </a:r>
-          </a:p>
-          <a:p>
-            <a:pPr>
-              <a:spcAft>
-                <a:spcPts val="800"/>
-              </a:spcAft>
-            </a:pPr>
-            <a:r>
-              <a:rPr sz="2000" b="0" i="0">
-                <a:solidFill>
-                  <a:srgbClr val="333333"/>
-                </a:solidFill>
-                <a:latin typeface="Calibri"/>
-              </a:rPr>
-              <a:t>–   Y aqui esta el punto que casi siempre se pierde: los tres modelos no son excluyentes y un sistema real los combina.</a:t>
+              <a:t>–   No se elige un modelo unico para todo el sistema: se elige por componente y se justifica cada eleccion, que es exactamente como se decide en la industria.</a:t>
             </a:r>
           </a:p>
         </p:txBody>
@@ -5640,7 +5801,7 @@
                 </a:solidFill>
                 <a:latin typeface="Calibri"/>
               </a:rPr>
-              <a:t>IaaS, PaaS y SaaS: los tres cortes, uno por uno (4/4)</a:t>
+              <a:t>Responsabilidad compartida: quien responde por que (1/2)</a:t>
             </a:r>
           </a:p>
         </p:txBody>
@@ -5679,7 +5840,7 @@
                 </a:solidFill>
                 <a:latin typeface="Calibri"/>
               </a:rPr>
-              <a:t>–   La arquitectura probable de CloudLite Turnos es hibrida: la API desplegada como PaaS, la base de datos como servicio gestionado (que es PaaS en su variante de datos)</a:t>
+              <a:t>–   El concepto que unifica todo esto se llama modelo de responsabilidad compartida y se resume en una frase que conviene memorizar: el proveedor es responsable de la seguridad DE la nube y el cliente de la seguridad EN la nube.</a:t>
             </a:r>
           </a:p>
           <a:p>
@@ -5695,7 +5856,7 @@
                 </a:solidFill>
                 <a:latin typeface="Calibri"/>
               </a:rPr>
-              <a:t>–   El envio de recordatorios delegado a un SaaS de correo y el almacenamiento de fotos de perfil a un SaaS de archivos.</a:t>
+              <a:t>–   El proveedor garantiza que el centro de datos no se incendie, que la capa de virtualizacion este parcheada y que los discos esten cifrados en reposo; el cliente sigue siendo responsable de sus contrasenas, sus permisos, sus datos y su configuracion.</a:t>
             </a:r>
           </a:p>
           <a:p>
@@ -5711,7 +5872,39 @@
                 </a:solidFill>
                 <a:latin typeface="Calibri"/>
               </a:rPr>
-              <a:t>–   El entregable de hoy no pide elegir un modelo unico para todo el sistema; pide elegir por componente y justificar cada eleccion, que es exactamente como se decide en la industria.</a:t>
+              <a:t>–   Importa porque la causa dominante de los incidentes de seguridad en la nube no son fallas del proveedor sino configuraciones erradas del cliente: un almacenamiento de archivos dejado publico</a:t>
+            </a:r>
+          </a:p>
+          <a:p>
+            <a:pPr>
+              <a:spcAft>
+                <a:spcPts val="800"/>
+              </a:spcAft>
+            </a:pPr>
+            <a:r>
+              <a:rPr sz="2000" b="0" i="0">
+                <a:solidFill>
+                  <a:srgbClr val="333333"/>
+                </a:solidFill>
+                <a:latin typeface="Calibri"/>
+              </a:rPr>
+              <a:t>–   Una credencial subida al repositorio en texto plano, un puerto de base de datos expuesto a internet.</a:t>
+            </a:r>
+          </a:p>
+          <a:p>
+            <a:pPr>
+              <a:spcAft>
+                <a:spcPts val="800"/>
+              </a:spcAft>
+            </a:pPr>
+            <a:r>
+              <a:rPr sz="2000" b="0" i="0">
+                <a:solidFill>
+                  <a:srgbClr val="333333"/>
+                </a:solidFill>
+                <a:latin typeface="Calibri"/>
+              </a:rPr>
+              <a:t>–   Subir de IaaS a PaaS reduce la superficie de responsabilidad del cliente, pero nunca la elimina, y esa idea es el punto de partida literal de la Clase 6.</a:t>
             </a:r>
           </a:p>
         </p:txBody>
@@ -5892,7 +6085,7 @@
                 </a:solidFill>
                 <a:latin typeface="Calibri"/>
               </a:rPr>
-              <a:t>Responsabilidad compartida: quien responde por que (1/2)</a:t>
+              <a:t>Responsabilidad compartida: quien responde por que (2/2)</a:t>
             </a:r>
           </a:p>
         </p:txBody>
@@ -5931,7 +6124,7 @@
                 </a:solidFill>
                 <a:latin typeface="Calibri"/>
               </a:rPr>
-              <a:t>–   El concepto que unifica todo esto se llama modelo de responsabilidad compartida y se resume en una frase que conviene memorizar: el proveedor es responsable de la seguridad DE la nube y el cliente de la seguridad EN la nube.</a:t>
+              <a:t>–   Pero hay un tercer eje que el estudiante no ve solo, el amarre al proveedor o vendor lock-in, que es el costo de mudarse a otro proveedor mas adelante: bajo en IaaS, porque una maquina virtual con Linux se parece a cualquier otra; medio en PaaS</a:t>
             </a:r>
           </a:p>
           <a:p>
@@ -5947,7 +6140,7 @@
                 </a:solidFill>
                 <a:latin typeface="Calibri"/>
               </a:rPr>
-              <a:t>–   El proveedor garantiza que el centro de datos no se incendie, que la capa de virtualizacion este parcheada y que los discos esten cifrados en reposo; el cliente sigue siendo responsable de sus contrasenas, sus permisos, sus datos y su configuracion.</a:t>
+              <a:t>–   Porque el archivo de configuracion y algunos servicios son propietarios; potencialmente alto en SaaS, porque los datos y parte de la logica viven dentro de un producto ajeno.</a:t>
             </a:r>
           </a:p>
           <a:p>
@@ -5963,39 +6156,7 @@
                 </a:solidFill>
                 <a:latin typeface="Calibri"/>
               </a:rPr>
-              <a:t>–   Importa porque la causa dominante de los incidentes de seguridad en la nube no son fallas del proveedor sino configuraciones erradas del cliente: un almacenamiento de archivos dejado publico</a:t>
-            </a:r>
-          </a:p>
-          <a:p>
-            <a:pPr>
-              <a:spcAft>
-                <a:spcPts val="800"/>
-              </a:spcAft>
-            </a:pPr>
-            <a:r>
-              <a:rPr sz="2000" b="0" i="0">
-                <a:solidFill>
-                  <a:srgbClr val="333333"/>
-                </a:solidFill>
-                <a:latin typeface="Calibri"/>
-              </a:rPr>
-              <a:t>–   Una credencial subida al repositorio en texto plano, un puerto de base de datos expuesto a internet.</a:t>
-            </a:r>
-          </a:p>
-          <a:p>
-            <a:pPr>
-              <a:spcAft>
-                <a:spcPts val="800"/>
-              </a:spcAft>
-            </a:pPr>
-            <a:r>
-              <a:rPr sz="2000" b="0" i="0">
-                <a:solidFill>
-                  <a:srgbClr val="333333"/>
-                </a:solidFill>
-                <a:latin typeface="Calibri"/>
-              </a:rPr>
-              <a:t>–   Subir de IaaS a PaaS reduce la superficie de responsabilidad del cliente, pero nunca la elimina, y esa idea es el punto de partida literal de la Clase 6.</a:t>
+              <a:t>–   Para CloudLite la mitigacion no es evitar SaaS sino acotarlo: si el envio de correos se encapsula detras de una interfaz propia, por ejemplo un modulo Notificador con un solo metodo enviar, cambiar de proveedor toca un archivo y no cuarenta.</a:t>
             </a:r>
           </a:p>
         </p:txBody>
@@ -6176,7 +6337,7 @@
                 </a:solidFill>
                 <a:latin typeface="Calibri"/>
               </a:rPr>
-              <a:t>Responsabilidad compartida: quien responde por que (2/2)</a:t>
+              <a:t>El ADR-001: seis secciones rotuladas y una sola decision (1/3)</a:t>
             </a:r>
           </a:p>
         </p:txBody>
@@ -6215,7 +6376,7 @@
                 </a:solidFill>
                 <a:latin typeface="Calibri"/>
               </a:rPr>
-              <a:t>–   Pero hay un tercer eje que el estudiante no ve solo, el amarre al proveedor o vendor lock-in, que es el costo de mudarse a otro proveedor mas adelante: bajo en IaaS, porque una maquina virtual con Linux se parece a cualquier otra; medio en PaaS</a:t>
+              <a:t>–   La decision se registra en el ADR-001.</a:t>
             </a:r>
           </a:p>
           <a:p>
@@ -6231,7 +6392,7 @@
                 </a:solidFill>
                 <a:latin typeface="Calibri"/>
               </a:rPr>
-              <a:t>–   Porque el archivo de configuracion y algunos servicios son propietarios; potencialmente alto en SaaS, porque los datos y parte de la logica viven dentro de un producto ajeno.</a:t>
+              <a:t>–   Un ADR (Architecture Decision Record, registro de decision arquitectonica) es un documento corto, de media pagina a una pagina, que registra UNA sola decision.</a:t>
             </a:r>
           </a:p>
           <a:p>
@@ -6247,7 +6408,39 @@
                 </a:solidFill>
                 <a:latin typeface="Calibri"/>
               </a:rPr>
-              <a:t>–   Para CloudLite la mitigacion no es evitar SaaS sino acotarlo: si el envio de correos se encapsula detras de una interfaz propia, por ejemplo un modulo Notificador con un solo metodo enviar, cambiar de proveedor toca un archivo y no cuarenta.</a:t>
+              <a:t>–   En este curso tiene SEIS secciones rotuladas, siempre las mismas y en este orden,: 1) Titulo, con el numero consecutivo del ADR; 2) Estado</a:t>
+            </a:r>
+          </a:p>
+          <a:p>
+            <a:pPr>
+              <a:spcAft>
+                <a:spcPts val="800"/>
+              </a:spcAft>
+            </a:pPr>
+            <a:r>
+              <a:rPr sz="2000" b="0" i="0">
+                <a:solidFill>
+                  <a:srgbClr val="333333"/>
+                </a:solidFill>
+                <a:latin typeface="Calibri"/>
+              </a:rPr>
+              <a:t>–   Que hoy es «Aceptado» mas la fecha de la sesion; 3) Contexto, o sea las restricciones bajo las que se decide; 4) Decision, en una sola frase y con un unico modelo dominante</a:t>
+            </a:r>
+          </a:p>
+          <a:p>
+            <a:pPr>
+              <a:spcAft>
+                <a:spcPts val="800"/>
+              </a:spcAft>
+            </a:pPr>
+            <a:r>
+              <a:rPr sz="2000" b="0" i="0">
+                <a:solidFill>
+                  <a:srgbClr val="333333"/>
+                </a:solidFill>
+                <a:latin typeface="Calibri"/>
+              </a:rPr>
+              <a:t>–   5) Alternativas descartadas, exactamente dos y con el motivo atado al dominio; 6) Consecuencias, con lo bueno y lo malo que se acepta.</a:t>
             </a:r>
           </a:p>
         </p:txBody>
@@ -6428,7 +6621,7 @@
                 </a:solidFill>
                 <a:latin typeface="Calibri"/>
               </a:rPr>
-              <a:t>El ADR-001: seis secciones rotuladas y una sola decision (1/4)</a:t>
+              <a:t>El ADR-001: seis secciones rotuladas y una sola decision (2/3)</a:t>
             </a:r>
           </a:p>
         </p:txBody>
@@ -6467,7 +6660,7 @@
                 </a:solidFill>
                 <a:latin typeface="Calibri"/>
               </a:rPr>
-              <a:t>–   El entregable concreto es el ADR-001.</a:t>
+              <a:t>–   La regla de una decision por documento no es burocracia: es lo que permite que meses despues alguien lea por que se eligio algo sin depender de la memoria de nadie.</a:t>
             </a:r>
           </a:p>
           <a:p>
@@ -6483,7 +6676,7 @@
                 </a:solidFill>
                 <a:latin typeface="Calibri"/>
               </a:rPr>
-              <a:t>–   Un ADR (Architecture Decision Record, registro de decision arquitectonica) es un documento corto, de media pagina a una pagina, que registra UNA sola decision.</a:t>
+              <a:t>–   Un ADR-001 aceptable para CloudLite Turnos diria en CONTEXTO: la barberia agenda por mensajeria y pierde alrededor de tres turnos diarios por doble reserva</a:t>
             </a:r>
           </a:p>
           <a:p>
@@ -6499,7 +6692,7 @@
                 </a:solidFill>
                 <a:latin typeface="Calibri"/>
               </a:rPr>
-              <a:t>–   En este curso tiene SEIS secciones rotuladas, siempre las mismas y en este orden, y hay que dictarlas tal cual porque son las que la actividad califica: 1) Titulo, con el numero consecutivo del ADR; 2) Estado</a:t>
+              <a:t>–   El proyecto lo sostiene un desarrollador (o un equipo de dos o tres, si el docente lo autorizo) durante doce semanas, sin presupuesto ni tarjeta de credito, y el sistema tiene que estar disponible el dia de la sustentacion.</a:t>
             </a:r>
           </a:p>
           <a:p>
@@ -6515,7 +6708,7 @@
                 </a:solidFill>
                 <a:latin typeface="Calibri"/>
               </a:rPr>
-              <a:t>–   Que hoy es «Aceptado» mas la fecha de la sesion; 3) Contexto, o sea las restricciones bajo las que se decide; 4) Decision, en una sola frase y con un unico modelo dominante</a:t>
+              <a:t>–   En DECISION va una frase: la aplicacion de CloudLite Turnos se despliega sobre PaaS.</a:t>
             </a:r>
           </a:p>
           <a:p>
@@ -6531,7 +6724,7 @@
                 </a:solidFill>
                 <a:latin typeface="Calibri"/>
               </a:rPr>
-              <a:t>–   5) Alternativas descartadas, exactamente dos y con el motivo atado al dominio; 6) Consecuencias, con lo bueno y lo malo que se acepta.</a:t>
+              <a:t>–   En ALTERNATIVAS DESCARTADAS van dos y solo dos: IaaS con maquina virtual propia, descartada porque habria que asumir parches y respaldos del sistema operativo sin tiempo para ello</a:t>
             </a:r>
           </a:p>
         </p:txBody>
@@ -6712,7 +6905,7 @@
                 </a:solidFill>
                 <a:latin typeface="Calibri"/>
               </a:rPr>
-              <a:t>El ADR-001: seis secciones rotuladas y una sola decision (2/4)</a:t>
+              <a:t>El ADR-001: seis secciones rotuladas y una sola decision (3/3)</a:t>
             </a:r>
           </a:p>
         </p:txBody>
@@ -6751,7 +6944,7 @@
                 </a:solidFill>
                 <a:latin typeface="Calibri"/>
               </a:rPr>
-              <a:t>–   El reparto en la plataforma es que las cinco primeras van en la pregunta 6 y la sexta en la pregunta 7, pero es UN solo documento</a:t>
+              <a:t>–   Y SaaS de agendamiento ya existente, descartada porque el proyecto perderia su objeto, ya que no habria arquitectura que disenar sino solo configuracion.</a:t>
             </a:r>
           </a:p>
           <a:p>
@@ -6767,7 +6960,7 @@
                 </a:solidFill>
                 <a:latin typeface="Calibri"/>
               </a:rPr>
-              <a:t>–   Y conviene decirlo en voz alta porque el estudiante que lo entienda como dos ejercicios sueltos repite la decision en las consecuencias y pierde puntos.</a:t>
+              <a:t>–   Y en CONSECUENCIAS, que es la seccion que los estudiantes dejan a medias, deben aparecer tambien las malas: se acepta un arranque en frio de varios segundos tras inactividad</a:t>
             </a:r>
           </a:p>
           <a:p>
@@ -6783,39 +6976,7 @@
                 </a:solidFill>
                 <a:latin typeface="Calibri"/>
               </a:rPr>
-              <a:t>–   No hay seccion de «opciones consideradas»: ese analisis es la matriz de la pregunta 5, y en el ADR solo quedan las dos alternativas que se descartaron.</a:t>
-            </a:r>
-          </a:p>
-          <a:p>
-            <a:pPr>
-              <a:spcAft>
-                <a:spcPts val="800"/>
-              </a:spcAft>
-            </a:pPr>
-            <a:r>
-              <a:rPr sz="2000" b="0" i="0">
-                <a:solidFill>
-                  <a:srgbClr val="333333"/>
-                </a:solidFill>
-                <a:latin typeface="Calibri"/>
-              </a:rPr>
-              <a:t>–   La regla de una decision por documento no es burocracia: es lo que permite que meses despues alguien lea por que se eligio algo sin depender de la memoria de nadie.</a:t>
-            </a:r>
-          </a:p>
-          <a:p>
-            <a:pPr>
-              <a:spcAft>
-                <a:spcPts val="800"/>
-              </a:spcAft>
-            </a:pPr>
-            <a:r>
-              <a:rPr sz="2000" b="0" i="0">
-                <a:solidFill>
-                  <a:srgbClr val="333333"/>
-                </a:solidFill>
-                <a:latin typeface="Calibri"/>
-              </a:rPr>
-              <a:t>–   Un ADR-001 aceptable para CloudLite Turnos diria en CONTEXTO: la barberia agenda por mensajeria y pierde alrededor de tres turnos diarios por doble reserva</a:t>
+              <a:t>–   Se acepta no poder afinar el sistema operativo y se acepta un amarre medio al proveedor, mitigado con contenedores.</a:t>
             </a:r>
           </a:p>
         </p:txBody>
@@ -7343,7 +7504,7 @@
                 </a:solidFill>
                 <a:latin typeface="Calibri"/>
               </a:rPr>
-              <a:t>El ADR-001: seis secciones rotuladas y una sola decision (3/4)</a:t>
+              <a:t>La pila dibujada: nombres reales para IaaS, PaaS y SaaS</a:t>
             </a:r>
           </a:p>
         </p:txBody>
@@ -7382,7 +7543,7 @@
                 </a:solidFill>
                 <a:latin typeface="Calibri"/>
               </a:rPr>
-              <a:t>–   El proyecto lo sostiene un desarrollador (o un equipo de dos o tres, si el docente lo autorizo) durante doce semanas, sin presupuesto ni tarjeta de credito, y el sistema tiene que estar disponible el dia de la sustentacion.</a:t>
+              <a:t>–   Proyecte inmediatamente despues de fijar la plantilla del ADR: es el mismo corte de responsabilidades que se acaba de explicar en prosa, ahora dibujado y con un producto reconocible en cada columna.</a:t>
             </a:r>
           </a:p>
           <a:p>
@@ -7398,7 +7559,7 @@
                 </a:solidFill>
                 <a:latin typeface="Calibri"/>
               </a:rPr>
-              <a:t>–   «Existen tres modelos de servicio y hay que elegir uno» NO es contexto, es el apunte de clase, y esa confusion es el error dominante de la pregunta 6.</a:t>
+              <a:t>–   Recorrala de abajo hacia arriba y no al reves: senale primero que las tres columnas comparten la misma base (infraestructura), y que lo unico que cambia es hasta donde sube el color amarillo.</a:t>
             </a:r>
           </a:p>
           <a:p>
@@ -7414,7 +7575,7 @@
                 </a:solidFill>
                 <a:latin typeface="Calibri"/>
               </a:rPr>
-              <a:t>–   En DECISION va una frase: la aplicacion de CloudLite Turnos se despliega sobre PaaS.</a:t>
+              <a:t>–   Pregunte en voz alta, senalando la columna de PaaS: «por que la fila de Sistema operativo es celeste aqui y amarilla en IaaS?» La respuesta correcta es que el proveedor la absorbio</a:t>
             </a:r>
           </a:p>
           <a:p>
@@ -7430,7 +7591,7 @@
                 </a:solidFill>
                 <a:latin typeface="Calibri"/>
               </a:rPr>
-              <a:t>–   En ALTERNATIVAS DESCARTADAS van dos y solo dos: IaaS con maquina virtual propia, descartada porque habria que asumir parches y respaldos del sistema operativo sin tiempo para ello</a:t>
+              <a:t>–   No que desaparecio: es el error mas comun, creer que en PaaS el sistema operativo deja de existir en vez de que alguien mas lo administra.</a:t>
             </a:r>
           </a:p>
         </p:txBody>
@@ -7611,7 +7772,7 @@
                 </a:solidFill>
                 <a:latin typeface="Calibri"/>
               </a:rPr>
-              <a:t>El ADR-001: seis secciones rotuladas y una sola decision (4/4)</a:t>
+              <a:t>Preguntas frecuentes y cierre conceptual () (1/3)</a:t>
             </a:r>
           </a:p>
         </p:txBody>
@@ -7650,7 +7811,7 @@
                 </a:solidFill>
                 <a:latin typeface="Calibri"/>
               </a:rPr>
-              <a:t>–   Y SaaS de agendamiento ya existente, descartada porque el proyecto perderia su objeto, ya que no habria arquitectura que disenar sino solo configuracion.</a:t>
+              <a:t>–   Cual de los tres modelos es el mejor: ninguno; la pregunta correcta es cual conviene para este componente, con este equipo y en este plazo, y responder que PaaS es mejor sin decir para que es la senal de que el ADR sera de relleno.</a:t>
             </a:r>
           </a:p>
           <a:p>
@@ -7666,7 +7827,7 @@
                 </a:solidFill>
                 <a:latin typeface="Calibri"/>
               </a:rPr>
-              <a:t>–   Y en CONSECUENCIAS, que es la seccion que los estudiantes dejan a medias, deben aparecer tambien las malas: se acepta un arranque en frio de varios segundos tras inactividad</a:t>
+              <a:t>–   Donde encaja serverless o las funciones como servicio: es una variante extrema de PaaS en la que no se administra ninguna instancia siempre encendida</a:t>
             </a:r>
           </a:p>
           <a:p>
@@ -7682,7 +7843,23 @@
                 </a:solidFill>
                 <a:latin typeface="Calibri"/>
               </a:rPr>
-              <a:t>–   Se acepta no poder afinar el sistema operativo y se acepta un amarre medio al proveedor, mitigado con contenedores.</a:t>
+              <a:t>–   Se paga por invocacion y el codigo debe tolerar arrancar en frio; para efectos del curso se clasifica como PaaS anotando la diferencia.</a:t>
+            </a:r>
+          </a:p>
+          <a:p>
+            <a:pPr>
+              <a:spcAft>
+                <a:spcPts val="800"/>
+              </a:spcAft>
+            </a:pPr>
+            <a:r>
+              <a:rPr sz="2000" b="0" i="0">
+                <a:solidFill>
+                  <a:srgbClr val="333333"/>
+                </a:solidFill>
+                <a:latin typeface="Calibri"/>
+              </a:rPr>
+              <a:t>–   Y la mas comun: si elegimos PaaS, para que aprendemos Docker en la Clase 3 si la plataforma se encarga de todo.</a:t>
             </a:r>
           </a:p>
         </p:txBody>
@@ -7863,7 +8040,7 @@
                 </a:solidFill>
                 <a:latin typeface="Calibri"/>
               </a:rPr>
-              <a:t>La pila dibujada: nombres reales para IaaS, PaaS y SaaS (1/2)</a:t>
+              <a:t>Preguntas frecuentes y cierre conceptual () (2/3)</a:t>
             </a:r>
           </a:p>
         </p:txBody>
@@ -7902,7 +8079,7 @@
                 </a:solidFill>
                 <a:latin typeface="Calibri"/>
               </a:rPr>
-              <a:t>–   Proyecte inmediatamente despues de fijar la plantilla del ADR: es el mismo corte de responsabilidades que se acaba de explicar en prosa, ahora dibujado y con un producto reconocible en cada columna.</a:t>
+              <a:t>–   Respuesta: porque la plataforma construye internamente una imagen de contenedor con el codigo entregado, de modo que entender contenedores es entender que hace la plataforma por debajo</a:t>
             </a:r>
           </a:p>
           <a:p>
@@ -7918,7 +8095,7 @@
                 </a:solidFill>
                 <a:latin typeface="Calibri"/>
               </a:rPr>
-              <a:t>–   Recorrala de abajo hacia arriba y no al reves: senale primero que las tres columnas comparten la misma base (infraestructura), y que lo unico que cambia es hasta donde sube el color amarillo.</a:t>
+              <a:t>–   Y porque el contenedor es precisamente el artefacto que vuelve reversible la decision de hoy.</a:t>
             </a:r>
           </a:p>
           <a:p>
@@ -7934,7 +8111,23 @@
                 </a:solidFill>
                 <a:latin typeface="Calibri"/>
               </a:rPr>
-              <a:t>–   En IaaS el estudiante ya conoce DigitalOcean o AWS EC2 de oidas aunque no tenga cuenta; en PaaS, Render, Railway o Heroku son los que de verdad va a usar en el taller de hoy y en la Clase 3</a:t>
+              <a:t>–   La Clase 4 usara este mismo ADR para justificar cuantas piezas tendra el sistema, y el Parcial 1 de la Clase 5 evalua la capacidad de ubicar la linea de responsabilidad en cada modelo.</a:t>
+            </a:r>
+          </a:p>
+          <a:p>
+            <a:pPr>
+              <a:spcAft>
+                <a:spcPts val="800"/>
+              </a:spcAft>
+            </a:pPr>
+            <a:r>
+              <a:rPr sz="2000" b="0" i="0">
+                <a:solidFill>
+                  <a:srgbClr val="333333"/>
+                </a:solidFill>
+                <a:latin typeface="Calibri"/>
+              </a:rPr>
+              <a:t>–   Error tipico del docente que no domina el tema: presentar IaaS, PaaS y SaaS como catalogos de marcas y no como un modelo conceptual de responsabilidad</a:t>
             </a:r>
           </a:p>
         </p:txBody>
@@ -8115,7 +8308,7 @@
                 </a:solidFill>
                 <a:latin typeface="Calibri"/>
               </a:rPr>
-              <a:t>La pila dibujada: nombres reales para IaaS, PaaS y SaaS (2/2)</a:t>
+              <a:t>Preguntas frecuentes y cierre conceptual () (3/3)</a:t>
             </a:r>
           </a:p>
         </p:txBody>
@@ -8154,7 +8347,7 @@
                 </a:solidFill>
                 <a:latin typeface="Calibri"/>
               </a:rPr>
-              <a:t>–   En SaaS, Gmail o Notion le sirven para entender que «usted solo configura» no es un eufemismo, de verdad no hay nada que desplegar.</a:t>
+              <a:t>–   Con lo cual el estudiante memoriza nombres de productos que cambiaran en dos periodos y no aprende a preguntar quien administra que capa</a:t>
             </a:r>
           </a:p>
           <a:p>
@@ -8170,7 +8363,7 @@
                 </a:solidFill>
                 <a:latin typeface="Calibri"/>
               </a:rPr>
-              <a:t>–   Pregunte en voz alta, senalando la columna de PaaS: «por que la fila de Sistema operativo es celeste aqui y amarilla en IaaS?» La respuesta correcta es que el proveedor la absorbio</a:t>
+              <a:t>–   Aguas abajo, en la Clase 6 sera incapaz de decir de que es responsable el en materia de seguridad, y en la Clase 10 no podra explicar por que su factura hipotetica sube o baja.</a:t>
             </a:r>
           </a:p>
           <a:p>
@@ -8186,7 +8379,23 @@
                 </a:solidFill>
                 <a:latin typeface="Calibri"/>
               </a:rPr>
-              <a:t>–   No que desaparecio: es el error mas comun, creer que en PaaS el sistema operativo deja de existir en vez de que alguien mas lo administra.</a:t>
+              <a:t>–   Un ADR que solo lista beneficios no es una decision, es una justificacion escrita despues de los hechos</a:t>
+            </a:r>
+          </a:p>
+          <a:p>
+            <a:pPr>
+              <a:spcAft>
+                <a:spcPts val="800"/>
+              </a:spcAft>
+            </a:pPr>
+            <a:r>
+              <a:rPr sz="2000" b="0" i="0">
+                <a:solidFill>
+                  <a:srgbClr val="333333"/>
+                </a:solidFill>
+                <a:latin typeface="Calibri"/>
+              </a:rPr>
+              <a:t>–   Y quien lo entrega asi llegara a la Clase 11 sin poder explicar ningun trade-off de su arquitectura, que es justamente lo que se le exigira sustentar en la Clase 15.</a:t>
             </a:r>
           </a:p>
         </p:txBody>
@@ -8367,21 +8576,141 @@
                 </a:solidFill>
                 <a:latin typeface="Calibri"/>
               </a:rPr>
-              <a:t>Preguntas frecuentes y cierre conceptual () (1/3)</a:t>
-            </a:r>
-          </a:p>
-        </p:txBody>
-      </p:sp>
-      <p:sp>
-        <p:nvSpPr>
-          <p:cNvPr id="5" name="TextBox 4"/>
+              <a:t>La plantilla de ADR: los seis apartados</a:t>
+            </a:r>
+          </a:p>
+        </p:txBody>
+      </p:sp>
+      <p:sp>
+        <p:nvSpPr>
+          <p:cNvPr id="5" name="Rounded Rectangle 4"/>
+          <p:cNvSpPr/>
+          <p:nvPr/>
+        </p:nvSpPr>
+        <p:spPr>
+          <a:xfrm>
+            <a:off x="457200" y="1261872"/>
+            <a:ext cx="11277295" cy="5093208"/>
+          </a:xfrm>
+          <a:prstGeom prst="roundRect">
+            <a:avLst>
+              <a:gd name="adj" fmla="val 12000"/>
+            </a:avLst>
+          </a:prstGeom>
+          <a:solidFill>
+            <a:srgbClr val="1E2A38"/>
+          </a:solidFill>
+          <a:ln>
+            <a:noFill/>
+          </a:ln>
+        </p:spPr>
+        <p:style>
+          <a:lnRef idx="1">
+            <a:schemeClr val="accent1"/>
+          </a:lnRef>
+          <a:fillRef idx="3">
+            <a:schemeClr val="accent1"/>
+          </a:fillRef>
+          <a:effectRef idx="2">
+            <a:schemeClr val="accent1"/>
+          </a:effectRef>
+          <a:fontRef idx="minor">
+            <a:schemeClr val="lt1"/>
+          </a:fontRef>
+        </p:style>
+        <p:txBody>
+          <a:bodyPr rtlCol="0" anchor="ctr"/>
+          <a:lstStyle/>
+          <a:p>
+            <a:pPr algn="ctr"/>
+          </a:p>
+        </p:txBody>
+      </p:sp>
+      <p:sp>
+        <p:nvSpPr>
+          <p:cNvPr id="6" name="Rectangle 5"/>
+          <p:cNvSpPr/>
+          <p:nvPr/>
+        </p:nvSpPr>
+        <p:spPr>
+          <a:xfrm>
+            <a:off x="457200" y="1261872"/>
+            <a:ext cx="11277295" cy="320040"/>
+          </a:xfrm>
+          <a:prstGeom prst="rect">
+            <a:avLst/>
+          </a:prstGeom>
+          <a:solidFill>
+            <a:srgbClr val="095292"/>
+          </a:solidFill>
+          <a:ln>
+            <a:noFill/>
+          </a:ln>
+        </p:spPr>
+        <p:style>
+          <a:lnRef idx="1">
+            <a:schemeClr val="accent1"/>
+          </a:lnRef>
+          <a:fillRef idx="3">
+            <a:schemeClr val="accent1"/>
+          </a:fillRef>
+          <a:effectRef idx="2">
+            <a:schemeClr val="accent1"/>
+          </a:effectRef>
+          <a:fontRef idx="minor">
+            <a:schemeClr val="lt1"/>
+          </a:fontRef>
+        </p:style>
+        <p:txBody>
+          <a:bodyPr rtlCol="0" anchor="ctr"/>
+          <a:lstStyle/>
+          <a:p>
+            <a:pPr algn="ctr"/>
+          </a:p>
+        </p:txBody>
+      </p:sp>
+      <p:sp>
+        <p:nvSpPr>
+          <p:cNvPr id="7" name="TextBox 6"/>
           <p:cNvSpPr txBox="1"/>
           <p:nvPr/>
         </p:nvSpPr>
         <p:spPr>
           <a:xfrm>
-            <a:off x="457200" y="1170432"/>
-            <a:ext cx="11277295" cy="5230368"/>
+            <a:off x="685800" y="1307592"/>
+            <a:ext cx="10820095" cy="256032"/>
+          </a:xfrm>
+          <a:prstGeom prst="rect">
+            <a:avLst/>
+          </a:prstGeom>
+          <a:noFill/>
+        </p:spPr>
+        <p:txBody>
+          <a:bodyPr wrap="square" anchor="ctr"/>
+          <a:lstStyle/>
+          <a:p>
+            <a:r>
+              <a:rPr sz="1000" b="1" i="0">
+                <a:solidFill>
+                  <a:srgbClr val="269CCB"/>
+                </a:solidFill>
+                <a:latin typeface="Calibri"/>
+              </a:rPr>
+              <a:t>● ● ●</a:t>
+            </a:r>
+          </a:p>
+        </p:txBody>
+      </p:sp>
+      <p:sp>
+        <p:nvSpPr>
+          <p:cNvPr id="8" name="TextBox 7"/>
+          <p:cNvSpPr txBox="1"/>
+          <p:nvPr/>
+        </p:nvSpPr>
+        <p:spPr>
+          <a:xfrm>
+            <a:off x="777240" y="1719072"/>
+            <a:ext cx="5181447" cy="4453128"/>
           </a:xfrm>
           <a:prstGeom prst="rect">
             <a:avLst/>
@@ -8396,88 +8725,367 @@
           <a:p>
             <a:pPr>
               <a:spcAft>
-                <a:spcPts val="800"/>
+                <a:spcPts val="400"/>
               </a:spcAft>
             </a:pPr>
             <a:r>
-              <a:rPr sz="2000" b="0" i="0">
-                <a:solidFill>
-                  <a:srgbClr val="333333"/>
-                </a:solidFill>
-                <a:latin typeface="Calibri"/>
-              </a:rPr>
-              <a:t>–   Cual de los tres modelos es el mejor: ninguno; la pregunta correcta es cual conviene para este componente, con este equipo y en este plazo, y responder que PaaS es mejor sin decir para que es la senal de que el ADR sera de relleno.</a:t>
+              <a:rPr sz="1400" b="0" i="0">
+                <a:solidFill>
+                  <a:srgbClr val="FFFFFF"/>
+                </a:solidFill>
+                <a:latin typeface="Calibri"/>
+              </a:rPr>
+              <a:t># ADR-001 · Modelo de servicio dominante de CloudLite</a:t>
             </a:r>
           </a:p>
           <a:p>
             <a:pPr>
               <a:spcAft>
-                <a:spcPts val="800"/>
+                <a:spcPts val="400"/>
               </a:spcAft>
             </a:pPr>
             <a:r>
-              <a:rPr sz="2000" b="0" i="0">
-                <a:solidFill>
-                  <a:srgbClr val="333333"/>
-                </a:solidFill>
-                <a:latin typeface="Calibri"/>
-              </a:rPr>
-              <a:t>–   Donde encaja serverless o las funciones como servicio: es una variante extrema de PaaS en la que no se administra ninguna instancia siempre encendida</a:t>
+              <a:rPr sz="1400" b="0" i="0">
+                <a:solidFill>
+                  <a:srgbClr val="FFFFFF"/>
+                </a:solidFill>
+                <a:latin typeface="Calibri"/>
+              </a:rPr>
+              <a:t/>
             </a:r>
           </a:p>
           <a:p>
             <a:pPr>
               <a:spcAft>
-                <a:spcPts val="800"/>
+                <a:spcPts val="400"/>
               </a:spcAft>
             </a:pPr>
             <a:r>
-              <a:rPr sz="2000" b="0" i="0">
-                <a:solidFill>
-                  <a:srgbClr val="333333"/>
-                </a:solidFill>
-                <a:latin typeface="Calibri"/>
-              </a:rPr>
-              <a:t>–   Se paga por invocacion y el codigo debe tolerar arrancar en frio; para efectos del curso se clasifica como PaaS anotando la diferencia.</a:t>
+              <a:rPr sz="1400" b="0" i="0">
+                <a:solidFill>
+                  <a:srgbClr val="FFFFFF"/>
+                </a:solidFill>
+                <a:latin typeface="Calibri"/>
+              </a:rPr>
+              <a:t>## 1. Estado</a:t>
             </a:r>
           </a:p>
           <a:p>
             <a:pPr>
               <a:spcAft>
-                <a:spcPts val="800"/>
+                <a:spcPts val="400"/>
               </a:spcAft>
             </a:pPr>
             <a:r>
-              <a:rPr sz="2000" b="0" i="0">
-                <a:solidFill>
-                  <a:srgbClr val="333333"/>
-                </a:solidFill>
-                <a:latin typeface="Calibri"/>
-              </a:rPr>
-              <a:t>–   Y la mas comun: si elegimos PaaS, para que aprendemos Docker en la Clase 3 si la plataforma se encarga de todo.</a:t>
+              <a:rPr sz="1400" b="0" i="0">
+                <a:solidFill>
+                  <a:srgbClr val="FFFFFF"/>
+                </a:solidFill>
+                <a:latin typeface="Calibri"/>
+              </a:rPr>
+              <a:t>Aceptada · 2026-09-01 · decide: &lt;su nombre&gt;</a:t>
             </a:r>
           </a:p>
           <a:p>
             <a:pPr>
               <a:spcAft>
-                <a:spcPts val="800"/>
+                <a:spcPts val="400"/>
               </a:spcAft>
             </a:pPr>
             <a:r>
-              <a:rPr sz="2000" b="0" i="0">
-                <a:solidFill>
-                  <a:srgbClr val="333333"/>
-                </a:solidFill>
-                <a:latin typeface="Calibri"/>
-              </a:rPr>
-              <a:t>–   Respuesta: porque la plataforma construye internamente una imagen de contenedor con el codigo entregado, de modo que entender contenedores es entender que hace la plataforma por debajo</a:t>
-            </a:r>
-          </a:p>
-        </p:txBody>
-      </p:sp>
-      <p:sp>
-        <p:nvSpPr>
-          <p:cNvPr id="6" name="TextBox 5"/>
+              <a:rPr sz="1400" b="0" i="0">
+                <a:solidFill>
+                  <a:srgbClr val="FFFFFF"/>
+                </a:solidFill>
+                <a:latin typeface="Calibri"/>
+              </a:rPr>
+              <a:t/>
+            </a:r>
+          </a:p>
+          <a:p>
+            <a:pPr>
+              <a:spcAft>
+                <a:spcPts val="400"/>
+              </a:spcAft>
+            </a:pPr>
+            <a:r>
+              <a:rPr sz="1400" b="0" i="0">
+                <a:solidFill>
+                  <a:srgbClr val="FFFFFF"/>
+                </a:solidFill>
+                <a:latin typeface="Calibri"/>
+              </a:rPr>
+              <a:t>## 2. Contexto</a:t>
+            </a:r>
+          </a:p>
+          <a:p>
+            <a:pPr>
+              <a:spcAft>
+                <a:spcPts val="400"/>
+              </a:spcAft>
+            </a:pPr>
+            <a:r>
+              <a:rPr sz="1400" b="0" i="0">
+                <a:solidFill>
+                  <a:srgbClr val="FFFFFF"/>
+                </a:solidFill>
+                <a:latin typeface="Calibri"/>
+              </a:rPr>
+              <a:t>&lt;que problema del dominio obliga a decidir esto, en 3 o 4 lineas&gt;</a:t>
+            </a:r>
+          </a:p>
+          <a:p>
+            <a:pPr>
+              <a:spcAft>
+                <a:spcPts val="400"/>
+              </a:spcAft>
+            </a:pPr>
+            <a:r>
+              <a:rPr sz="1400" b="0" i="0">
+                <a:solidFill>
+                  <a:srgbClr val="FFFFFF"/>
+                </a:solidFill>
+                <a:latin typeface="Calibri"/>
+              </a:rPr>
+              <a:t/>
+            </a:r>
+          </a:p>
+          <a:p>
+            <a:pPr>
+              <a:spcAft>
+                <a:spcPts val="400"/>
+              </a:spcAft>
+            </a:pPr>
+            <a:r>
+              <a:rPr sz="1400" b="0" i="0">
+                <a:solidFill>
+                  <a:srgbClr val="FFFFFF"/>
+                </a:solidFill>
+                <a:latin typeface="Calibri"/>
+              </a:rPr>
+              <a:t>## 3. Alternativas consideradas</a:t>
+            </a:r>
+          </a:p>
+          <a:p>
+            <a:pPr>
+              <a:spcAft>
+                <a:spcPts val="400"/>
+              </a:spcAft>
+            </a:pPr>
+            <a:r>
+              <a:rPr sz="1400" b="0" i="0">
+                <a:solidFill>
+                  <a:srgbClr val="FFFFFF"/>
+                </a:solidFill>
+                <a:latin typeface="Calibri"/>
+              </a:rPr>
+              <a:t>- IaaS  — &lt;que ganaria y que costaria en SU dominio&gt;</a:t>
+            </a:r>
+          </a:p>
+          <a:p>
+            <a:pPr>
+              <a:spcAft>
+                <a:spcPts val="400"/>
+              </a:spcAft>
+            </a:pPr>
+            <a:r>
+              <a:rPr sz="1400" b="0" i="0">
+                <a:solidFill>
+                  <a:srgbClr val="FFFFFF"/>
+                </a:solidFill>
+                <a:latin typeface="Calibri"/>
+              </a:rPr>
+              <a:t>- PaaS  — &lt;idem&gt;</a:t>
+            </a:r>
+          </a:p>
+        </p:txBody>
+      </p:sp>
+      <p:sp>
+        <p:nvSpPr>
+          <p:cNvPr id="9" name="TextBox 8"/>
+          <p:cNvSpPr txBox="1"/>
+          <p:nvPr/>
+        </p:nvSpPr>
+        <p:spPr>
+          <a:xfrm>
+            <a:off x="6233007" y="1719072"/>
+            <a:ext cx="5181447" cy="4453128"/>
+          </a:xfrm>
+          <a:prstGeom prst="rect">
+            <a:avLst/>
+          </a:prstGeom>
+          <a:noFill/>
+        </p:spPr>
+        <p:txBody>
+          <a:bodyPr wrap="square">
+            <a:spAutoFit/>
+          </a:bodyPr>
+          <a:lstStyle/>
+          <a:p>
+            <a:pPr>
+              <a:spcAft>
+                <a:spcPts val="400"/>
+              </a:spcAft>
+            </a:pPr>
+            <a:r>
+              <a:rPr sz="1400" b="0" i="0">
+                <a:solidFill>
+                  <a:srgbClr val="FFFFFF"/>
+                </a:solidFill>
+                <a:latin typeface="Calibri"/>
+              </a:rPr>
+              <a:t>- SaaS  — &lt;idem&gt;</a:t>
+            </a:r>
+          </a:p>
+          <a:p>
+            <a:pPr>
+              <a:spcAft>
+                <a:spcPts val="400"/>
+              </a:spcAft>
+            </a:pPr>
+            <a:r>
+              <a:rPr sz="1400" b="0" i="0">
+                <a:solidFill>
+                  <a:srgbClr val="FFFFFF"/>
+                </a:solidFill>
+                <a:latin typeface="Calibri"/>
+              </a:rPr>
+              <a:t/>
+            </a:r>
+          </a:p>
+          <a:p>
+            <a:pPr>
+              <a:spcAft>
+                <a:spcPts val="400"/>
+              </a:spcAft>
+            </a:pPr>
+            <a:r>
+              <a:rPr sz="1400" b="0" i="0">
+                <a:solidFill>
+                  <a:srgbClr val="FFFFFF"/>
+                </a:solidFill>
+                <a:latin typeface="Calibri"/>
+              </a:rPr>
+              <a:t>## 4. Decision</a:t>
+            </a:r>
+          </a:p>
+          <a:p>
+            <a:pPr>
+              <a:spcAft>
+                <a:spcPts val="400"/>
+              </a:spcAft>
+            </a:pPr>
+            <a:r>
+              <a:rPr sz="1400" b="0" i="0">
+                <a:solidFill>
+                  <a:srgbClr val="FFFFFF"/>
+                </a:solidFill>
+                <a:latin typeface="Calibri"/>
+              </a:rPr>
+              <a:t>Se adopta &lt;IaaS|PaaS|SaaS&gt; como modelo dominante porque &lt;criterio&gt;.</a:t>
+            </a:r>
+          </a:p>
+          <a:p>
+            <a:pPr>
+              <a:spcAft>
+                <a:spcPts val="400"/>
+              </a:spcAft>
+            </a:pPr>
+            <a:r>
+              <a:rPr sz="1400" b="0" i="0">
+                <a:solidFill>
+                  <a:srgbClr val="FFFFFF"/>
+                </a:solidFill>
+                <a:latin typeface="Calibri"/>
+              </a:rPr>
+              <a:t/>
+            </a:r>
+          </a:p>
+          <a:p>
+            <a:pPr>
+              <a:spcAft>
+                <a:spcPts val="400"/>
+              </a:spcAft>
+            </a:pPr>
+            <a:r>
+              <a:rPr sz="1400" b="0" i="0">
+                <a:solidFill>
+                  <a:srgbClr val="FFFFFF"/>
+                </a:solidFill>
+                <a:latin typeface="Calibri"/>
+              </a:rPr>
+              <a:t>## 5. Justificacion contra los atributos de calidad</a:t>
+            </a:r>
+          </a:p>
+          <a:p>
+            <a:pPr>
+              <a:spcAft>
+                <a:spcPts val="400"/>
+              </a:spcAft>
+            </a:pPr>
+            <a:r>
+              <a:rPr sz="1400" b="0" i="0">
+                <a:solidFill>
+                  <a:srgbClr val="FFFFFF"/>
+                </a:solidFill>
+                <a:latin typeface="Calibri"/>
+              </a:rPr>
+              <a:t>&lt;el atributo de la Clase 1 que esta decision favorece, y el que sacrifica&gt;</a:t>
+            </a:r>
+          </a:p>
+          <a:p>
+            <a:pPr>
+              <a:spcAft>
+                <a:spcPts val="400"/>
+              </a:spcAft>
+            </a:pPr>
+            <a:r>
+              <a:rPr sz="1400" b="0" i="0">
+                <a:solidFill>
+                  <a:srgbClr val="FFFFFF"/>
+                </a:solidFill>
+                <a:latin typeface="Calibri"/>
+              </a:rPr>
+              <a:t/>
+            </a:r>
+          </a:p>
+          <a:p>
+            <a:pPr>
+              <a:spcAft>
+                <a:spcPts val="400"/>
+              </a:spcAft>
+            </a:pPr>
+            <a:r>
+              <a:rPr sz="1400" b="0" i="0">
+                <a:solidFill>
+                  <a:srgbClr val="FFFFFF"/>
+                </a:solidFill>
+                <a:latin typeface="Calibri"/>
+              </a:rPr>
+              <a:t>## 6. Consecuencias</a:t>
+            </a:r>
+          </a:p>
+          <a:p>
+            <a:pPr>
+              <a:spcAft>
+                <a:spcPts val="400"/>
+              </a:spcAft>
+            </a:pPr>
+            <a:r>
+              <a:rPr sz="1400" b="0" i="0">
+                <a:solidFill>
+                  <a:srgbClr val="FFFFFF"/>
+                </a:solidFill>
+                <a:latin typeface="Calibri"/>
+              </a:rPr>
+              <a:t>Positivas: &lt;...&gt;   Negativas: &lt;...&gt;   A revisar si: &lt;condicion&gt;</a:t>
+            </a:r>
+          </a:p>
+        </p:txBody>
+      </p:sp>
+      <p:sp>
+        <p:nvSpPr>
+          <p:cNvPr id="10" name="TextBox 9"/>
           <p:cNvSpPr txBox="1"/>
           <p:nvPr/>
         </p:nvSpPr>
@@ -8545,7 +9153,7 @@
         <p:spPr>
           <a:xfrm>
             <a:off x="0" y="0"/>
-            <a:ext cx="12191695" cy="960120"/>
+            <a:ext cx="12191695" cy="1170432"/>
           </a:xfrm>
           <a:prstGeom prst="rect">
             <a:avLst/>
@@ -8587,7 +9195,7 @@
         </p:nvSpPr>
         <p:spPr>
           <a:xfrm>
-            <a:off x="0" y="960120"/>
+            <a:off x="0" y="1170432"/>
             <a:ext cx="12191695" cy="41148"/>
           </a:xfrm>
           <a:prstGeom prst="rect">
@@ -8631,7 +9239,7 @@
         <p:spPr>
           <a:xfrm>
             <a:off x="457200" y="164592"/>
-            <a:ext cx="11277295" cy="502920"/>
+            <a:ext cx="11277295" cy="384048"/>
           </a:xfrm>
           <a:prstGeom prst="rect">
             <a:avLst/>
@@ -8651,7 +9259,7 @@
                 </a:solidFill>
                 <a:latin typeface="Calibri"/>
               </a:rPr>
-              <a:t>Preguntas frecuentes y cierre conceptual () (2/3)</a:t>
+              <a:t>Quién administra cada capa — IaaS vs PaaS vs SaaS</a:t>
             </a:r>
           </a:p>
         </p:txBody>
@@ -8664,8 +9272,8 @@
         </p:nvSpPr>
         <p:spPr>
           <a:xfrm>
-            <a:off x="457200" y="1170432"/>
-            <a:ext cx="11277295" cy="5230368"/>
+            <a:off x="457200" y="566928"/>
+            <a:ext cx="11277295" cy="411480"/>
           </a:xfrm>
           <a:prstGeom prst="rect">
             <a:avLst/>
@@ -8678,90 +9286,906 @@
           </a:bodyPr>
           <a:lstStyle/>
           <a:p>
-            <a:pPr>
-              <a:spcAft>
-                <a:spcPts val="800"/>
-              </a:spcAft>
-            </a:pPr>
-            <a:r>
-              <a:rPr sz="2000" b="0" i="0">
-                <a:solidFill>
-                  <a:srgbClr val="333333"/>
-                </a:solidFill>
-                <a:latin typeface="Calibri"/>
-              </a:rPr>
-              <a:t>–   Y porque el contenedor es precisamente el artefacto que vuelve reversible la decision de hoy.</a:t>
-            </a:r>
-          </a:p>
-          <a:p>
-            <a:pPr>
-              <a:spcAft>
-                <a:spcPts val="800"/>
-              </a:spcAft>
-            </a:pPr>
-            <a:r>
-              <a:rPr sz="2000" b="0" i="0">
-                <a:solidFill>
-                  <a:srgbClr val="333333"/>
-                </a:solidFill>
-                <a:latin typeface="Calibri"/>
-              </a:rPr>
-              <a:t>–   La Clase 4 usara este mismo ADR para justificar cuantas piezas tendra el sistema, y el Parcial 1 de la Clase 5 evalua la capacidad de ubicar la linea de responsabilidad en cada modelo.</a:t>
-            </a:r>
-          </a:p>
-          <a:p>
-            <a:pPr>
-              <a:spcAft>
-                <a:spcPts val="800"/>
-              </a:spcAft>
-            </a:pPr>
-            <a:r>
-              <a:rPr sz="2000" b="0" i="0">
-                <a:solidFill>
-                  <a:srgbClr val="333333"/>
-                </a:solidFill>
-                <a:latin typeface="Calibri"/>
-              </a:rPr>
-              <a:t>–   Error tipico del docente que no domina el tema: presentar IaaS, PaaS y SaaS como catalogos de marcas y no como un modelo conceptual de responsabilidad</a:t>
-            </a:r>
-          </a:p>
-          <a:p>
-            <a:pPr>
-              <a:spcAft>
-                <a:spcPts val="800"/>
-              </a:spcAft>
-            </a:pPr>
-            <a:r>
-              <a:rPr sz="2000" b="0" i="0">
-                <a:solidFill>
-                  <a:srgbClr val="333333"/>
-                </a:solidFill>
-                <a:latin typeface="Calibri"/>
-              </a:rPr>
-              <a:t>–   Con lo cual el estudiante memoriza nombres de productos que cambiaran en dos periodos y no aprende a preguntar quien administra que capa</a:t>
-            </a:r>
-          </a:p>
-          <a:p>
-            <a:pPr>
-              <a:spcAft>
-                <a:spcPts val="800"/>
-              </a:spcAft>
-            </a:pPr>
-            <a:r>
-              <a:rPr sz="2000" b="0" i="0">
-                <a:solidFill>
-                  <a:srgbClr val="333333"/>
-                </a:solidFill>
-                <a:latin typeface="Calibri"/>
-              </a:rPr>
-              <a:t>–   Aguas abajo, en la Clase 6 sera incapaz de decir de que es responsable el en materia de seguridad, y en la Clase 10 no podra explicar por que su factura hipotetica sube o baja.</a:t>
-            </a:r>
-          </a:p>
-        </p:txBody>
-      </p:sp>
-      <p:sp>
-        <p:nvSpPr>
-          <p:cNvPr id="6" name="TextBox 5"/>
+            <a:r>
+              <a:rPr sz="1400" b="0" i="0">
+                <a:solidFill>
+                  <a:srgbClr val="B8D8EE"/>
+                </a:solidFill>
+                <a:latin typeface="Calibri"/>
+              </a:rPr>
+              <a:t>Misma aplicación, distinto reparto de responsabilidad entre usted y el proveedor</a:t>
+            </a:r>
+          </a:p>
+        </p:txBody>
+      </p:sp>
+      <p:sp>
+        <p:nvSpPr>
+          <p:cNvPr id="6" name="Rounded Rectangle 5"/>
+          <p:cNvSpPr/>
+          <p:nvPr/>
+        </p:nvSpPr>
+        <p:spPr>
+          <a:xfrm>
+            <a:off x="548640" y="1325880"/>
+            <a:ext cx="3291840" cy="685800"/>
+          </a:xfrm>
+          <a:prstGeom prst="roundRect">
+            <a:avLst>
+              <a:gd name="adj" fmla="val 12000"/>
+            </a:avLst>
+          </a:prstGeom>
+          <a:solidFill>
+            <a:srgbClr val="095292"/>
+          </a:solidFill>
+          <a:ln>
+            <a:noFill/>
+          </a:ln>
+        </p:spPr>
+        <p:style>
+          <a:lnRef idx="1">
+            <a:schemeClr val="accent1"/>
+          </a:lnRef>
+          <a:fillRef idx="3">
+            <a:schemeClr val="accent1"/>
+          </a:fillRef>
+          <a:effectRef idx="2">
+            <a:schemeClr val="accent1"/>
+          </a:effectRef>
+          <a:fontRef idx="minor">
+            <a:schemeClr val="lt1"/>
+          </a:fontRef>
+        </p:style>
+        <p:txBody>
+          <a:bodyPr rtlCol="0" anchor="ctr" wrap="square"/>
+          <a:lstStyle/>
+          <a:p>
+            <a:pPr algn="ctr"/>
+            <a:r>
+              <a:rPr sz="1200" b="1" i="0">
+                <a:solidFill>
+                  <a:srgbClr val="FFFFFF"/>
+                </a:solidFill>
+                <a:latin typeface="Calibri"/>
+              </a:rPr>
+              <a:t>IaaS
+(DigitalOcean, AWS EC2)</a:t>
+            </a:r>
+          </a:p>
+        </p:txBody>
+      </p:sp>
+      <p:sp>
+        <p:nvSpPr>
+          <p:cNvPr id="7" name="Rounded Rectangle 6"/>
+          <p:cNvSpPr/>
+          <p:nvPr/>
+        </p:nvSpPr>
+        <p:spPr>
+          <a:xfrm>
+            <a:off x="4160520" y="1325880"/>
+            <a:ext cx="3291840" cy="685800"/>
+          </a:xfrm>
+          <a:prstGeom prst="roundRect">
+            <a:avLst>
+              <a:gd name="adj" fmla="val 12000"/>
+            </a:avLst>
+          </a:prstGeom>
+          <a:solidFill>
+            <a:srgbClr val="095292"/>
+          </a:solidFill>
+          <a:ln>
+            <a:noFill/>
+          </a:ln>
+        </p:spPr>
+        <p:style>
+          <a:lnRef idx="1">
+            <a:schemeClr val="accent1"/>
+          </a:lnRef>
+          <a:fillRef idx="3">
+            <a:schemeClr val="accent1"/>
+          </a:fillRef>
+          <a:effectRef idx="2">
+            <a:schemeClr val="accent1"/>
+          </a:effectRef>
+          <a:fontRef idx="minor">
+            <a:schemeClr val="lt1"/>
+          </a:fontRef>
+        </p:style>
+        <p:txBody>
+          <a:bodyPr rtlCol="0" anchor="ctr" wrap="square"/>
+          <a:lstStyle/>
+          <a:p>
+            <a:pPr algn="ctr"/>
+            <a:r>
+              <a:rPr sz="1200" b="1" i="0">
+                <a:solidFill>
+                  <a:srgbClr val="FFFFFF"/>
+                </a:solidFill>
+                <a:latin typeface="Calibri"/>
+              </a:rPr>
+              <a:t>PaaS
+(Render, Railway, Heroku)</a:t>
+            </a:r>
+          </a:p>
+        </p:txBody>
+      </p:sp>
+      <p:sp>
+        <p:nvSpPr>
+          <p:cNvPr id="8" name="Rounded Rectangle 7"/>
+          <p:cNvSpPr/>
+          <p:nvPr/>
+        </p:nvSpPr>
+        <p:spPr>
+          <a:xfrm>
+            <a:off x="7772400" y="1325880"/>
+            <a:ext cx="3291840" cy="685800"/>
+          </a:xfrm>
+          <a:prstGeom prst="roundRect">
+            <a:avLst>
+              <a:gd name="adj" fmla="val 12000"/>
+            </a:avLst>
+          </a:prstGeom>
+          <a:solidFill>
+            <a:srgbClr val="095292"/>
+          </a:solidFill>
+          <a:ln>
+            <a:noFill/>
+          </a:ln>
+        </p:spPr>
+        <p:style>
+          <a:lnRef idx="1">
+            <a:schemeClr val="accent1"/>
+          </a:lnRef>
+          <a:fillRef idx="3">
+            <a:schemeClr val="accent1"/>
+          </a:fillRef>
+          <a:effectRef idx="2">
+            <a:schemeClr val="accent1"/>
+          </a:effectRef>
+          <a:fontRef idx="minor">
+            <a:schemeClr val="lt1"/>
+          </a:fontRef>
+        </p:style>
+        <p:txBody>
+          <a:bodyPr rtlCol="0" anchor="ctr" wrap="square"/>
+          <a:lstStyle/>
+          <a:p>
+            <a:pPr algn="ctr"/>
+            <a:r>
+              <a:rPr sz="1200" b="1" i="0">
+                <a:solidFill>
+                  <a:srgbClr val="FFFFFF"/>
+                </a:solidFill>
+                <a:latin typeface="Calibri"/>
+              </a:rPr>
+              <a:t>SaaS
+(Gmail, Notion, Slack)</a:t>
+            </a:r>
+          </a:p>
+        </p:txBody>
+      </p:sp>
+      <p:sp>
+        <p:nvSpPr>
+          <p:cNvPr id="9" name="Rounded Rectangle 8"/>
+          <p:cNvSpPr/>
+          <p:nvPr/>
+        </p:nvSpPr>
+        <p:spPr>
+          <a:xfrm>
+            <a:off x="548640" y="2103120"/>
+            <a:ext cx="3291840" cy="548640"/>
+          </a:xfrm>
+          <a:prstGeom prst="roundRect">
+            <a:avLst>
+              <a:gd name="adj" fmla="val 12000"/>
+            </a:avLst>
+          </a:prstGeom>
+          <a:solidFill>
+            <a:srgbClr val="FFD000"/>
+          </a:solidFill>
+          <a:ln>
+            <a:noFill/>
+          </a:ln>
+        </p:spPr>
+        <p:style>
+          <a:lnRef idx="1">
+            <a:schemeClr val="accent1"/>
+          </a:lnRef>
+          <a:fillRef idx="3">
+            <a:schemeClr val="accent1"/>
+          </a:fillRef>
+          <a:effectRef idx="2">
+            <a:schemeClr val="accent1"/>
+          </a:effectRef>
+          <a:fontRef idx="minor">
+            <a:schemeClr val="lt1"/>
+          </a:fontRef>
+        </p:style>
+        <p:txBody>
+          <a:bodyPr rtlCol="0" anchor="ctr" wrap="square"/>
+          <a:lstStyle/>
+          <a:p>
+            <a:pPr algn="ctr"/>
+            <a:r>
+              <a:rPr sz="1100" b="1" i="0">
+                <a:solidFill>
+                  <a:srgbClr val="095292"/>
+                </a:solidFill>
+                <a:latin typeface="Calibri"/>
+              </a:rPr>
+              <a:t>Aplicación y datos</a:t>
+            </a:r>
+          </a:p>
+        </p:txBody>
+      </p:sp>
+      <p:sp>
+        <p:nvSpPr>
+          <p:cNvPr id="10" name="Rounded Rectangle 9"/>
+          <p:cNvSpPr/>
+          <p:nvPr/>
+        </p:nvSpPr>
+        <p:spPr>
+          <a:xfrm>
+            <a:off x="548640" y="2743200"/>
+            <a:ext cx="3291840" cy="548640"/>
+          </a:xfrm>
+          <a:prstGeom prst="roundRect">
+            <a:avLst>
+              <a:gd name="adj" fmla="val 12000"/>
+            </a:avLst>
+          </a:prstGeom>
+          <a:solidFill>
+            <a:srgbClr val="FFD000"/>
+          </a:solidFill>
+          <a:ln>
+            <a:noFill/>
+          </a:ln>
+        </p:spPr>
+        <p:style>
+          <a:lnRef idx="1">
+            <a:schemeClr val="accent1"/>
+          </a:lnRef>
+          <a:fillRef idx="3">
+            <a:schemeClr val="accent1"/>
+          </a:fillRef>
+          <a:effectRef idx="2">
+            <a:schemeClr val="accent1"/>
+          </a:effectRef>
+          <a:fontRef idx="minor">
+            <a:schemeClr val="lt1"/>
+          </a:fontRef>
+        </p:style>
+        <p:txBody>
+          <a:bodyPr rtlCol="0" anchor="ctr" wrap="square"/>
+          <a:lstStyle/>
+          <a:p>
+            <a:pPr algn="ctr"/>
+            <a:r>
+              <a:rPr sz="1100" b="1" i="0">
+                <a:solidFill>
+                  <a:srgbClr val="095292"/>
+                </a:solidFill>
+                <a:latin typeface="Calibri"/>
+              </a:rPr>
+              <a:t>Runtime / middleware</a:t>
+            </a:r>
+          </a:p>
+        </p:txBody>
+      </p:sp>
+      <p:sp>
+        <p:nvSpPr>
+          <p:cNvPr id="11" name="Rounded Rectangle 10"/>
+          <p:cNvSpPr/>
+          <p:nvPr/>
+        </p:nvSpPr>
+        <p:spPr>
+          <a:xfrm>
+            <a:off x="548640" y="3383280"/>
+            <a:ext cx="3291840" cy="548640"/>
+          </a:xfrm>
+          <a:prstGeom prst="roundRect">
+            <a:avLst>
+              <a:gd name="adj" fmla="val 12000"/>
+            </a:avLst>
+          </a:prstGeom>
+          <a:solidFill>
+            <a:srgbClr val="FFD000"/>
+          </a:solidFill>
+          <a:ln>
+            <a:noFill/>
+          </a:ln>
+        </p:spPr>
+        <p:style>
+          <a:lnRef idx="1">
+            <a:schemeClr val="accent1"/>
+          </a:lnRef>
+          <a:fillRef idx="3">
+            <a:schemeClr val="accent1"/>
+          </a:fillRef>
+          <a:effectRef idx="2">
+            <a:schemeClr val="accent1"/>
+          </a:effectRef>
+          <a:fontRef idx="minor">
+            <a:schemeClr val="lt1"/>
+          </a:fontRef>
+        </p:style>
+        <p:txBody>
+          <a:bodyPr rtlCol="0" anchor="ctr" wrap="square"/>
+          <a:lstStyle/>
+          <a:p>
+            <a:pPr algn="ctr"/>
+            <a:r>
+              <a:rPr sz="1100" b="1" i="0">
+                <a:solidFill>
+                  <a:srgbClr val="095292"/>
+                </a:solidFill>
+                <a:latin typeface="Calibri"/>
+              </a:rPr>
+              <a:t>Sistema operativo</a:t>
+            </a:r>
+          </a:p>
+        </p:txBody>
+      </p:sp>
+      <p:sp>
+        <p:nvSpPr>
+          <p:cNvPr id="12" name="Rounded Rectangle 11"/>
+          <p:cNvSpPr/>
+          <p:nvPr/>
+        </p:nvSpPr>
+        <p:spPr>
+          <a:xfrm>
+            <a:off x="548640" y="4023360"/>
+            <a:ext cx="3291840" cy="548640"/>
+          </a:xfrm>
+          <a:prstGeom prst="roundRect">
+            <a:avLst>
+              <a:gd name="adj" fmla="val 12000"/>
+            </a:avLst>
+          </a:prstGeom>
+          <a:solidFill>
+            <a:srgbClr val="269CCB"/>
+          </a:solidFill>
+          <a:ln>
+            <a:noFill/>
+          </a:ln>
+        </p:spPr>
+        <p:style>
+          <a:lnRef idx="1">
+            <a:schemeClr val="accent1"/>
+          </a:lnRef>
+          <a:fillRef idx="3">
+            <a:schemeClr val="accent1"/>
+          </a:fillRef>
+          <a:effectRef idx="2">
+            <a:schemeClr val="accent1"/>
+          </a:effectRef>
+          <a:fontRef idx="minor">
+            <a:schemeClr val="lt1"/>
+          </a:fontRef>
+        </p:style>
+        <p:txBody>
+          <a:bodyPr rtlCol="0" anchor="ctr" wrap="square"/>
+          <a:lstStyle/>
+          <a:p>
+            <a:pPr algn="ctr"/>
+            <a:r>
+              <a:rPr sz="1050" b="1" i="0">
+                <a:solidFill>
+                  <a:srgbClr val="FFFFFF"/>
+                </a:solidFill>
+                <a:latin typeface="Calibri"/>
+              </a:rPr>
+              <a:t>Infraestructura
+(cómputo, red, disco)</a:t>
+            </a:r>
+          </a:p>
+        </p:txBody>
+      </p:sp>
+      <p:sp>
+        <p:nvSpPr>
+          <p:cNvPr id="13" name="Rounded Rectangle 12"/>
+          <p:cNvSpPr/>
+          <p:nvPr/>
+        </p:nvSpPr>
+        <p:spPr>
+          <a:xfrm>
+            <a:off x="4160520" y="2103120"/>
+            <a:ext cx="3291840" cy="548640"/>
+          </a:xfrm>
+          <a:prstGeom prst="roundRect">
+            <a:avLst>
+              <a:gd name="adj" fmla="val 12000"/>
+            </a:avLst>
+          </a:prstGeom>
+          <a:solidFill>
+            <a:srgbClr val="FFD000"/>
+          </a:solidFill>
+          <a:ln>
+            <a:noFill/>
+          </a:ln>
+        </p:spPr>
+        <p:style>
+          <a:lnRef idx="1">
+            <a:schemeClr val="accent1"/>
+          </a:lnRef>
+          <a:fillRef idx="3">
+            <a:schemeClr val="accent1"/>
+          </a:fillRef>
+          <a:effectRef idx="2">
+            <a:schemeClr val="accent1"/>
+          </a:effectRef>
+          <a:fontRef idx="minor">
+            <a:schemeClr val="lt1"/>
+          </a:fontRef>
+        </p:style>
+        <p:txBody>
+          <a:bodyPr rtlCol="0" anchor="ctr" wrap="square"/>
+          <a:lstStyle/>
+          <a:p>
+            <a:pPr algn="ctr"/>
+            <a:r>
+              <a:rPr sz="1100" b="1" i="0">
+                <a:solidFill>
+                  <a:srgbClr val="095292"/>
+                </a:solidFill>
+                <a:latin typeface="Calibri"/>
+              </a:rPr>
+              <a:t>Aplicación y datos</a:t>
+            </a:r>
+          </a:p>
+        </p:txBody>
+      </p:sp>
+      <p:sp>
+        <p:nvSpPr>
+          <p:cNvPr id="14" name="Rounded Rectangle 13"/>
+          <p:cNvSpPr/>
+          <p:nvPr/>
+        </p:nvSpPr>
+        <p:spPr>
+          <a:xfrm>
+            <a:off x="4160520" y="2743200"/>
+            <a:ext cx="3291840" cy="548640"/>
+          </a:xfrm>
+          <a:prstGeom prst="roundRect">
+            <a:avLst>
+              <a:gd name="adj" fmla="val 12000"/>
+            </a:avLst>
+          </a:prstGeom>
+          <a:solidFill>
+            <a:srgbClr val="269CCB"/>
+          </a:solidFill>
+          <a:ln>
+            <a:noFill/>
+          </a:ln>
+        </p:spPr>
+        <p:style>
+          <a:lnRef idx="1">
+            <a:schemeClr val="accent1"/>
+          </a:lnRef>
+          <a:fillRef idx="3">
+            <a:schemeClr val="accent1"/>
+          </a:fillRef>
+          <a:effectRef idx="2">
+            <a:schemeClr val="accent1"/>
+          </a:effectRef>
+          <a:fontRef idx="minor">
+            <a:schemeClr val="lt1"/>
+          </a:fontRef>
+        </p:style>
+        <p:txBody>
+          <a:bodyPr rtlCol="0" anchor="ctr" wrap="square"/>
+          <a:lstStyle/>
+          <a:p>
+            <a:pPr algn="ctr"/>
+            <a:r>
+              <a:rPr sz="1100" b="1" i="0">
+                <a:solidFill>
+                  <a:srgbClr val="FFFFFF"/>
+                </a:solidFill>
+                <a:latin typeface="Calibri"/>
+              </a:rPr>
+              <a:t>Runtime / middleware</a:t>
+            </a:r>
+          </a:p>
+        </p:txBody>
+      </p:sp>
+      <p:sp>
+        <p:nvSpPr>
+          <p:cNvPr id="15" name="Rounded Rectangle 14"/>
+          <p:cNvSpPr/>
+          <p:nvPr/>
+        </p:nvSpPr>
+        <p:spPr>
+          <a:xfrm>
+            <a:off x="4160520" y="3383280"/>
+            <a:ext cx="3291840" cy="548640"/>
+          </a:xfrm>
+          <a:prstGeom prst="roundRect">
+            <a:avLst>
+              <a:gd name="adj" fmla="val 12000"/>
+            </a:avLst>
+          </a:prstGeom>
+          <a:solidFill>
+            <a:srgbClr val="269CCB"/>
+          </a:solidFill>
+          <a:ln>
+            <a:noFill/>
+          </a:ln>
+        </p:spPr>
+        <p:style>
+          <a:lnRef idx="1">
+            <a:schemeClr val="accent1"/>
+          </a:lnRef>
+          <a:fillRef idx="3">
+            <a:schemeClr val="accent1"/>
+          </a:fillRef>
+          <a:effectRef idx="2">
+            <a:schemeClr val="accent1"/>
+          </a:effectRef>
+          <a:fontRef idx="minor">
+            <a:schemeClr val="lt1"/>
+          </a:fontRef>
+        </p:style>
+        <p:txBody>
+          <a:bodyPr rtlCol="0" anchor="ctr" wrap="square"/>
+          <a:lstStyle/>
+          <a:p>
+            <a:pPr algn="ctr"/>
+            <a:r>
+              <a:rPr sz="1100" b="1" i="0">
+                <a:solidFill>
+                  <a:srgbClr val="FFFFFF"/>
+                </a:solidFill>
+                <a:latin typeface="Calibri"/>
+              </a:rPr>
+              <a:t>Sistema operativo</a:t>
+            </a:r>
+          </a:p>
+        </p:txBody>
+      </p:sp>
+      <p:sp>
+        <p:nvSpPr>
+          <p:cNvPr id="16" name="Rounded Rectangle 15"/>
+          <p:cNvSpPr/>
+          <p:nvPr/>
+        </p:nvSpPr>
+        <p:spPr>
+          <a:xfrm>
+            <a:off x="4160520" y="4023360"/>
+            <a:ext cx="3291840" cy="548640"/>
+          </a:xfrm>
+          <a:prstGeom prst="roundRect">
+            <a:avLst>
+              <a:gd name="adj" fmla="val 12000"/>
+            </a:avLst>
+          </a:prstGeom>
+          <a:solidFill>
+            <a:srgbClr val="269CCB"/>
+          </a:solidFill>
+          <a:ln>
+            <a:noFill/>
+          </a:ln>
+        </p:spPr>
+        <p:style>
+          <a:lnRef idx="1">
+            <a:schemeClr val="accent1"/>
+          </a:lnRef>
+          <a:fillRef idx="3">
+            <a:schemeClr val="accent1"/>
+          </a:fillRef>
+          <a:effectRef idx="2">
+            <a:schemeClr val="accent1"/>
+          </a:effectRef>
+          <a:fontRef idx="minor">
+            <a:schemeClr val="lt1"/>
+          </a:fontRef>
+        </p:style>
+        <p:txBody>
+          <a:bodyPr rtlCol="0" anchor="ctr" wrap="square"/>
+          <a:lstStyle/>
+          <a:p>
+            <a:pPr algn="ctr"/>
+            <a:r>
+              <a:rPr sz="1050" b="1" i="0">
+                <a:solidFill>
+                  <a:srgbClr val="FFFFFF"/>
+                </a:solidFill>
+                <a:latin typeface="Calibri"/>
+              </a:rPr>
+              <a:t>Infraestructura
+(cómputo, red, disco)</a:t>
+            </a:r>
+          </a:p>
+        </p:txBody>
+      </p:sp>
+      <p:sp>
+        <p:nvSpPr>
+          <p:cNvPr id="17" name="Rounded Rectangle 16"/>
+          <p:cNvSpPr/>
+          <p:nvPr/>
+        </p:nvSpPr>
+        <p:spPr>
+          <a:xfrm>
+            <a:off x="7772400" y="2103120"/>
+            <a:ext cx="3291840" cy="548640"/>
+          </a:xfrm>
+          <a:prstGeom prst="roundRect">
+            <a:avLst>
+              <a:gd name="adj" fmla="val 12000"/>
+            </a:avLst>
+          </a:prstGeom>
+          <a:solidFill>
+            <a:srgbClr val="FFD000"/>
+          </a:solidFill>
+          <a:ln>
+            <a:noFill/>
+          </a:ln>
+        </p:spPr>
+        <p:style>
+          <a:lnRef idx="1">
+            <a:schemeClr val="accent1"/>
+          </a:lnRef>
+          <a:fillRef idx="3">
+            <a:schemeClr val="accent1"/>
+          </a:fillRef>
+          <a:effectRef idx="2">
+            <a:schemeClr val="accent1"/>
+          </a:effectRef>
+          <a:fontRef idx="minor">
+            <a:schemeClr val="lt1"/>
+          </a:fontRef>
+        </p:style>
+        <p:txBody>
+          <a:bodyPr rtlCol="0" anchor="ctr" wrap="square"/>
+          <a:lstStyle/>
+          <a:p>
+            <a:pPr algn="ctr"/>
+            <a:r>
+              <a:rPr sz="1050" b="1" i="0">
+                <a:solidFill>
+                  <a:srgbClr val="095292"/>
+                </a:solidFill>
+                <a:latin typeface="Calibri"/>
+              </a:rPr>
+              <a:t>Aplicación y datos
+(usted solo configura)</a:t>
+            </a:r>
+          </a:p>
+        </p:txBody>
+      </p:sp>
+      <p:sp>
+        <p:nvSpPr>
+          <p:cNvPr id="18" name="Rounded Rectangle 17"/>
+          <p:cNvSpPr/>
+          <p:nvPr/>
+        </p:nvSpPr>
+        <p:spPr>
+          <a:xfrm>
+            <a:off x="7772400" y="2743200"/>
+            <a:ext cx="3291840" cy="548640"/>
+          </a:xfrm>
+          <a:prstGeom prst="roundRect">
+            <a:avLst>
+              <a:gd name="adj" fmla="val 12000"/>
+            </a:avLst>
+          </a:prstGeom>
+          <a:solidFill>
+            <a:srgbClr val="269CCB"/>
+          </a:solidFill>
+          <a:ln>
+            <a:noFill/>
+          </a:ln>
+        </p:spPr>
+        <p:style>
+          <a:lnRef idx="1">
+            <a:schemeClr val="accent1"/>
+          </a:lnRef>
+          <a:fillRef idx="3">
+            <a:schemeClr val="accent1"/>
+          </a:fillRef>
+          <a:effectRef idx="2">
+            <a:schemeClr val="accent1"/>
+          </a:effectRef>
+          <a:fontRef idx="minor">
+            <a:schemeClr val="lt1"/>
+          </a:fontRef>
+        </p:style>
+        <p:txBody>
+          <a:bodyPr rtlCol="0" anchor="ctr" wrap="square"/>
+          <a:lstStyle/>
+          <a:p>
+            <a:pPr algn="ctr"/>
+            <a:r>
+              <a:rPr sz="1100" b="1" i="0">
+                <a:solidFill>
+                  <a:srgbClr val="FFFFFF"/>
+                </a:solidFill>
+                <a:latin typeface="Calibri"/>
+              </a:rPr>
+              <a:t>Runtime / middleware</a:t>
+            </a:r>
+          </a:p>
+        </p:txBody>
+      </p:sp>
+      <p:sp>
+        <p:nvSpPr>
+          <p:cNvPr id="19" name="Rounded Rectangle 18"/>
+          <p:cNvSpPr/>
+          <p:nvPr/>
+        </p:nvSpPr>
+        <p:spPr>
+          <a:xfrm>
+            <a:off x="7772400" y="3383280"/>
+            <a:ext cx="3291840" cy="548640"/>
+          </a:xfrm>
+          <a:prstGeom prst="roundRect">
+            <a:avLst>
+              <a:gd name="adj" fmla="val 12000"/>
+            </a:avLst>
+          </a:prstGeom>
+          <a:solidFill>
+            <a:srgbClr val="269CCB"/>
+          </a:solidFill>
+          <a:ln>
+            <a:noFill/>
+          </a:ln>
+        </p:spPr>
+        <p:style>
+          <a:lnRef idx="1">
+            <a:schemeClr val="accent1"/>
+          </a:lnRef>
+          <a:fillRef idx="3">
+            <a:schemeClr val="accent1"/>
+          </a:fillRef>
+          <a:effectRef idx="2">
+            <a:schemeClr val="accent1"/>
+          </a:effectRef>
+          <a:fontRef idx="minor">
+            <a:schemeClr val="lt1"/>
+          </a:fontRef>
+        </p:style>
+        <p:txBody>
+          <a:bodyPr rtlCol="0" anchor="ctr" wrap="square"/>
+          <a:lstStyle/>
+          <a:p>
+            <a:pPr algn="ctr"/>
+            <a:r>
+              <a:rPr sz="1100" b="1" i="0">
+                <a:solidFill>
+                  <a:srgbClr val="FFFFFF"/>
+                </a:solidFill>
+                <a:latin typeface="Calibri"/>
+              </a:rPr>
+              <a:t>Sistema operativo</a:t>
+            </a:r>
+          </a:p>
+        </p:txBody>
+      </p:sp>
+      <p:sp>
+        <p:nvSpPr>
+          <p:cNvPr id="20" name="Rounded Rectangle 19"/>
+          <p:cNvSpPr/>
+          <p:nvPr/>
+        </p:nvSpPr>
+        <p:spPr>
+          <a:xfrm>
+            <a:off x="7772400" y="4023360"/>
+            <a:ext cx="3291840" cy="548640"/>
+          </a:xfrm>
+          <a:prstGeom prst="roundRect">
+            <a:avLst>
+              <a:gd name="adj" fmla="val 12000"/>
+            </a:avLst>
+          </a:prstGeom>
+          <a:solidFill>
+            <a:srgbClr val="269CCB"/>
+          </a:solidFill>
+          <a:ln>
+            <a:noFill/>
+          </a:ln>
+        </p:spPr>
+        <p:style>
+          <a:lnRef idx="1">
+            <a:schemeClr val="accent1"/>
+          </a:lnRef>
+          <a:fillRef idx="3">
+            <a:schemeClr val="accent1"/>
+          </a:fillRef>
+          <a:effectRef idx="2">
+            <a:schemeClr val="accent1"/>
+          </a:effectRef>
+          <a:fontRef idx="minor">
+            <a:schemeClr val="lt1"/>
+          </a:fontRef>
+        </p:style>
+        <p:txBody>
+          <a:bodyPr rtlCol="0" anchor="ctr" wrap="square"/>
+          <a:lstStyle/>
+          <a:p>
+            <a:pPr algn="ctr"/>
+            <a:r>
+              <a:rPr sz="1050" b="1" i="0">
+                <a:solidFill>
+                  <a:srgbClr val="FFFFFF"/>
+                </a:solidFill>
+                <a:latin typeface="Calibri"/>
+              </a:rPr>
+              <a:t>Infraestructura
+(cómputo, red, disco)</a:t>
+            </a:r>
+          </a:p>
+        </p:txBody>
+      </p:sp>
+      <p:sp>
+        <p:nvSpPr>
+          <p:cNvPr id="21" name="TextBox 20"/>
+          <p:cNvSpPr txBox="1"/>
+          <p:nvPr/>
+        </p:nvSpPr>
+        <p:spPr>
+          <a:xfrm>
+            <a:off x="457200" y="5897880"/>
+            <a:ext cx="11277295" cy="320040"/>
+          </a:xfrm>
+          <a:prstGeom prst="rect">
+            <a:avLst/>
+          </a:prstGeom>
+          <a:noFill/>
+        </p:spPr>
+        <p:txBody>
+          <a:bodyPr wrap="square">
+            <a:spAutoFit/>
+          </a:bodyPr>
+          <a:lstStyle/>
+          <a:p>
+            <a:r>
+              <a:rPr sz="1050" b="0" i="1">
+                <a:solidFill>
+                  <a:srgbClr val="666666"/>
+                </a:solidFill>
+                <a:latin typeface="Calibri"/>
+              </a:rPr>
+              <a:t>Amarillo = lo administra usted · Celeste = lo administra el proveedor</a:t>
+            </a:r>
+          </a:p>
+        </p:txBody>
+      </p:sp>
+      <p:sp>
+        <p:nvSpPr>
+          <p:cNvPr id="22" name="TextBox 21"/>
+          <p:cNvSpPr txBox="1"/>
+          <p:nvPr/>
+        </p:nvSpPr>
+        <p:spPr>
+          <a:xfrm>
+            <a:off x="457200" y="6263640"/>
+            <a:ext cx="11277295" cy="411480"/>
+          </a:xfrm>
+          <a:prstGeom prst="rect">
+            <a:avLst/>
+          </a:prstGeom>
+          <a:noFill/>
+        </p:spPr>
+        <p:txBody>
+          <a:bodyPr wrap="square">
+            <a:spAutoFit/>
+          </a:bodyPr>
+          <a:lstStyle/>
+          <a:p>
+            <a:r>
+              <a:rPr sz="1100" b="0" i="1">
+                <a:solidFill>
+                  <a:srgbClr val="666666"/>
+                </a:solidFill>
+                <a:latin typeface="Calibri"/>
+              </a:rPr>
+              <a:t>Suba en la pila y sube el control, pero también lo que tiene que operar usted: parches, escalado, disponibilidad. Para el MVP de CloudLite, PaaS es el punto medio: usted solo responde por su aplicación y sus datos.</a:t>
+            </a:r>
+          </a:p>
+        </p:txBody>
+      </p:sp>
+      <p:sp>
+        <p:nvSpPr>
+          <p:cNvPr id="23" name="TextBox 22"/>
           <p:cNvSpPr txBox="1"/>
           <p:nvPr/>
         </p:nvSpPr>
@@ -8935,21 +10359,141 @@
                 </a:solidFill>
                 <a:latin typeface="Calibri"/>
               </a:rPr>
-              <a:t>Preguntas frecuentes y cierre conceptual () (3/3)</a:t>
-            </a:r>
-          </a:p>
-        </p:txBody>
-      </p:sp>
-      <p:sp>
-        <p:nvSpPr>
-          <p:cNvPr id="5" name="TextBox 4"/>
+              <a:t>ADR-001 — las 6 secciones caben en una pagina</a:t>
+            </a:r>
+          </a:p>
+        </p:txBody>
+      </p:sp>
+      <p:sp>
+        <p:nvSpPr>
+          <p:cNvPr id="5" name="Rounded Rectangle 4"/>
+          <p:cNvSpPr/>
+          <p:nvPr/>
+        </p:nvSpPr>
+        <p:spPr>
+          <a:xfrm>
+            <a:off x="457200" y="1261872"/>
+            <a:ext cx="11277295" cy="4773168"/>
+          </a:xfrm>
+          <a:prstGeom prst="roundRect">
+            <a:avLst>
+              <a:gd name="adj" fmla="val 12000"/>
+            </a:avLst>
+          </a:prstGeom>
+          <a:solidFill>
+            <a:srgbClr val="1E2A38"/>
+          </a:solidFill>
+          <a:ln>
+            <a:noFill/>
+          </a:ln>
+        </p:spPr>
+        <p:style>
+          <a:lnRef idx="1">
+            <a:schemeClr val="accent1"/>
+          </a:lnRef>
+          <a:fillRef idx="3">
+            <a:schemeClr val="accent1"/>
+          </a:fillRef>
+          <a:effectRef idx="2">
+            <a:schemeClr val="accent1"/>
+          </a:effectRef>
+          <a:fontRef idx="minor">
+            <a:schemeClr val="lt1"/>
+          </a:fontRef>
+        </p:style>
+        <p:txBody>
+          <a:bodyPr rtlCol="0" anchor="ctr"/>
+          <a:lstStyle/>
+          <a:p>
+            <a:pPr algn="ctr"/>
+          </a:p>
+        </p:txBody>
+      </p:sp>
+      <p:sp>
+        <p:nvSpPr>
+          <p:cNvPr id="6" name="Rectangle 5"/>
+          <p:cNvSpPr/>
+          <p:nvPr/>
+        </p:nvSpPr>
+        <p:spPr>
+          <a:xfrm>
+            <a:off x="457200" y="1261872"/>
+            <a:ext cx="11277295" cy="320040"/>
+          </a:xfrm>
+          <a:prstGeom prst="rect">
+            <a:avLst/>
+          </a:prstGeom>
+          <a:solidFill>
+            <a:srgbClr val="095292"/>
+          </a:solidFill>
+          <a:ln>
+            <a:noFill/>
+          </a:ln>
+        </p:spPr>
+        <p:style>
+          <a:lnRef idx="1">
+            <a:schemeClr val="accent1"/>
+          </a:lnRef>
+          <a:fillRef idx="3">
+            <a:schemeClr val="accent1"/>
+          </a:fillRef>
+          <a:effectRef idx="2">
+            <a:schemeClr val="accent1"/>
+          </a:effectRef>
+          <a:fontRef idx="minor">
+            <a:schemeClr val="lt1"/>
+          </a:fontRef>
+        </p:style>
+        <p:txBody>
+          <a:bodyPr rtlCol="0" anchor="ctr"/>
+          <a:lstStyle/>
+          <a:p>
+            <a:pPr algn="ctr"/>
+          </a:p>
+        </p:txBody>
+      </p:sp>
+      <p:sp>
+        <p:nvSpPr>
+          <p:cNvPr id="7" name="TextBox 6"/>
           <p:cNvSpPr txBox="1"/>
           <p:nvPr/>
         </p:nvSpPr>
         <p:spPr>
           <a:xfrm>
-            <a:off x="457200" y="1170432"/>
-            <a:ext cx="11277295" cy="5230368"/>
+            <a:off x="685800" y="1307592"/>
+            <a:ext cx="10820095" cy="256032"/>
+          </a:xfrm>
+          <a:prstGeom prst="rect">
+            <a:avLst/>
+          </a:prstGeom>
+          <a:noFill/>
+        </p:spPr>
+        <p:txBody>
+          <a:bodyPr wrap="square" anchor="ctr"/>
+          <a:lstStyle/>
+          <a:p>
+            <a:r>
+              <a:rPr sz="1000" b="1" i="0">
+                <a:solidFill>
+                  <a:srgbClr val="269CCB"/>
+                </a:solidFill>
+                <a:latin typeface="Calibri"/>
+              </a:rPr>
+              <a:t>● ● ●</a:t>
+            </a:r>
+          </a:p>
+        </p:txBody>
+      </p:sp>
+      <p:sp>
+        <p:nvSpPr>
+          <p:cNvPr id="8" name="TextBox 7"/>
+          <p:cNvSpPr txBox="1"/>
+          <p:nvPr/>
+        </p:nvSpPr>
+        <p:spPr>
+          <a:xfrm>
+            <a:off x="777240" y="1719072"/>
+            <a:ext cx="10637215" cy="4133087"/>
           </a:xfrm>
           <a:prstGeom prst="rect">
             <a:avLst/>
@@ -8964,72 +10508,283 @@
           <a:p>
             <a:pPr>
               <a:spcAft>
-                <a:spcPts val="800"/>
+                <a:spcPts val="400"/>
               </a:spcAft>
             </a:pPr>
             <a:r>
-              <a:rPr sz="2000" b="0" i="0">
-                <a:solidFill>
-                  <a:srgbClr val="333333"/>
-                </a:solidFill>
-                <a:latin typeface="Calibri"/>
-              </a:rPr>
-              <a:t>–   El segundo error es dejar pasar ADR sin consecuencias negativas, y como esta clase tiene encuentro sincronico no hay excusa para no corregirlo en el momento: al pasar por los grupos en el tramo de taller</a:t>
+              <a:rPr sz="1400" b="0" i="0">
+                <a:solidFill>
+                  <a:srgbClr val="FFFFFF"/>
+                </a:solidFill>
+                <a:latin typeface="Calibri"/>
+              </a:rPr>
+              <a:t>## 1. Titulo     ADR-001 Modelo de servicio dominante de CloudLite App</a:t>
             </a:r>
           </a:p>
           <a:p>
             <a:pPr>
               <a:spcAft>
-                <a:spcPts val="800"/>
+                <a:spcPts val="400"/>
               </a:spcAft>
             </a:pPr>
             <a:r>
-              <a:rPr sz="2000" b="0" i="0">
-                <a:solidFill>
-                  <a:srgbClr val="333333"/>
-                </a:solidFill>
-                <a:latin typeface="Calibri"/>
-              </a:rPr>
-              <a:t>–   Pregunte «que perdieron al elegir eso» antes de que el documento se suba.</a:t>
+              <a:rPr sz="1400" b="0" i="0">
+                <a:solidFill>
+                  <a:srgbClr val="FFFFFF"/>
+                </a:solidFill>
+                <a:latin typeface="Calibri"/>
+              </a:rPr>
+              <a:t>## 2. Estado     Aceptado — &lt;fecha de hoy&gt;</a:t>
             </a:r>
           </a:p>
           <a:p>
             <a:pPr>
               <a:spcAft>
-                <a:spcPts val="800"/>
+                <a:spcPts val="400"/>
               </a:spcAft>
             </a:pPr>
             <a:r>
-              <a:rPr sz="2000" b="0" i="0">
-                <a:solidFill>
-                  <a:srgbClr val="333333"/>
-                </a:solidFill>
-                <a:latin typeface="Calibri"/>
-              </a:rPr>
-              <a:t>–   Un ADR que solo lista beneficios no es una decision, es una justificacion escrita despues de los hechos</a:t>
+              <a:rPr sz="1400" b="0" i="0">
+                <a:solidFill>
+                  <a:srgbClr val="FFFFFF"/>
+                </a:solidFill>
+                <a:latin typeface="Calibri"/>
+              </a:rPr>
+              <a:t/>
             </a:r>
           </a:p>
           <a:p>
             <a:pPr>
               <a:spcAft>
-                <a:spcPts val="800"/>
+                <a:spcPts val="400"/>
               </a:spcAft>
             </a:pPr>
             <a:r>
-              <a:rPr sz="2000" b="0" i="0">
-                <a:solidFill>
-                  <a:srgbClr val="333333"/>
-                </a:solidFill>
-                <a:latin typeface="Calibri"/>
-              </a:rPr>
-              <a:t>–   Y quien lo entrega asi llegara a la Clase 11 sin poder explicar ningun trade-off de su arquitectura, que es justamente lo que se le exigira sustentar en la Clase 15.</a:t>
-            </a:r>
-          </a:p>
-        </p:txBody>
-      </p:sp>
-      <p:sp>
-        <p:nvSpPr>
-          <p:cNvPr id="6" name="TextBox 5"/>
+              <a:rPr sz="1400" b="0" i="0">
+                <a:solidFill>
+                  <a:srgbClr val="FFFFFF"/>
+                </a:solidFill>
+                <a:latin typeface="Calibri"/>
+              </a:rPr>
+              <a:t>## 3. Contexto                    &lt;- restricciones, no resumen del tema</a:t>
+            </a:r>
+          </a:p>
+          <a:p>
+            <a:pPr>
+              <a:spcAft>
+                <a:spcPts val="400"/>
+              </a:spcAft>
+            </a:pPr>
+            <a:r>
+              <a:rPr sz="1400" b="0" i="0">
+                <a:solidFill>
+                  <a:srgbClr val="FFFFFF"/>
+                </a:solidFill>
+                <a:latin typeface="Calibri"/>
+              </a:rPr>
+              <a:t>Lo sostengo yo solo, 12 semanas, sin presupuesto cloud ni tarjeta; demo viva el dia de la sustentacion.</a:t>
+            </a:r>
+          </a:p>
+          <a:p>
+            <a:pPr>
+              <a:spcAft>
+                <a:spcPts val="400"/>
+              </a:spcAft>
+            </a:pPr>
+            <a:r>
+              <a:rPr sz="1400" b="0" i="0">
+                <a:solidFill>
+                  <a:srgbClr val="FFFFFF"/>
+                </a:solidFill>
+                <a:latin typeface="Calibri"/>
+              </a:rPr>
+              <a:t/>
+            </a:r>
+          </a:p>
+          <a:p>
+            <a:pPr>
+              <a:spcAft>
+                <a:spcPts val="400"/>
+              </a:spcAft>
+            </a:pPr>
+            <a:r>
+              <a:rPr sz="1400" b="0" i="0">
+                <a:solidFill>
+                  <a:srgbClr val="FFFFFF"/>
+                </a:solidFill>
+                <a:latin typeface="Calibri"/>
+              </a:rPr>
+              <a:t>## 4. Decision                    &lt;- UNA frase, UN modelo dominante</a:t>
+            </a:r>
+          </a:p>
+          <a:p>
+            <a:pPr>
+              <a:spcAft>
+                <a:spcPts val="400"/>
+              </a:spcAft>
+            </a:pPr>
+            <a:r>
+              <a:rPr sz="1400" b="0" i="0">
+                <a:solidFill>
+                  <a:srgbClr val="FFFFFF"/>
+                </a:solidFill>
+                <a:latin typeface="Calibri"/>
+              </a:rPr>
+              <a:t>La aplicacion de CloudLite se despliega sobre PaaS.</a:t>
+            </a:r>
+          </a:p>
+          <a:p>
+            <a:pPr>
+              <a:spcAft>
+                <a:spcPts val="400"/>
+              </a:spcAft>
+            </a:pPr>
+            <a:r>
+              <a:rPr sz="1400" b="0" i="0">
+                <a:solidFill>
+                  <a:srgbClr val="FFFFFF"/>
+                </a:solidFill>
+                <a:latin typeface="Calibri"/>
+              </a:rPr>
+              <a:t/>
+            </a:r>
+          </a:p>
+          <a:p>
+            <a:pPr>
+              <a:spcAft>
+                <a:spcPts val="400"/>
+              </a:spcAft>
+            </a:pPr>
+            <a:r>
+              <a:rPr sz="1400" b="0" i="0">
+                <a:solidFill>
+                  <a:srgbClr val="FFFFFF"/>
+                </a:solidFill>
+                <a:latin typeface="Calibri"/>
+              </a:rPr>
+              <a:t>## 5. Alternativas descartadas    &lt;- exactamente 2, con motivo del dominio</a:t>
+            </a:r>
+          </a:p>
+          <a:p>
+            <a:pPr>
+              <a:spcAft>
+                <a:spcPts val="400"/>
+              </a:spcAft>
+            </a:pPr>
+            <a:r>
+              <a:rPr sz="1400" b="0" i="0">
+                <a:solidFill>
+                  <a:srgbClr val="FFFFFF"/>
+                </a:solidFill>
+                <a:latin typeface="Calibri"/>
+              </a:rPr>
+              <a:t>- IaaS: control total, pero yo opero SO y parches -&gt; tiempo que no tengo.</a:t>
+            </a:r>
+          </a:p>
+          <a:p>
+            <a:pPr>
+              <a:spcAft>
+                <a:spcPts val="400"/>
+              </a:spcAft>
+            </a:pPr>
+            <a:r>
+              <a:rPr sz="1400" b="0" i="0">
+                <a:solidFill>
+                  <a:srgbClr val="FFFFFF"/>
+                </a:solidFill>
+                <a:latin typeface="Calibri"/>
+              </a:rPr>
+              <a:t>- SaaS como nucleo: no queda nada que arquitecturar; solo satelite (auth/email).</a:t>
+            </a:r>
+          </a:p>
+          <a:p>
+            <a:pPr>
+              <a:spcAft>
+                <a:spcPts val="400"/>
+              </a:spcAft>
+            </a:pPr>
+            <a:r>
+              <a:rPr sz="1400" b="0" i="0">
+                <a:solidFill>
+                  <a:srgbClr val="FFFFFF"/>
+                </a:solidFill>
+                <a:latin typeface="Calibri"/>
+              </a:rPr>
+              <a:t/>
+            </a:r>
+          </a:p>
+          <a:p>
+            <a:pPr>
+              <a:spcAft>
+                <a:spcPts val="400"/>
+              </a:spcAft>
+            </a:pPr>
+            <a:r>
+              <a:rPr sz="1400" b="0" i="0">
+                <a:solidFill>
+                  <a:srgbClr val="FFFFFF"/>
+                </a:solidFill>
+                <a:latin typeface="Calibri"/>
+              </a:rPr>
+              <a:t>## 6. Consecuencias               &lt;- 3 ejes, cada uno con + y -</a:t>
+            </a:r>
+          </a:p>
+          <a:p>
+            <a:pPr>
+              <a:spcAft>
+                <a:spcPts val="400"/>
+              </a:spcAft>
+            </a:pPr>
+            <a:r>
+              <a:rPr sz="1400" b="0" i="0">
+                <a:solidFill>
+                  <a:srgbClr val="FFFFFF"/>
+                </a:solidFill>
+                <a:latin typeface="Calibri"/>
+              </a:rPr>
+              <a:t>Operacion + / -        Costo + / -        Aprendizaje + / -</a:t>
+            </a:r>
+          </a:p>
+        </p:txBody>
+      </p:sp>
+      <p:sp>
+        <p:nvSpPr>
+          <p:cNvPr id="9" name="TextBox 8"/>
+          <p:cNvSpPr txBox="1"/>
+          <p:nvPr/>
+        </p:nvSpPr>
+        <p:spPr>
+          <a:xfrm>
+            <a:off x="457200" y="6080760"/>
+            <a:ext cx="11277295" cy="320040"/>
+          </a:xfrm>
+          <a:prstGeom prst="rect">
+            <a:avLst/>
+          </a:prstGeom>
+          <a:noFill/>
+        </p:spPr>
+        <p:txBody>
+          <a:bodyPr wrap="square">
+            <a:spAutoFit/>
+          </a:bodyPr>
+          <a:lstStyle/>
+          <a:p>
+            <a:pPr algn="ctr"/>
+            <a:r>
+              <a:rPr sz="1200" b="0" i="1">
+                <a:solidFill>
+                  <a:srgbClr val="666666"/>
+                </a:solidFill>
+                <a:latin typeface="Calibri"/>
+              </a:rPr>
+              <a:t>Sin Titulo y Estado con fecha no hay ADR que citar despues: es su identidad.</a:t>
+            </a:r>
+          </a:p>
+        </p:txBody>
+      </p:sp>
+      <p:sp>
+        <p:nvSpPr>
+          <p:cNvPr id="10" name="TextBox 9"/>
           <p:cNvSpPr txBox="1"/>
           <p:nvPr/>
         </p:nvSpPr>
@@ -9097,1176 +10852,10 @@
         <p:spPr>
           <a:xfrm>
             <a:off x="0" y="0"/>
-            <a:ext cx="12191695" cy="960120"/>
-          </a:xfrm>
-          <a:prstGeom prst="rect">
-            <a:avLst/>
-          </a:prstGeom>
-          <a:solidFill>
-            <a:srgbClr val="095292"/>
-          </a:solidFill>
-          <a:ln>
-            <a:noFill/>
-          </a:ln>
-        </p:spPr>
-        <p:style>
-          <a:lnRef idx="1">
-            <a:schemeClr val="accent1"/>
-          </a:lnRef>
-          <a:fillRef idx="3">
-            <a:schemeClr val="accent1"/>
-          </a:fillRef>
-          <a:effectRef idx="2">
-            <a:schemeClr val="accent1"/>
-          </a:effectRef>
-          <a:fontRef idx="minor">
-            <a:schemeClr val="lt1"/>
-          </a:fontRef>
-        </p:style>
-        <p:txBody>
-          <a:bodyPr rtlCol="0" anchor="ctr"/>
-          <a:lstStyle/>
-          <a:p>
-            <a:pPr algn="ctr"/>
-          </a:p>
-        </p:txBody>
-      </p:sp>
-      <p:sp>
-        <p:nvSpPr>
-          <p:cNvPr id="3" name="Rectangle 2"/>
-          <p:cNvSpPr/>
-          <p:nvPr/>
-        </p:nvSpPr>
-        <p:spPr>
-          <a:xfrm>
-            <a:off x="0" y="960120"/>
-            <a:ext cx="12191695" cy="41148"/>
-          </a:xfrm>
-          <a:prstGeom prst="rect">
-            <a:avLst/>
-          </a:prstGeom>
-          <a:solidFill>
-            <a:srgbClr val="FFD000"/>
-          </a:solidFill>
-          <a:ln>
-            <a:noFill/>
-          </a:ln>
-        </p:spPr>
-        <p:style>
-          <a:lnRef idx="1">
-            <a:schemeClr val="accent1"/>
-          </a:lnRef>
-          <a:fillRef idx="3">
-            <a:schemeClr val="accent1"/>
-          </a:fillRef>
-          <a:effectRef idx="2">
-            <a:schemeClr val="accent1"/>
-          </a:effectRef>
-          <a:fontRef idx="minor">
-            <a:schemeClr val="lt1"/>
-          </a:fontRef>
-        </p:style>
-        <p:txBody>
-          <a:bodyPr rtlCol="0" anchor="ctr"/>
-          <a:lstStyle/>
-          <a:p>
-            <a:pPr algn="ctr"/>
-          </a:p>
-        </p:txBody>
-      </p:sp>
-      <p:sp>
-        <p:nvSpPr>
-          <p:cNvPr id="4" name="TextBox 3"/>
-          <p:cNvSpPr txBox="1"/>
-          <p:nvPr/>
-        </p:nvSpPr>
-        <p:spPr>
-          <a:xfrm>
-            <a:off x="457200" y="164592"/>
-            <a:ext cx="11277295" cy="502920"/>
-          </a:xfrm>
-          <a:prstGeom prst="rect">
-            <a:avLst/>
-          </a:prstGeom>
-          <a:noFill/>
-        </p:spPr>
-        <p:txBody>
-          <a:bodyPr wrap="square">
-            <a:spAutoFit/>
-          </a:bodyPr>
-          <a:lstStyle/>
-          <a:p>
-            <a:r>
-              <a:rPr sz="2600" b="1" i="0">
-                <a:solidFill>
-                  <a:srgbClr val="FFFFFF"/>
-                </a:solidFill>
-                <a:latin typeface="Calibri"/>
-              </a:rPr>
-              <a:t>La plantilla de ADR: los seis apartados que se califican</a:t>
-            </a:r>
-          </a:p>
-        </p:txBody>
-      </p:sp>
-      <p:sp>
-        <p:nvSpPr>
-          <p:cNvPr id="5" name="Rounded Rectangle 4"/>
-          <p:cNvSpPr/>
-          <p:nvPr/>
-        </p:nvSpPr>
-        <p:spPr>
-          <a:xfrm>
-            <a:off x="457200" y="1261872"/>
-            <a:ext cx="11277295" cy="5093208"/>
-          </a:xfrm>
-          <a:prstGeom prst="roundRect">
-            <a:avLst>
-              <a:gd name="adj" fmla="val 12000"/>
-            </a:avLst>
-          </a:prstGeom>
-          <a:solidFill>
-            <a:srgbClr val="1E2A38"/>
-          </a:solidFill>
-          <a:ln>
-            <a:noFill/>
-          </a:ln>
-        </p:spPr>
-        <p:style>
-          <a:lnRef idx="1">
-            <a:schemeClr val="accent1"/>
-          </a:lnRef>
-          <a:fillRef idx="3">
-            <a:schemeClr val="accent1"/>
-          </a:fillRef>
-          <a:effectRef idx="2">
-            <a:schemeClr val="accent1"/>
-          </a:effectRef>
-          <a:fontRef idx="minor">
-            <a:schemeClr val="lt1"/>
-          </a:fontRef>
-        </p:style>
-        <p:txBody>
-          <a:bodyPr rtlCol="0" anchor="ctr"/>
-          <a:lstStyle/>
-          <a:p>
-            <a:pPr algn="ctr"/>
-          </a:p>
-        </p:txBody>
-      </p:sp>
-      <p:sp>
-        <p:nvSpPr>
-          <p:cNvPr id="6" name="Rectangle 5"/>
-          <p:cNvSpPr/>
-          <p:nvPr/>
-        </p:nvSpPr>
-        <p:spPr>
-          <a:xfrm>
-            <a:off x="457200" y="1261872"/>
-            <a:ext cx="11277295" cy="320040"/>
-          </a:xfrm>
-          <a:prstGeom prst="rect">
-            <a:avLst/>
-          </a:prstGeom>
-          <a:solidFill>
-            <a:srgbClr val="095292"/>
-          </a:solidFill>
-          <a:ln>
-            <a:noFill/>
-          </a:ln>
-        </p:spPr>
-        <p:style>
-          <a:lnRef idx="1">
-            <a:schemeClr val="accent1"/>
-          </a:lnRef>
-          <a:fillRef idx="3">
-            <a:schemeClr val="accent1"/>
-          </a:fillRef>
-          <a:effectRef idx="2">
-            <a:schemeClr val="accent1"/>
-          </a:effectRef>
-          <a:fontRef idx="minor">
-            <a:schemeClr val="lt1"/>
-          </a:fontRef>
-        </p:style>
-        <p:txBody>
-          <a:bodyPr rtlCol="0" anchor="ctr"/>
-          <a:lstStyle/>
-          <a:p>
-            <a:pPr algn="ctr"/>
-          </a:p>
-        </p:txBody>
-      </p:sp>
-      <p:sp>
-        <p:nvSpPr>
-          <p:cNvPr id="7" name="TextBox 6"/>
-          <p:cNvSpPr txBox="1"/>
-          <p:nvPr/>
-        </p:nvSpPr>
-        <p:spPr>
-          <a:xfrm>
-            <a:off x="685800" y="1307592"/>
-            <a:ext cx="10820095" cy="256032"/>
-          </a:xfrm>
-          <a:prstGeom prst="rect">
-            <a:avLst/>
-          </a:prstGeom>
-          <a:noFill/>
-        </p:spPr>
-        <p:txBody>
-          <a:bodyPr wrap="square" anchor="ctr"/>
-          <a:lstStyle/>
-          <a:p>
-            <a:r>
-              <a:rPr sz="1000" b="1" i="0">
-                <a:solidFill>
-                  <a:srgbClr val="269CCB"/>
-                </a:solidFill>
-                <a:latin typeface="Calibri"/>
-              </a:rPr>
-              <a:t>● ● ●</a:t>
-            </a:r>
-          </a:p>
-        </p:txBody>
-      </p:sp>
-      <p:sp>
-        <p:nvSpPr>
-          <p:cNvPr id="8" name="TextBox 7"/>
-          <p:cNvSpPr txBox="1"/>
-          <p:nvPr/>
-        </p:nvSpPr>
-        <p:spPr>
-          <a:xfrm>
-            <a:off x="777240" y="1719072"/>
-            <a:ext cx="5181447" cy="4453128"/>
-          </a:xfrm>
-          <a:prstGeom prst="rect">
-            <a:avLst/>
-          </a:prstGeom>
-          <a:noFill/>
-        </p:spPr>
-        <p:txBody>
-          <a:bodyPr wrap="square">
-            <a:spAutoFit/>
-          </a:bodyPr>
-          <a:lstStyle/>
-          <a:p>
-            <a:pPr>
-              <a:spcAft>
-                <a:spcPts val="400"/>
-              </a:spcAft>
-            </a:pPr>
-            <a:r>
-              <a:rPr sz="1400" b="0" i="0">
-                <a:solidFill>
-                  <a:srgbClr val="FFFFFF"/>
-                </a:solidFill>
-                <a:latin typeface="Calibri"/>
-              </a:rPr>
-              <a:t># ADR-001 · Modelo de servicio dominante de CloudLite</a:t>
-            </a:r>
-          </a:p>
-          <a:p>
-            <a:pPr>
-              <a:spcAft>
-                <a:spcPts val="400"/>
-              </a:spcAft>
-            </a:pPr>
-            <a:r>
-              <a:rPr sz="1400" b="0" i="0">
-                <a:solidFill>
-                  <a:srgbClr val="FFFFFF"/>
-                </a:solidFill>
-                <a:latin typeface="Calibri"/>
-              </a:rPr>
-              <a:t/>
-            </a:r>
-          </a:p>
-          <a:p>
-            <a:pPr>
-              <a:spcAft>
-                <a:spcPts val="400"/>
-              </a:spcAft>
-            </a:pPr>
-            <a:r>
-              <a:rPr sz="1400" b="0" i="0">
-                <a:solidFill>
-                  <a:srgbClr val="FFFFFF"/>
-                </a:solidFill>
-                <a:latin typeface="Calibri"/>
-              </a:rPr>
-              <a:t>## 1. Estado</a:t>
-            </a:r>
-          </a:p>
-          <a:p>
-            <a:pPr>
-              <a:spcAft>
-                <a:spcPts val="400"/>
-              </a:spcAft>
-            </a:pPr>
-            <a:r>
-              <a:rPr sz="1400" b="0" i="0">
-                <a:solidFill>
-                  <a:srgbClr val="FFFFFF"/>
-                </a:solidFill>
-                <a:latin typeface="Calibri"/>
-              </a:rPr>
-              <a:t>Aceptada · 2026-09-01 · decide: &lt;su nombre&gt;</a:t>
-            </a:r>
-          </a:p>
-          <a:p>
-            <a:pPr>
-              <a:spcAft>
-                <a:spcPts val="400"/>
-              </a:spcAft>
-            </a:pPr>
-            <a:r>
-              <a:rPr sz="1400" b="0" i="0">
-                <a:solidFill>
-                  <a:srgbClr val="FFFFFF"/>
-                </a:solidFill>
-                <a:latin typeface="Calibri"/>
-              </a:rPr>
-              <a:t/>
-            </a:r>
-          </a:p>
-          <a:p>
-            <a:pPr>
-              <a:spcAft>
-                <a:spcPts val="400"/>
-              </a:spcAft>
-            </a:pPr>
-            <a:r>
-              <a:rPr sz="1400" b="0" i="0">
-                <a:solidFill>
-                  <a:srgbClr val="FFFFFF"/>
-                </a:solidFill>
-                <a:latin typeface="Calibri"/>
-              </a:rPr>
-              <a:t>## 2. Contexto</a:t>
-            </a:r>
-          </a:p>
-          <a:p>
-            <a:pPr>
-              <a:spcAft>
-                <a:spcPts val="400"/>
-              </a:spcAft>
-            </a:pPr>
-            <a:r>
-              <a:rPr sz="1400" b="0" i="0">
-                <a:solidFill>
-                  <a:srgbClr val="FFFFFF"/>
-                </a:solidFill>
-                <a:latin typeface="Calibri"/>
-              </a:rPr>
-              <a:t>&lt;que problema del dominio obliga a decidir esto, en 3 o 4 lineas&gt;</a:t>
-            </a:r>
-          </a:p>
-          <a:p>
-            <a:pPr>
-              <a:spcAft>
-                <a:spcPts val="400"/>
-              </a:spcAft>
-            </a:pPr>
-            <a:r>
-              <a:rPr sz="1400" b="0" i="0">
-                <a:solidFill>
-                  <a:srgbClr val="FFFFFF"/>
-                </a:solidFill>
-                <a:latin typeface="Calibri"/>
-              </a:rPr>
-              <a:t/>
-            </a:r>
-          </a:p>
-          <a:p>
-            <a:pPr>
-              <a:spcAft>
-                <a:spcPts val="400"/>
-              </a:spcAft>
-            </a:pPr>
-            <a:r>
-              <a:rPr sz="1400" b="0" i="0">
-                <a:solidFill>
-                  <a:srgbClr val="FFFFFF"/>
-                </a:solidFill>
-                <a:latin typeface="Calibri"/>
-              </a:rPr>
-              <a:t>## 3. Alternativas consideradas</a:t>
-            </a:r>
-          </a:p>
-          <a:p>
-            <a:pPr>
-              <a:spcAft>
-                <a:spcPts val="400"/>
-              </a:spcAft>
-            </a:pPr>
-            <a:r>
-              <a:rPr sz="1400" b="0" i="0">
-                <a:solidFill>
-                  <a:srgbClr val="FFFFFF"/>
-                </a:solidFill>
-                <a:latin typeface="Calibri"/>
-              </a:rPr>
-              <a:t>- IaaS  — &lt;que ganaria y que costaria en SU dominio&gt;</a:t>
-            </a:r>
-          </a:p>
-          <a:p>
-            <a:pPr>
-              <a:spcAft>
-                <a:spcPts val="400"/>
-              </a:spcAft>
-            </a:pPr>
-            <a:r>
-              <a:rPr sz="1400" b="0" i="0">
-                <a:solidFill>
-                  <a:srgbClr val="FFFFFF"/>
-                </a:solidFill>
-                <a:latin typeface="Calibri"/>
-              </a:rPr>
-              <a:t>- PaaS  — &lt;idem&gt;</a:t>
-            </a:r>
-          </a:p>
-        </p:txBody>
-      </p:sp>
-      <p:sp>
-        <p:nvSpPr>
-          <p:cNvPr id="9" name="TextBox 8"/>
-          <p:cNvSpPr txBox="1"/>
-          <p:nvPr/>
-        </p:nvSpPr>
-        <p:spPr>
-          <a:xfrm>
-            <a:off x="6233007" y="1719072"/>
-            <a:ext cx="5181447" cy="4453128"/>
-          </a:xfrm>
-          <a:prstGeom prst="rect">
-            <a:avLst/>
-          </a:prstGeom>
-          <a:noFill/>
-        </p:spPr>
-        <p:txBody>
-          <a:bodyPr wrap="square">
-            <a:spAutoFit/>
-          </a:bodyPr>
-          <a:lstStyle/>
-          <a:p>
-            <a:pPr>
-              <a:spcAft>
-                <a:spcPts val="400"/>
-              </a:spcAft>
-            </a:pPr>
-            <a:r>
-              <a:rPr sz="1400" b="0" i="0">
-                <a:solidFill>
-                  <a:srgbClr val="FFFFFF"/>
-                </a:solidFill>
-                <a:latin typeface="Calibri"/>
-              </a:rPr>
-              <a:t>- SaaS  — &lt;idem&gt;</a:t>
-            </a:r>
-          </a:p>
-          <a:p>
-            <a:pPr>
-              <a:spcAft>
-                <a:spcPts val="400"/>
-              </a:spcAft>
-            </a:pPr>
-            <a:r>
-              <a:rPr sz="1400" b="0" i="0">
-                <a:solidFill>
-                  <a:srgbClr val="FFFFFF"/>
-                </a:solidFill>
-                <a:latin typeface="Calibri"/>
-              </a:rPr>
-              <a:t/>
-            </a:r>
-          </a:p>
-          <a:p>
-            <a:pPr>
-              <a:spcAft>
-                <a:spcPts val="400"/>
-              </a:spcAft>
-            </a:pPr>
-            <a:r>
-              <a:rPr sz="1400" b="0" i="0">
-                <a:solidFill>
-                  <a:srgbClr val="FFFFFF"/>
-                </a:solidFill>
-                <a:latin typeface="Calibri"/>
-              </a:rPr>
-              <a:t>## 4. Decision</a:t>
-            </a:r>
-          </a:p>
-          <a:p>
-            <a:pPr>
-              <a:spcAft>
-                <a:spcPts val="400"/>
-              </a:spcAft>
-            </a:pPr>
-            <a:r>
-              <a:rPr sz="1400" b="0" i="0">
-                <a:solidFill>
-                  <a:srgbClr val="FFFFFF"/>
-                </a:solidFill>
-                <a:latin typeface="Calibri"/>
-              </a:rPr>
-              <a:t>Se adopta &lt;IaaS|PaaS|SaaS&gt; como modelo dominante porque &lt;criterio&gt;.</a:t>
-            </a:r>
-          </a:p>
-          <a:p>
-            <a:pPr>
-              <a:spcAft>
-                <a:spcPts val="400"/>
-              </a:spcAft>
-            </a:pPr>
-            <a:r>
-              <a:rPr sz="1400" b="0" i="0">
-                <a:solidFill>
-                  <a:srgbClr val="FFFFFF"/>
-                </a:solidFill>
-                <a:latin typeface="Calibri"/>
-              </a:rPr>
-              <a:t/>
-            </a:r>
-          </a:p>
-          <a:p>
-            <a:pPr>
-              <a:spcAft>
-                <a:spcPts val="400"/>
-              </a:spcAft>
-            </a:pPr>
-            <a:r>
-              <a:rPr sz="1400" b="0" i="0">
-                <a:solidFill>
-                  <a:srgbClr val="FFFFFF"/>
-                </a:solidFill>
-                <a:latin typeface="Calibri"/>
-              </a:rPr>
-              <a:t>## 5. Justificacion contra los atributos de calidad</a:t>
-            </a:r>
-          </a:p>
-          <a:p>
-            <a:pPr>
-              <a:spcAft>
-                <a:spcPts val="400"/>
-              </a:spcAft>
-            </a:pPr>
-            <a:r>
-              <a:rPr sz="1400" b="0" i="0">
-                <a:solidFill>
-                  <a:srgbClr val="FFFFFF"/>
-                </a:solidFill>
-                <a:latin typeface="Calibri"/>
-              </a:rPr>
-              <a:t>&lt;el atributo de la Clase 1 que esta decision favorece, y el que sacrifica&gt;</a:t>
-            </a:r>
-          </a:p>
-          <a:p>
-            <a:pPr>
-              <a:spcAft>
-                <a:spcPts val="400"/>
-              </a:spcAft>
-            </a:pPr>
-            <a:r>
-              <a:rPr sz="1400" b="0" i="0">
-                <a:solidFill>
-                  <a:srgbClr val="FFFFFF"/>
-                </a:solidFill>
-                <a:latin typeface="Calibri"/>
-              </a:rPr>
-              <a:t/>
-            </a:r>
-          </a:p>
-          <a:p>
-            <a:pPr>
-              <a:spcAft>
-                <a:spcPts val="400"/>
-              </a:spcAft>
-            </a:pPr>
-            <a:r>
-              <a:rPr sz="1400" b="0" i="0">
-                <a:solidFill>
-                  <a:srgbClr val="FFFFFF"/>
-                </a:solidFill>
-                <a:latin typeface="Calibri"/>
-              </a:rPr>
-              <a:t>## 6. Consecuencias</a:t>
-            </a:r>
-          </a:p>
-          <a:p>
-            <a:pPr>
-              <a:spcAft>
-                <a:spcPts val="400"/>
-              </a:spcAft>
-            </a:pPr>
-            <a:r>
-              <a:rPr sz="1400" b="0" i="0">
-                <a:solidFill>
-                  <a:srgbClr val="FFFFFF"/>
-                </a:solidFill>
-                <a:latin typeface="Calibri"/>
-              </a:rPr>
-              <a:t>Positivas: &lt;...&gt;   Negativas: &lt;...&gt;   A revisar si: &lt;condicion&gt;</a:t>
-            </a:r>
-          </a:p>
-        </p:txBody>
-      </p:sp>
-      <p:sp>
-        <p:nvSpPr>
-          <p:cNvPr id="10" name="TextBox 9"/>
-          <p:cNvSpPr txBox="1"/>
-          <p:nvPr/>
-        </p:nvSpPr>
-        <p:spPr>
-          <a:xfrm>
-            <a:off x="11185855" y="6473952"/>
-            <a:ext cx="640080" cy="274320"/>
-          </a:xfrm>
-          <a:prstGeom prst="rect">
-            <a:avLst/>
-          </a:prstGeom>
-          <a:noFill/>
-        </p:spPr>
-        <p:txBody>
-          <a:bodyPr wrap="square">
-            <a:spAutoFit/>
-          </a:bodyPr>
-          <a:lstStyle/>
-          <a:p>
-            <a:pPr algn="r"/>
-            <a:r>
-              <a:rPr sz="1100" b="0" i="0">
-                <a:solidFill>
-                  <a:srgbClr val="666666"/>
-                </a:solidFill>
-                <a:latin typeface="Calibri"/>
-              </a:rPr>
-              <a:t>27</a:t>
-            </a:r>
-          </a:p>
-        </p:txBody>
-      </p:sp>
-    </p:spTree>
-  </p:cSld>
-  <p:clrMapOvr>
-    <a:masterClrMapping/>
-  </p:clrMapOvr>
-</p:sld>
-</file>
-
-<file path=ppt/slides/slide28.xml><?xml version="1.0" encoding="utf-8"?>
-<p:sld xmlns:a="http://schemas.openxmlformats.org/drawingml/2006/main" xmlns:p="http://schemas.openxmlformats.org/presentationml/2006/main" xmlns:r="http://schemas.openxmlformats.org/officeDocument/2006/relationships">
-  <p:cSld>
-    <p:bg>
-      <p:bgPr>
-        <a:solidFill>
-          <a:srgbClr val="FFFFFF"/>
-        </a:solidFill>
-        <a:effectLst/>
-      </p:bgPr>
-    </p:bg>
-    <p:spTree>
-      <p:nvGrpSpPr>
-        <p:cNvPr id="1" name=""/>
-        <p:cNvGrpSpPr/>
-        <p:nvPr/>
-      </p:nvGrpSpPr>
-      <p:grpSpPr/>
-      <p:sp>
-        <p:nvSpPr>
-          <p:cNvPr id="2" name="Rectangle 1"/>
-          <p:cNvSpPr/>
-          <p:nvPr/>
-        </p:nvSpPr>
-        <p:spPr>
-          <a:xfrm>
-            <a:off x="0" y="0"/>
-            <a:ext cx="12191695" cy="1170432"/>
-          </a:xfrm>
-          <a:prstGeom prst="rect">
-            <a:avLst/>
-          </a:prstGeom>
-          <a:solidFill>
-            <a:srgbClr val="095292"/>
-          </a:solidFill>
-          <a:ln>
-            <a:noFill/>
-          </a:ln>
-        </p:spPr>
-        <p:style>
-          <a:lnRef idx="1">
-            <a:schemeClr val="accent1"/>
-          </a:lnRef>
-          <a:fillRef idx="3">
-            <a:schemeClr val="accent1"/>
-          </a:fillRef>
-          <a:effectRef idx="2">
-            <a:schemeClr val="accent1"/>
-          </a:effectRef>
-          <a:fontRef idx="minor">
-            <a:schemeClr val="lt1"/>
-          </a:fontRef>
-        </p:style>
-        <p:txBody>
-          <a:bodyPr rtlCol="0" anchor="ctr"/>
-          <a:lstStyle/>
-          <a:p>
-            <a:pPr algn="ctr"/>
-          </a:p>
-        </p:txBody>
-      </p:sp>
-      <p:sp>
-        <p:nvSpPr>
-          <p:cNvPr id="3" name="Rectangle 2"/>
-          <p:cNvSpPr/>
-          <p:nvPr/>
-        </p:nvSpPr>
-        <p:spPr>
-          <a:xfrm>
-            <a:off x="0" y="1170432"/>
-            <a:ext cx="12191695" cy="41148"/>
-          </a:xfrm>
-          <a:prstGeom prst="rect">
-            <a:avLst/>
-          </a:prstGeom>
-          <a:solidFill>
-            <a:srgbClr val="FFD000"/>
-          </a:solidFill>
-          <a:ln>
-            <a:noFill/>
-          </a:ln>
-        </p:spPr>
-        <p:style>
-          <a:lnRef idx="1">
-            <a:schemeClr val="accent1"/>
-          </a:lnRef>
-          <a:fillRef idx="3">
-            <a:schemeClr val="accent1"/>
-          </a:fillRef>
-          <a:effectRef idx="2">
-            <a:schemeClr val="accent1"/>
-          </a:effectRef>
-          <a:fontRef idx="minor">
-            <a:schemeClr val="lt1"/>
-          </a:fontRef>
-        </p:style>
-        <p:txBody>
-          <a:bodyPr rtlCol="0" anchor="ctr"/>
-          <a:lstStyle/>
-          <a:p>
-            <a:pPr algn="ctr"/>
-          </a:p>
-        </p:txBody>
-      </p:sp>
-      <p:sp>
-        <p:nvSpPr>
-          <p:cNvPr id="4" name="TextBox 3"/>
-          <p:cNvSpPr txBox="1"/>
-          <p:nvPr/>
-        </p:nvSpPr>
-        <p:spPr>
-          <a:xfrm>
-            <a:off x="457200" y="164592"/>
-            <a:ext cx="11277295" cy="384048"/>
-          </a:xfrm>
-          <a:prstGeom prst="rect">
-            <a:avLst/>
-          </a:prstGeom>
-          <a:noFill/>
-        </p:spPr>
-        <p:txBody>
-          <a:bodyPr wrap="square">
-            <a:spAutoFit/>
-          </a:bodyPr>
-          <a:lstStyle/>
-          <a:p>
-            <a:r>
-              <a:rPr sz="2600" b="1" i="0">
-                <a:solidFill>
-                  <a:srgbClr val="FFFFFF"/>
-                </a:solidFill>
-                <a:latin typeface="Calibri"/>
-              </a:rPr>
-              <a:t>Quién administra cada capa — IaaS vs PaaS vs SaaS</a:t>
-            </a:r>
-          </a:p>
-        </p:txBody>
-      </p:sp>
-      <p:sp>
-        <p:nvSpPr>
-          <p:cNvPr id="5" name="TextBox 4"/>
-          <p:cNvSpPr txBox="1"/>
-          <p:nvPr/>
-        </p:nvSpPr>
-        <p:spPr>
-          <a:xfrm>
-            <a:off x="457200" y="566928"/>
-            <a:ext cx="11277295" cy="411480"/>
-          </a:xfrm>
-          <a:prstGeom prst="rect">
-            <a:avLst/>
-          </a:prstGeom>
-          <a:noFill/>
-        </p:spPr>
-        <p:txBody>
-          <a:bodyPr wrap="square">
-            <a:spAutoFit/>
-          </a:bodyPr>
-          <a:lstStyle/>
-          <a:p>
-            <a:r>
-              <a:rPr sz="1400" b="0" i="0">
-                <a:solidFill>
-                  <a:srgbClr val="B8D8EE"/>
-                </a:solidFill>
-                <a:latin typeface="Calibri"/>
-              </a:rPr>
-              <a:t>Misma aplicación, distinto reparto de responsabilidad entre usted y el proveedor</a:t>
-            </a:r>
-          </a:p>
-        </p:txBody>
-      </p:sp>
-      <p:sp>
-        <p:nvSpPr>
-          <p:cNvPr id="6" name="Rounded Rectangle 5"/>
-          <p:cNvSpPr/>
-          <p:nvPr/>
-        </p:nvSpPr>
-        <p:spPr>
-          <a:xfrm>
-            <a:off x="548640" y="1325880"/>
-            <a:ext cx="3291840" cy="685800"/>
-          </a:xfrm>
-          <a:prstGeom prst="roundRect">
-            <a:avLst>
-              <a:gd name="adj" fmla="val 12000"/>
-            </a:avLst>
-          </a:prstGeom>
-          <a:solidFill>
-            <a:srgbClr val="095292"/>
-          </a:solidFill>
-          <a:ln>
-            <a:noFill/>
-          </a:ln>
-        </p:spPr>
-        <p:style>
-          <a:lnRef idx="1">
-            <a:schemeClr val="accent1"/>
-          </a:lnRef>
-          <a:fillRef idx="3">
-            <a:schemeClr val="accent1"/>
-          </a:fillRef>
-          <a:effectRef idx="2">
-            <a:schemeClr val="accent1"/>
-          </a:effectRef>
-          <a:fontRef idx="minor">
-            <a:schemeClr val="lt1"/>
-          </a:fontRef>
-        </p:style>
-        <p:txBody>
-          <a:bodyPr rtlCol="0" anchor="ctr" wrap="square"/>
-          <a:lstStyle/>
-          <a:p>
-            <a:pPr algn="ctr"/>
-            <a:r>
-              <a:rPr sz="1200" b="1" i="0">
-                <a:solidFill>
-                  <a:srgbClr val="FFFFFF"/>
-                </a:solidFill>
-                <a:latin typeface="Calibri"/>
-              </a:rPr>
-              <a:t>IaaS
-(DigitalOcean, AWS EC2)</a:t>
-            </a:r>
-          </a:p>
-        </p:txBody>
-      </p:sp>
-      <p:sp>
-        <p:nvSpPr>
-          <p:cNvPr id="7" name="Rounded Rectangle 6"/>
-          <p:cNvSpPr/>
-          <p:nvPr/>
-        </p:nvSpPr>
-        <p:spPr>
-          <a:xfrm>
-            <a:off x="4160520" y="1325880"/>
-            <a:ext cx="3291840" cy="685800"/>
-          </a:xfrm>
-          <a:prstGeom prst="roundRect">
-            <a:avLst>
-              <a:gd name="adj" fmla="val 12000"/>
-            </a:avLst>
-          </a:prstGeom>
-          <a:solidFill>
-            <a:srgbClr val="095292"/>
-          </a:solidFill>
-          <a:ln>
-            <a:noFill/>
-          </a:ln>
-        </p:spPr>
-        <p:style>
-          <a:lnRef idx="1">
-            <a:schemeClr val="accent1"/>
-          </a:lnRef>
-          <a:fillRef idx="3">
-            <a:schemeClr val="accent1"/>
-          </a:fillRef>
-          <a:effectRef idx="2">
-            <a:schemeClr val="accent1"/>
-          </a:effectRef>
-          <a:fontRef idx="minor">
-            <a:schemeClr val="lt1"/>
-          </a:fontRef>
-        </p:style>
-        <p:txBody>
-          <a:bodyPr rtlCol="0" anchor="ctr" wrap="square"/>
-          <a:lstStyle/>
-          <a:p>
-            <a:pPr algn="ctr"/>
-            <a:r>
-              <a:rPr sz="1200" b="1" i="0">
-                <a:solidFill>
-                  <a:srgbClr val="FFFFFF"/>
-                </a:solidFill>
-                <a:latin typeface="Calibri"/>
-              </a:rPr>
-              <a:t>PaaS
-(Render, Railway, Heroku)</a:t>
-            </a:r>
-          </a:p>
-        </p:txBody>
-      </p:sp>
-      <p:sp>
-        <p:nvSpPr>
-          <p:cNvPr id="8" name="Rounded Rectangle 7"/>
-          <p:cNvSpPr/>
-          <p:nvPr/>
-        </p:nvSpPr>
-        <p:spPr>
-          <a:xfrm>
-            <a:off x="7772400" y="1325880"/>
-            <a:ext cx="3291840" cy="685800"/>
-          </a:xfrm>
-          <a:prstGeom prst="roundRect">
-            <a:avLst>
-              <a:gd name="adj" fmla="val 12000"/>
-            </a:avLst>
-          </a:prstGeom>
-          <a:solidFill>
-            <a:srgbClr val="095292"/>
-          </a:solidFill>
-          <a:ln>
-            <a:noFill/>
-          </a:ln>
-        </p:spPr>
-        <p:style>
-          <a:lnRef idx="1">
-            <a:schemeClr val="accent1"/>
-          </a:lnRef>
-          <a:fillRef idx="3">
-            <a:schemeClr val="accent1"/>
-          </a:fillRef>
-          <a:effectRef idx="2">
-            <a:schemeClr val="accent1"/>
-          </a:effectRef>
-          <a:fontRef idx="minor">
-            <a:schemeClr val="lt1"/>
-          </a:fontRef>
-        </p:style>
-        <p:txBody>
-          <a:bodyPr rtlCol="0" anchor="ctr" wrap="square"/>
-          <a:lstStyle/>
-          <a:p>
-            <a:pPr algn="ctr"/>
-            <a:r>
-              <a:rPr sz="1200" b="1" i="0">
-                <a:solidFill>
-                  <a:srgbClr val="FFFFFF"/>
-                </a:solidFill>
-                <a:latin typeface="Calibri"/>
-              </a:rPr>
-              <a:t>SaaS
-(Gmail, Notion, Slack)</a:t>
-            </a:r>
-          </a:p>
-        </p:txBody>
-      </p:sp>
-      <p:sp>
-        <p:nvSpPr>
-          <p:cNvPr id="9" name="Rounded Rectangle 8"/>
-          <p:cNvSpPr/>
-          <p:nvPr/>
-        </p:nvSpPr>
-        <p:spPr>
-          <a:xfrm>
-            <a:off x="548640" y="2103120"/>
-            <a:ext cx="3291840" cy="548640"/>
-          </a:xfrm>
-          <a:prstGeom prst="roundRect">
-            <a:avLst>
-              <a:gd name="adj" fmla="val 12000"/>
-            </a:avLst>
-          </a:prstGeom>
-          <a:solidFill>
-            <a:srgbClr val="FFD000"/>
-          </a:solidFill>
-          <a:ln>
-            <a:noFill/>
-          </a:ln>
-        </p:spPr>
-        <p:style>
-          <a:lnRef idx="1">
-            <a:schemeClr val="accent1"/>
-          </a:lnRef>
-          <a:fillRef idx="3">
-            <a:schemeClr val="accent1"/>
-          </a:fillRef>
-          <a:effectRef idx="2">
-            <a:schemeClr val="accent1"/>
-          </a:effectRef>
-          <a:fontRef idx="minor">
-            <a:schemeClr val="lt1"/>
-          </a:fontRef>
-        </p:style>
-        <p:txBody>
-          <a:bodyPr rtlCol="0" anchor="ctr" wrap="square"/>
-          <a:lstStyle/>
-          <a:p>
-            <a:pPr algn="ctr"/>
-            <a:r>
-              <a:rPr sz="1100" b="1" i="0">
-                <a:solidFill>
-                  <a:srgbClr val="095292"/>
-                </a:solidFill>
-                <a:latin typeface="Calibri"/>
-              </a:rPr>
-              <a:t>Aplicación y datos</a:t>
-            </a:r>
-          </a:p>
-        </p:txBody>
-      </p:sp>
-      <p:sp>
-        <p:nvSpPr>
-          <p:cNvPr id="10" name="Rounded Rectangle 9"/>
-          <p:cNvSpPr/>
-          <p:nvPr/>
-        </p:nvSpPr>
-        <p:spPr>
-          <a:xfrm>
-            <a:off x="548640" y="2743200"/>
-            <a:ext cx="3291840" cy="548640"/>
-          </a:xfrm>
-          <a:prstGeom prst="roundRect">
-            <a:avLst>
-              <a:gd name="adj" fmla="val 12000"/>
-            </a:avLst>
-          </a:prstGeom>
-          <a:solidFill>
-            <a:srgbClr val="FFD000"/>
-          </a:solidFill>
-          <a:ln>
-            <a:noFill/>
-          </a:ln>
-        </p:spPr>
-        <p:style>
-          <a:lnRef idx="1">
-            <a:schemeClr val="accent1"/>
-          </a:lnRef>
-          <a:fillRef idx="3">
-            <a:schemeClr val="accent1"/>
-          </a:fillRef>
-          <a:effectRef idx="2">
-            <a:schemeClr val="accent1"/>
-          </a:effectRef>
-          <a:fontRef idx="minor">
-            <a:schemeClr val="lt1"/>
-          </a:fontRef>
-        </p:style>
-        <p:txBody>
-          <a:bodyPr rtlCol="0" anchor="ctr" wrap="square"/>
-          <a:lstStyle/>
-          <a:p>
-            <a:pPr algn="ctr"/>
-            <a:r>
-              <a:rPr sz="1100" b="1" i="0">
-                <a:solidFill>
-                  <a:srgbClr val="095292"/>
-                </a:solidFill>
-                <a:latin typeface="Calibri"/>
-              </a:rPr>
-              <a:t>Runtime / middleware</a:t>
-            </a:r>
-          </a:p>
-        </p:txBody>
-      </p:sp>
-      <p:sp>
-        <p:nvSpPr>
-          <p:cNvPr id="11" name="Rounded Rectangle 10"/>
-          <p:cNvSpPr/>
-          <p:nvPr/>
-        </p:nvSpPr>
-        <p:spPr>
-          <a:xfrm>
-            <a:off x="548640" y="3383280"/>
-            <a:ext cx="3291840" cy="548640"/>
-          </a:xfrm>
-          <a:prstGeom prst="roundRect">
-            <a:avLst>
-              <a:gd name="adj" fmla="val 12000"/>
-            </a:avLst>
-          </a:prstGeom>
-          <a:solidFill>
-            <a:srgbClr val="FFD000"/>
-          </a:solidFill>
-          <a:ln>
-            <a:noFill/>
-          </a:ln>
-        </p:spPr>
-        <p:style>
-          <a:lnRef idx="1">
-            <a:schemeClr val="accent1"/>
-          </a:lnRef>
-          <a:fillRef idx="3">
-            <a:schemeClr val="accent1"/>
-          </a:fillRef>
-          <a:effectRef idx="2">
-            <a:schemeClr val="accent1"/>
-          </a:effectRef>
-          <a:fontRef idx="minor">
-            <a:schemeClr val="lt1"/>
-          </a:fontRef>
-        </p:style>
-        <p:txBody>
-          <a:bodyPr rtlCol="0" anchor="ctr" wrap="square"/>
-          <a:lstStyle/>
-          <a:p>
-            <a:pPr algn="ctr"/>
-            <a:r>
-              <a:rPr sz="1100" b="1" i="0">
-                <a:solidFill>
-                  <a:srgbClr val="095292"/>
-                </a:solidFill>
-                <a:latin typeface="Calibri"/>
-              </a:rPr>
-              <a:t>Sistema operativo</a:t>
-            </a:r>
-          </a:p>
-        </p:txBody>
-      </p:sp>
-      <p:sp>
-        <p:nvSpPr>
-          <p:cNvPr id="12" name="Rounded Rectangle 11"/>
-          <p:cNvSpPr/>
-          <p:nvPr/>
-        </p:nvSpPr>
-        <p:spPr>
-          <a:xfrm>
-            <a:off x="548640" y="4023360"/>
-            <a:ext cx="3291840" cy="548640"/>
-          </a:xfrm>
-          <a:prstGeom prst="roundRect">
-            <a:avLst>
-              <a:gd name="adj" fmla="val 12000"/>
-            </a:avLst>
+            <a:ext cx="12191695" cy="164592"/>
+          </a:xfrm>
+          <a:prstGeom prst="rect">
+            <a:avLst/>
           </a:prstGeom>
           <a:solidFill>
             <a:srgbClr val="269CCB"/>
@@ -10290,468 +10879,80 @@
           </a:fontRef>
         </p:style>
         <p:txBody>
-          <a:bodyPr rtlCol="0" anchor="ctr" wrap="square"/>
+          <a:bodyPr rtlCol="0" anchor="ctr"/>
           <a:lstStyle/>
           <a:p>
             <a:pPr algn="ctr"/>
-            <a:r>
-              <a:rPr sz="1050" b="1" i="0">
-                <a:solidFill>
-                  <a:srgbClr val="FFFFFF"/>
-                </a:solidFill>
-                <a:latin typeface="Calibri"/>
-              </a:rPr>
-              <a:t>Infraestructura
-(cómputo, red, disco)</a:t>
-            </a:r>
-          </a:p>
-        </p:txBody>
-      </p:sp>
-      <p:sp>
-        <p:nvSpPr>
-          <p:cNvPr id="13" name="Rounded Rectangle 12"/>
-          <p:cNvSpPr/>
-          <p:nvPr/>
-        </p:nvSpPr>
-        <p:spPr>
-          <a:xfrm>
-            <a:off x="4160520" y="2103120"/>
-            <a:ext cx="3291840" cy="548640"/>
-          </a:xfrm>
-          <a:prstGeom prst="roundRect">
-            <a:avLst>
-              <a:gd name="adj" fmla="val 12000"/>
-            </a:avLst>
-          </a:prstGeom>
-          <a:solidFill>
-            <a:srgbClr val="FFD000"/>
-          </a:solidFill>
-          <a:ln>
-            <a:noFill/>
-          </a:ln>
-        </p:spPr>
-        <p:style>
-          <a:lnRef idx="1">
-            <a:schemeClr val="accent1"/>
-          </a:lnRef>
-          <a:fillRef idx="3">
-            <a:schemeClr val="accent1"/>
-          </a:fillRef>
-          <a:effectRef idx="2">
-            <a:schemeClr val="accent1"/>
-          </a:effectRef>
-          <a:fontRef idx="minor">
-            <a:schemeClr val="lt1"/>
-          </a:fontRef>
-        </p:style>
-        <p:txBody>
-          <a:bodyPr rtlCol="0" anchor="ctr" wrap="square"/>
+          </a:p>
+        </p:txBody>
+      </p:sp>
+      <p:pic>
+        <p:nvPicPr>
+          <p:cNvPr id="3" name="Picture 2" descr="logo_uniajc_color.png"/>
+          <p:cNvPicPr>
+            <a:picLocks noChangeAspect="1"/>
+          </p:cNvPicPr>
+          <p:nvPr/>
+        </p:nvPicPr>
+        <p:blipFill>
+          <a:blip r:embed="rId2"/>
+          <a:stretch>
+            <a:fillRect/>
+          </a:stretch>
+        </p:blipFill>
+        <p:spPr>
+          <a:xfrm>
+            <a:off x="10271455" y="5998464"/>
+            <a:ext cx="1463040" cy="643233"/>
+          </a:xfrm>
+          <a:prstGeom prst="rect">
+            <a:avLst/>
+          </a:prstGeom>
+        </p:spPr>
+      </p:pic>
+      <p:sp>
+        <p:nvSpPr>
+          <p:cNvPr id="4" name="TextBox 3"/>
+          <p:cNvSpPr txBox="1"/>
+          <p:nvPr/>
+        </p:nvSpPr>
+        <p:spPr>
+          <a:xfrm>
+            <a:off x="457200" y="1737360"/>
+            <a:ext cx="11277295" cy="1097280"/>
+          </a:xfrm>
+          <a:prstGeom prst="rect">
+            <a:avLst/>
+          </a:prstGeom>
+          <a:noFill/>
+        </p:spPr>
+        <p:txBody>
+          <a:bodyPr wrap="square" anchor="ctr"/>
           <a:lstStyle/>
           <a:p>
             <a:pPr algn="ctr"/>
             <a:r>
-              <a:rPr sz="1100" b="1" i="0">
+              <a:rPr sz="3400" b="1" i="0">
                 <a:solidFill>
                   <a:srgbClr val="095292"/>
                 </a:solidFill>
                 <a:latin typeface="Calibri"/>
               </a:rPr>
-              <a:t>Aplicación y datos</a:t>
-            </a:r>
-          </a:p>
-        </p:txBody>
-      </p:sp>
-      <p:sp>
-        <p:nvSpPr>
-          <p:cNvPr id="14" name="Rounded Rectangle 13"/>
-          <p:cNvSpPr/>
-          <p:nvPr/>
-        </p:nvSpPr>
-        <p:spPr>
-          <a:xfrm>
-            <a:off x="4160520" y="2743200"/>
-            <a:ext cx="3291840" cy="548640"/>
-          </a:xfrm>
-          <a:prstGeom prst="roundRect">
-            <a:avLst>
-              <a:gd name="adj" fmla="val 12000"/>
-            </a:avLst>
-          </a:prstGeom>
-          <a:solidFill>
-            <a:srgbClr val="269CCB"/>
-          </a:solidFill>
-          <a:ln>
-            <a:noFill/>
-          </a:ln>
-        </p:spPr>
-        <p:style>
-          <a:lnRef idx="1">
-            <a:schemeClr val="accent1"/>
-          </a:lnRef>
-          <a:fillRef idx="3">
-            <a:schemeClr val="accent1"/>
-          </a:fillRef>
-          <a:effectRef idx="2">
-            <a:schemeClr val="accent1"/>
-          </a:effectRef>
-          <a:fontRef idx="minor">
-            <a:schemeClr val="lt1"/>
-          </a:fontRef>
-        </p:style>
-        <p:txBody>
-          <a:bodyPr rtlCol="0" anchor="ctr" wrap="square"/>
-          <a:lstStyle/>
-          <a:p>
-            <a:pPr algn="ctr"/>
-            <a:r>
-              <a:rPr sz="1100" b="1" i="0">
-                <a:solidFill>
-                  <a:srgbClr val="FFFFFF"/>
-                </a:solidFill>
-                <a:latin typeface="Calibri"/>
-              </a:rPr>
-              <a:t>Runtime / middleware</a:t>
-            </a:r>
-          </a:p>
-        </p:txBody>
-      </p:sp>
-      <p:sp>
-        <p:nvSpPr>
-          <p:cNvPr id="15" name="Rounded Rectangle 14"/>
-          <p:cNvSpPr/>
-          <p:nvPr/>
-        </p:nvSpPr>
-        <p:spPr>
-          <a:xfrm>
-            <a:off x="4160520" y="3383280"/>
-            <a:ext cx="3291840" cy="548640"/>
-          </a:xfrm>
-          <a:prstGeom prst="roundRect">
-            <a:avLst>
-              <a:gd name="adj" fmla="val 12000"/>
-            </a:avLst>
-          </a:prstGeom>
-          <a:solidFill>
-            <a:srgbClr val="269CCB"/>
-          </a:solidFill>
-          <a:ln>
-            <a:noFill/>
-          </a:ln>
-        </p:spPr>
-        <p:style>
-          <a:lnRef idx="1">
-            <a:schemeClr val="accent1"/>
-          </a:lnRef>
-          <a:fillRef idx="3">
-            <a:schemeClr val="accent1"/>
-          </a:fillRef>
-          <a:effectRef idx="2">
-            <a:schemeClr val="accent1"/>
-          </a:effectRef>
-          <a:fontRef idx="minor">
-            <a:schemeClr val="lt1"/>
-          </a:fontRef>
-        </p:style>
-        <p:txBody>
-          <a:bodyPr rtlCol="0" anchor="ctr" wrap="square"/>
-          <a:lstStyle/>
-          <a:p>
-            <a:pPr algn="ctr"/>
-            <a:r>
-              <a:rPr sz="1100" b="1" i="0">
-                <a:solidFill>
-                  <a:srgbClr val="FFFFFF"/>
-                </a:solidFill>
-                <a:latin typeface="Calibri"/>
-              </a:rPr>
-              <a:t>Sistema operativo</a:t>
-            </a:r>
-          </a:p>
-        </p:txBody>
-      </p:sp>
-      <p:sp>
-        <p:nvSpPr>
-          <p:cNvPr id="16" name="Rounded Rectangle 15"/>
-          <p:cNvSpPr/>
-          <p:nvPr/>
-        </p:nvSpPr>
-        <p:spPr>
-          <a:xfrm>
-            <a:off x="4160520" y="4023360"/>
-            <a:ext cx="3291840" cy="548640"/>
-          </a:xfrm>
-          <a:prstGeom prst="roundRect">
-            <a:avLst>
-              <a:gd name="adj" fmla="val 12000"/>
-            </a:avLst>
-          </a:prstGeom>
-          <a:solidFill>
-            <a:srgbClr val="269CCB"/>
-          </a:solidFill>
-          <a:ln>
-            <a:noFill/>
-          </a:ln>
-        </p:spPr>
-        <p:style>
-          <a:lnRef idx="1">
-            <a:schemeClr val="accent1"/>
-          </a:lnRef>
-          <a:fillRef idx="3">
-            <a:schemeClr val="accent1"/>
-          </a:fillRef>
-          <a:effectRef idx="2">
-            <a:schemeClr val="accent1"/>
-          </a:effectRef>
-          <a:fontRef idx="minor">
-            <a:schemeClr val="lt1"/>
-          </a:fontRef>
-        </p:style>
-        <p:txBody>
-          <a:bodyPr rtlCol="0" anchor="ctr" wrap="square"/>
-          <a:lstStyle/>
-          <a:p>
-            <a:pPr algn="ctr"/>
-            <a:r>
-              <a:rPr sz="1050" b="1" i="0">
-                <a:solidFill>
-                  <a:srgbClr val="FFFFFF"/>
-                </a:solidFill>
-                <a:latin typeface="Calibri"/>
-              </a:rPr>
-              <a:t>Infraestructura
-(cómputo, red, disco)</a:t>
-            </a:r>
-          </a:p>
-        </p:txBody>
-      </p:sp>
-      <p:sp>
-        <p:nvSpPr>
-          <p:cNvPr id="17" name="Rounded Rectangle 16"/>
-          <p:cNvSpPr/>
-          <p:nvPr/>
-        </p:nvSpPr>
-        <p:spPr>
-          <a:xfrm>
-            <a:off x="7772400" y="2103120"/>
-            <a:ext cx="3291840" cy="548640"/>
-          </a:xfrm>
-          <a:prstGeom prst="roundRect">
-            <a:avLst>
-              <a:gd name="adj" fmla="val 12000"/>
-            </a:avLst>
-          </a:prstGeom>
-          <a:solidFill>
-            <a:srgbClr val="FFD000"/>
-          </a:solidFill>
-          <a:ln>
-            <a:noFill/>
-          </a:ln>
-        </p:spPr>
-        <p:style>
-          <a:lnRef idx="1">
-            <a:schemeClr val="accent1"/>
-          </a:lnRef>
-          <a:fillRef idx="3">
-            <a:schemeClr val="accent1"/>
-          </a:fillRef>
-          <a:effectRef idx="2">
-            <a:schemeClr val="accent1"/>
-          </a:effectRef>
-          <a:fontRef idx="minor">
-            <a:schemeClr val="lt1"/>
-          </a:fontRef>
-        </p:style>
-        <p:txBody>
-          <a:bodyPr rtlCol="0" anchor="ctr" wrap="square"/>
-          <a:lstStyle/>
-          <a:p>
-            <a:pPr algn="ctr"/>
-            <a:r>
-              <a:rPr sz="1050" b="1" i="0">
-                <a:solidFill>
-                  <a:srgbClr val="095292"/>
-                </a:solidFill>
-                <a:latin typeface="Calibri"/>
-              </a:rPr>
-              <a:t>Aplicación y datos
-(usted solo configura)</a:t>
-            </a:r>
-          </a:p>
-        </p:txBody>
-      </p:sp>
-      <p:sp>
-        <p:nvSpPr>
-          <p:cNvPr id="18" name="Rounded Rectangle 17"/>
-          <p:cNvSpPr/>
-          <p:nvPr/>
-        </p:nvSpPr>
-        <p:spPr>
-          <a:xfrm>
-            <a:off x="7772400" y="2743200"/>
-            <a:ext cx="3291840" cy="548640"/>
-          </a:xfrm>
-          <a:prstGeom prst="roundRect">
-            <a:avLst>
-              <a:gd name="adj" fmla="val 12000"/>
-            </a:avLst>
-          </a:prstGeom>
-          <a:solidFill>
-            <a:srgbClr val="269CCB"/>
-          </a:solidFill>
-          <a:ln>
-            <a:noFill/>
-          </a:ln>
-        </p:spPr>
-        <p:style>
-          <a:lnRef idx="1">
-            <a:schemeClr val="accent1"/>
-          </a:lnRef>
-          <a:fillRef idx="3">
-            <a:schemeClr val="accent1"/>
-          </a:fillRef>
-          <a:effectRef idx="2">
-            <a:schemeClr val="accent1"/>
-          </a:effectRef>
-          <a:fontRef idx="minor">
-            <a:schemeClr val="lt1"/>
-          </a:fontRef>
-        </p:style>
-        <p:txBody>
-          <a:bodyPr rtlCol="0" anchor="ctr" wrap="square"/>
-          <a:lstStyle/>
-          <a:p>
-            <a:pPr algn="ctr"/>
-            <a:r>
-              <a:rPr sz="1100" b="1" i="0">
-                <a:solidFill>
-                  <a:srgbClr val="FFFFFF"/>
-                </a:solidFill>
-                <a:latin typeface="Calibri"/>
-              </a:rPr>
-              <a:t>Runtime / middleware</a:t>
-            </a:r>
-          </a:p>
-        </p:txBody>
-      </p:sp>
-      <p:sp>
-        <p:nvSpPr>
-          <p:cNvPr id="19" name="Rounded Rectangle 18"/>
-          <p:cNvSpPr/>
-          <p:nvPr/>
-        </p:nvSpPr>
-        <p:spPr>
-          <a:xfrm>
-            <a:off x="7772400" y="3383280"/>
-            <a:ext cx="3291840" cy="548640"/>
-          </a:xfrm>
-          <a:prstGeom prst="roundRect">
-            <a:avLst>
-              <a:gd name="adj" fmla="val 12000"/>
-            </a:avLst>
-          </a:prstGeom>
-          <a:solidFill>
-            <a:srgbClr val="269CCB"/>
-          </a:solidFill>
-          <a:ln>
-            <a:noFill/>
-          </a:ln>
-        </p:spPr>
-        <p:style>
-          <a:lnRef idx="1">
-            <a:schemeClr val="accent1"/>
-          </a:lnRef>
-          <a:fillRef idx="3">
-            <a:schemeClr val="accent1"/>
-          </a:fillRef>
-          <a:effectRef idx="2">
-            <a:schemeClr val="accent1"/>
-          </a:effectRef>
-          <a:fontRef idx="minor">
-            <a:schemeClr val="lt1"/>
-          </a:fontRef>
-        </p:style>
-        <p:txBody>
-          <a:bodyPr rtlCol="0" anchor="ctr" wrap="square"/>
-          <a:lstStyle/>
-          <a:p>
-            <a:pPr algn="ctr"/>
-            <a:r>
-              <a:rPr sz="1100" b="1" i="0">
-                <a:solidFill>
-                  <a:srgbClr val="FFFFFF"/>
-                </a:solidFill>
-                <a:latin typeface="Calibri"/>
-              </a:rPr>
-              <a:t>Sistema operativo</a:t>
-            </a:r>
-          </a:p>
-        </p:txBody>
-      </p:sp>
-      <p:sp>
-        <p:nvSpPr>
-          <p:cNvPr id="20" name="Rounded Rectangle 19"/>
-          <p:cNvSpPr/>
-          <p:nvPr/>
-        </p:nvSpPr>
-        <p:spPr>
-          <a:xfrm>
-            <a:off x="7772400" y="4023360"/>
-            <a:ext cx="3291840" cy="548640"/>
-          </a:xfrm>
-          <a:prstGeom prst="roundRect">
-            <a:avLst>
-              <a:gd name="adj" fmla="val 12000"/>
-            </a:avLst>
-          </a:prstGeom>
-          <a:solidFill>
-            <a:srgbClr val="269CCB"/>
-          </a:solidFill>
-          <a:ln>
-            <a:noFill/>
-          </a:ln>
-        </p:spPr>
-        <p:style>
-          <a:lnRef idx="1">
-            <a:schemeClr val="accent1"/>
-          </a:lnRef>
-          <a:fillRef idx="3">
-            <a:schemeClr val="accent1"/>
-          </a:fillRef>
-          <a:effectRef idx="2">
-            <a:schemeClr val="accent1"/>
-          </a:effectRef>
-          <a:fontRef idx="minor">
-            <a:schemeClr val="lt1"/>
-          </a:fontRef>
-        </p:style>
-        <p:txBody>
-          <a:bodyPr rtlCol="0" anchor="ctr" wrap="square"/>
-          <a:lstStyle/>
-          <a:p>
-            <a:pPr algn="ctr"/>
-            <a:r>
-              <a:rPr sz="1050" b="1" i="0">
-                <a:solidFill>
-                  <a:srgbClr val="FFFFFF"/>
-                </a:solidFill>
-                <a:latin typeface="Calibri"/>
-              </a:rPr>
-              <a:t>Infraestructura
-(cómputo, red, disco)</a:t>
-            </a:r>
-          </a:p>
-        </p:txBody>
-      </p:sp>
-      <p:sp>
-        <p:nvSpPr>
-          <p:cNvPr id="21" name="TextBox 20"/>
+              <a:t>Clase 2 · cierre conceptual</a:t>
+            </a:r>
+          </a:p>
+        </p:txBody>
+      </p:sp>
+      <p:sp>
+        <p:nvSpPr>
+          <p:cNvPr id="5" name="TextBox 4"/>
           <p:cNvSpPr txBox="1"/>
           <p:nvPr/>
         </p:nvSpPr>
         <p:spPr>
           <a:xfrm>
-            <a:off x="457200" y="5897880"/>
-            <a:ext cx="11277295" cy="320040"/>
+            <a:off x="457200" y="3017520"/>
+            <a:ext cx="11277295" cy="1645920"/>
           </a:xfrm>
           <a:prstGeom prst="rect">
             <a:avLst/>
@@ -10764,28 +10965,65 @@
           </a:bodyPr>
           <a:lstStyle/>
           <a:p>
-            <a:r>
-              <a:rPr sz="1050" b="0" i="1">
-                <a:solidFill>
-                  <a:srgbClr val="666666"/>
-                </a:solidFill>
-                <a:latin typeface="Calibri"/>
-              </a:rPr>
-              <a:t>Amarillo = lo administra usted · Celeste = lo administra el proveedor</a:t>
-            </a:r>
-          </a:p>
-        </p:txBody>
-      </p:sp>
-      <p:sp>
-        <p:nvSpPr>
-          <p:cNvPr id="22" name="TextBox 21"/>
+            <a:pPr algn="ctr">
+              <a:spcAft>
+                <a:spcPts val="600"/>
+              </a:spcAft>
+            </a:pPr>
+            <a:r>
+              <a:rPr sz="1600" b="0" i="0">
+                <a:solidFill>
+                  <a:srgbClr val="333333"/>
+                </a:solidFill>
+                <a:latin typeface="Calibri"/>
+              </a:rPr>
+              <a:t>Comparar IaaS, PaaS y SaaS con criterios de control, operación y velocidad.</a:t>
+            </a:r>
+          </a:p>
+          <a:p>
+            <a:pPr algn="ctr">
+              <a:spcAft>
+                <a:spcPts val="600"/>
+              </a:spcAft>
+            </a:pPr>
+            <a:r>
+              <a:rPr sz="1600" b="0" i="0">
+                <a:solidFill>
+                  <a:srgbClr val="333333"/>
+                </a:solidFill>
+                <a:latin typeface="Calibri"/>
+              </a:rPr>
+              <a:t>Elegir el modelo dominante de CloudLite con justificación.</a:t>
+            </a:r>
+          </a:p>
+          <a:p>
+            <a:pPr algn="ctr">
+              <a:spcAft>
+                <a:spcPts val="600"/>
+              </a:spcAft>
+            </a:pPr>
+            <a:r>
+              <a:rPr sz="1600" b="0" i="0">
+                <a:solidFill>
+                  <a:srgbClr val="333333"/>
+                </a:solidFill>
+                <a:latin typeface="Calibri"/>
+              </a:rPr>
+              <a:t>Documentar la decisión como ADR reutilizable en el informe PI.</a:t>
+            </a:r>
+          </a:p>
+        </p:txBody>
+      </p:sp>
+      <p:sp>
+        <p:nvSpPr>
+          <p:cNvPr id="6" name="TextBox 5"/>
           <p:cNvSpPr txBox="1"/>
           <p:nvPr/>
         </p:nvSpPr>
         <p:spPr>
           <a:xfrm>
-            <a:off x="457200" y="6263640"/>
-            <a:ext cx="11277295" cy="411480"/>
+            <a:off x="457200" y="4754880"/>
+            <a:ext cx="11277295" cy="640080"/>
           </a:xfrm>
           <a:prstGeom prst="rect">
             <a:avLst/>
@@ -10798,648 +11036,15 @@
           </a:bodyPr>
           <a:lstStyle/>
           <a:p>
-            <a:r>
-              <a:rPr sz="1100" b="0" i="1">
-                <a:solidFill>
-                  <a:srgbClr val="666666"/>
-                </a:solidFill>
-                <a:latin typeface="Calibri"/>
-              </a:rPr>
-              <a:t>Suba en la pila y sube el control, pero también lo que tiene que operar usted: parches, escalado, disponibilidad. Para el MVP de CloudLite, PaaS es el punto medio: usted solo responde por su aplicación y sus datos.</a:t>
-            </a:r>
-          </a:p>
-        </p:txBody>
-      </p:sp>
-      <p:sp>
-        <p:nvSpPr>
-          <p:cNvPr id="23" name="TextBox 22"/>
-          <p:cNvSpPr txBox="1"/>
-          <p:nvPr/>
-        </p:nvSpPr>
-        <p:spPr>
-          <a:xfrm>
-            <a:off x="11185855" y="6473952"/>
-            <a:ext cx="640080" cy="274320"/>
-          </a:xfrm>
-          <a:prstGeom prst="rect">
-            <a:avLst/>
-          </a:prstGeom>
-          <a:noFill/>
-        </p:spPr>
-        <p:txBody>
-          <a:bodyPr wrap="square">
-            <a:spAutoFit/>
-          </a:bodyPr>
-          <a:lstStyle/>
-          <a:p>
-            <a:pPr algn="r"/>
-            <a:r>
-              <a:rPr sz="1100" b="0" i="0">
-                <a:solidFill>
-                  <a:srgbClr val="666666"/>
-                </a:solidFill>
-                <a:latin typeface="Calibri"/>
-              </a:rPr>
-              <a:t>28</a:t>
-            </a:r>
-          </a:p>
-        </p:txBody>
-      </p:sp>
-    </p:spTree>
-  </p:cSld>
-  <p:clrMapOvr>
-    <a:masterClrMapping/>
-  </p:clrMapOvr>
-</p:sld>
-</file>
-
-<file path=ppt/slides/slide29.xml><?xml version="1.0" encoding="utf-8"?>
-<p:sld xmlns:a="http://schemas.openxmlformats.org/drawingml/2006/main" xmlns:p="http://schemas.openxmlformats.org/presentationml/2006/main" xmlns:r="http://schemas.openxmlformats.org/officeDocument/2006/relationships">
-  <p:cSld>
-    <p:bg>
-      <p:bgPr>
-        <a:solidFill>
-          <a:srgbClr val="FFFFFF"/>
-        </a:solidFill>
-        <a:effectLst/>
-      </p:bgPr>
-    </p:bg>
-    <p:spTree>
-      <p:nvGrpSpPr>
-        <p:cNvPr id="1" name=""/>
-        <p:cNvGrpSpPr/>
-        <p:nvPr/>
-      </p:nvGrpSpPr>
-      <p:grpSpPr/>
-      <p:sp>
-        <p:nvSpPr>
-          <p:cNvPr id="2" name="Rectangle 1"/>
-          <p:cNvSpPr/>
-          <p:nvPr/>
-        </p:nvSpPr>
-        <p:spPr>
-          <a:xfrm>
-            <a:off x="0" y="0"/>
-            <a:ext cx="12191695" cy="960120"/>
-          </a:xfrm>
-          <a:prstGeom prst="rect">
-            <a:avLst/>
-          </a:prstGeom>
-          <a:solidFill>
-            <a:srgbClr val="095292"/>
-          </a:solidFill>
-          <a:ln>
-            <a:noFill/>
-          </a:ln>
-        </p:spPr>
-        <p:style>
-          <a:lnRef idx="1">
-            <a:schemeClr val="accent1"/>
-          </a:lnRef>
-          <a:fillRef idx="3">
-            <a:schemeClr val="accent1"/>
-          </a:fillRef>
-          <a:effectRef idx="2">
-            <a:schemeClr val="accent1"/>
-          </a:effectRef>
-          <a:fontRef idx="minor">
-            <a:schemeClr val="lt1"/>
-          </a:fontRef>
-        </p:style>
-        <p:txBody>
-          <a:bodyPr rtlCol="0" anchor="ctr"/>
-          <a:lstStyle/>
-          <a:p>
             <a:pPr algn="ctr"/>
-          </a:p>
-        </p:txBody>
-      </p:sp>
-      <p:sp>
-        <p:nvSpPr>
-          <p:cNvPr id="3" name="Rectangle 2"/>
-          <p:cNvSpPr/>
-          <p:nvPr/>
-        </p:nvSpPr>
-        <p:spPr>
-          <a:xfrm>
-            <a:off x="0" y="960120"/>
-            <a:ext cx="12191695" cy="41148"/>
-          </a:xfrm>
-          <a:prstGeom prst="rect">
-            <a:avLst/>
-          </a:prstGeom>
-          <a:solidFill>
-            <a:srgbClr val="FFD000"/>
-          </a:solidFill>
-          <a:ln>
-            <a:noFill/>
-          </a:ln>
-        </p:spPr>
-        <p:style>
-          <a:lnRef idx="1">
-            <a:schemeClr val="accent1"/>
-          </a:lnRef>
-          <a:fillRef idx="3">
-            <a:schemeClr val="accent1"/>
-          </a:fillRef>
-          <a:effectRef idx="2">
-            <a:schemeClr val="accent1"/>
-          </a:effectRef>
-          <a:fontRef idx="minor">
-            <a:schemeClr val="lt1"/>
-          </a:fontRef>
-        </p:style>
-        <p:txBody>
-          <a:bodyPr rtlCol="0" anchor="ctr"/>
-          <a:lstStyle/>
-          <a:p>
-            <a:pPr algn="ctr"/>
-          </a:p>
-        </p:txBody>
-      </p:sp>
-      <p:sp>
-        <p:nvSpPr>
-          <p:cNvPr id="4" name="TextBox 3"/>
-          <p:cNvSpPr txBox="1"/>
-          <p:nvPr/>
-        </p:nvSpPr>
-        <p:spPr>
-          <a:xfrm>
-            <a:off x="457200" y="164592"/>
-            <a:ext cx="11277295" cy="502920"/>
-          </a:xfrm>
-          <a:prstGeom prst="rect">
-            <a:avLst/>
-          </a:prstGeom>
-          <a:noFill/>
-        </p:spPr>
-        <p:txBody>
-          <a:bodyPr wrap="square">
-            <a:spAutoFit/>
-          </a:bodyPr>
-          <a:lstStyle/>
-          <a:p>
-            <a:r>
-              <a:rPr sz="2600" b="1" i="0">
-                <a:solidFill>
-                  <a:srgbClr val="FFFFFF"/>
-                </a:solidFill>
-                <a:latin typeface="Calibri"/>
-              </a:rPr>
-              <a:t>ADR-001 — las 6 secciones caben en una pagina</a:t>
-            </a:r>
-          </a:p>
-        </p:txBody>
-      </p:sp>
-      <p:sp>
-        <p:nvSpPr>
-          <p:cNvPr id="5" name="Rounded Rectangle 4"/>
-          <p:cNvSpPr/>
-          <p:nvPr/>
-        </p:nvSpPr>
-        <p:spPr>
-          <a:xfrm>
-            <a:off x="457200" y="1261872"/>
-            <a:ext cx="11277295" cy="4773168"/>
-          </a:xfrm>
-          <a:prstGeom prst="roundRect">
-            <a:avLst>
-              <a:gd name="adj" fmla="val 12000"/>
-            </a:avLst>
-          </a:prstGeom>
-          <a:solidFill>
-            <a:srgbClr val="1E2A38"/>
-          </a:solidFill>
-          <a:ln>
-            <a:noFill/>
-          </a:ln>
-        </p:spPr>
-        <p:style>
-          <a:lnRef idx="1">
-            <a:schemeClr val="accent1"/>
-          </a:lnRef>
-          <a:fillRef idx="3">
-            <a:schemeClr val="accent1"/>
-          </a:fillRef>
-          <a:effectRef idx="2">
-            <a:schemeClr val="accent1"/>
-          </a:effectRef>
-          <a:fontRef idx="minor">
-            <a:schemeClr val="lt1"/>
-          </a:fontRef>
-        </p:style>
-        <p:txBody>
-          <a:bodyPr rtlCol="0" anchor="ctr"/>
-          <a:lstStyle/>
-          <a:p>
-            <a:pPr algn="ctr"/>
-          </a:p>
-        </p:txBody>
-      </p:sp>
-      <p:sp>
-        <p:nvSpPr>
-          <p:cNvPr id="6" name="Rectangle 5"/>
-          <p:cNvSpPr/>
-          <p:nvPr/>
-        </p:nvSpPr>
-        <p:spPr>
-          <a:xfrm>
-            <a:off x="457200" y="1261872"/>
-            <a:ext cx="11277295" cy="320040"/>
-          </a:xfrm>
-          <a:prstGeom prst="rect">
-            <a:avLst/>
-          </a:prstGeom>
-          <a:solidFill>
-            <a:srgbClr val="095292"/>
-          </a:solidFill>
-          <a:ln>
-            <a:noFill/>
-          </a:ln>
-        </p:spPr>
-        <p:style>
-          <a:lnRef idx="1">
-            <a:schemeClr val="accent1"/>
-          </a:lnRef>
-          <a:fillRef idx="3">
-            <a:schemeClr val="accent1"/>
-          </a:fillRef>
-          <a:effectRef idx="2">
-            <a:schemeClr val="accent1"/>
-          </a:effectRef>
-          <a:fontRef idx="minor">
-            <a:schemeClr val="lt1"/>
-          </a:fontRef>
-        </p:style>
-        <p:txBody>
-          <a:bodyPr rtlCol="0" anchor="ctr"/>
-          <a:lstStyle/>
-          <a:p>
-            <a:pPr algn="ctr"/>
-          </a:p>
-        </p:txBody>
-      </p:sp>
-      <p:sp>
-        <p:nvSpPr>
-          <p:cNvPr id="7" name="TextBox 6"/>
-          <p:cNvSpPr txBox="1"/>
-          <p:nvPr/>
-        </p:nvSpPr>
-        <p:spPr>
-          <a:xfrm>
-            <a:off x="685800" y="1307592"/>
-            <a:ext cx="10820095" cy="256032"/>
-          </a:xfrm>
-          <a:prstGeom prst="rect">
-            <a:avLst/>
-          </a:prstGeom>
-          <a:noFill/>
-        </p:spPr>
-        <p:txBody>
-          <a:bodyPr wrap="square" anchor="ctr"/>
-          <a:lstStyle/>
-          <a:p>
-            <a:r>
-              <a:rPr sz="1000" b="1" i="0">
+            <a:r>
+              <a:rPr sz="2000" b="1" i="0">
                 <a:solidFill>
                   <a:srgbClr val="269CCB"/>
                 </a:solidFill>
                 <a:latin typeface="Calibri"/>
               </a:rPr>
-              <a:t>● ● ●</a:t>
-            </a:r>
-          </a:p>
-        </p:txBody>
-      </p:sp>
-      <p:sp>
-        <p:nvSpPr>
-          <p:cNvPr id="8" name="TextBox 7"/>
-          <p:cNvSpPr txBox="1"/>
-          <p:nvPr/>
-        </p:nvSpPr>
-        <p:spPr>
-          <a:xfrm>
-            <a:off x="777240" y="1719072"/>
-            <a:ext cx="10637215" cy="4133087"/>
-          </a:xfrm>
-          <a:prstGeom prst="rect">
-            <a:avLst/>
-          </a:prstGeom>
-          <a:noFill/>
-        </p:spPr>
-        <p:txBody>
-          <a:bodyPr wrap="square">
-            <a:spAutoFit/>
-          </a:bodyPr>
-          <a:lstStyle/>
-          <a:p>
-            <a:pPr>
-              <a:spcAft>
-                <a:spcPts val="400"/>
-              </a:spcAft>
-            </a:pPr>
-            <a:r>
-              <a:rPr sz="1400" b="0" i="0">
-                <a:solidFill>
-                  <a:srgbClr val="FFFFFF"/>
-                </a:solidFill>
-                <a:latin typeface="Calibri"/>
-              </a:rPr>
-              <a:t>## 1. Titulo     ADR-001 Modelo de servicio dominante de CloudLite App</a:t>
-            </a:r>
-          </a:p>
-          <a:p>
-            <a:pPr>
-              <a:spcAft>
-                <a:spcPts val="400"/>
-              </a:spcAft>
-            </a:pPr>
-            <a:r>
-              <a:rPr sz="1400" b="0" i="0">
-                <a:solidFill>
-                  <a:srgbClr val="FFFFFF"/>
-                </a:solidFill>
-                <a:latin typeface="Calibri"/>
-              </a:rPr>
-              <a:t>## 2. Estado     Aceptado — &lt;fecha de hoy&gt;</a:t>
-            </a:r>
-          </a:p>
-          <a:p>
-            <a:pPr>
-              <a:spcAft>
-                <a:spcPts val="400"/>
-              </a:spcAft>
-            </a:pPr>
-            <a:r>
-              <a:rPr sz="1400" b="0" i="0">
-                <a:solidFill>
-                  <a:srgbClr val="FFFFFF"/>
-                </a:solidFill>
-                <a:latin typeface="Calibri"/>
-              </a:rPr>
-              <a:t/>
-            </a:r>
-          </a:p>
-          <a:p>
-            <a:pPr>
-              <a:spcAft>
-                <a:spcPts val="400"/>
-              </a:spcAft>
-            </a:pPr>
-            <a:r>
-              <a:rPr sz="1400" b="0" i="0">
-                <a:solidFill>
-                  <a:srgbClr val="FFFFFF"/>
-                </a:solidFill>
-                <a:latin typeface="Calibri"/>
-              </a:rPr>
-              <a:t>## 3. Contexto                    &lt;- restricciones, no resumen del tema</a:t>
-            </a:r>
-          </a:p>
-          <a:p>
-            <a:pPr>
-              <a:spcAft>
-                <a:spcPts val="400"/>
-              </a:spcAft>
-            </a:pPr>
-            <a:r>
-              <a:rPr sz="1400" b="0" i="0">
-                <a:solidFill>
-                  <a:srgbClr val="FFFFFF"/>
-                </a:solidFill>
-                <a:latin typeface="Calibri"/>
-              </a:rPr>
-              <a:t>Lo sostengo yo solo, 12 semanas, sin presupuesto cloud ni tarjeta; demo viva el dia de la sustentacion.</a:t>
-            </a:r>
-          </a:p>
-          <a:p>
-            <a:pPr>
-              <a:spcAft>
-                <a:spcPts val="400"/>
-              </a:spcAft>
-            </a:pPr>
-            <a:r>
-              <a:rPr sz="1400" b="0" i="0">
-                <a:solidFill>
-                  <a:srgbClr val="FFFFFF"/>
-                </a:solidFill>
-                <a:latin typeface="Calibri"/>
-              </a:rPr>
-              <a:t/>
-            </a:r>
-          </a:p>
-          <a:p>
-            <a:pPr>
-              <a:spcAft>
-                <a:spcPts val="400"/>
-              </a:spcAft>
-            </a:pPr>
-            <a:r>
-              <a:rPr sz="1400" b="0" i="0">
-                <a:solidFill>
-                  <a:srgbClr val="FFFFFF"/>
-                </a:solidFill>
-                <a:latin typeface="Calibri"/>
-              </a:rPr>
-              <a:t>## 4. Decision                    &lt;- UNA frase, UN modelo dominante</a:t>
-            </a:r>
-          </a:p>
-          <a:p>
-            <a:pPr>
-              <a:spcAft>
-                <a:spcPts val="400"/>
-              </a:spcAft>
-            </a:pPr>
-            <a:r>
-              <a:rPr sz="1400" b="0" i="0">
-                <a:solidFill>
-                  <a:srgbClr val="FFFFFF"/>
-                </a:solidFill>
-                <a:latin typeface="Calibri"/>
-              </a:rPr>
-              <a:t>La aplicacion de CloudLite se despliega sobre PaaS.</a:t>
-            </a:r>
-          </a:p>
-          <a:p>
-            <a:pPr>
-              <a:spcAft>
-                <a:spcPts val="400"/>
-              </a:spcAft>
-            </a:pPr>
-            <a:r>
-              <a:rPr sz="1400" b="0" i="0">
-                <a:solidFill>
-                  <a:srgbClr val="FFFFFF"/>
-                </a:solidFill>
-                <a:latin typeface="Calibri"/>
-              </a:rPr>
-              <a:t/>
-            </a:r>
-          </a:p>
-          <a:p>
-            <a:pPr>
-              <a:spcAft>
-                <a:spcPts val="400"/>
-              </a:spcAft>
-            </a:pPr>
-            <a:r>
-              <a:rPr sz="1400" b="0" i="0">
-                <a:solidFill>
-                  <a:srgbClr val="FFFFFF"/>
-                </a:solidFill>
-                <a:latin typeface="Calibri"/>
-              </a:rPr>
-              <a:t>## 5. Alternativas descartadas    &lt;- exactamente 2, con motivo del dominio</a:t>
-            </a:r>
-          </a:p>
-          <a:p>
-            <a:pPr>
-              <a:spcAft>
-                <a:spcPts val="400"/>
-              </a:spcAft>
-            </a:pPr>
-            <a:r>
-              <a:rPr sz="1400" b="0" i="0">
-                <a:solidFill>
-                  <a:srgbClr val="FFFFFF"/>
-                </a:solidFill>
-                <a:latin typeface="Calibri"/>
-              </a:rPr>
-              <a:t>- IaaS: control total, pero yo opero SO y parches -&gt; tiempo que no tengo.</a:t>
-            </a:r>
-          </a:p>
-          <a:p>
-            <a:pPr>
-              <a:spcAft>
-                <a:spcPts val="400"/>
-              </a:spcAft>
-            </a:pPr>
-            <a:r>
-              <a:rPr sz="1400" b="0" i="0">
-                <a:solidFill>
-                  <a:srgbClr val="FFFFFF"/>
-                </a:solidFill>
-                <a:latin typeface="Calibri"/>
-              </a:rPr>
-              <a:t>- SaaS como nucleo: no queda nada que arquitecturar; solo satelite (auth/email).</a:t>
-            </a:r>
-          </a:p>
-          <a:p>
-            <a:pPr>
-              <a:spcAft>
-                <a:spcPts val="400"/>
-              </a:spcAft>
-            </a:pPr>
-            <a:r>
-              <a:rPr sz="1400" b="0" i="0">
-                <a:solidFill>
-                  <a:srgbClr val="FFFFFF"/>
-                </a:solidFill>
-                <a:latin typeface="Calibri"/>
-              </a:rPr>
-              <a:t/>
-            </a:r>
-          </a:p>
-          <a:p>
-            <a:pPr>
-              <a:spcAft>
-                <a:spcPts val="400"/>
-              </a:spcAft>
-            </a:pPr>
-            <a:r>
-              <a:rPr sz="1400" b="0" i="0">
-                <a:solidFill>
-                  <a:srgbClr val="FFFFFF"/>
-                </a:solidFill>
-                <a:latin typeface="Calibri"/>
-              </a:rPr>
-              <a:t>## 6. Consecuencias               &lt;- pregunta 7: 3 ejes, cada uno con + y -</a:t>
-            </a:r>
-          </a:p>
-          <a:p>
-            <a:pPr>
-              <a:spcAft>
-                <a:spcPts val="400"/>
-              </a:spcAft>
-            </a:pPr>
-            <a:r>
-              <a:rPr sz="1400" b="0" i="0">
-                <a:solidFill>
-                  <a:srgbClr val="FFFFFF"/>
-                </a:solidFill>
-                <a:latin typeface="Calibri"/>
-              </a:rPr>
-              <a:t>Operacion + / -        Costo + / -        Aprendizaje + / -</a:t>
-            </a:r>
-          </a:p>
-        </p:txBody>
-      </p:sp>
-      <p:sp>
-        <p:nvSpPr>
-          <p:cNvPr id="9" name="TextBox 8"/>
-          <p:cNvSpPr txBox="1"/>
-          <p:nvPr/>
-        </p:nvSpPr>
-        <p:spPr>
-          <a:xfrm>
-            <a:off x="457200" y="6080760"/>
-            <a:ext cx="11277295" cy="320040"/>
-          </a:xfrm>
-          <a:prstGeom prst="rect">
-            <a:avLst/>
-          </a:prstGeom>
-          <a:noFill/>
-        </p:spPr>
-        <p:txBody>
-          <a:bodyPr wrap="square">
-            <a:spAutoFit/>
-          </a:bodyPr>
-          <a:lstStyle/>
-          <a:p>
-            <a:pPr algn="ctr"/>
-            <a:r>
-              <a:rPr sz="1200" b="0" i="1">
-                <a:solidFill>
-                  <a:srgbClr val="666666"/>
-                </a:solidFill>
-                <a:latin typeface="Calibri"/>
-              </a:rPr>
-              <a:t>Sin Titulo y Estado con fecha no hay ADR que citar en la Clase 15: son 1.5 puntos de la pregunta 6.</a:t>
-            </a:r>
-          </a:p>
-        </p:txBody>
-      </p:sp>
-      <p:sp>
-        <p:nvSpPr>
-          <p:cNvPr id="10" name="TextBox 9"/>
-          <p:cNvSpPr txBox="1"/>
-          <p:nvPr/>
-        </p:nvSpPr>
-        <p:spPr>
-          <a:xfrm>
-            <a:off x="11185855" y="6473952"/>
-            <a:ext cx="640080" cy="274320"/>
-          </a:xfrm>
-          <a:prstGeom prst="rect">
-            <a:avLst/>
-          </a:prstGeom>
-          <a:noFill/>
-        </p:spPr>
-        <p:txBody>
-          <a:bodyPr wrap="square">
-            <a:spAutoFit/>
-          </a:bodyPr>
-          <a:lstStyle/>
-          <a:p>
-            <a:pPr algn="r"/>
-            <a:r>
-              <a:rPr sz="1100" b="0" i="0">
-                <a:solidFill>
-                  <a:srgbClr val="666666"/>
-                </a:solidFill>
-                <a:latin typeface="Calibri"/>
-              </a:rPr>
-              <a:t>29</a:t>
+              <a:t>Teoría al servicio del diseño</a:t>
             </a:r>
           </a:p>
         </p:txBody>
@@ -11740,238 +11345,6 @@
 </p:sld>
 </file>
 
-<file path=ppt/slides/slide30.xml><?xml version="1.0" encoding="utf-8"?>
-<p:sld xmlns:a="http://schemas.openxmlformats.org/drawingml/2006/main" xmlns:p="http://schemas.openxmlformats.org/presentationml/2006/main" xmlns:r="http://schemas.openxmlformats.org/officeDocument/2006/relationships">
-  <p:cSld>
-    <p:bg>
-      <p:bgPr>
-        <a:solidFill>
-          <a:srgbClr val="FFFFFF"/>
-        </a:solidFill>
-        <a:effectLst/>
-      </p:bgPr>
-    </p:bg>
-    <p:spTree>
-      <p:nvGrpSpPr>
-        <p:cNvPr id="1" name=""/>
-        <p:cNvGrpSpPr/>
-        <p:nvPr/>
-      </p:nvGrpSpPr>
-      <p:grpSpPr/>
-      <p:sp>
-        <p:nvSpPr>
-          <p:cNvPr id="2" name="Rectangle 1"/>
-          <p:cNvSpPr/>
-          <p:nvPr/>
-        </p:nvSpPr>
-        <p:spPr>
-          <a:xfrm>
-            <a:off x="0" y="0"/>
-            <a:ext cx="12191695" cy="164592"/>
-          </a:xfrm>
-          <a:prstGeom prst="rect">
-            <a:avLst/>
-          </a:prstGeom>
-          <a:solidFill>
-            <a:srgbClr val="269CCB"/>
-          </a:solidFill>
-          <a:ln>
-            <a:noFill/>
-          </a:ln>
-        </p:spPr>
-        <p:style>
-          <a:lnRef idx="1">
-            <a:schemeClr val="accent1"/>
-          </a:lnRef>
-          <a:fillRef idx="3">
-            <a:schemeClr val="accent1"/>
-          </a:fillRef>
-          <a:effectRef idx="2">
-            <a:schemeClr val="accent1"/>
-          </a:effectRef>
-          <a:fontRef idx="minor">
-            <a:schemeClr val="lt1"/>
-          </a:fontRef>
-        </p:style>
-        <p:txBody>
-          <a:bodyPr rtlCol="0" anchor="ctr"/>
-          <a:lstStyle/>
-          <a:p>
-            <a:pPr algn="ctr"/>
-          </a:p>
-        </p:txBody>
-      </p:sp>
-      <p:pic>
-        <p:nvPicPr>
-          <p:cNvPr id="3" name="Picture 2" descr="logo_uniajc_color.png"/>
-          <p:cNvPicPr>
-            <a:picLocks noChangeAspect="1"/>
-          </p:cNvPicPr>
-          <p:nvPr/>
-        </p:nvPicPr>
-        <p:blipFill>
-          <a:blip r:embed="rId2"/>
-          <a:stretch>
-            <a:fillRect/>
-          </a:stretch>
-        </p:blipFill>
-        <p:spPr>
-          <a:xfrm>
-            <a:off x="10271455" y="5998464"/>
-            <a:ext cx="1463040" cy="643233"/>
-          </a:xfrm>
-          <a:prstGeom prst="rect">
-            <a:avLst/>
-          </a:prstGeom>
-        </p:spPr>
-      </p:pic>
-      <p:sp>
-        <p:nvSpPr>
-          <p:cNvPr id="4" name="TextBox 3"/>
-          <p:cNvSpPr txBox="1"/>
-          <p:nvPr/>
-        </p:nvSpPr>
-        <p:spPr>
-          <a:xfrm>
-            <a:off x="457200" y="1737360"/>
-            <a:ext cx="11277295" cy="1097280"/>
-          </a:xfrm>
-          <a:prstGeom prst="rect">
-            <a:avLst/>
-          </a:prstGeom>
-          <a:noFill/>
-        </p:spPr>
-        <p:txBody>
-          <a:bodyPr wrap="square" anchor="ctr"/>
-          <a:lstStyle/>
-          <a:p>
-            <a:pPr algn="ctr"/>
-            <a:r>
-              <a:rPr sz="3400" b="1" i="0">
-                <a:solidFill>
-                  <a:srgbClr val="095292"/>
-                </a:solidFill>
-                <a:latin typeface="Calibri"/>
-              </a:rPr>
-              <a:t>Clase 2 · cierre conceptual</a:t>
-            </a:r>
-          </a:p>
-        </p:txBody>
-      </p:sp>
-      <p:sp>
-        <p:nvSpPr>
-          <p:cNvPr id="5" name="TextBox 4"/>
-          <p:cNvSpPr txBox="1"/>
-          <p:nvPr/>
-        </p:nvSpPr>
-        <p:spPr>
-          <a:xfrm>
-            <a:off x="457200" y="3017520"/>
-            <a:ext cx="11277295" cy="1645920"/>
-          </a:xfrm>
-          <a:prstGeom prst="rect">
-            <a:avLst/>
-          </a:prstGeom>
-          <a:noFill/>
-        </p:spPr>
-        <p:txBody>
-          <a:bodyPr wrap="square">
-            <a:spAutoFit/>
-          </a:bodyPr>
-          <a:lstStyle/>
-          <a:p>
-            <a:pPr algn="ctr">
-              <a:spcAft>
-                <a:spcPts val="600"/>
-              </a:spcAft>
-            </a:pPr>
-            <a:r>
-              <a:rPr sz="1600" b="0" i="0">
-                <a:solidFill>
-                  <a:srgbClr val="333333"/>
-                </a:solidFill>
-                <a:latin typeface="Calibri"/>
-              </a:rPr>
-              <a:t>Comparar IaaS, PaaS y SaaS con criterios de control, operación y velocidad.</a:t>
-            </a:r>
-          </a:p>
-          <a:p>
-            <a:pPr algn="ctr">
-              <a:spcAft>
-                <a:spcPts val="600"/>
-              </a:spcAft>
-            </a:pPr>
-            <a:r>
-              <a:rPr sz="1600" b="0" i="0">
-                <a:solidFill>
-                  <a:srgbClr val="333333"/>
-                </a:solidFill>
-                <a:latin typeface="Calibri"/>
-              </a:rPr>
-              <a:t>Elegir el modelo dominante de CloudLite con justificación.</a:t>
-            </a:r>
-          </a:p>
-          <a:p>
-            <a:pPr algn="ctr">
-              <a:spcAft>
-                <a:spcPts val="600"/>
-              </a:spcAft>
-            </a:pPr>
-            <a:r>
-              <a:rPr sz="1600" b="0" i="0">
-                <a:solidFill>
-                  <a:srgbClr val="333333"/>
-                </a:solidFill>
-                <a:latin typeface="Calibri"/>
-              </a:rPr>
-              <a:t>Documentar la decisión como ADR reutilizable en el informe PI.</a:t>
-            </a:r>
-          </a:p>
-        </p:txBody>
-      </p:sp>
-      <p:sp>
-        <p:nvSpPr>
-          <p:cNvPr id="6" name="TextBox 5"/>
-          <p:cNvSpPr txBox="1"/>
-          <p:nvPr/>
-        </p:nvSpPr>
-        <p:spPr>
-          <a:xfrm>
-            <a:off x="457200" y="4754880"/>
-            <a:ext cx="11277295" cy="640080"/>
-          </a:xfrm>
-          <a:prstGeom prst="rect">
-            <a:avLst/>
-          </a:prstGeom>
-          <a:noFill/>
-        </p:spPr>
-        <p:txBody>
-          <a:bodyPr wrap="square">
-            <a:spAutoFit/>
-          </a:bodyPr>
-          <a:lstStyle/>
-          <a:p>
-            <a:pPr algn="ctr"/>
-            <a:r>
-              <a:rPr sz="2000" b="1" i="0">
-                <a:solidFill>
-                  <a:srgbClr val="269CCB"/>
-                </a:solidFill>
-                <a:latin typeface="Calibri"/>
-              </a:rPr>
-              <a:t>Teoría al servicio del diseño</a:t>
-            </a:r>
-          </a:p>
-        </p:txBody>
-      </p:sp>
-    </p:spTree>
-  </p:cSld>
-  <p:clrMapOvr>
-    <a:masterClrMapping/>
-  </p:clrMapOvr>
-</p:sld>
-</file>
-
 <file path=ppt/slides/slide4.xml><?xml version="1.0" encoding="utf-8"?>
 <p:sld xmlns:a="http://schemas.openxmlformats.org/drawingml/2006/main" xmlns:p="http://schemas.openxmlformats.org/presentationml/2006/main" xmlns:r="http://schemas.openxmlformats.org/officeDocument/2006/relationships">
   <p:cSld>
@@ -13390,7 +12763,7 @@
                 </a:solidFill>
                 <a:latin typeface="Calibri"/>
               </a:rPr>
-              <a:t>–   Máximo 1 página. Las 5 primeras secciones son la </a:t>
+              <a:t>–   Máximo 1 página: las 6 secciones son UN solo documento, y </a:t>
             </a:r>
             <a:r>
               <a:rPr sz="2000" b="1" i="0">
@@ -13399,7 +12772,7 @@
                 </a:solidFill>
                 <a:latin typeface="Calibri"/>
               </a:rPr>
-              <a:t>pregunta 6</a:t>
+              <a:t>Consecuencias</a:t>
             </a:r>
             <a:r>
               <a:rPr sz="2000" b="0" i="0">
@@ -13408,43 +12781,7 @@
                 </a:solidFill>
                 <a:latin typeface="Calibri"/>
               </a:rPr>
-              <a:t>; </a:t>
-            </a:r>
-            <a:r>
-              <a:rPr sz="2000" b="1" i="0">
-                <a:solidFill>
-                  <a:srgbClr val="333333"/>
-                </a:solidFill>
-                <a:latin typeface="Calibri"/>
-              </a:rPr>
-              <a:t>Consecuencias</a:t>
-            </a:r>
-            <a:r>
-              <a:rPr sz="2000" b="0" i="0">
-                <a:solidFill>
-                  <a:srgbClr val="333333"/>
-                </a:solidFill>
-                <a:latin typeface="Calibri"/>
-              </a:rPr>
-              <a:t> es la </a:t>
-            </a:r>
-            <a:r>
-              <a:rPr sz="2000" b="1" i="0">
-                <a:solidFill>
-                  <a:srgbClr val="333333"/>
-                </a:solidFill>
-                <a:latin typeface="Calibri"/>
-              </a:rPr>
-              <a:t>pregunta 7</a:t>
-            </a:r>
-            <a:r>
-              <a:rPr sz="2000" b="0" i="0">
-                <a:solidFill>
-                  <a:srgbClr val="333333"/>
-                </a:solidFill>
-                <a:latin typeface="Calibri"/>
-              </a:rPr>
-              <a:t>.</a:t>
+              <a:t> cierra la decisión.</a:t>
             </a:r>
           </a:p>
         </p:txBody>
@@ -13625,7 +12962,7 @@
                 </a:solidFill>
                 <a:latin typeface="Calibri"/>
               </a:rPr>
-              <a:t>De que se parte y que se decide hoy (1/2)</a:t>
+              <a:t>De que se parte y que se decide hoy</a:t>
             </a:r>
           </a:p>
         </p:txBody>
@@ -13664,7 +13001,7 @@
                 </a:solidFill>
                 <a:latin typeface="Calibri"/>
               </a:rPr>
-              <a:t>–   Esta clase se dicta en sesion virtual sincrona, en el mismo bloque de 120 minutos de siempre: hay explicacion en vivo</a:t>
+              <a:t>–   El punto de partida es lo definido en la Clase 1: cada estudiante ya tiene un dominio para CloudLite App, tres a cinco capacidades, sus actores y un diagrama de contexto.</a:t>
             </a:r>
           </a:p>
           <a:p>
@@ -13680,7 +13017,7 @@
                 </a:solidFill>
                 <a:latin typeface="Calibri"/>
               </a:rPr>
-              <a:t>–   Taller acompanado y tiempo para preguntar, asi que este fundamento es material del docente para dictar y no una lectura que reemplace la clase.</a:t>
+              <a:t>–   La pregunta de hoy es la siguiente en orden logico: si ese sistema va a vivir en la nube, quien administra cada capa de la maquinaria que lo sostiene.</a:t>
             </a:r>
           </a:p>
           <a:p>
@@ -13696,7 +13033,7 @@
                 </a:solidFill>
                 <a:latin typeface="Calibri"/>
               </a:rPr>
-              <a:t>–   El punto de partida es lo definido en la Clase 1: cada estudiante ya tiene un dominio para CloudLite App, tres a cinco capacidades, sus actores y un diagrama de contexto.</a:t>
+              <a:t>–   No hay una sola respuesta, hay tres respuestas estandar que la industria llama IaaS, PaaS y SaaS, y elegir entre ellas es una decision de arquitectura con consecuencias medibles en costo, velocidad de entrega, seguridad y libertad futura.</a:t>
             </a:r>
           </a:p>
         </p:txBody>
@@ -13877,7 +13214,7 @@
                 </a:solidFill>
                 <a:latin typeface="Calibri"/>
               </a:rPr>
-              <a:t>De que se parte y que se decide hoy (2/2)</a:t>
+              <a:t>La pila de responsabilidades: donde se corta la linea (1/2)</a:t>
             </a:r>
           </a:p>
         </p:txBody>
@@ -13916,7 +13253,7 @@
                 </a:solidFill>
                 <a:latin typeface="Calibri"/>
               </a:rPr>
-              <a:t>–   La pregunta de hoy es la siguiente en orden logico: si ese sistema va a vivir en la nube, quien administra cada capa de la maquinaria que lo sostiene.</a:t>
+              <a:t>–   Para entender los tres modelos hay que ver primero la pila completa de responsabilidades que existe debajo de cualquier aplicacion</a:t>
             </a:r>
           </a:p>
           <a:p>
@@ -13932,7 +13269,23 @@
                 </a:solidFill>
                 <a:latin typeface="Calibri"/>
               </a:rPr>
-              <a:t>–   No hay una sola respuesta, hay tres respuestas estandar que la industria llama IaaS, PaaS y SaaS, y elegir entre ellas es una decision de arquitectura con consecuencias medibles en costo, velocidad de entrega, seguridad y libertad futura.</a:t>
+              <a:t>–   De abajo hacia arriba: el edificio y la energia electrica, el hardware fisico (servidores, discos, cableado de red), la capa de virtualizacion que parte ese hardware en maquinas logicas</a:t>
+            </a:r>
+          </a:p>
+          <a:p>
+            <a:pPr>
+              <a:spcAft>
+                <a:spcPts val="800"/>
+              </a:spcAft>
+            </a:pPr>
+            <a:r>
+              <a:rPr sz="2000" b="0" i="0">
+                <a:solidFill>
+                  <a:srgbClr val="333333"/>
+                </a:solidFill>
+                <a:latin typeface="Calibri"/>
+              </a:rPr>
+              <a:t>–   El sistema operativo de cada maquina, el runtime o entorno de ejecucion (por ejemplo Node.js, Python o la maquina virtual de Java) junto con servicios de apoyo como la base de datos</a:t>
             </a:r>
           </a:p>
         </p:txBody>

--- a/Arquitectura de Sistemas Computacionales/Clases/Clase 2 - Modelos de servicio IaaS PaaS SaaS/Presentacion.pptx
+++ b/Arquitectura de Sistemas Computacionales/Clases/Clase 2 - Modelos de servicio IaaS PaaS SaaS/Presentacion.pptx
@@ -11640,6 +11640,22 @@
               <a:t> con labs/navegador; no abrimos cuentas IaaS con tarjeta.</a:t>
             </a:r>
           </a:p>
+          <a:p>
+            <a:pPr>
+              <a:spcAft>
+                <a:spcPts val="800"/>
+              </a:spcAft>
+            </a:pPr>
+            <a:r>
+              <a:rPr sz="2000" b="0" i="0">
+                <a:solidFill>
+                  <a:srgbClr val="333333"/>
+                </a:solidFill>
+                <a:latin typeface="Calibri"/>
+              </a:rPr>
+              <a:t>–   Ejemplos: IaaS = una máquina virtual (EC2, Droplet) · PaaS = Render, Railway, Heroku · SaaS = correo corporativo, proveedor de identidad.</a:t>
+            </a:r>
+          </a:p>
         </p:txBody>
       </p:sp>
       <p:sp>
@@ -11908,6 +11924,22 @@
                 <a:latin typeface="Calibri"/>
               </a:rPr>
               <a:t>–   Si el dominio exige mucho control de red → justifique IaaS *simulado* en diagrama.</a:t>
+            </a:r>
+          </a:p>
+          <a:p>
+            <a:pPr>
+              <a:spcAft>
+                <a:spcPts val="800"/>
+              </a:spcAft>
+            </a:pPr>
+            <a:r>
+              <a:rPr sz="2000" b="0" i="0">
+                <a:solidFill>
+                  <a:srgbClr val="333333"/>
+                </a:solidFill>
+                <a:latin typeface="Calibri"/>
+              </a:rPr>
+              <a:t>–   Ejemplo CloudLite Turnos: API en PaaS, base de datos gestionada y correo como SaaS — tres modelos en un mismo sistema.</a:t>
             </a:r>
           </a:p>
           <a:p>

--- a/Arquitectura de Sistemas Computacionales/Clases/Clase 2 - Modelos de servicio IaaS PaaS SaaS/Presentacion.pptx
+++ b/Arquitectura de Sistemas Computacionales/Clases/Clase 2 - Modelos de servicio IaaS PaaS SaaS/Presentacion.pptx
@@ -4205,7 +4205,7 @@
                 </a:solidFill>
                 <a:latin typeface="Calibri"/>
               </a:rPr>
-              <a:t>ADR del PI · elección del modelo de servicio</a:t>
+              <a:t>ADR · elección del modelo de servicio</a:t>
             </a:r>
           </a:p>
         </p:txBody>
@@ -4296,7 +4296,7 @@
                 </a:solidFill>
                 <a:latin typeface="Calibri"/>
               </a:rPr>
-              <a:t>Conceptos del tema, ejemplos resueltos sobre CloudLite y cierre conceptual.</a:t>
+              <a:t>Conceptos del tema, ejemplos resueltos sobre la app y cierre conceptual.</a:t>
             </a:r>
           </a:p>
         </p:txBody>
@@ -5352,7 +5352,7 @@
                 </a:solidFill>
                 <a:latin typeface="Calibri"/>
               </a:rPr>
-              <a:t>–   El correo corporativo, un servicio de envio de mensajes transaccionales, un proveedor de identidad que resuelve el inicio de sesion o un servicio de almacenamiento y transformacion de imagenes son SaaS desde la perspectiva de quien construye CloudLite.</a:t>
+              <a:t>–   El correo corporativo, un servicio de envio de mensajes transaccionales, un proveedor de identidad que resuelve el inicio de sesion o un servicio de almacenamiento y transformacion de imagenes son SaaS desde la perspectiva de quien construye de la app.</a:t>
             </a:r>
           </a:p>
           <a:p>
@@ -5588,7 +5588,7 @@
                 </a:solidFill>
                 <a:latin typeface="Calibri"/>
               </a:rPr>
-              <a:t>–   La arquitectura probable de CloudLite Turnos es hibrida: la API desplegada como PaaS, la base de datos como servicio gestionado (que es PaaS en su variante de datos)</a:t>
+              <a:t>–   La arquitectura probable de la app de turnos es hibrida: la API desplegada como PaaS, la base de datos como servicio gestionado (que es PaaS en su variante de datos)</a:t>
             </a:r>
           </a:p>
           <a:p>
@@ -6156,7 +6156,7 @@
                 </a:solidFill>
                 <a:latin typeface="Calibri"/>
               </a:rPr>
-              <a:t>–   Para CloudLite la mitigacion no es evitar SaaS sino acotarlo: si el envio de correos se encapsula detras de una interfaz propia, por ejemplo un modulo Notificador con un solo metodo enviar, cambiar de proveedor toca un archivo y no cuarenta.</a:t>
+              <a:t>–   Para la app la mitigacion no es evitar SaaS sino acotarlo: si el envio de correos se encapsula detras de una interfaz propia, por ejemplo un modulo Notificador con un solo metodo enviar, cambiar de proveedor toca un archivo y no cuarenta.</a:t>
             </a:r>
           </a:p>
         </p:txBody>
@@ -6676,7 +6676,7 @@
                 </a:solidFill>
                 <a:latin typeface="Calibri"/>
               </a:rPr>
-              <a:t>–   Un ADR-001 aceptable para CloudLite Turnos diria en CONTEXTO: la barberia agenda por mensajeria y pierde alrededor de tres turnos diarios por doble reserva</a:t>
+              <a:t>–   Un ADR-001 aceptable para la app de turnos diria en CONTEXTO: la barberia agenda por mensajeria y pierde alrededor de tres turnos diarios por doble reserva</a:t>
             </a:r>
           </a:p>
           <a:p>
@@ -6708,7 +6708,7 @@
                 </a:solidFill>
                 <a:latin typeface="Calibri"/>
               </a:rPr>
-              <a:t>–   En DECISION va una frase: la aplicacion de CloudLite Turnos se despliega sobre PaaS.</a:t>
+              <a:t>–   En DECISION va una frase: la aplicacion de la app de turnos se despliega sobre PaaS.</a:t>
             </a:r>
           </a:p>
           <a:p>
@@ -7239,7 +7239,7 @@
                 </a:solidFill>
                 <a:latin typeface="Calibri"/>
               </a:rPr>
-              <a:t> Conceptos del tema, uno por lámina, con ejemplos sobre CloudLite.</a:t>
+              <a:t> Conceptos del tema, uno por lámina, con ejemplos sobre la app.</a:t>
             </a:r>
           </a:p>
           <a:p>
@@ -8735,7 +8735,7 @@
                 </a:solidFill>
                 <a:latin typeface="Calibri"/>
               </a:rPr>
-              <a:t># ADR-001 · Modelo de servicio dominante de CloudLite</a:t>
+              <a:t># ADR-001 · Modelo de servicio dominante de la app</a:t>
             </a:r>
           </a:p>
           <a:p>
@@ -10178,7 +10178,7 @@
                 </a:solidFill>
                 <a:latin typeface="Calibri"/>
               </a:rPr>
-              <a:t>Suba en la pila y sube el control, pero también lo que tiene que operar usted: parches, escalado, disponibilidad. Para el MVP de CloudLite, PaaS es el punto medio: usted solo responde por su aplicación y sus datos.</a:t>
+              <a:t>Suba en la pila y sube el control, pero también lo que tiene que operar usted: parches, escalado, disponibilidad. Para el MVP de la app, PaaS es el punto medio: usted solo responde por su aplicación y sus datos.</a:t>
             </a:r>
           </a:p>
         </p:txBody>
@@ -10518,7 +10518,7 @@
                 </a:solidFill>
                 <a:latin typeface="Calibri"/>
               </a:rPr>
-              <a:t>## 1. Titulo     ADR-001 Modelo de servicio dominante de CloudLite App</a:t>
+              <a:t>## 1. Titulo     ADR-001 Modelo de servicio dominante de la app</a:t>
             </a:r>
           </a:p>
           <a:p>
@@ -10630,7 +10630,7 @@
                 </a:solidFill>
                 <a:latin typeface="Calibri"/>
               </a:rPr>
-              <a:t>La aplicacion de CloudLite se despliega sobre PaaS.</a:t>
+              <a:t>La aplicacion de la app se despliega sobre PaaS.</a:t>
             </a:r>
           </a:p>
           <a:p>
@@ -10993,7 +10993,7 @@
                 </a:solidFill>
                 <a:latin typeface="Calibri"/>
               </a:rPr>
-              <a:t>Elegir el modelo dominante de CloudLite con justificación.</a:t>
+              <a:t>Elegir el modelo dominante de la app con justificación.</a:t>
             </a:r>
           </a:p>
           <a:p>
@@ -11009,7 +11009,7 @@
                 </a:solidFill>
                 <a:latin typeface="Calibri"/>
               </a:rPr>
-              <a:t>Documentar la decisión como ADR reutilizable en el informe PI.</a:t>
+              <a:t>Documentar la decisión como ADR reutilizable en el informe.</a:t>
             </a:r>
           </a:p>
         </p:txBody>
@@ -11263,7 +11263,7 @@
                 </a:solidFill>
                 <a:latin typeface="Calibri"/>
               </a:rPr>
-              <a:t> de CloudLite con justificación.</a:t>
+              <a:t> de la app con justificación.</a:t>
             </a:r>
           </a:p>
           <a:p>
@@ -11297,7 +11297,7 @@
                 </a:solidFill>
                 <a:latin typeface="Calibri"/>
               </a:rPr>
-              <a:t> reutilizable en el informe PI.</a:t>
+              <a:t> reutilizable en el informe.</a:t>
             </a:r>
           </a:p>
         </p:txBody>
@@ -11834,7 +11834,7 @@
                 </a:solidFill>
                 <a:latin typeface="Calibri"/>
               </a:rPr>
-              <a:t>Cómo decidir para CloudLite</a:t>
+              <a:t>Cómo decidir para la app</a:t>
             </a:r>
           </a:p>
         </p:txBody>
@@ -11939,7 +11939,7 @@
                 </a:solidFill>
                 <a:latin typeface="Calibri"/>
               </a:rPr>
-              <a:t>–   Ejemplo CloudLite Turnos: API en PaaS, base de datos gestionada y correo como SaaS — tres modelos en un mismo sistema.</a:t>
+              <a:t>–   Ejemplo la app de turnos: API en PaaS, base de datos gestionada y correo como SaaS — tres modelos en un mismo sistema.</a:t>
             </a:r>
           </a:p>
           <a:p>
@@ -12385,7 +12385,7 @@
                 </a:solidFill>
                 <a:latin typeface="Calibri"/>
               </a:rPr>
-              <a:t>–   Mitigación para CloudLite: no evitar SaaS, </a:t>
+              <a:t>–   Mitigación para la app: no evitar SaaS, </a:t>
             </a:r>
             <a:r>
               <a:rPr sz="2000" b="1" i="0">
@@ -12675,7 +12675,7 @@
                 </a:solidFill>
                 <a:latin typeface="Calibri"/>
               </a:rPr>
-              <a:t>: «ADR-001 Modelo de servicio dominante de CloudLite App».  </a:t>
+              <a:t>: «ADR-001 Modelo de servicio dominante de la app».  </a:t>
             </a:r>
             <a:r>
               <a:rPr sz="2000" b="1" i="0">
@@ -13033,7 +13033,7 @@
                 </a:solidFill>
                 <a:latin typeface="Calibri"/>
               </a:rPr>
-              <a:t>–   El punto de partida es lo definido en la Clase 1: cada estudiante ya tiene un dominio para CloudLite App, tres a cinco capacidades, sus actores y un diagrama de contexto.</a:t>
+              <a:t>–   El punto de partida es lo definido en la Clase 1: cada estudiante ya tiene un dominio para la app, tres a cinco capacidades, sus actores y un diagrama de contexto.</a:t>
             </a:r>
           </a:p>
           <a:p>

--- a/Arquitectura de Sistemas Computacionales/Clases/Clase 2 - Modelos de servicio IaaS PaaS SaaS/Presentacion.pptx
+++ b/Arquitectura de Sistemas Computacionales/Clases/Clase 2 - Modelos de servicio IaaS PaaS SaaS/Presentacion.pptx
@@ -26,12 +26,6 @@
     <p:sldId id="274" r:id="rId26"/>
     <p:sldId id="275" r:id="rId27"/>
     <p:sldId id="276" r:id="rId28"/>
-    <p:sldId id="277" r:id="rId29"/>
-    <p:sldId id="278" r:id="rId30"/>
-    <p:sldId id="279" r:id="rId31"/>
-    <p:sldId id="280" r:id="rId32"/>
-    <p:sldId id="281" r:id="rId33"/>
-    <p:sldId id="282" r:id="rId34"/>
   </p:sldIdLst>
   <p:sldSz cx="12191695" cy="6858000" type="screen4x3"/>
   <p:notesSz cx="6858000" cy="9144000"/>
@@ -528,7 +522,19 @@
           <a:lstStyle/>
           <a:p>
             <a:r>
-              <a:t>(Sobre la actividad, no se proyecta) Esta clase se dicta en sesion virtual sincrona, en el mismo bloque de 120 minutos de siempre: hay explicacion en vivo, taller acompanado y tiempo para preguntar, asi que este fundamento es material del docente para dictar y no una lectura que reemplace la clase.</a:t>
+              <a:t>En IaaS el proveedor entrega maquina, red y disco; en PaaS tambien el sistema operativo y el runtime; en SaaS la aplicacion completa.</a:t>
+            </a:r>
+          </a:p>
+          <a:p/>
+          <a:p>
+            <a:r>
+              <a:t>(No se proyecta) Esta clase se dicta en sesion virtual sincrona, en el mismo bloque de 120 minutos de siempre: hay explicacion en vivo, taller acompanado y tiempo para preguntar, asi que este fundamento es material del docente para dictar y no una lectura que reemplace la clase.</a:t>
+            </a:r>
+          </a:p>
+          <a:p/>
+          <a:p>
+            <a:r>
+              <a:t>(No se proyecta) El punto de partida es lo definido en la Clase 1: cada estudiante ya tiene un dominio para CloudLite App, tres a cinco capacidades, sus actores y un diagrama de contexto.</a:t>
             </a:r>
           </a:p>
         </p:txBody>
@@ -601,6 +607,12 @@
               <a:t>Los tres modelos de servicio se distinguen exactamente por donde se traza la linea que separa lo que administra el proveedor de lo que administra el cliente.</a:t>
             </a:r>
           </a:p>
+          <a:p/>
+          <a:p>
+            <a:r>
+              <a:t>(No se proyecta) Nada mas y nada menos: si el estudiante entiende esa frase, entendio la clase.</a:t>
+            </a:r>
+          </a:p>
         </p:txBody>
       </p:sp>
       <p:sp>
@@ -680,7 +692,13 @@
           <a:p/>
           <a:p>
             <a:r>
-              <a:t>Para CloudLite Turnos, el ejemplo de la barberia con agendamiento de citas, elegir IaaS significaria que el estudiante se compromete a administrar el sistema operativo donde corren la API y la base de datos; en un curso de doce semanas, y trabajando solo o con dos companeros, eso consume justamente el tiempo que deberia dedicarse a disenar la arquitectura y a sustentarla.</a:t>
+              <a:t>(No se proyecta) Para CloudLite Turnos, el ejemplo de la barberia con agendamiento de citas, elegir IaaS significaria que el estudiante se compromete a administrar el sistema operativo donde corren la API y la base de datos; en un curso de doce semanas, y trabajando solo o con dos companeros, eso consume justamente el tiempo que deberia dedicarse a disenar la arquitectura y a sustentarla.</a:t>
+            </a:r>
+          </a:p>
+          <a:p/>
+          <a:p>
+            <a:r>
+              <a:t>(No se proyecta) Esos numeros son ordenes de magnitud tipicos que varian entre proveedores, no constantes; lo estructural es el patron, porque gratis siempre implica limites de memoria, de horas y de latencia en frio, y el estudiante debe anticiparlo en su diseno en vez de descubrirlo la noche antes de la sustentacion.</a:t>
             </a:r>
           </a:p>
         </p:txBody>
@@ -753,6 +771,24 @@
               <a:t>De ahi sale el trade-off central, que se escribe como regla practica: a mas abstraccion, menos control y menos trabajo operativo.</a:t>
             </a:r>
           </a:p>
+          <a:p/>
+          <a:p>
+            <a:r>
+              <a:t>(No se proyecta) El concepto que unifica todo esto se llama modelo de responsabilidad compartida y se resume en una frase que conviene memorizar: el proveedor es responsable de la seguridad DE la nube y el cliente de la seguridad EN la nube.</a:t>
+            </a:r>
+          </a:p>
+          <a:p/>
+          <a:p>
+            <a:r>
+              <a:t>(No se proyecta) Subir de IaaS a PaaS reduce la superficie de responsabilidad del cliente, pero nunca la elimina, y esa idea es el punto de partida literal de la Clase 6.</a:t>
+            </a:r>
+          </a:p>
+          <a:p/>
+          <a:p>
+            <a:r>
+              <a:t>(No se proyecta) Pero hay un tercer eje que el estudiante no ve solo, el amarre al proveedor o vendor lock-in, que es el costo de mudarse a otro proveedor mas adelante: bajo en IaaS, porque una maquina virtual con Linux se parece a cualquier otra; medio en PaaS, porque el archivo de configuracion y algunos servicios son propietarios; potencialmente alto en SaaS, porque los datos y parte de la logica viven dentro de un producto ajeno.</a:t>
+            </a:r>
+          </a:p>
         </p:txBody>
       </p:sp>
       <p:sp>
@@ -820,43 +856,55 @@
           <a:lstStyle/>
           <a:p>
             <a:r>
-              <a:t>Conviene mostrar la diferencia entre contexto y analisis con el ejemplo, porque es donde se pierde la seccion 3 completa.</a:t>
+              <a:t>Eso es contexto: son restricciones, no teoria.</a:t>
             </a:r>
           </a:p>
           <a:p/>
           <a:p>
             <a:r>
-              <a:t>Eso es contexto: son restricciones, no teoria.</a:t>
+              <a:t>Que identidad y correo se consuman como SaaS satelite se aclara aqui y no en la decision, porque el modelo dominante se refiere a la aplicacion propia.</a:t>
             </a:r>
           </a:p>
           <a:p/>
           <a:p>
             <a:r>
-              <a:t>La prueba que el docente puede aplicar en voz alta mientras pasa por los grupos es una sola: si del contexto no se puede deducir por que se descarta IaaS, todavia no es contexto.</a:t>
+              <a:t>(No se proyecta) El reparto en la plataforma es que las cinco primeras van en la pregunta 6 y la sexta en la pregunta 7, pero es UN solo documento, y conviene decirlo en voz alta porque el estudiante que lo entienda como dos ejercicios sueltos repite la decision en las consecuencias y pierde puntos.</a:t>
             </a:r>
           </a:p>
           <a:p/>
           <a:p>
             <a:r>
-              <a:t>Que identidad y correo se consuman como SaaS satelite se aclara aqui y no en la decision, porque el modelo dominante se refiere a la aplicacion propia.</a:t>
+              <a:t>(No se proyecta) No hay seccion de «opciones consideradas»: ese analisis es la matriz de la pregunta 5, y en el ADR solo quedan las dos alternativas que se descartaron.</a:t>
             </a:r>
           </a:p>
           <a:p/>
           <a:p>
             <a:r>
-              <a:t>(Sobre la actividad, no se proyecta) El reparto en la plataforma es que las cinco primeras van en la pregunta 6 y la sexta en la pregunta 7, pero es UN solo documento, y conviene decirlo en voz alta porque el estudiante que lo entienda como dos ejercicios sueltos repite la decision en las consecuencias y pierde puntos.</a:t>
+              <a:t>(No se proyecta) Conviene mostrar la diferencia entre contexto y analisis con el ejemplo, porque es donde se pierde la seccion 3 completa.</a:t>
             </a:r>
           </a:p>
           <a:p/>
           <a:p>
             <a:r>
-              <a:t>(Sobre la actividad, no se proyecta) No hay seccion de «opciones consideradas»: ese analisis es la matriz de la pregunta 5, y en el ADR solo quedan las dos alternativas que se descartaron.</a:t>
+              <a:t>(No se proyecta) Un ADR-001 aceptable para CloudLite Turnos diria en CONTEXTO: la barberia agenda por mensajeria y pierde alrededor de tres turnos diarios por doble reserva; el proyecto lo sostiene un desarrollador (o un equipo de dos o tres, si el docente lo autorizo) durante doce semanas, sin presupuesto ni tarjeta de credito, y el sistema tiene que estar disponible el dia de la sustentacion.</a:t>
             </a:r>
           </a:p>
           <a:p/>
           <a:p>
             <a:r>
-              <a:t>(Sobre la actividad, no se proyecta) «Existen tres modelos de servicio y hay que elegir uno» NO es contexto, es el apunte de clase, y esa confusion es el error dominante de la pregunta 6.</a:t>
+              <a:t>(No se proyecta) «Existen tres modelos de servicio y hay que elegir uno» NO es contexto, es el apunte de clase, y esa confusion es el error dominante de la pregunta 6.</a:t>
+            </a:r>
+          </a:p>
+          <a:p/>
+          <a:p>
+            <a:r>
+              <a:t>(No se proyecta) La prueba que el docente puede aplicar en voz alta mientras pasa por los grupos es una sola: si del contexto no se puede deducir por que se descarta IaaS, todavia no es contexto.</a:t>
+            </a:r>
+          </a:p>
+          <a:p/>
+          <a:p>
+            <a:r>
+              <a:t>(No se proyecta) Y en CONSECUENCIAS, que es la seccion que los estudiantes dejan a medias, deben aparecer tambien las malas: se acepta un arranque en frio de varios segundos tras inactividad, se acepta no poder afinar el sistema operativo y se acepta un amarre medio al proveedor, mitigado con contenedores.</a:t>
             </a:r>
           </a:p>
         </p:txBody>
@@ -926,83 +974,25 @@
           <a:lstStyle/>
           <a:p>
             <a:r>
-              <a:t>(Sobre la actividad, no se proyecta) En IaaS el estudiante ya conoce DigitalOcean o AWS EC2 de oidas aunque no tenga cuenta; en PaaS, Render, Railway o Heroku son los que de verdad va a usar en el taller de hoy y en la Clase 3; en SaaS, Gmail o Notion le sirven para entender que «usted solo configura» no es un eufemismo, de verdad no hay nada que desplegar.</a:t>
-            </a:r>
-          </a:p>
-        </p:txBody>
-      </p:sp>
-      <p:sp>
-        <p:nvSpPr>
-          <p:cNvPr id="4" name="Slide Number Placeholder 3"/>
-          <p:cNvSpPr>
-            <a:spLocks noGrp="1"/>
-          </p:cNvSpPr>
-          <p:nvPr>
-            <p:ph type="sldNum" idx="5" sz="quarter"/>
-          </p:nvPr>
-        </p:nvSpPr>
-        <p:spPr/>
-      </p:sp>
-    </p:spTree>
-  </p:cSld>
-  <p:clrMapOvr>
-    <a:masterClrMapping/>
-  </p:clrMapOvr>
-</p:notes>
-</file>
-
-<file path=ppt/notesSlides/notesSlide7.xml><?xml version="1.0" encoding="utf-8"?>
-<p:notes xmlns:a="http://schemas.openxmlformats.org/drawingml/2006/main" xmlns:p="http://schemas.openxmlformats.org/presentationml/2006/main" xmlns:r="http://schemas.openxmlformats.org/officeDocument/2006/relationships">
-  <p:cSld>
-    <p:spTree>
-      <p:nvGrpSpPr>
-        <p:cNvPr id="1" name=""/>
-        <p:cNvGrpSpPr/>
-        <p:nvPr/>
-      </p:nvGrpSpPr>
-      <p:grpSpPr>
-        <a:xfrm>
-          <a:off x="0" y="0"/>
-          <a:ext cx="0" cy="0"/>
-          <a:chOff x="0" y="0"/>
-          <a:chExt cx="0" cy="0"/>
-        </a:xfrm>
-      </p:grpSpPr>
-      <p:sp>
-        <p:nvSpPr>
-          <p:cNvPr id="2" name="Slide Image Placeholder 1"/>
-          <p:cNvSpPr>
-            <a:spLocks noGrp="1"/>
-          </p:cNvSpPr>
-          <p:nvPr>
-            <p:ph type="sldImg" idx="2"/>
-          </p:nvPr>
-        </p:nvSpPr>
-        <p:spPr/>
-      </p:sp>
-      <p:sp>
-        <p:nvSpPr>
-          <p:cNvPr id="3" name="Notes Placeholder 2"/>
-          <p:cNvSpPr>
-            <a:spLocks noGrp="1"/>
-          </p:cNvSpPr>
-          <p:nvPr>
-            <p:ph type="body" idx="3" sz="quarter"/>
-          </p:nvPr>
-        </p:nvSpPr>
-        <p:spPr/>
-        <p:txBody>
-          <a:bodyPr/>
-          <a:lstStyle/>
-          <a:p>
-            <a:r>
-              <a:t>(Sobre la actividad, no se proyecta) Tres preguntas salen en voz alta en esta clase casi sin falta y conviene tener la respuesta lista, porque las tres se contestan en treinta segundos y desbloquean el taller.</a:t>
+              <a:t>(No se proyecta) Proyecte inmediatamente despues de fijar la plantilla del ADR: es el mismo corte de responsabilidades que se acaba de explicar en prosa, ahora dibujado y con un producto reconocible en cada columna.</a:t>
             </a:r>
           </a:p>
           <a:p/>
           <a:p>
             <a:r>
-              <a:t>(Sobre la actividad, no se proyecta) El segundo error es dejar pasar ADR sin consecuencias negativas, y como esta clase tiene encuentro sincronico no hay excusa para no corregirlo en el momento: al pasar por los grupos en el tramo de taller, pregunte «que perdieron al elegir eso» antes de que el documento se suba.</a:t>
+              <a:t>(No se proyecta) Recorrala de abajo hacia arriba y no al reves: senale primero que las tres columnas comparten la misma base (infraestructura), y que lo unico que cambia es hasta donde sube el color amarillo.</a:t>
+            </a:r>
+          </a:p>
+          <a:p/>
+          <a:p>
+            <a:r>
+              <a:t>(No se proyecta) En IaaS el estudiante ya conoce DigitalOcean o AWS EC2 de oidas aunque no tenga cuenta; en PaaS, Render, Railway o Heroku son los que de verdad va a usar en el taller de hoy y en la Clase 3; en SaaS, Gmail o Notion le sirven para entender que «usted solo configura» no es un eufemismo, de verdad no hay nada que desplegar.</a:t>
+            </a:r>
+          </a:p>
+          <a:p/>
+          <a:p>
+            <a:r>
+              <a:t>(No se proyecta) Pregunte en voz alta, senalando la columna de PaaS: «por que la fila de Sistema operativo es celeste aqui y amarilla en IaaS?» La respuesta correcta es que el proveedor la absorbio, no que desaparecio: es el error mas comun, creer que en PaaS el sistema operativo deja de existir en vez de que alguien mas lo administra.</a:t>
             </a:r>
           </a:p>
         </p:txBody>
@@ -4477,7 +4467,7 @@
                 </a:solidFill>
                 <a:latin typeface="Calibri"/>
               </a:rPr>
-              <a:t>La pila de responsabilidades: donde se corta la linea (2/2)</a:t>
+              <a:t>IaaS, PaaS y SaaS: los tres cortes, uno por uno (1/3)</a:t>
             </a:r>
           </a:p>
         </p:txBody>
@@ -4516,7 +4506,7 @@
                 </a:solidFill>
                 <a:latin typeface="Calibri"/>
               </a:rPr>
-              <a:t>–   Y finalmente el codigo de la aplicacion, sus datos y la administracion de usuarios y permisos.</a:t>
+              <a:t>–   IaaS, infraestructura como servicio, corta la linea justo encima de la virtualizacion: el proveedor entrega maquinas virtuales, redes y discos</a:t>
             </a:r>
           </a:p>
           <a:p>
@@ -4532,7 +4522,7 @@
                 </a:solidFill>
                 <a:latin typeface="Calibri"/>
               </a:rPr>
-              <a:t>–   Son ocho o nueve capas segun como se cuente.</a:t>
+              <a:t>–   Y el cliente recibe una maquina practicamente vacia con un sistema operativo que debe actualizar, endurecer, monitorear y respaldar el mismo.</a:t>
             </a:r>
           </a:p>
           <a:p>
@@ -4548,7 +4538,7 @@
                 </a:solidFill>
                 <a:latin typeface="Calibri"/>
               </a:rPr>
-              <a:t>–   En el modelo tradicional, llamado on-premise porque los equipos son propios y estan en las instalaciones de la organizacion, todas son responsabilidad del cliente.</a:t>
+              <a:t>–   PaaS, plataforma como servicio, sube la linea dos escalones: el proveedor administra tambien el sistema operativo y el runtime, y el cliente entrega su codigo mas un archivo de configuracion; la plataforma lo construye, lo empaqueta y lo pone a correr.</a:t>
             </a:r>
           </a:p>
           <a:p>
@@ -4564,7 +4554,23 @@
                 </a:solidFill>
                 <a:latin typeface="Calibri"/>
               </a:rPr>
-              <a:t>–   Nada mas y nada menos: si el estudiante entiende esa frase, entendio la clase.</a:t>
+              <a:t>–   El cliente pierde el acceso a la maquina, porque ya no hay un servidor donde entrar por consola</a:t>
+            </a:r>
+          </a:p>
+          <a:p>
+            <a:pPr>
+              <a:spcAft>
+                <a:spcPts val="800"/>
+              </a:spcAft>
+            </a:pPr>
+            <a:r>
+              <a:rPr sz="2000" b="0" i="0">
+                <a:solidFill>
+                  <a:srgbClr val="333333"/>
+                </a:solidFill>
+                <a:latin typeface="Calibri"/>
+              </a:rPr>
+              <a:t>–   Y gana velocidad: un despliegue que en IaaS implica preparar una imagen, configurar el servicio y probar la red, en PaaS se reduce a subir el codigo al repositorio.</a:t>
             </a:r>
           </a:p>
         </p:txBody>
@@ -4745,7 +4751,7 @@
                 </a:solidFill>
                 <a:latin typeface="Calibri"/>
               </a:rPr>
-              <a:t>IaaS, PaaS y SaaS: los tres cortes, uno por uno (1/4)</a:t>
+              <a:t>IaaS, PaaS y SaaS: los tres cortes, uno por uno (2/3)</a:t>
             </a:r>
           </a:p>
         </p:txBody>
@@ -4784,7 +4790,7 @@
                 </a:solidFill>
                 <a:latin typeface="Calibri"/>
               </a:rPr>
-              <a:t>–   IaaS, infraestructura como servicio, corta la linea justo encima de la virtualizacion: el proveedor entrega maquinas virtuales, redes y discos</a:t>
+              <a:t>–   Los niveles gratuitos tipicos de este modelo ofrecen del orden de 512 MB de memoria por instancia, una cantidad limitada de horas de ejecucion al mes y suspension automatica del servicio tras unos 15 minutos sin trafico</a:t>
             </a:r>
           </a:p>
           <a:p>
@@ -4800,7 +4806,7 @@
                 </a:solidFill>
                 <a:latin typeface="Calibri"/>
               </a:rPr>
-              <a:t>–   Y el cliente recibe una maquina practicamente vacia con un sistema operativo que debe actualizar, endurecer, monitorear y respaldar el mismo.</a:t>
+              <a:t>–   Lo que produce el efecto conocido como arranque en frio: la primera peticion despues de la inactividad puede tardar varios segundos en lugar de milisegundos.</a:t>
             </a:r>
           </a:p>
           <a:p>
@@ -4816,7 +4822,7 @@
                 </a:solidFill>
                 <a:latin typeface="Calibri"/>
               </a:rPr>
-              <a:t>–   PaaS, plataforma como servicio, sube la linea dos escalones: el proveedor administra tambien el sistema operativo y el runtime, y el cliente entrega su codigo mas un archivo de configuracion; la plataforma lo construye, lo empaqueta y lo pone a correr.</a:t>
+              <a:t>–   SaaS, software como servicio, lleva la linea hasta arriba: el proveedor administra la aplicacion completa y el cliente solo la configura y la usa, sin desplegar nada.</a:t>
             </a:r>
           </a:p>
           <a:p>
@@ -4832,7 +4838,7 @@
                 </a:solidFill>
                 <a:latin typeface="Calibri"/>
               </a:rPr>
-              <a:t>–   El cliente pierde el acceso a la maquina, porque ya no hay un servidor donde entrar por consola</a:t>
+              <a:t>–   El correo corporativo, un servicio de envio de mensajes transaccionales, un proveedor de identidad que resuelve el inicio de sesion o un servicio de almacenamiento y transformacion de imagenes son SaaS desde la perspectiva de quien construye de la app.</a:t>
             </a:r>
           </a:p>
         </p:txBody>
@@ -5013,7 +5019,7 @@
                 </a:solidFill>
                 <a:latin typeface="Calibri"/>
               </a:rPr>
-              <a:t>IaaS, PaaS y SaaS: los tres cortes, uno por uno (2/4)</a:t>
+              <a:t>IaaS, PaaS y SaaS: los tres cortes, uno por uno (3/3)</a:t>
             </a:r>
           </a:p>
         </p:txBody>
@@ -5052,7 +5058,7 @@
                 </a:solidFill>
                 <a:latin typeface="Calibri"/>
               </a:rPr>
-              <a:t>–   Y gana velocidad: un despliegue que en IaaS implica preparar una imagen, configurar el servicio y probar la red, en PaaS se reduce a subir el codigo al repositorio.</a:t>
+              <a:t>–   Y aqui esta el punto que casi siempre se pierde: los tres modelos no son excluyentes y un sistema real los combina.</a:t>
             </a:r>
           </a:p>
           <a:p>
@@ -5068,7 +5074,7 @@
                 </a:solidFill>
                 <a:latin typeface="Calibri"/>
               </a:rPr>
-              <a:t>–   Los niveles gratuitos tipicos de este modelo ofrecen del orden de 512 MB de memoria por instancia, una cantidad limitada de horas de ejecucion al mes y suspension automatica del servicio tras unos 15 minutos sin trafico</a:t>
+              <a:t>–   La arquitectura probable de la app de turnos es hibrida: la API desplegada como PaaS, la base de datos como servicio gestionado (que es PaaS en su variante de datos)</a:t>
             </a:r>
           </a:p>
           <a:p>
@@ -5084,7 +5090,7 @@
                 </a:solidFill>
                 <a:latin typeface="Calibri"/>
               </a:rPr>
-              <a:t>–   Lo que produce el efecto conocido como arranque en frio: la primera peticion despues de la inactividad puede tardar varios segundos en lugar de milisegundos.</a:t>
+              <a:t>–   El envio de recordatorios delegado a un SaaS de correo y el almacenamiento de fotos de perfil a un SaaS de archivos.</a:t>
             </a:r>
           </a:p>
           <a:p>
@@ -5100,7 +5106,7 @@
                 </a:solidFill>
                 <a:latin typeface="Calibri"/>
               </a:rPr>
-              <a:t>–   Esos numeros son ordenes de magnitud tipicos que varian entre proveedores, no constantes; lo estructural es el patron, porque gratis siempre implica limites de memoria, de horas y de latencia en frio</a:t>
+              <a:t>–   No se elige un modelo unico para todo el sistema: se elige por componente y se justifica cada eleccion, que es exactamente como se decide en la industria.</a:t>
             </a:r>
           </a:p>
         </p:txBody>
@@ -5281,7 +5287,7 @@
                 </a:solidFill>
                 <a:latin typeface="Calibri"/>
               </a:rPr>
-              <a:t>IaaS, PaaS y SaaS: los tres cortes, uno por uno (3/4)</a:t>
+              <a:t>Responsabilidad compartida: quien responde por que</a:t>
             </a:r>
           </a:p>
         </p:txBody>
@@ -5320,7 +5326,7 @@
                 </a:solidFill>
                 <a:latin typeface="Calibri"/>
               </a:rPr>
-              <a:t>–   Y el estudiante debe anticiparlo en su diseno en vez de descubrirlo la noche antes de la sustentacion.</a:t>
+              <a:t>–   El proveedor garantiza que el centro de datos no se incendie, que la capa de virtualizacion este parcheada y que los discos esten cifrados en reposo; el cliente sigue siendo responsable de sus contrasenas, sus permisos, sus datos y su configuracion.</a:t>
             </a:r>
           </a:p>
           <a:p>
@@ -5336,7 +5342,7 @@
                 </a:solidFill>
                 <a:latin typeface="Calibri"/>
               </a:rPr>
-              <a:t>–   SaaS, software como servicio, lleva la linea hasta arriba: el proveedor administra la aplicacion completa y el cliente solo la configura y la usa, sin desplegar nada.</a:t>
+              <a:t>–   Importa porque la causa dominante de los incidentes de seguridad en la nube no son fallas del proveedor sino configuraciones erradas del cliente: un almacenamiento de archivos dejado publico</a:t>
             </a:r>
           </a:p>
           <a:p>
@@ -5352,7 +5358,7 @@
                 </a:solidFill>
                 <a:latin typeface="Calibri"/>
               </a:rPr>
-              <a:t>–   El correo corporativo, un servicio de envio de mensajes transaccionales, un proveedor de identidad que resuelve el inicio de sesion o un servicio de almacenamiento y transformacion de imagenes son SaaS desde la perspectiva de quien construye de la app.</a:t>
+              <a:t>–   Una credencial subida al repositorio en texto plano, un puerto de base de datos expuesto a internet.</a:t>
             </a:r>
           </a:p>
           <a:p>
@@ -5368,7 +5374,7 @@
                 </a:solidFill>
                 <a:latin typeface="Calibri"/>
               </a:rPr>
-              <a:t>–   Y aqui esta el punto que casi siempre se pierde: los tres modelos no son excluyentes y un sistema real los combina.</a:t>
+              <a:t>–   Para la app la mitigacion no es evitar SaaS sino acotarlo: si el envio de correos se encapsula detras de una interfaz propia, por ejemplo un modulo Notificador con un solo metodo enviar, cambiar de proveedor toca un archivo y no cuarenta.</a:t>
             </a:r>
           </a:p>
         </p:txBody>
@@ -5549,7 +5555,7 @@
                 </a:solidFill>
                 <a:latin typeface="Calibri"/>
               </a:rPr>
-              <a:t>IaaS, PaaS y SaaS: los tres cortes, uno por uno (4/4)</a:t>
+              <a:t>El ADR-001: seis secciones rotuladas y una sola decision (1/2)</a:t>
             </a:r>
           </a:p>
         </p:txBody>
@@ -5588,7 +5594,7 @@
                 </a:solidFill>
                 <a:latin typeface="Calibri"/>
               </a:rPr>
-              <a:t>–   La arquitectura probable de la app de turnos es hibrida: la API desplegada como PaaS, la base de datos como servicio gestionado (que es PaaS en su variante de datos)</a:t>
+              <a:t>–   La decision se registra en el ADR-001.</a:t>
             </a:r>
           </a:p>
           <a:p>
@@ -5604,7 +5610,7 @@
                 </a:solidFill>
                 <a:latin typeface="Calibri"/>
               </a:rPr>
-              <a:t>–   El envio de recordatorios delegado a un SaaS de correo y el almacenamiento de fotos de perfil a un SaaS de archivos.</a:t>
+              <a:t>–   Un ADR (Architecture Decision Record, registro de decision arquitectonica) es un documento corto, de media pagina a una pagina, que registra UNA sola decision.</a:t>
             </a:r>
           </a:p>
           <a:p>
@@ -5620,7 +5626,39 @@
                 </a:solidFill>
                 <a:latin typeface="Calibri"/>
               </a:rPr>
-              <a:t>–   No se elige un modelo unico para todo el sistema: se elige por componente y se justifica cada eleccion, que es exactamente como se decide en la industria.</a:t>
+              <a:t>–   En este curso tiene SEIS secciones rotuladas, siempre las mismas y en este orden,: 1) Titulo, con el numero consecutivo del ADR; 2) Estado</a:t>
+            </a:r>
+          </a:p>
+          <a:p>
+            <a:pPr>
+              <a:spcAft>
+                <a:spcPts val="800"/>
+              </a:spcAft>
+            </a:pPr>
+            <a:r>
+              <a:rPr sz="2000" b="0" i="0">
+                <a:solidFill>
+                  <a:srgbClr val="333333"/>
+                </a:solidFill>
+                <a:latin typeface="Calibri"/>
+              </a:rPr>
+              <a:t>–   Que hoy es «Aceptado» mas la fecha de la sesion; 3) Contexto, o sea las restricciones bajo las que se decide; 4) Decision, en una sola frase y con un unico modelo dominante</a:t>
+            </a:r>
+          </a:p>
+          <a:p>
+            <a:pPr>
+              <a:spcAft>
+                <a:spcPts val="800"/>
+              </a:spcAft>
+            </a:pPr>
+            <a:r>
+              <a:rPr sz="2000" b="0" i="0">
+                <a:solidFill>
+                  <a:srgbClr val="333333"/>
+                </a:solidFill>
+                <a:latin typeface="Calibri"/>
+              </a:rPr>
+              <a:t>–   5) Alternativas descartadas, exactamente dos y con el motivo atado al dominio; 6) Consecuencias, con lo bueno y lo malo que se acepta.</a:t>
             </a:r>
           </a:p>
         </p:txBody>
@@ -5801,7 +5839,7 @@
                 </a:solidFill>
                 <a:latin typeface="Calibri"/>
               </a:rPr>
-              <a:t>Responsabilidad compartida: quien responde por que (1/2)</a:t>
+              <a:t>El ADR-001: seis secciones rotuladas y una sola decision (2/2)</a:t>
             </a:r>
           </a:p>
         </p:txBody>
@@ -5840,7 +5878,7 @@
                 </a:solidFill>
                 <a:latin typeface="Calibri"/>
               </a:rPr>
-              <a:t>–   El concepto que unifica todo esto se llama modelo de responsabilidad compartida y se resume en una frase que conviene memorizar: el proveedor es responsable de la seguridad DE la nube y el cliente de la seguridad EN la nube.</a:t>
+              <a:t>–   La regla de una decision por documento no es burocracia: es lo que permite que meses despues alguien lea por que se eligio algo sin depender de la memoria de nadie.</a:t>
             </a:r>
           </a:p>
           <a:p>
@@ -5856,7 +5894,7 @@
                 </a:solidFill>
                 <a:latin typeface="Calibri"/>
               </a:rPr>
-              <a:t>–   El proveedor garantiza que el centro de datos no se incendie, que la capa de virtualizacion este parcheada y que los discos esten cifrados en reposo; el cliente sigue siendo responsable de sus contrasenas, sus permisos, sus datos y su configuracion.</a:t>
+              <a:t>–   En DECISION va una frase: la aplicacion de la app de turnos se despliega sobre PaaS.</a:t>
             </a:r>
           </a:p>
           <a:p>
@@ -5872,7 +5910,7 @@
                 </a:solidFill>
                 <a:latin typeface="Calibri"/>
               </a:rPr>
-              <a:t>–   Importa porque la causa dominante de los incidentes de seguridad en la nube no son fallas del proveedor sino configuraciones erradas del cliente: un almacenamiento de archivos dejado publico</a:t>
+              <a:t>–   En ALTERNATIVAS DESCARTADAS van dos y solo dos: IaaS con maquina virtual propia, descartada porque habria que asumir parches y respaldos del sistema operativo sin tiempo para ello</a:t>
             </a:r>
           </a:p>
           <a:p>
@@ -5888,23 +5926,7 @@
                 </a:solidFill>
                 <a:latin typeface="Calibri"/>
               </a:rPr>
-              <a:t>–   Una credencial subida al repositorio en texto plano, un puerto de base de datos expuesto a internet.</a:t>
-            </a:r>
-          </a:p>
-          <a:p>
-            <a:pPr>
-              <a:spcAft>
-                <a:spcPts val="800"/>
-              </a:spcAft>
-            </a:pPr>
-            <a:r>
-              <a:rPr sz="2000" b="0" i="0">
-                <a:solidFill>
-                  <a:srgbClr val="333333"/>
-                </a:solidFill>
-                <a:latin typeface="Calibri"/>
-              </a:rPr>
-              <a:t>–   Subir de IaaS a PaaS reduce la superficie de responsabilidad del cliente, pero nunca la elimina, y esa idea es el punto de partida literal de la Clase 6.</a:t>
+              <a:t>–   Y SaaS de agendamiento ya existente, descartada porque el proyecto perderia su objeto, ya que no habria arquitectura que disenar sino solo configuracion.</a:t>
             </a:r>
           </a:p>
         </p:txBody>
@@ -6085,7 +6107,7 @@
                 </a:solidFill>
                 <a:latin typeface="Calibri"/>
               </a:rPr>
-              <a:t>Responsabilidad compartida: quien responde por que (2/2)</a:t>
+              <a:t>La pila dibujada: nombres reales para IaaS, PaaS y SaaS</a:t>
             </a:r>
           </a:p>
         </p:txBody>
@@ -6124,7 +6146,7 @@
                 </a:solidFill>
                 <a:latin typeface="Calibri"/>
               </a:rPr>
-              <a:t>–   Pero hay un tercer eje que el estudiante no ve solo, el amarre al proveedor o vendor lock-in, que es el costo de mudarse a otro proveedor mas adelante: bajo en IaaS, porque una maquina virtual con Linux se parece a cualquier otra; medio en PaaS</a:t>
+              <a:t>–   La pila tiene siete capas, de abajo hacia arriba: red y hardware, virtualizacion, sistema operativo, runtime, middleware, aplicacion y datos.</a:t>
             </a:r>
           </a:p>
           <a:p>
@@ -6140,7 +6162,7 @@
                 </a:solidFill>
                 <a:latin typeface="Calibri"/>
               </a:rPr>
-              <a:t>–   Porque el archivo de configuracion y algunos servicios son propietarios; potencialmente alto en SaaS, porque los datos y parte de la logica viven dentro de un producto ajeno.</a:t>
+              <a:t>–   En IaaS lo que administra el cliente es todo, desde el sistema operativo hacia arriba; en PaaS son solo la aplicacion y los datos; en SaaS es solo la configuracion y los datos que carga.</a:t>
             </a:r>
           </a:p>
           <a:p>
@@ -6156,7 +6178,7 @@
                 </a:solidFill>
                 <a:latin typeface="Calibri"/>
               </a:rPr>
-              <a:t>–   Para la app la mitigacion no es evitar SaaS sino acotarlo: si el envio de correos se encapsula detras de una interfaz propia, por ejemplo un modulo Notificador con un solo metodo enviar, cambiar de proveedor toca un archivo y no cuarenta.</a:t>
+              <a:t>–   Ejemplos reales: una maquina virtual en DigitalOcean es IaaS, un servicio web en Render es PaaS y el correo corporativo es SaaS.</a:t>
             </a:r>
           </a:p>
         </p:txBody>
@@ -6337,7 +6359,7 @@
                 </a:solidFill>
                 <a:latin typeface="Calibri"/>
               </a:rPr>
-              <a:t>El ADR-001: seis secciones rotuladas y una sola decision (1/3)</a:t>
+              <a:t>Preguntas frecuentes y cierre conceptual</a:t>
             </a:r>
           </a:p>
         </p:txBody>
@@ -6376,7 +6398,7 @@
                 </a:solidFill>
                 <a:latin typeface="Calibri"/>
               </a:rPr>
-              <a:t>–   La decision se registra en el ADR-001.</a:t>
+              <a:t>–   Donde encaja serverless o las funciones como servicio: es una variante extrema de PaaS en la que no se administra ninguna instancia siempre encendida</a:t>
             </a:r>
           </a:p>
           <a:p>
@@ -6392,7 +6414,7 @@
                 </a:solidFill>
                 <a:latin typeface="Calibri"/>
               </a:rPr>
-              <a:t>–   Un ADR (Architecture Decision Record, registro de decision arquitectonica) es un documento corto, de media pagina a una pagina, que registra UNA sola decision.</a:t>
+              <a:t>–   Se paga por invocacion y el codigo debe tolerar arrancar en frio; para efectos del curso se clasifica como PaaS anotando la diferencia.</a:t>
             </a:r>
           </a:p>
           <a:p>
@@ -6408,7 +6430,7 @@
                 </a:solidFill>
                 <a:latin typeface="Calibri"/>
               </a:rPr>
-              <a:t>–   En este curso tiene SEIS secciones rotuladas, siempre las mismas y en este orden,: 1) Titulo, con el numero consecutivo del ADR; 2) Estado</a:t>
+              <a:t>–   Respuesta: porque la plataforma construye internamente una imagen de contenedor con el codigo entregado, de modo que entender contenedores es entender que hace la plataforma por debajo</a:t>
             </a:r>
           </a:p>
           <a:p>
@@ -6424,23 +6446,7 @@
                 </a:solidFill>
                 <a:latin typeface="Calibri"/>
               </a:rPr>
-              <a:t>–   Que hoy es «Aceptado» mas la fecha de la sesion; 3) Contexto, o sea las restricciones bajo las que se decide; 4) Decision, en una sola frase y con un unico modelo dominante</a:t>
-            </a:r>
-          </a:p>
-          <a:p>
-            <a:pPr>
-              <a:spcAft>
-                <a:spcPts val="800"/>
-              </a:spcAft>
-            </a:pPr>
-            <a:r>
-              <a:rPr sz="2000" b="0" i="0">
-                <a:solidFill>
-                  <a:srgbClr val="333333"/>
-                </a:solidFill>
-                <a:latin typeface="Calibri"/>
-              </a:rPr>
-              <a:t>–   5) Alternativas descartadas, exactamente dos y con el motivo atado al dominio; 6) Consecuencias, con lo bueno y lo malo que se acepta.</a:t>
+              <a:t>–   Y porque el contenedor es precisamente el artefacto que vuelve reversible la decision de hoy.</a:t>
             </a:r>
           </a:p>
         </p:txBody>
@@ -6621,21 +6627,141 @@
                 </a:solidFill>
                 <a:latin typeface="Calibri"/>
               </a:rPr>
-              <a:t>El ADR-001: seis secciones rotuladas y una sola decision (2/3)</a:t>
-            </a:r>
-          </a:p>
-        </p:txBody>
-      </p:sp>
-      <p:sp>
-        <p:nvSpPr>
-          <p:cNvPr id="5" name="TextBox 4"/>
+              <a:t>La plantilla de ADR: los seis apartados</a:t>
+            </a:r>
+          </a:p>
+        </p:txBody>
+      </p:sp>
+      <p:sp>
+        <p:nvSpPr>
+          <p:cNvPr id="5" name="Rounded Rectangle 4"/>
+          <p:cNvSpPr/>
+          <p:nvPr/>
+        </p:nvSpPr>
+        <p:spPr>
+          <a:xfrm>
+            <a:off x="457200" y="1261872"/>
+            <a:ext cx="11277295" cy="5093208"/>
+          </a:xfrm>
+          <a:prstGeom prst="roundRect">
+            <a:avLst>
+              <a:gd name="adj" fmla="val 12000"/>
+            </a:avLst>
+          </a:prstGeom>
+          <a:solidFill>
+            <a:srgbClr val="1E2A38"/>
+          </a:solidFill>
+          <a:ln>
+            <a:noFill/>
+          </a:ln>
+        </p:spPr>
+        <p:style>
+          <a:lnRef idx="1">
+            <a:schemeClr val="accent1"/>
+          </a:lnRef>
+          <a:fillRef idx="3">
+            <a:schemeClr val="accent1"/>
+          </a:fillRef>
+          <a:effectRef idx="2">
+            <a:schemeClr val="accent1"/>
+          </a:effectRef>
+          <a:fontRef idx="minor">
+            <a:schemeClr val="lt1"/>
+          </a:fontRef>
+        </p:style>
+        <p:txBody>
+          <a:bodyPr rtlCol="0" anchor="ctr"/>
+          <a:lstStyle/>
+          <a:p>
+            <a:pPr algn="ctr"/>
+          </a:p>
+        </p:txBody>
+      </p:sp>
+      <p:sp>
+        <p:nvSpPr>
+          <p:cNvPr id="6" name="Rectangle 5"/>
+          <p:cNvSpPr/>
+          <p:nvPr/>
+        </p:nvSpPr>
+        <p:spPr>
+          <a:xfrm>
+            <a:off x="457200" y="1261872"/>
+            <a:ext cx="11277295" cy="320040"/>
+          </a:xfrm>
+          <a:prstGeom prst="rect">
+            <a:avLst/>
+          </a:prstGeom>
+          <a:solidFill>
+            <a:srgbClr val="095292"/>
+          </a:solidFill>
+          <a:ln>
+            <a:noFill/>
+          </a:ln>
+        </p:spPr>
+        <p:style>
+          <a:lnRef idx="1">
+            <a:schemeClr val="accent1"/>
+          </a:lnRef>
+          <a:fillRef idx="3">
+            <a:schemeClr val="accent1"/>
+          </a:fillRef>
+          <a:effectRef idx="2">
+            <a:schemeClr val="accent1"/>
+          </a:effectRef>
+          <a:fontRef idx="minor">
+            <a:schemeClr val="lt1"/>
+          </a:fontRef>
+        </p:style>
+        <p:txBody>
+          <a:bodyPr rtlCol="0" anchor="ctr"/>
+          <a:lstStyle/>
+          <a:p>
+            <a:pPr algn="ctr"/>
+          </a:p>
+        </p:txBody>
+      </p:sp>
+      <p:sp>
+        <p:nvSpPr>
+          <p:cNvPr id="7" name="TextBox 6"/>
           <p:cNvSpPr txBox="1"/>
           <p:nvPr/>
         </p:nvSpPr>
         <p:spPr>
           <a:xfrm>
-            <a:off x="457200" y="1170432"/>
-            <a:ext cx="11277295" cy="5230368"/>
+            <a:off x="685800" y="1307592"/>
+            <a:ext cx="10820095" cy="256032"/>
+          </a:xfrm>
+          <a:prstGeom prst="rect">
+            <a:avLst/>
+          </a:prstGeom>
+          <a:noFill/>
+        </p:spPr>
+        <p:txBody>
+          <a:bodyPr wrap="square" anchor="ctr"/>
+          <a:lstStyle/>
+          <a:p>
+            <a:r>
+              <a:rPr sz="1000" b="1" i="0">
+                <a:solidFill>
+                  <a:srgbClr val="269CCB"/>
+                </a:solidFill>
+                <a:latin typeface="Calibri"/>
+              </a:rPr>
+              <a:t>● ● ●</a:t>
+            </a:r>
+          </a:p>
+        </p:txBody>
+      </p:sp>
+      <p:sp>
+        <p:nvSpPr>
+          <p:cNvPr id="8" name="TextBox 7"/>
+          <p:cNvSpPr txBox="1"/>
+          <p:nvPr/>
+        </p:nvSpPr>
+        <p:spPr>
+          <a:xfrm>
+            <a:off x="777240" y="1719072"/>
+            <a:ext cx="5181447" cy="4453128"/>
           </a:xfrm>
           <a:prstGeom prst="rect">
             <a:avLst/>
@@ -6650,88 +6776,367 @@
           <a:p>
             <a:pPr>
               <a:spcAft>
-                <a:spcPts val="800"/>
+                <a:spcPts val="400"/>
               </a:spcAft>
             </a:pPr>
             <a:r>
-              <a:rPr sz="2000" b="0" i="0">
-                <a:solidFill>
-                  <a:srgbClr val="333333"/>
-                </a:solidFill>
-                <a:latin typeface="Calibri"/>
-              </a:rPr>
-              <a:t>–   La regla de una decision por documento no es burocracia: es lo que permite que meses despues alguien lea por que se eligio algo sin depender de la memoria de nadie.</a:t>
+              <a:rPr sz="1400" b="0" i="0">
+                <a:solidFill>
+                  <a:srgbClr val="FFFFFF"/>
+                </a:solidFill>
+                <a:latin typeface="Calibri"/>
+              </a:rPr>
+              <a:t># ADR-001 · Modelo de servicio dominante de la app</a:t>
             </a:r>
           </a:p>
           <a:p>
             <a:pPr>
               <a:spcAft>
-                <a:spcPts val="800"/>
+                <a:spcPts val="400"/>
               </a:spcAft>
             </a:pPr>
             <a:r>
-              <a:rPr sz="2000" b="0" i="0">
-                <a:solidFill>
-                  <a:srgbClr val="333333"/>
-                </a:solidFill>
-                <a:latin typeface="Calibri"/>
-              </a:rPr>
-              <a:t>–   Un ADR-001 aceptable para la app de turnos diria en CONTEXTO: la barberia agenda por mensajeria y pierde alrededor de tres turnos diarios por doble reserva</a:t>
+              <a:rPr sz="1400" b="0" i="0">
+                <a:solidFill>
+                  <a:srgbClr val="FFFFFF"/>
+                </a:solidFill>
+                <a:latin typeface="Calibri"/>
+              </a:rPr>
+              <a:t/>
             </a:r>
           </a:p>
           <a:p>
             <a:pPr>
               <a:spcAft>
-                <a:spcPts val="800"/>
+                <a:spcPts val="400"/>
               </a:spcAft>
             </a:pPr>
             <a:r>
-              <a:rPr sz="2000" b="0" i="0">
-                <a:solidFill>
-                  <a:srgbClr val="333333"/>
-                </a:solidFill>
-                <a:latin typeface="Calibri"/>
-              </a:rPr>
-              <a:t>–   El proyecto lo sostiene un desarrollador (o un equipo de dos o tres, si el docente lo autorizo) durante doce semanas, sin presupuesto ni tarjeta de credito, y el sistema tiene que estar disponible el dia de la sustentacion.</a:t>
+              <a:rPr sz="1400" b="0" i="0">
+                <a:solidFill>
+                  <a:srgbClr val="FFFFFF"/>
+                </a:solidFill>
+                <a:latin typeface="Calibri"/>
+              </a:rPr>
+              <a:t>## 1. Estado</a:t>
             </a:r>
           </a:p>
           <a:p>
             <a:pPr>
               <a:spcAft>
-                <a:spcPts val="800"/>
+                <a:spcPts val="400"/>
               </a:spcAft>
             </a:pPr>
             <a:r>
-              <a:rPr sz="2000" b="0" i="0">
-                <a:solidFill>
-                  <a:srgbClr val="333333"/>
-                </a:solidFill>
-                <a:latin typeface="Calibri"/>
-              </a:rPr>
-              <a:t>–   En DECISION va una frase: la aplicacion de la app de turnos se despliega sobre PaaS.</a:t>
+              <a:rPr sz="1400" b="0" i="0">
+                <a:solidFill>
+                  <a:srgbClr val="FFFFFF"/>
+                </a:solidFill>
+                <a:latin typeface="Calibri"/>
+              </a:rPr>
+              <a:t>Aceptada · 2026-09-01 · decide: &lt;su nombre&gt;</a:t>
             </a:r>
           </a:p>
           <a:p>
             <a:pPr>
               <a:spcAft>
-                <a:spcPts val="800"/>
+                <a:spcPts val="400"/>
               </a:spcAft>
             </a:pPr>
             <a:r>
-              <a:rPr sz="2000" b="0" i="0">
-                <a:solidFill>
-                  <a:srgbClr val="333333"/>
-                </a:solidFill>
-                <a:latin typeface="Calibri"/>
-              </a:rPr>
-              <a:t>–   En ALTERNATIVAS DESCARTADAS van dos y solo dos: IaaS con maquina virtual propia, descartada porque habria que asumir parches y respaldos del sistema operativo sin tiempo para ello</a:t>
-            </a:r>
-          </a:p>
-        </p:txBody>
-      </p:sp>
-      <p:sp>
-        <p:nvSpPr>
-          <p:cNvPr id="6" name="TextBox 5"/>
+              <a:rPr sz="1400" b="0" i="0">
+                <a:solidFill>
+                  <a:srgbClr val="FFFFFF"/>
+                </a:solidFill>
+                <a:latin typeface="Calibri"/>
+              </a:rPr>
+              <a:t/>
+            </a:r>
+          </a:p>
+          <a:p>
+            <a:pPr>
+              <a:spcAft>
+                <a:spcPts val="400"/>
+              </a:spcAft>
+            </a:pPr>
+            <a:r>
+              <a:rPr sz="1400" b="0" i="0">
+                <a:solidFill>
+                  <a:srgbClr val="FFFFFF"/>
+                </a:solidFill>
+                <a:latin typeface="Calibri"/>
+              </a:rPr>
+              <a:t>## 2. Contexto</a:t>
+            </a:r>
+          </a:p>
+          <a:p>
+            <a:pPr>
+              <a:spcAft>
+                <a:spcPts val="400"/>
+              </a:spcAft>
+            </a:pPr>
+            <a:r>
+              <a:rPr sz="1400" b="0" i="0">
+                <a:solidFill>
+                  <a:srgbClr val="FFFFFF"/>
+                </a:solidFill>
+                <a:latin typeface="Calibri"/>
+              </a:rPr>
+              <a:t>&lt;que problema del dominio obliga a decidir esto, en 3 o 4 lineas&gt;</a:t>
+            </a:r>
+          </a:p>
+          <a:p>
+            <a:pPr>
+              <a:spcAft>
+                <a:spcPts val="400"/>
+              </a:spcAft>
+            </a:pPr>
+            <a:r>
+              <a:rPr sz="1400" b="0" i="0">
+                <a:solidFill>
+                  <a:srgbClr val="FFFFFF"/>
+                </a:solidFill>
+                <a:latin typeface="Calibri"/>
+              </a:rPr>
+              <a:t/>
+            </a:r>
+          </a:p>
+          <a:p>
+            <a:pPr>
+              <a:spcAft>
+                <a:spcPts val="400"/>
+              </a:spcAft>
+            </a:pPr>
+            <a:r>
+              <a:rPr sz="1400" b="0" i="0">
+                <a:solidFill>
+                  <a:srgbClr val="FFFFFF"/>
+                </a:solidFill>
+                <a:latin typeface="Calibri"/>
+              </a:rPr>
+              <a:t>## 3. Alternativas consideradas</a:t>
+            </a:r>
+          </a:p>
+          <a:p>
+            <a:pPr>
+              <a:spcAft>
+                <a:spcPts val="400"/>
+              </a:spcAft>
+            </a:pPr>
+            <a:r>
+              <a:rPr sz="1400" b="0" i="0">
+                <a:solidFill>
+                  <a:srgbClr val="FFFFFF"/>
+                </a:solidFill>
+                <a:latin typeface="Calibri"/>
+              </a:rPr>
+              <a:t>- IaaS  — &lt;que ganaria y que costaria en SU dominio&gt;</a:t>
+            </a:r>
+          </a:p>
+          <a:p>
+            <a:pPr>
+              <a:spcAft>
+                <a:spcPts val="400"/>
+              </a:spcAft>
+            </a:pPr>
+            <a:r>
+              <a:rPr sz="1400" b="0" i="0">
+                <a:solidFill>
+                  <a:srgbClr val="FFFFFF"/>
+                </a:solidFill>
+                <a:latin typeface="Calibri"/>
+              </a:rPr>
+              <a:t>- PaaS  — &lt;idem&gt;</a:t>
+            </a:r>
+          </a:p>
+        </p:txBody>
+      </p:sp>
+      <p:sp>
+        <p:nvSpPr>
+          <p:cNvPr id="9" name="TextBox 8"/>
+          <p:cNvSpPr txBox="1"/>
+          <p:nvPr/>
+        </p:nvSpPr>
+        <p:spPr>
+          <a:xfrm>
+            <a:off x="6233007" y="1719072"/>
+            <a:ext cx="5181447" cy="4453128"/>
+          </a:xfrm>
+          <a:prstGeom prst="rect">
+            <a:avLst/>
+          </a:prstGeom>
+          <a:noFill/>
+        </p:spPr>
+        <p:txBody>
+          <a:bodyPr wrap="square">
+            <a:spAutoFit/>
+          </a:bodyPr>
+          <a:lstStyle/>
+          <a:p>
+            <a:pPr>
+              <a:spcAft>
+                <a:spcPts val="400"/>
+              </a:spcAft>
+            </a:pPr>
+            <a:r>
+              <a:rPr sz="1400" b="0" i="0">
+                <a:solidFill>
+                  <a:srgbClr val="FFFFFF"/>
+                </a:solidFill>
+                <a:latin typeface="Calibri"/>
+              </a:rPr>
+              <a:t>- SaaS  — &lt;idem&gt;</a:t>
+            </a:r>
+          </a:p>
+          <a:p>
+            <a:pPr>
+              <a:spcAft>
+                <a:spcPts val="400"/>
+              </a:spcAft>
+            </a:pPr>
+            <a:r>
+              <a:rPr sz="1400" b="0" i="0">
+                <a:solidFill>
+                  <a:srgbClr val="FFFFFF"/>
+                </a:solidFill>
+                <a:latin typeface="Calibri"/>
+              </a:rPr>
+              <a:t/>
+            </a:r>
+          </a:p>
+          <a:p>
+            <a:pPr>
+              <a:spcAft>
+                <a:spcPts val="400"/>
+              </a:spcAft>
+            </a:pPr>
+            <a:r>
+              <a:rPr sz="1400" b="0" i="0">
+                <a:solidFill>
+                  <a:srgbClr val="FFFFFF"/>
+                </a:solidFill>
+                <a:latin typeface="Calibri"/>
+              </a:rPr>
+              <a:t>## 4. Decision</a:t>
+            </a:r>
+          </a:p>
+          <a:p>
+            <a:pPr>
+              <a:spcAft>
+                <a:spcPts val="400"/>
+              </a:spcAft>
+            </a:pPr>
+            <a:r>
+              <a:rPr sz="1400" b="0" i="0">
+                <a:solidFill>
+                  <a:srgbClr val="FFFFFF"/>
+                </a:solidFill>
+                <a:latin typeface="Calibri"/>
+              </a:rPr>
+              <a:t>Se adopta &lt;IaaS|PaaS|SaaS&gt; como modelo dominante porque &lt;criterio&gt;.</a:t>
+            </a:r>
+          </a:p>
+          <a:p>
+            <a:pPr>
+              <a:spcAft>
+                <a:spcPts val="400"/>
+              </a:spcAft>
+            </a:pPr>
+            <a:r>
+              <a:rPr sz="1400" b="0" i="0">
+                <a:solidFill>
+                  <a:srgbClr val="FFFFFF"/>
+                </a:solidFill>
+                <a:latin typeface="Calibri"/>
+              </a:rPr>
+              <a:t/>
+            </a:r>
+          </a:p>
+          <a:p>
+            <a:pPr>
+              <a:spcAft>
+                <a:spcPts val="400"/>
+              </a:spcAft>
+            </a:pPr>
+            <a:r>
+              <a:rPr sz="1400" b="0" i="0">
+                <a:solidFill>
+                  <a:srgbClr val="FFFFFF"/>
+                </a:solidFill>
+                <a:latin typeface="Calibri"/>
+              </a:rPr>
+              <a:t>## 5. Justificacion contra los atributos de calidad</a:t>
+            </a:r>
+          </a:p>
+          <a:p>
+            <a:pPr>
+              <a:spcAft>
+                <a:spcPts val="400"/>
+              </a:spcAft>
+            </a:pPr>
+            <a:r>
+              <a:rPr sz="1400" b="0" i="0">
+                <a:solidFill>
+                  <a:srgbClr val="FFFFFF"/>
+                </a:solidFill>
+                <a:latin typeface="Calibri"/>
+              </a:rPr>
+              <a:t>&lt;el atributo de la Clase 1 que esta decision favorece, y el que sacrifica&gt;</a:t>
+            </a:r>
+          </a:p>
+          <a:p>
+            <a:pPr>
+              <a:spcAft>
+                <a:spcPts val="400"/>
+              </a:spcAft>
+            </a:pPr>
+            <a:r>
+              <a:rPr sz="1400" b="0" i="0">
+                <a:solidFill>
+                  <a:srgbClr val="FFFFFF"/>
+                </a:solidFill>
+                <a:latin typeface="Calibri"/>
+              </a:rPr>
+              <a:t/>
+            </a:r>
+          </a:p>
+          <a:p>
+            <a:pPr>
+              <a:spcAft>
+                <a:spcPts val="400"/>
+              </a:spcAft>
+            </a:pPr>
+            <a:r>
+              <a:rPr sz="1400" b="0" i="0">
+                <a:solidFill>
+                  <a:srgbClr val="FFFFFF"/>
+                </a:solidFill>
+                <a:latin typeface="Calibri"/>
+              </a:rPr>
+              <a:t>## 6. Consecuencias</a:t>
+            </a:r>
+          </a:p>
+          <a:p>
+            <a:pPr>
+              <a:spcAft>
+                <a:spcPts val="400"/>
+              </a:spcAft>
+            </a:pPr>
+            <a:r>
+              <a:rPr sz="1400" b="0" i="0">
+                <a:solidFill>
+                  <a:srgbClr val="FFFFFF"/>
+                </a:solidFill>
+                <a:latin typeface="Calibri"/>
+              </a:rPr>
+              <a:t>Positivas: &lt;...&gt;   Negativas: &lt;...&gt;   A revisar si: &lt;condicion&gt;</a:t>
+            </a:r>
+          </a:p>
+        </p:txBody>
+      </p:sp>
+      <p:sp>
+        <p:nvSpPr>
+          <p:cNvPr id="10" name="TextBox 9"/>
           <p:cNvSpPr txBox="1"/>
           <p:nvPr/>
         </p:nvSpPr>
@@ -6799,7 +7204,7 @@
         <p:spPr>
           <a:xfrm>
             <a:off x="0" y="0"/>
-            <a:ext cx="12191695" cy="960120"/>
+            <a:ext cx="12191695" cy="1170432"/>
           </a:xfrm>
           <a:prstGeom prst="rect">
             <a:avLst/>
@@ -6841,7 +7246,7 @@
         </p:nvSpPr>
         <p:spPr>
           <a:xfrm>
-            <a:off x="0" y="960120"/>
+            <a:off x="0" y="1170432"/>
             <a:ext cx="12191695" cy="41148"/>
           </a:xfrm>
           <a:prstGeom prst="rect">
@@ -6885,7 +7290,7 @@
         <p:spPr>
           <a:xfrm>
             <a:off x="457200" y="164592"/>
-            <a:ext cx="11277295" cy="502920"/>
+            <a:ext cx="11277295" cy="384048"/>
           </a:xfrm>
           <a:prstGeom prst="rect">
             <a:avLst/>
@@ -6905,7 +7310,7 @@
                 </a:solidFill>
                 <a:latin typeface="Calibri"/>
               </a:rPr>
-              <a:t>El ADR-001: seis secciones rotuladas y una sola decision (3/3)</a:t>
+              <a:t>Quién administra cada capa — IaaS vs PaaS vs SaaS</a:t>
             </a:r>
           </a:p>
         </p:txBody>
@@ -6918,8 +7323,8 @@
         </p:nvSpPr>
         <p:spPr>
           <a:xfrm>
-            <a:off x="457200" y="1170432"/>
-            <a:ext cx="11277295" cy="5230368"/>
+            <a:off x="457200" y="566928"/>
+            <a:ext cx="11277295" cy="411480"/>
           </a:xfrm>
           <a:prstGeom prst="rect">
             <a:avLst/>
@@ -6932,58 +7337,906 @@
           </a:bodyPr>
           <a:lstStyle/>
           <a:p>
-            <a:pPr>
-              <a:spcAft>
-                <a:spcPts val="800"/>
-              </a:spcAft>
-            </a:pPr>
-            <a:r>
-              <a:rPr sz="2000" b="0" i="0">
-                <a:solidFill>
-                  <a:srgbClr val="333333"/>
-                </a:solidFill>
-                <a:latin typeface="Calibri"/>
-              </a:rPr>
-              <a:t>–   Y SaaS de agendamiento ya existente, descartada porque el proyecto perderia su objeto, ya que no habria arquitectura que disenar sino solo configuracion.</a:t>
-            </a:r>
-          </a:p>
-          <a:p>
-            <a:pPr>
-              <a:spcAft>
-                <a:spcPts val="800"/>
-              </a:spcAft>
-            </a:pPr>
-            <a:r>
-              <a:rPr sz="2000" b="0" i="0">
-                <a:solidFill>
-                  <a:srgbClr val="333333"/>
-                </a:solidFill>
-                <a:latin typeface="Calibri"/>
-              </a:rPr>
-              <a:t>–   Y en CONSECUENCIAS, que es la seccion que los estudiantes dejan a medias, deben aparecer tambien las malas: se acepta un arranque en frio de varios segundos tras inactividad</a:t>
-            </a:r>
-          </a:p>
-          <a:p>
-            <a:pPr>
-              <a:spcAft>
-                <a:spcPts val="800"/>
-              </a:spcAft>
-            </a:pPr>
-            <a:r>
-              <a:rPr sz="2000" b="0" i="0">
-                <a:solidFill>
-                  <a:srgbClr val="333333"/>
-                </a:solidFill>
-                <a:latin typeface="Calibri"/>
-              </a:rPr>
-              <a:t>–   Se acepta no poder afinar el sistema operativo y se acepta un amarre medio al proveedor, mitigado con contenedores.</a:t>
-            </a:r>
-          </a:p>
-        </p:txBody>
-      </p:sp>
-      <p:sp>
-        <p:nvSpPr>
-          <p:cNvPr id="6" name="TextBox 5"/>
+            <a:r>
+              <a:rPr sz="1400" b="0" i="0">
+                <a:solidFill>
+                  <a:srgbClr val="B8D8EE"/>
+                </a:solidFill>
+                <a:latin typeface="Calibri"/>
+              </a:rPr>
+              <a:t>Misma aplicación, distinto reparto de responsabilidad entre usted y el proveedor</a:t>
+            </a:r>
+          </a:p>
+        </p:txBody>
+      </p:sp>
+      <p:sp>
+        <p:nvSpPr>
+          <p:cNvPr id="6" name="Rounded Rectangle 5"/>
+          <p:cNvSpPr/>
+          <p:nvPr/>
+        </p:nvSpPr>
+        <p:spPr>
+          <a:xfrm>
+            <a:off x="548640" y="1325880"/>
+            <a:ext cx="3291840" cy="685800"/>
+          </a:xfrm>
+          <a:prstGeom prst="roundRect">
+            <a:avLst>
+              <a:gd name="adj" fmla="val 12000"/>
+            </a:avLst>
+          </a:prstGeom>
+          <a:solidFill>
+            <a:srgbClr val="095292"/>
+          </a:solidFill>
+          <a:ln>
+            <a:noFill/>
+          </a:ln>
+        </p:spPr>
+        <p:style>
+          <a:lnRef idx="1">
+            <a:schemeClr val="accent1"/>
+          </a:lnRef>
+          <a:fillRef idx="3">
+            <a:schemeClr val="accent1"/>
+          </a:fillRef>
+          <a:effectRef idx="2">
+            <a:schemeClr val="accent1"/>
+          </a:effectRef>
+          <a:fontRef idx="minor">
+            <a:schemeClr val="lt1"/>
+          </a:fontRef>
+        </p:style>
+        <p:txBody>
+          <a:bodyPr rtlCol="0" anchor="ctr" wrap="square"/>
+          <a:lstStyle/>
+          <a:p>
+            <a:pPr algn="ctr"/>
+            <a:r>
+              <a:rPr sz="1200" b="1" i="0">
+                <a:solidFill>
+                  <a:srgbClr val="FFFFFF"/>
+                </a:solidFill>
+                <a:latin typeface="Calibri"/>
+              </a:rPr>
+              <a:t>IaaS
+(DigitalOcean, AWS EC2)</a:t>
+            </a:r>
+          </a:p>
+        </p:txBody>
+      </p:sp>
+      <p:sp>
+        <p:nvSpPr>
+          <p:cNvPr id="7" name="Rounded Rectangle 6"/>
+          <p:cNvSpPr/>
+          <p:nvPr/>
+        </p:nvSpPr>
+        <p:spPr>
+          <a:xfrm>
+            <a:off x="4160520" y="1325880"/>
+            <a:ext cx="3291840" cy="685800"/>
+          </a:xfrm>
+          <a:prstGeom prst="roundRect">
+            <a:avLst>
+              <a:gd name="adj" fmla="val 12000"/>
+            </a:avLst>
+          </a:prstGeom>
+          <a:solidFill>
+            <a:srgbClr val="095292"/>
+          </a:solidFill>
+          <a:ln>
+            <a:noFill/>
+          </a:ln>
+        </p:spPr>
+        <p:style>
+          <a:lnRef idx="1">
+            <a:schemeClr val="accent1"/>
+          </a:lnRef>
+          <a:fillRef idx="3">
+            <a:schemeClr val="accent1"/>
+          </a:fillRef>
+          <a:effectRef idx="2">
+            <a:schemeClr val="accent1"/>
+          </a:effectRef>
+          <a:fontRef idx="minor">
+            <a:schemeClr val="lt1"/>
+          </a:fontRef>
+        </p:style>
+        <p:txBody>
+          <a:bodyPr rtlCol="0" anchor="ctr" wrap="square"/>
+          <a:lstStyle/>
+          <a:p>
+            <a:pPr algn="ctr"/>
+            <a:r>
+              <a:rPr sz="1200" b="1" i="0">
+                <a:solidFill>
+                  <a:srgbClr val="FFFFFF"/>
+                </a:solidFill>
+                <a:latin typeface="Calibri"/>
+              </a:rPr>
+              <a:t>PaaS
+(Render, Railway, Heroku)</a:t>
+            </a:r>
+          </a:p>
+        </p:txBody>
+      </p:sp>
+      <p:sp>
+        <p:nvSpPr>
+          <p:cNvPr id="8" name="Rounded Rectangle 7"/>
+          <p:cNvSpPr/>
+          <p:nvPr/>
+        </p:nvSpPr>
+        <p:spPr>
+          <a:xfrm>
+            <a:off x="7772400" y="1325880"/>
+            <a:ext cx="3291840" cy="685800"/>
+          </a:xfrm>
+          <a:prstGeom prst="roundRect">
+            <a:avLst>
+              <a:gd name="adj" fmla="val 12000"/>
+            </a:avLst>
+          </a:prstGeom>
+          <a:solidFill>
+            <a:srgbClr val="095292"/>
+          </a:solidFill>
+          <a:ln>
+            <a:noFill/>
+          </a:ln>
+        </p:spPr>
+        <p:style>
+          <a:lnRef idx="1">
+            <a:schemeClr val="accent1"/>
+          </a:lnRef>
+          <a:fillRef idx="3">
+            <a:schemeClr val="accent1"/>
+          </a:fillRef>
+          <a:effectRef idx="2">
+            <a:schemeClr val="accent1"/>
+          </a:effectRef>
+          <a:fontRef idx="minor">
+            <a:schemeClr val="lt1"/>
+          </a:fontRef>
+        </p:style>
+        <p:txBody>
+          <a:bodyPr rtlCol="0" anchor="ctr" wrap="square"/>
+          <a:lstStyle/>
+          <a:p>
+            <a:pPr algn="ctr"/>
+            <a:r>
+              <a:rPr sz="1200" b="1" i="0">
+                <a:solidFill>
+                  <a:srgbClr val="FFFFFF"/>
+                </a:solidFill>
+                <a:latin typeface="Calibri"/>
+              </a:rPr>
+              <a:t>SaaS
+(Gmail, Notion, Slack)</a:t>
+            </a:r>
+          </a:p>
+        </p:txBody>
+      </p:sp>
+      <p:sp>
+        <p:nvSpPr>
+          <p:cNvPr id="9" name="Rounded Rectangle 8"/>
+          <p:cNvSpPr/>
+          <p:nvPr/>
+        </p:nvSpPr>
+        <p:spPr>
+          <a:xfrm>
+            <a:off x="548640" y="2103120"/>
+            <a:ext cx="3291840" cy="548640"/>
+          </a:xfrm>
+          <a:prstGeom prst="roundRect">
+            <a:avLst>
+              <a:gd name="adj" fmla="val 12000"/>
+            </a:avLst>
+          </a:prstGeom>
+          <a:solidFill>
+            <a:srgbClr val="FFD000"/>
+          </a:solidFill>
+          <a:ln>
+            <a:noFill/>
+          </a:ln>
+        </p:spPr>
+        <p:style>
+          <a:lnRef idx="1">
+            <a:schemeClr val="accent1"/>
+          </a:lnRef>
+          <a:fillRef idx="3">
+            <a:schemeClr val="accent1"/>
+          </a:fillRef>
+          <a:effectRef idx="2">
+            <a:schemeClr val="accent1"/>
+          </a:effectRef>
+          <a:fontRef idx="minor">
+            <a:schemeClr val="lt1"/>
+          </a:fontRef>
+        </p:style>
+        <p:txBody>
+          <a:bodyPr rtlCol="0" anchor="ctr" wrap="square"/>
+          <a:lstStyle/>
+          <a:p>
+            <a:pPr algn="ctr"/>
+            <a:r>
+              <a:rPr sz="1100" b="1" i="0">
+                <a:solidFill>
+                  <a:srgbClr val="095292"/>
+                </a:solidFill>
+                <a:latin typeface="Calibri"/>
+              </a:rPr>
+              <a:t>Aplicación y datos</a:t>
+            </a:r>
+          </a:p>
+        </p:txBody>
+      </p:sp>
+      <p:sp>
+        <p:nvSpPr>
+          <p:cNvPr id="10" name="Rounded Rectangle 9"/>
+          <p:cNvSpPr/>
+          <p:nvPr/>
+        </p:nvSpPr>
+        <p:spPr>
+          <a:xfrm>
+            <a:off x="548640" y="2743200"/>
+            <a:ext cx="3291840" cy="548640"/>
+          </a:xfrm>
+          <a:prstGeom prst="roundRect">
+            <a:avLst>
+              <a:gd name="adj" fmla="val 12000"/>
+            </a:avLst>
+          </a:prstGeom>
+          <a:solidFill>
+            <a:srgbClr val="FFD000"/>
+          </a:solidFill>
+          <a:ln>
+            <a:noFill/>
+          </a:ln>
+        </p:spPr>
+        <p:style>
+          <a:lnRef idx="1">
+            <a:schemeClr val="accent1"/>
+          </a:lnRef>
+          <a:fillRef idx="3">
+            <a:schemeClr val="accent1"/>
+          </a:fillRef>
+          <a:effectRef idx="2">
+            <a:schemeClr val="accent1"/>
+          </a:effectRef>
+          <a:fontRef idx="minor">
+            <a:schemeClr val="lt1"/>
+          </a:fontRef>
+        </p:style>
+        <p:txBody>
+          <a:bodyPr rtlCol="0" anchor="ctr" wrap="square"/>
+          <a:lstStyle/>
+          <a:p>
+            <a:pPr algn="ctr"/>
+            <a:r>
+              <a:rPr sz="1100" b="1" i="0">
+                <a:solidFill>
+                  <a:srgbClr val="095292"/>
+                </a:solidFill>
+                <a:latin typeface="Calibri"/>
+              </a:rPr>
+              <a:t>Runtime / middleware</a:t>
+            </a:r>
+          </a:p>
+        </p:txBody>
+      </p:sp>
+      <p:sp>
+        <p:nvSpPr>
+          <p:cNvPr id="11" name="Rounded Rectangle 10"/>
+          <p:cNvSpPr/>
+          <p:nvPr/>
+        </p:nvSpPr>
+        <p:spPr>
+          <a:xfrm>
+            <a:off x="548640" y="3383280"/>
+            <a:ext cx="3291840" cy="548640"/>
+          </a:xfrm>
+          <a:prstGeom prst="roundRect">
+            <a:avLst>
+              <a:gd name="adj" fmla="val 12000"/>
+            </a:avLst>
+          </a:prstGeom>
+          <a:solidFill>
+            <a:srgbClr val="FFD000"/>
+          </a:solidFill>
+          <a:ln>
+            <a:noFill/>
+          </a:ln>
+        </p:spPr>
+        <p:style>
+          <a:lnRef idx="1">
+            <a:schemeClr val="accent1"/>
+          </a:lnRef>
+          <a:fillRef idx="3">
+            <a:schemeClr val="accent1"/>
+          </a:fillRef>
+          <a:effectRef idx="2">
+            <a:schemeClr val="accent1"/>
+          </a:effectRef>
+          <a:fontRef idx="minor">
+            <a:schemeClr val="lt1"/>
+          </a:fontRef>
+        </p:style>
+        <p:txBody>
+          <a:bodyPr rtlCol="0" anchor="ctr" wrap="square"/>
+          <a:lstStyle/>
+          <a:p>
+            <a:pPr algn="ctr"/>
+            <a:r>
+              <a:rPr sz="1100" b="1" i="0">
+                <a:solidFill>
+                  <a:srgbClr val="095292"/>
+                </a:solidFill>
+                <a:latin typeface="Calibri"/>
+              </a:rPr>
+              <a:t>Sistema operativo</a:t>
+            </a:r>
+          </a:p>
+        </p:txBody>
+      </p:sp>
+      <p:sp>
+        <p:nvSpPr>
+          <p:cNvPr id="12" name="Rounded Rectangle 11"/>
+          <p:cNvSpPr/>
+          <p:nvPr/>
+        </p:nvSpPr>
+        <p:spPr>
+          <a:xfrm>
+            <a:off x="548640" y="4023360"/>
+            <a:ext cx="3291840" cy="548640"/>
+          </a:xfrm>
+          <a:prstGeom prst="roundRect">
+            <a:avLst>
+              <a:gd name="adj" fmla="val 12000"/>
+            </a:avLst>
+          </a:prstGeom>
+          <a:solidFill>
+            <a:srgbClr val="269CCB"/>
+          </a:solidFill>
+          <a:ln>
+            <a:noFill/>
+          </a:ln>
+        </p:spPr>
+        <p:style>
+          <a:lnRef idx="1">
+            <a:schemeClr val="accent1"/>
+          </a:lnRef>
+          <a:fillRef idx="3">
+            <a:schemeClr val="accent1"/>
+          </a:fillRef>
+          <a:effectRef idx="2">
+            <a:schemeClr val="accent1"/>
+          </a:effectRef>
+          <a:fontRef idx="minor">
+            <a:schemeClr val="lt1"/>
+          </a:fontRef>
+        </p:style>
+        <p:txBody>
+          <a:bodyPr rtlCol="0" anchor="ctr" wrap="square"/>
+          <a:lstStyle/>
+          <a:p>
+            <a:pPr algn="ctr"/>
+            <a:r>
+              <a:rPr sz="1050" b="1" i="0">
+                <a:solidFill>
+                  <a:srgbClr val="FFFFFF"/>
+                </a:solidFill>
+                <a:latin typeface="Calibri"/>
+              </a:rPr>
+              <a:t>Infraestructura
+(cómputo, red, disco)</a:t>
+            </a:r>
+          </a:p>
+        </p:txBody>
+      </p:sp>
+      <p:sp>
+        <p:nvSpPr>
+          <p:cNvPr id="13" name="Rounded Rectangle 12"/>
+          <p:cNvSpPr/>
+          <p:nvPr/>
+        </p:nvSpPr>
+        <p:spPr>
+          <a:xfrm>
+            <a:off x="4160520" y="2103120"/>
+            <a:ext cx="3291840" cy="548640"/>
+          </a:xfrm>
+          <a:prstGeom prst="roundRect">
+            <a:avLst>
+              <a:gd name="adj" fmla="val 12000"/>
+            </a:avLst>
+          </a:prstGeom>
+          <a:solidFill>
+            <a:srgbClr val="FFD000"/>
+          </a:solidFill>
+          <a:ln>
+            <a:noFill/>
+          </a:ln>
+        </p:spPr>
+        <p:style>
+          <a:lnRef idx="1">
+            <a:schemeClr val="accent1"/>
+          </a:lnRef>
+          <a:fillRef idx="3">
+            <a:schemeClr val="accent1"/>
+          </a:fillRef>
+          <a:effectRef idx="2">
+            <a:schemeClr val="accent1"/>
+          </a:effectRef>
+          <a:fontRef idx="minor">
+            <a:schemeClr val="lt1"/>
+          </a:fontRef>
+        </p:style>
+        <p:txBody>
+          <a:bodyPr rtlCol="0" anchor="ctr" wrap="square"/>
+          <a:lstStyle/>
+          <a:p>
+            <a:pPr algn="ctr"/>
+            <a:r>
+              <a:rPr sz="1100" b="1" i="0">
+                <a:solidFill>
+                  <a:srgbClr val="095292"/>
+                </a:solidFill>
+                <a:latin typeface="Calibri"/>
+              </a:rPr>
+              <a:t>Aplicación y datos</a:t>
+            </a:r>
+          </a:p>
+        </p:txBody>
+      </p:sp>
+      <p:sp>
+        <p:nvSpPr>
+          <p:cNvPr id="14" name="Rounded Rectangle 13"/>
+          <p:cNvSpPr/>
+          <p:nvPr/>
+        </p:nvSpPr>
+        <p:spPr>
+          <a:xfrm>
+            <a:off x="4160520" y="2743200"/>
+            <a:ext cx="3291840" cy="548640"/>
+          </a:xfrm>
+          <a:prstGeom prst="roundRect">
+            <a:avLst>
+              <a:gd name="adj" fmla="val 12000"/>
+            </a:avLst>
+          </a:prstGeom>
+          <a:solidFill>
+            <a:srgbClr val="269CCB"/>
+          </a:solidFill>
+          <a:ln>
+            <a:noFill/>
+          </a:ln>
+        </p:spPr>
+        <p:style>
+          <a:lnRef idx="1">
+            <a:schemeClr val="accent1"/>
+          </a:lnRef>
+          <a:fillRef idx="3">
+            <a:schemeClr val="accent1"/>
+          </a:fillRef>
+          <a:effectRef idx="2">
+            <a:schemeClr val="accent1"/>
+          </a:effectRef>
+          <a:fontRef idx="minor">
+            <a:schemeClr val="lt1"/>
+          </a:fontRef>
+        </p:style>
+        <p:txBody>
+          <a:bodyPr rtlCol="0" anchor="ctr" wrap="square"/>
+          <a:lstStyle/>
+          <a:p>
+            <a:pPr algn="ctr"/>
+            <a:r>
+              <a:rPr sz="1100" b="1" i="0">
+                <a:solidFill>
+                  <a:srgbClr val="FFFFFF"/>
+                </a:solidFill>
+                <a:latin typeface="Calibri"/>
+              </a:rPr>
+              <a:t>Runtime / middleware</a:t>
+            </a:r>
+          </a:p>
+        </p:txBody>
+      </p:sp>
+      <p:sp>
+        <p:nvSpPr>
+          <p:cNvPr id="15" name="Rounded Rectangle 14"/>
+          <p:cNvSpPr/>
+          <p:nvPr/>
+        </p:nvSpPr>
+        <p:spPr>
+          <a:xfrm>
+            <a:off x="4160520" y="3383280"/>
+            <a:ext cx="3291840" cy="548640"/>
+          </a:xfrm>
+          <a:prstGeom prst="roundRect">
+            <a:avLst>
+              <a:gd name="adj" fmla="val 12000"/>
+            </a:avLst>
+          </a:prstGeom>
+          <a:solidFill>
+            <a:srgbClr val="269CCB"/>
+          </a:solidFill>
+          <a:ln>
+            <a:noFill/>
+          </a:ln>
+        </p:spPr>
+        <p:style>
+          <a:lnRef idx="1">
+            <a:schemeClr val="accent1"/>
+          </a:lnRef>
+          <a:fillRef idx="3">
+            <a:schemeClr val="accent1"/>
+          </a:fillRef>
+          <a:effectRef idx="2">
+            <a:schemeClr val="accent1"/>
+          </a:effectRef>
+          <a:fontRef idx="minor">
+            <a:schemeClr val="lt1"/>
+          </a:fontRef>
+        </p:style>
+        <p:txBody>
+          <a:bodyPr rtlCol="0" anchor="ctr" wrap="square"/>
+          <a:lstStyle/>
+          <a:p>
+            <a:pPr algn="ctr"/>
+            <a:r>
+              <a:rPr sz="1100" b="1" i="0">
+                <a:solidFill>
+                  <a:srgbClr val="FFFFFF"/>
+                </a:solidFill>
+                <a:latin typeface="Calibri"/>
+              </a:rPr>
+              <a:t>Sistema operativo</a:t>
+            </a:r>
+          </a:p>
+        </p:txBody>
+      </p:sp>
+      <p:sp>
+        <p:nvSpPr>
+          <p:cNvPr id="16" name="Rounded Rectangle 15"/>
+          <p:cNvSpPr/>
+          <p:nvPr/>
+        </p:nvSpPr>
+        <p:spPr>
+          <a:xfrm>
+            <a:off x="4160520" y="4023360"/>
+            <a:ext cx="3291840" cy="548640"/>
+          </a:xfrm>
+          <a:prstGeom prst="roundRect">
+            <a:avLst>
+              <a:gd name="adj" fmla="val 12000"/>
+            </a:avLst>
+          </a:prstGeom>
+          <a:solidFill>
+            <a:srgbClr val="269CCB"/>
+          </a:solidFill>
+          <a:ln>
+            <a:noFill/>
+          </a:ln>
+        </p:spPr>
+        <p:style>
+          <a:lnRef idx="1">
+            <a:schemeClr val="accent1"/>
+          </a:lnRef>
+          <a:fillRef idx="3">
+            <a:schemeClr val="accent1"/>
+          </a:fillRef>
+          <a:effectRef idx="2">
+            <a:schemeClr val="accent1"/>
+          </a:effectRef>
+          <a:fontRef idx="minor">
+            <a:schemeClr val="lt1"/>
+          </a:fontRef>
+        </p:style>
+        <p:txBody>
+          <a:bodyPr rtlCol="0" anchor="ctr" wrap="square"/>
+          <a:lstStyle/>
+          <a:p>
+            <a:pPr algn="ctr"/>
+            <a:r>
+              <a:rPr sz="1050" b="1" i="0">
+                <a:solidFill>
+                  <a:srgbClr val="FFFFFF"/>
+                </a:solidFill>
+                <a:latin typeface="Calibri"/>
+              </a:rPr>
+              <a:t>Infraestructura
+(cómputo, red, disco)</a:t>
+            </a:r>
+          </a:p>
+        </p:txBody>
+      </p:sp>
+      <p:sp>
+        <p:nvSpPr>
+          <p:cNvPr id="17" name="Rounded Rectangle 16"/>
+          <p:cNvSpPr/>
+          <p:nvPr/>
+        </p:nvSpPr>
+        <p:spPr>
+          <a:xfrm>
+            <a:off x="7772400" y="2103120"/>
+            <a:ext cx="3291840" cy="548640"/>
+          </a:xfrm>
+          <a:prstGeom prst="roundRect">
+            <a:avLst>
+              <a:gd name="adj" fmla="val 12000"/>
+            </a:avLst>
+          </a:prstGeom>
+          <a:solidFill>
+            <a:srgbClr val="FFD000"/>
+          </a:solidFill>
+          <a:ln>
+            <a:noFill/>
+          </a:ln>
+        </p:spPr>
+        <p:style>
+          <a:lnRef idx="1">
+            <a:schemeClr val="accent1"/>
+          </a:lnRef>
+          <a:fillRef idx="3">
+            <a:schemeClr val="accent1"/>
+          </a:fillRef>
+          <a:effectRef idx="2">
+            <a:schemeClr val="accent1"/>
+          </a:effectRef>
+          <a:fontRef idx="minor">
+            <a:schemeClr val="lt1"/>
+          </a:fontRef>
+        </p:style>
+        <p:txBody>
+          <a:bodyPr rtlCol="0" anchor="ctr" wrap="square"/>
+          <a:lstStyle/>
+          <a:p>
+            <a:pPr algn="ctr"/>
+            <a:r>
+              <a:rPr sz="1050" b="1" i="0">
+                <a:solidFill>
+                  <a:srgbClr val="095292"/>
+                </a:solidFill>
+                <a:latin typeface="Calibri"/>
+              </a:rPr>
+              <a:t>Aplicación y datos
+(usted solo configura)</a:t>
+            </a:r>
+          </a:p>
+        </p:txBody>
+      </p:sp>
+      <p:sp>
+        <p:nvSpPr>
+          <p:cNvPr id="18" name="Rounded Rectangle 17"/>
+          <p:cNvSpPr/>
+          <p:nvPr/>
+        </p:nvSpPr>
+        <p:spPr>
+          <a:xfrm>
+            <a:off x="7772400" y="2743200"/>
+            <a:ext cx="3291840" cy="548640"/>
+          </a:xfrm>
+          <a:prstGeom prst="roundRect">
+            <a:avLst>
+              <a:gd name="adj" fmla="val 12000"/>
+            </a:avLst>
+          </a:prstGeom>
+          <a:solidFill>
+            <a:srgbClr val="269CCB"/>
+          </a:solidFill>
+          <a:ln>
+            <a:noFill/>
+          </a:ln>
+        </p:spPr>
+        <p:style>
+          <a:lnRef idx="1">
+            <a:schemeClr val="accent1"/>
+          </a:lnRef>
+          <a:fillRef idx="3">
+            <a:schemeClr val="accent1"/>
+          </a:fillRef>
+          <a:effectRef idx="2">
+            <a:schemeClr val="accent1"/>
+          </a:effectRef>
+          <a:fontRef idx="minor">
+            <a:schemeClr val="lt1"/>
+          </a:fontRef>
+        </p:style>
+        <p:txBody>
+          <a:bodyPr rtlCol="0" anchor="ctr" wrap="square"/>
+          <a:lstStyle/>
+          <a:p>
+            <a:pPr algn="ctr"/>
+            <a:r>
+              <a:rPr sz="1100" b="1" i="0">
+                <a:solidFill>
+                  <a:srgbClr val="FFFFFF"/>
+                </a:solidFill>
+                <a:latin typeface="Calibri"/>
+              </a:rPr>
+              <a:t>Runtime / middleware</a:t>
+            </a:r>
+          </a:p>
+        </p:txBody>
+      </p:sp>
+      <p:sp>
+        <p:nvSpPr>
+          <p:cNvPr id="19" name="Rounded Rectangle 18"/>
+          <p:cNvSpPr/>
+          <p:nvPr/>
+        </p:nvSpPr>
+        <p:spPr>
+          <a:xfrm>
+            <a:off x="7772400" y="3383280"/>
+            <a:ext cx="3291840" cy="548640"/>
+          </a:xfrm>
+          <a:prstGeom prst="roundRect">
+            <a:avLst>
+              <a:gd name="adj" fmla="val 12000"/>
+            </a:avLst>
+          </a:prstGeom>
+          <a:solidFill>
+            <a:srgbClr val="269CCB"/>
+          </a:solidFill>
+          <a:ln>
+            <a:noFill/>
+          </a:ln>
+        </p:spPr>
+        <p:style>
+          <a:lnRef idx="1">
+            <a:schemeClr val="accent1"/>
+          </a:lnRef>
+          <a:fillRef idx="3">
+            <a:schemeClr val="accent1"/>
+          </a:fillRef>
+          <a:effectRef idx="2">
+            <a:schemeClr val="accent1"/>
+          </a:effectRef>
+          <a:fontRef idx="minor">
+            <a:schemeClr val="lt1"/>
+          </a:fontRef>
+        </p:style>
+        <p:txBody>
+          <a:bodyPr rtlCol="0" anchor="ctr" wrap="square"/>
+          <a:lstStyle/>
+          <a:p>
+            <a:pPr algn="ctr"/>
+            <a:r>
+              <a:rPr sz="1100" b="1" i="0">
+                <a:solidFill>
+                  <a:srgbClr val="FFFFFF"/>
+                </a:solidFill>
+                <a:latin typeface="Calibri"/>
+              </a:rPr>
+              <a:t>Sistema operativo</a:t>
+            </a:r>
+          </a:p>
+        </p:txBody>
+      </p:sp>
+      <p:sp>
+        <p:nvSpPr>
+          <p:cNvPr id="20" name="Rounded Rectangle 19"/>
+          <p:cNvSpPr/>
+          <p:nvPr/>
+        </p:nvSpPr>
+        <p:spPr>
+          <a:xfrm>
+            <a:off x="7772400" y="4023360"/>
+            <a:ext cx="3291840" cy="548640"/>
+          </a:xfrm>
+          <a:prstGeom prst="roundRect">
+            <a:avLst>
+              <a:gd name="adj" fmla="val 12000"/>
+            </a:avLst>
+          </a:prstGeom>
+          <a:solidFill>
+            <a:srgbClr val="269CCB"/>
+          </a:solidFill>
+          <a:ln>
+            <a:noFill/>
+          </a:ln>
+        </p:spPr>
+        <p:style>
+          <a:lnRef idx="1">
+            <a:schemeClr val="accent1"/>
+          </a:lnRef>
+          <a:fillRef idx="3">
+            <a:schemeClr val="accent1"/>
+          </a:fillRef>
+          <a:effectRef idx="2">
+            <a:schemeClr val="accent1"/>
+          </a:effectRef>
+          <a:fontRef idx="minor">
+            <a:schemeClr val="lt1"/>
+          </a:fontRef>
+        </p:style>
+        <p:txBody>
+          <a:bodyPr rtlCol="0" anchor="ctr" wrap="square"/>
+          <a:lstStyle/>
+          <a:p>
+            <a:pPr algn="ctr"/>
+            <a:r>
+              <a:rPr sz="1050" b="1" i="0">
+                <a:solidFill>
+                  <a:srgbClr val="FFFFFF"/>
+                </a:solidFill>
+                <a:latin typeface="Calibri"/>
+              </a:rPr>
+              <a:t>Infraestructura
+(cómputo, red, disco)</a:t>
+            </a:r>
+          </a:p>
+        </p:txBody>
+      </p:sp>
+      <p:sp>
+        <p:nvSpPr>
+          <p:cNvPr id="21" name="TextBox 20"/>
+          <p:cNvSpPr txBox="1"/>
+          <p:nvPr/>
+        </p:nvSpPr>
+        <p:spPr>
+          <a:xfrm>
+            <a:off x="457200" y="5897880"/>
+            <a:ext cx="11277295" cy="320040"/>
+          </a:xfrm>
+          <a:prstGeom prst="rect">
+            <a:avLst/>
+          </a:prstGeom>
+          <a:noFill/>
+        </p:spPr>
+        <p:txBody>
+          <a:bodyPr wrap="square">
+            <a:spAutoFit/>
+          </a:bodyPr>
+          <a:lstStyle/>
+          <a:p>
+            <a:r>
+              <a:rPr sz="1050" b="0" i="1">
+                <a:solidFill>
+                  <a:srgbClr val="666666"/>
+                </a:solidFill>
+                <a:latin typeface="Calibri"/>
+              </a:rPr>
+              <a:t>Amarillo = lo administra usted · Celeste = lo administra el proveedor</a:t>
+            </a:r>
+          </a:p>
+        </p:txBody>
+      </p:sp>
+      <p:sp>
+        <p:nvSpPr>
+          <p:cNvPr id="22" name="TextBox 21"/>
+          <p:cNvSpPr txBox="1"/>
+          <p:nvPr/>
+        </p:nvSpPr>
+        <p:spPr>
+          <a:xfrm>
+            <a:off x="457200" y="6263640"/>
+            <a:ext cx="11277295" cy="411480"/>
+          </a:xfrm>
+          <a:prstGeom prst="rect">
+            <a:avLst/>
+          </a:prstGeom>
+          <a:noFill/>
+        </p:spPr>
+        <p:txBody>
+          <a:bodyPr wrap="square">
+            <a:spAutoFit/>
+          </a:bodyPr>
+          <a:lstStyle/>
+          <a:p>
+            <a:r>
+              <a:rPr sz="1100" b="0" i="1">
+                <a:solidFill>
+                  <a:srgbClr val="666666"/>
+                </a:solidFill>
+                <a:latin typeface="Calibri"/>
+              </a:rPr>
+              <a:t>Suba en la pila y sube el control, pero también lo que tiene que operar usted: parches, escalado, disponibilidad. Para el MVP de la app, PaaS es el punto medio: usted solo responde por su aplicación y sus datos.</a:t>
+            </a:r>
+          </a:p>
+        </p:txBody>
+      </p:sp>
+      <p:sp>
+        <p:nvSpPr>
+          <p:cNvPr id="23" name="TextBox 22"/>
           <p:cNvSpPr txBox="1"/>
           <p:nvPr/>
         </p:nvSpPr>
@@ -7273,7 +8526,7 @@
                 </a:solidFill>
                 <a:latin typeface="Calibri"/>
               </a:rPr>
-              <a:t> Ejemplos resueltos y demo del docente sobre el tema.</a:t>
+              <a:t> Ejemplos resueltos y demostración sobre el tema.</a:t>
             </a:r>
           </a:p>
           <a:p>
@@ -7504,21 +8757,141 @@
                 </a:solidFill>
                 <a:latin typeface="Calibri"/>
               </a:rPr>
-              <a:t>La pila dibujada: nombres reales para IaaS, PaaS y SaaS</a:t>
-            </a:r>
-          </a:p>
-        </p:txBody>
-      </p:sp>
-      <p:sp>
-        <p:nvSpPr>
-          <p:cNvPr id="5" name="TextBox 4"/>
+              <a:t>ADR-001 — las 6 secciones caben en una pagina</a:t>
+            </a:r>
+          </a:p>
+        </p:txBody>
+      </p:sp>
+      <p:sp>
+        <p:nvSpPr>
+          <p:cNvPr id="5" name="Rounded Rectangle 4"/>
+          <p:cNvSpPr/>
+          <p:nvPr/>
+        </p:nvSpPr>
+        <p:spPr>
+          <a:xfrm>
+            <a:off x="457200" y="1261872"/>
+            <a:ext cx="11277295" cy="4773168"/>
+          </a:xfrm>
+          <a:prstGeom prst="roundRect">
+            <a:avLst>
+              <a:gd name="adj" fmla="val 12000"/>
+            </a:avLst>
+          </a:prstGeom>
+          <a:solidFill>
+            <a:srgbClr val="1E2A38"/>
+          </a:solidFill>
+          <a:ln>
+            <a:noFill/>
+          </a:ln>
+        </p:spPr>
+        <p:style>
+          <a:lnRef idx="1">
+            <a:schemeClr val="accent1"/>
+          </a:lnRef>
+          <a:fillRef idx="3">
+            <a:schemeClr val="accent1"/>
+          </a:fillRef>
+          <a:effectRef idx="2">
+            <a:schemeClr val="accent1"/>
+          </a:effectRef>
+          <a:fontRef idx="minor">
+            <a:schemeClr val="lt1"/>
+          </a:fontRef>
+        </p:style>
+        <p:txBody>
+          <a:bodyPr rtlCol="0" anchor="ctr"/>
+          <a:lstStyle/>
+          <a:p>
+            <a:pPr algn="ctr"/>
+          </a:p>
+        </p:txBody>
+      </p:sp>
+      <p:sp>
+        <p:nvSpPr>
+          <p:cNvPr id="6" name="Rectangle 5"/>
+          <p:cNvSpPr/>
+          <p:nvPr/>
+        </p:nvSpPr>
+        <p:spPr>
+          <a:xfrm>
+            <a:off x="457200" y="1261872"/>
+            <a:ext cx="11277295" cy="320040"/>
+          </a:xfrm>
+          <a:prstGeom prst="rect">
+            <a:avLst/>
+          </a:prstGeom>
+          <a:solidFill>
+            <a:srgbClr val="095292"/>
+          </a:solidFill>
+          <a:ln>
+            <a:noFill/>
+          </a:ln>
+        </p:spPr>
+        <p:style>
+          <a:lnRef idx="1">
+            <a:schemeClr val="accent1"/>
+          </a:lnRef>
+          <a:fillRef idx="3">
+            <a:schemeClr val="accent1"/>
+          </a:fillRef>
+          <a:effectRef idx="2">
+            <a:schemeClr val="accent1"/>
+          </a:effectRef>
+          <a:fontRef idx="minor">
+            <a:schemeClr val="lt1"/>
+          </a:fontRef>
+        </p:style>
+        <p:txBody>
+          <a:bodyPr rtlCol="0" anchor="ctr"/>
+          <a:lstStyle/>
+          <a:p>
+            <a:pPr algn="ctr"/>
+          </a:p>
+        </p:txBody>
+      </p:sp>
+      <p:sp>
+        <p:nvSpPr>
+          <p:cNvPr id="7" name="TextBox 6"/>
           <p:cNvSpPr txBox="1"/>
           <p:nvPr/>
         </p:nvSpPr>
         <p:spPr>
           <a:xfrm>
-            <a:off x="457200" y="1170432"/>
-            <a:ext cx="11277295" cy="5230368"/>
+            <a:off x="685800" y="1307592"/>
+            <a:ext cx="10820095" cy="256032"/>
+          </a:xfrm>
+          <a:prstGeom prst="rect">
+            <a:avLst/>
+          </a:prstGeom>
+          <a:noFill/>
+        </p:spPr>
+        <p:txBody>
+          <a:bodyPr wrap="square" anchor="ctr"/>
+          <a:lstStyle/>
+          <a:p>
+            <a:r>
+              <a:rPr sz="1000" b="1" i="0">
+                <a:solidFill>
+                  <a:srgbClr val="269CCB"/>
+                </a:solidFill>
+                <a:latin typeface="Calibri"/>
+              </a:rPr>
+              <a:t>● ● ●</a:t>
+            </a:r>
+          </a:p>
+        </p:txBody>
+      </p:sp>
+      <p:sp>
+        <p:nvSpPr>
+          <p:cNvPr id="8" name="TextBox 7"/>
+          <p:cNvSpPr txBox="1"/>
+          <p:nvPr/>
+        </p:nvSpPr>
+        <p:spPr>
+          <a:xfrm>
+            <a:off x="777240" y="1719072"/>
+            <a:ext cx="10637215" cy="4133087"/>
           </a:xfrm>
           <a:prstGeom prst="rect">
             <a:avLst/>
@@ -7533,72 +8906,283 @@
           <a:p>
             <a:pPr>
               <a:spcAft>
-                <a:spcPts val="800"/>
+                <a:spcPts val="400"/>
               </a:spcAft>
             </a:pPr>
             <a:r>
-              <a:rPr sz="2000" b="0" i="0">
-                <a:solidFill>
-                  <a:srgbClr val="333333"/>
-                </a:solidFill>
-                <a:latin typeface="Calibri"/>
-              </a:rPr>
-              <a:t>–   Proyecte inmediatamente despues de fijar la plantilla del ADR: es el mismo corte de responsabilidades que se acaba de explicar en prosa, ahora dibujado y con un producto reconocible en cada columna.</a:t>
+              <a:rPr sz="1400" b="0" i="0">
+                <a:solidFill>
+                  <a:srgbClr val="FFFFFF"/>
+                </a:solidFill>
+                <a:latin typeface="Calibri"/>
+              </a:rPr>
+              <a:t>## 1. Titulo     ADR-001 Modelo de servicio dominante de la app</a:t>
             </a:r>
           </a:p>
           <a:p>
             <a:pPr>
               <a:spcAft>
-                <a:spcPts val="800"/>
+                <a:spcPts val="400"/>
               </a:spcAft>
             </a:pPr>
             <a:r>
-              <a:rPr sz="2000" b="0" i="0">
-                <a:solidFill>
-                  <a:srgbClr val="333333"/>
-                </a:solidFill>
-                <a:latin typeface="Calibri"/>
-              </a:rPr>
-              <a:t>–   Recorrala de abajo hacia arriba y no al reves: senale primero que las tres columnas comparten la misma base (infraestructura), y que lo unico que cambia es hasta donde sube el color amarillo.</a:t>
+              <a:rPr sz="1400" b="0" i="0">
+                <a:solidFill>
+                  <a:srgbClr val="FFFFFF"/>
+                </a:solidFill>
+                <a:latin typeface="Calibri"/>
+              </a:rPr>
+              <a:t>## 2. Estado     Aceptado — &lt;fecha de hoy&gt;</a:t>
             </a:r>
           </a:p>
           <a:p>
             <a:pPr>
               <a:spcAft>
-                <a:spcPts val="800"/>
+                <a:spcPts val="400"/>
               </a:spcAft>
             </a:pPr>
             <a:r>
-              <a:rPr sz="2000" b="0" i="0">
-                <a:solidFill>
-                  <a:srgbClr val="333333"/>
-                </a:solidFill>
-                <a:latin typeface="Calibri"/>
-              </a:rPr>
-              <a:t>–   Pregunte en voz alta, senalando la columna de PaaS: «por que la fila de Sistema operativo es celeste aqui y amarilla en IaaS?» La respuesta correcta es que el proveedor la absorbio</a:t>
+              <a:rPr sz="1400" b="0" i="0">
+                <a:solidFill>
+                  <a:srgbClr val="FFFFFF"/>
+                </a:solidFill>
+                <a:latin typeface="Calibri"/>
+              </a:rPr>
+              <a:t/>
             </a:r>
           </a:p>
           <a:p>
             <a:pPr>
               <a:spcAft>
-                <a:spcPts val="800"/>
+                <a:spcPts val="400"/>
               </a:spcAft>
             </a:pPr>
             <a:r>
-              <a:rPr sz="2000" b="0" i="0">
-                <a:solidFill>
-                  <a:srgbClr val="333333"/>
-                </a:solidFill>
-                <a:latin typeface="Calibri"/>
-              </a:rPr>
-              <a:t>–   No que desaparecio: es el error mas comun, creer que en PaaS el sistema operativo deja de existir en vez de que alguien mas lo administra.</a:t>
-            </a:r>
-          </a:p>
-        </p:txBody>
-      </p:sp>
-      <p:sp>
-        <p:nvSpPr>
-          <p:cNvPr id="6" name="TextBox 5"/>
+              <a:rPr sz="1400" b="0" i="0">
+                <a:solidFill>
+                  <a:srgbClr val="FFFFFF"/>
+                </a:solidFill>
+                <a:latin typeface="Calibri"/>
+              </a:rPr>
+              <a:t>## 3. Contexto                    &lt;- restricciones, no resumen del tema</a:t>
+            </a:r>
+          </a:p>
+          <a:p>
+            <a:pPr>
+              <a:spcAft>
+                <a:spcPts val="400"/>
+              </a:spcAft>
+            </a:pPr>
+            <a:r>
+              <a:rPr sz="1400" b="0" i="0">
+                <a:solidFill>
+                  <a:srgbClr val="FFFFFF"/>
+                </a:solidFill>
+                <a:latin typeface="Calibri"/>
+              </a:rPr>
+              <a:t>Lo sostengo yo solo, 12 semanas, sin presupuesto cloud ni tarjeta; demo viva el dia de la sustentacion.</a:t>
+            </a:r>
+          </a:p>
+          <a:p>
+            <a:pPr>
+              <a:spcAft>
+                <a:spcPts val="400"/>
+              </a:spcAft>
+            </a:pPr>
+            <a:r>
+              <a:rPr sz="1400" b="0" i="0">
+                <a:solidFill>
+                  <a:srgbClr val="FFFFFF"/>
+                </a:solidFill>
+                <a:latin typeface="Calibri"/>
+              </a:rPr>
+              <a:t/>
+            </a:r>
+          </a:p>
+          <a:p>
+            <a:pPr>
+              <a:spcAft>
+                <a:spcPts val="400"/>
+              </a:spcAft>
+            </a:pPr>
+            <a:r>
+              <a:rPr sz="1400" b="0" i="0">
+                <a:solidFill>
+                  <a:srgbClr val="FFFFFF"/>
+                </a:solidFill>
+                <a:latin typeface="Calibri"/>
+              </a:rPr>
+              <a:t>## 4. Decision                    &lt;- UNA frase, UN modelo dominante</a:t>
+            </a:r>
+          </a:p>
+          <a:p>
+            <a:pPr>
+              <a:spcAft>
+                <a:spcPts val="400"/>
+              </a:spcAft>
+            </a:pPr>
+            <a:r>
+              <a:rPr sz="1400" b="0" i="0">
+                <a:solidFill>
+                  <a:srgbClr val="FFFFFF"/>
+                </a:solidFill>
+                <a:latin typeface="Calibri"/>
+              </a:rPr>
+              <a:t>La aplicacion de la app se despliega sobre PaaS.</a:t>
+            </a:r>
+          </a:p>
+          <a:p>
+            <a:pPr>
+              <a:spcAft>
+                <a:spcPts val="400"/>
+              </a:spcAft>
+            </a:pPr>
+            <a:r>
+              <a:rPr sz="1400" b="0" i="0">
+                <a:solidFill>
+                  <a:srgbClr val="FFFFFF"/>
+                </a:solidFill>
+                <a:latin typeface="Calibri"/>
+              </a:rPr>
+              <a:t/>
+            </a:r>
+          </a:p>
+          <a:p>
+            <a:pPr>
+              <a:spcAft>
+                <a:spcPts val="400"/>
+              </a:spcAft>
+            </a:pPr>
+            <a:r>
+              <a:rPr sz="1400" b="0" i="0">
+                <a:solidFill>
+                  <a:srgbClr val="FFFFFF"/>
+                </a:solidFill>
+                <a:latin typeface="Calibri"/>
+              </a:rPr>
+              <a:t>## 5. Alternativas descartadas    &lt;- exactamente 2, con motivo del dominio</a:t>
+            </a:r>
+          </a:p>
+          <a:p>
+            <a:pPr>
+              <a:spcAft>
+                <a:spcPts val="400"/>
+              </a:spcAft>
+            </a:pPr>
+            <a:r>
+              <a:rPr sz="1400" b="0" i="0">
+                <a:solidFill>
+                  <a:srgbClr val="FFFFFF"/>
+                </a:solidFill>
+                <a:latin typeface="Calibri"/>
+              </a:rPr>
+              <a:t>- IaaS: control total, pero yo opero SO y parches -&gt; tiempo que no tengo.</a:t>
+            </a:r>
+          </a:p>
+          <a:p>
+            <a:pPr>
+              <a:spcAft>
+                <a:spcPts val="400"/>
+              </a:spcAft>
+            </a:pPr>
+            <a:r>
+              <a:rPr sz="1400" b="0" i="0">
+                <a:solidFill>
+                  <a:srgbClr val="FFFFFF"/>
+                </a:solidFill>
+                <a:latin typeface="Calibri"/>
+              </a:rPr>
+              <a:t>- SaaS como nucleo: no queda nada que arquitecturar; solo satelite (auth/email).</a:t>
+            </a:r>
+          </a:p>
+          <a:p>
+            <a:pPr>
+              <a:spcAft>
+                <a:spcPts val="400"/>
+              </a:spcAft>
+            </a:pPr>
+            <a:r>
+              <a:rPr sz="1400" b="0" i="0">
+                <a:solidFill>
+                  <a:srgbClr val="FFFFFF"/>
+                </a:solidFill>
+                <a:latin typeface="Calibri"/>
+              </a:rPr>
+              <a:t/>
+            </a:r>
+          </a:p>
+          <a:p>
+            <a:pPr>
+              <a:spcAft>
+                <a:spcPts val="400"/>
+              </a:spcAft>
+            </a:pPr>
+            <a:r>
+              <a:rPr sz="1400" b="0" i="0">
+                <a:solidFill>
+                  <a:srgbClr val="FFFFFF"/>
+                </a:solidFill>
+                <a:latin typeface="Calibri"/>
+              </a:rPr>
+              <a:t>## 6. Consecuencias               &lt;- 3 ejes, cada uno con + y -</a:t>
+            </a:r>
+          </a:p>
+          <a:p>
+            <a:pPr>
+              <a:spcAft>
+                <a:spcPts val="400"/>
+              </a:spcAft>
+            </a:pPr>
+            <a:r>
+              <a:rPr sz="1400" b="0" i="0">
+                <a:solidFill>
+                  <a:srgbClr val="FFFFFF"/>
+                </a:solidFill>
+                <a:latin typeface="Calibri"/>
+              </a:rPr>
+              <a:t>Operacion + / -        Costo + / -        Aprendizaje + / -</a:t>
+            </a:r>
+          </a:p>
+        </p:txBody>
+      </p:sp>
+      <p:sp>
+        <p:nvSpPr>
+          <p:cNvPr id="9" name="TextBox 8"/>
+          <p:cNvSpPr txBox="1"/>
+          <p:nvPr/>
+        </p:nvSpPr>
+        <p:spPr>
+          <a:xfrm>
+            <a:off x="457200" y="6080760"/>
+            <a:ext cx="11277295" cy="320040"/>
+          </a:xfrm>
+          <a:prstGeom prst="rect">
+            <a:avLst/>
+          </a:prstGeom>
+          <a:noFill/>
+        </p:spPr>
+        <p:txBody>
+          <a:bodyPr wrap="square">
+            <a:spAutoFit/>
+          </a:bodyPr>
+          <a:lstStyle/>
+          <a:p>
+            <a:pPr algn="ctr"/>
+            <a:r>
+              <a:rPr sz="1200" b="0" i="1">
+                <a:solidFill>
+                  <a:srgbClr val="666666"/>
+                </a:solidFill>
+                <a:latin typeface="Calibri"/>
+              </a:rPr>
+              <a:t>Sin Titulo y Estado con fecha no hay ADR que citar despues: es su identidad.</a:t>
+            </a:r>
+          </a:p>
+        </p:txBody>
+      </p:sp>
+      <p:sp>
+        <p:nvSpPr>
+          <p:cNvPr id="10" name="TextBox 9"/>
           <p:cNvSpPr txBox="1"/>
           <p:nvPr/>
         </p:nvSpPr>
@@ -7666,3192 +9250,6 @@
         <p:spPr>
           <a:xfrm>
             <a:off x="0" y="0"/>
-            <a:ext cx="12191695" cy="960120"/>
-          </a:xfrm>
-          <a:prstGeom prst="rect">
-            <a:avLst/>
-          </a:prstGeom>
-          <a:solidFill>
-            <a:srgbClr val="095292"/>
-          </a:solidFill>
-          <a:ln>
-            <a:noFill/>
-          </a:ln>
-        </p:spPr>
-        <p:style>
-          <a:lnRef idx="1">
-            <a:schemeClr val="accent1"/>
-          </a:lnRef>
-          <a:fillRef idx="3">
-            <a:schemeClr val="accent1"/>
-          </a:fillRef>
-          <a:effectRef idx="2">
-            <a:schemeClr val="accent1"/>
-          </a:effectRef>
-          <a:fontRef idx="minor">
-            <a:schemeClr val="lt1"/>
-          </a:fontRef>
-        </p:style>
-        <p:txBody>
-          <a:bodyPr rtlCol="0" anchor="ctr"/>
-          <a:lstStyle/>
-          <a:p>
-            <a:pPr algn="ctr"/>
-          </a:p>
-        </p:txBody>
-      </p:sp>
-      <p:sp>
-        <p:nvSpPr>
-          <p:cNvPr id="3" name="Rectangle 2"/>
-          <p:cNvSpPr/>
-          <p:nvPr/>
-        </p:nvSpPr>
-        <p:spPr>
-          <a:xfrm>
-            <a:off x="0" y="960120"/>
-            <a:ext cx="12191695" cy="41148"/>
-          </a:xfrm>
-          <a:prstGeom prst="rect">
-            <a:avLst/>
-          </a:prstGeom>
-          <a:solidFill>
-            <a:srgbClr val="FFD000"/>
-          </a:solidFill>
-          <a:ln>
-            <a:noFill/>
-          </a:ln>
-        </p:spPr>
-        <p:style>
-          <a:lnRef idx="1">
-            <a:schemeClr val="accent1"/>
-          </a:lnRef>
-          <a:fillRef idx="3">
-            <a:schemeClr val="accent1"/>
-          </a:fillRef>
-          <a:effectRef idx="2">
-            <a:schemeClr val="accent1"/>
-          </a:effectRef>
-          <a:fontRef idx="minor">
-            <a:schemeClr val="lt1"/>
-          </a:fontRef>
-        </p:style>
-        <p:txBody>
-          <a:bodyPr rtlCol="0" anchor="ctr"/>
-          <a:lstStyle/>
-          <a:p>
-            <a:pPr algn="ctr"/>
-          </a:p>
-        </p:txBody>
-      </p:sp>
-      <p:sp>
-        <p:nvSpPr>
-          <p:cNvPr id="4" name="TextBox 3"/>
-          <p:cNvSpPr txBox="1"/>
-          <p:nvPr/>
-        </p:nvSpPr>
-        <p:spPr>
-          <a:xfrm>
-            <a:off x="457200" y="164592"/>
-            <a:ext cx="11277295" cy="502920"/>
-          </a:xfrm>
-          <a:prstGeom prst="rect">
-            <a:avLst/>
-          </a:prstGeom>
-          <a:noFill/>
-        </p:spPr>
-        <p:txBody>
-          <a:bodyPr wrap="square">
-            <a:spAutoFit/>
-          </a:bodyPr>
-          <a:lstStyle/>
-          <a:p>
-            <a:r>
-              <a:rPr sz="2600" b="1" i="0">
-                <a:solidFill>
-                  <a:srgbClr val="FFFFFF"/>
-                </a:solidFill>
-                <a:latin typeface="Calibri"/>
-              </a:rPr>
-              <a:t>Preguntas frecuentes y cierre conceptual () (1/3)</a:t>
-            </a:r>
-          </a:p>
-        </p:txBody>
-      </p:sp>
-      <p:sp>
-        <p:nvSpPr>
-          <p:cNvPr id="5" name="TextBox 4"/>
-          <p:cNvSpPr txBox="1"/>
-          <p:nvPr/>
-        </p:nvSpPr>
-        <p:spPr>
-          <a:xfrm>
-            <a:off x="457200" y="1170432"/>
-            <a:ext cx="11277295" cy="5230368"/>
-          </a:xfrm>
-          <a:prstGeom prst="rect">
-            <a:avLst/>
-          </a:prstGeom>
-          <a:noFill/>
-        </p:spPr>
-        <p:txBody>
-          <a:bodyPr wrap="square">
-            <a:spAutoFit/>
-          </a:bodyPr>
-          <a:lstStyle/>
-          <a:p>
-            <a:pPr>
-              <a:spcAft>
-                <a:spcPts val="800"/>
-              </a:spcAft>
-            </a:pPr>
-            <a:r>
-              <a:rPr sz="2000" b="0" i="0">
-                <a:solidFill>
-                  <a:srgbClr val="333333"/>
-                </a:solidFill>
-                <a:latin typeface="Calibri"/>
-              </a:rPr>
-              <a:t>–   Cual de los tres modelos es el mejor: ninguno; la pregunta correcta es cual conviene para este componente, con este equipo y en este plazo, y responder que PaaS es mejor sin decir para que es la senal de que el ADR sera de relleno.</a:t>
-            </a:r>
-          </a:p>
-          <a:p>
-            <a:pPr>
-              <a:spcAft>
-                <a:spcPts val="800"/>
-              </a:spcAft>
-            </a:pPr>
-            <a:r>
-              <a:rPr sz="2000" b="0" i="0">
-                <a:solidFill>
-                  <a:srgbClr val="333333"/>
-                </a:solidFill>
-                <a:latin typeface="Calibri"/>
-              </a:rPr>
-              <a:t>–   Donde encaja serverless o las funciones como servicio: es una variante extrema de PaaS en la que no se administra ninguna instancia siempre encendida</a:t>
-            </a:r>
-          </a:p>
-          <a:p>
-            <a:pPr>
-              <a:spcAft>
-                <a:spcPts val="800"/>
-              </a:spcAft>
-            </a:pPr>
-            <a:r>
-              <a:rPr sz="2000" b="0" i="0">
-                <a:solidFill>
-                  <a:srgbClr val="333333"/>
-                </a:solidFill>
-                <a:latin typeface="Calibri"/>
-              </a:rPr>
-              <a:t>–   Se paga por invocacion y el codigo debe tolerar arrancar en frio; para efectos del curso se clasifica como PaaS anotando la diferencia.</a:t>
-            </a:r>
-          </a:p>
-          <a:p>
-            <a:pPr>
-              <a:spcAft>
-                <a:spcPts val="800"/>
-              </a:spcAft>
-            </a:pPr>
-            <a:r>
-              <a:rPr sz="2000" b="0" i="0">
-                <a:solidFill>
-                  <a:srgbClr val="333333"/>
-                </a:solidFill>
-                <a:latin typeface="Calibri"/>
-              </a:rPr>
-              <a:t>–   Y la mas comun: si elegimos PaaS, para que aprendemos Docker en la Clase 3 si la plataforma se encarga de todo.</a:t>
-            </a:r>
-          </a:p>
-        </p:txBody>
-      </p:sp>
-      <p:sp>
-        <p:nvSpPr>
-          <p:cNvPr id="6" name="TextBox 5"/>
-          <p:cNvSpPr txBox="1"/>
-          <p:nvPr/>
-        </p:nvSpPr>
-        <p:spPr>
-          <a:xfrm>
-            <a:off x="11185855" y="6473952"/>
-            <a:ext cx="640080" cy="274320"/>
-          </a:xfrm>
-          <a:prstGeom prst="rect">
-            <a:avLst/>
-          </a:prstGeom>
-          <a:noFill/>
-        </p:spPr>
-        <p:txBody>
-          <a:bodyPr wrap="square">
-            <a:spAutoFit/>
-          </a:bodyPr>
-          <a:lstStyle/>
-          <a:p>
-            <a:pPr algn="r"/>
-            <a:r>
-              <a:rPr sz="1100" b="0" i="0">
-                <a:solidFill>
-                  <a:srgbClr val="666666"/>
-                </a:solidFill>
-                <a:latin typeface="Calibri"/>
-              </a:rPr>
-              <a:t>21</a:t>
-            </a:r>
-          </a:p>
-        </p:txBody>
-      </p:sp>
-    </p:spTree>
-  </p:cSld>
-  <p:clrMapOvr>
-    <a:masterClrMapping/>
-  </p:clrMapOvr>
-</p:sld>
-</file>
-
-<file path=ppt/slides/slide22.xml><?xml version="1.0" encoding="utf-8"?>
-<p:sld xmlns:a="http://schemas.openxmlformats.org/drawingml/2006/main" xmlns:p="http://schemas.openxmlformats.org/presentationml/2006/main" xmlns:r="http://schemas.openxmlformats.org/officeDocument/2006/relationships">
-  <p:cSld>
-    <p:bg>
-      <p:bgPr>
-        <a:solidFill>
-          <a:srgbClr val="FFFFFF"/>
-        </a:solidFill>
-        <a:effectLst/>
-      </p:bgPr>
-    </p:bg>
-    <p:spTree>
-      <p:nvGrpSpPr>
-        <p:cNvPr id="1" name=""/>
-        <p:cNvGrpSpPr/>
-        <p:nvPr/>
-      </p:nvGrpSpPr>
-      <p:grpSpPr/>
-      <p:sp>
-        <p:nvSpPr>
-          <p:cNvPr id="2" name="Rectangle 1"/>
-          <p:cNvSpPr/>
-          <p:nvPr/>
-        </p:nvSpPr>
-        <p:spPr>
-          <a:xfrm>
-            <a:off x="0" y="0"/>
-            <a:ext cx="12191695" cy="960120"/>
-          </a:xfrm>
-          <a:prstGeom prst="rect">
-            <a:avLst/>
-          </a:prstGeom>
-          <a:solidFill>
-            <a:srgbClr val="095292"/>
-          </a:solidFill>
-          <a:ln>
-            <a:noFill/>
-          </a:ln>
-        </p:spPr>
-        <p:style>
-          <a:lnRef idx="1">
-            <a:schemeClr val="accent1"/>
-          </a:lnRef>
-          <a:fillRef idx="3">
-            <a:schemeClr val="accent1"/>
-          </a:fillRef>
-          <a:effectRef idx="2">
-            <a:schemeClr val="accent1"/>
-          </a:effectRef>
-          <a:fontRef idx="minor">
-            <a:schemeClr val="lt1"/>
-          </a:fontRef>
-        </p:style>
-        <p:txBody>
-          <a:bodyPr rtlCol="0" anchor="ctr"/>
-          <a:lstStyle/>
-          <a:p>
-            <a:pPr algn="ctr"/>
-          </a:p>
-        </p:txBody>
-      </p:sp>
-      <p:sp>
-        <p:nvSpPr>
-          <p:cNvPr id="3" name="Rectangle 2"/>
-          <p:cNvSpPr/>
-          <p:nvPr/>
-        </p:nvSpPr>
-        <p:spPr>
-          <a:xfrm>
-            <a:off x="0" y="960120"/>
-            <a:ext cx="12191695" cy="41148"/>
-          </a:xfrm>
-          <a:prstGeom prst="rect">
-            <a:avLst/>
-          </a:prstGeom>
-          <a:solidFill>
-            <a:srgbClr val="FFD000"/>
-          </a:solidFill>
-          <a:ln>
-            <a:noFill/>
-          </a:ln>
-        </p:spPr>
-        <p:style>
-          <a:lnRef idx="1">
-            <a:schemeClr val="accent1"/>
-          </a:lnRef>
-          <a:fillRef idx="3">
-            <a:schemeClr val="accent1"/>
-          </a:fillRef>
-          <a:effectRef idx="2">
-            <a:schemeClr val="accent1"/>
-          </a:effectRef>
-          <a:fontRef idx="minor">
-            <a:schemeClr val="lt1"/>
-          </a:fontRef>
-        </p:style>
-        <p:txBody>
-          <a:bodyPr rtlCol="0" anchor="ctr"/>
-          <a:lstStyle/>
-          <a:p>
-            <a:pPr algn="ctr"/>
-          </a:p>
-        </p:txBody>
-      </p:sp>
-      <p:sp>
-        <p:nvSpPr>
-          <p:cNvPr id="4" name="TextBox 3"/>
-          <p:cNvSpPr txBox="1"/>
-          <p:nvPr/>
-        </p:nvSpPr>
-        <p:spPr>
-          <a:xfrm>
-            <a:off x="457200" y="164592"/>
-            <a:ext cx="11277295" cy="502920"/>
-          </a:xfrm>
-          <a:prstGeom prst="rect">
-            <a:avLst/>
-          </a:prstGeom>
-          <a:noFill/>
-        </p:spPr>
-        <p:txBody>
-          <a:bodyPr wrap="square">
-            <a:spAutoFit/>
-          </a:bodyPr>
-          <a:lstStyle/>
-          <a:p>
-            <a:r>
-              <a:rPr sz="2600" b="1" i="0">
-                <a:solidFill>
-                  <a:srgbClr val="FFFFFF"/>
-                </a:solidFill>
-                <a:latin typeface="Calibri"/>
-              </a:rPr>
-              <a:t>Preguntas frecuentes y cierre conceptual () (2/3)</a:t>
-            </a:r>
-          </a:p>
-        </p:txBody>
-      </p:sp>
-      <p:sp>
-        <p:nvSpPr>
-          <p:cNvPr id="5" name="TextBox 4"/>
-          <p:cNvSpPr txBox="1"/>
-          <p:nvPr/>
-        </p:nvSpPr>
-        <p:spPr>
-          <a:xfrm>
-            <a:off x="457200" y="1170432"/>
-            <a:ext cx="11277295" cy="5230368"/>
-          </a:xfrm>
-          <a:prstGeom prst="rect">
-            <a:avLst/>
-          </a:prstGeom>
-          <a:noFill/>
-        </p:spPr>
-        <p:txBody>
-          <a:bodyPr wrap="square">
-            <a:spAutoFit/>
-          </a:bodyPr>
-          <a:lstStyle/>
-          <a:p>
-            <a:pPr>
-              <a:spcAft>
-                <a:spcPts val="800"/>
-              </a:spcAft>
-            </a:pPr>
-            <a:r>
-              <a:rPr sz="2000" b="0" i="0">
-                <a:solidFill>
-                  <a:srgbClr val="333333"/>
-                </a:solidFill>
-                <a:latin typeface="Calibri"/>
-              </a:rPr>
-              <a:t>–   Respuesta: porque la plataforma construye internamente una imagen de contenedor con el codigo entregado, de modo que entender contenedores es entender que hace la plataforma por debajo</a:t>
-            </a:r>
-          </a:p>
-          <a:p>
-            <a:pPr>
-              <a:spcAft>
-                <a:spcPts val="800"/>
-              </a:spcAft>
-            </a:pPr>
-            <a:r>
-              <a:rPr sz="2000" b="0" i="0">
-                <a:solidFill>
-                  <a:srgbClr val="333333"/>
-                </a:solidFill>
-                <a:latin typeface="Calibri"/>
-              </a:rPr>
-              <a:t>–   Y porque el contenedor es precisamente el artefacto que vuelve reversible la decision de hoy.</a:t>
-            </a:r>
-          </a:p>
-          <a:p>
-            <a:pPr>
-              <a:spcAft>
-                <a:spcPts val="800"/>
-              </a:spcAft>
-            </a:pPr>
-            <a:r>
-              <a:rPr sz="2000" b="0" i="0">
-                <a:solidFill>
-                  <a:srgbClr val="333333"/>
-                </a:solidFill>
-                <a:latin typeface="Calibri"/>
-              </a:rPr>
-              <a:t>–   La Clase 4 usara este mismo ADR para justificar cuantas piezas tendra el sistema, y el Parcial 1 de la Clase 5 evalua la capacidad de ubicar la linea de responsabilidad en cada modelo.</a:t>
-            </a:r>
-          </a:p>
-          <a:p>
-            <a:pPr>
-              <a:spcAft>
-                <a:spcPts val="800"/>
-              </a:spcAft>
-            </a:pPr>
-            <a:r>
-              <a:rPr sz="2000" b="0" i="0">
-                <a:solidFill>
-                  <a:srgbClr val="333333"/>
-                </a:solidFill>
-                <a:latin typeface="Calibri"/>
-              </a:rPr>
-              <a:t>–   Error tipico del docente que no domina el tema: presentar IaaS, PaaS y SaaS como catalogos de marcas y no como un modelo conceptual de responsabilidad</a:t>
-            </a:r>
-          </a:p>
-        </p:txBody>
-      </p:sp>
-      <p:sp>
-        <p:nvSpPr>
-          <p:cNvPr id="6" name="TextBox 5"/>
-          <p:cNvSpPr txBox="1"/>
-          <p:nvPr/>
-        </p:nvSpPr>
-        <p:spPr>
-          <a:xfrm>
-            <a:off x="11185855" y="6473952"/>
-            <a:ext cx="640080" cy="274320"/>
-          </a:xfrm>
-          <a:prstGeom prst="rect">
-            <a:avLst/>
-          </a:prstGeom>
-          <a:noFill/>
-        </p:spPr>
-        <p:txBody>
-          <a:bodyPr wrap="square">
-            <a:spAutoFit/>
-          </a:bodyPr>
-          <a:lstStyle/>
-          <a:p>
-            <a:pPr algn="r"/>
-            <a:r>
-              <a:rPr sz="1100" b="0" i="0">
-                <a:solidFill>
-                  <a:srgbClr val="666666"/>
-                </a:solidFill>
-                <a:latin typeface="Calibri"/>
-              </a:rPr>
-              <a:t>22</a:t>
-            </a:r>
-          </a:p>
-        </p:txBody>
-      </p:sp>
-    </p:spTree>
-  </p:cSld>
-  <p:clrMapOvr>
-    <a:masterClrMapping/>
-  </p:clrMapOvr>
-</p:sld>
-</file>
-
-<file path=ppt/slides/slide23.xml><?xml version="1.0" encoding="utf-8"?>
-<p:sld xmlns:a="http://schemas.openxmlformats.org/drawingml/2006/main" xmlns:p="http://schemas.openxmlformats.org/presentationml/2006/main" xmlns:r="http://schemas.openxmlformats.org/officeDocument/2006/relationships">
-  <p:cSld>
-    <p:bg>
-      <p:bgPr>
-        <a:solidFill>
-          <a:srgbClr val="FFFFFF"/>
-        </a:solidFill>
-        <a:effectLst/>
-      </p:bgPr>
-    </p:bg>
-    <p:spTree>
-      <p:nvGrpSpPr>
-        <p:cNvPr id="1" name=""/>
-        <p:cNvGrpSpPr/>
-        <p:nvPr/>
-      </p:nvGrpSpPr>
-      <p:grpSpPr/>
-      <p:sp>
-        <p:nvSpPr>
-          <p:cNvPr id="2" name="Rectangle 1"/>
-          <p:cNvSpPr/>
-          <p:nvPr/>
-        </p:nvSpPr>
-        <p:spPr>
-          <a:xfrm>
-            <a:off x="0" y="0"/>
-            <a:ext cx="12191695" cy="960120"/>
-          </a:xfrm>
-          <a:prstGeom prst="rect">
-            <a:avLst/>
-          </a:prstGeom>
-          <a:solidFill>
-            <a:srgbClr val="095292"/>
-          </a:solidFill>
-          <a:ln>
-            <a:noFill/>
-          </a:ln>
-        </p:spPr>
-        <p:style>
-          <a:lnRef idx="1">
-            <a:schemeClr val="accent1"/>
-          </a:lnRef>
-          <a:fillRef idx="3">
-            <a:schemeClr val="accent1"/>
-          </a:fillRef>
-          <a:effectRef idx="2">
-            <a:schemeClr val="accent1"/>
-          </a:effectRef>
-          <a:fontRef idx="minor">
-            <a:schemeClr val="lt1"/>
-          </a:fontRef>
-        </p:style>
-        <p:txBody>
-          <a:bodyPr rtlCol="0" anchor="ctr"/>
-          <a:lstStyle/>
-          <a:p>
-            <a:pPr algn="ctr"/>
-          </a:p>
-        </p:txBody>
-      </p:sp>
-      <p:sp>
-        <p:nvSpPr>
-          <p:cNvPr id="3" name="Rectangle 2"/>
-          <p:cNvSpPr/>
-          <p:nvPr/>
-        </p:nvSpPr>
-        <p:spPr>
-          <a:xfrm>
-            <a:off x="0" y="960120"/>
-            <a:ext cx="12191695" cy="41148"/>
-          </a:xfrm>
-          <a:prstGeom prst="rect">
-            <a:avLst/>
-          </a:prstGeom>
-          <a:solidFill>
-            <a:srgbClr val="FFD000"/>
-          </a:solidFill>
-          <a:ln>
-            <a:noFill/>
-          </a:ln>
-        </p:spPr>
-        <p:style>
-          <a:lnRef idx="1">
-            <a:schemeClr val="accent1"/>
-          </a:lnRef>
-          <a:fillRef idx="3">
-            <a:schemeClr val="accent1"/>
-          </a:fillRef>
-          <a:effectRef idx="2">
-            <a:schemeClr val="accent1"/>
-          </a:effectRef>
-          <a:fontRef idx="minor">
-            <a:schemeClr val="lt1"/>
-          </a:fontRef>
-        </p:style>
-        <p:txBody>
-          <a:bodyPr rtlCol="0" anchor="ctr"/>
-          <a:lstStyle/>
-          <a:p>
-            <a:pPr algn="ctr"/>
-          </a:p>
-        </p:txBody>
-      </p:sp>
-      <p:sp>
-        <p:nvSpPr>
-          <p:cNvPr id="4" name="TextBox 3"/>
-          <p:cNvSpPr txBox="1"/>
-          <p:nvPr/>
-        </p:nvSpPr>
-        <p:spPr>
-          <a:xfrm>
-            <a:off x="457200" y="164592"/>
-            <a:ext cx="11277295" cy="502920"/>
-          </a:xfrm>
-          <a:prstGeom prst="rect">
-            <a:avLst/>
-          </a:prstGeom>
-          <a:noFill/>
-        </p:spPr>
-        <p:txBody>
-          <a:bodyPr wrap="square">
-            <a:spAutoFit/>
-          </a:bodyPr>
-          <a:lstStyle/>
-          <a:p>
-            <a:r>
-              <a:rPr sz="2600" b="1" i="0">
-                <a:solidFill>
-                  <a:srgbClr val="FFFFFF"/>
-                </a:solidFill>
-                <a:latin typeface="Calibri"/>
-              </a:rPr>
-              <a:t>Preguntas frecuentes y cierre conceptual () (3/3)</a:t>
-            </a:r>
-          </a:p>
-        </p:txBody>
-      </p:sp>
-      <p:sp>
-        <p:nvSpPr>
-          <p:cNvPr id="5" name="TextBox 4"/>
-          <p:cNvSpPr txBox="1"/>
-          <p:nvPr/>
-        </p:nvSpPr>
-        <p:spPr>
-          <a:xfrm>
-            <a:off x="457200" y="1170432"/>
-            <a:ext cx="11277295" cy="5230368"/>
-          </a:xfrm>
-          <a:prstGeom prst="rect">
-            <a:avLst/>
-          </a:prstGeom>
-          <a:noFill/>
-        </p:spPr>
-        <p:txBody>
-          <a:bodyPr wrap="square">
-            <a:spAutoFit/>
-          </a:bodyPr>
-          <a:lstStyle/>
-          <a:p>
-            <a:pPr>
-              <a:spcAft>
-                <a:spcPts val="800"/>
-              </a:spcAft>
-            </a:pPr>
-            <a:r>
-              <a:rPr sz="2000" b="0" i="0">
-                <a:solidFill>
-                  <a:srgbClr val="333333"/>
-                </a:solidFill>
-                <a:latin typeface="Calibri"/>
-              </a:rPr>
-              <a:t>–   Con lo cual el estudiante memoriza nombres de productos que cambiaran en dos periodos y no aprende a preguntar quien administra que capa</a:t>
-            </a:r>
-          </a:p>
-          <a:p>
-            <a:pPr>
-              <a:spcAft>
-                <a:spcPts val="800"/>
-              </a:spcAft>
-            </a:pPr>
-            <a:r>
-              <a:rPr sz="2000" b="0" i="0">
-                <a:solidFill>
-                  <a:srgbClr val="333333"/>
-                </a:solidFill>
-                <a:latin typeface="Calibri"/>
-              </a:rPr>
-              <a:t>–   Aguas abajo, en la Clase 6 sera incapaz de decir de que es responsable el en materia de seguridad, y en la Clase 10 no podra explicar por que su factura hipotetica sube o baja.</a:t>
-            </a:r>
-          </a:p>
-          <a:p>
-            <a:pPr>
-              <a:spcAft>
-                <a:spcPts val="800"/>
-              </a:spcAft>
-            </a:pPr>
-            <a:r>
-              <a:rPr sz="2000" b="0" i="0">
-                <a:solidFill>
-                  <a:srgbClr val="333333"/>
-                </a:solidFill>
-                <a:latin typeface="Calibri"/>
-              </a:rPr>
-              <a:t>–   Un ADR que solo lista beneficios no es una decision, es una justificacion escrita despues de los hechos</a:t>
-            </a:r>
-          </a:p>
-          <a:p>
-            <a:pPr>
-              <a:spcAft>
-                <a:spcPts val="800"/>
-              </a:spcAft>
-            </a:pPr>
-            <a:r>
-              <a:rPr sz="2000" b="0" i="0">
-                <a:solidFill>
-                  <a:srgbClr val="333333"/>
-                </a:solidFill>
-                <a:latin typeface="Calibri"/>
-              </a:rPr>
-              <a:t>–   Y quien lo entrega asi llegara a la Clase 11 sin poder explicar ningun trade-off de su arquitectura, que es justamente lo que se le exigira sustentar en la Clase 15.</a:t>
-            </a:r>
-          </a:p>
-        </p:txBody>
-      </p:sp>
-      <p:sp>
-        <p:nvSpPr>
-          <p:cNvPr id="6" name="TextBox 5"/>
-          <p:cNvSpPr txBox="1"/>
-          <p:nvPr/>
-        </p:nvSpPr>
-        <p:spPr>
-          <a:xfrm>
-            <a:off x="11185855" y="6473952"/>
-            <a:ext cx="640080" cy="274320"/>
-          </a:xfrm>
-          <a:prstGeom prst="rect">
-            <a:avLst/>
-          </a:prstGeom>
-          <a:noFill/>
-        </p:spPr>
-        <p:txBody>
-          <a:bodyPr wrap="square">
-            <a:spAutoFit/>
-          </a:bodyPr>
-          <a:lstStyle/>
-          <a:p>
-            <a:pPr algn="r"/>
-            <a:r>
-              <a:rPr sz="1100" b="0" i="0">
-                <a:solidFill>
-                  <a:srgbClr val="666666"/>
-                </a:solidFill>
-                <a:latin typeface="Calibri"/>
-              </a:rPr>
-              <a:t>23</a:t>
-            </a:r>
-          </a:p>
-        </p:txBody>
-      </p:sp>
-    </p:spTree>
-  </p:cSld>
-  <p:clrMapOvr>
-    <a:masterClrMapping/>
-  </p:clrMapOvr>
-</p:sld>
-</file>
-
-<file path=ppt/slides/slide24.xml><?xml version="1.0" encoding="utf-8"?>
-<p:sld xmlns:a="http://schemas.openxmlformats.org/drawingml/2006/main" xmlns:p="http://schemas.openxmlformats.org/presentationml/2006/main" xmlns:r="http://schemas.openxmlformats.org/officeDocument/2006/relationships">
-  <p:cSld>
-    <p:bg>
-      <p:bgPr>
-        <a:solidFill>
-          <a:srgbClr val="FFFFFF"/>
-        </a:solidFill>
-        <a:effectLst/>
-      </p:bgPr>
-    </p:bg>
-    <p:spTree>
-      <p:nvGrpSpPr>
-        <p:cNvPr id="1" name=""/>
-        <p:cNvGrpSpPr/>
-        <p:nvPr/>
-      </p:nvGrpSpPr>
-      <p:grpSpPr/>
-      <p:sp>
-        <p:nvSpPr>
-          <p:cNvPr id="2" name="Rectangle 1"/>
-          <p:cNvSpPr/>
-          <p:nvPr/>
-        </p:nvSpPr>
-        <p:spPr>
-          <a:xfrm>
-            <a:off x="0" y="0"/>
-            <a:ext cx="12191695" cy="960120"/>
-          </a:xfrm>
-          <a:prstGeom prst="rect">
-            <a:avLst/>
-          </a:prstGeom>
-          <a:solidFill>
-            <a:srgbClr val="095292"/>
-          </a:solidFill>
-          <a:ln>
-            <a:noFill/>
-          </a:ln>
-        </p:spPr>
-        <p:style>
-          <a:lnRef idx="1">
-            <a:schemeClr val="accent1"/>
-          </a:lnRef>
-          <a:fillRef idx="3">
-            <a:schemeClr val="accent1"/>
-          </a:fillRef>
-          <a:effectRef idx="2">
-            <a:schemeClr val="accent1"/>
-          </a:effectRef>
-          <a:fontRef idx="minor">
-            <a:schemeClr val="lt1"/>
-          </a:fontRef>
-        </p:style>
-        <p:txBody>
-          <a:bodyPr rtlCol="0" anchor="ctr"/>
-          <a:lstStyle/>
-          <a:p>
-            <a:pPr algn="ctr"/>
-          </a:p>
-        </p:txBody>
-      </p:sp>
-      <p:sp>
-        <p:nvSpPr>
-          <p:cNvPr id="3" name="Rectangle 2"/>
-          <p:cNvSpPr/>
-          <p:nvPr/>
-        </p:nvSpPr>
-        <p:spPr>
-          <a:xfrm>
-            <a:off x="0" y="960120"/>
-            <a:ext cx="12191695" cy="41148"/>
-          </a:xfrm>
-          <a:prstGeom prst="rect">
-            <a:avLst/>
-          </a:prstGeom>
-          <a:solidFill>
-            <a:srgbClr val="FFD000"/>
-          </a:solidFill>
-          <a:ln>
-            <a:noFill/>
-          </a:ln>
-        </p:spPr>
-        <p:style>
-          <a:lnRef idx="1">
-            <a:schemeClr val="accent1"/>
-          </a:lnRef>
-          <a:fillRef idx="3">
-            <a:schemeClr val="accent1"/>
-          </a:fillRef>
-          <a:effectRef idx="2">
-            <a:schemeClr val="accent1"/>
-          </a:effectRef>
-          <a:fontRef idx="minor">
-            <a:schemeClr val="lt1"/>
-          </a:fontRef>
-        </p:style>
-        <p:txBody>
-          <a:bodyPr rtlCol="0" anchor="ctr"/>
-          <a:lstStyle/>
-          <a:p>
-            <a:pPr algn="ctr"/>
-          </a:p>
-        </p:txBody>
-      </p:sp>
-      <p:sp>
-        <p:nvSpPr>
-          <p:cNvPr id="4" name="TextBox 3"/>
-          <p:cNvSpPr txBox="1"/>
-          <p:nvPr/>
-        </p:nvSpPr>
-        <p:spPr>
-          <a:xfrm>
-            <a:off x="457200" y="164592"/>
-            <a:ext cx="11277295" cy="502920"/>
-          </a:xfrm>
-          <a:prstGeom prst="rect">
-            <a:avLst/>
-          </a:prstGeom>
-          <a:noFill/>
-        </p:spPr>
-        <p:txBody>
-          <a:bodyPr wrap="square">
-            <a:spAutoFit/>
-          </a:bodyPr>
-          <a:lstStyle/>
-          <a:p>
-            <a:r>
-              <a:rPr sz="2600" b="1" i="0">
-                <a:solidFill>
-                  <a:srgbClr val="FFFFFF"/>
-                </a:solidFill>
-                <a:latin typeface="Calibri"/>
-              </a:rPr>
-              <a:t>La plantilla de ADR: los seis apartados</a:t>
-            </a:r>
-          </a:p>
-        </p:txBody>
-      </p:sp>
-      <p:sp>
-        <p:nvSpPr>
-          <p:cNvPr id="5" name="Rounded Rectangle 4"/>
-          <p:cNvSpPr/>
-          <p:nvPr/>
-        </p:nvSpPr>
-        <p:spPr>
-          <a:xfrm>
-            <a:off x="457200" y="1261872"/>
-            <a:ext cx="11277295" cy="5093208"/>
-          </a:xfrm>
-          <a:prstGeom prst="roundRect">
-            <a:avLst>
-              <a:gd name="adj" fmla="val 12000"/>
-            </a:avLst>
-          </a:prstGeom>
-          <a:solidFill>
-            <a:srgbClr val="1E2A38"/>
-          </a:solidFill>
-          <a:ln>
-            <a:noFill/>
-          </a:ln>
-        </p:spPr>
-        <p:style>
-          <a:lnRef idx="1">
-            <a:schemeClr val="accent1"/>
-          </a:lnRef>
-          <a:fillRef idx="3">
-            <a:schemeClr val="accent1"/>
-          </a:fillRef>
-          <a:effectRef idx="2">
-            <a:schemeClr val="accent1"/>
-          </a:effectRef>
-          <a:fontRef idx="minor">
-            <a:schemeClr val="lt1"/>
-          </a:fontRef>
-        </p:style>
-        <p:txBody>
-          <a:bodyPr rtlCol="0" anchor="ctr"/>
-          <a:lstStyle/>
-          <a:p>
-            <a:pPr algn="ctr"/>
-          </a:p>
-        </p:txBody>
-      </p:sp>
-      <p:sp>
-        <p:nvSpPr>
-          <p:cNvPr id="6" name="Rectangle 5"/>
-          <p:cNvSpPr/>
-          <p:nvPr/>
-        </p:nvSpPr>
-        <p:spPr>
-          <a:xfrm>
-            <a:off x="457200" y="1261872"/>
-            <a:ext cx="11277295" cy="320040"/>
-          </a:xfrm>
-          <a:prstGeom prst="rect">
-            <a:avLst/>
-          </a:prstGeom>
-          <a:solidFill>
-            <a:srgbClr val="095292"/>
-          </a:solidFill>
-          <a:ln>
-            <a:noFill/>
-          </a:ln>
-        </p:spPr>
-        <p:style>
-          <a:lnRef idx="1">
-            <a:schemeClr val="accent1"/>
-          </a:lnRef>
-          <a:fillRef idx="3">
-            <a:schemeClr val="accent1"/>
-          </a:fillRef>
-          <a:effectRef idx="2">
-            <a:schemeClr val="accent1"/>
-          </a:effectRef>
-          <a:fontRef idx="minor">
-            <a:schemeClr val="lt1"/>
-          </a:fontRef>
-        </p:style>
-        <p:txBody>
-          <a:bodyPr rtlCol="0" anchor="ctr"/>
-          <a:lstStyle/>
-          <a:p>
-            <a:pPr algn="ctr"/>
-          </a:p>
-        </p:txBody>
-      </p:sp>
-      <p:sp>
-        <p:nvSpPr>
-          <p:cNvPr id="7" name="TextBox 6"/>
-          <p:cNvSpPr txBox="1"/>
-          <p:nvPr/>
-        </p:nvSpPr>
-        <p:spPr>
-          <a:xfrm>
-            <a:off x="685800" y="1307592"/>
-            <a:ext cx="10820095" cy="256032"/>
-          </a:xfrm>
-          <a:prstGeom prst="rect">
-            <a:avLst/>
-          </a:prstGeom>
-          <a:noFill/>
-        </p:spPr>
-        <p:txBody>
-          <a:bodyPr wrap="square" anchor="ctr"/>
-          <a:lstStyle/>
-          <a:p>
-            <a:r>
-              <a:rPr sz="1000" b="1" i="0">
-                <a:solidFill>
-                  <a:srgbClr val="269CCB"/>
-                </a:solidFill>
-                <a:latin typeface="Calibri"/>
-              </a:rPr>
-              <a:t>● ● ●</a:t>
-            </a:r>
-          </a:p>
-        </p:txBody>
-      </p:sp>
-      <p:sp>
-        <p:nvSpPr>
-          <p:cNvPr id="8" name="TextBox 7"/>
-          <p:cNvSpPr txBox="1"/>
-          <p:nvPr/>
-        </p:nvSpPr>
-        <p:spPr>
-          <a:xfrm>
-            <a:off x="777240" y="1719072"/>
-            <a:ext cx="5181447" cy="4453128"/>
-          </a:xfrm>
-          <a:prstGeom prst="rect">
-            <a:avLst/>
-          </a:prstGeom>
-          <a:noFill/>
-        </p:spPr>
-        <p:txBody>
-          <a:bodyPr wrap="square">
-            <a:spAutoFit/>
-          </a:bodyPr>
-          <a:lstStyle/>
-          <a:p>
-            <a:pPr>
-              <a:spcAft>
-                <a:spcPts val="400"/>
-              </a:spcAft>
-            </a:pPr>
-            <a:r>
-              <a:rPr sz="1400" b="0" i="0">
-                <a:solidFill>
-                  <a:srgbClr val="FFFFFF"/>
-                </a:solidFill>
-                <a:latin typeface="Calibri"/>
-              </a:rPr>
-              <a:t># ADR-001 · Modelo de servicio dominante de la app</a:t>
-            </a:r>
-          </a:p>
-          <a:p>
-            <a:pPr>
-              <a:spcAft>
-                <a:spcPts val="400"/>
-              </a:spcAft>
-            </a:pPr>
-            <a:r>
-              <a:rPr sz="1400" b="0" i="0">
-                <a:solidFill>
-                  <a:srgbClr val="FFFFFF"/>
-                </a:solidFill>
-                <a:latin typeface="Calibri"/>
-              </a:rPr>
-              <a:t/>
-            </a:r>
-          </a:p>
-          <a:p>
-            <a:pPr>
-              <a:spcAft>
-                <a:spcPts val="400"/>
-              </a:spcAft>
-            </a:pPr>
-            <a:r>
-              <a:rPr sz="1400" b="0" i="0">
-                <a:solidFill>
-                  <a:srgbClr val="FFFFFF"/>
-                </a:solidFill>
-                <a:latin typeface="Calibri"/>
-              </a:rPr>
-              <a:t>## 1. Estado</a:t>
-            </a:r>
-          </a:p>
-          <a:p>
-            <a:pPr>
-              <a:spcAft>
-                <a:spcPts val="400"/>
-              </a:spcAft>
-            </a:pPr>
-            <a:r>
-              <a:rPr sz="1400" b="0" i="0">
-                <a:solidFill>
-                  <a:srgbClr val="FFFFFF"/>
-                </a:solidFill>
-                <a:latin typeface="Calibri"/>
-              </a:rPr>
-              <a:t>Aceptada · 2026-09-01 · decide: &lt;su nombre&gt;</a:t>
-            </a:r>
-          </a:p>
-          <a:p>
-            <a:pPr>
-              <a:spcAft>
-                <a:spcPts val="400"/>
-              </a:spcAft>
-            </a:pPr>
-            <a:r>
-              <a:rPr sz="1400" b="0" i="0">
-                <a:solidFill>
-                  <a:srgbClr val="FFFFFF"/>
-                </a:solidFill>
-                <a:latin typeface="Calibri"/>
-              </a:rPr>
-              <a:t/>
-            </a:r>
-          </a:p>
-          <a:p>
-            <a:pPr>
-              <a:spcAft>
-                <a:spcPts val="400"/>
-              </a:spcAft>
-            </a:pPr>
-            <a:r>
-              <a:rPr sz="1400" b="0" i="0">
-                <a:solidFill>
-                  <a:srgbClr val="FFFFFF"/>
-                </a:solidFill>
-                <a:latin typeface="Calibri"/>
-              </a:rPr>
-              <a:t>## 2. Contexto</a:t>
-            </a:r>
-          </a:p>
-          <a:p>
-            <a:pPr>
-              <a:spcAft>
-                <a:spcPts val="400"/>
-              </a:spcAft>
-            </a:pPr>
-            <a:r>
-              <a:rPr sz="1400" b="0" i="0">
-                <a:solidFill>
-                  <a:srgbClr val="FFFFFF"/>
-                </a:solidFill>
-                <a:latin typeface="Calibri"/>
-              </a:rPr>
-              <a:t>&lt;que problema del dominio obliga a decidir esto, en 3 o 4 lineas&gt;</a:t>
-            </a:r>
-          </a:p>
-          <a:p>
-            <a:pPr>
-              <a:spcAft>
-                <a:spcPts val="400"/>
-              </a:spcAft>
-            </a:pPr>
-            <a:r>
-              <a:rPr sz="1400" b="0" i="0">
-                <a:solidFill>
-                  <a:srgbClr val="FFFFFF"/>
-                </a:solidFill>
-                <a:latin typeface="Calibri"/>
-              </a:rPr>
-              <a:t/>
-            </a:r>
-          </a:p>
-          <a:p>
-            <a:pPr>
-              <a:spcAft>
-                <a:spcPts val="400"/>
-              </a:spcAft>
-            </a:pPr>
-            <a:r>
-              <a:rPr sz="1400" b="0" i="0">
-                <a:solidFill>
-                  <a:srgbClr val="FFFFFF"/>
-                </a:solidFill>
-                <a:latin typeface="Calibri"/>
-              </a:rPr>
-              <a:t>## 3. Alternativas consideradas</a:t>
-            </a:r>
-          </a:p>
-          <a:p>
-            <a:pPr>
-              <a:spcAft>
-                <a:spcPts val="400"/>
-              </a:spcAft>
-            </a:pPr>
-            <a:r>
-              <a:rPr sz="1400" b="0" i="0">
-                <a:solidFill>
-                  <a:srgbClr val="FFFFFF"/>
-                </a:solidFill>
-                <a:latin typeface="Calibri"/>
-              </a:rPr>
-              <a:t>- IaaS  — &lt;que ganaria y que costaria en SU dominio&gt;</a:t>
-            </a:r>
-          </a:p>
-          <a:p>
-            <a:pPr>
-              <a:spcAft>
-                <a:spcPts val="400"/>
-              </a:spcAft>
-            </a:pPr>
-            <a:r>
-              <a:rPr sz="1400" b="0" i="0">
-                <a:solidFill>
-                  <a:srgbClr val="FFFFFF"/>
-                </a:solidFill>
-                <a:latin typeface="Calibri"/>
-              </a:rPr>
-              <a:t>- PaaS  — &lt;idem&gt;</a:t>
-            </a:r>
-          </a:p>
-        </p:txBody>
-      </p:sp>
-      <p:sp>
-        <p:nvSpPr>
-          <p:cNvPr id="9" name="TextBox 8"/>
-          <p:cNvSpPr txBox="1"/>
-          <p:nvPr/>
-        </p:nvSpPr>
-        <p:spPr>
-          <a:xfrm>
-            <a:off x="6233007" y="1719072"/>
-            <a:ext cx="5181447" cy="4453128"/>
-          </a:xfrm>
-          <a:prstGeom prst="rect">
-            <a:avLst/>
-          </a:prstGeom>
-          <a:noFill/>
-        </p:spPr>
-        <p:txBody>
-          <a:bodyPr wrap="square">
-            <a:spAutoFit/>
-          </a:bodyPr>
-          <a:lstStyle/>
-          <a:p>
-            <a:pPr>
-              <a:spcAft>
-                <a:spcPts val="400"/>
-              </a:spcAft>
-            </a:pPr>
-            <a:r>
-              <a:rPr sz="1400" b="0" i="0">
-                <a:solidFill>
-                  <a:srgbClr val="FFFFFF"/>
-                </a:solidFill>
-                <a:latin typeface="Calibri"/>
-              </a:rPr>
-              <a:t>- SaaS  — &lt;idem&gt;</a:t>
-            </a:r>
-          </a:p>
-          <a:p>
-            <a:pPr>
-              <a:spcAft>
-                <a:spcPts val="400"/>
-              </a:spcAft>
-            </a:pPr>
-            <a:r>
-              <a:rPr sz="1400" b="0" i="0">
-                <a:solidFill>
-                  <a:srgbClr val="FFFFFF"/>
-                </a:solidFill>
-                <a:latin typeface="Calibri"/>
-              </a:rPr>
-              <a:t/>
-            </a:r>
-          </a:p>
-          <a:p>
-            <a:pPr>
-              <a:spcAft>
-                <a:spcPts val="400"/>
-              </a:spcAft>
-            </a:pPr>
-            <a:r>
-              <a:rPr sz="1400" b="0" i="0">
-                <a:solidFill>
-                  <a:srgbClr val="FFFFFF"/>
-                </a:solidFill>
-                <a:latin typeface="Calibri"/>
-              </a:rPr>
-              <a:t>## 4. Decision</a:t>
-            </a:r>
-          </a:p>
-          <a:p>
-            <a:pPr>
-              <a:spcAft>
-                <a:spcPts val="400"/>
-              </a:spcAft>
-            </a:pPr>
-            <a:r>
-              <a:rPr sz="1400" b="0" i="0">
-                <a:solidFill>
-                  <a:srgbClr val="FFFFFF"/>
-                </a:solidFill>
-                <a:latin typeface="Calibri"/>
-              </a:rPr>
-              <a:t>Se adopta &lt;IaaS|PaaS|SaaS&gt; como modelo dominante porque &lt;criterio&gt;.</a:t>
-            </a:r>
-          </a:p>
-          <a:p>
-            <a:pPr>
-              <a:spcAft>
-                <a:spcPts val="400"/>
-              </a:spcAft>
-            </a:pPr>
-            <a:r>
-              <a:rPr sz="1400" b="0" i="0">
-                <a:solidFill>
-                  <a:srgbClr val="FFFFFF"/>
-                </a:solidFill>
-                <a:latin typeface="Calibri"/>
-              </a:rPr>
-              <a:t/>
-            </a:r>
-          </a:p>
-          <a:p>
-            <a:pPr>
-              <a:spcAft>
-                <a:spcPts val="400"/>
-              </a:spcAft>
-            </a:pPr>
-            <a:r>
-              <a:rPr sz="1400" b="0" i="0">
-                <a:solidFill>
-                  <a:srgbClr val="FFFFFF"/>
-                </a:solidFill>
-                <a:latin typeface="Calibri"/>
-              </a:rPr>
-              <a:t>## 5. Justificacion contra los atributos de calidad</a:t>
-            </a:r>
-          </a:p>
-          <a:p>
-            <a:pPr>
-              <a:spcAft>
-                <a:spcPts val="400"/>
-              </a:spcAft>
-            </a:pPr>
-            <a:r>
-              <a:rPr sz="1400" b="0" i="0">
-                <a:solidFill>
-                  <a:srgbClr val="FFFFFF"/>
-                </a:solidFill>
-                <a:latin typeface="Calibri"/>
-              </a:rPr>
-              <a:t>&lt;el atributo de la Clase 1 que esta decision favorece, y el que sacrifica&gt;</a:t>
-            </a:r>
-          </a:p>
-          <a:p>
-            <a:pPr>
-              <a:spcAft>
-                <a:spcPts val="400"/>
-              </a:spcAft>
-            </a:pPr>
-            <a:r>
-              <a:rPr sz="1400" b="0" i="0">
-                <a:solidFill>
-                  <a:srgbClr val="FFFFFF"/>
-                </a:solidFill>
-                <a:latin typeface="Calibri"/>
-              </a:rPr>
-              <a:t/>
-            </a:r>
-          </a:p>
-          <a:p>
-            <a:pPr>
-              <a:spcAft>
-                <a:spcPts val="400"/>
-              </a:spcAft>
-            </a:pPr>
-            <a:r>
-              <a:rPr sz="1400" b="0" i="0">
-                <a:solidFill>
-                  <a:srgbClr val="FFFFFF"/>
-                </a:solidFill>
-                <a:latin typeface="Calibri"/>
-              </a:rPr>
-              <a:t>## 6. Consecuencias</a:t>
-            </a:r>
-          </a:p>
-          <a:p>
-            <a:pPr>
-              <a:spcAft>
-                <a:spcPts val="400"/>
-              </a:spcAft>
-            </a:pPr>
-            <a:r>
-              <a:rPr sz="1400" b="0" i="0">
-                <a:solidFill>
-                  <a:srgbClr val="FFFFFF"/>
-                </a:solidFill>
-                <a:latin typeface="Calibri"/>
-              </a:rPr>
-              <a:t>Positivas: &lt;...&gt;   Negativas: &lt;...&gt;   A revisar si: &lt;condicion&gt;</a:t>
-            </a:r>
-          </a:p>
-        </p:txBody>
-      </p:sp>
-      <p:sp>
-        <p:nvSpPr>
-          <p:cNvPr id="10" name="TextBox 9"/>
-          <p:cNvSpPr txBox="1"/>
-          <p:nvPr/>
-        </p:nvSpPr>
-        <p:spPr>
-          <a:xfrm>
-            <a:off x="11185855" y="6473952"/>
-            <a:ext cx="640080" cy="274320"/>
-          </a:xfrm>
-          <a:prstGeom prst="rect">
-            <a:avLst/>
-          </a:prstGeom>
-          <a:noFill/>
-        </p:spPr>
-        <p:txBody>
-          <a:bodyPr wrap="square">
-            <a:spAutoFit/>
-          </a:bodyPr>
-          <a:lstStyle/>
-          <a:p>
-            <a:pPr algn="r"/>
-            <a:r>
-              <a:rPr sz="1100" b="0" i="0">
-                <a:solidFill>
-                  <a:srgbClr val="666666"/>
-                </a:solidFill>
-                <a:latin typeface="Calibri"/>
-              </a:rPr>
-              <a:t>24</a:t>
-            </a:r>
-          </a:p>
-        </p:txBody>
-      </p:sp>
-    </p:spTree>
-  </p:cSld>
-  <p:clrMapOvr>
-    <a:masterClrMapping/>
-  </p:clrMapOvr>
-</p:sld>
-</file>
-
-<file path=ppt/slides/slide25.xml><?xml version="1.0" encoding="utf-8"?>
-<p:sld xmlns:a="http://schemas.openxmlformats.org/drawingml/2006/main" xmlns:p="http://schemas.openxmlformats.org/presentationml/2006/main" xmlns:r="http://schemas.openxmlformats.org/officeDocument/2006/relationships">
-  <p:cSld>
-    <p:bg>
-      <p:bgPr>
-        <a:solidFill>
-          <a:srgbClr val="FFFFFF"/>
-        </a:solidFill>
-        <a:effectLst/>
-      </p:bgPr>
-    </p:bg>
-    <p:spTree>
-      <p:nvGrpSpPr>
-        <p:cNvPr id="1" name=""/>
-        <p:cNvGrpSpPr/>
-        <p:nvPr/>
-      </p:nvGrpSpPr>
-      <p:grpSpPr/>
-      <p:sp>
-        <p:nvSpPr>
-          <p:cNvPr id="2" name="Rectangle 1"/>
-          <p:cNvSpPr/>
-          <p:nvPr/>
-        </p:nvSpPr>
-        <p:spPr>
-          <a:xfrm>
-            <a:off x="0" y="0"/>
-            <a:ext cx="12191695" cy="1170432"/>
-          </a:xfrm>
-          <a:prstGeom prst="rect">
-            <a:avLst/>
-          </a:prstGeom>
-          <a:solidFill>
-            <a:srgbClr val="095292"/>
-          </a:solidFill>
-          <a:ln>
-            <a:noFill/>
-          </a:ln>
-        </p:spPr>
-        <p:style>
-          <a:lnRef idx="1">
-            <a:schemeClr val="accent1"/>
-          </a:lnRef>
-          <a:fillRef idx="3">
-            <a:schemeClr val="accent1"/>
-          </a:fillRef>
-          <a:effectRef idx="2">
-            <a:schemeClr val="accent1"/>
-          </a:effectRef>
-          <a:fontRef idx="minor">
-            <a:schemeClr val="lt1"/>
-          </a:fontRef>
-        </p:style>
-        <p:txBody>
-          <a:bodyPr rtlCol="0" anchor="ctr"/>
-          <a:lstStyle/>
-          <a:p>
-            <a:pPr algn="ctr"/>
-          </a:p>
-        </p:txBody>
-      </p:sp>
-      <p:sp>
-        <p:nvSpPr>
-          <p:cNvPr id="3" name="Rectangle 2"/>
-          <p:cNvSpPr/>
-          <p:nvPr/>
-        </p:nvSpPr>
-        <p:spPr>
-          <a:xfrm>
-            <a:off x="0" y="1170432"/>
-            <a:ext cx="12191695" cy="41148"/>
-          </a:xfrm>
-          <a:prstGeom prst="rect">
-            <a:avLst/>
-          </a:prstGeom>
-          <a:solidFill>
-            <a:srgbClr val="FFD000"/>
-          </a:solidFill>
-          <a:ln>
-            <a:noFill/>
-          </a:ln>
-        </p:spPr>
-        <p:style>
-          <a:lnRef idx="1">
-            <a:schemeClr val="accent1"/>
-          </a:lnRef>
-          <a:fillRef idx="3">
-            <a:schemeClr val="accent1"/>
-          </a:fillRef>
-          <a:effectRef idx="2">
-            <a:schemeClr val="accent1"/>
-          </a:effectRef>
-          <a:fontRef idx="minor">
-            <a:schemeClr val="lt1"/>
-          </a:fontRef>
-        </p:style>
-        <p:txBody>
-          <a:bodyPr rtlCol="0" anchor="ctr"/>
-          <a:lstStyle/>
-          <a:p>
-            <a:pPr algn="ctr"/>
-          </a:p>
-        </p:txBody>
-      </p:sp>
-      <p:sp>
-        <p:nvSpPr>
-          <p:cNvPr id="4" name="TextBox 3"/>
-          <p:cNvSpPr txBox="1"/>
-          <p:nvPr/>
-        </p:nvSpPr>
-        <p:spPr>
-          <a:xfrm>
-            <a:off x="457200" y="164592"/>
-            <a:ext cx="11277295" cy="384048"/>
-          </a:xfrm>
-          <a:prstGeom prst="rect">
-            <a:avLst/>
-          </a:prstGeom>
-          <a:noFill/>
-        </p:spPr>
-        <p:txBody>
-          <a:bodyPr wrap="square">
-            <a:spAutoFit/>
-          </a:bodyPr>
-          <a:lstStyle/>
-          <a:p>
-            <a:r>
-              <a:rPr sz="2600" b="1" i="0">
-                <a:solidFill>
-                  <a:srgbClr val="FFFFFF"/>
-                </a:solidFill>
-                <a:latin typeface="Calibri"/>
-              </a:rPr>
-              <a:t>Quién administra cada capa — IaaS vs PaaS vs SaaS</a:t>
-            </a:r>
-          </a:p>
-        </p:txBody>
-      </p:sp>
-      <p:sp>
-        <p:nvSpPr>
-          <p:cNvPr id="5" name="TextBox 4"/>
-          <p:cNvSpPr txBox="1"/>
-          <p:nvPr/>
-        </p:nvSpPr>
-        <p:spPr>
-          <a:xfrm>
-            <a:off x="457200" y="566928"/>
-            <a:ext cx="11277295" cy="411480"/>
-          </a:xfrm>
-          <a:prstGeom prst="rect">
-            <a:avLst/>
-          </a:prstGeom>
-          <a:noFill/>
-        </p:spPr>
-        <p:txBody>
-          <a:bodyPr wrap="square">
-            <a:spAutoFit/>
-          </a:bodyPr>
-          <a:lstStyle/>
-          <a:p>
-            <a:r>
-              <a:rPr sz="1400" b="0" i="0">
-                <a:solidFill>
-                  <a:srgbClr val="B8D8EE"/>
-                </a:solidFill>
-                <a:latin typeface="Calibri"/>
-              </a:rPr>
-              <a:t>Misma aplicación, distinto reparto de responsabilidad entre usted y el proveedor</a:t>
-            </a:r>
-          </a:p>
-        </p:txBody>
-      </p:sp>
-      <p:sp>
-        <p:nvSpPr>
-          <p:cNvPr id="6" name="Rounded Rectangle 5"/>
-          <p:cNvSpPr/>
-          <p:nvPr/>
-        </p:nvSpPr>
-        <p:spPr>
-          <a:xfrm>
-            <a:off x="548640" y="1325880"/>
-            <a:ext cx="3291840" cy="685800"/>
-          </a:xfrm>
-          <a:prstGeom prst="roundRect">
-            <a:avLst>
-              <a:gd name="adj" fmla="val 12000"/>
-            </a:avLst>
-          </a:prstGeom>
-          <a:solidFill>
-            <a:srgbClr val="095292"/>
-          </a:solidFill>
-          <a:ln>
-            <a:noFill/>
-          </a:ln>
-        </p:spPr>
-        <p:style>
-          <a:lnRef idx="1">
-            <a:schemeClr val="accent1"/>
-          </a:lnRef>
-          <a:fillRef idx="3">
-            <a:schemeClr val="accent1"/>
-          </a:fillRef>
-          <a:effectRef idx="2">
-            <a:schemeClr val="accent1"/>
-          </a:effectRef>
-          <a:fontRef idx="minor">
-            <a:schemeClr val="lt1"/>
-          </a:fontRef>
-        </p:style>
-        <p:txBody>
-          <a:bodyPr rtlCol="0" anchor="ctr" wrap="square"/>
-          <a:lstStyle/>
-          <a:p>
-            <a:pPr algn="ctr"/>
-            <a:r>
-              <a:rPr sz="1200" b="1" i="0">
-                <a:solidFill>
-                  <a:srgbClr val="FFFFFF"/>
-                </a:solidFill>
-                <a:latin typeface="Calibri"/>
-              </a:rPr>
-              <a:t>IaaS
-(DigitalOcean, AWS EC2)</a:t>
-            </a:r>
-          </a:p>
-        </p:txBody>
-      </p:sp>
-      <p:sp>
-        <p:nvSpPr>
-          <p:cNvPr id="7" name="Rounded Rectangle 6"/>
-          <p:cNvSpPr/>
-          <p:nvPr/>
-        </p:nvSpPr>
-        <p:spPr>
-          <a:xfrm>
-            <a:off x="4160520" y="1325880"/>
-            <a:ext cx="3291840" cy="685800"/>
-          </a:xfrm>
-          <a:prstGeom prst="roundRect">
-            <a:avLst>
-              <a:gd name="adj" fmla="val 12000"/>
-            </a:avLst>
-          </a:prstGeom>
-          <a:solidFill>
-            <a:srgbClr val="095292"/>
-          </a:solidFill>
-          <a:ln>
-            <a:noFill/>
-          </a:ln>
-        </p:spPr>
-        <p:style>
-          <a:lnRef idx="1">
-            <a:schemeClr val="accent1"/>
-          </a:lnRef>
-          <a:fillRef idx="3">
-            <a:schemeClr val="accent1"/>
-          </a:fillRef>
-          <a:effectRef idx="2">
-            <a:schemeClr val="accent1"/>
-          </a:effectRef>
-          <a:fontRef idx="minor">
-            <a:schemeClr val="lt1"/>
-          </a:fontRef>
-        </p:style>
-        <p:txBody>
-          <a:bodyPr rtlCol="0" anchor="ctr" wrap="square"/>
-          <a:lstStyle/>
-          <a:p>
-            <a:pPr algn="ctr"/>
-            <a:r>
-              <a:rPr sz="1200" b="1" i="0">
-                <a:solidFill>
-                  <a:srgbClr val="FFFFFF"/>
-                </a:solidFill>
-                <a:latin typeface="Calibri"/>
-              </a:rPr>
-              <a:t>PaaS
-(Render, Railway, Heroku)</a:t>
-            </a:r>
-          </a:p>
-        </p:txBody>
-      </p:sp>
-      <p:sp>
-        <p:nvSpPr>
-          <p:cNvPr id="8" name="Rounded Rectangle 7"/>
-          <p:cNvSpPr/>
-          <p:nvPr/>
-        </p:nvSpPr>
-        <p:spPr>
-          <a:xfrm>
-            <a:off x="7772400" y="1325880"/>
-            <a:ext cx="3291840" cy="685800"/>
-          </a:xfrm>
-          <a:prstGeom prst="roundRect">
-            <a:avLst>
-              <a:gd name="adj" fmla="val 12000"/>
-            </a:avLst>
-          </a:prstGeom>
-          <a:solidFill>
-            <a:srgbClr val="095292"/>
-          </a:solidFill>
-          <a:ln>
-            <a:noFill/>
-          </a:ln>
-        </p:spPr>
-        <p:style>
-          <a:lnRef idx="1">
-            <a:schemeClr val="accent1"/>
-          </a:lnRef>
-          <a:fillRef idx="3">
-            <a:schemeClr val="accent1"/>
-          </a:fillRef>
-          <a:effectRef idx="2">
-            <a:schemeClr val="accent1"/>
-          </a:effectRef>
-          <a:fontRef idx="minor">
-            <a:schemeClr val="lt1"/>
-          </a:fontRef>
-        </p:style>
-        <p:txBody>
-          <a:bodyPr rtlCol="0" anchor="ctr" wrap="square"/>
-          <a:lstStyle/>
-          <a:p>
-            <a:pPr algn="ctr"/>
-            <a:r>
-              <a:rPr sz="1200" b="1" i="0">
-                <a:solidFill>
-                  <a:srgbClr val="FFFFFF"/>
-                </a:solidFill>
-                <a:latin typeface="Calibri"/>
-              </a:rPr>
-              <a:t>SaaS
-(Gmail, Notion, Slack)</a:t>
-            </a:r>
-          </a:p>
-        </p:txBody>
-      </p:sp>
-      <p:sp>
-        <p:nvSpPr>
-          <p:cNvPr id="9" name="Rounded Rectangle 8"/>
-          <p:cNvSpPr/>
-          <p:nvPr/>
-        </p:nvSpPr>
-        <p:spPr>
-          <a:xfrm>
-            <a:off x="548640" y="2103120"/>
-            <a:ext cx="3291840" cy="548640"/>
-          </a:xfrm>
-          <a:prstGeom prst="roundRect">
-            <a:avLst>
-              <a:gd name="adj" fmla="val 12000"/>
-            </a:avLst>
-          </a:prstGeom>
-          <a:solidFill>
-            <a:srgbClr val="FFD000"/>
-          </a:solidFill>
-          <a:ln>
-            <a:noFill/>
-          </a:ln>
-        </p:spPr>
-        <p:style>
-          <a:lnRef idx="1">
-            <a:schemeClr val="accent1"/>
-          </a:lnRef>
-          <a:fillRef idx="3">
-            <a:schemeClr val="accent1"/>
-          </a:fillRef>
-          <a:effectRef idx="2">
-            <a:schemeClr val="accent1"/>
-          </a:effectRef>
-          <a:fontRef idx="minor">
-            <a:schemeClr val="lt1"/>
-          </a:fontRef>
-        </p:style>
-        <p:txBody>
-          <a:bodyPr rtlCol="0" anchor="ctr" wrap="square"/>
-          <a:lstStyle/>
-          <a:p>
-            <a:pPr algn="ctr"/>
-            <a:r>
-              <a:rPr sz="1100" b="1" i="0">
-                <a:solidFill>
-                  <a:srgbClr val="095292"/>
-                </a:solidFill>
-                <a:latin typeface="Calibri"/>
-              </a:rPr>
-              <a:t>Aplicación y datos</a:t>
-            </a:r>
-          </a:p>
-        </p:txBody>
-      </p:sp>
-      <p:sp>
-        <p:nvSpPr>
-          <p:cNvPr id="10" name="Rounded Rectangle 9"/>
-          <p:cNvSpPr/>
-          <p:nvPr/>
-        </p:nvSpPr>
-        <p:spPr>
-          <a:xfrm>
-            <a:off x="548640" y="2743200"/>
-            <a:ext cx="3291840" cy="548640"/>
-          </a:xfrm>
-          <a:prstGeom prst="roundRect">
-            <a:avLst>
-              <a:gd name="adj" fmla="val 12000"/>
-            </a:avLst>
-          </a:prstGeom>
-          <a:solidFill>
-            <a:srgbClr val="FFD000"/>
-          </a:solidFill>
-          <a:ln>
-            <a:noFill/>
-          </a:ln>
-        </p:spPr>
-        <p:style>
-          <a:lnRef idx="1">
-            <a:schemeClr val="accent1"/>
-          </a:lnRef>
-          <a:fillRef idx="3">
-            <a:schemeClr val="accent1"/>
-          </a:fillRef>
-          <a:effectRef idx="2">
-            <a:schemeClr val="accent1"/>
-          </a:effectRef>
-          <a:fontRef idx="minor">
-            <a:schemeClr val="lt1"/>
-          </a:fontRef>
-        </p:style>
-        <p:txBody>
-          <a:bodyPr rtlCol="0" anchor="ctr" wrap="square"/>
-          <a:lstStyle/>
-          <a:p>
-            <a:pPr algn="ctr"/>
-            <a:r>
-              <a:rPr sz="1100" b="1" i="0">
-                <a:solidFill>
-                  <a:srgbClr val="095292"/>
-                </a:solidFill>
-                <a:latin typeface="Calibri"/>
-              </a:rPr>
-              <a:t>Runtime / middleware</a:t>
-            </a:r>
-          </a:p>
-        </p:txBody>
-      </p:sp>
-      <p:sp>
-        <p:nvSpPr>
-          <p:cNvPr id="11" name="Rounded Rectangle 10"/>
-          <p:cNvSpPr/>
-          <p:nvPr/>
-        </p:nvSpPr>
-        <p:spPr>
-          <a:xfrm>
-            <a:off x="548640" y="3383280"/>
-            <a:ext cx="3291840" cy="548640"/>
-          </a:xfrm>
-          <a:prstGeom prst="roundRect">
-            <a:avLst>
-              <a:gd name="adj" fmla="val 12000"/>
-            </a:avLst>
-          </a:prstGeom>
-          <a:solidFill>
-            <a:srgbClr val="FFD000"/>
-          </a:solidFill>
-          <a:ln>
-            <a:noFill/>
-          </a:ln>
-        </p:spPr>
-        <p:style>
-          <a:lnRef idx="1">
-            <a:schemeClr val="accent1"/>
-          </a:lnRef>
-          <a:fillRef idx="3">
-            <a:schemeClr val="accent1"/>
-          </a:fillRef>
-          <a:effectRef idx="2">
-            <a:schemeClr val="accent1"/>
-          </a:effectRef>
-          <a:fontRef idx="minor">
-            <a:schemeClr val="lt1"/>
-          </a:fontRef>
-        </p:style>
-        <p:txBody>
-          <a:bodyPr rtlCol="0" anchor="ctr" wrap="square"/>
-          <a:lstStyle/>
-          <a:p>
-            <a:pPr algn="ctr"/>
-            <a:r>
-              <a:rPr sz="1100" b="1" i="0">
-                <a:solidFill>
-                  <a:srgbClr val="095292"/>
-                </a:solidFill>
-                <a:latin typeface="Calibri"/>
-              </a:rPr>
-              <a:t>Sistema operativo</a:t>
-            </a:r>
-          </a:p>
-        </p:txBody>
-      </p:sp>
-      <p:sp>
-        <p:nvSpPr>
-          <p:cNvPr id="12" name="Rounded Rectangle 11"/>
-          <p:cNvSpPr/>
-          <p:nvPr/>
-        </p:nvSpPr>
-        <p:spPr>
-          <a:xfrm>
-            <a:off x="548640" y="4023360"/>
-            <a:ext cx="3291840" cy="548640"/>
-          </a:xfrm>
-          <a:prstGeom prst="roundRect">
-            <a:avLst>
-              <a:gd name="adj" fmla="val 12000"/>
-            </a:avLst>
-          </a:prstGeom>
-          <a:solidFill>
-            <a:srgbClr val="269CCB"/>
-          </a:solidFill>
-          <a:ln>
-            <a:noFill/>
-          </a:ln>
-        </p:spPr>
-        <p:style>
-          <a:lnRef idx="1">
-            <a:schemeClr val="accent1"/>
-          </a:lnRef>
-          <a:fillRef idx="3">
-            <a:schemeClr val="accent1"/>
-          </a:fillRef>
-          <a:effectRef idx="2">
-            <a:schemeClr val="accent1"/>
-          </a:effectRef>
-          <a:fontRef idx="minor">
-            <a:schemeClr val="lt1"/>
-          </a:fontRef>
-        </p:style>
-        <p:txBody>
-          <a:bodyPr rtlCol="0" anchor="ctr" wrap="square"/>
-          <a:lstStyle/>
-          <a:p>
-            <a:pPr algn="ctr"/>
-            <a:r>
-              <a:rPr sz="1050" b="1" i="0">
-                <a:solidFill>
-                  <a:srgbClr val="FFFFFF"/>
-                </a:solidFill>
-                <a:latin typeface="Calibri"/>
-              </a:rPr>
-              <a:t>Infraestructura
-(cómputo, red, disco)</a:t>
-            </a:r>
-          </a:p>
-        </p:txBody>
-      </p:sp>
-      <p:sp>
-        <p:nvSpPr>
-          <p:cNvPr id="13" name="Rounded Rectangle 12"/>
-          <p:cNvSpPr/>
-          <p:nvPr/>
-        </p:nvSpPr>
-        <p:spPr>
-          <a:xfrm>
-            <a:off x="4160520" y="2103120"/>
-            <a:ext cx="3291840" cy="548640"/>
-          </a:xfrm>
-          <a:prstGeom prst="roundRect">
-            <a:avLst>
-              <a:gd name="adj" fmla="val 12000"/>
-            </a:avLst>
-          </a:prstGeom>
-          <a:solidFill>
-            <a:srgbClr val="FFD000"/>
-          </a:solidFill>
-          <a:ln>
-            <a:noFill/>
-          </a:ln>
-        </p:spPr>
-        <p:style>
-          <a:lnRef idx="1">
-            <a:schemeClr val="accent1"/>
-          </a:lnRef>
-          <a:fillRef idx="3">
-            <a:schemeClr val="accent1"/>
-          </a:fillRef>
-          <a:effectRef idx="2">
-            <a:schemeClr val="accent1"/>
-          </a:effectRef>
-          <a:fontRef idx="minor">
-            <a:schemeClr val="lt1"/>
-          </a:fontRef>
-        </p:style>
-        <p:txBody>
-          <a:bodyPr rtlCol="0" anchor="ctr" wrap="square"/>
-          <a:lstStyle/>
-          <a:p>
-            <a:pPr algn="ctr"/>
-            <a:r>
-              <a:rPr sz="1100" b="1" i="0">
-                <a:solidFill>
-                  <a:srgbClr val="095292"/>
-                </a:solidFill>
-                <a:latin typeface="Calibri"/>
-              </a:rPr>
-              <a:t>Aplicación y datos</a:t>
-            </a:r>
-          </a:p>
-        </p:txBody>
-      </p:sp>
-      <p:sp>
-        <p:nvSpPr>
-          <p:cNvPr id="14" name="Rounded Rectangle 13"/>
-          <p:cNvSpPr/>
-          <p:nvPr/>
-        </p:nvSpPr>
-        <p:spPr>
-          <a:xfrm>
-            <a:off x="4160520" y="2743200"/>
-            <a:ext cx="3291840" cy="548640"/>
-          </a:xfrm>
-          <a:prstGeom prst="roundRect">
-            <a:avLst>
-              <a:gd name="adj" fmla="val 12000"/>
-            </a:avLst>
-          </a:prstGeom>
-          <a:solidFill>
-            <a:srgbClr val="269CCB"/>
-          </a:solidFill>
-          <a:ln>
-            <a:noFill/>
-          </a:ln>
-        </p:spPr>
-        <p:style>
-          <a:lnRef idx="1">
-            <a:schemeClr val="accent1"/>
-          </a:lnRef>
-          <a:fillRef idx="3">
-            <a:schemeClr val="accent1"/>
-          </a:fillRef>
-          <a:effectRef idx="2">
-            <a:schemeClr val="accent1"/>
-          </a:effectRef>
-          <a:fontRef idx="minor">
-            <a:schemeClr val="lt1"/>
-          </a:fontRef>
-        </p:style>
-        <p:txBody>
-          <a:bodyPr rtlCol="0" anchor="ctr" wrap="square"/>
-          <a:lstStyle/>
-          <a:p>
-            <a:pPr algn="ctr"/>
-            <a:r>
-              <a:rPr sz="1100" b="1" i="0">
-                <a:solidFill>
-                  <a:srgbClr val="FFFFFF"/>
-                </a:solidFill>
-                <a:latin typeface="Calibri"/>
-              </a:rPr>
-              <a:t>Runtime / middleware</a:t>
-            </a:r>
-          </a:p>
-        </p:txBody>
-      </p:sp>
-      <p:sp>
-        <p:nvSpPr>
-          <p:cNvPr id="15" name="Rounded Rectangle 14"/>
-          <p:cNvSpPr/>
-          <p:nvPr/>
-        </p:nvSpPr>
-        <p:spPr>
-          <a:xfrm>
-            <a:off x="4160520" y="3383280"/>
-            <a:ext cx="3291840" cy="548640"/>
-          </a:xfrm>
-          <a:prstGeom prst="roundRect">
-            <a:avLst>
-              <a:gd name="adj" fmla="val 12000"/>
-            </a:avLst>
-          </a:prstGeom>
-          <a:solidFill>
-            <a:srgbClr val="269CCB"/>
-          </a:solidFill>
-          <a:ln>
-            <a:noFill/>
-          </a:ln>
-        </p:spPr>
-        <p:style>
-          <a:lnRef idx="1">
-            <a:schemeClr val="accent1"/>
-          </a:lnRef>
-          <a:fillRef idx="3">
-            <a:schemeClr val="accent1"/>
-          </a:fillRef>
-          <a:effectRef idx="2">
-            <a:schemeClr val="accent1"/>
-          </a:effectRef>
-          <a:fontRef idx="minor">
-            <a:schemeClr val="lt1"/>
-          </a:fontRef>
-        </p:style>
-        <p:txBody>
-          <a:bodyPr rtlCol="0" anchor="ctr" wrap="square"/>
-          <a:lstStyle/>
-          <a:p>
-            <a:pPr algn="ctr"/>
-            <a:r>
-              <a:rPr sz="1100" b="1" i="0">
-                <a:solidFill>
-                  <a:srgbClr val="FFFFFF"/>
-                </a:solidFill>
-                <a:latin typeface="Calibri"/>
-              </a:rPr>
-              <a:t>Sistema operativo</a:t>
-            </a:r>
-          </a:p>
-        </p:txBody>
-      </p:sp>
-      <p:sp>
-        <p:nvSpPr>
-          <p:cNvPr id="16" name="Rounded Rectangle 15"/>
-          <p:cNvSpPr/>
-          <p:nvPr/>
-        </p:nvSpPr>
-        <p:spPr>
-          <a:xfrm>
-            <a:off x="4160520" y="4023360"/>
-            <a:ext cx="3291840" cy="548640"/>
-          </a:xfrm>
-          <a:prstGeom prst="roundRect">
-            <a:avLst>
-              <a:gd name="adj" fmla="val 12000"/>
-            </a:avLst>
-          </a:prstGeom>
-          <a:solidFill>
-            <a:srgbClr val="269CCB"/>
-          </a:solidFill>
-          <a:ln>
-            <a:noFill/>
-          </a:ln>
-        </p:spPr>
-        <p:style>
-          <a:lnRef idx="1">
-            <a:schemeClr val="accent1"/>
-          </a:lnRef>
-          <a:fillRef idx="3">
-            <a:schemeClr val="accent1"/>
-          </a:fillRef>
-          <a:effectRef idx="2">
-            <a:schemeClr val="accent1"/>
-          </a:effectRef>
-          <a:fontRef idx="minor">
-            <a:schemeClr val="lt1"/>
-          </a:fontRef>
-        </p:style>
-        <p:txBody>
-          <a:bodyPr rtlCol="0" anchor="ctr" wrap="square"/>
-          <a:lstStyle/>
-          <a:p>
-            <a:pPr algn="ctr"/>
-            <a:r>
-              <a:rPr sz="1050" b="1" i="0">
-                <a:solidFill>
-                  <a:srgbClr val="FFFFFF"/>
-                </a:solidFill>
-                <a:latin typeface="Calibri"/>
-              </a:rPr>
-              <a:t>Infraestructura
-(cómputo, red, disco)</a:t>
-            </a:r>
-          </a:p>
-        </p:txBody>
-      </p:sp>
-      <p:sp>
-        <p:nvSpPr>
-          <p:cNvPr id="17" name="Rounded Rectangle 16"/>
-          <p:cNvSpPr/>
-          <p:nvPr/>
-        </p:nvSpPr>
-        <p:spPr>
-          <a:xfrm>
-            <a:off x="7772400" y="2103120"/>
-            <a:ext cx="3291840" cy="548640"/>
-          </a:xfrm>
-          <a:prstGeom prst="roundRect">
-            <a:avLst>
-              <a:gd name="adj" fmla="val 12000"/>
-            </a:avLst>
-          </a:prstGeom>
-          <a:solidFill>
-            <a:srgbClr val="FFD000"/>
-          </a:solidFill>
-          <a:ln>
-            <a:noFill/>
-          </a:ln>
-        </p:spPr>
-        <p:style>
-          <a:lnRef idx="1">
-            <a:schemeClr val="accent1"/>
-          </a:lnRef>
-          <a:fillRef idx="3">
-            <a:schemeClr val="accent1"/>
-          </a:fillRef>
-          <a:effectRef idx="2">
-            <a:schemeClr val="accent1"/>
-          </a:effectRef>
-          <a:fontRef idx="minor">
-            <a:schemeClr val="lt1"/>
-          </a:fontRef>
-        </p:style>
-        <p:txBody>
-          <a:bodyPr rtlCol="0" anchor="ctr" wrap="square"/>
-          <a:lstStyle/>
-          <a:p>
-            <a:pPr algn="ctr"/>
-            <a:r>
-              <a:rPr sz="1050" b="1" i="0">
-                <a:solidFill>
-                  <a:srgbClr val="095292"/>
-                </a:solidFill>
-                <a:latin typeface="Calibri"/>
-              </a:rPr>
-              <a:t>Aplicación y datos
-(usted solo configura)</a:t>
-            </a:r>
-          </a:p>
-        </p:txBody>
-      </p:sp>
-      <p:sp>
-        <p:nvSpPr>
-          <p:cNvPr id="18" name="Rounded Rectangle 17"/>
-          <p:cNvSpPr/>
-          <p:nvPr/>
-        </p:nvSpPr>
-        <p:spPr>
-          <a:xfrm>
-            <a:off x="7772400" y="2743200"/>
-            <a:ext cx="3291840" cy="548640"/>
-          </a:xfrm>
-          <a:prstGeom prst="roundRect">
-            <a:avLst>
-              <a:gd name="adj" fmla="val 12000"/>
-            </a:avLst>
-          </a:prstGeom>
-          <a:solidFill>
-            <a:srgbClr val="269CCB"/>
-          </a:solidFill>
-          <a:ln>
-            <a:noFill/>
-          </a:ln>
-        </p:spPr>
-        <p:style>
-          <a:lnRef idx="1">
-            <a:schemeClr val="accent1"/>
-          </a:lnRef>
-          <a:fillRef idx="3">
-            <a:schemeClr val="accent1"/>
-          </a:fillRef>
-          <a:effectRef idx="2">
-            <a:schemeClr val="accent1"/>
-          </a:effectRef>
-          <a:fontRef idx="minor">
-            <a:schemeClr val="lt1"/>
-          </a:fontRef>
-        </p:style>
-        <p:txBody>
-          <a:bodyPr rtlCol="0" anchor="ctr" wrap="square"/>
-          <a:lstStyle/>
-          <a:p>
-            <a:pPr algn="ctr"/>
-            <a:r>
-              <a:rPr sz="1100" b="1" i="0">
-                <a:solidFill>
-                  <a:srgbClr val="FFFFFF"/>
-                </a:solidFill>
-                <a:latin typeface="Calibri"/>
-              </a:rPr>
-              <a:t>Runtime / middleware</a:t>
-            </a:r>
-          </a:p>
-        </p:txBody>
-      </p:sp>
-      <p:sp>
-        <p:nvSpPr>
-          <p:cNvPr id="19" name="Rounded Rectangle 18"/>
-          <p:cNvSpPr/>
-          <p:nvPr/>
-        </p:nvSpPr>
-        <p:spPr>
-          <a:xfrm>
-            <a:off x="7772400" y="3383280"/>
-            <a:ext cx="3291840" cy="548640"/>
-          </a:xfrm>
-          <a:prstGeom prst="roundRect">
-            <a:avLst>
-              <a:gd name="adj" fmla="val 12000"/>
-            </a:avLst>
-          </a:prstGeom>
-          <a:solidFill>
-            <a:srgbClr val="269CCB"/>
-          </a:solidFill>
-          <a:ln>
-            <a:noFill/>
-          </a:ln>
-        </p:spPr>
-        <p:style>
-          <a:lnRef idx="1">
-            <a:schemeClr val="accent1"/>
-          </a:lnRef>
-          <a:fillRef idx="3">
-            <a:schemeClr val="accent1"/>
-          </a:fillRef>
-          <a:effectRef idx="2">
-            <a:schemeClr val="accent1"/>
-          </a:effectRef>
-          <a:fontRef idx="minor">
-            <a:schemeClr val="lt1"/>
-          </a:fontRef>
-        </p:style>
-        <p:txBody>
-          <a:bodyPr rtlCol="0" anchor="ctr" wrap="square"/>
-          <a:lstStyle/>
-          <a:p>
-            <a:pPr algn="ctr"/>
-            <a:r>
-              <a:rPr sz="1100" b="1" i="0">
-                <a:solidFill>
-                  <a:srgbClr val="FFFFFF"/>
-                </a:solidFill>
-                <a:latin typeface="Calibri"/>
-              </a:rPr>
-              <a:t>Sistema operativo</a:t>
-            </a:r>
-          </a:p>
-        </p:txBody>
-      </p:sp>
-      <p:sp>
-        <p:nvSpPr>
-          <p:cNvPr id="20" name="Rounded Rectangle 19"/>
-          <p:cNvSpPr/>
-          <p:nvPr/>
-        </p:nvSpPr>
-        <p:spPr>
-          <a:xfrm>
-            <a:off x="7772400" y="4023360"/>
-            <a:ext cx="3291840" cy="548640"/>
-          </a:xfrm>
-          <a:prstGeom prst="roundRect">
-            <a:avLst>
-              <a:gd name="adj" fmla="val 12000"/>
-            </a:avLst>
-          </a:prstGeom>
-          <a:solidFill>
-            <a:srgbClr val="269CCB"/>
-          </a:solidFill>
-          <a:ln>
-            <a:noFill/>
-          </a:ln>
-        </p:spPr>
-        <p:style>
-          <a:lnRef idx="1">
-            <a:schemeClr val="accent1"/>
-          </a:lnRef>
-          <a:fillRef idx="3">
-            <a:schemeClr val="accent1"/>
-          </a:fillRef>
-          <a:effectRef idx="2">
-            <a:schemeClr val="accent1"/>
-          </a:effectRef>
-          <a:fontRef idx="minor">
-            <a:schemeClr val="lt1"/>
-          </a:fontRef>
-        </p:style>
-        <p:txBody>
-          <a:bodyPr rtlCol="0" anchor="ctr" wrap="square"/>
-          <a:lstStyle/>
-          <a:p>
-            <a:pPr algn="ctr"/>
-            <a:r>
-              <a:rPr sz="1050" b="1" i="0">
-                <a:solidFill>
-                  <a:srgbClr val="FFFFFF"/>
-                </a:solidFill>
-                <a:latin typeface="Calibri"/>
-              </a:rPr>
-              <a:t>Infraestructura
-(cómputo, red, disco)</a:t>
-            </a:r>
-          </a:p>
-        </p:txBody>
-      </p:sp>
-      <p:sp>
-        <p:nvSpPr>
-          <p:cNvPr id="21" name="TextBox 20"/>
-          <p:cNvSpPr txBox="1"/>
-          <p:nvPr/>
-        </p:nvSpPr>
-        <p:spPr>
-          <a:xfrm>
-            <a:off x="457200" y="5897880"/>
-            <a:ext cx="11277295" cy="320040"/>
-          </a:xfrm>
-          <a:prstGeom prst="rect">
-            <a:avLst/>
-          </a:prstGeom>
-          <a:noFill/>
-        </p:spPr>
-        <p:txBody>
-          <a:bodyPr wrap="square">
-            <a:spAutoFit/>
-          </a:bodyPr>
-          <a:lstStyle/>
-          <a:p>
-            <a:r>
-              <a:rPr sz="1050" b="0" i="1">
-                <a:solidFill>
-                  <a:srgbClr val="666666"/>
-                </a:solidFill>
-                <a:latin typeface="Calibri"/>
-              </a:rPr>
-              <a:t>Amarillo = lo administra usted · Celeste = lo administra el proveedor</a:t>
-            </a:r>
-          </a:p>
-        </p:txBody>
-      </p:sp>
-      <p:sp>
-        <p:nvSpPr>
-          <p:cNvPr id="22" name="TextBox 21"/>
-          <p:cNvSpPr txBox="1"/>
-          <p:nvPr/>
-        </p:nvSpPr>
-        <p:spPr>
-          <a:xfrm>
-            <a:off x="457200" y="6263640"/>
-            <a:ext cx="11277295" cy="411480"/>
-          </a:xfrm>
-          <a:prstGeom prst="rect">
-            <a:avLst/>
-          </a:prstGeom>
-          <a:noFill/>
-        </p:spPr>
-        <p:txBody>
-          <a:bodyPr wrap="square">
-            <a:spAutoFit/>
-          </a:bodyPr>
-          <a:lstStyle/>
-          <a:p>
-            <a:r>
-              <a:rPr sz="1100" b="0" i="1">
-                <a:solidFill>
-                  <a:srgbClr val="666666"/>
-                </a:solidFill>
-                <a:latin typeface="Calibri"/>
-              </a:rPr>
-              <a:t>Suba en la pila y sube el control, pero también lo que tiene que operar usted: parches, escalado, disponibilidad. Para el MVP de la app, PaaS es el punto medio: usted solo responde por su aplicación y sus datos.</a:t>
-            </a:r>
-          </a:p>
-        </p:txBody>
-      </p:sp>
-      <p:sp>
-        <p:nvSpPr>
-          <p:cNvPr id="23" name="TextBox 22"/>
-          <p:cNvSpPr txBox="1"/>
-          <p:nvPr/>
-        </p:nvSpPr>
-        <p:spPr>
-          <a:xfrm>
-            <a:off x="11185855" y="6473952"/>
-            <a:ext cx="640080" cy="274320"/>
-          </a:xfrm>
-          <a:prstGeom prst="rect">
-            <a:avLst/>
-          </a:prstGeom>
-          <a:noFill/>
-        </p:spPr>
-        <p:txBody>
-          <a:bodyPr wrap="square">
-            <a:spAutoFit/>
-          </a:bodyPr>
-          <a:lstStyle/>
-          <a:p>
-            <a:pPr algn="r"/>
-            <a:r>
-              <a:rPr sz="1100" b="0" i="0">
-                <a:solidFill>
-                  <a:srgbClr val="666666"/>
-                </a:solidFill>
-                <a:latin typeface="Calibri"/>
-              </a:rPr>
-              <a:t>25</a:t>
-            </a:r>
-          </a:p>
-        </p:txBody>
-      </p:sp>
-    </p:spTree>
-  </p:cSld>
-  <p:clrMapOvr>
-    <a:masterClrMapping/>
-  </p:clrMapOvr>
-</p:sld>
-</file>
-
-<file path=ppt/slides/slide26.xml><?xml version="1.0" encoding="utf-8"?>
-<p:sld xmlns:a="http://schemas.openxmlformats.org/drawingml/2006/main" xmlns:p="http://schemas.openxmlformats.org/presentationml/2006/main" xmlns:r="http://schemas.openxmlformats.org/officeDocument/2006/relationships">
-  <p:cSld>
-    <p:bg>
-      <p:bgPr>
-        <a:solidFill>
-          <a:srgbClr val="FFFFFF"/>
-        </a:solidFill>
-        <a:effectLst/>
-      </p:bgPr>
-    </p:bg>
-    <p:spTree>
-      <p:nvGrpSpPr>
-        <p:cNvPr id="1" name=""/>
-        <p:cNvGrpSpPr/>
-        <p:nvPr/>
-      </p:nvGrpSpPr>
-      <p:grpSpPr/>
-      <p:sp>
-        <p:nvSpPr>
-          <p:cNvPr id="2" name="Rectangle 1"/>
-          <p:cNvSpPr/>
-          <p:nvPr/>
-        </p:nvSpPr>
-        <p:spPr>
-          <a:xfrm>
-            <a:off x="0" y="0"/>
-            <a:ext cx="12191695" cy="960120"/>
-          </a:xfrm>
-          <a:prstGeom prst="rect">
-            <a:avLst/>
-          </a:prstGeom>
-          <a:solidFill>
-            <a:srgbClr val="095292"/>
-          </a:solidFill>
-          <a:ln>
-            <a:noFill/>
-          </a:ln>
-        </p:spPr>
-        <p:style>
-          <a:lnRef idx="1">
-            <a:schemeClr val="accent1"/>
-          </a:lnRef>
-          <a:fillRef idx="3">
-            <a:schemeClr val="accent1"/>
-          </a:fillRef>
-          <a:effectRef idx="2">
-            <a:schemeClr val="accent1"/>
-          </a:effectRef>
-          <a:fontRef idx="minor">
-            <a:schemeClr val="lt1"/>
-          </a:fontRef>
-        </p:style>
-        <p:txBody>
-          <a:bodyPr rtlCol="0" anchor="ctr"/>
-          <a:lstStyle/>
-          <a:p>
-            <a:pPr algn="ctr"/>
-          </a:p>
-        </p:txBody>
-      </p:sp>
-      <p:sp>
-        <p:nvSpPr>
-          <p:cNvPr id="3" name="Rectangle 2"/>
-          <p:cNvSpPr/>
-          <p:nvPr/>
-        </p:nvSpPr>
-        <p:spPr>
-          <a:xfrm>
-            <a:off x="0" y="960120"/>
-            <a:ext cx="12191695" cy="41148"/>
-          </a:xfrm>
-          <a:prstGeom prst="rect">
-            <a:avLst/>
-          </a:prstGeom>
-          <a:solidFill>
-            <a:srgbClr val="FFD000"/>
-          </a:solidFill>
-          <a:ln>
-            <a:noFill/>
-          </a:ln>
-        </p:spPr>
-        <p:style>
-          <a:lnRef idx="1">
-            <a:schemeClr val="accent1"/>
-          </a:lnRef>
-          <a:fillRef idx="3">
-            <a:schemeClr val="accent1"/>
-          </a:fillRef>
-          <a:effectRef idx="2">
-            <a:schemeClr val="accent1"/>
-          </a:effectRef>
-          <a:fontRef idx="minor">
-            <a:schemeClr val="lt1"/>
-          </a:fontRef>
-        </p:style>
-        <p:txBody>
-          <a:bodyPr rtlCol="0" anchor="ctr"/>
-          <a:lstStyle/>
-          <a:p>
-            <a:pPr algn="ctr"/>
-          </a:p>
-        </p:txBody>
-      </p:sp>
-      <p:sp>
-        <p:nvSpPr>
-          <p:cNvPr id="4" name="TextBox 3"/>
-          <p:cNvSpPr txBox="1"/>
-          <p:nvPr/>
-        </p:nvSpPr>
-        <p:spPr>
-          <a:xfrm>
-            <a:off x="457200" y="164592"/>
-            <a:ext cx="11277295" cy="502920"/>
-          </a:xfrm>
-          <a:prstGeom prst="rect">
-            <a:avLst/>
-          </a:prstGeom>
-          <a:noFill/>
-        </p:spPr>
-        <p:txBody>
-          <a:bodyPr wrap="square">
-            <a:spAutoFit/>
-          </a:bodyPr>
-          <a:lstStyle/>
-          <a:p>
-            <a:r>
-              <a:rPr sz="2600" b="1" i="0">
-                <a:solidFill>
-                  <a:srgbClr val="FFFFFF"/>
-                </a:solidFill>
-                <a:latin typeface="Calibri"/>
-              </a:rPr>
-              <a:t>ADR-001 — las 6 secciones caben en una pagina</a:t>
-            </a:r>
-          </a:p>
-        </p:txBody>
-      </p:sp>
-      <p:sp>
-        <p:nvSpPr>
-          <p:cNvPr id="5" name="Rounded Rectangle 4"/>
-          <p:cNvSpPr/>
-          <p:nvPr/>
-        </p:nvSpPr>
-        <p:spPr>
-          <a:xfrm>
-            <a:off x="457200" y="1261872"/>
-            <a:ext cx="11277295" cy="4773168"/>
-          </a:xfrm>
-          <a:prstGeom prst="roundRect">
-            <a:avLst>
-              <a:gd name="adj" fmla="val 12000"/>
-            </a:avLst>
-          </a:prstGeom>
-          <a:solidFill>
-            <a:srgbClr val="1E2A38"/>
-          </a:solidFill>
-          <a:ln>
-            <a:noFill/>
-          </a:ln>
-        </p:spPr>
-        <p:style>
-          <a:lnRef idx="1">
-            <a:schemeClr val="accent1"/>
-          </a:lnRef>
-          <a:fillRef idx="3">
-            <a:schemeClr val="accent1"/>
-          </a:fillRef>
-          <a:effectRef idx="2">
-            <a:schemeClr val="accent1"/>
-          </a:effectRef>
-          <a:fontRef idx="minor">
-            <a:schemeClr val="lt1"/>
-          </a:fontRef>
-        </p:style>
-        <p:txBody>
-          <a:bodyPr rtlCol="0" anchor="ctr"/>
-          <a:lstStyle/>
-          <a:p>
-            <a:pPr algn="ctr"/>
-          </a:p>
-        </p:txBody>
-      </p:sp>
-      <p:sp>
-        <p:nvSpPr>
-          <p:cNvPr id="6" name="Rectangle 5"/>
-          <p:cNvSpPr/>
-          <p:nvPr/>
-        </p:nvSpPr>
-        <p:spPr>
-          <a:xfrm>
-            <a:off x="457200" y="1261872"/>
-            <a:ext cx="11277295" cy="320040"/>
-          </a:xfrm>
-          <a:prstGeom prst="rect">
-            <a:avLst/>
-          </a:prstGeom>
-          <a:solidFill>
-            <a:srgbClr val="095292"/>
-          </a:solidFill>
-          <a:ln>
-            <a:noFill/>
-          </a:ln>
-        </p:spPr>
-        <p:style>
-          <a:lnRef idx="1">
-            <a:schemeClr val="accent1"/>
-          </a:lnRef>
-          <a:fillRef idx="3">
-            <a:schemeClr val="accent1"/>
-          </a:fillRef>
-          <a:effectRef idx="2">
-            <a:schemeClr val="accent1"/>
-          </a:effectRef>
-          <a:fontRef idx="minor">
-            <a:schemeClr val="lt1"/>
-          </a:fontRef>
-        </p:style>
-        <p:txBody>
-          <a:bodyPr rtlCol="0" anchor="ctr"/>
-          <a:lstStyle/>
-          <a:p>
-            <a:pPr algn="ctr"/>
-          </a:p>
-        </p:txBody>
-      </p:sp>
-      <p:sp>
-        <p:nvSpPr>
-          <p:cNvPr id="7" name="TextBox 6"/>
-          <p:cNvSpPr txBox="1"/>
-          <p:nvPr/>
-        </p:nvSpPr>
-        <p:spPr>
-          <a:xfrm>
-            <a:off x="685800" y="1307592"/>
-            <a:ext cx="10820095" cy="256032"/>
-          </a:xfrm>
-          <a:prstGeom prst="rect">
-            <a:avLst/>
-          </a:prstGeom>
-          <a:noFill/>
-        </p:spPr>
-        <p:txBody>
-          <a:bodyPr wrap="square" anchor="ctr"/>
-          <a:lstStyle/>
-          <a:p>
-            <a:r>
-              <a:rPr sz="1000" b="1" i="0">
-                <a:solidFill>
-                  <a:srgbClr val="269CCB"/>
-                </a:solidFill>
-                <a:latin typeface="Calibri"/>
-              </a:rPr>
-              <a:t>● ● ●</a:t>
-            </a:r>
-          </a:p>
-        </p:txBody>
-      </p:sp>
-      <p:sp>
-        <p:nvSpPr>
-          <p:cNvPr id="8" name="TextBox 7"/>
-          <p:cNvSpPr txBox="1"/>
-          <p:nvPr/>
-        </p:nvSpPr>
-        <p:spPr>
-          <a:xfrm>
-            <a:off x="777240" y="1719072"/>
-            <a:ext cx="10637215" cy="4133087"/>
-          </a:xfrm>
-          <a:prstGeom prst="rect">
-            <a:avLst/>
-          </a:prstGeom>
-          <a:noFill/>
-        </p:spPr>
-        <p:txBody>
-          <a:bodyPr wrap="square">
-            <a:spAutoFit/>
-          </a:bodyPr>
-          <a:lstStyle/>
-          <a:p>
-            <a:pPr>
-              <a:spcAft>
-                <a:spcPts val="400"/>
-              </a:spcAft>
-            </a:pPr>
-            <a:r>
-              <a:rPr sz="1400" b="0" i="0">
-                <a:solidFill>
-                  <a:srgbClr val="FFFFFF"/>
-                </a:solidFill>
-                <a:latin typeface="Calibri"/>
-              </a:rPr>
-              <a:t>## 1. Titulo     ADR-001 Modelo de servicio dominante de la app</a:t>
-            </a:r>
-          </a:p>
-          <a:p>
-            <a:pPr>
-              <a:spcAft>
-                <a:spcPts val="400"/>
-              </a:spcAft>
-            </a:pPr>
-            <a:r>
-              <a:rPr sz="1400" b="0" i="0">
-                <a:solidFill>
-                  <a:srgbClr val="FFFFFF"/>
-                </a:solidFill>
-                <a:latin typeface="Calibri"/>
-              </a:rPr>
-              <a:t>## 2. Estado     Aceptado — &lt;fecha de hoy&gt;</a:t>
-            </a:r>
-          </a:p>
-          <a:p>
-            <a:pPr>
-              <a:spcAft>
-                <a:spcPts val="400"/>
-              </a:spcAft>
-            </a:pPr>
-            <a:r>
-              <a:rPr sz="1400" b="0" i="0">
-                <a:solidFill>
-                  <a:srgbClr val="FFFFFF"/>
-                </a:solidFill>
-                <a:latin typeface="Calibri"/>
-              </a:rPr>
-              <a:t/>
-            </a:r>
-          </a:p>
-          <a:p>
-            <a:pPr>
-              <a:spcAft>
-                <a:spcPts val="400"/>
-              </a:spcAft>
-            </a:pPr>
-            <a:r>
-              <a:rPr sz="1400" b="0" i="0">
-                <a:solidFill>
-                  <a:srgbClr val="FFFFFF"/>
-                </a:solidFill>
-                <a:latin typeface="Calibri"/>
-              </a:rPr>
-              <a:t>## 3. Contexto                    &lt;- restricciones, no resumen del tema</a:t>
-            </a:r>
-          </a:p>
-          <a:p>
-            <a:pPr>
-              <a:spcAft>
-                <a:spcPts val="400"/>
-              </a:spcAft>
-            </a:pPr>
-            <a:r>
-              <a:rPr sz="1400" b="0" i="0">
-                <a:solidFill>
-                  <a:srgbClr val="FFFFFF"/>
-                </a:solidFill>
-                <a:latin typeface="Calibri"/>
-              </a:rPr>
-              <a:t>Lo sostengo yo solo, 12 semanas, sin presupuesto cloud ni tarjeta; demo viva el dia de la sustentacion.</a:t>
-            </a:r>
-          </a:p>
-          <a:p>
-            <a:pPr>
-              <a:spcAft>
-                <a:spcPts val="400"/>
-              </a:spcAft>
-            </a:pPr>
-            <a:r>
-              <a:rPr sz="1400" b="0" i="0">
-                <a:solidFill>
-                  <a:srgbClr val="FFFFFF"/>
-                </a:solidFill>
-                <a:latin typeface="Calibri"/>
-              </a:rPr>
-              <a:t/>
-            </a:r>
-          </a:p>
-          <a:p>
-            <a:pPr>
-              <a:spcAft>
-                <a:spcPts val="400"/>
-              </a:spcAft>
-            </a:pPr>
-            <a:r>
-              <a:rPr sz="1400" b="0" i="0">
-                <a:solidFill>
-                  <a:srgbClr val="FFFFFF"/>
-                </a:solidFill>
-                <a:latin typeface="Calibri"/>
-              </a:rPr>
-              <a:t>## 4. Decision                    &lt;- UNA frase, UN modelo dominante</a:t>
-            </a:r>
-          </a:p>
-          <a:p>
-            <a:pPr>
-              <a:spcAft>
-                <a:spcPts val="400"/>
-              </a:spcAft>
-            </a:pPr>
-            <a:r>
-              <a:rPr sz="1400" b="0" i="0">
-                <a:solidFill>
-                  <a:srgbClr val="FFFFFF"/>
-                </a:solidFill>
-                <a:latin typeface="Calibri"/>
-              </a:rPr>
-              <a:t>La aplicacion de la app se despliega sobre PaaS.</a:t>
-            </a:r>
-          </a:p>
-          <a:p>
-            <a:pPr>
-              <a:spcAft>
-                <a:spcPts val="400"/>
-              </a:spcAft>
-            </a:pPr>
-            <a:r>
-              <a:rPr sz="1400" b="0" i="0">
-                <a:solidFill>
-                  <a:srgbClr val="FFFFFF"/>
-                </a:solidFill>
-                <a:latin typeface="Calibri"/>
-              </a:rPr>
-              <a:t/>
-            </a:r>
-          </a:p>
-          <a:p>
-            <a:pPr>
-              <a:spcAft>
-                <a:spcPts val="400"/>
-              </a:spcAft>
-            </a:pPr>
-            <a:r>
-              <a:rPr sz="1400" b="0" i="0">
-                <a:solidFill>
-                  <a:srgbClr val="FFFFFF"/>
-                </a:solidFill>
-                <a:latin typeface="Calibri"/>
-              </a:rPr>
-              <a:t>## 5. Alternativas descartadas    &lt;- exactamente 2, con motivo del dominio</a:t>
-            </a:r>
-          </a:p>
-          <a:p>
-            <a:pPr>
-              <a:spcAft>
-                <a:spcPts val="400"/>
-              </a:spcAft>
-            </a:pPr>
-            <a:r>
-              <a:rPr sz="1400" b="0" i="0">
-                <a:solidFill>
-                  <a:srgbClr val="FFFFFF"/>
-                </a:solidFill>
-                <a:latin typeface="Calibri"/>
-              </a:rPr>
-              <a:t>- IaaS: control total, pero yo opero SO y parches -&gt; tiempo que no tengo.</a:t>
-            </a:r>
-          </a:p>
-          <a:p>
-            <a:pPr>
-              <a:spcAft>
-                <a:spcPts val="400"/>
-              </a:spcAft>
-            </a:pPr>
-            <a:r>
-              <a:rPr sz="1400" b="0" i="0">
-                <a:solidFill>
-                  <a:srgbClr val="FFFFFF"/>
-                </a:solidFill>
-                <a:latin typeface="Calibri"/>
-              </a:rPr>
-              <a:t>- SaaS como nucleo: no queda nada que arquitecturar; solo satelite (auth/email).</a:t>
-            </a:r>
-          </a:p>
-          <a:p>
-            <a:pPr>
-              <a:spcAft>
-                <a:spcPts val="400"/>
-              </a:spcAft>
-            </a:pPr>
-            <a:r>
-              <a:rPr sz="1400" b="0" i="0">
-                <a:solidFill>
-                  <a:srgbClr val="FFFFFF"/>
-                </a:solidFill>
-                <a:latin typeface="Calibri"/>
-              </a:rPr>
-              <a:t/>
-            </a:r>
-          </a:p>
-          <a:p>
-            <a:pPr>
-              <a:spcAft>
-                <a:spcPts val="400"/>
-              </a:spcAft>
-            </a:pPr>
-            <a:r>
-              <a:rPr sz="1400" b="0" i="0">
-                <a:solidFill>
-                  <a:srgbClr val="FFFFFF"/>
-                </a:solidFill>
-                <a:latin typeface="Calibri"/>
-              </a:rPr>
-              <a:t>## 6. Consecuencias               &lt;- 3 ejes, cada uno con + y -</a:t>
-            </a:r>
-          </a:p>
-          <a:p>
-            <a:pPr>
-              <a:spcAft>
-                <a:spcPts val="400"/>
-              </a:spcAft>
-            </a:pPr>
-            <a:r>
-              <a:rPr sz="1400" b="0" i="0">
-                <a:solidFill>
-                  <a:srgbClr val="FFFFFF"/>
-                </a:solidFill>
-                <a:latin typeface="Calibri"/>
-              </a:rPr>
-              <a:t>Operacion + / -        Costo + / -        Aprendizaje + / -</a:t>
-            </a:r>
-          </a:p>
-        </p:txBody>
-      </p:sp>
-      <p:sp>
-        <p:nvSpPr>
-          <p:cNvPr id="9" name="TextBox 8"/>
-          <p:cNvSpPr txBox="1"/>
-          <p:nvPr/>
-        </p:nvSpPr>
-        <p:spPr>
-          <a:xfrm>
-            <a:off x="457200" y="6080760"/>
-            <a:ext cx="11277295" cy="320040"/>
-          </a:xfrm>
-          <a:prstGeom prst="rect">
-            <a:avLst/>
-          </a:prstGeom>
-          <a:noFill/>
-        </p:spPr>
-        <p:txBody>
-          <a:bodyPr wrap="square">
-            <a:spAutoFit/>
-          </a:bodyPr>
-          <a:lstStyle/>
-          <a:p>
-            <a:pPr algn="ctr"/>
-            <a:r>
-              <a:rPr sz="1200" b="0" i="1">
-                <a:solidFill>
-                  <a:srgbClr val="666666"/>
-                </a:solidFill>
-                <a:latin typeface="Calibri"/>
-              </a:rPr>
-              <a:t>Sin Titulo y Estado con fecha no hay ADR que citar despues: es su identidad.</a:t>
-            </a:r>
-          </a:p>
-        </p:txBody>
-      </p:sp>
-      <p:sp>
-        <p:nvSpPr>
-          <p:cNvPr id="10" name="TextBox 9"/>
-          <p:cNvSpPr txBox="1"/>
-          <p:nvPr/>
-        </p:nvSpPr>
-        <p:spPr>
-          <a:xfrm>
-            <a:off x="11185855" y="6473952"/>
-            <a:ext cx="640080" cy="274320"/>
-          </a:xfrm>
-          <a:prstGeom prst="rect">
-            <a:avLst/>
-          </a:prstGeom>
-          <a:noFill/>
-        </p:spPr>
-        <p:txBody>
-          <a:bodyPr wrap="square">
-            <a:spAutoFit/>
-          </a:bodyPr>
-          <a:lstStyle/>
-          <a:p>
-            <a:pPr algn="r"/>
-            <a:r>
-              <a:rPr sz="1100" b="0" i="0">
-                <a:solidFill>
-                  <a:srgbClr val="666666"/>
-                </a:solidFill>
-                <a:latin typeface="Calibri"/>
-              </a:rPr>
-              <a:t>26</a:t>
-            </a:r>
-          </a:p>
-        </p:txBody>
-      </p:sp>
-    </p:spTree>
-  </p:cSld>
-  <p:clrMapOvr>
-    <a:masterClrMapping/>
-  </p:clrMapOvr>
-</p:sld>
-</file>
-
-<file path=ppt/slides/slide27.xml><?xml version="1.0" encoding="utf-8"?>
-<p:sld xmlns:a="http://schemas.openxmlformats.org/drawingml/2006/main" xmlns:p="http://schemas.openxmlformats.org/presentationml/2006/main" xmlns:r="http://schemas.openxmlformats.org/officeDocument/2006/relationships">
-  <p:cSld>
-    <p:bg>
-      <p:bgPr>
-        <a:solidFill>
-          <a:srgbClr val="FFFFFF"/>
-        </a:solidFill>
-        <a:effectLst/>
-      </p:bgPr>
-    </p:bg>
-    <p:spTree>
-      <p:nvGrpSpPr>
-        <p:cNvPr id="1" name=""/>
-        <p:cNvGrpSpPr/>
-        <p:nvPr/>
-      </p:nvGrpSpPr>
-      <p:grpSpPr/>
-      <p:sp>
-        <p:nvSpPr>
-          <p:cNvPr id="2" name="Rectangle 1"/>
-          <p:cNvSpPr/>
-          <p:nvPr/>
-        </p:nvSpPr>
-        <p:spPr>
-          <a:xfrm>
-            <a:off x="0" y="0"/>
             <a:ext cx="12191695" cy="164592"/>
           </a:xfrm>
           <a:prstGeom prst="rect">
@@ -13033,7 +11431,7 @@
                 </a:solidFill>
                 <a:latin typeface="Calibri"/>
               </a:rPr>
-              <a:t>–   El punto de partida es lo definido en la Clase 1: cada estudiante ya tiene un dominio para la app, tres a cinco capacidades, sus actores y un diagrama de contexto.</a:t>
+              <a:t>–   La pregunta de hoy es la siguiente en orden logico: si ese sistema va a vivir en la nube, quien administra cada capa de la maquinaria que lo sostiene.</a:t>
             </a:r>
           </a:p>
           <a:p>
@@ -13049,7 +11447,7 @@
                 </a:solidFill>
                 <a:latin typeface="Calibri"/>
               </a:rPr>
-              <a:t>–   La pregunta de hoy es la siguiente en orden logico: si ese sistema va a vivir en la nube, quien administra cada capa de la maquinaria que lo sostiene.</a:t>
+              <a:t>–   No hay una sola respuesta, hay tres respuestas estandar que la industria llama IaaS, PaaS y SaaS, y elegir entre ellas es una decision de arquitectura con consecuencias medibles en costo, velocidad de entrega, seguridad y libertad futura.</a:t>
             </a:r>
           </a:p>
           <a:p>
@@ -13065,7 +11463,23 @@
                 </a:solidFill>
                 <a:latin typeface="Calibri"/>
               </a:rPr>
-              <a:t>–   No hay una sola respuesta, hay tres respuestas estandar que la industria llama IaaS, PaaS y SaaS, y elegir entre ellas es una decision de arquitectura con consecuencias medibles en costo, velocidad de entrega, seguridad y libertad futura.</a:t>
+              <a:t>–   Las tres respuestas se distinguen por una sola pregunta: hasta que capa administra el proveedor.</a:t>
+            </a:r>
+          </a:p>
+          <a:p>
+            <a:pPr>
+              <a:spcAft>
+                <a:spcPts val="800"/>
+              </a:spcAft>
+            </a:pPr>
+            <a:r>
+              <a:rPr sz="2000" b="0" i="0">
+                <a:solidFill>
+                  <a:srgbClr val="333333"/>
+                </a:solidFill>
+                <a:latin typeface="Calibri"/>
+              </a:rPr>
+              <a:t>–   Un error comun es creer que un modelo es mejor en abstracto: se elige por componente.</a:t>
             </a:r>
           </a:p>
         </p:txBody>
@@ -13246,7 +11660,7 @@
                 </a:solidFill>
                 <a:latin typeface="Calibri"/>
               </a:rPr>
-              <a:t>La pila de responsabilidades: donde se corta la linea (1/2)</a:t>
+              <a:t>La pila de responsabilidades: donde se corta la linea</a:t>
             </a:r>
           </a:p>
         </p:txBody>
@@ -13318,6 +11732,54 @@
                 <a:latin typeface="Calibri"/>
               </a:rPr>
               <a:t>–   El sistema operativo de cada maquina, el runtime o entorno de ejecucion (por ejemplo Node.js, Python o la maquina virtual de Java) junto con servicios de apoyo como la base de datos</a:t>
+            </a:r>
+          </a:p>
+          <a:p>
+            <a:pPr>
+              <a:spcAft>
+                <a:spcPts val="800"/>
+              </a:spcAft>
+            </a:pPr>
+            <a:r>
+              <a:rPr sz="2000" b="0" i="0">
+                <a:solidFill>
+                  <a:srgbClr val="333333"/>
+                </a:solidFill>
+                <a:latin typeface="Calibri"/>
+              </a:rPr>
+              <a:t>–   Y finalmente el codigo de la aplicacion, sus datos y la administracion de usuarios y permisos.</a:t>
+            </a:r>
+          </a:p>
+          <a:p>
+            <a:pPr>
+              <a:spcAft>
+                <a:spcPts val="800"/>
+              </a:spcAft>
+            </a:pPr>
+            <a:r>
+              <a:rPr sz="2000" b="0" i="0">
+                <a:solidFill>
+                  <a:srgbClr val="333333"/>
+                </a:solidFill>
+                <a:latin typeface="Calibri"/>
+              </a:rPr>
+              <a:t>–   Son ocho o nueve capas segun como se cuente.</a:t>
+            </a:r>
+          </a:p>
+          <a:p>
+            <a:pPr>
+              <a:spcAft>
+                <a:spcPts val="800"/>
+              </a:spcAft>
+            </a:pPr>
+            <a:r>
+              <a:rPr sz="2000" b="0" i="0">
+                <a:solidFill>
+                  <a:srgbClr val="333333"/>
+                </a:solidFill>
+                <a:latin typeface="Calibri"/>
+              </a:rPr>
+              <a:t>–   En el modelo tradicional, llamado on-premise porque los equipos son propios y estan en las instalaciones de la organizacion, todas son responsabilidad del cliente.</a:t>
             </a:r>
           </a:p>
         </p:txBody>

--- a/Arquitectura de Sistemas Computacionales/Clases/Clase 2 - Modelos de servicio IaaS PaaS SaaS/Presentacion.pptx
+++ b/Arquitectura de Sistemas Computacionales/Clases/Clase 2 - Modelos de servicio IaaS PaaS SaaS/Presentacion.pptx
@@ -936,37 +936,61 @@
           <a:lstStyle/>
           <a:p>
             <a:r>
-              <a:t>TEXTO COMPLETO DE LA LÁMINA (se proyecta resumido):</a:t>
+              <a:t>DESARROLLO (para explicarlo, no se proyecta):</a:t>
             </a:r>
           </a:p>
           <a:p/>
           <a:p>
             <a:r>
-              <a:t>IaaS: usted administra SO/red/runtime; el proveedor da cómputo/red/disco.</a:t>
+              <a:t>El proveedor garantiza que el centro de datos no se incendie, que la capa de virtualizacion este parcheada y que los discos esten cifrados en reposo; el cliente sigue siendo responsable de sus contrasenas, sus permisos, sus datos y su configuracion.</a:t>
             </a:r>
           </a:p>
           <a:p/>
           <a:p>
             <a:r>
-              <a:t>PaaS: usted despliega app; el proveedor gestiona runtime/escala básica.</a:t>
+              <a:t>Importa porque la causa dominante de los incidentes de seguridad en la nube no son fallas del proveedor sino configuraciones erradas del cliente: un almacenamiento de archivos dejado publico</a:t>
             </a:r>
           </a:p>
           <a:p/>
           <a:p>
             <a:r>
-              <a:t>SaaS: consume el servicio listo (correo, CRM); poca personalización profunda.</a:t>
+              <a:t>Una credencial subida al repositorio en texto plano, un puerto de base de datos expuesto a internet.</a:t>
             </a:r>
           </a:p>
           <a:p/>
           <a:p>
             <a:r>
-              <a:t>En este curso simulamos con labs/navegador; no abrimos cuentas IaaS con tarjeta.</a:t>
+              <a:t>Para CloudLite la mitigacion no es evitar SaaS sino acotarlo: si el envio de correos se encapsula detras de una interfaz propia, por ejemplo un modulo Notificador con un solo metodo enviar, cambiar de proveedor toca un archivo y no cuarenta.</a:t>
             </a:r>
           </a:p>
           <a:p/>
           <a:p>
             <a:r>
-              <a:t>Ejemplos: IaaS = una máquina virtual (EC2, Droplet) · PaaS = Render, Railway, Heroku · SaaS = correo corporativo, proveedor de identidad.</a:t>
+              <a:t>NOTAS:</a:t>
+            </a:r>
+          </a:p>
+          <a:p/>
+          <a:p>
+            <a:r>
+              <a:t>De ahi sale el trade-off central, que se escribe como regla practica: a mas abstraccion, menos control y menos trabajo operativo.</a:t>
+            </a:r>
+          </a:p>
+          <a:p/>
+          <a:p>
+            <a:r>
+              <a:t>(No se proyecta) El concepto que unifica todo esto se llama modelo de responsabilidad compartida y se resume en una frase que conviene memorizar: el proveedor es responsable de la seguridad DE la nube y el cliente de la seguridad EN la nube.</a:t>
+            </a:r>
+          </a:p>
+          <a:p/>
+          <a:p>
+            <a:r>
+              <a:t>(No se proyecta) Subir de IaaS a PaaS reduce la superficie de responsabilidad del cliente, pero nunca la elimina, y esa idea es el punto de partida literal de la Clase 6.</a:t>
+            </a:r>
+          </a:p>
+          <a:p/>
+          <a:p>
+            <a:r>
+              <a:t>(No se proyecta) Pero hay un tercer eje que el estudiante no ve solo, el amarre al proveedor o vendor lock-in, que es el costo de mudarse a otro proveedor mas adelante: bajo en IaaS, porque una maquina virtual con Linux se parece a cualquier otra; medio en PaaS, porque el archivo de configuracion y algunos servicios son propietarios; potencialmente alto en SaaS, porque los datos y parte de la logica viven dentro de un producto ajeno.</a:t>
             </a:r>
           </a:p>
         </p:txBody>
@@ -1036,37 +1060,121 @@
           <a:lstStyle/>
           <a:p>
             <a:r>
-              <a:t>TEXTO COMPLETO DE LA LÁMINA (se proyecta resumido):</a:t>
+              <a:t>DESARROLLO (para explicarlo, no se proyecta):</a:t>
             </a:r>
           </a:p>
           <a:p/>
           <a:p>
             <a:r>
-              <a:t>Pregunte: ¿necesito controlar red/SO o solo desplegar API+datos?</a:t>
+              <a:t>La decision se registra en el ADR-001.</a:t>
             </a:r>
           </a:p>
           <a:p/>
           <a:p>
             <a:r>
-              <a:t>Para un MVP académico suele ganar PaaS conceptual + contenedores (portable).</a:t>
+              <a:t>Un ADR (Architecture Decision Record, registro de decision arquitectonica) es un documento corto, de media pagina a una pagina, que registra UNA sola decision.</a:t>
             </a:r>
           </a:p>
           <a:p/>
           <a:p>
             <a:r>
-              <a:t>Si el dominio exige mucho control de red → justifique IaaS *simulado* en diagrama.</a:t>
+              <a:t>En este curso tiene SEIS secciones rotuladas, siempre las mismas y en este orden,: 1) Titulo, con el numero consecutivo del ADR; 2) Estado</a:t>
             </a:r>
           </a:p>
           <a:p/>
           <a:p>
             <a:r>
-              <a:t>Ejemplo CloudLite Turnos: API en PaaS, base de datos gestionada y correo como SaaS — tres modelos en un mismo sistema.</a:t>
+              <a:t>Que hoy es «Aceptado» mas la fecha de la sesion; 3) Contexto, o sea las restricciones bajo las que se decide; 4) Decision, en una sola frase y con un unico modelo dominante</a:t>
             </a:r>
           </a:p>
           <a:p/>
           <a:p>
             <a:r>
-              <a:t>SaaS solo como satélite (auth, email, analytics) — no como toda la app.</a:t>
+              <a:t>5) Alternativas descartadas, exactamente dos y con el motivo atado al dominio; 6) Consecuencias, con lo bueno y lo malo que se acepta.</a:t>
+            </a:r>
+          </a:p>
+          <a:p/>
+          <a:p>
+            <a:r>
+              <a:t>La regla de una decision por documento no es burocracia: es lo que permite que meses despues alguien lea por que se eligio algo sin depender de la memoria de nadie.</a:t>
+            </a:r>
+          </a:p>
+          <a:p/>
+          <a:p>
+            <a:r>
+              <a:t>En DECISION va una frase: la aplicacion de CloudLite Turnos se despliega sobre PaaS.</a:t>
+            </a:r>
+          </a:p>
+          <a:p/>
+          <a:p>
+            <a:r>
+              <a:t>En ALTERNATIVAS DESCARTADAS van dos y solo dos: IaaS con maquina virtual propia, descartada porque habria que asumir parches y respaldos del sistema operativo sin tiempo para ello</a:t>
+            </a:r>
+          </a:p>
+          <a:p/>
+          <a:p>
+            <a:r>
+              <a:t>Y SaaS de agendamiento ya existente, descartada porque el proyecto perderia su objeto, ya que no habria arquitectura que disenar sino solo configuracion.</a:t>
+            </a:r>
+          </a:p>
+          <a:p/>
+          <a:p>
+            <a:r>
+              <a:t>NOTAS:</a:t>
+            </a:r>
+          </a:p>
+          <a:p/>
+          <a:p>
+            <a:r>
+              <a:t>Eso es contexto: son restricciones, no teoria.</a:t>
+            </a:r>
+          </a:p>
+          <a:p/>
+          <a:p>
+            <a:r>
+              <a:t>Que identidad y correo se consuman como SaaS satelite se aclara aqui y no en la decision, porque el modelo dominante se refiere a la aplicacion propia.</a:t>
+            </a:r>
+          </a:p>
+          <a:p/>
+          <a:p>
+            <a:r>
+              <a:t>(No se proyecta) El reparto en la plataforma es que las cinco primeras van en la pregunta 6 y la sexta en la pregunta 7, pero es UN solo documento, y conviene decirlo en voz alta porque el estudiante que lo entienda como dos ejercicios sueltos repite la decision en las consecuencias y pierde puntos.</a:t>
+            </a:r>
+          </a:p>
+          <a:p/>
+          <a:p>
+            <a:r>
+              <a:t>(No se proyecta) No hay seccion de «opciones consideradas»: ese analisis es la matriz de la pregunta 5, y en el ADR solo quedan las dos alternativas que se descartaron.</a:t>
+            </a:r>
+          </a:p>
+          <a:p/>
+          <a:p>
+            <a:r>
+              <a:t>(No se proyecta) Conviene mostrar la diferencia entre contexto y analisis con el ejemplo, porque es donde se pierde la seccion 3 completa.</a:t>
+            </a:r>
+          </a:p>
+          <a:p/>
+          <a:p>
+            <a:r>
+              <a:t>(No se proyecta) Un ADR-001 aceptable para CloudLite Turnos diria en CONTEXTO: la barberia agenda por mensajeria y pierde alrededor de tres turnos diarios por doble reserva; el proyecto lo sostiene un desarrollador (o un equipo de dos o tres, si el docente lo autorizo) durante doce semanas, sin presupuesto ni tarjeta de credito, y el sistema tiene que estar disponible el dia de la sustentacion.</a:t>
+            </a:r>
+          </a:p>
+          <a:p/>
+          <a:p>
+            <a:r>
+              <a:t>(No se proyecta) «Existen tres modelos de servicio y hay que elegir uno» NO es contexto, es el apunte de clase, y esa confusion es el error dominante de la pregunta 6.</a:t>
+            </a:r>
+          </a:p>
+          <a:p/>
+          <a:p>
+            <a:r>
+              <a:t>(No se proyecta) La prueba que el docente puede aplicar en voz alta mientras pasa por los grupos es una sola: si del contexto no se puede deducir por que se descarta IaaS, todavia no es contexto.</a:t>
+            </a:r>
+          </a:p>
+          <a:p/>
+          <a:p>
+            <a:r>
+              <a:t>(No se proyecta) Y en CONSECUENCIAS, que es la seccion que los estudiantes dejan a medias, deben aparecer tambien las malas: se acepta un arranque en frio de varios segundos tras inactividad, se acepta no poder afinar el sistema operativo y se acepta un amarre medio al proveedor, mitigado con contenedores.</a:t>
             </a:r>
           </a:p>
         </p:txBody>
@@ -1134,462 +1242,6 @@
         <p:txBody>
           <a:bodyPr/>
           <a:lstStyle/>
-          <a:p>
-            <a:r>
-              <a:t>TEXTO COMPLETO DE LA LÁMINA (se proyecta resumido):</a:t>
-            </a:r>
-          </a:p>
-          <a:p/>
-          <a:p>
-            <a:r>
-              <a:t>Regla que hay que memorizar: el proveedor responde por la seguridad DE la nube (centro de datos, hipervisor, cifrado en reposo); usted responde por la seguridad EN la nube (contraseñas, permisos, datos, configuración).</a:t>
-            </a:r>
-          </a:p>
-          <a:p/>
-          <a:p>
-            <a:r>
-              <a:t>La causa dominante de incidentes en la nube no es una falla del proveedor: es una configuración del cliente (un bucket público, una credencial en el repo, un puerto de base de datos expuesto).</a:t>
-            </a:r>
-          </a:p>
-          <a:p/>
-          <a:p>
-            <a:r>
-              <a:t>Vendor lock-in (costo de mudarse de proveedor): bajo en IaaS (una VM Linux se parece a cualquier otra) · medio en PaaS (el archivo de configuración y algún servicio son propietarios) · potencialmente alto en SaaS (datos y lógica viven dentro del producto ajeno).</a:t>
-            </a:r>
-          </a:p>
-          <a:p/>
-          <a:p>
-            <a:r>
-              <a:t>Mitigación para CloudLite: no evitar SaaS, acotarlo — si el envío de correos vive detrás de una interfaz propia (`Notificador.enviar()`), cambiar de proveedor toca un archivo, no cuarenta.</a:t>
-            </a:r>
-          </a:p>
-          <a:p/>
-          <a:p>
-            <a:r>
-              <a:t>DESARROLLO (para explicarlo, no se proyecta):</a:t>
-            </a:r>
-          </a:p>
-          <a:p/>
-          <a:p>
-            <a:r>
-              <a:t>El proveedor garantiza que el centro de datos no se incendie, que la capa de virtualizacion este parcheada y que los discos esten cifrados en reposo; el cliente sigue siendo responsable de sus contrasenas, sus permisos, sus datos y su configuracion.</a:t>
-            </a:r>
-          </a:p>
-          <a:p/>
-          <a:p>
-            <a:r>
-              <a:t>Importa porque la causa dominante de los incidentes de seguridad en la nube no son fallas del proveedor sino configuraciones erradas del cliente: un almacenamiento de archivos dejado publico</a:t>
-            </a:r>
-          </a:p>
-          <a:p/>
-          <a:p>
-            <a:r>
-              <a:t>Una credencial subida al repositorio en texto plano, un puerto de base de datos expuesto a internet.</a:t>
-            </a:r>
-          </a:p>
-          <a:p/>
-          <a:p>
-            <a:r>
-              <a:t>Para CloudLite la mitigacion no es evitar SaaS sino acotarlo: si el envio de correos se encapsula detras de una interfaz propia, por ejemplo un modulo Notificador con un solo metodo enviar, cambiar de proveedor toca un archivo y no cuarenta.</a:t>
-            </a:r>
-          </a:p>
-          <a:p/>
-          <a:p>
-            <a:r>
-              <a:t>NOTAS:</a:t>
-            </a:r>
-          </a:p>
-          <a:p/>
-          <a:p>
-            <a:r>
-              <a:t>De ahi sale el trade-off central, que se escribe como regla practica: a mas abstraccion, menos control y menos trabajo operativo.</a:t>
-            </a:r>
-          </a:p>
-          <a:p/>
-          <a:p>
-            <a:r>
-              <a:t>(No se proyecta) El concepto que unifica todo esto se llama modelo de responsabilidad compartida y se resume en una frase que conviene memorizar: el proveedor es responsable de la seguridad DE la nube y el cliente de la seguridad EN la nube.</a:t>
-            </a:r>
-          </a:p>
-          <a:p/>
-          <a:p>
-            <a:r>
-              <a:t>(No se proyecta) Subir de IaaS a PaaS reduce la superficie de responsabilidad del cliente, pero nunca la elimina, y esa idea es el punto de partida literal de la Clase 6.</a:t>
-            </a:r>
-          </a:p>
-          <a:p/>
-          <a:p>
-            <a:r>
-              <a:t>(No se proyecta) Pero hay un tercer eje que el estudiante no ve solo, el amarre al proveedor o vendor lock-in, que es el costo de mudarse a otro proveedor mas adelante: bajo en IaaS, porque una maquina virtual con Linux se parece a cualquier otra; medio en PaaS, porque el archivo de configuracion y algunos servicios son propietarios; potencialmente alto en SaaS, porque los datos y parte de la logica viven dentro de un producto ajeno.</a:t>
-            </a:r>
-          </a:p>
-        </p:txBody>
-      </p:sp>
-      <p:sp>
-        <p:nvSpPr>
-          <p:cNvPr id="4" name="Slide Number Placeholder 3"/>
-          <p:cNvSpPr>
-            <a:spLocks noGrp="1"/>
-          </p:cNvSpPr>
-          <p:nvPr>
-            <p:ph type="sldNum" idx="5" sz="quarter"/>
-          </p:nvPr>
-        </p:nvSpPr>
-        <p:spPr/>
-      </p:sp>
-    </p:spTree>
-  </p:cSld>
-  <p:clrMapOvr>
-    <a:masterClrMapping/>
-  </p:clrMapOvr>
-</p:notes>
-</file>
-
-<file path=ppt/notesSlides/notesSlide7.xml><?xml version="1.0" encoding="utf-8"?>
-<p:notes xmlns:a="http://schemas.openxmlformats.org/drawingml/2006/main" xmlns:p="http://schemas.openxmlformats.org/presentationml/2006/main" xmlns:r="http://schemas.openxmlformats.org/officeDocument/2006/relationships">
-  <p:cSld>
-    <p:spTree>
-      <p:nvGrpSpPr>
-        <p:cNvPr id="1" name=""/>
-        <p:cNvGrpSpPr/>
-        <p:nvPr/>
-      </p:nvGrpSpPr>
-      <p:grpSpPr>
-        <a:xfrm>
-          <a:off x="0" y="0"/>
-          <a:ext cx="0" cy="0"/>
-          <a:chOff x="0" y="0"/>
-          <a:chExt cx="0" cy="0"/>
-        </a:xfrm>
-      </p:grpSpPr>
-      <p:sp>
-        <p:nvSpPr>
-          <p:cNvPr id="2" name="Slide Image Placeholder 1"/>
-          <p:cNvSpPr>
-            <a:spLocks noGrp="1"/>
-          </p:cNvSpPr>
-          <p:nvPr>
-            <p:ph type="sldImg" idx="2"/>
-          </p:nvPr>
-        </p:nvSpPr>
-        <p:spPr/>
-      </p:sp>
-      <p:sp>
-        <p:nvSpPr>
-          <p:cNvPr id="3" name="Notes Placeholder 2"/>
-          <p:cNvSpPr>
-            <a:spLocks noGrp="1"/>
-          </p:cNvSpPr>
-          <p:nvPr>
-            <p:ph type="body" idx="3" sz="quarter"/>
-          </p:nvPr>
-        </p:nvSpPr>
-        <p:spPr/>
-        <p:txBody>
-          <a:bodyPr/>
-          <a:lstStyle/>
-          <a:p>
-            <a:r>
-              <a:t>DESARROLLO (para explicarlo, no se proyecta):</a:t>
-            </a:r>
-          </a:p>
-          <a:p/>
-          <a:p>
-            <a:r>
-              <a:t>La decision se registra en el ADR-001.</a:t>
-            </a:r>
-          </a:p>
-          <a:p/>
-          <a:p>
-            <a:r>
-              <a:t>Un ADR (Architecture Decision Record, registro de decision arquitectonica) es un documento corto, de media pagina a una pagina, que registra UNA sola decision.</a:t>
-            </a:r>
-          </a:p>
-          <a:p/>
-          <a:p>
-            <a:r>
-              <a:t>En este curso tiene SEIS secciones rotuladas, siempre las mismas y en este orden,: 1) Titulo, con el numero consecutivo del ADR; 2) Estado</a:t>
-            </a:r>
-          </a:p>
-          <a:p/>
-          <a:p>
-            <a:r>
-              <a:t>Que hoy es «Aceptado» mas la fecha de la sesion; 3) Contexto, o sea las restricciones bajo las que se decide; 4) Decision, en una sola frase y con un unico modelo dominante</a:t>
-            </a:r>
-          </a:p>
-          <a:p/>
-          <a:p>
-            <a:r>
-              <a:t>5) Alternativas descartadas, exactamente dos y con el motivo atado al dominio; 6) Consecuencias, con lo bueno y lo malo que se acepta.</a:t>
-            </a:r>
-          </a:p>
-          <a:p/>
-          <a:p>
-            <a:r>
-              <a:t>La regla de una decision por documento no es burocracia: es lo que permite que meses despues alguien lea por que se eligio algo sin depender de la memoria de nadie.</a:t>
-            </a:r>
-          </a:p>
-          <a:p/>
-          <a:p>
-            <a:r>
-              <a:t>En DECISION va una frase: la aplicacion de CloudLite Turnos se despliega sobre PaaS.</a:t>
-            </a:r>
-          </a:p>
-          <a:p/>
-          <a:p>
-            <a:r>
-              <a:t>En ALTERNATIVAS DESCARTADAS van dos y solo dos: IaaS con maquina virtual propia, descartada porque habria que asumir parches y respaldos del sistema operativo sin tiempo para ello</a:t>
-            </a:r>
-          </a:p>
-          <a:p/>
-          <a:p>
-            <a:r>
-              <a:t>Y SaaS de agendamiento ya existente, descartada porque el proyecto perderia su objeto, ya que no habria arquitectura que disenar sino solo configuracion.</a:t>
-            </a:r>
-          </a:p>
-          <a:p/>
-          <a:p>
-            <a:r>
-              <a:t>NOTAS:</a:t>
-            </a:r>
-          </a:p>
-          <a:p/>
-          <a:p>
-            <a:r>
-              <a:t>Eso es contexto: son restricciones, no teoria.</a:t>
-            </a:r>
-          </a:p>
-          <a:p/>
-          <a:p>
-            <a:r>
-              <a:t>Que identidad y correo se consuman como SaaS satelite se aclara aqui y no en la decision, porque el modelo dominante se refiere a la aplicacion propia.</a:t>
-            </a:r>
-          </a:p>
-          <a:p/>
-          <a:p>
-            <a:r>
-              <a:t>(No se proyecta) El reparto en la plataforma es que las cinco primeras van en la pregunta 6 y la sexta en la pregunta 7, pero es UN solo documento, y conviene decirlo en voz alta porque el estudiante que lo entienda como dos ejercicios sueltos repite la decision en las consecuencias y pierde puntos.</a:t>
-            </a:r>
-          </a:p>
-          <a:p/>
-          <a:p>
-            <a:r>
-              <a:t>(No se proyecta) No hay seccion de «opciones consideradas»: ese analisis es la matriz de la pregunta 5, y en el ADR solo quedan las dos alternativas que se descartaron.</a:t>
-            </a:r>
-          </a:p>
-          <a:p/>
-          <a:p>
-            <a:r>
-              <a:t>(No se proyecta) Conviene mostrar la diferencia entre contexto y analisis con el ejemplo, porque es donde se pierde la seccion 3 completa.</a:t>
-            </a:r>
-          </a:p>
-          <a:p/>
-          <a:p>
-            <a:r>
-              <a:t>(No se proyecta) Un ADR-001 aceptable para CloudLite Turnos diria en CONTEXTO: la barberia agenda por mensajeria y pierde alrededor de tres turnos diarios por doble reserva; el proyecto lo sostiene un desarrollador (o un equipo de dos o tres, si el docente lo autorizo) durante doce semanas, sin presupuesto ni tarjeta de credito, y el sistema tiene que estar disponible el dia de la sustentacion.</a:t>
-            </a:r>
-          </a:p>
-          <a:p/>
-          <a:p>
-            <a:r>
-              <a:t>(No se proyecta) «Existen tres modelos de servicio y hay que elegir uno» NO es contexto, es el apunte de clase, y esa confusion es el error dominante de la pregunta 6.</a:t>
-            </a:r>
-          </a:p>
-          <a:p/>
-          <a:p>
-            <a:r>
-              <a:t>(No se proyecta) La prueba que el docente puede aplicar en voz alta mientras pasa por los grupos es una sola: si del contexto no se puede deducir por que se descarta IaaS, todavia no es contexto.</a:t>
-            </a:r>
-          </a:p>
-          <a:p/>
-          <a:p>
-            <a:r>
-              <a:t>(No se proyecta) Y en CONSECUENCIAS, que es la seccion que los estudiantes dejan a medias, deben aparecer tambien las malas: se acepta un arranque en frio de varios segundos tras inactividad, se acepta no poder afinar el sistema operativo y se acepta un amarre medio al proveedor, mitigado con contenedores.</a:t>
-            </a:r>
-          </a:p>
-        </p:txBody>
-      </p:sp>
-      <p:sp>
-        <p:nvSpPr>
-          <p:cNvPr id="4" name="Slide Number Placeholder 3"/>
-          <p:cNvSpPr>
-            <a:spLocks noGrp="1"/>
-          </p:cNvSpPr>
-          <p:nvPr>
-            <p:ph type="sldNum" idx="5" sz="quarter"/>
-          </p:nvPr>
-        </p:nvSpPr>
-        <p:spPr/>
-      </p:sp>
-    </p:spTree>
-  </p:cSld>
-  <p:clrMapOvr>
-    <a:masterClrMapping/>
-  </p:clrMapOvr>
-</p:notes>
-</file>
-
-<file path=ppt/notesSlides/notesSlide8.xml><?xml version="1.0" encoding="utf-8"?>
-<p:notes xmlns:a="http://schemas.openxmlformats.org/drawingml/2006/main" xmlns:p="http://schemas.openxmlformats.org/presentationml/2006/main" xmlns:r="http://schemas.openxmlformats.org/officeDocument/2006/relationships">
-  <p:cSld>
-    <p:spTree>
-      <p:nvGrpSpPr>
-        <p:cNvPr id="1" name=""/>
-        <p:cNvGrpSpPr/>
-        <p:nvPr/>
-      </p:nvGrpSpPr>
-      <p:grpSpPr>
-        <a:xfrm>
-          <a:off x="0" y="0"/>
-          <a:ext cx="0" cy="0"/>
-          <a:chOff x="0" y="0"/>
-          <a:chExt cx="0" cy="0"/>
-        </a:xfrm>
-      </p:grpSpPr>
-      <p:sp>
-        <p:nvSpPr>
-          <p:cNvPr id="2" name="Slide Image Placeholder 1"/>
-          <p:cNvSpPr>
-            <a:spLocks noGrp="1"/>
-          </p:cNvSpPr>
-          <p:nvPr>
-            <p:ph type="sldImg" idx="2"/>
-          </p:nvPr>
-        </p:nvSpPr>
-        <p:spPr/>
-      </p:sp>
-      <p:sp>
-        <p:nvSpPr>
-          <p:cNvPr id="3" name="Notes Placeholder 2"/>
-          <p:cNvSpPr>
-            <a:spLocks noGrp="1"/>
-          </p:cNvSpPr>
-          <p:nvPr>
-            <p:ph type="body" idx="3" sz="quarter"/>
-          </p:nvPr>
-        </p:nvSpPr>
-        <p:spPr/>
-        <p:txBody>
-          <a:bodyPr/>
-          <a:lstStyle/>
-          <a:p>
-            <a:r>
-              <a:t>TEXTO COMPLETO DE LA LÁMINA (se proyecta resumido):</a:t>
-            </a:r>
-          </a:p>
-          <a:p/>
-          <a:p>
-            <a:r>
-              <a:t>6 secciones rotuladas: Título · Estado · Contexto · Decisión · Alternativas descartadas · Consecuencias.</a:t>
-            </a:r>
-          </a:p>
-          <a:p/>
-          <a:p>
-            <a:r>
-              <a:t>Título: «ADR-001 Modelo de servicio dominante de CloudLite App».  Estado: Aceptado + fecha de hoy.</a:t>
-            </a:r>
-          </a:p>
-          <a:p/>
-          <a:p>
-            <a:r>
-              <a:t>Contexto = las restricciones (quién lo sostiene, cuánto tiempo, qué presupuesto), no el resumen del tema.</a:t>
-            </a:r>
-          </a:p>
-          <a:p/>
-          <a:p>
-            <a:r>
-              <a:t>Decisión: 1 frase, 1 modelo dominante.  Alternativas descartadas: exactamente 2, con motivo del dominio.</a:t>
-            </a:r>
-          </a:p>
-          <a:p/>
-          <a:p>
-            <a:r>
-              <a:t>Máximo 1 página: las 6 secciones son UN solo documento, y Consecuencias cierra la decisión.</a:t>
-            </a:r>
-          </a:p>
-        </p:txBody>
-      </p:sp>
-      <p:sp>
-        <p:nvSpPr>
-          <p:cNvPr id="4" name="Slide Number Placeholder 3"/>
-          <p:cNvSpPr>
-            <a:spLocks noGrp="1"/>
-          </p:cNvSpPr>
-          <p:nvPr>
-            <p:ph type="sldNum" idx="5" sz="quarter"/>
-          </p:nvPr>
-        </p:nvSpPr>
-        <p:spPr/>
-      </p:sp>
-    </p:spTree>
-  </p:cSld>
-  <p:clrMapOvr>
-    <a:masterClrMapping/>
-  </p:clrMapOvr>
-</p:notes>
-</file>
-
-<file path=ppt/notesSlides/notesSlide9.xml><?xml version="1.0" encoding="utf-8"?>
-<p:notes xmlns:a="http://schemas.openxmlformats.org/drawingml/2006/main" xmlns:p="http://schemas.openxmlformats.org/presentationml/2006/main" xmlns:r="http://schemas.openxmlformats.org/officeDocument/2006/relationships">
-  <p:cSld>
-    <p:spTree>
-      <p:nvGrpSpPr>
-        <p:cNvPr id="1" name=""/>
-        <p:cNvGrpSpPr/>
-        <p:nvPr/>
-      </p:nvGrpSpPr>
-      <p:grpSpPr>
-        <a:xfrm>
-          <a:off x="0" y="0"/>
-          <a:ext cx="0" cy="0"/>
-          <a:chOff x="0" y="0"/>
-          <a:chExt cx="0" cy="0"/>
-        </a:xfrm>
-      </p:grpSpPr>
-      <p:sp>
-        <p:nvSpPr>
-          <p:cNvPr id="2" name="Slide Image Placeholder 1"/>
-          <p:cNvSpPr>
-            <a:spLocks noGrp="1"/>
-          </p:cNvSpPr>
-          <p:nvPr>
-            <p:ph type="sldImg" idx="2"/>
-          </p:nvPr>
-        </p:nvSpPr>
-        <p:spPr/>
-      </p:sp>
-      <p:sp>
-        <p:nvSpPr>
-          <p:cNvPr id="3" name="Notes Placeholder 2"/>
-          <p:cNvSpPr>
-            <a:spLocks noGrp="1"/>
-          </p:cNvSpPr>
-          <p:nvPr>
-            <p:ph type="body" idx="3" sz="quarter"/>
-          </p:nvPr>
-        </p:nvSpPr>
-        <p:spPr/>
-        <p:txBody>
-          <a:bodyPr/>
-          <a:lstStyle/>
-          <a:p>
-            <a:r>
-              <a:t>TEXTO COMPLETO DE LA LÁMINA (se proyecta resumido):</a:t>
-            </a:r>
-          </a:p>
-          <a:p/>
-          <a:p>
-            <a:r>
-              <a:t>La pila tiene siete capas, de abajo hacia arriba: red y hardware, virtualizacion, sistema operativo, runtime, middleware, aplicacion y datos.</a:t>
-            </a:r>
-          </a:p>
-          <a:p/>
-          <a:p>
-            <a:r>
-              <a:t>En IaaS lo que administra el cliente es todo, desde el sistema operativo hacia arriba; en PaaS son solo la aplicacion y los datos; en SaaS es solo la configuracion y los datos que carga.</a:t>
-            </a:r>
-          </a:p>
-          <a:p/>
           <a:p>
             <a:r>
               <a:t>DESARROLLO (para explicarlo, no se proyecta):</a:t>
@@ -5146,118 +4798,14 @@
       </p:sp>
       <p:sp>
         <p:nvSpPr>
-          <p:cNvPr id="5" name="Rounded Rectangle 4"/>
-          <p:cNvSpPr/>
-          <p:nvPr/>
-        </p:nvSpPr>
-        <p:spPr>
-          <a:xfrm>
-            <a:off x="5797149" y="1879499"/>
-            <a:ext cx="6010497" cy="3446472"/>
-          </a:xfrm>
-          <a:prstGeom prst="roundRect">
-            <a:avLst>
-              <a:gd name="adj" fmla="val 4000"/>
-            </a:avLst>
-          </a:prstGeom>
-          <a:solidFill>
-            <a:srgbClr val="E8EEF4"/>
-          </a:solidFill>
-          <a:ln>
-            <a:noFill/>
-          </a:ln>
-        </p:spPr>
-        <p:style>
-          <a:lnRef idx="1">
-            <a:schemeClr val="accent1"/>
-          </a:lnRef>
-          <a:fillRef idx="3">
-            <a:schemeClr val="accent1"/>
-          </a:fillRef>
-          <a:effectRef idx="2">
-            <a:schemeClr val="accent1"/>
-          </a:effectRef>
-          <a:fontRef idx="minor">
-            <a:schemeClr val="lt1"/>
-          </a:fontRef>
-        </p:style>
-        <p:txBody>
-          <a:bodyPr rtlCol="0" anchor="ctr"/>
-          <a:lstStyle/>
-          <a:p>
-            <a:pPr algn="ctr"/>
-          </a:p>
-        </p:txBody>
-      </p:sp>
-      <p:pic>
-        <p:nvPicPr>
-          <p:cNvPr id="6" name="Picture 5" descr="handshake-technology-partnership.jpg"/>
-          <p:cNvPicPr>
-            <a:picLocks noChangeAspect="1"/>
-          </p:cNvPicPr>
-          <p:nvPr/>
-        </p:nvPicPr>
-        <p:blipFill>
-          <a:blip r:embed="rId2"/>
-          <a:stretch>
-            <a:fillRect/>
-          </a:stretch>
-        </p:blipFill>
-        <p:spPr>
-          <a:xfrm>
-            <a:off x="5870301" y="1952651"/>
-            <a:ext cx="5864193" cy="3300168"/>
-          </a:xfrm>
-          <a:prstGeom prst="rect">
-            <a:avLst/>
-          </a:prstGeom>
-        </p:spPr>
-      </p:pic>
-      <p:sp>
-        <p:nvSpPr>
-          <p:cNvPr id="7" name="TextBox 6"/>
+          <p:cNvPr id="5" name="TextBox 4"/>
           <p:cNvSpPr txBox="1"/>
           <p:nvPr/>
         </p:nvSpPr>
         <p:spPr>
           <a:xfrm>
-            <a:off x="5870301" y="5961888"/>
-            <a:ext cx="5864193" cy="320040"/>
-          </a:xfrm>
-          <a:prstGeom prst="rect">
-            <a:avLst/>
-          </a:prstGeom>
-          <a:noFill/>
-        </p:spPr>
-        <p:txBody>
-          <a:bodyPr wrap="square">
-            <a:spAutoFit/>
-          </a:bodyPr>
-          <a:lstStyle/>
-          <a:p>
-            <a:pPr algn="ctr"/>
-            <a:r>
-              <a:rPr sz="1100" b="0" i="1">
-                <a:solidFill>
-                  <a:srgbClr val="666666"/>
-                </a:solidFill>
-                <a:latin typeface="Calibri"/>
-              </a:rPr>
-              <a:t>Foto: Artem Podrez · Pexels</a:t>
-            </a:r>
-          </a:p>
-        </p:txBody>
-      </p:sp>
-      <p:sp>
-        <p:nvSpPr>
-          <p:cNvPr id="8" name="TextBox 7"/>
-          <p:cNvSpPr txBox="1"/>
-          <p:nvPr/>
-        </p:nvSpPr>
-        <p:spPr>
-          <a:xfrm>
-            <a:off x="457200" y="1353312"/>
-            <a:ext cx="5093061" cy="5047488"/>
+            <a:off x="457200" y="1170432"/>
+            <a:ext cx="11277295" cy="5230368"/>
           </a:xfrm>
           <a:prstGeom prst="rect">
             <a:avLst/>
@@ -5318,7 +4866,25 @@
                 </a:solidFill>
                 <a:latin typeface="Calibri"/>
               </a:rPr>
-              <a:t> la nube (centro de datos, hipervisor, cifrado en reposo);</a:t>
+              <a:t> la nube (centro de datos, hipervisor, cifrado en reposo); usted responde por la seguridad </a:t>
+            </a:r>
+            <a:r>
+              <a:rPr sz="2000" b="1" i="0">
+                <a:solidFill>
+                  <a:srgbClr val="333333"/>
+                </a:solidFill>
+                <a:latin typeface="Calibri"/>
+              </a:rPr>
+              <a:t>EN</a:t>
+            </a:r>
+            <a:r>
+              <a:rPr sz="2000" b="0" i="0">
+                <a:solidFill>
+                  <a:srgbClr val="333333"/>
+                </a:solidFill>
+                <a:latin typeface="Calibri"/>
+              </a:rPr>
+              <a:t> la nube (contraseñas, permisos, datos, configuración).</a:t>
             </a:r>
           </a:p>
           <a:p>
@@ -5352,7 +4918,7 @@
                 </a:solidFill>
                 <a:latin typeface="Calibri"/>
               </a:rPr>
-              <a:t> es una falla del proveedor: es una configuración del cliente (un bucket público, una credencial en…</a:t>
+              <a:t> es una falla del proveedor: es una configuración del cliente (un bucket público, una credencial en el repo, un puerto de base de datos expuesto).</a:t>
             </a:r>
           </a:p>
           <a:p>
@@ -5386,14 +4952,102 @@
                 </a:solidFill>
                 <a:latin typeface="Calibri"/>
               </a:rPr>
-              <a:t> (costo de mudarse de proveedor):</a:t>
-            </a:r>
-          </a:p>
-        </p:txBody>
-      </p:sp>
-      <p:sp>
-        <p:nvSpPr>
-          <p:cNvPr id="9" name="TextBox 8"/>
+              <a:t> (costo de mudarse de proveedor): </a:t>
+            </a:r>
+            <a:r>
+              <a:rPr sz="2000" b="1" i="0">
+                <a:solidFill>
+                  <a:srgbClr val="333333"/>
+                </a:solidFill>
+                <a:latin typeface="Calibri"/>
+              </a:rPr>
+              <a:t>bajo</a:t>
+            </a:r>
+            <a:r>
+              <a:rPr sz="2000" b="0" i="0">
+                <a:solidFill>
+                  <a:srgbClr val="333333"/>
+                </a:solidFill>
+                <a:latin typeface="Calibri"/>
+              </a:rPr>
+              <a:t> en IaaS (una VM Linux se parece a cualquier otra) · </a:t>
+            </a:r>
+            <a:r>
+              <a:rPr sz="2000" b="1" i="0">
+                <a:solidFill>
+                  <a:srgbClr val="333333"/>
+                </a:solidFill>
+                <a:latin typeface="Calibri"/>
+              </a:rPr>
+              <a:t>medio</a:t>
+            </a:r>
+            <a:r>
+              <a:rPr sz="2000" b="0" i="0">
+                <a:solidFill>
+                  <a:srgbClr val="333333"/>
+                </a:solidFill>
+                <a:latin typeface="Calibri"/>
+              </a:rPr>
+              <a:t> en PaaS (el archivo de configuración y algún servicio son propietarios) · </a:t>
+            </a:r>
+            <a:r>
+              <a:rPr sz="2000" b="1" i="0">
+                <a:solidFill>
+                  <a:srgbClr val="333333"/>
+                </a:solidFill>
+                <a:latin typeface="Calibri"/>
+              </a:rPr>
+              <a:t>potencialmente alto</a:t>
+            </a:r>
+            <a:r>
+              <a:rPr sz="2000" b="0" i="0">
+                <a:solidFill>
+                  <a:srgbClr val="333333"/>
+                </a:solidFill>
+                <a:latin typeface="Calibri"/>
+              </a:rPr>
+              <a:t> en SaaS (datos y lógica viven dentro del producto ajeno).</a:t>
+            </a:r>
+          </a:p>
+          <a:p>
+            <a:pPr>
+              <a:spcAft>
+                <a:spcPts val="800"/>
+              </a:spcAft>
+            </a:pPr>
+            <a:r>
+              <a:rPr sz="2000" b="0" i="0">
+                <a:solidFill>
+                  <a:srgbClr val="333333"/>
+                </a:solidFill>
+                <a:latin typeface="Calibri"/>
+              </a:rPr>
+              <a:t>–   Mitigación para la app: no evitar SaaS, </a:t>
+            </a:r>
+            <a:r>
+              <a:rPr sz="2000" b="1" i="0">
+                <a:solidFill>
+                  <a:srgbClr val="333333"/>
+                </a:solidFill>
+                <a:latin typeface="Calibri"/>
+              </a:rPr>
+              <a:t>acotarlo</a:t>
+            </a:r>
+            <a:r>
+              <a:rPr sz="2000" b="0" i="0">
+                <a:solidFill>
+                  <a:srgbClr val="333333"/>
+                </a:solidFill>
+                <a:latin typeface="Calibri"/>
+              </a:rPr>
+              <a:t> — si el envío de correos vive detrás de una interfaz propia («Notificador.enviar()»), cambiar de proveedor toca un archivo, no cuarenta.</a:t>
+            </a:r>
+          </a:p>
+        </p:txBody>
+      </p:sp>
+      <p:sp>
+        <p:nvSpPr>
+          <p:cNvPr id="6" name="TextBox 5"/>
           <p:cNvSpPr txBox="1"/>
           <p:nvPr/>
         </p:nvSpPr>
@@ -6114,118 +5768,14 @@
       </p:sp>
       <p:sp>
         <p:nvSpPr>
-          <p:cNvPr id="5" name="Rounded Rectangle 4"/>
-          <p:cNvSpPr/>
-          <p:nvPr/>
-        </p:nvSpPr>
-        <p:spPr>
-          <a:xfrm>
-            <a:off x="5797149" y="1573813"/>
-            <a:ext cx="6010497" cy="4057845"/>
-          </a:xfrm>
-          <a:prstGeom prst="roundRect">
-            <a:avLst>
-              <a:gd name="adj" fmla="val 4000"/>
-            </a:avLst>
-          </a:prstGeom>
-          <a:solidFill>
-            <a:srgbClr val="E8EEF4"/>
-          </a:solidFill>
-          <a:ln>
-            <a:noFill/>
-          </a:ln>
-        </p:spPr>
-        <p:style>
-          <a:lnRef idx="1">
-            <a:schemeClr val="accent1"/>
-          </a:lnRef>
-          <a:fillRef idx="3">
-            <a:schemeClr val="accent1"/>
-          </a:fillRef>
-          <a:effectRef idx="2">
-            <a:schemeClr val="accent1"/>
-          </a:effectRef>
-          <a:fontRef idx="minor">
-            <a:schemeClr val="lt1"/>
-          </a:fontRef>
-        </p:style>
-        <p:txBody>
-          <a:bodyPr rtlCol="0" anchor="ctr"/>
-          <a:lstStyle/>
-          <a:p>
-            <a:pPr algn="ctr"/>
-          </a:p>
-        </p:txBody>
-      </p:sp>
-      <p:pic>
-        <p:nvPicPr>
-          <p:cNvPr id="6" name="Picture 5" descr="architecture-decision-document-notebook.jpg"/>
-          <p:cNvPicPr>
-            <a:picLocks noChangeAspect="1"/>
-          </p:cNvPicPr>
-          <p:nvPr/>
-        </p:nvPicPr>
-        <p:blipFill>
-          <a:blip r:embed="rId2"/>
-          <a:stretch>
-            <a:fillRect/>
-          </a:stretch>
-        </p:blipFill>
-        <p:spPr>
-          <a:xfrm>
-            <a:off x="5870301" y="1646965"/>
-            <a:ext cx="5864193" cy="3911541"/>
-          </a:xfrm>
-          <a:prstGeom prst="rect">
-            <a:avLst/>
-          </a:prstGeom>
-        </p:spPr>
-      </p:pic>
-      <p:sp>
-        <p:nvSpPr>
-          <p:cNvPr id="7" name="TextBox 6"/>
+          <p:cNvPr id="5" name="TextBox 4"/>
           <p:cNvSpPr txBox="1"/>
           <p:nvPr/>
         </p:nvSpPr>
         <p:spPr>
           <a:xfrm>
-            <a:off x="5870301" y="5961888"/>
-            <a:ext cx="5864193" cy="320040"/>
-          </a:xfrm>
-          <a:prstGeom prst="rect">
-            <a:avLst/>
-          </a:prstGeom>
-          <a:noFill/>
-        </p:spPr>
-        <p:txBody>
-          <a:bodyPr wrap="square">
-            <a:spAutoFit/>
-          </a:bodyPr>
-          <a:lstStyle/>
-          <a:p>
-            <a:pPr algn="ctr"/>
-            <a:r>
-              <a:rPr sz="1100" b="0" i="1">
-                <a:solidFill>
-                  <a:srgbClr val="666666"/>
-                </a:solidFill>
-                <a:latin typeface="Calibri"/>
-              </a:rPr>
-              <a:t>Foto: Jessica Lewis 🦋 thepaintedsquare · Pexels</a:t>
-            </a:r>
-          </a:p>
-        </p:txBody>
-      </p:sp>
-      <p:sp>
-        <p:nvSpPr>
-          <p:cNvPr id="8" name="TextBox 7"/>
-          <p:cNvSpPr txBox="1"/>
-          <p:nvPr/>
-        </p:nvSpPr>
-        <p:spPr>
-          <a:xfrm>
-            <a:off x="457200" y="1353312"/>
-            <a:ext cx="5093061" cy="5047488"/>
+            <a:off x="457200" y="1170432"/>
+            <a:ext cx="11277295" cy="5230368"/>
           </a:xfrm>
           <a:prstGeom prst="rect">
             <a:avLst/>
@@ -6268,7 +5818,7 @@
                 </a:solidFill>
                 <a:latin typeface="Calibri"/>
               </a:rPr>
-              <a:t>:</a:t>
+              <a:t>: Título · Estado · Contexto · Decisión · Alternativas descartadas · Consecuencias.</a:t>
             </a:r>
           </a:p>
           <a:p>
@@ -6302,7 +5852,25 @@
                 </a:solidFill>
                 <a:latin typeface="Calibri"/>
               </a:rPr>
-              <a:t>:</a:t>
+              <a:t>: «ADR-001 Modelo de servicio dominante de la app».  </a:t>
+            </a:r>
+            <a:r>
+              <a:rPr sz="2000" b="1" i="0">
+                <a:solidFill>
+                  <a:srgbClr val="333333"/>
+                </a:solidFill>
+                <a:latin typeface="Calibri"/>
+              </a:rPr>
+              <a:t>Estado</a:t>
+            </a:r>
+            <a:r>
+              <a:rPr sz="2000" b="0" i="0">
+                <a:solidFill>
+                  <a:srgbClr val="333333"/>
+                </a:solidFill>
+                <a:latin typeface="Calibri"/>
+              </a:rPr>
+              <a:t>: Aceptado + fecha de hoy.</a:t>
             </a:r>
           </a:p>
           <a:p>
@@ -6370,14 +5938,66 @@
                 </a:solidFill>
                 <a:latin typeface="Calibri"/>
               </a:rPr>
-              <a:t>:</a:t>
-            </a:r>
-          </a:p>
-        </p:txBody>
-      </p:sp>
-      <p:sp>
-        <p:nvSpPr>
-          <p:cNvPr id="9" name="TextBox 8"/>
+              <a:t>: 1 frase, 1 modelo dominante.  </a:t>
+            </a:r>
+            <a:r>
+              <a:rPr sz="2000" b="1" i="0">
+                <a:solidFill>
+                  <a:srgbClr val="333333"/>
+                </a:solidFill>
+                <a:latin typeface="Calibri"/>
+              </a:rPr>
+              <a:t>Alternativas descartadas</a:t>
+            </a:r>
+            <a:r>
+              <a:rPr sz="2000" b="0" i="0">
+                <a:solidFill>
+                  <a:srgbClr val="333333"/>
+                </a:solidFill>
+                <a:latin typeface="Calibri"/>
+              </a:rPr>
+              <a:t>: exactamente 2, con motivo del dominio.</a:t>
+            </a:r>
+          </a:p>
+          <a:p>
+            <a:pPr>
+              <a:spcAft>
+                <a:spcPts val="800"/>
+              </a:spcAft>
+            </a:pPr>
+            <a:r>
+              <a:rPr sz="2000" b="0" i="0">
+                <a:solidFill>
+                  <a:srgbClr val="333333"/>
+                </a:solidFill>
+                <a:latin typeface="Calibri"/>
+              </a:rPr>
+              <a:t>–   Máximo 1 página: las 6 secciones son UN solo documento, y </a:t>
+            </a:r>
+            <a:r>
+              <a:rPr sz="2000" b="1" i="0">
+                <a:solidFill>
+                  <a:srgbClr val="333333"/>
+                </a:solidFill>
+                <a:latin typeface="Calibri"/>
+              </a:rPr>
+              <a:t>Consecuencias</a:t>
+            </a:r>
+            <a:r>
+              <a:rPr sz="2000" b="0" i="0">
+                <a:solidFill>
+                  <a:srgbClr val="333333"/>
+                </a:solidFill>
+                <a:latin typeface="Calibri"/>
+              </a:rPr>
+              <a:t> cierra la decisión.</a:t>
+            </a:r>
+          </a:p>
+        </p:txBody>
+      </p:sp>
+      <p:sp>
+        <p:nvSpPr>
+          <p:cNvPr id="6" name="TextBox 5"/>
           <p:cNvSpPr txBox="1"/>
           <p:nvPr/>
         </p:nvSpPr>
@@ -8337,118 +7957,14 @@
       </p:sp>
       <p:sp>
         <p:nvSpPr>
-          <p:cNvPr id="5" name="Rounded Rectangle 4"/>
-          <p:cNvSpPr/>
-          <p:nvPr/>
-        </p:nvSpPr>
-        <p:spPr>
-          <a:xfrm>
-            <a:off x="5797149" y="1576932"/>
-            <a:ext cx="6010497" cy="4051607"/>
-          </a:xfrm>
-          <a:prstGeom prst="roundRect">
-            <a:avLst>
-              <a:gd name="adj" fmla="val 4000"/>
-            </a:avLst>
-          </a:prstGeom>
-          <a:solidFill>
-            <a:srgbClr val="E8EEF4"/>
-          </a:solidFill>
-          <a:ln>
-            <a:noFill/>
-          </a:ln>
-        </p:spPr>
-        <p:style>
-          <a:lnRef idx="1">
-            <a:schemeClr val="accent1"/>
-          </a:lnRef>
-          <a:fillRef idx="3">
-            <a:schemeClr val="accent1"/>
-          </a:fillRef>
-          <a:effectRef idx="2">
-            <a:schemeClr val="accent1"/>
-          </a:effectRef>
-          <a:fontRef idx="minor">
-            <a:schemeClr val="lt1"/>
-          </a:fontRef>
-        </p:style>
-        <p:txBody>
-          <a:bodyPr rtlCol="0" anchor="ctr"/>
-          <a:lstStyle/>
-          <a:p>
-            <a:pPr algn="ctr"/>
-          </a:p>
-        </p:txBody>
-      </p:sp>
-      <p:pic>
-        <p:nvPicPr>
-          <p:cNvPr id="6" name="Picture 5" descr="data-center-server-room.jpg"/>
-          <p:cNvPicPr>
-            <a:picLocks noChangeAspect="1"/>
-          </p:cNvPicPr>
-          <p:nvPr/>
-        </p:nvPicPr>
-        <p:blipFill>
-          <a:blip r:embed="rId2"/>
-          <a:stretch>
-            <a:fillRect/>
-          </a:stretch>
-        </p:blipFill>
-        <p:spPr>
-          <a:xfrm>
-            <a:off x="5870301" y="1650084"/>
-            <a:ext cx="5864193" cy="3905303"/>
-          </a:xfrm>
-          <a:prstGeom prst="rect">
-            <a:avLst/>
-          </a:prstGeom>
-        </p:spPr>
-      </p:pic>
-      <p:sp>
-        <p:nvSpPr>
-          <p:cNvPr id="7" name="TextBox 6"/>
+          <p:cNvPr id="5" name="TextBox 4"/>
           <p:cNvSpPr txBox="1"/>
           <p:nvPr/>
         </p:nvSpPr>
         <p:spPr>
           <a:xfrm>
-            <a:off x="5870301" y="5961888"/>
-            <a:ext cx="5864193" cy="320040"/>
-          </a:xfrm>
-          <a:prstGeom prst="rect">
-            <a:avLst/>
-          </a:prstGeom>
-          <a:noFill/>
-        </p:spPr>
-        <p:txBody>
-          <a:bodyPr wrap="square">
-            <a:spAutoFit/>
-          </a:bodyPr>
-          <a:lstStyle/>
-          <a:p>
-            <a:pPr algn="ctr"/>
-            <a:r>
-              <a:rPr sz="1100" b="0" i="1">
-                <a:solidFill>
-                  <a:srgbClr val="666666"/>
-                </a:solidFill>
-                <a:latin typeface="Calibri"/>
-              </a:rPr>
-              <a:t>Foto: panumas nikhomkhai · Pexels</a:t>
-            </a:r>
-          </a:p>
-        </p:txBody>
-      </p:sp>
-      <p:sp>
-        <p:nvSpPr>
-          <p:cNvPr id="8" name="TextBox 7"/>
-          <p:cNvSpPr txBox="1"/>
-          <p:nvPr/>
-        </p:nvSpPr>
-        <p:spPr>
-          <a:xfrm>
-            <a:off x="457200" y="1353312"/>
-            <a:ext cx="5093061" cy="5047488"/>
+            <a:off x="457200" y="1170432"/>
+            <a:ext cx="11277295" cy="5230368"/>
           </a:xfrm>
           <a:prstGeom prst="rect">
             <a:avLst/>
@@ -8489,14 +8005,14 @@
                 </a:solidFill>
                 <a:latin typeface="Calibri"/>
               </a:rPr>
-              <a:t>–   En IaaS lo que administra el cliente es todo, desde el sistema operativo hacia arriba;</a:t>
-            </a:r>
-          </a:p>
-        </p:txBody>
-      </p:sp>
-      <p:sp>
-        <p:nvSpPr>
-          <p:cNvPr id="9" name="TextBox 8"/>
+              <a:t>–   En IaaS lo que administra el cliente es todo, desde el sistema operativo hacia arriba; en PaaS son solo la aplicacion y los datos; en SaaS es solo la configuracion y los datos que carga.</a:t>
+            </a:r>
+          </a:p>
+        </p:txBody>
+      </p:sp>
+      <p:sp>
+        <p:nvSpPr>
+          <p:cNvPr id="6" name="TextBox 5"/>
           <p:cNvSpPr txBox="1"/>
           <p:nvPr/>
         </p:nvSpPr>
@@ -9256,118 +8772,14 @@
       </p:sp>
       <p:sp>
         <p:nvSpPr>
-          <p:cNvPr id="5" name="Rounded Rectangle 4"/>
-          <p:cNvSpPr/>
-          <p:nvPr/>
-        </p:nvSpPr>
-        <p:spPr>
-          <a:xfrm>
-            <a:off x="5797149" y="1573813"/>
-            <a:ext cx="6010497" cy="4057845"/>
-          </a:xfrm>
-          <a:prstGeom prst="roundRect">
-            <a:avLst>
-              <a:gd name="adj" fmla="val 4000"/>
-            </a:avLst>
-          </a:prstGeom>
-          <a:solidFill>
-            <a:srgbClr val="E8EEF4"/>
-          </a:solidFill>
-          <a:ln>
-            <a:noFill/>
-          </a:ln>
-        </p:spPr>
-        <p:style>
-          <a:lnRef idx="1">
-            <a:schemeClr val="accent1"/>
-          </a:lnRef>
-          <a:fillRef idx="3">
-            <a:schemeClr val="accent1"/>
-          </a:fillRef>
-          <a:effectRef idx="2">
-            <a:schemeClr val="accent1"/>
-          </a:effectRef>
-          <a:fontRef idx="minor">
-            <a:schemeClr val="lt1"/>
-          </a:fontRef>
-        </p:style>
-        <p:txBody>
-          <a:bodyPr rtlCol="0" anchor="ctr"/>
-          <a:lstStyle/>
-          <a:p>
-            <a:pPr algn="ctr"/>
-          </a:p>
-        </p:txBody>
-      </p:sp>
-      <p:pic>
-        <p:nvPicPr>
-          <p:cNvPr id="6" name="Picture 5" descr="students-learning-laptops-classroom.jpg"/>
-          <p:cNvPicPr>
-            <a:picLocks noChangeAspect="1"/>
-          </p:cNvPicPr>
-          <p:nvPr/>
-        </p:nvPicPr>
-        <p:blipFill>
-          <a:blip r:embed="rId2"/>
-          <a:stretch>
-            <a:fillRect/>
-          </a:stretch>
-        </p:blipFill>
-        <p:spPr>
-          <a:xfrm>
-            <a:off x="5870301" y="1646965"/>
-            <a:ext cx="5864193" cy="3911541"/>
-          </a:xfrm>
-          <a:prstGeom prst="rect">
-            <a:avLst/>
-          </a:prstGeom>
-        </p:spPr>
-      </p:pic>
-      <p:sp>
-        <p:nvSpPr>
-          <p:cNvPr id="7" name="TextBox 6"/>
+          <p:cNvPr id="5" name="TextBox 4"/>
           <p:cNvSpPr txBox="1"/>
           <p:nvPr/>
         </p:nvSpPr>
         <p:spPr>
           <a:xfrm>
-            <a:off x="5870301" y="5961888"/>
-            <a:ext cx="5864193" cy="320040"/>
-          </a:xfrm>
-          <a:prstGeom prst="rect">
-            <a:avLst/>
-          </a:prstGeom>
-          <a:noFill/>
-        </p:spPr>
-        <p:txBody>
-          <a:bodyPr wrap="square">
-            <a:spAutoFit/>
-          </a:bodyPr>
-          <a:lstStyle/>
-          <a:p>
-            <a:pPr algn="ctr"/>
-            <a:r>
-              <a:rPr sz="1100" b="0" i="1">
-                <a:solidFill>
-                  <a:srgbClr val="666666"/>
-                </a:solidFill>
-                <a:latin typeface="Calibri"/>
-              </a:rPr>
-              <a:t>Foto: Mikhail Nilov · Pexels</a:t>
-            </a:r>
-          </a:p>
-        </p:txBody>
-      </p:sp>
-      <p:sp>
-        <p:nvSpPr>
-          <p:cNvPr id="8" name="TextBox 7"/>
-          <p:cNvSpPr txBox="1"/>
-          <p:nvPr/>
-        </p:nvSpPr>
-        <p:spPr>
-          <a:xfrm>
-            <a:off x="457200" y="1353312"/>
-            <a:ext cx="5093061" cy="5047488"/>
+            <a:off x="457200" y="1170432"/>
+            <a:ext cx="11277295" cy="5230368"/>
           </a:xfrm>
           <a:prstGeom prst="rect">
             <a:avLst/>
@@ -9467,7 +8879,7 @@
       </p:sp>
       <p:sp>
         <p:nvSpPr>
-          <p:cNvPr id="9" name="TextBox 8"/>
+          <p:cNvPr id="6" name="TextBox 5"/>
           <p:cNvSpPr txBox="1"/>
           <p:nvPr/>
         </p:nvSpPr>
@@ -9648,118 +9060,14 @@
       </p:sp>
       <p:sp>
         <p:nvSpPr>
-          <p:cNvPr id="5" name="Rounded Rectangle 4"/>
-          <p:cNvSpPr/>
-          <p:nvPr/>
-        </p:nvSpPr>
-        <p:spPr>
-          <a:xfrm>
-            <a:off x="5797149" y="1576932"/>
-            <a:ext cx="6010497" cy="4051607"/>
-          </a:xfrm>
-          <a:prstGeom prst="roundRect">
-            <a:avLst>
-              <a:gd name="adj" fmla="val 4000"/>
-            </a:avLst>
-          </a:prstGeom>
-          <a:solidFill>
-            <a:srgbClr val="E8EEF4"/>
-          </a:solidFill>
-          <a:ln>
-            <a:noFill/>
-          </a:ln>
-        </p:spPr>
-        <p:style>
-          <a:lnRef idx="1">
-            <a:schemeClr val="accent1"/>
-          </a:lnRef>
-          <a:fillRef idx="3">
-            <a:schemeClr val="accent1"/>
-          </a:fillRef>
-          <a:effectRef idx="2">
-            <a:schemeClr val="accent1"/>
-          </a:effectRef>
-          <a:fontRef idx="minor">
-            <a:schemeClr val="lt1"/>
-          </a:fontRef>
-        </p:style>
-        <p:txBody>
-          <a:bodyPr rtlCol="0" anchor="ctr"/>
-          <a:lstStyle/>
-          <a:p>
-            <a:pPr algn="ctr"/>
-          </a:p>
-        </p:txBody>
-      </p:sp>
-      <p:pic>
-        <p:nvPicPr>
-          <p:cNvPr id="6" name="Picture 5" descr="data-center-server-room.jpg"/>
-          <p:cNvPicPr>
-            <a:picLocks noChangeAspect="1"/>
-          </p:cNvPicPr>
-          <p:nvPr/>
-        </p:nvPicPr>
-        <p:blipFill>
-          <a:blip r:embed="rId2"/>
-          <a:stretch>
-            <a:fillRect/>
-          </a:stretch>
-        </p:blipFill>
-        <p:spPr>
-          <a:xfrm>
-            <a:off x="5870301" y="1650084"/>
-            <a:ext cx="5864193" cy="3905303"/>
-          </a:xfrm>
-          <a:prstGeom prst="rect">
-            <a:avLst/>
-          </a:prstGeom>
-        </p:spPr>
-      </p:pic>
-      <p:sp>
-        <p:nvSpPr>
-          <p:cNvPr id="7" name="TextBox 6"/>
+          <p:cNvPr id="5" name="TextBox 4"/>
           <p:cNvSpPr txBox="1"/>
           <p:nvPr/>
         </p:nvSpPr>
         <p:spPr>
           <a:xfrm>
-            <a:off x="5870301" y="5961888"/>
-            <a:ext cx="5864193" cy="320040"/>
-          </a:xfrm>
-          <a:prstGeom prst="rect">
-            <a:avLst/>
-          </a:prstGeom>
-          <a:noFill/>
-        </p:spPr>
-        <p:txBody>
-          <a:bodyPr wrap="square">
-            <a:spAutoFit/>
-          </a:bodyPr>
-          <a:lstStyle/>
-          <a:p>
-            <a:pPr algn="ctr"/>
-            <a:r>
-              <a:rPr sz="1100" b="0" i="1">
-                <a:solidFill>
-                  <a:srgbClr val="666666"/>
-                </a:solidFill>
-                <a:latin typeface="Calibri"/>
-              </a:rPr>
-              <a:t>Foto: panumas nikhomkhai · Pexels</a:t>
-            </a:r>
-          </a:p>
-        </p:txBody>
-      </p:sp>
-      <p:sp>
-        <p:nvSpPr>
-          <p:cNvPr id="8" name="TextBox 7"/>
-          <p:cNvSpPr txBox="1"/>
-          <p:nvPr/>
-        </p:nvSpPr>
-        <p:spPr>
-          <a:xfrm>
-            <a:off x="457200" y="1353312"/>
-            <a:ext cx="5093061" cy="5047488"/>
+            <a:off x="457200" y="1170432"/>
+            <a:ext cx="11277295" cy="5230368"/>
           </a:xfrm>
           <a:prstGeom prst="rect">
             <a:avLst/>
@@ -9823,7 +9131,7 @@
       </p:sp>
       <p:sp>
         <p:nvSpPr>
-          <p:cNvPr id="9" name="TextBox 8"/>
+          <p:cNvPr id="6" name="TextBox 5"/>
           <p:cNvSpPr txBox="1"/>
           <p:nvPr/>
         </p:nvSpPr>
@@ -12277,118 +11585,14 @@
       </p:sp>
       <p:sp>
         <p:nvSpPr>
-          <p:cNvPr id="5" name="Rounded Rectangle 4"/>
-          <p:cNvSpPr/>
-          <p:nvPr/>
-        </p:nvSpPr>
-        <p:spPr>
-          <a:xfrm>
-            <a:off x="5797149" y="1576932"/>
-            <a:ext cx="6010497" cy="4051607"/>
-          </a:xfrm>
-          <a:prstGeom prst="roundRect">
-            <a:avLst>
-              <a:gd name="adj" fmla="val 4000"/>
-            </a:avLst>
-          </a:prstGeom>
-          <a:solidFill>
-            <a:srgbClr val="E8EEF4"/>
-          </a:solidFill>
-          <a:ln>
-            <a:noFill/>
-          </a:ln>
-        </p:spPr>
-        <p:style>
-          <a:lnRef idx="1">
-            <a:schemeClr val="accent1"/>
-          </a:lnRef>
-          <a:fillRef idx="3">
-            <a:schemeClr val="accent1"/>
-          </a:fillRef>
-          <a:effectRef idx="2">
-            <a:schemeClr val="accent1"/>
-          </a:effectRef>
-          <a:fontRef idx="minor">
-            <a:schemeClr val="lt1"/>
-          </a:fontRef>
-        </p:style>
-        <p:txBody>
-          <a:bodyPr rtlCol="0" anchor="ctr"/>
-          <a:lstStyle/>
-          <a:p>
-            <a:pPr algn="ctr"/>
-          </a:p>
-        </p:txBody>
-      </p:sp>
-      <p:pic>
-        <p:nvPicPr>
-          <p:cNvPr id="6" name="Picture 5" descr="data-center-server-room.jpg"/>
-          <p:cNvPicPr>
-            <a:picLocks noChangeAspect="1"/>
-          </p:cNvPicPr>
-          <p:nvPr/>
-        </p:nvPicPr>
-        <p:blipFill>
-          <a:blip r:embed="rId2"/>
-          <a:stretch>
-            <a:fillRect/>
-          </a:stretch>
-        </p:blipFill>
-        <p:spPr>
-          <a:xfrm>
-            <a:off x="5870301" y="1650084"/>
-            <a:ext cx="5864193" cy="3905303"/>
-          </a:xfrm>
-          <a:prstGeom prst="rect">
-            <a:avLst/>
-          </a:prstGeom>
-        </p:spPr>
-      </p:pic>
-      <p:sp>
-        <p:nvSpPr>
-          <p:cNvPr id="7" name="TextBox 6"/>
+          <p:cNvPr id="5" name="TextBox 4"/>
           <p:cNvSpPr txBox="1"/>
           <p:nvPr/>
         </p:nvSpPr>
         <p:spPr>
           <a:xfrm>
-            <a:off x="5870301" y="5961888"/>
-            <a:ext cx="5864193" cy="320040"/>
-          </a:xfrm>
-          <a:prstGeom prst="rect">
-            <a:avLst/>
-          </a:prstGeom>
-          <a:noFill/>
-        </p:spPr>
-        <p:txBody>
-          <a:bodyPr wrap="square">
-            <a:spAutoFit/>
-          </a:bodyPr>
-          <a:lstStyle/>
-          <a:p>
-            <a:pPr algn="ctr"/>
-            <a:r>
-              <a:rPr sz="1100" b="0" i="1">
-                <a:solidFill>
-                  <a:srgbClr val="666666"/>
-                </a:solidFill>
-                <a:latin typeface="Calibri"/>
-              </a:rPr>
-              <a:t>Foto: panumas nikhomkhai · Pexels</a:t>
-            </a:r>
-          </a:p>
-        </p:txBody>
-      </p:sp>
-      <p:sp>
-        <p:nvSpPr>
-          <p:cNvPr id="8" name="TextBox 7"/>
-          <p:cNvSpPr txBox="1"/>
-          <p:nvPr/>
-        </p:nvSpPr>
-        <p:spPr>
-          <a:xfrm>
-            <a:off x="457200" y="1353312"/>
-            <a:ext cx="5093061" cy="5047488"/>
+            <a:off x="457200" y="1170432"/>
+            <a:ext cx="11277295" cy="5230368"/>
           </a:xfrm>
           <a:prstGeom prst="rect">
             <a:avLst/>
@@ -12431,7 +11635,7 @@
                 </a:solidFill>
                 <a:latin typeface="Calibri"/>
               </a:rPr>
-              <a:t>:</a:t>
+              <a:t>: usted administra SO/red/runtime; el proveedor da cómputo/red/disco.</a:t>
             </a:r>
           </a:p>
           <a:p>
@@ -12465,7 +11669,7 @@
                 </a:solidFill>
                 <a:latin typeface="Calibri"/>
               </a:rPr>
-              <a:t>:</a:t>
+              <a:t>: usted despliega app; el proveedor gestiona runtime/escala básica.</a:t>
             </a:r>
           </a:p>
           <a:p>
@@ -12499,7 +11703,7 @@
                 </a:solidFill>
                 <a:latin typeface="Calibri"/>
               </a:rPr>
-              <a:t>:</a:t>
+              <a:t>: consume el servicio listo (correo, CRM); poca personalización profunda.</a:t>
             </a:r>
           </a:p>
           <a:p>
@@ -12536,11 +11740,27 @@
               <a:t> con labs/navegador; no abrimos cuentas IaaS con tarjeta.</a:t>
             </a:r>
           </a:p>
-        </p:txBody>
-      </p:sp>
-      <p:sp>
-        <p:nvSpPr>
-          <p:cNvPr id="9" name="TextBox 8"/>
+          <a:p>
+            <a:pPr>
+              <a:spcAft>
+                <a:spcPts val="800"/>
+              </a:spcAft>
+            </a:pPr>
+            <a:r>
+              <a:rPr sz="2000" b="0" i="0">
+                <a:solidFill>
+                  <a:srgbClr val="333333"/>
+                </a:solidFill>
+                <a:latin typeface="Calibri"/>
+              </a:rPr>
+              <a:t>–   Ejemplos: IaaS = una máquina virtual (EC2, Droplet) · PaaS = Render, Railway, Heroku · SaaS = correo corporativo, proveedor de identidad.</a:t>
+            </a:r>
+          </a:p>
+        </p:txBody>
+      </p:sp>
+      <p:sp>
+        <p:nvSpPr>
+          <p:cNvPr id="6" name="TextBox 5"/>
           <p:cNvSpPr txBox="1"/>
           <p:nvPr/>
         </p:nvSpPr>
@@ -12721,118 +11941,14 @@
       </p:sp>
       <p:sp>
         <p:nvSpPr>
-          <p:cNvPr id="5" name="Rounded Rectangle 4"/>
-          <p:cNvSpPr/>
-          <p:nvPr/>
-        </p:nvSpPr>
-        <p:spPr>
-          <a:xfrm>
-            <a:off x="5797149" y="1573813"/>
-            <a:ext cx="6010497" cy="4057845"/>
-          </a:xfrm>
-          <a:prstGeom prst="roundRect">
-            <a:avLst>
-              <a:gd name="adj" fmla="val 4000"/>
-            </a:avLst>
-          </a:prstGeom>
-          <a:solidFill>
-            <a:srgbClr val="E8EEF4"/>
-          </a:solidFill>
-          <a:ln>
-            <a:noFill/>
-          </a:ln>
-        </p:spPr>
-        <p:style>
-          <a:lnRef idx="1">
-            <a:schemeClr val="accent1"/>
-          </a:lnRef>
-          <a:fillRef idx="3">
-            <a:schemeClr val="accent1"/>
-          </a:fillRef>
-          <a:effectRef idx="2">
-            <a:schemeClr val="accent1"/>
-          </a:effectRef>
-          <a:fontRef idx="minor">
-            <a:schemeClr val="lt1"/>
-          </a:fontRef>
-        </p:style>
-        <p:txBody>
-          <a:bodyPr rtlCol="0" anchor="ctr"/>
-          <a:lstStyle/>
-          <a:p>
-            <a:pPr algn="ctr"/>
-          </a:p>
-        </p:txBody>
-      </p:sp>
-      <p:pic>
-        <p:nvPicPr>
-          <p:cNvPr id="6" name="Picture 5" descr="team-decision-meeting-laptop.jpg"/>
-          <p:cNvPicPr>
-            <a:picLocks noChangeAspect="1"/>
-          </p:cNvPicPr>
-          <p:nvPr/>
-        </p:nvPicPr>
-        <p:blipFill>
-          <a:blip r:embed="rId2"/>
-          <a:stretch>
-            <a:fillRect/>
-          </a:stretch>
-        </p:blipFill>
-        <p:spPr>
-          <a:xfrm>
-            <a:off x="5870301" y="1646965"/>
-            <a:ext cx="5864193" cy="3911541"/>
-          </a:xfrm>
-          <a:prstGeom prst="rect">
-            <a:avLst/>
-          </a:prstGeom>
-        </p:spPr>
-      </p:pic>
-      <p:sp>
-        <p:nvSpPr>
-          <p:cNvPr id="7" name="TextBox 6"/>
+          <p:cNvPr id="5" name="TextBox 4"/>
           <p:cNvSpPr txBox="1"/>
           <p:nvPr/>
         </p:nvSpPr>
         <p:spPr>
           <a:xfrm>
-            <a:off x="5870301" y="5961888"/>
-            <a:ext cx="5864193" cy="320040"/>
-          </a:xfrm>
-          <a:prstGeom prst="rect">
-            <a:avLst/>
-          </a:prstGeom>
-          <a:noFill/>
-        </p:spPr>
-        <p:txBody>
-          <a:bodyPr wrap="square">
-            <a:spAutoFit/>
-          </a:bodyPr>
-          <a:lstStyle/>
-          <a:p>
-            <a:pPr algn="ctr"/>
-            <a:r>
-              <a:rPr sz="1100" b="0" i="1">
-                <a:solidFill>
-                  <a:srgbClr val="666666"/>
-                </a:solidFill>
-                <a:latin typeface="Calibri"/>
-              </a:rPr>
-              <a:t>Foto: Kampus Production · Pexels</a:t>
-            </a:r>
-          </a:p>
-        </p:txBody>
-      </p:sp>
-      <p:sp>
-        <p:nvSpPr>
-          <p:cNvPr id="8" name="TextBox 7"/>
-          <p:cNvSpPr txBox="1"/>
-          <p:nvPr/>
-        </p:nvSpPr>
-        <p:spPr>
-          <a:xfrm>
-            <a:off x="457200" y="1353312"/>
-            <a:ext cx="5093061" cy="5047488"/>
+            <a:off x="457200" y="1170432"/>
+            <a:ext cx="11277295" cy="5230368"/>
           </a:xfrm>
           <a:prstGeom prst="rect">
             <a:avLst/>
@@ -12926,11 +12042,45 @@
               <a:t>–   Ejemplo la app de turnos: API en PaaS, base de datos gestionada y correo como SaaS — tres modelos en un mismo sistema.</a:t>
             </a:r>
           </a:p>
-        </p:txBody>
-      </p:sp>
-      <p:sp>
-        <p:nvSpPr>
-          <p:cNvPr id="9" name="TextBox 8"/>
+          <a:p>
+            <a:pPr>
+              <a:spcAft>
+                <a:spcPts val="800"/>
+              </a:spcAft>
+            </a:pPr>
+            <a:r>
+              <a:rPr sz="2000" b="0" i="0">
+                <a:solidFill>
+                  <a:srgbClr val="333333"/>
+                </a:solidFill>
+                <a:latin typeface="Calibri"/>
+              </a:rPr>
+              <a:t>–   SaaS solo como </a:t>
+            </a:r>
+            <a:r>
+              <a:rPr sz="2000" b="1" i="0">
+                <a:solidFill>
+                  <a:srgbClr val="333333"/>
+                </a:solidFill>
+                <a:latin typeface="Calibri"/>
+              </a:rPr>
+              <a:t>satélite</a:t>
+            </a:r>
+            <a:r>
+              <a:rPr sz="2000" b="0" i="0">
+                <a:solidFill>
+                  <a:srgbClr val="333333"/>
+                </a:solidFill>
+                <a:latin typeface="Calibri"/>
+              </a:rPr>
+              <a:t> (auth, email, analytics) — no como toda la app.</a:t>
+            </a:r>
+          </a:p>
+        </p:txBody>
+      </p:sp>
+      <p:sp>
+        <p:nvSpPr>
+          <p:cNvPr id="6" name="TextBox 5"/>
           <p:cNvSpPr txBox="1"/>
           <p:nvPr/>
         </p:nvSpPr>

--- a/Arquitectura de Sistemas Computacionales/Clases/Clase 2 - Modelos de servicio IaaS PaaS SaaS/Presentacion.pptx
+++ b/Arquitectura de Sistemas Computacionales/Clases/Clase 2 - Modelos de servicio IaaS PaaS SaaS/Presentacion.pptx
@@ -936,61 +936,37 @@
           <a:lstStyle/>
           <a:p>
             <a:r>
-              <a:t>DESARROLLO (para explicarlo, no se proyecta):</a:t>
+              <a:t>TEXTO COMPLETO DE LA LÁMINA (se proyecta resumido):</a:t>
             </a:r>
           </a:p>
           <a:p/>
           <a:p>
             <a:r>
-              <a:t>El proveedor garantiza que el centro de datos no se incendie, que la capa de virtualizacion este parcheada y que los discos esten cifrados en reposo; el cliente sigue siendo responsable de sus contrasenas, sus permisos, sus datos y su configuracion.</a:t>
+              <a:t>IaaS: usted administra SO/red/runtime; el proveedor da cómputo/red/disco.</a:t>
             </a:r>
           </a:p>
           <a:p/>
           <a:p>
             <a:r>
-              <a:t>Importa porque la causa dominante de los incidentes de seguridad en la nube no son fallas del proveedor sino configuraciones erradas del cliente: un almacenamiento de archivos dejado publico</a:t>
+              <a:t>PaaS: usted despliega app; el proveedor gestiona runtime/escala básica.</a:t>
             </a:r>
           </a:p>
           <a:p/>
           <a:p>
             <a:r>
-              <a:t>Una credencial subida al repositorio en texto plano, un puerto de base de datos expuesto a internet.</a:t>
+              <a:t>SaaS: consume el servicio listo (correo, CRM); poca personalización profunda.</a:t>
             </a:r>
           </a:p>
           <a:p/>
           <a:p>
             <a:r>
-              <a:t>Para CloudLite la mitigacion no es evitar SaaS sino acotarlo: si el envio de correos se encapsula detras de una interfaz propia, por ejemplo un modulo Notificador con un solo metodo enviar, cambiar de proveedor toca un archivo y no cuarenta.</a:t>
+              <a:t>En este curso simulamos con labs/navegador; no abrimos cuentas IaaS con tarjeta.</a:t>
             </a:r>
           </a:p>
           <a:p/>
           <a:p>
             <a:r>
-              <a:t>NOTAS:</a:t>
-            </a:r>
-          </a:p>
-          <a:p/>
-          <a:p>
-            <a:r>
-              <a:t>De ahi sale el trade-off central, que se escribe como regla practica: a mas abstraccion, menos control y menos trabajo operativo.</a:t>
-            </a:r>
-          </a:p>
-          <a:p/>
-          <a:p>
-            <a:r>
-              <a:t>(No se proyecta) El concepto que unifica todo esto se llama modelo de responsabilidad compartida y se resume en una frase que conviene memorizar: el proveedor es responsable de la seguridad DE la nube y el cliente de la seguridad EN la nube.</a:t>
-            </a:r>
-          </a:p>
-          <a:p/>
-          <a:p>
-            <a:r>
-              <a:t>(No se proyecta) Subir de IaaS a PaaS reduce la superficie de responsabilidad del cliente, pero nunca la elimina, y esa idea es el punto de partida literal de la Clase 6.</a:t>
-            </a:r>
-          </a:p>
-          <a:p/>
-          <a:p>
-            <a:r>
-              <a:t>(No se proyecta) Pero hay un tercer eje que el estudiante no ve solo, el amarre al proveedor o vendor lock-in, que es el costo de mudarse a otro proveedor mas adelante: bajo en IaaS, porque una maquina virtual con Linux se parece a cualquier otra; medio en PaaS, porque el archivo de configuracion y algunos servicios son propietarios; potencialmente alto en SaaS, porque los datos y parte de la logica viven dentro de un producto ajeno.</a:t>
+              <a:t>Ejemplos: IaaS = una máquina virtual (EC2, Droplet) · PaaS = Render, Railway, Heroku · SaaS = correo corporativo, proveedor de identidad.</a:t>
             </a:r>
           </a:p>
         </p:txBody>
@@ -1060,121 +1036,37 @@
           <a:lstStyle/>
           <a:p>
             <a:r>
-              <a:t>DESARROLLO (para explicarlo, no se proyecta):</a:t>
+              <a:t>TEXTO COMPLETO DE LA LÁMINA (se proyecta resumido):</a:t>
             </a:r>
           </a:p>
           <a:p/>
           <a:p>
             <a:r>
-              <a:t>La decision se registra en el ADR-001.</a:t>
+              <a:t>Pregunte: ¿necesito controlar red/SO o solo desplegar API+datos?</a:t>
             </a:r>
           </a:p>
           <a:p/>
           <a:p>
             <a:r>
-              <a:t>Un ADR (Architecture Decision Record, registro de decision arquitectonica) es un documento corto, de media pagina a una pagina, que registra UNA sola decision.</a:t>
+              <a:t>Para un MVP académico suele ganar PaaS conceptual + contenedores (portable).</a:t>
             </a:r>
           </a:p>
           <a:p/>
           <a:p>
             <a:r>
-              <a:t>En este curso tiene SEIS secciones rotuladas, siempre las mismas y en este orden,: 1) Titulo, con el numero consecutivo del ADR; 2) Estado</a:t>
+              <a:t>Si el dominio exige mucho control de red → justifique IaaS *simulado* en diagrama.</a:t>
             </a:r>
           </a:p>
           <a:p/>
           <a:p>
             <a:r>
-              <a:t>Que hoy es «Aceptado» mas la fecha de la sesion; 3) Contexto, o sea las restricciones bajo las que se decide; 4) Decision, en una sola frase y con un unico modelo dominante</a:t>
+              <a:t>Ejemplo CloudLite Turnos: API en PaaS, base de datos gestionada y correo como SaaS — tres modelos en un mismo sistema.</a:t>
             </a:r>
           </a:p>
           <a:p/>
           <a:p>
             <a:r>
-              <a:t>5) Alternativas descartadas, exactamente dos y con el motivo atado al dominio; 6) Consecuencias, con lo bueno y lo malo que se acepta.</a:t>
-            </a:r>
-          </a:p>
-          <a:p/>
-          <a:p>
-            <a:r>
-              <a:t>La regla de una decision por documento no es burocracia: es lo que permite que meses despues alguien lea por que se eligio algo sin depender de la memoria de nadie.</a:t>
-            </a:r>
-          </a:p>
-          <a:p/>
-          <a:p>
-            <a:r>
-              <a:t>En DECISION va una frase: la aplicacion de CloudLite Turnos se despliega sobre PaaS.</a:t>
-            </a:r>
-          </a:p>
-          <a:p/>
-          <a:p>
-            <a:r>
-              <a:t>En ALTERNATIVAS DESCARTADAS van dos y solo dos: IaaS con maquina virtual propia, descartada porque habria que asumir parches y respaldos del sistema operativo sin tiempo para ello</a:t>
-            </a:r>
-          </a:p>
-          <a:p/>
-          <a:p>
-            <a:r>
-              <a:t>Y SaaS de agendamiento ya existente, descartada porque el proyecto perderia su objeto, ya que no habria arquitectura que disenar sino solo configuracion.</a:t>
-            </a:r>
-          </a:p>
-          <a:p/>
-          <a:p>
-            <a:r>
-              <a:t>NOTAS:</a:t>
-            </a:r>
-          </a:p>
-          <a:p/>
-          <a:p>
-            <a:r>
-              <a:t>Eso es contexto: son restricciones, no teoria.</a:t>
-            </a:r>
-          </a:p>
-          <a:p/>
-          <a:p>
-            <a:r>
-              <a:t>Que identidad y correo se consuman como SaaS satelite se aclara aqui y no en la decision, porque el modelo dominante se refiere a la aplicacion propia.</a:t>
-            </a:r>
-          </a:p>
-          <a:p/>
-          <a:p>
-            <a:r>
-              <a:t>(No se proyecta) El reparto en la plataforma es que las cinco primeras van en la pregunta 6 y la sexta en la pregunta 7, pero es UN solo documento, y conviene decirlo en voz alta porque el estudiante que lo entienda como dos ejercicios sueltos repite la decision en las consecuencias y pierde puntos.</a:t>
-            </a:r>
-          </a:p>
-          <a:p/>
-          <a:p>
-            <a:r>
-              <a:t>(No se proyecta) No hay seccion de «opciones consideradas»: ese analisis es la matriz de la pregunta 5, y en el ADR solo quedan las dos alternativas que se descartaron.</a:t>
-            </a:r>
-          </a:p>
-          <a:p/>
-          <a:p>
-            <a:r>
-              <a:t>(No se proyecta) Conviene mostrar la diferencia entre contexto y analisis con el ejemplo, porque es donde se pierde la seccion 3 completa.</a:t>
-            </a:r>
-          </a:p>
-          <a:p/>
-          <a:p>
-            <a:r>
-              <a:t>(No se proyecta) Un ADR-001 aceptable para CloudLite Turnos diria en CONTEXTO: la barberia agenda por mensajeria y pierde alrededor de tres turnos diarios por doble reserva; el proyecto lo sostiene un desarrollador (o un equipo de dos o tres, si el docente lo autorizo) durante doce semanas, sin presupuesto ni tarjeta de credito, y el sistema tiene que estar disponible el dia de la sustentacion.</a:t>
-            </a:r>
-          </a:p>
-          <a:p/>
-          <a:p>
-            <a:r>
-              <a:t>(No se proyecta) «Existen tres modelos de servicio y hay que elegir uno» NO es contexto, es el apunte de clase, y esa confusion es el error dominante de la pregunta 6.</a:t>
-            </a:r>
-          </a:p>
-          <a:p/>
-          <a:p>
-            <a:r>
-              <a:t>(No se proyecta) La prueba que el docente puede aplicar en voz alta mientras pasa por los grupos es una sola: si del contexto no se puede deducir por que se descarta IaaS, todavia no es contexto.</a:t>
-            </a:r>
-          </a:p>
-          <a:p/>
-          <a:p>
-            <a:r>
-              <a:t>(No se proyecta) Y en CONSECUENCIAS, que es la seccion que los estudiantes dejan a medias, deben aparecer tambien las malas: se acepta un arranque en frio de varios segundos tras inactividad, se acepta no poder afinar el sistema operativo y se acepta un amarre medio al proveedor, mitigado con contenedores.</a:t>
+              <a:t>SaaS solo como satélite (auth, email, analytics) — no como toda la app.</a:t>
             </a:r>
           </a:p>
         </p:txBody>
@@ -1242,6 +1134,462 @@
         <p:txBody>
           <a:bodyPr/>
           <a:lstStyle/>
+          <a:p>
+            <a:r>
+              <a:t>TEXTO COMPLETO DE LA LÁMINA (se proyecta resumido):</a:t>
+            </a:r>
+          </a:p>
+          <a:p/>
+          <a:p>
+            <a:r>
+              <a:t>Regla que hay que memorizar: el proveedor responde por la seguridad DE la nube (centro de datos, hipervisor, cifrado en reposo); usted responde por la seguridad EN la nube (contraseñas, permisos, datos, configuración).</a:t>
+            </a:r>
+          </a:p>
+          <a:p/>
+          <a:p>
+            <a:r>
+              <a:t>La causa dominante de incidentes en la nube no es una falla del proveedor: es una configuración del cliente (un bucket público, una credencial en el repo, un puerto de base de datos expuesto).</a:t>
+            </a:r>
+          </a:p>
+          <a:p/>
+          <a:p>
+            <a:r>
+              <a:t>Vendor lock-in (costo de mudarse de proveedor): bajo en IaaS (una VM Linux se parece a cualquier otra) · medio en PaaS (el archivo de configuración y algún servicio son propietarios) · potencialmente alto en SaaS (datos y lógica viven dentro del producto ajeno).</a:t>
+            </a:r>
+          </a:p>
+          <a:p/>
+          <a:p>
+            <a:r>
+              <a:t>Mitigación para CloudLite: no evitar SaaS, acotarlo — si el envío de correos vive detrás de una interfaz propia (`Notificador.enviar()`), cambiar de proveedor toca un archivo, no cuarenta.</a:t>
+            </a:r>
+          </a:p>
+          <a:p/>
+          <a:p>
+            <a:r>
+              <a:t>DESARROLLO (para explicarlo, no se proyecta):</a:t>
+            </a:r>
+          </a:p>
+          <a:p/>
+          <a:p>
+            <a:r>
+              <a:t>El proveedor garantiza que el centro de datos no se incendie, que la capa de virtualizacion este parcheada y que los discos esten cifrados en reposo; el cliente sigue siendo responsable de sus contrasenas, sus permisos, sus datos y su configuracion.</a:t>
+            </a:r>
+          </a:p>
+          <a:p/>
+          <a:p>
+            <a:r>
+              <a:t>Importa porque la causa dominante de los incidentes de seguridad en la nube no son fallas del proveedor sino configuraciones erradas del cliente: un almacenamiento de archivos dejado publico</a:t>
+            </a:r>
+          </a:p>
+          <a:p/>
+          <a:p>
+            <a:r>
+              <a:t>Una credencial subida al repositorio en texto plano, un puerto de base de datos expuesto a internet.</a:t>
+            </a:r>
+          </a:p>
+          <a:p/>
+          <a:p>
+            <a:r>
+              <a:t>Para CloudLite la mitigacion no es evitar SaaS sino acotarlo: si el envio de correos se encapsula detras de una interfaz propia, por ejemplo un modulo Notificador con un solo metodo enviar, cambiar de proveedor toca un archivo y no cuarenta.</a:t>
+            </a:r>
+          </a:p>
+          <a:p/>
+          <a:p>
+            <a:r>
+              <a:t>NOTAS:</a:t>
+            </a:r>
+          </a:p>
+          <a:p/>
+          <a:p>
+            <a:r>
+              <a:t>De ahi sale el trade-off central, que se escribe como regla practica: a mas abstraccion, menos control y menos trabajo operativo.</a:t>
+            </a:r>
+          </a:p>
+          <a:p/>
+          <a:p>
+            <a:r>
+              <a:t>(No se proyecta) El concepto que unifica todo esto se llama modelo de responsabilidad compartida y se resume en una frase que conviene memorizar: el proveedor es responsable de la seguridad DE la nube y el cliente de la seguridad EN la nube.</a:t>
+            </a:r>
+          </a:p>
+          <a:p/>
+          <a:p>
+            <a:r>
+              <a:t>(No se proyecta) Subir de IaaS a PaaS reduce la superficie de responsabilidad del cliente, pero nunca la elimina, y esa idea es el punto de partida literal de la Clase 6.</a:t>
+            </a:r>
+          </a:p>
+          <a:p/>
+          <a:p>
+            <a:r>
+              <a:t>(No se proyecta) Pero hay un tercer eje que el estudiante no ve solo, el amarre al proveedor o vendor lock-in, que es el costo de mudarse a otro proveedor mas adelante: bajo en IaaS, porque una maquina virtual con Linux se parece a cualquier otra; medio en PaaS, porque el archivo de configuracion y algunos servicios son propietarios; potencialmente alto en SaaS, porque los datos y parte de la logica viven dentro de un producto ajeno.</a:t>
+            </a:r>
+          </a:p>
+        </p:txBody>
+      </p:sp>
+      <p:sp>
+        <p:nvSpPr>
+          <p:cNvPr id="4" name="Slide Number Placeholder 3"/>
+          <p:cNvSpPr>
+            <a:spLocks noGrp="1"/>
+          </p:cNvSpPr>
+          <p:nvPr>
+            <p:ph type="sldNum" idx="5" sz="quarter"/>
+          </p:nvPr>
+        </p:nvSpPr>
+        <p:spPr/>
+      </p:sp>
+    </p:spTree>
+  </p:cSld>
+  <p:clrMapOvr>
+    <a:masterClrMapping/>
+  </p:clrMapOvr>
+</p:notes>
+</file>
+
+<file path=ppt/notesSlides/notesSlide7.xml><?xml version="1.0" encoding="utf-8"?>
+<p:notes xmlns:a="http://schemas.openxmlformats.org/drawingml/2006/main" xmlns:p="http://schemas.openxmlformats.org/presentationml/2006/main" xmlns:r="http://schemas.openxmlformats.org/officeDocument/2006/relationships">
+  <p:cSld>
+    <p:spTree>
+      <p:nvGrpSpPr>
+        <p:cNvPr id="1" name=""/>
+        <p:cNvGrpSpPr/>
+        <p:nvPr/>
+      </p:nvGrpSpPr>
+      <p:grpSpPr>
+        <a:xfrm>
+          <a:off x="0" y="0"/>
+          <a:ext cx="0" cy="0"/>
+          <a:chOff x="0" y="0"/>
+          <a:chExt cx="0" cy="0"/>
+        </a:xfrm>
+      </p:grpSpPr>
+      <p:sp>
+        <p:nvSpPr>
+          <p:cNvPr id="2" name="Slide Image Placeholder 1"/>
+          <p:cNvSpPr>
+            <a:spLocks noGrp="1"/>
+          </p:cNvSpPr>
+          <p:nvPr>
+            <p:ph type="sldImg" idx="2"/>
+          </p:nvPr>
+        </p:nvSpPr>
+        <p:spPr/>
+      </p:sp>
+      <p:sp>
+        <p:nvSpPr>
+          <p:cNvPr id="3" name="Notes Placeholder 2"/>
+          <p:cNvSpPr>
+            <a:spLocks noGrp="1"/>
+          </p:cNvSpPr>
+          <p:nvPr>
+            <p:ph type="body" idx="3" sz="quarter"/>
+          </p:nvPr>
+        </p:nvSpPr>
+        <p:spPr/>
+        <p:txBody>
+          <a:bodyPr/>
+          <a:lstStyle/>
+          <a:p>
+            <a:r>
+              <a:t>DESARROLLO (para explicarlo, no se proyecta):</a:t>
+            </a:r>
+          </a:p>
+          <a:p/>
+          <a:p>
+            <a:r>
+              <a:t>La decision se registra en el ADR-001.</a:t>
+            </a:r>
+          </a:p>
+          <a:p/>
+          <a:p>
+            <a:r>
+              <a:t>Un ADR (Architecture Decision Record, registro de decision arquitectonica) es un documento corto, de media pagina a una pagina, que registra UNA sola decision.</a:t>
+            </a:r>
+          </a:p>
+          <a:p/>
+          <a:p>
+            <a:r>
+              <a:t>En este curso tiene SEIS secciones rotuladas, siempre las mismas y en este orden,: 1) Titulo, con el numero consecutivo del ADR; 2) Estado</a:t>
+            </a:r>
+          </a:p>
+          <a:p/>
+          <a:p>
+            <a:r>
+              <a:t>Que hoy es «Aceptado» mas la fecha de la sesion; 3) Contexto, o sea las restricciones bajo las que se decide; 4) Decision, en una sola frase y con un unico modelo dominante</a:t>
+            </a:r>
+          </a:p>
+          <a:p/>
+          <a:p>
+            <a:r>
+              <a:t>5) Alternativas descartadas, exactamente dos y con el motivo atado al dominio; 6) Consecuencias, con lo bueno y lo malo que se acepta.</a:t>
+            </a:r>
+          </a:p>
+          <a:p/>
+          <a:p>
+            <a:r>
+              <a:t>La regla de una decision por documento no es burocracia: es lo que permite que meses despues alguien lea por que se eligio algo sin depender de la memoria de nadie.</a:t>
+            </a:r>
+          </a:p>
+          <a:p/>
+          <a:p>
+            <a:r>
+              <a:t>En DECISION va una frase: la aplicacion de CloudLite Turnos se despliega sobre PaaS.</a:t>
+            </a:r>
+          </a:p>
+          <a:p/>
+          <a:p>
+            <a:r>
+              <a:t>En ALTERNATIVAS DESCARTADAS van dos y solo dos: IaaS con maquina virtual propia, descartada porque habria que asumir parches y respaldos del sistema operativo sin tiempo para ello</a:t>
+            </a:r>
+          </a:p>
+          <a:p/>
+          <a:p>
+            <a:r>
+              <a:t>Y SaaS de agendamiento ya existente, descartada porque el proyecto perderia su objeto, ya que no habria arquitectura que disenar sino solo configuracion.</a:t>
+            </a:r>
+          </a:p>
+          <a:p/>
+          <a:p>
+            <a:r>
+              <a:t>NOTAS:</a:t>
+            </a:r>
+          </a:p>
+          <a:p/>
+          <a:p>
+            <a:r>
+              <a:t>Eso es contexto: son restricciones, no teoria.</a:t>
+            </a:r>
+          </a:p>
+          <a:p/>
+          <a:p>
+            <a:r>
+              <a:t>Que identidad y correo se consuman como SaaS satelite se aclara aqui y no en la decision, porque el modelo dominante se refiere a la aplicacion propia.</a:t>
+            </a:r>
+          </a:p>
+          <a:p/>
+          <a:p>
+            <a:r>
+              <a:t>(No se proyecta) El reparto en la plataforma es que las cinco primeras van en la pregunta 6 y la sexta en la pregunta 7, pero es UN solo documento, y conviene decirlo en voz alta porque el estudiante que lo entienda como dos ejercicios sueltos repite la decision en las consecuencias y pierde puntos.</a:t>
+            </a:r>
+          </a:p>
+          <a:p/>
+          <a:p>
+            <a:r>
+              <a:t>(No se proyecta) No hay seccion de «opciones consideradas»: ese analisis es la matriz de la pregunta 5, y en el ADR solo quedan las dos alternativas que se descartaron.</a:t>
+            </a:r>
+          </a:p>
+          <a:p/>
+          <a:p>
+            <a:r>
+              <a:t>(No se proyecta) Conviene mostrar la diferencia entre contexto y analisis con el ejemplo, porque es donde se pierde la seccion 3 completa.</a:t>
+            </a:r>
+          </a:p>
+          <a:p/>
+          <a:p>
+            <a:r>
+              <a:t>(No se proyecta) Un ADR-001 aceptable para CloudLite Turnos diria en CONTEXTO: la barberia agenda por mensajeria y pierde alrededor de tres turnos diarios por doble reserva; el proyecto lo sostiene un desarrollador (o un equipo de dos o tres, si el docente lo autorizo) durante doce semanas, sin presupuesto ni tarjeta de credito, y el sistema tiene que estar disponible el dia de la sustentacion.</a:t>
+            </a:r>
+          </a:p>
+          <a:p/>
+          <a:p>
+            <a:r>
+              <a:t>(No se proyecta) «Existen tres modelos de servicio y hay que elegir uno» NO es contexto, es el apunte de clase, y esa confusion es el error dominante de la pregunta 6.</a:t>
+            </a:r>
+          </a:p>
+          <a:p/>
+          <a:p>
+            <a:r>
+              <a:t>(No se proyecta) La prueba que el docente puede aplicar en voz alta mientras pasa por los grupos es una sola: si del contexto no se puede deducir por que se descarta IaaS, todavia no es contexto.</a:t>
+            </a:r>
+          </a:p>
+          <a:p/>
+          <a:p>
+            <a:r>
+              <a:t>(No se proyecta) Y en CONSECUENCIAS, que es la seccion que los estudiantes dejan a medias, deben aparecer tambien las malas: se acepta un arranque en frio de varios segundos tras inactividad, se acepta no poder afinar el sistema operativo y se acepta un amarre medio al proveedor, mitigado con contenedores.</a:t>
+            </a:r>
+          </a:p>
+        </p:txBody>
+      </p:sp>
+      <p:sp>
+        <p:nvSpPr>
+          <p:cNvPr id="4" name="Slide Number Placeholder 3"/>
+          <p:cNvSpPr>
+            <a:spLocks noGrp="1"/>
+          </p:cNvSpPr>
+          <p:nvPr>
+            <p:ph type="sldNum" idx="5" sz="quarter"/>
+          </p:nvPr>
+        </p:nvSpPr>
+        <p:spPr/>
+      </p:sp>
+    </p:spTree>
+  </p:cSld>
+  <p:clrMapOvr>
+    <a:masterClrMapping/>
+  </p:clrMapOvr>
+</p:notes>
+</file>
+
+<file path=ppt/notesSlides/notesSlide8.xml><?xml version="1.0" encoding="utf-8"?>
+<p:notes xmlns:a="http://schemas.openxmlformats.org/drawingml/2006/main" xmlns:p="http://schemas.openxmlformats.org/presentationml/2006/main" xmlns:r="http://schemas.openxmlformats.org/officeDocument/2006/relationships">
+  <p:cSld>
+    <p:spTree>
+      <p:nvGrpSpPr>
+        <p:cNvPr id="1" name=""/>
+        <p:cNvGrpSpPr/>
+        <p:nvPr/>
+      </p:nvGrpSpPr>
+      <p:grpSpPr>
+        <a:xfrm>
+          <a:off x="0" y="0"/>
+          <a:ext cx="0" cy="0"/>
+          <a:chOff x="0" y="0"/>
+          <a:chExt cx="0" cy="0"/>
+        </a:xfrm>
+      </p:grpSpPr>
+      <p:sp>
+        <p:nvSpPr>
+          <p:cNvPr id="2" name="Slide Image Placeholder 1"/>
+          <p:cNvSpPr>
+            <a:spLocks noGrp="1"/>
+          </p:cNvSpPr>
+          <p:nvPr>
+            <p:ph type="sldImg" idx="2"/>
+          </p:nvPr>
+        </p:nvSpPr>
+        <p:spPr/>
+      </p:sp>
+      <p:sp>
+        <p:nvSpPr>
+          <p:cNvPr id="3" name="Notes Placeholder 2"/>
+          <p:cNvSpPr>
+            <a:spLocks noGrp="1"/>
+          </p:cNvSpPr>
+          <p:nvPr>
+            <p:ph type="body" idx="3" sz="quarter"/>
+          </p:nvPr>
+        </p:nvSpPr>
+        <p:spPr/>
+        <p:txBody>
+          <a:bodyPr/>
+          <a:lstStyle/>
+          <a:p>
+            <a:r>
+              <a:t>TEXTO COMPLETO DE LA LÁMINA (se proyecta resumido):</a:t>
+            </a:r>
+          </a:p>
+          <a:p/>
+          <a:p>
+            <a:r>
+              <a:t>6 secciones rotuladas: Título · Estado · Contexto · Decisión · Alternativas descartadas · Consecuencias.</a:t>
+            </a:r>
+          </a:p>
+          <a:p/>
+          <a:p>
+            <a:r>
+              <a:t>Título: «ADR-001 Modelo de servicio dominante de CloudLite App».  Estado: Aceptado + fecha de hoy.</a:t>
+            </a:r>
+          </a:p>
+          <a:p/>
+          <a:p>
+            <a:r>
+              <a:t>Contexto = las restricciones (quién lo sostiene, cuánto tiempo, qué presupuesto), no el resumen del tema.</a:t>
+            </a:r>
+          </a:p>
+          <a:p/>
+          <a:p>
+            <a:r>
+              <a:t>Decisión: 1 frase, 1 modelo dominante.  Alternativas descartadas: exactamente 2, con motivo del dominio.</a:t>
+            </a:r>
+          </a:p>
+          <a:p/>
+          <a:p>
+            <a:r>
+              <a:t>Máximo 1 página: las 6 secciones son UN solo documento, y Consecuencias cierra la decisión.</a:t>
+            </a:r>
+          </a:p>
+        </p:txBody>
+      </p:sp>
+      <p:sp>
+        <p:nvSpPr>
+          <p:cNvPr id="4" name="Slide Number Placeholder 3"/>
+          <p:cNvSpPr>
+            <a:spLocks noGrp="1"/>
+          </p:cNvSpPr>
+          <p:nvPr>
+            <p:ph type="sldNum" idx="5" sz="quarter"/>
+          </p:nvPr>
+        </p:nvSpPr>
+        <p:spPr/>
+      </p:sp>
+    </p:spTree>
+  </p:cSld>
+  <p:clrMapOvr>
+    <a:masterClrMapping/>
+  </p:clrMapOvr>
+</p:notes>
+</file>
+
+<file path=ppt/notesSlides/notesSlide9.xml><?xml version="1.0" encoding="utf-8"?>
+<p:notes xmlns:a="http://schemas.openxmlformats.org/drawingml/2006/main" xmlns:p="http://schemas.openxmlformats.org/presentationml/2006/main" xmlns:r="http://schemas.openxmlformats.org/officeDocument/2006/relationships">
+  <p:cSld>
+    <p:spTree>
+      <p:nvGrpSpPr>
+        <p:cNvPr id="1" name=""/>
+        <p:cNvGrpSpPr/>
+        <p:nvPr/>
+      </p:nvGrpSpPr>
+      <p:grpSpPr>
+        <a:xfrm>
+          <a:off x="0" y="0"/>
+          <a:ext cx="0" cy="0"/>
+          <a:chOff x="0" y="0"/>
+          <a:chExt cx="0" cy="0"/>
+        </a:xfrm>
+      </p:grpSpPr>
+      <p:sp>
+        <p:nvSpPr>
+          <p:cNvPr id="2" name="Slide Image Placeholder 1"/>
+          <p:cNvSpPr>
+            <a:spLocks noGrp="1"/>
+          </p:cNvSpPr>
+          <p:nvPr>
+            <p:ph type="sldImg" idx="2"/>
+          </p:nvPr>
+        </p:nvSpPr>
+        <p:spPr/>
+      </p:sp>
+      <p:sp>
+        <p:nvSpPr>
+          <p:cNvPr id="3" name="Notes Placeholder 2"/>
+          <p:cNvSpPr>
+            <a:spLocks noGrp="1"/>
+          </p:cNvSpPr>
+          <p:nvPr>
+            <p:ph type="body" idx="3" sz="quarter"/>
+          </p:nvPr>
+        </p:nvSpPr>
+        <p:spPr/>
+        <p:txBody>
+          <a:bodyPr/>
+          <a:lstStyle/>
+          <a:p>
+            <a:r>
+              <a:t>TEXTO COMPLETO DE LA LÁMINA (se proyecta resumido):</a:t>
+            </a:r>
+          </a:p>
+          <a:p/>
+          <a:p>
+            <a:r>
+              <a:t>La pila tiene siete capas, de abajo hacia arriba: red y hardware, virtualizacion, sistema operativo, runtime, middleware, aplicacion y datos.</a:t>
+            </a:r>
+          </a:p>
+          <a:p/>
+          <a:p>
+            <a:r>
+              <a:t>En IaaS lo que administra el cliente es todo, desde el sistema operativo hacia arriba; en PaaS son solo la aplicacion y los datos; en SaaS es solo la configuracion y los datos que carga.</a:t>
+            </a:r>
+          </a:p>
+          <a:p/>
           <a:p>
             <a:r>
               <a:t>DESARROLLO (para explicarlo, no se proyecta):</a:t>
@@ -4798,14 +5146,83 @@
       </p:sp>
       <p:sp>
         <p:nvSpPr>
-          <p:cNvPr id="5" name="TextBox 4"/>
+          <p:cNvPr id="5" name="Rounded Rectangle 4"/>
+          <p:cNvSpPr/>
+          <p:nvPr/>
+        </p:nvSpPr>
+        <p:spPr>
+          <a:xfrm>
+            <a:off x="5797149" y="1343926"/>
+            <a:ext cx="6010497" cy="4837658"/>
+          </a:xfrm>
+          <a:prstGeom prst="roundRect">
+            <a:avLst>
+              <a:gd name="adj" fmla="val 4000"/>
+            </a:avLst>
+          </a:prstGeom>
+          <a:solidFill>
+            <a:srgbClr val="E8EEF4"/>
+          </a:solidFill>
+          <a:ln>
+            <a:noFill/>
+          </a:ln>
+        </p:spPr>
+        <p:style>
+          <a:lnRef idx="1">
+            <a:schemeClr val="accent1"/>
+          </a:lnRef>
+          <a:fillRef idx="3">
+            <a:schemeClr val="accent1"/>
+          </a:fillRef>
+          <a:effectRef idx="2">
+            <a:schemeClr val="accent1"/>
+          </a:effectRef>
+          <a:fontRef idx="minor">
+            <a:schemeClr val="lt1"/>
+          </a:fontRef>
+        </p:style>
+        <p:txBody>
+          <a:bodyPr rtlCol="0" anchor="ctr"/>
+          <a:lstStyle/>
+          <a:p>
+            <a:pPr algn="ctr"/>
+          </a:p>
+        </p:txBody>
+      </p:sp>
+      <p:pic>
+        <p:nvPicPr>
+          <p:cNvPr id="6" name="Picture 5" descr="ilus-responsabilidad-paso1.png"/>
+          <p:cNvPicPr>
+            <a:picLocks noChangeAspect="1"/>
+          </p:cNvPicPr>
+          <p:nvPr/>
+        </p:nvPicPr>
+        <p:blipFill>
+          <a:blip r:embed="rId2"/>
+          <a:stretch>
+            <a:fillRect/>
+          </a:stretch>
+        </p:blipFill>
+        <p:spPr>
+          <a:xfrm>
+            <a:off x="5870301" y="1417078"/>
+            <a:ext cx="5864193" cy="4691354"/>
+          </a:xfrm>
+          <a:prstGeom prst="rect">
+            <a:avLst/>
+          </a:prstGeom>
+        </p:spPr>
+      </p:pic>
+      <p:sp>
+        <p:nvSpPr>
+          <p:cNvPr id="7" name="TextBox 6"/>
           <p:cNvSpPr txBox="1"/>
           <p:nvPr/>
         </p:nvSpPr>
         <p:spPr>
           <a:xfrm>
-            <a:off x="457200" y="1170432"/>
-            <a:ext cx="11277295" cy="5230368"/>
+            <a:off x="457200" y="1353312"/>
+            <a:ext cx="5093061" cy="5047488"/>
           </a:xfrm>
           <a:prstGeom prst="rect">
             <a:avLst/>
@@ -4866,25 +5283,7 @@
                 </a:solidFill>
                 <a:latin typeface="Calibri"/>
               </a:rPr>
-              <a:t> la nube (centro de datos, hipervisor, cifrado en reposo); usted responde por la seguridad </a:t>
-            </a:r>
-            <a:r>
-              <a:rPr sz="2000" b="1" i="0">
-                <a:solidFill>
-                  <a:srgbClr val="333333"/>
-                </a:solidFill>
-                <a:latin typeface="Calibri"/>
-              </a:rPr>
-              <a:t>EN</a:t>
-            </a:r>
-            <a:r>
-              <a:rPr sz="2000" b="0" i="0">
-                <a:solidFill>
-                  <a:srgbClr val="333333"/>
-                </a:solidFill>
-                <a:latin typeface="Calibri"/>
-              </a:rPr>
-              <a:t> la nube (contraseñas, permisos, datos, configuración).</a:t>
+              <a:t> la nube (centro de datos, hipervisor, cifrado en reposo);</a:t>
             </a:r>
           </a:p>
           <a:p>
@@ -4918,7 +5317,7 @@
                 </a:solidFill>
                 <a:latin typeface="Calibri"/>
               </a:rPr>
-              <a:t> es una falla del proveedor: es una configuración del cliente (un bucket público, una credencial en el repo, un puerto de base de datos expuesto).</a:t>
+              <a:t> es una falla del proveedor: es una configuración del cliente (un bucket público, una credencial en…</a:t>
             </a:r>
           </a:p>
           <a:p>
@@ -4952,102 +5351,14 @@
                 </a:solidFill>
                 <a:latin typeface="Calibri"/>
               </a:rPr>
-              <a:t> (costo de mudarse de proveedor): </a:t>
-            </a:r>
-            <a:r>
-              <a:rPr sz="2000" b="1" i="0">
-                <a:solidFill>
-                  <a:srgbClr val="333333"/>
-                </a:solidFill>
-                <a:latin typeface="Calibri"/>
-              </a:rPr>
-              <a:t>bajo</a:t>
-            </a:r>
-            <a:r>
-              <a:rPr sz="2000" b="0" i="0">
-                <a:solidFill>
-                  <a:srgbClr val="333333"/>
-                </a:solidFill>
-                <a:latin typeface="Calibri"/>
-              </a:rPr>
-              <a:t> en IaaS (una VM Linux se parece a cualquier otra) · </a:t>
-            </a:r>
-            <a:r>
-              <a:rPr sz="2000" b="1" i="0">
-                <a:solidFill>
-                  <a:srgbClr val="333333"/>
-                </a:solidFill>
-                <a:latin typeface="Calibri"/>
-              </a:rPr>
-              <a:t>medio</a:t>
-            </a:r>
-            <a:r>
-              <a:rPr sz="2000" b="0" i="0">
-                <a:solidFill>
-                  <a:srgbClr val="333333"/>
-                </a:solidFill>
-                <a:latin typeface="Calibri"/>
-              </a:rPr>
-              <a:t> en PaaS (el archivo de configuración y algún servicio son propietarios) · </a:t>
-            </a:r>
-            <a:r>
-              <a:rPr sz="2000" b="1" i="0">
-                <a:solidFill>
-                  <a:srgbClr val="333333"/>
-                </a:solidFill>
-                <a:latin typeface="Calibri"/>
-              </a:rPr>
-              <a:t>potencialmente alto</a:t>
-            </a:r>
-            <a:r>
-              <a:rPr sz="2000" b="0" i="0">
-                <a:solidFill>
-                  <a:srgbClr val="333333"/>
-                </a:solidFill>
-                <a:latin typeface="Calibri"/>
-              </a:rPr>
-              <a:t> en SaaS (datos y lógica viven dentro del producto ajeno).</a:t>
-            </a:r>
-          </a:p>
-          <a:p>
-            <a:pPr>
-              <a:spcAft>
-                <a:spcPts val="800"/>
-              </a:spcAft>
-            </a:pPr>
-            <a:r>
-              <a:rPr sz="2000" b="0" i="0">
-                <a:solidFill>
-                  <a:srgbClr val="333333"/>
-                </a:solidFill>
-                <a:latin typeface="Calibri"/>
-              </a:rPr>
-              <a:t>–   Mitigación para la app: no evitar SaaS, </a:t>
-            </a:r>
-            <a:r>
-              <a:rPr sz="2000" b="1" i="0">
-                <a:solidFill>
-                  <a:srgbClr val="333333"/>
-                </a:solidFill>
-                <a:latin typeface="Calibri"/>
-              </a:rPr>
-              <a:t>acotarlo</a:t>
-            </a:r>
-            <a:r>
-              <a:rPr sz="2000" b="0" i="0">
-                <a:solidFill>
-                  <a:srgbClr val="333333"/>
-                </a:solidFill>
-                <a:latin typeface="Calibri"/>
-              </a:rPr>
-              <a:t> — si el envío de correos vive detrás de una interfaz propia («Notificador.enviar()»), cambiar de proveedor toca un archivo, no cuarenta.</a:t>
-            </a:r>
-          </a:p>
-        </p:txBody>
-      </p:sp>
-      <p:sp>
-        <p:nvSpPr>
-          <p:cNvPr id="6" name="TextBox 5"/>
+              <a:t> (costo de mudarse de proveedor):</a:t>
+            </a:r>
+          </a:p>
+        </p:txBody>
+      </p:sp>
+      <p:sp>
+        <p:nvSpPr>
+          <p:cNvPr id="8" name="TextBox 7"/>
           <p:cNvSpPr txBox="1"/>
           <p:nvPr/>
         </p:nvSpPr>
@@ -5343,9 +5654,33 @@
           </a:prstGeom>
         </p:spPr>
       </p:pic>
-      <p:sp>
-        <p:nvSpPr>
-          <p:cNvPr id="13" name="TextBox 12"/>
+      <p:pic>
+        <p:nvPicPr>
+          <p:cNvPr id="9" name="Picture 8" descr="adr-seis-secciones-paso4.png"/>
+          <p:cNvPicPr>
+            <a:picLocks noChangeAspect="1"/>
+          </p:cNvPicPr>
+          <p:nvPr/>
+        </p:nvPicPr>
+        <p:blipFill>
+          <a:blip r:embed="rId5"/>
+          <a:stretch>
+            <a:fillRect/>
+          </a:stretch>
+        </p:blipFill>
+        <p:spPr>
+          <a:xfrm>
+            <a:off x="5876318" y="1261872"/>
+            <a:ext cx="5852160" cy="4681728"/>
+          </a:xfrm>
+          <a:prstGeom prst="rect">
+            <a:avLst/>
+          </a:prstGeom>
+        </p:spPr>
+      </p:pic>
+      <p:sp>
+        <p:nvSpPr>
+          <p:cNvPr id="18" name="TextBox 17"/>
           <p:cNvSpPr txBox="1"/>
           <p:nvPr/>
         </p:nvSpPr>
@@ -5380,7 +5715,7 @@
       </p:sp>
       <p:sp>
         <p:nvSpPr>
-          <p:cNvPr id="14" name="TextBox 13"/>
+          <p:cNvPr id="19" name="TextBox 18"/>
           <p:cNvSpPr txBox="1"/>
           <p:nvPr/>
         </p:nvSpPr>
@@ -5451,7 +5786,7 @@
       </p:sp>
       <p:sp>
         <p:nvSpPr>
-          <p:cNvPr id="15" name="TextBox 14"/>
+          <p:cNvPr id="20" name="TextBox 19"/>
           <p:cNvSpPr txBox="1"/>
           <p:nvPr/>
         </p:nvSpPr>
@@ -5603,6 +5938,59 @@
                       </p:childTnLst>
                     </p:cTn>
                   </p:par>
+                  <p:par>
+                    <p:cTn id="13" fill="hold">
+                      <p:stCondLst>
+                        <p:cond delay="indefinite"/>
+                      </p:stCondLst>
+                      <p:childTnLst>
+                        <p:par>
+                          <p:cTn id="14" fill="hold">
+                            <p:stCondLst>
+                              <p:cond delay="0"/>
+                            </p:stCondLst>
+                            <p:childTnLst>
+                              <p:par>
+                                <p:cTn id="15" presetID="10" presetClass="entr" presetSubtype="0" fill="hold" nodeType="clickEffect">
+                                  <p:stCondLst>
+                                    <p:cond delay="0"/>
+                                  </p:stCondLst>
+                                  <p:childTnLst>
+                                    <p:set>
+                                      <p:cBhvr>
+                                        <p:cTn id="16" dur="1" fill="hold">
+                                          <p:stCondLst>
+                                            <p:cond delay="0"/>
+                                          </p:stCondLst>
+                                        </p:cTn>
+                                        <p:tgtEl>
+                                          <p:spTgt spid="9"/>
+                                        </p:tgtEl>
+                                        <p:attrNameLst>
+                                          <p:attrName>style.visibility</p:attrName>
+                                        </p:attrNameLst>
+                                      </p:cBhvr>
+                                      <p:to>
+                                        <p:strVal val="visible"/>
+                                      </p:to>
+                                    </p:set>
+                                    <p:animEffect transition="in" filter="fade">
+                                      <p:cBhvr>
+                                        <p:cTn id="17" dur="450"/>
+                                        <p:tgtEl>
+                                          <p:spTgt spid="9"/>
+                                        </p:tgtEl>
+                                      </p:cBhvr>
+                                    </p:animEffect>
+                                  </p:childTnLst>
+                                </p:cTn>
+                              </p:par>
+                            </p:childTnLst>
+                          </p:cTn>
+                        </p:par>
+                      </p:childTnLst>
+                    </p:cTn>
+                  </p:par>
                 </p:childTnLst>
               </p:cTn>
               <p:prevCondLst>
@@ -5768,14 +6156,83 @@
       </p:sp>
       <p:sp>
         <p:nvSpPr>
-          <p:cNvPr id="5" name="TextBox 4"/>
+          <p:cNvPr id="5" name="Rounded Rectangle 4"/>
+          <p:cNvSpPr/>
+          <p:nvPr/>
+        </p:nvSpPr>
+        <p:spPr>
+          <a:xfrm>
+            <a:off x="5797149" y="1343926"/>
+            <a:ext cx="6010497" cy="4837658"/>
+          </a:xfrm>
+          <a:prstGeom prst="roundRect">
+            <a:avLst>
+              <a:gd name="adj" fmla="val 4000"/>
+            </a:avLst>
+          </a:prstGeom>
+          <a:solidFill>
+            <a:srgbClr val="E8EEF4"/>
+          </a:solidFill>
+          <a:ln>
+            <a:noFill/>
+          </a:ln>
+        </p:spPr>
+        <p:style>
+          <a:lnRef idx="1">
+            <a:schemeClr val="accent1"/>
+          </a:lnRef>
+          <a:fillRef idx="3">
+            <a:schemeClr val="accent1"/>
+          </a:fillRef>
+          <a:effectRef idx="2">
+            <a:schemeClr val="accent1"/>
+          </a:effectRef>
+          <a:fontRef idx="minor">
+            <a:schemeClr val="lt1"/>
+          </a:fontRef>
+        </p:style>
+        <p:txBody>
+          <a:bodyPr rtlCol="0" anchor="ctr"/>
+          <a:lstStyle/>
+          <a:p>
+            <a:pPr algn="ctr"/>
+          </a:p>
+        </p:txBody>
+      </p:sp>
+      <p:pic>
+        <p:nvPicPr>
+          <p:cNvPr id="6" name="Picture 5" descr="ilus-plantilla-adr-paso1.png"/>
+          <p:cNvPicPr>
+            <a:picLocks noChangeAspect="1"/>
+          </p:cNvPicPr>
+          <p:nvPr/>
+        </p:nvPicPr>
+        <p:blipFill>
+          <a:blip r:embed="rId2"/>
+          <a:stretch>
+            <a:fillRect/>
+          </a:stretch>
+        </p:blipFill>
+        <p:spPr>
+          <a:xfrm>
+            <a:off x="5870301" y="1417078"/>
+            <a:ext cx="5864193" cy="4691354"/>
+          </a:xfrm>
+          <a:prstGeom prst="rect">
+            <a:avLst/>
+          </a:prstGeom>
+        </p:spPr>
+      </p:pic>
+      <p:sp>
+        <p:nvSpPr>
+          <p:cNvPr id="7" name="TextBox 6"/>
           <p:cNvSpPr txBox="1"/>
           <p:nvPr/>
         </p:nvSpPr>
         <p:spPr>
           <a:xfrm>
-            <a:off x="457200" y="1170432"/>
-            <a:ext cx="11277295" cy="5230368"/>
+            <a:off x="457200" y="1353312"/>
+            <a:ext cx="5093061" cy="5047488"/>
           </a:xfrm>
           <a:prstGeom prst="rect">
             <a:avLst/>
@@ -5907,97 +6364,11 @@
               <a:t> = las restricciones (quién lo sostiene, cuánto tiempo, qué presupuesto), no el resumen del tema.</a:t>
             </a:r>
           </a:p>
-          <a:p>
-            <a:pPr>
-              <a:spcAft>
-                <a:spcPts val="800"/>
-              </a:spcAft>
-            </a:pPr>
-            <a:r>
-              <a:rPr sz="2000" b="0" i="0">
-                <a:solidFill>
-                  <a:srgbClr val="333333"/>
-                </a:solidFill>
-                <a:latin typeface="Calibri"/>
-              </a:rPr>
-              <a:t>–   </a:t>
-            </a:r>
-            <a:r>
-              <a:rPr sz="2000" b="1" i="0">
-                <a:solidFill>
-                  <a:srgbClr val="333333"/>
-                </a:solidFill>
-                <a:latin typeface="Calibri"/>
-              </a:rPr>
-              <a:t>Decisión</a:t>
-            </a:r>
-            <a:r>
-              <a:rPr sz="2000" b="0" i="0">
-                <a:solidFill>
-                  <a:srgbClr val="333333"/>
-                </a:solidFill>
-                <a:latin typeface="Calibri"/>
-              </a:rPr>
-              <a:t>: 1 frase, 1 modelo dominante.  </a:t>
-            </a:r>
-            <a:r>
-              <a:rPr sz="2000" b="1" i="0">
-                <a:solidFill>
-                  <a:srgbClr val="333333"/>
-                </a:solidFill>
-                <a:latin typeface="Calibri"/>
-              </a:rPr>
-              <a:t>Alternativas descartadas</a:t>
-            </a:r>
-            <a:r>
-              <a:rPr sz="2000" b="0" i="0">
-                <a:solidFill>
-                  <a:srgbClr val="333333"/>
-                </a:solidFill>
-                <a:latin typeface="Calibri"/>
-              </a:rPr>
-              <a:t>: exactamente 2, con motivo del dominio.</a:t>
-            </a:r>
-          </a:p>
-          <a:p>
-            <a:pPr>
-              <a:spcAft>
-                <a:spcPts val="800"/>
-              </a:spcAft>
-            </a:pPr>
-            <a:r>
-              <a:rPr sz="2000" b="0" i="0">
-                <a:solidFill>
-                  <a:srgbClr val="333333"/>
-                </a:solidFill>
-                <a:latin typeface="Calibri"/>
-              </a:rPr>
-              <a:t>–   Máximo 1 página: las 6 secciones son UN solo documento, y </a:t>
-            </a:r>
-            <a:r>
-              <a:rPr sz="2000" b="1" i="0">
-                <a:solidFill>
-                  <a:srgbClr val="333333"/>
-                </a:solidFill>
-                <a:latin typeface="Calibri"/>
-              </a:rPr>
-              <a:t>Consecuencias</a:t>
-            </a:r>
-            <a:r>
-              <a:rPr sz="2000" b="0" i="0">
-                <a:solidFill>
-                  <a:srgbClr val="333333"/>
-                </a:solidFill>
-                <a:latin typeface="Calibri"/>
-              </a:rPr>
-              <a:t> cierra la decisión.</a:t>
-            </a:r>
-          </a:p>
-        </p:txBody>
-      </p:sp>
-      <p:sp>
-        <p:nvSpPr>
-          <p:cNvPr id="6" name="TextBox 5"/>
+        </p:txBody>
+      </p:sp>
+      <p:sp>
+        <p:nvSpPr>
+          <p:cNvPr id="8" name="TextBox 7"/>
           <p:cNvSpPr txBox="1"/>
           <p:nvPr/>
         </p:nvSpPr>
@@ -7957,14 +8328,83 @@
       </p:sp>
       <p:sp>
         <p:nvSpPr>
-          <p:cNvPr id="5" name="TextBox 4"/>
+          <p:cNvPr id="5" name="Rounded Rectangle 4"/>
+          <p:cNvSpPr/>
+          <p:nvPr/>
+        </p:nvSpPr>
+        <p:spPr>
+          <a:xfrm>
+            <a:off x="5797149" y="1343926"/>
+            <a:ext cx="6010497" cy="4837658"/>
+          </a:xfrm>
+          <a:prstGeom prst="roundRect">
+            <a:avLst>
+              <a:gd name="adj" fmla="val 4000"/>
+            </a:avLst>
+          </a:prstGeom>
+          <a:solidFill>
+            <a:srgbClr val="E8EEF4"/>
+          </a:solidFill>
+          <a:ln>
+            <a:noFill/>
+          </a:ln>
+        </p:spPr>
+        <p:style>
+          <a:lnRef idx="1">
+            <a:schemeClr val="accent1"/>
+          </a:lnRef>
+          <a:fillRef idx="3">
+            <a:schemeClr val="accent1"/>
+          </a:fillRef>
+          <a:effectRef idx="2">
+            <a:schemeClr val="accent1"/>
+          </a:effectRef>
+          <a:fontRef idx="minor">
+            <a:schemeClr val="lt1"/>
+          </a:fontRef>
+        </p:style>
+        <p:txBody>
+          <a:bodyPr rtlCol="0" anchor="ctr"/>
+          <a:lstStyle/>
+          <a:p>
+            <a:pPr algn="ctr"/>
+          </a:p>
+        </p:txBody>
+      </p:sp>
+      <p:pic>
+        <p:nvPicPr>
+          <p:cNvPr id="6" name="Picture 5" descr="ilus-pila-nombres-paso1.png"/>
+          <p:cNvPicPr>
+            <a:picLocks noChangeAspect="1"/>
+          </p:cNvPicPr>
+          <p:nvPr/>
+        </p:nvPicPr>
+        <p:blipFill>
+          <a:blip r:embed="rId2"/>
+          <a:stretch>
+            <a:fillRect/>
+          </a:stretch>
+        </p:blipFill>
+        <p:spPr>
+          <a:xfrm>
+            <a:off x="5870301" y="1417078"/>
+            <a:ext cx="5864193" cy="4691354"/>
+          </a:xfrm>
+          <a:prstGeom prst="rect">
+            <a:avLst/>
+          </a:prstGeom>
+        </p:spPr>
+      </p:pic>
+      <p:sp>
+        <p:nvSpPr>
+          <p:cNvPr id="7" name="TextBox 6"/>
           <p:cNvSpPr txBox="1"/>
           <p:nvPr/>
         </p:nvSpPr>
         <p:spPr>
           <a:xfrm>
-            <a:off x="457200" y="1170432"/>
-            <a:ext cx="11277295" cy="5230368"/>
+            <a:off x="457200" y="1353312"/>
+            <a:ext cx="5093061" cy="5047488"/>
           </a:xfrm>
           <a:prstGeom prst="rect">
             <a:avLst/>
@@ -8005,14 +8445,14 @@
                 </a:solidFill>
                 <a:latin typeface="Calibri"/>
               </a:rPr>
-              <a:t>–   En IaaS lo que administra el cliente es todo, desde el sistema operativo hacia arriba; en PaaS son solo la aplicacion y los datos; en SaaS es solo la configuracion y los datos que carga.</a:t>
-            </a:r>
-          </a:p>
-        </p:txBody>
-      </p:sp>
-      <p:sp>
-        <p:nvSpPr>
-          <p:cNvPr id="6" name="TextBox 5"/>
+              <a:t>–   En IaaS lo que administra el cliente es todo, desde el sistema operativo hacia arriba;</a:t>
+            </a:r>
+          </a:p>
+        </p:txBody>
+      </p:sp>
+      <p:sp>
+        <p:nvSpPr>
+          <p:cNvPr id="8" name="TextBox 7"/>
           <p:cNvSpPr txBox="1"/>
           <p:nvPr/>
         </p:nvSpPr>
@@ -9060,14 +9500,83 @@
       </p:sp>
       <p:sp>
         <p:nvSpPr>
-          <p:cNvPr id="5" name="TextBox 4"/>
+          <p:cNvPr id="5" name="Rounded Rectangle 4"/>
+          <p:cNvSpPr/>
+          <p:nvPr/>
+        </p:nvSpPr>
+        <p:spPr>
+          <a:xfrm>
+            <a:off x="5797149" y="1343926"/>
+            <a:ext cx="6010497" cy="4837658"/>
+          </a:xfrm>
+          <a:prstGeom prst="roundRect">
+            <a:avLst>
+              <a:gd name="adj" fmla="val 4000"/>
+            </a:avLst>
+          </a:prstGeom>
+          <a:solidFill>
+            <a:srgbClr val="E8EEF4"/>
+          </a:solidFill>
+          <a:ln>
+            <a:noFill/>
+          </a:ln>
+        </p:spPr>
+        <p:style>
+          <a:lnRef idx="1">
+            <a:schemeClr val="accent1"/>
+          </a:lnRef>
+          <a:fillRef idx="3">
+            <a:schemeClr val="accent1"/>
+          </a:fillRef>
+          <a:effectRef idx="2">
+            <a:schemeClr val="accent1"/>
+          </a:effectRef>
+          <a:fontRef idx="minor">
+            <a:schemeClr val="lt1"/>
+          </a:fontRef>
+        </p:style>
+        <p:txBody>
+          <a:bodyPr rtlCol="0" anchor="ctr"/>
+          <a:lstStyle/>
+          <a:p>
+            <a:pPr algn="ctr"/>
+          </a:p>
+        </p:txBody>
+      </p:sp>
+      <p:pic>
+        <p:nvPicPr>
+          <p:cNvPr id="6" name="Picture 5" descr="ilus-de-que-se-parte-paso1.png"/>
+          <p:cNvPicPr>
+            <a:picLocks noChangeAspect="1"/>
+          </p:cNvPicPr>
+          <p:nvPr/>
+        </p:nvPicPr>
+        <p:blipFill>
+          <a:blip r:embed="rId2"/>
+          <a:stretch>
+            <a:fillRect/>
+          </a:stretch>
+        </p:blipFill>
+        <p:spPr>
+          <a:xfrm>
+            <a:off x="5870301" y="1417078"/>
+            <a:ext cx="5864193" cy="4691354"/>
+          </a:xfrm>
+          <a:prstGeom prst="rect">
+            <a:avLst/>
+          </a:prstGeom>
+        </p:spPr>
+      </p:pic>
+      <p:sp>
+        <p:nvSpPr>
+          <p:cNvPr id="7" name="TextBox 6"/>
           <p:cNvSpPr txBox="1"/>
           <p:nvPr/>
         </p:nvSpPr>
         <p:spPr>
           <a:xfrm>
-            <a:off x="457200" y="1170432"/>
-            <a:ext cx="11277295" cy="5230368"/>
+            <a:off x="457200" y="1353312"/>
+            <a:ext cx="5093061" cy="5047488"/>
           </a:xfrm>
           <a:prstGeom prst="rect">
             <a:avLst/>
@@ -9131,7 +9640,7 @@
       </p:sp>
       <p:sp>
         <p:nvSpPr>
-          <p:cNvPr id="6" name="TextBox 5"/>
+          <p:cNvPr id="8" name="TextBox 7"/>
           <p:cNvSpPr txBox="1"/>
           <p:nvPr/>
         </p:nvSpPr>
@@ -11585,14 +12094,83 @@
       </p:sp>
       <p:sp>
         <p:nvSpPr>
-          <p:cNvPr id="5" name="TextBox 4"/>
+          <p:cNvPr id="5" name="Rounded Rectangle 4"/>
+          <p:cNvSpPr/>
+          <p:nvPr/>
+        </p:nvSpPr>
+        <p:spPr>
+          <a:xfrm>
+            <a:off x="5797149" y="1343926"/>
+            <a:ext cx="6010497" cy="4837658"/>
+          </a:xfrm>
+          <a:prstGeom prst="roundRect">
+            <a:avLst>
+              <a:gd name="adj" fmla="val 4000"/>
+            </a:avLst>
+          </a:prstGeom>
+          <a:solidFill>
+            <a:srgbClr val="E8EEF4"/>
+          </a:solidFill>
+          <a:ln>
+            <a:noFill/>
+          </a:ln>
+        </p:spPr>
+        <p:style>
+          <a:lnRef idx="1">
+            <a:schemeClr val="accent1"/>
+          </a:lnRef>
+          <a:fillRef idx="3">
+            <a:schemeClr val="accent1"/>
+          </a:fillRef>
+          <a:effectRef idx="2">
+            <a:schemeClr val="accent1"/>
+          </a:effectRef>
+          <a:fontRef idx="minor">
+            <a:schemeClr val="lt1"/>
+          </a:fontRef>
+        </p:style>
+        <p:txBody>
+          <a:bodyPr rtlCol="0" anchor="ctr"/>
+          <a:lstStyle/>
+          <a:p>
+            <a:pPr algn="ctr"/>
+          </a:p>
+        </p:txBody>
+      </p:sp>
+      <p:pic>
+        <p:nvPicPr>
+          <p:cNvPr id="6" name="Picture 5" descr="ilus-tres-modelos-paso1.png"/>
+          <p:cNvPicPr>
+            <a:picLocks noChangeAspect="1"/>
+          </p:cNvPicPr>
+          <p:nvPr/>
+        </p:nvPicPr>
+        <p:blipFill>
+          <a:blip r:embed="rId2"/>
+          <a:stretch>
+            <a:fillRect/>
+          </a:stretch>
+        </p:blipFill>
+        <p:spPr>
+          <a:xfrm>
+            <a:off x="5870301" y="1417078"/>
+            <a:ext cx="5864193" cy="4691354"/>
+          </a:xfrm>
+          <a:prstGeom prst="rect">
+            <a:avLst/>
+          </a:prstGeom>
+        </p:spPr>
+      </p:pic>
+      <p:sp>
+        <p:nvSpPr>
+          <p:cNvPr id="7" name="TextBox 6"/>
           <p:cNvSpPr txBox="1"/>
           <p:nvPr/>
         </p:nvSpPr>
         <p:spPr>
           <a:xfrm>
-            <a:off x="457200" y="1170432"/>
-            <a:ext cx="11277295" cy="5230368"/>
+            <a:off x="457200" y="1353312"/>
+            <a:ext cx="5093061" cy="5047488"/>
           </a:xfrm>
           <a:prstGeom prst="rect">
             <a:avLst/>
@@ -11740,27 +12318,11 @@
               <a:t> con labs/navegador; no abrimos cuentas IaaS con tarjeta.</a:t>
             </a:r>
           </a:p>
-          <a:p>
-            <a:pPr>
-              <a:spcAft>
-                <a:spcPts val="800"/>
-              </a:spcAft>
-            </a:pPr>
-            <a:r>
-              <a:rPr sz="2000" b="0" i="0">
-                <a:solidFill>
-                  <a:srgbClr val="333333"/>
-                </a:solidFill>
-                <a:latin typeface="Calibri"/>
-              </a:rPr>
-              <a:t>–   Ejemplos: IaaS = una máquina virtual (EC2, Droplet) · PaaS = Render, Railway, Heroku · SaaS = correo corporativo, proveedor de identidad.</a:t>
-            </a:r>
-          </a:p>
-        </p:txBody>
-      </p:sp>
-      <p:sp>
-        <p:nvSpPr>
-          <p:cNvPr id="6" name="TextBox 5"/>
+        </p:txBody>
+      </p:sp>
+      <p:sp>
+        <p:nvSpPr>
+          <p:cNvPr id="8" name="TextBox 7"/>
           <p:cNvSpPr txBox="1"/>
           <p:nvPr/>
         </p:nvSpPr>
@@ -11941,14 +12503,83 @@
       </p:sp>
       <p:sp>
         <p:nvSpPr>
-          <p:cNvPr id="5" name="TextBox 4"/>
+          <p:cNvPr id="5" name="Rounded Rectangle 4"/>
+          <p:cNvSpPr/>
+          <p:nvPr/>
+        </p:nvSpPr>
+        <p:spPr>
+          <a:xfrm>
+            <a:off x="5797149" y="1343926"/>
+            <a:ext cx="6010497" cy="4837658"/>
+          </a:xfrm>
+          <a:prstGeom prst="roundRect">
+            <a:avLst>
+              <a:gd name="adj" fmla="val 4000"/>
+            </a:avLst>
+          </a:prstGeom>
+          <a:solidFill>
+            <a:srgbClr val="E8EEF4"/>
+          </a:solidFill>
+          <a:ln>
+            <a:noFill/>
+          </a:ln>
+        </p:spPr>
+        <p:style>
+          <a:lnRef idx="1">
+            <a:schemeClr val="accent1"/>
+          </a:lnRef>
+          <a:fillRef idx="3">
+            <a:schemeClr val="accent1"/>
+          </a:fillRef>
+          <a:effectRef idx="2">
+            <a:schemeClr val="accent1"/>
+          </a:effectRef>
+          <a:fontRef idx="minor">
+            <a:schemeClr val="lt1"/>
+          </a:fontRef>
+        </p:style>
+        <p:txBody>
+          <a:bodyPr rtlCol="0" anchor="ctr"/>
+          <a:lstStyle/>
+          <a:p>
+            <a:pPr algn="ctr"/>
+          </a:p>
+        </p:txBody>
+      </p:sp>
+      <p:pic>
+        <p:nvPicPr>
+          <p:cNvPr id="6" name="Picture 5" descr="ilus-como-decidir-paso1.png"/>
+          <p:cNvPicPr>
+            <a:picLocks noChangeAspect="1"/>
+          </p:cNvPicPr>
+          <p:nvPr/>
+        </p:nvPicPr>
+        <p:blipFill>
+          <a:blip r:embed="rId2"/>
+          <a:stretch>
+            <a:fillRect/>
+          </a:stretch>
+        </p:blipFill>
+        <p:spPr>
+          <a:xfrm>
+            <a:off x="5870301" y="1417078"/>
+            <a:ext cx="5864193" cy="4691354"/>
+          </a:xfrm>
+          <a:prstGeom prst="rect">
+            <a:avLst/>
+          </a:prstGeom>
+        </p:spPr>
+      </p:pic>
+      <p:sp>
+        <p:nvSpPr>
+          <p:cNvPr id="7" name="TextBox 6"/>
           <p:cNvSpPr txBox="1"/>
           <p:nvPr/>
         </p:nvSpPr>
         <p:spPr>
           <a:xfrm>
-            <a:off x="457200" y="1170432"/>
-            <a:ext cx="11277295" cy="5230368"/>
+            <a:off x="457200" y="1353312"/>
+            <a:ext cx="5093061" cy="5047488"/>
           </a:xfrm>
           <a:prstGeom prst="rect">
             <a:avLst/>
@@ -12042,45 +12673,11 @@
               <a:t>–   Ejemplo la app de turnos: API en PaaS, base de datos gestionada y correo como SaaS — tres modelos en un mismo sistema.</a:t>
             </a:r>
           </a:p>
-          <a:p>
-            <a:pPr>
-              <a:spcAft>
-                <a:spcPts val="800"/>
-              </a:spcAft>
-            </a:pPr>
-            <a:r>
-              <a:rPr sz="2000" b="0" i="0">
-                <a:solidFill>
-                  <a:srgbClr val="333333"/>
-                </a:solidFill>
-                <a:latin typeface="Calibri"/>
-              </a:rPr>
-              <a:t>–   SaaS solo como </a:t>
-            </a:r>
-            <a:r>
-              <a:rPr sz="2000" b="1" i="0">
-                <a:solidFill>
-                  <a:srgbClr val="333333"/>
-                </a:solidFill>
-                <a:latin typeface="Calibri"/>
-              </a:rPr>
-              <a:t>satélite</a:t>
-            </a:r>
-            <a:r>
-              <a:rPr sz="2000" b="0" i="0">
-                <a:solidFill>
-                  <a:srgbClr val="333333"/>
-                </a:solidFill>
-                <a:latin typeface="Calibri"/>
-              </a:rPr>
-              <a:t> (auth, email, analytics) — no como toda la app.</a:t>
-            </a:r>
-          </a:p>
-        </p:txBody>
-      </p:sp>
-      <p:sp>
-        <p:nvSpPr>
-          <p:cNvPr id="6" name="TextBox 5"/>
+        </p:txBody>
+      </p:sp>
+      <p:sp>
+        <p:nvSpPr>
+          <p:cNvPr id="8" name="TextBox 7"/>
           <p:cNvSpPr txBox="1"/>
           <p:nvPr/>
         </p:nvSpPr>

--- a/Arquitectura de Sistemas Computacionales/Clases/Clase 2 - Modelos de servicio IaaS PaaS SaaS/Presentacion.pptx
+++ b/Arquitectura de Sistemas Computacionales/Clases/Clase 2 - Modelos de servicio IaaS PaaS SaaS/Presentacion.pptx
@@ -7931,7 +7931,7 @@
                 </a:solidFill>
                 <a:latin typeface="Consolas"/>
               </a:rPr>
-              <a:t>arquitecturar</a:t>
+              <a:t>disenar</a:t>
             </a:r>
             <a:r>
               <a:rPr sz="1600" i="0" b="0">
